--- a/Dokumentáció/StockMaster_Prezentacio.pptx
+++ b/Dokumentáció/StockMaster_Prezentacio.pptx
@@ -14,10 +14,10 @@
     <p:sldId id="259" r:id="rId5"/>
     <p:sldId id="260" r:id="rId6"/>
     <p:sldId id="269" r:id="rId7"/>
-    <p:sldId id="263" r:id="rId8"/>
-    <p:sldId id="264" r:id="rId9"/>
-    <p:sldId id="265" r:id="rId10"/>
-    <p:sldId id="266" r:id="rId11"/>
+    <p:sldId id="264" r:id="rId8"/>
+    <p:sldId id="263" r:id="rId9"/>
+    <p:sldId id="272" r:id="rId10"/>
+    <p:sldId id="273" r:id="rId11"/>
     <p:sldId id="267" r:id="rId12"/>
     <p:sldId id="270" r:id="rId13"/>
     <p:sldId id="268" r:id="rId14"/>
@@ -120,6 +120,11 @@
       </a:defRPr>
     </a:lvl9pPr>
   </p:defaultTextStyle>
+  <p:extLst>
+    <p:ext uri="{EFAFB233-063F-42B5-8137-9DF3F51BA10A}">
+      <p15:sldGuideLst xmlns:p15="http://schemas.microsoft.com/office/powerpoint/2012/main"/>
+    </p:ext>
+  </p:extLst>
 </p:presentation>
 </file>
 
@@ -205,7 +210,7 @@
           <a:p>
             <a:fld id="{DBB7823A-862C-422A-A575-936A9871EC5A}" type="datetimeFigureOut">
               <a:rPr lang="hu-HU" smtClean="0"/>
-              <a:t>2026. 03. 03.</a:t>
+              <a:t>2026. 03. 04.</a:t>
             </a:fld>
             <a:endParaRPr lang="hu-HU"/>
           </a:p>
@@ -518,7 +523,15 @@
           <a:p>
             <a:r>
               <a:rPr lang="hu-HU" dirty="0"/>
-              <a:t>A StockMaster nem csak egy szoftver, hanem egy híd a kezdő és a profi kereskedő között. Segít megérteni az árfolyammozgásokat és a piaci stratégiákat anélkül, hogy a felhasználó rögtön a saját pénzét kockáztatná.</a:t>
+              <a:t>Üdvözlünk mindenkit! Ma a StockMaster projektet mutatjuk be. Ez egy tőzsdei szimulációs és oktató platform, amit azért hoztunk létre, hogy a kezdő kereskedők kockázatmentesen, '</a:t>
+            </a:r>
+            <a:r>
+              <a:rPr lang="hu-HU" dirty="0" err="1"/>
+              <a:t>demo</a:t>
+            </a:r>
+            <a:r>
+              <a:rPr lang="hu-HU" dirty="0"/>
+              <a:t>' környezetben sajátíthassák el a pénzügyi piacok működését</a:t>
             </a:r>
           </a:p>
         </p:txBody>
@@ -540,7 +553,7 @@
           <a:p>
             <a:fld id="{7A8BB5B3-9749-486C-A43B-73D16959CA08}" type="slidenum">
               <a:rPr lang="hu-HU" smtClean="0"/>
-              <a:t>2</a:t>
+              <a:t>1</a:t>
             </a:fld>
             <a:endParaRPr lang="hu-HU"/>
           </a:p>
@@ -549,7 +562,115 @@
     </p:spTree>
     <p:extLst>
       <p:ext uri="{BB962C8B-B14F-4D97-AF65-F5344CB8AC3E}">
-        <p14:creationId xmlns:p14="http://schemas.microsoft.com/office/powerpoint/2010/main" val="2242389174"/>
+        <p14:creationId xmlns:p14="http://schemas.microsoft.com/office/powerpoint/2010/main" val="4039945171"/>
+      </p:ext>
+    </p:extLst>
+  </p:cSld>
+  <p:clrMapOvr>
+    <a:masterClrMapping/>
+  </p:clrMapOvr>
+</p:notes>
+</file>
+
+<file path=ppt/notesSlides/notesSlide10.xml><?xml version="1.0" encoding="utf-8"?>
+<p:notes xmlns:a="http://schemas.openxmlformats.org/drawingml/2006/main" xmlns:r="http://schemas.openxmlformats.org/officeDocument/2006/relationships" xmlns:p="http://schemas.openxmlformats.org/presentationml/2006/main">
+  <p:cSld>
+    <p:spTree>
+      <p:nvGrpSpPr>
+        <p:cNvPr id="1" name=""/>
+        <p:cNvGrpSpPr/>
+        <p:nvPr/>
+      </p:nvGrpSpPr>
+      <p:grpSpPr>
+        <a:xfrm>
+          <a:off x="0" y="0"/>
+          <a:ext cx="0" cy="0"/>
+          <a:chOff x="0" y="0"/>
+          <a:chExt cx="0" cy="0"/>
+        </a:xfrm>
+      </p:grpSpPr>
+      <p:sp>
+        <p:nvSpPr>
+          <p:cNvPr id="2" name="Diakép helye 1"/>
+          <p:cNvSpPr>
+            <a:spLocks noGrp="1" noRot="1" noChangeAspect="1"/>
+          </p:cNvSpPr>
+          <p:nvPr>
+            <p:ph type="sldImg"/>
+          </p:nvPr>
+        </p:nvSpPr>
+        <p:spPr/>
+      </p:sp>
+      <p:sp>
+        <p:nvSpPr>
+          <p:cNvPr id="3" name="Jegyzetek helye 2"/>
+          <p:cNvSpPr>
+            <a:spLocks noGrp="1"/>
+          </p:cNvSpPr>
+          <p:nvPr>
+            <p:ph type="body" idx="1"/>
+          </p:nvPr>
+        </p:nvSpPr>
+        <p:spPr/>
+        <p:txBody>
+          <a:bodyPr/>
+          <a:lstStyle/>
+          <a:p>
+            <a:r>
+              <a:rPr lang="hu-HU" dirty="0"/>
+              <a:t>Zárásként szeretnénk beszélni arról, hogy merre tovább. </a:t>
+            </a:r>
+            <a:r>
+              <a:rPr lang="hu-HU" b="1" dirty="0"/>
+              <a:t>Az első és legfontosabb lépés a mobilalkalmazás fejlesztése.</a:t>
+            </a:r>
+            <a:r>
+              <a:rPr lang="hu-HU" dirty="0"/>
+              <a:t> Látjuk, hogy a modern befektetők útközben is szeretnék figyelni a piacaikat, így az iOS és Android verzió kiemelt prioritás nálunk. Ezzel párhuzamosan befejezzük a felhasználói élmény finomítását, beleértve a sötét mód teljeskörű implementálását, amit a tesztelési fázisban már elkezdtünk.</a:t>
+            </a:r>
+          </a:p>
+          <a:p>
+            <a:r>
+              <a:rPr lang="hu-HU" b="1" dirty="0"/>
+              <a:t>A legnagyobb mérföldkő azonban a valós pénzes kereskedés bevezetése lesz.</a:t>
+            </a:r>
+            <a:r>
+              <a:rPr lang="hu-HU" dirty="0"/>
+              <a:t> Szeretnénk, ha a nálunk felkészült és sikeresen vizsgázott felhasználók ugyanazon a felületen, de már valódi tőkével is kamatoztathatnák a tudásukat. Ehhez brókeri kapcsolatok kiépítését és még szigorúbb biztonsági protokollokat tervezünk.</a:t>
+            </a:r>
+          </a:p>
+          <a:p>
+            <a:endParaRPr lang="hu-HU" dirty="0"/>
+          </a:p>
+        </p:txBody>
+      </p:sp>
+      <p:sp>
+        <p:nvSpPr>
+          <p:cNvPr id="4" name="Dia számának helye 3"/>
+          <p:cNvSpPr>
+            <a:spLocks noGrp="1"/>
+          </p:cNvSpPr>
+          <p:nvPr>
+            <p:ph type="sldNum" sz="quarter" idx="5"/>
+          </p:nvPr>
+        </p:nvSpPr>
+        <p:spPr/>
+        <p:txBody>
+          <a:bodyPr/>
+          <a:lstStyle/>
+          <a:p>
+            <a:fld id="{7A8BB5B3-9749-486C-A43B-73D16959CA08}" type="slidenum">
+              <a:rPr lang="hu-HU" smtClean="0"/>
+              <a:t>13</a:t>
+            </a:fld>
+            <a:endParaRPr lang="hu-HU"/>
+          </a:p>
+        </p:txBody>
+      </p:sp>
+    </p:spTree>
+    <p:extLst>
+      <p:ext uri="{BB962C8B-B14F-4D97-AF65-F5344CB8AC3E}">
+        <p14:creationId xmlns:p14="http://schemas.microsoft.com/office/powerpoint/2010/main" val="2861884942"/>
       </p:ext>
     </p:extLst>
   </p:cSld>
@@ -605,24 +726,31 @@
           <a:p>
             <a:r>
               <a:rPr lang="hu-HU" dirty="0"/>
-              <a:t>Az adatbázisunk normalizált és hierarchikus. A </a:t>
+              <a:t>A StockMaster projekt ötlete abból a felismerésből indult, hogy a tőzsdei kereskedés világa a kezdők számára gyakran átláthatatlan és rendkívül kockázatos. Sokan már az első lépéseknél elveszítik a tőkéjüket a tapasztalat hiánya miatt.</a:t>
+            </a:r>
+          </a:p>
+          <a:p>
+            <a:r>
+              <a:rPr lang="hu-HU" dirty="0"/>
+              <a:t>A mi megoldásunk egy olyan webes platform, amely '</a:t>
             </a:r>
             <a:r>
               <a:rPr lang="hu-HU" dirty="0" err="1"/>
-              <a:t>Users</a:t>
+              <a:t>demo</a:t>
             </a:r>
             <a:r>
               <a:rPr lang="hu-HU" dirty="0"/>
-              <a:t> tábla az alap, ehhez kapcsolódnak a beállítások, a statisztikák és a kereskedési pozíciók. Az </a:t>
-            </a:r>
-            <a:r>
-              <a:rPr lang="hu-HU" dirty="0" err="1"/>
-              <a:t>Assets</a:t>
-            </a:r>
+              <a:t>' pénzzel teszi lehetővé a tőzsde megismerését. A projekt lényege nem csak a vétel és eladás gombok nyomogatása, hanem a tudatos tanulás. A rendszerbe integráltunk egy oktatási modult is, ahol a felhasználók elméleti erőt meríthetnek a sikeres kereskedéshez.</a:t>
+            </a:r>
+          </a:p>
+          <a:p>
             <a:r>
               <a:rPr lang="hu-HU" dirty="0"/>
-              <a:t> tábla pedig egyfajta katalógusként működik a rendszerben elérhető eszközökhöz</a:t>
-            </a:r>
+              <a:t>Ahogy a specifikációban is rögzítettük, a szoftver egy teljes értékű szimulációs környezet. A felhasználó regisztráció után egy virtuális egyenleggel gazdálkodik, valós piaci eszközökkel kereskedhet, miközben a háttérben futó algoritmusaink folyamatosan elemzik a döntéseit. Így a StockMaster egyszerre szoftver, szimulátor és digitális mentor.</a:t>
+            </a:r>
+          </a:p>
+          <a:p>
+            <a:endParaRPr lang="hu-HU" dirty="0"/>
           </a:p>
         </p:txBody>
       </p:sp>
@@ -643,7 +771,7 @@
           <a:p>
             <a:fld id="{7A8BB5B3-9749-486C-A43B-73D16959CA08}" type="slidenum">
               <a:rPr lang="hu-HU" smtClean="0"/>
-              <a:t>6</a:t>
+              <a:t>2</a:t>
             </a:fld>
             <a:endParaRPr lang="hu-HU"/>
           </a:p>
@@ -652,7 +780,7 @@
     </p:spTree>
     <p:extLst>
       <p:ext uri="{BB962C8B-B14F-4D97-AF65-F5344CB8AC3E}">
-        <p14:creationId xmlns:p14="http://schemas.microsoft.com/office/powerpoint/2010/main" val="2238836791"/>
+        <p14:creationId xmlns:p14="http://schemas.microsoft.com/office/powerpoint/2010/main" val="2242389174"/>
       </p:ext>
     </p:extLst>
   </p:cSld>
@@ -708,7 +836,31 @@
           <a:p>
             <a:r>
               <a:rPr lang="hu-HU" dirty="0"/>
-              <a:t>A projektet szigorúan teszteltük. A kritikus funkciók, mint a regisztráció és a vétel, hibamentesen működnek. A tesztelés során találtunk kisebb vizuális hibákat az eladás funkciónál, amiket dokumentáltunk és javítottunk</a:t>
+              <a:t>Elsődleges célcsoportunk az </a:t>
+            </a:r>
+            <a:r>
+              <a:rPr lang="hu-HU" b="1" dirty="0"/>
+              <a:t>abszolút kezdők</a:t>
+            </a:r>
+            <a:r>
+              <a:rPr lang="hu-HU" dirty="0"/>
+              <a:t> köre. Azok az emberek, akik hallottak már a tőzsdéről, látják a hírekben az árfolyamokat, de félnek megtenni az első lépést, mert tartanak a pénzveszteségtől. A mi platformunk nekik ad egy biztonsági hálót. Végül, de nem utolsósorban a </a:t>
+            </a:r>
+            <a:r>
+              <a:rPr lang="hu-HU" b="1" dirty="0"/>
+              <a:t>tapasztaltabb, de óvatos kereskedőknek</a:t>
+            </a:r>
+            <a:r>
+              <a:rPr lang="hu-HU" dirty="0"/>
+              <a:t> is hasznos a program. A szoftver részletes statisztikai visszajelzései – mint a nyereségi ráta (</a:t>
+            </a:r>
+            <a:r>
+              <a:rPr lang="hu-HU" dirty="0" err="1"/>
+              <a:t>WinRate</a:t>
+            </a:r>
+            <a:r>
+              <a:rPr lang="hu-HU" dirty="0"/>
+              <a:t>) vagy az átlagos profit/veszteség számítás – segítenek nekik objektíven látni a saját teljesítményüket. A StockMaster tehát mindenkinek szól, aki a tőzsdézést nem szerencsejátéknak, hanem egy elsajátítható szakmának tekinti</a:t>
             </a:r>
           </a:p>
         </p:txBody>
@@ -730,7 +882,7 @@
           <a:p>
             <a:fld id="{7A8BB5B3-9749-486C-A43B-73D16959CA08}" type="slidenum">
               <a:rPr lang="hu-HU" smtClean="0"/>
-              <a:t>10</a:t>
+              <a:t>3</a:t>
             </a:fld>
             <a:endParaRPr lang="hu-HU"/>
           </a:p>
@@ -739,7 +891,7 @@
     </p:spTree>
     <p:extLst>
       <p:ext uri="{BB962C8B-B14F-4D97-AF65-F5344CB8AC3E}">
-        <p14:creationId xmlns:p14="http://schemas.microsoft.com/office/powerpoint/2010/main" val="4128265004"/>
+        <p14:creationId xmlns:p14="http://schemas.microsoft.com/office/powerpoint/2010/main" val="2183471811"/>
       </p:ext>
     </p:extLst>
   </p:cSld>
@@ -795,8 +947,807 @@
           <a:p>
             <a:r>
               <a:rPr lang="hu-HU" dirty="0"/>
-              <a:t>Miben más, mint a többi? Míg sok platform csak a kereskedést adja, mi az oktatást és a statisztikai elemzést is integráltuk, így a felhasználó tényleg tanul a hibáiból</a:t>
-            </a:r>
+              <a:t>Minden egy gyors </a:t>
+            </a:r>
+            <a:r>
+              <a:rPr lang="hu-HU" b="1" dirty="0"/>
+              <a:t>regisztrációval</a:t>
+            </a:r>
+            <a:r>
+              <a:rPr lang="hu-HU" dirty="0"/>
+              <a:t> kezdődik. Miután a rendszer rögzítette a felhasználót a </a:t>
+            </a:r>
+            <a:r>
+              <a:rPr lang="hu-HU" dirty="0" err="1"/>
+              <a:t>MySQL</a:t>
+            </a:r>
+            <a:r>
+              <a:rPr lang="hu-HU" dirty="0"/>
+              <a:t> adatbázisban, a belépés után azonnal a </a:t>
+            </a:r>
+            <a:r>
+              <a:rPr lang="hu-HU" b="1" dirty="0" err="1"/>
+              <a:t>Dashboardra</a:t>
+            </a:r>
+            <a:r>
+              <a:rPr lang="hu-HU" dirty="0"/>
+              <a:t> kerül. Itt egy tiszta, átlátható felület fogadja, ahol láthatja a rendelkezésére álló virtuális keretet.</a:t>
+            </a:r>
+          </a:p>
+          <a:p>
+            <a:r>
+              <a:rPr lang="hu-HU" dirty="0"/>
+              <a:t>A használat során a felhasználó a bal oldali </a:t>
+            </a:r>
+            <a:r>
+              <a:rPr lang="hu-HU" b="1" dirty="0"/>
+              <a:t>kereső fül</a:t>
+            </a:r>
+            <a:r>
+              <a:rPr lang="hu-HU" dirty="0"/>
+              <a:t> segítségével választhatja ki a számára érdekes eszközt. A rendszer lényege az interakció: a felhasználó eldönti, hogy vétel vagy eladás irányba nyit pozíciót. Fontos kiemelni, hogy minden ilyen művelet mögött az </a:t>
+            </a:r>
+            <a:r>
+              <a:rPr lang="hu-HU" b="1" dirty="0"/>
+              <a:t>algoritmusunk</a:t>
+            </a:r>
+            <a:r>
+              <a:rPr lang="hu-HU" dirty="0"/>
+              <a:t> azonnal ellenőrzi a fedezetet, és rögzíti a tranzakciót.</a:t>
+            </a:r>
+          </a:p>
+          <a:p>
+            <a:r>
+              <a:rPr lang="hu-HU" dirty="0"/>
+              <a:t>Amíg a pozíció nyitva van, a felhasználó nem marad magára. Ellátogathat az </a:t>
+            </a:r>
+            <a:r>
+              <a:rPr lang="hu-HU" b="1" dirty="0"/>
+              <a:t>Oktatóanyagok</a:t>
+            </a:r>
+            <a:r>
+              <a:rPr lang="hu-HU" dirty="0"/>
+              <a:t> fülre, ahol elméleti segítséget kap a piaci mozgások megértéséhez.</a:t>
+            </a:r>
+          </a:p>
+          <a:p>
+            <a:r>
+              <a:rPr lang="hu-HU" dirty="0"/>
+              <a:t>pozíció lezárásakor történik a legérdekesebb rész: a rendszerünk másodpercek alatt kiszámolja az eredményt, frissíti az egyenleget, és a </a:t>
+            </a:r>
+            <a:r>
+              <a:rPr lang="hu-HU" b="1" dirty="0"/>
+              <a:t>Statisztika</a:t>
+            </a:r>
+            <a:r>
+              <a:rPr lang="hu-HU" dirty="0"/>
+              <a:t> fülön azonnal láthatóvá válik az ügylet hatása a teljes portfólióra.</a:t>
+            </a:r>
+          </a:p>
+          <a:p>
+            <a:r>
+              <a:rPr lang="hu-HU" dirty="0"/>
+              <a:t>Mind ezek közben a felhasználó ellátogathat a tranzakció fülre is ahol további összeggel növelheti egyenlegét. Illetve Beállítások fülön keresztül a saját profilját állíthatja, illetve híreket olvashat amik teljesen valós időben jelennek meg</a:t>
+            </a:r>
+          </a:p>
+        </p:txBody>
+      </p:sp>
+      <p:sp>
+        <p:nvSpPr>
+          <p:cNvPr id="4" name="Dia számának helye 3"/>
+          <p:cNvSpPr>
+            <a:spLocks noGrp="1"/>
+          </p:cNvSpPr>
+          <p:nvPr>
+            <p:ph type="sldNum" sz="quarter" idx="5"/>
+          </p:nvPr>
+        </p:nvSpPr>
+        <p:spPr/>
+        <p:txBody>
+          <a:bodyPr/>
+          <a:lstStyle/>
+          <a:p>
+            <a:fld id="{7A8BB5B3-9749-486C-A43B-73D16959CA08}" type="slidenum">
+              <a:rPr lang="hu-HU" smtClean="0"/>
+              <a:t>4</a:t>
+            </a:fld>
+            <a:endParaRPr lang="hu-HU"/>
+          </a:p>
+        </p:txBody>
+      </p:sp>
+    </p:spTree>
+    <p:extLst>
+      <p:ext uri="{BB962C8B-B14F-4D97-AF65-F5344CB8AC3E}">
+        <p14:creationId xmlns:p14="http://schemas.microsoft.com/office/powerpoint/2010/main" val="3561326476"/>
+      </p:ext>
+    </p:extLst>
+  </p:cSld>
+  <p:clrMapOvr>
+    <a:masterClrMapping/>
+  </p:clrMapOvr>
+</p:notes>
+</file>
+
+<file path=ppt/notesSlides/notesSlide5.xml><?xml version="1.0" encoding="utf-8"?>
+<p:notes xmlns:a="http://schemas.openxmlformats.org/drawingml/2006/main" xmlns:r="http://schemas.openxmlformats.org/officeDocument/2006/relationships" xmlns:p="http://schemas.openxmlformats.org/presentationml/2006/main">
+  <p:cSld>
+    <p:spTree>
+      <p:nvGrpSpPr>
+        <p:cNvPr id="1" name=""/>
+        <p:cNvGrpSpPr/>
+        <p:nvPr/>
+      </p:nvGrpSpPr>
+      <p:grpSpPr>
+        <a:xfrm>
+          <a:off x="0" y="0"/>
+          <a:ext cx="0" cy="0"/>
+          <a:chOff x="0" y="0"/>
+          <a:chExt cx="0" cy="0"/>
+        </a:xfrm>
+      </p:grpSpPr>
+      <p:sp>
+        <p:nvSpPr>
+          <p:cNvPr id="2" name="Diakép helye 1"/>
+          <p:cNvSpPr>
+            <a:spLocks noGrp="1" noRot="1" noChangeAspect="1"/>
+          </p:cNvSpPr>
+          <p:nvPr>
+            <p:ph type="sldImg"/>
+          </p:nvPr>
+        </p:nvSpPr>
+        <p:spPr/>
+      </p:sp>
+      <p:sp>
+        <p:nvSpPr>
+          <p:cNvPr id="3" name="Jegyzetek helye 2"/>
+          <p:cNvSpPr>
+            <a:spLocks noGrp="1"/>
+          </p:cNvSpPr>
+          <p:nvPr>
+            <p:ph type="body" idx="1"/>
+          </p:nvPr>
+        </p:nvSpPr>
+        <p:spPr/>
+        <p:txBody>
+          <a:bodyPr/>
+          <a:lstStyle/>
+          <a:p>
+            <a:r>
+              <a:rPr lang="hu-HU" dirty="0"/>
+              <a:t>Ezen a dián a StockMaster technológiai hátterét, vagyis a projektünk 'motorháztető alatti' részét mutatjuk be. A szoftver fejlesztése során a klasszikus és megbízható webes technológiák kombinációját választottuk, hogy egy stabil, mégis gyors platformot kapjunk.</a:t>
+            </a:r>
+          </a:p>
+          <a:p>
+            <a:r>
+              <a:rPr lang="hu-HU" dirty="0"/>
+              <a:t>A </a:t>
+            </a:r>
+            <a:r>
+              <a:rPr lang="hu-HU" b="1" dirty="0"/>
+              <a:t>Frontend</a:t>
+            </a:r>
+            <a:r>
+              <a:rPr lang="hu-HU" dirty="0"/>
+              <a:t> réteg alapjait a </a:t>
+            </a:r>
+            <a:r>
+              <a:rPr lang="hu-HU" b="1" dirty="0"/>
+              <a:t>HTML5 és a CSS3</a:t>
+            </a:r>
+            <a:r>
+              <a:rPr lang="hu-HU" dirty="0"/>
+              <a:t> adja, ami biztosítja a letisztult megjelenést és a </a:t>
+            </a:r>
+            <a:r>
+              <a:rPr lang="hu-HU" dirty="0" err="1"/>
+              <a:t>reszponzivitást</a:t>
+            </a:r>
+            <a:r>
+              <a:rPr lang="hu-HU" dirty="0"/>
+              <a:t>. A </a:t>
+            </a:r>
+            <a:r>
+              <a:rPr lang="hu-HU" b="1" dirty="0"/>
+              <a:t>JavaScript</a:t>
+            </a:r>
+            <a:r>
+              <a:rPr lang="hu-HU" dirty="0"/>
+              <a:t> kulcsszerepet játszik nálunk: ez teszi lehetővé, hogy a gyertya-diagramok és az árfolyamok az oldal </a:t>
+            </a:r>
+            <a:r>
+              <a:rPr lang="hu-HU" dirty="0" err="1"/>
+              <a:t>újratöltése</a:t>
+            </a:r>
+            <a:r>
+              <a:rPr lang="hu-HU" dirty="0"/>
+              <a:t> nélkül, dinamikusan frissüljenek, valódi tőzsdei élményt nyújtva.</a:t>
+            </a:r>
+          </a:p>
+          <a:p>
+            <a:r>
+              <a:rPr lang="hu-HU" dirty="0"/>
+              <a:t>A </a:t>
+            </a:r>
+            <a:r>
+              <a:rPr lang="hu-HU" b="1" dirty="0"/>
+              <a:t>Backend</a:t>
+            </a:r>
+            <a:r>
+              <a:rPr lang="hu-HU" dirty="0"/>
+              <a:t>, tehát a szoftver agya, </a:t>
+            </a:r>
+            <a:r>
+              <a:rPr lang="hu-HU" b="1" dirty="0"/>
+              <a:t>PHP</a:t>
+            </a:r>
+            <a:r>
+              <a:rPr lang="hu-HU" dirty="0"/>
+              <a:t> nyelven készült. Ez a réteg felel a kritikus üzleti logikáért: itt futnak le a vétel-eladási algoritmusok, itt történik a fedezetellenőrzés, és ez a modul számolja ki a profitot vagy veszteséget minden zárás után.</a:t>
+            </a:r>
+          </a:p>
+          <a:p>
+            <a:r>
+              <a:rPr lang="hu-HU" dirty="0"/>
+              <a:t>Az adatok tárolására </a:t>
+            </a:r>
+            <a:r>
+              <a:rPr lang="hu-HU" b="1" dirty="0" err="1"/>
+              <a:t>MySQL</a:t>
+            </a:r>
+            <a:r>
+              <a:rPr lang="hu-HU" dirty="0"/>
+              <a:t> relációs adatbázist használunk. Ahogy az adatszerkezeti dokumentációnkban is látható, a rendszerünk normalizált táblákban tárolja a felhasználói profilokat, a kereskedési naplókat és a fejlődési statisztikákat. Ez az összeállítás garantálja, hogy a StockMaster egyszerre legyen biztonságos és villámgyors a lekérdezések során.</a:t>
+            </a:r>
+          </a:p>
+          <a:p>
+            <a:endParaRPr lang="hu-HU" dirty="0"/>
+          </a:p>
+        </p:txBody>
+      </p:sp>
+      <p:sp>
+        <p:nvSpPr>
+          <p:cNvPr id="4" name="Dia számának helye 3"/>
+          <p:cNvSpPr>
+            <a:spLocks noGrp="1"/>
+          </p:cNvSpPr>
+          <p:nvPr>
+            <p:ph type="sldNum" sz="quarter" idx="5"/>
+          </p:nvPr>
+        </p:nvSpPr>
+        <p:spPr/>
+        <p:txBody>
+          <a:bodyPr/>
+          <a:lstStyle/>
+          <a:p>
+            <a:fld id="{7A8BB5B3-9749-486C-A43B-73D16959CA08}" type="slidenum">
+              <a:rPr lang="hu-HU" smtClean="0"/>
+              <a:t>5</a:t>
+            </a:fld>
+            <a:endParaRPr lang="hu-HU"/>
+          </a:p>
+        </p:txBody>
+      </p:sp>
+    </p:spTree>
+    <p:extLst>
+      <p:ext uri="{BB962C8B-B14F-4D97-AF65-F5344CB8AC3E}">
+        <p14:creationId xmlns:p14="http://schemas.microsoft.com/office/powerpoint/2010/main" val="2639655426"/>
+      </p:ext>
+    </p:extLst>
+  </p:cSld>
+  <p:clrMapOvr>
+    <a:masterClrMapping/>
+  </p:clrMapOvr>
+</p:notes>
+</file>
+
+<file path=ppt/notesSlides/notesSlide6.xml><?xml version="1.0" encoding="utf-8"?>
+<p:notes xmlns:a="http://schemas.openxmlformats.org/drawingml/2006/main" xmlns:r="http://schemas.openxmlformats.org/officeDocument/2006/relationships" xmlns:p="http://schemas.openxmlformats.org/presentationml/2006/main">
+  <p:cSld>
+    <p:spTree>
+      <p:nvGrpSpPr>
+        <p:cNvPr id="1" name=""/>
+        <p:cNvGrpSpPr/>
+        <p:nvPr/>
+      </p:nvGrpSpPr>
+      <p:grpSpPr>
+        <a:xfrm>
+          <a:off x="0" y="0"/>
+          <a:ext cx="0" cy="0"/>
+          <a:chOff x="0" y="0"/>
+          <a:chExt cx="0" cy="0"/>
+        </a:xfrm>
+      </p:grpSpPr>
+      <p:sp>
+        <p:nvSpPr>
+          <p:cNvPr id="2" name="Diakép helye 1"/>
+          <p:cNvSpPr>
+            <a:spLocks noGrp="1" noRot="1" noChangeAspect="1"/>
+          </p:cNvSpPr>
+          <p:nvPr>
+            <p:ph type="sldImg"/>
+          </p:nvPr>
+        </p:nvSpPr>
+        <p:spPr/>
+      </p:sp>
+      <p:sp>
+        <p:nvSpPr>
+          <p:cNvPr id="3" name="Jegyzetek helye 2"/>
+          <p:cNvSpPr>
+            <a:spLocks noGrp="1"/>
+          </p:cNvSpPr>
+          <p:nvPr>
+            <p:ph type="body" idx="1"/>
+          </p:nvPr>
+        </p:nvSpPr>
+        <p:spPr/>
+        <p:txBody>
+          <a:bodyPr/>
+          <a:lstStyle/>
+          <a:p>
+            <a:r>
+              <a:rPr lang="hu-HU" dirty="0"/>
+              <a:t>Az adatbázisunk normalizált és hierarchikus. A </a:t>
+            </a:r>
+            <a:r>
+              <a:rPr lang="hu-HU" dirty="0" err="1"/>
+              <a:t>Users</a:t>
+            </a:r>
+            <a:r>
+              <a:rPr lang="hu-HU" dirty="0"/>
+              <a:t> tábla az alap, ehhez kapcsolódnak a beállítások, a statisztikák és a kereskedési pozíciók. Az </a:t>
+            </a:r>
+            <a:r>
+              <a:rPr lang="hu-HU" dirty="0" err="1"/>
+              <a:t>Assets</a:t>
+            </a:r>
+            <a:r>
+              <a:rPr lang="hu-HU" dirty="0"/>
+              <a:t> tábla pedig egyfajta katalógusként működik a rendszerben elérhető eszközökhöz. A </a:t>
+            </a:r>
+            <a:r>
+              <a:rPr lang="hu-HU" dirty="0" err="1"/>
+              <a:t>UserStats</a:t>
+            </a:r>
+            <a:r>
+              <a:rPr lang="hu-HU" dirty="0"/>
+              <a:t> tábla különösen fontos: ez tárolja a </a:t>
+            </a:r>
+            <a:r>
+              <a:rPr lang="hu-HU" dirty="0" err="1"/>
+              <a:t>WinRate-et</a:t>
+            </a:r>
+            <a:r>
+              <a:rPr lang="hu-HU" dirty="0"/>
+              <a:t> és az átlagos profitot/veszteséget, ami a felhasználó fejlődésének kulcsa. Minden tranzakciót naplózunk a </a:t>
+            </a:r>
+            <a:r>
+              <a:rPr lang="hu-HU" dirty="0" err="1"/>
+              <a:t>TransactionsLog</a:t>
+            </a:r>
+            <a:r>
+              <a:rPr lang="hu-HU" dirty="0"/>
+              <a:t>-ban, így minden fillér visszakövethető.</a:t>
+            </a:r>
+          </a:p>
+        </p:txBody>
+      </p:sp>
+      <p:sp>
+        <p:nvSpPr>
+          <p:cNvPr id="4" name="Dia számának helye 3"/>
+          <p:cNvSpPr>
+            <a:spLocks noGrp="1"/>
+          </p:cNvSpPr>
+          <p:nvPr>
+            <p:ph type="sldNum" sz="quarter" idx="5"/>
+          </p:nvPr>
+        </p:nvSpPr>
+        <p:spPr/>
+        <p:txBody>
+          <a:bodyPr/>
+          <a:lstStyle/>
+          <a:p>
+            <a:fld id="{7A8BB5B3-9749-486C-A43B-73D16959CA08}" type="slidenum">
+              <a:rPr lang="hu-HU" smtClean="0"/>
+              <a:t>6</a:t>
+            </a:fld>
+            <a:endParaRPr lang="hu-HU"/>
+          </a:p>
+        </p:txBody>
+      </p:sp>
+    </p:spTree>
+    <p:extLst>
+      <p:ext uri="{BB962C8B-B14F-4D97-AF65-F5344CB8AC3E}">
+        <p14:creationId xmlns:p14="http://schemas.microsoft.com/office/powerpoint/2010/main" val="2238836791"/>
+      </p:ext>
+    </p:extLst>
+  </p:cSld>
+  <p:clrMapOvr>
+    <a:masterClrMapping/>
+  </p:clrMapOvr>
+</p:notes>
+</file>
+
+<file path=ppt/notesSlides/notesSlide7.xml><?xml version="1.0" encoding="utf-8"?>
+<p:notes xmlns:a="http://schemas.openxmlformats.org/drawingml/2006/main" xmlns:r="http://schemas.openxmlformats.org/officeDocument/2006/relationships" xmlns:p="http://schemas.openxmlformats.org/presentationml/2006/main">
+  <p:cSld>
+    <p:spTree>
+      <p:nvGrpSpPr>
+        <p:cNvPr id="1" name=""/>
+        <p:cNvGrpSpPr/>
+        <p:nvPr/>
+      </p:nvGrpSpPr>
+      <p:grpSpPr>
+        <a:xfrm>
+          <a:off x="0" y="0"/>
+          <a:ext cx="0" cy="0"/>
+          <a:chOff x="0" y="0"/>
+          <a:chExt cx="0" cy="0"/>
+        </a:xfrm>
+      </p:grpSpPr>
+      <p:sp>
+        <p:nvSpPr>
+          <p:cNvPr id="2" name="Diakép helye 1"/>
+          <p:cNvSpPr>
+            <a:spLocks noGrp="1" noRot="1" noChangeAspect="1"/>
+          </p:cNvSpPr>
+          <p:nvPr>
+            <p:ph type="sldImg"/>
+          </p:nvPr>
+        </p:nvSpPr>
+        <p:spPr/>
+      </p:sp>
+      <p:sp>
+        <p:nvSpPr>
+          <p:cNvPr id="3" name="Jegyzetek helye 2"/>
+          <p:cNvSpPr>
+            <a:spLocks noGrp="1"/>
+          </p:cNvSpPr>
+          <p:nvPr>
+            <p:ph type="body" idx="1"/>
+          </p:nvPr>
+        </p:nvSpPr>
+        <p:spPr/>
+        <p:txBody>
+          <a:bodyPr/>
+          <a:lstStyle/>
+          <a:p>
+            <a:r>
+              <a:rPr lang="hu-HU" dirty="0"/>
+              <a:t>A frontend fejlesztésekor a legfőbb szempontunk az volt, hogy egy tőzsdei szoftver komplexitását érthetővé és átláthatóvá tegyük a kezdők számára is.</a:t>
+            </a:r>
+          </a:p>
+          <a:p>
+            <a:r>
+              <a:rPr lang="hu-HU" dirty="0"/>
+              <a:t>A technológiai alapokat a </a:t>
+            </a:r>
+            <a:r>
+              <a:rPr lang="hu-HU" b="1" dirty="0"/>
+              <a:t>HTML5, CSS3 és a JavaScript</a:t>
+            </a:r>
+            <a:r>
+              <a:rPr lang="hu-HU" dirty="0"/>
+              <a:t> szolgáltatják. Utóbbi teszi lehetővé, hogy a platformunk ne legyen statikus: a gyertya-diagramok dinamikusan rajzolódnak ki, és a felhasználó igénye szerint válthat az idősíkok között, legyen szó 1 perces vagy akár heti bontásról.</a:t>
+            </a:r>
+          </a:p>
+          <a:p>
+            <a:r>
+              <a:rPr lang="hu-HU" dirty="0"/>
+              <a:t>nagy hangsúlyt fektettünk az esztétikára. A bal oldali keresősáv segítségével a felhasználók gyorsan válthatnak a különböző részvények és </a:t>
+            </a:r>
+            <a:r>
+              <a:rPr lang="hu-HU" dirty="0" err="1"/>
+              <a:t>kriptovaluták</a:t>
+            </a:r>
+            <a:r>
+              <a:rPr lang="hu-HU" dirty="0"/>
+              <a:t> között. A tranzakciós felületen a vétel és eladás gombok azonnali vizuális visszajelzést adnak, a portfólió pedig valós időben mutatja az egyenleg változását.</a:t>
+            </a:r>
+          </a:p>
+        </p:txBody>
+      </p:sp>
+      <p:sp>
+        <p:nvSpPr>
+          <p:cNvPr id="4" name="Dia számának helye 3"/>
+          <p:cNvSpPr>
+            <a:spLocks noGrp="1"/>
+          </p:cNvSpPr>
+          <p:nvPr>
+            <p:ph type="sldNum" sz="quarter" idx="5"/>
+          </p:nvPr>
+        </p:nvSpPr>
+        <p:spPr/>
+        <p:txBody>
+          <a:bodyPr/>
+          <a:lstStyle/>
+          <a:p>
+            <a:fld id="{7A8BB5B3-9749-486C-A43B-73D16959CA08}" type="slidenum">
+              <a:rPr lang="hu-HU" smtClean="0"/>
+              <a:t>7</a:t>
+            </a:fld>
+            <a:endParaRPr lang="hu-HU"/>
+          </a:p>
+        </p:txBody>
+      </p:sp>
+    </p:spTree>
+    <p:extLst>
+      <p:ext uri="{BB962C8B-B14F-4D97-AF65-F5344CB8AC3E}">
+        <p14:creationId xmlns:p14="http://schemas.microsoft.com/office/powerpoint/2010/main" val="514705530"/>
+      </p:ext>
+    </p:extLst>
+  </p:cSld>
+  <p:clrMapOvr>
+    <a:masterClrMapping/>
+  </p:clrMapOvr>
+</p:notes>
+</file>
+
+<file path=ppt/notesSlides/notesSlide8.xml><?xml version="1.0" encoding="utf-8"?>
+<p:notes xmlns:a="http://schemas.openxmlformats.org/drawingml/2006/main" xmlns:r="http://schemas.openxmlformats.org/officeDocument/2006/relationships" xmlns:p="http://schemas.openxmlformats.org/presentationml/2006/main">
+  <p:cSld>
+    <p:spTree>
+      <p:nvGrpSpPr>
+        <p:cNvPr id="1" name=""/>
+        <p:cNvGrpSpPr/>
+        <p:nvPr/>
+      </p:nvGrpSpPr>
+      <p:grpSpPr>
+        <a:xfrm>
+          <a:off x="0" y="0"/>
+          <a:ext cx="0" cy="0"/>
+          <a:chOff x="0" y="0"/>
+          <a:chExt cx="0" cy="0"/>
+        </a:xfrm>
+      </p:grpSpPr>
+      <p:sp>
+        <p:nvSpPr>
+          <p:cNvPr id="2" name="Diakép helye 1"/>
+          <p:cNvSpPr>
+            <a:spLocks noGrp="1" noRot="1" noChangeAspect="1"/>
+          </p:cNvSpPr>
+          <p:nvPr>
+            <p:ph type="sldImg"/>
+          </p:nvPr>
+        </p:nvSpPr>
+        <p:spPr/>
+      </p:sp>
+      <p:sp>
+        <p:nvSpPr>
+          <p:cNvPr id="3" name="Jegyzetek helye 2"/>
+          <p:cNvSpPr>
+            <a:spLocks noGrp="1"/>
+          </p:cNvSpPr>
+          <p:nvPr>
+            <p:ph type="body" idx="1"/>
+          </p:nvPr>
+        </p:nvSpPr>
+        <p:spPr/>
+        <p:txBody>
+          <a:bodyPr/>
+          <a:lstStyle/>
+          <a:p>
+            <a:r>
+              <a:rPr lang="hu-HU" dirty="0"/>
+              <a:t>A frontend tesztelése során az volt a célunk, hogy a felhasználói felület minden interaktív eleme stabilan </a:t>
+            </a:r>
+            <a:r>
+              <a:rPr lang="hu-HU" dirty="0" err="1"/>
+              <a:t>működjön</a:t>
+            </a:r>
+            <a:r>
+              <a:rPr lang="hu-HU" dirty="0"/>
+              <a:t>. Ehhez a </a:t>
+            </a:r>
+            <a:r>
+              <a:rPr lang="hu-HU" b="1" dirty="0"/>
+              <a:t>Robot Framework</a:t>
+            </a:r>
+            <a:r>
+              <a:rPr lang="hu-HU" dirty="0"/>
+              <a:t> keretrendszert használtuk, </a:t>
+            </a:r>
+            <a:r>
+              <a:rPr lang="hu-HU" b="1" dirty="0" err="1"/>
+              <a:t>Selenium</a:t>
+            </a:r>
+            <a:r>
+              <a:rPr lang="hu-HU" dirty="0"/>
+              <a:t> könyvtárral kiegészítve, a teszteseteket pedig a </a:t>
+            </a:r>
+            <a:r>
+              <a:rPr lang="hu-HU" b="1" dirty="0"/>
+              <a:t>RIDE</a:t>
+            </a:r>
+            <a:r>
+              <a:rPr lang="hu-HU" dirty="0"/>
+              <a:t> grafikus felületén menedzseltük.</a:t>
+            </a:r>
+          </a:p>
+          <a:p>
+            <a:r>
+              <a:rPr lang="hu-HU" dirty="0"/>
+              <a:t>Az automatizált tesztjeink lefedték a teljes felhasználói utat a regisztrációtól kezdve a részvényvásárláson át a kijelentkezésig. A tesztek során a kritikus funkciók – mint például az egyenleg csökkenése vétel után – hibátlanul futottak le. Ugyanakkor azonosítottunk egy magas prioritású esztétikai hibát: az eladás, azaz a </a:t>
+            </a:r>
+            <a:r>
+              <a:rPr lang="hu-HU" dirty="0" err="1"/>
+              <a:t>short</a:t>
+            </a:r>
+            <a:r>
+              <a:rPr lang="hu-HU" dirty="0"/>
+              <a:t> pozíciók megnyitásakor a grafikus felületen az árfolyam kijelzése néha szétcsúszik. Ezt a hibajegyet rögzítettük, és a vizuális korrekció már folyamatban van.</a:t>
+            </a:r>
+          </a:p>
+          <a:p>
+            <a:endParaRPr lang="hu-HU" dirty="0"/>
+          </a:p>
+        </p:txBody>
+      </p:sp>
+      <p:sp>
+        <p:nvSpPr>
+          <p:cNvPr id="4" name="Dia számának helye 3"/>
+          <p:cNvSpPr>
+            <a:spLocks noGrp="1"/>
+          </p:cNvSpPr>
+          <p:nvPr>
+            <p:ph type="sldNum" sz="quarter" idx="5"/>
+          </p:nvPr>
+        </p:nvSpPr>
+        <p:spPr/>
+        <p:txBody>
+          <a:bodyPr/>
+          <a:lstStyle/>
+          <a:p>
+            <a:fld id="{7A8BB5B3-9749-486C-A43B-73D16959CA08}" type="slidenum">
+              <a:rPr lang="hu-HU" smtClean="0"/>
+              <a:t>9</a:t>
+            </a:fld>
+            <a:endParaRPr lang="hu-HU"/>
+          </a:p>
+        </p:txBody>
+      </p:sp>
+    </p:spTree>
+    <p:extLst>
+      <p:ext uri="{BB962C8B-B14F-4D97-AF65-F5344CB8AC3E}">
+        <p14:creationId xmlns:p14="http://schemas.microsoft.com/office/powerpoint/2010/main" val="1195591999"/>
+      </p:ext>
+    </p:extLst>
+  </p:cSld>
+  <p:clrMapOvr>
+    <a:masterClrMapping/>
+  </p:clrMapOvr>
+</p:notes>
+</file>
+
+<file path=ppt/notesSlides/notesSlide9.xml><?xml version="1.0" encoding="utf-8"?>
+<p:notes xmlns:a="http://schemas.openxmlformats.org/drawingml/2006/main" xmlns:r="http://schemas.openxmlformats.org/officeDocument/2006/relationships" xmlns:p="http://schemas.openxmlformats.org/presentationml/2006/main">
+  <p:cSld>
+    <p:spTree>
+      <p:nvGrpSpPr>
+        <p:cNvPr id="1" name=""/>
+        <p:cNvGrpSpPr/>
+        <p:nvPr/>
+      </p:nvGrpSpPr>
+      <p:grpSpPr>
+        <a:xfrm>
+          <a:off x="0" y="0"/>
+          <a:ext cx="0" cy="0"/>
+          <a:chOff x="0" y="0"/>
+          <a:chExt cx="0" cy="0"/>
+        </a:xfrm>
+      </p:grpSpPr>
+      <p:sp>
+        <p:nvSpPr>
+          <p:cNvPr id="2" name="Diakép helye 1"/>
+          <p:cNvSpPr>
+            <a:spLocks noGrp="1" noRot="1" noChangeAspect="1"/>
+          </p:cNvSpPr>
+          <p:nvPr>
+            <p:ph type="sldImg"/>
+          </p:nvPr>
+        </p:nvSpPr>
+        <p:spPr/>
+      </p:sp>
+      <p:sp>
+        <p:nvSpPr>
+          <p:cNvPr id="3" name="Jegyzetek helye 2"/>
+          <p:cNvSpPr>
+            <a:spLocks noGrp="1"/>
+          </p:cNvSpPr>
+          <p:nvPr>
+            <p:ph type="body" idx="1"/>
+          </p:nvPr>
+        </p:nvSpPr>
+        <p:spPr/>
+        <p:txBody>
+          <a:bodyPr/>
+          <a:lstStyle/>
+          <a:p>
+            <a:r>
+              <a:rPr lang="hu-HU" dirty="0"/>
+              <a:t>Miben más, mint a többi? A legtöbb </a:t>
+            </a:r>
+            <a:r>
+              <a:rPr lang="hu-HU" dirty="0" err="1"/>
+              <a:t>platformrögtön</a:t>
+            </a:r>
+            <a:r>
+              <a:rPr lang="hu-HU" dirty="0"/>
+              <a:t> mélyvízbe dob a grafikonokkal, ahol a kezdő felhasználó csak találgat. A StockMaster ezzel szemben egy zárt ökoszisztémát alkot.</a:t>
+            </a:r>
+          </a:p>
+          <a:p>
+            <a:r>
+              <a:rPr lang="hu-HU" b="1" dirty="0"/>
+              <a:t>Először is</a:t>
+            </a:r>
+            <a:r>
+              <a:rPr lang="hu-HU" dirty="0"/>
+              <a:t>, nálunk az oktatóanyagok (</a:t>
+            </a:r>
+            <a:r>
+              <a:rPr lang="hu-HU" dirty="0" err="1"/>
+              <a:t>Tutorials</a:t>
+            </a:r>
+            <a:r>
+              <a:rPr lang="hu-HU" dirty="0"/>
+              <a:t>) közvetlenül össze vannak kötve a gyakorlattal. A felhasználó elolvassa a stratégiát, és egy kattintással már tesztelheti is a szimulátorban. </a:t>
+            </a:r>
+            <a:r>
+              <a:rPr lang="hu-HU" b="1" dirty="0"/>
+              <a:t>Másodszor</a:t>
+            </a:r>
+            <a:r>
+              <a:rPr lang="hu-HU" dirty="0"/>
+              <a:t>, a programunk kiemelkedik az analitika terén. Míg más szoftvereknél neked kell vezetned a kereskedési naplót, a mi backendünk minden zárás után azonnal </a:t>
+            </a:r>
+            <a:r>
+              <a:rPr lang="hu-HU" dirty="0" err="1"/>
+              <a:t>újraszámolja</a:t>
+            </a:r>
+            <a:r>
+              <a:rPr lang="hu-HU" dirty="0"/>
+              <a:t> a statisztikákat. Pontosan látod a győzelmi arányodat (</a:t>
+            </a:r>
+            <a:r>
+              <a:rPr lang="hu-HU" dirty="0" err="1"/>
+              <a:t>WinRate</a:t>
+            </a:r>
+            <a:r>
+              <a:rPr lang="hu-HU" dirty="0"/>
+              <a:t>) és azt, hogy melyik eszközzel vagy a leghatékonyabb. Ezt a </a:t>
+            </a:r>
+            <a:r>
+              <a:rPr lang="hu-HU" dirty="0" err="1"/>
+              <a:t>UserStats</a:t>
+            </a:r>
+            <a:r>
+              <a:rPr lang="hu-HU" dirty="0"/>
+              <a:t> táblánk automatizáltan végzi.</a:t>
+            </a:r>
+          </a:p>
+          <a:p>
+            <a:r>
+              <a:rPr lang="hu-HU" b="1" dirty="0"/>
+              <a:t>Harmadszor</a:t>
+            </a:r>
+            <a:r>
+              <a:rPr lang="hu-HU" dirty="0"/>
+              <a:t>, a stabilitás. A projekt során nem csak összedobtuk a kódot, hanem a Robot Framework és </a:t>
+            </a:r>
+            <a:r>
+              <a:rPr lang="hu-HU" dirty="0" err="1"/>
+              <a:t>Selenium</a:t>
+            </a:r>
+            <a:r>
+              <a:rPr lang="hu-HU" dirty="0"/>
+              <a:t> segítségével ipari sztenderdek szerint teszteltük a frontendet, biztosítva a hibátlan felhasználói utat.</a:t>
+            </a:r>
+          </a:p>
+          <a:p>
+            <a:endParaRPr lang="hu-HU" dirty="0"/>
+          </a:p>
+          <a:p>
+            <a:endParaRPr lang="hu-HU" dirty="0"/>
           </a:p>
         </p:txBody>
       </p:sp>
@@ -983,7 +1934,7 @@
           <a:p>
             <a:fld id="{D31F9038-47AD-43A3-BBBF-D66692911134}" type="datetimeFigureOut">
               <a:rPr lang="hu-HU" smtClean="0"/>
-              <a:t>2026. 03. 03.</a:t>
+              <a:t>2026. 03. 04.</a:t>
             </a:fld>
             <a:endParaRPr lang="hu-HU"/>
           </a:p>
@@ -1181,7 +2132,7 @@
           <a:p>
             <a:fld id="{D31F9038-47AD-43A3-BBBF-D66692911134}" type="datetimeFigureOut">
               <a:rPr lang="hu-HU" smtClean="0"/>
-              <a:t>2026. 03. 03.</a:t>
+              <a:t>2026. 03. 04.</a:t>
             </a:fld>
             <a:endParaRPr lang="hu-HU"/>
           </a:p>
@@ -1389,7 +2340,7 @@
           <a:p>
             <a:fld id="{D31F9038-47AD-43A3-BBBF-D66692911134}" type="datetimeFigureOut">
               <a:rPr lang="hu-HU" smtClean="0"/>
-              <a:t>2026. 03. 03.</a:t>
+              <a:t>2026. 03. 04.</a:t>
             </a:fld>
             <a:endParaRPr lang="hu-HU"/>
           </a:p>
@@ -1587,7 +2538,7 @@
           <a:p>
             <a:fld id="{D31F9038-47AD-43A3-BBBF-D66692911134}" type="datetimeFigureOut">
               <a:rPr lang="hu-HU" smtClean="0"/>
-              <a:t>2026. 03. 03.</a:t>
+              <a:t>2026. 03. 04.</a:t>
             </a:fld>
             <a:endParaRPr lang="hu-HU"/>
           </a:p>
@@ -1862,7 +2813,7 @@
           <a:p>
             <a:fld id="{D31F9038-47AD-43A3-BBBF-D66692911134}" type="datetimeFigureOut">
               <a:rPr lang="hu-HU" smtClean="0"/>
-              <a:t>2026. 03. 03.</a:t>
+              <a:t>2026. 03. 04.</a:t>
             </a:fld>
             <a:endParaRPr lang="hu-HU"/>
           </a:p>
@@ -2127,7 +3078,7 @@
           <a:p>
             <a:fld id="{D31F9038-47AD-43A3-BBBF-D66692911134}" type="datetimeFigureOut">
               <a:rPr lang="hu-HU" smtClean="0"/>
-              <a:t>2026. 03. 03.</a:t>
+              <a:t>2026. 03. 04.</a:t>
             </a:fld>
             <a:endParaRPr lang="hu-HU"/>
           </a:p>
@@ -2539,7 +3490,7 @@
           <a:p>
             <a:fld id="{D31F9038-47AD-43A3-BBBF-D66692911134}" type="datetimeFigureOut">
               <a:rPr lang="hu-HU" smtClean="0"/>
-              <a:t>2026. 03. 03.</a:t>
+              <a:t>2026. 03. 04.</a:t>
             </a:fld>
             <a:endParaRPr lang="hu-HU"/>
           </a:p>
@@ -2680,7 +3631,7 @@
           <a:p>
             <a:fld id="{D31F9038-47AD-43A3-BBBF-D66692911134}" type="datetimeFigureOut">
               <a:rPr lang="hu-HU" smtClean="0"/>
-              <a:t>2026. 03. 03.</a:t>
+              <a:t>2026. 03. 04.</a:t>
             </a:fld>
             <a:endParaRPr lang="hu-HU"/>
           </a:p>
@@ -2793,7 +3744,7 @@
           <a:p>
             <a:fld id="{D31F9038-47AD-43A3-BBBF-D66692911134}" type="datetimeFigureOut">
               <a:rPr lang="hu-HU" smtClean="0"/>
-              <a:t>2026. 03. 03.</a:t>
+              <a:t>2026. 03. 04.</a:t>
             </a:fld>
             <a:endParaRPr lang="hu-HU"/>
           </a:p>
@@ -3104,7 +4055,7 @@
           <a:p>
             <a:fld id="{D31F9038-47AD-43A3-BBBF-D66692911134}" type="datetimeFigureOut">
               <a:rPr lang="hu-HU" smtClean="0"/>
-              <a:t>2026. 03. 03.</a:t>
+              <a:t>2026. 03. 04.</a:t>
             </a:fld>
             <a:endParaRPr lang="hu-HU"/>
           </a:p>
@@ -3392,7 +4343,7 @@
           <a:p>
             <a:fld id="{D31F9038-47AD-43A3-BBBF-D66692911134}" type="datetimeFigureOut">
               <a:rPr lang="hu-HU" smtClean="0"/>
-              <a:t>2026. 03. 03.</a:t>
+              <a:t>2026. 03. 04.</a:t>
             </a:fld>
             <a:endParaRPr lang="hu-HU"/>
           </a:p>
@@ -3633,7 +4584,7 @@
           <a:p>
             <a:fld id="{D31F9038-47AD-43A3-BBBF-D66692911134}" type="datetimeFigureOut">
               <a:rPr lang="hu-HU" smtClean="0"/>
-              <a:t>2026. 03. 03.</a:t>
+              <a:t>2026. 03. 04.</a:t>
             </a:fld>
             <a:endParaRPr lang="hu-HU"/>
           </a:p>
@@ -4050,6 +5001,42 @@
           <a:chExt cx="0" cy="0"/>
         </a:xfrm>
       </p:grpSpPr>
+      <p:pic>
+        <p:nvPicPr>
+          <p:cNvPr id="7" name="Kép 6">
+            <a:extLst>
+              <a:ext uri="{FF2B5EF4-FFF2-40B4-BE49-F238E27FC236}">
+                <a16:creationId xmlns:a16="http://schemas.microsoft.com/office/drawing/2014/main" id="{A62C8F4F-E02C-4357-9CF1-E8FFF618CF9E}"/>
+              </a:ext>
+            </a:extLst>
+          </p:cNvPr>
+          <p:cNvPicPr>
+            <a:picLocks noChangeAspect="1"/>
+          </p:cNvPicPr>
+          <p:nvPr/>
+        </p:nvPicPr>
+        <p:blipFill>
+          <a:blip r:embed="rId3">
+            <a:extLst>
+              <a:ext uri="{28A0092B-C50C-407E-A947-70E740481C1C}">
+                <a14:useLocalDpi xmlns:a14="http://schemas.microsoft.com/office/drawing/2010/main" val="0"/>
+              </a:ext>
+            </a:extLst>
+          </a:blip>
+          <a:stretch>
+            <a:fillRect/>
+          </a:stretch>
+        </p:blipFill>
+        <p:spPr>
+          <a:xfrm>
+            <a:off x="0" y="-6376"/>
+            <a:ext cx="12192000" cy="6864376"/>
+          </a:xfrm>
+          <a:prstGeom prst="rect">
+            <a:avLst/>
+          </a:prstGeom>
+        </p:spPr>
+      </p:pic>
       <p:sp>
         <p:nvSpPr>
           <p:cNvPr id="2" name="Cím 1">
@@ -4073,6 +5060,9 @@
           <a:p>
             <a:r>
               <a:rPr lang="hu-HU" b="1" dirty="0">
+                <a:solidFill>
+                  <a:schemeClr val="bg1"/>
+                </a:solidFill>
                 <a:effectLst/>
                 <a:latin typeface="Times New Roman" panose="02020603050405020304" pitchFamily="18" charset="0"/>
                 <a:cs typeface="Times New Roman" panose="02020603050405020304" pitchFamily="18" charset="0"/>
@@ -4080,6 +5070,9 @@
               <a:t>StockMaster-Tőzsdei platform</a:t>
             </a:r>
             <a:endParaRPr lang="hu-HU" dirty="0">
+              <a:solidFill>
+                <a:schemeClr val="bg1"/>
+              </a:solidFill>
               <a:latin typeface="Times New Roman" panose="02020603050405020304" pitchFamily="18" charset="0"/>
               <a:cs typeface="Times New Roman" panose="02020603050405020304" pitchFamily="18" charset="0"/>
             </a:endParaRPr>
@@ -4109,6 +5102,9 @@
           <a:p>
             <a:r>
               <a:rPr lang="hu-HU" b="1" dirty="0" err="1">
+                <a:solidFill>
+                  <a:schemeClr val="bg1"/>
+                </a:solidFill>
                 <a:effectLst/>
                 <a:latin typeface="Times New Roman" panose="02020603050405020304" pitchFamily="18" charset="0"/>
                 <a:cs typeface="Times New Roman" panose="02020603050405020304" pitchFamily="18" charset="0"/>
@@ -4117,6 +5113,9 @@
             </a:r>
             <a:r>
               <a:rPr lang="hu-HU" b="1" dirty="0">
+                <a:solidFill>
+                  <a:schemeClr val="bg1"/>
+                </a:solidFill>
                 <a:effectLst/>
                 <a:latin typeface="Times New Roman" panose="02020603050405020304" pitchFamily="18" charset="0"/>
                 <a:cs typeface="Times New Roman" panose="02020603050405020304" pitchFamily="18" charset="0"/>
@@ -4125,6 +5124,9 @@
             </a:r>
             <a:r>
               <a:rPr lang="hu-HU" b="1" dirty="0" err="1">
+                <a:solidFill>
+                  <a:schemeClr val="bg1"/>
+                </a:solidFill>
                 <a:effectLst/>
                 <a:latin typeface="Times New Roman" panose="02020603050405020304" pitchFamily="18" charset="0"/>
                 <a:cs typeface="Times New Roman" panose="02020603050405020304" pitchFamily="18" charset="0"/>
@@ -4132,6 +5134,9 @@
               <a:t>Skill</a:t>
             </a:r>
             <a:endParaRPr lang="hu-HU" dirty="0">
+              <a:solidFill>
+                <a:schemeClr val="bg1"/>
+              </a:solidFill>
               <a:latin typeface="Times New Roman" panose="02020603050405020304" pitchFamily="18" charset="0"/>
               <a:cs typeface="Times New Roman" panose="02020603050405020304" pitchFamily="18" charset="0"/>
             </a:endParaRPr>
@@ -4152,8 +5157,8 @@
         </p:nvSpPr>
         <p:spPr>
           <a:xfrm>
-            <a:off x="8630653" y="6488668"/>
-            <a:ext cx="3561347" cy="369332"/>
+            <a:off x="8610599" y="6540500"/>
+            <a:ext cx="3581401" cy="369332"/>
           </a:xfrm>
           <a:prstGeom prst="rect">
             <a:avLst/>
@@ -4167,7 +5172,13 @@
           <a:lstStyle/>
           <a:p>
             <a:r>
-              <a:rPr lang="hu-HU" i="1" dirty="0"/>
+              <a:rPr lang="hu-HU" i="1" dirty="0">
+                <a:solidFill>
+                  <a:schemeClr val="bg1"/>
+                </a:solidFill>
+                <a:latin typeface="Times New Roman" panose="02020603050405020304" pitchFamily="18" charset="0"/>
+                <a:cs typeface="Times New Roman" panose="02020603050405020304" pitchFamily="18" charset="0"/>
+              </a:rPr>
               <a:t>Készítők: Csáki Balázs, Zsígó Róbert</a:t>
             </a:r>
           </a:p>
@@ -4188,7 +5199,7 @@
           <p:nvPr/>
         </p:nvPicPr>
         <p:blipFill>
-          <a:blip r:embed="rId2">
+          <a:blip r:embed="rId4">
             <a:extLst>
               <a:ext uri="{28A0092B-C50C-407E-A947-70E740481C1C}">
                 <a14:useLocalDpi xmlns:a14="http://schemas.microsoft.com/office/drawing/2010/main" val="0"/>
@@ -4239,170 +5250,105 @@
           <a:chExt cx="0" cy="0"/>
         </a:xfrm>
       </p:grpSpPr>
-      <p:sp>
-        <p:nvSpPr>
-          <p:cNvPr id="2" name="Cím 1">
-            <a:extLst>
-              <a:ext uri="{FF2B5EF4-FFF2-40B4-BE49-F238E27FC236}">
-                <a16:creationId xmlns:a16="http://schemas.microsoft.com/office/drawing/2014/main" id="{0B804AD7-8A29-4C31-8186-94B015A9CFFB}"/>
-              </a:ext>
-            </a:extLst>
-          </p:cNvPr>
-          <p:cNvSpPr>
-            <a:spLocks noGrp="1"/>
-          </p:cNvSpPr>
-          <p:nvPr>
-            <p:ph type="title"/>
-          </p:nvPr>
-        </p:nvSpPr>
-        <p:spPr/>
-        <p:txBody>
-          <a:bodyPr/>
-          <a:lstStyle/>
-          <a:p>
-            <a:r>
-              <a:rPr lang="hu-HU" dirty="0">
-                <a:latin typeface="Times New Roman" panose="02020603050405020304" pitchFamily="18" charset="0"/>
-                <a:cs typeface="Times New Roman" panose="02020603050405020304" pitchFamily="18" charset="0"/>
-              </a:rPr>
-              <a:t>Tesztelés</a:t>
-            </a:r>
-          </a:p>
-        </p:txBody>
-      </p:sp>
-      <p:sp>
-        <p:nvSpPr>
-          <p:cNvPr id="5" name="Szöveg helye 4">
-            <a:extLst>
-              <a:ext uri="{FF2B5EF4-FFF2-40B4-BE49-F238E27FC236}">
-                <a16:creationId xmlns:a16="http://schemas.microsoft.com/office/drawing/2014/main" id="{6C67E5E1-6A7A-4D54-9DE9-D84724A43396}"/>
-              </a:ext>
-            </a:extLst>
-          </p:cNvPr>
-          <p:cNvSpPr>
-            <a:spLocks noGrp="1"/>
-          </p:cNvSpPr>
-          <p:nvPr>
-            <p:ph type="body" idx="1"/>
-          </p:nvPr>
-        </p:nvSpPr>
-        <p:spPr/>
-        <p:txBody>
-          <a:bodyPr/>
-          <a:lstStyle/>
-          <a:p>
-            <a:r>
-              <a:rPr lang="hu-HU" dirty="0">
-                <a:latin typeface="Times New Roman" panose="02020603050405020304" pitchFamily="18" charset="0"/>
-                <a:cs typeface="Times New Roman" panose="02020603050405020304" pitchFamily="18" charset="0"/>
-              </a:rPr>
-              <a:t>Frontend</a:t>
-            </a:r>
-          </a:p>
-        </p:txBody>
-      </p:sp>
-      <p:sp>
-        <p:nvSpPr>
-          <p:cNvPr id="6" name="Tartalom helye 5">
-            <a:extLst>
-              <a:ext uri="{FF2B5EF4-FFF2-40B4-BE49-F238E27FC236}">
-                <a16:creationId xmlns:a16="http://schemas.microsoft.com/office/drawing/2014/main" id="{38E9024D-4CE7-45A4-8F63-08CC77B89275}"/>
-              </a:ext>
-            </a:extLst>
-          </p:cNvPr>
-          <p:cNvSpPr>
-            <a:spLocks noGrp="1"/>
-          </p:cNvSpPr>
-          <p:nvPr>
-            <p:ph sz="half" idx="2"/>
-          </p:nvPr>
-        </p:nvSpPr>
-        <p:spPr/>
-        <p:txBody>
-          <a:bodyPr/>
-          <a:lstStyle/>
-          <a:p>
-            <a:r>
-              <a:rPr lang="hu-HU" dirty="0">
-                <a:latin typeface="Times New Roman" panose="02020603050405020304" pitchFamily="18" charset="0"/>
-                <a:cs typeface="Times New Roman" panose="02020603050405020304" pitchFamily="18" charset="0"/>
-              </a:rPr>
-              <a:t>Sikeres tesztek: Belépés, regisztráció, vétel, tranzakciók, kijelentkezés, gombok és funkciói</a:t>
-            </a:r>
-          </a:p>
-          <a:p>
-            <a:r>
-              <a:rPr lang="hu-HU" dirty="0">
-                <a:latin typeface="Times New Roman" panose="02020603050405020304" pitchFamily="18" charset="0"/>
-                <a:cs typeface="Times New Roman" panose="02020603050405020304" pitchFamily="18" charset="0"/>
-              </a:rPr>
-              <a:t>Magas prioritású tesztesetek a biztonságos működésért</a:t>
-            </a:r>
-          </a:p>
-        </p:txBody>
-      </p:sp>
-      <p:sp>
-        <p:nvSpPr>
-          <p:cNvPr id="7" name="Szöveg helye 6">
-            <a:extLst>
-              <a:ext uri="{FF2B5EF4-FFF2-40B4-BE49-F238E27FC236}">
-                <a16:creationId xmlns:a16="http://schemas.microsoft.com/office/drawing/2014/main" id="{B25BEAC3-596F-4E60-AFDF-D56CFB2B9782}"/>
-              </a:ext>
-            </a:extLst>
-          </p:cNvPr>
-          <p:cNvSpPr>
-            <a:spLocks noGrp="1"/>
-          </p:cNvSpPr>
-          <p:nvPr>
-            <p:ph type="body" sz="quarter" idx="3"/>
-          </p:nvPr>
-        </p:nvSpPr>
-        <p:spPr/>
-        <p:txBody>
-          <a:bodyPr/>
-          <a:lstStyle/>
-          <a:p>
-            <a:r>
-              <a:rPr lang="hu-HU" dirty="0">
-                <a:latin typeface="Times New Roman" panose="02020603050405020304" pitchFamily="18" charset="0"/>
-                <a:cs typeface="Times New Roman" panose="02020603050405020304" pitchFamily="18" charset="0"/>
-              </a:rPr>
-              <a:t>Backend</a:t>
-            </a:r>
-          </a:p>
-        </p:txBody>
-      </p:sp>
-      <p:sp>
-        <p:nvSpPr>
-          <p:cNvPr id="8" name="Tartalom helye 7">
-            <a:extLst>
-              <a:ext uri="{FF2B5EF4-FFF2-40B4-BE49-F238E27FC236}">
-                <a16:creationId xmlns:a16="http://schemas.microsoft.com/office/drawing/2014/main" id="{38037BE3-46AA-4EF1-BD85-FD98AC8F829A}"/>
-              </a:ext>
-            </a:extLst>
-          </p:cNvPr>
-          <p:cNvSpPr>
-            <a:spLocks noGrp="1"/>
-          </p:cNvSpPr>
-          <p:nvPr>
-            <p:ph sz="quarter" idx="4"/>
-          </p:nvPr>
-        </p:nvSpPr>
-        <p:spPr/>
-        <p:txBody>
-          <a:bodyPr/>
-          <a:lstStyle/>
-          <a:p>
-            <a:endParaRPr lang="hu-HU" dirty="0"/>
-          </a:p>
-        </p:txBody>
-      </p:sp>
       <p:pic>
         <p:nvPicPr>
-          <p:cNvPr id="9" name="Kép 8">
-            <a:extLst>
-              <a:ext uri="{FF2B5EF4-FFF2-40B4-BE49-F238E27FC236}">
-                <a16:creationId xmlns:a16="http://schemas.microsoft.com/office/drawing/2014/main" id="{28FB0CE1-43B3-43A2-93BC-DB71D3488F87}"/>
+          <p:cNvPr id="5" name="Kép 4">
+            <a:extLst>
+              <a:ext uri="{FF2B5EF4-FFF2-40B4-BE49-F238E27FC236}">
+                <a16:creationId xmlns:a16="http://schemas.microsoft.com/office/drawing/2014/main" id="{CEFF17C2-5026-403D-A101-6AC9B36B708D}"/>
+              </a:ext>
+            </a:extLst>
+          </p:cNvPr>
+          <p:cNvPicPr>
+            <a:picLocks noChangeAspect="1"/>
+          </p:cNvPicPr>
+          <p:nvPr/>
+        </p:nvPicPr>
+        <p:blipFill>
+          <a:blip r:embed="rId2">
+            <a:extLst>
+              <a:ext uri="{28A0092B-C50C-407E-A947-70E740481C1C}">
+                <a14:useLocalDpi xmlns:a14="http://schemas.microsoft.com/office/drawing/2010/main" val="0"/>
+              </a:ext>
+            </a:extLst>
+          </a:blip>
+          <a:stretch>
+            <a:fillRect/>
+          </a:stretch>
+        </p:blipFill>
+        <p:spPr>
+          <a:xfrm>
+            <a:off x="0" y="-6376"/>
+            <a:ext cx="12192000" cy="6864376"/>
+          </a:xfrm>
+          <a:prstGeom prst="rect">
+            <a:avLst/>
+          </a:prstGeom>
+        </p:spPr>
+      </p:pic>
+      <p:sp>
+        <p:nvSpPr>
+          <p:cNvPr id="2" name="Cím 1">
+            <a:extLst>
+              <a:ext uri="{FF2B5EF4-FFF2-40B4-BE49-F238E27FC236}">
+                <a16:creationId xmlns:a16="http://schemas.microsoft.com/office/drawing/2014/main" id="{66C7BBF2-3BAE-4485-A30E-E3D573859C88}"/>
+              </a:ext>
+            </a:extLst>
+          </p:cNvPr>
+          <p:cNvSpPr>
+            <a:spLocks noGrp="1"/>
+          </p:cNvSpPr>
+          <p:nvPr>
+            <p:ph type="title"/>
+          </p:nvPr>
+        </p:nvSpPr>
+        <p:spPr/>
+        <p:txBody>
+          <a:bodyPr/>
+          <a:lstStyle/>
+          <a:p>
+            <a:r>
+              <a:rPr lang="hu-HU" dirty="0">
+                <a:solidFill>
+                  <a:schemeClr val="bg1"/>
+                </a:solidFill>
+              </a:rPr>
+              <a:t>Backend-Tesztelés</a:t>
+            </a:r>
+          </a:p>
+        </p:txBody>
+      </p:sp>
+      <p:sp>
+        <p:nvSpPr>
+          <p:cNvPr id="3" name="Tartalom helye 2">
+            <a:extLst>
+              <a:ext uri="{FF2B5EF4-FFF2-40B4-BE49-F238E27FC236}">
+                <a16:creationId xmlns:a16="http://schemas.microsoft.com/office/drawing/2014/main" id="{37E8E98B-FF77-45AF-B726-8E6D315B4593}"/>
+              </a:ext>
+            </a:extLst>
+          </p:cNvPr>
+          <p:cNvSpPr>
+            <a:spLocks noGrp="1"/>
+          </p:cNvSpPr>
+          <p:nvPr>
+            <p:ph idx="1"/>
+          </p:nvPr>
+        </p:nvSpPr>
+        <p:spPr/>
+        <p:txBody>
+          <a:bodyPr/>
+          <a:lstStyle/>
+          <a:p>
+            <a:endParaRPr lang="hu-HU" dirty="0"/>
+          </a:p>
+        </p:txBody>
+      </p:sp>
+      <p:pic>
+        <p:nvPicPr>
+          <p:cNvPr id="4" name="Kép 3">
+            <a:extLst>
+              <a:ext uri="{FF2B5EF4-FFF2-40B4-BE49-F238E27FC236}">
+                <a16:creationId xmlns:a16="http://schemas.microsoft.com/office/drawing/2014/main" id="{58A924F7-ECFE-48E4-8CF6-A10FD1DD425C}"/>
               </a:ext>
             </a:extLst>
           </p:cNvPr>
@@ -4436,7 +5382,7 @@
     </p:spTree>
     <p:extLst>
       <p:ext uri="{BB962C8B-B14F-4D97-AF65-F5344CB8AC3E}">
-        <p14:creationId xmlns:p14="http://schemas.microsoft.com/office/powerpoint/2010/main" val="3939455388"/>
+        <p14:creationId xmlns:p14="http://schemas.microsoft.com/office/powerpoint/2010/main" val="1588990733"/>
       </p:ext>
     </p:extLst>
   </p:cSld>
@@ -4463,95 +5409,12 @@
           <a:chExt cx="0" cy="0"/>
         </a:xfrm>
       </p:grpSpPr>
-      <p:sp>
-        <p:nvSpPr>
-          <p:cNvPr id="7" name="Cím 6">
-            <a:extLst>
-              <a:ext uri="{FF2B5EF4-FFF2-40B4-BE49-F238E27FC236}">
-                <a16:creationId xmlns:a16="http://schemas.microsoft.com/office/drawing/2014/main" id="{6D732CAD-ACD9-4D47-B378-2E1BECA11B29}"/>
-              </a:ext>
-            </a:extLst>
-          </p:cNvPr>
-          <p:cNvSpPr>
-            <a:spLocks noGrp="1"/>
-          </p:cNvSpPr>
-          <p:nvPr>
-            <p:ph type="title"/>
-          </p:nvPr>
-        </p:nvSpPr>
-        <p:spPr/>
-        <p:txBody>
-          <a:bodyPr/>
-          <a:lstStyle/>
-          <a:p>
-            <a:r>
-              <a:rPr lang="hu-HU" dirty="0">
-                <a:latin typeface="Times New Roman" panose="02020603050405020304" pitchFamily="18" charset="0"/>
-                <a:cs typeface="Times New Roman" panose="02020603050405020304" pitchFamily="18" charset="0"/>
-              </a:rPr>
-              <a:t>Csapatmunka</a:t>
-            </a:r>
-          </a:p>
-        </p:txBody>
-      </p:sp>
-      <p:sp>
-        <p:nvSpPr>
-          <p:cNvPr id="8" name="Tartalom helye 7">
-            <a:extLst>
-              <a:ext uri="{FF2B5EF4-FFF2-40B4-BE49-F238E27FC236}">
-                <a16:creationId xmlns:a16="http://schemas.microsoft.com/office/drawing/2014/main" id="{6016BF16-FC6A-4835-B6F2-1A13A288492E}"/>
-              </a:ext>
-            </a:extLst>
-          </p:cNvPr>
-          <p:cNvSpPr>
-            <a:spLocks noGrp="1"/>
-          </p:cNvSpPr>
-          <p:nvPr>
-            <p:ph idx="1"/>
-          </p:nvPr>
-        </p:nvSpPr>
-        <p:spPr/>
-        <p:txBody>
-          <a:bodyPr/>
-          <a:lstStyle/>
-          <a:p>
-            <a:r>
-              <a:rPr lang="hu-HU" dirty="0">
-                <a:latin typeface="Times New Roman" panose="02020603050405020304" pitchFamily="18" charset="0"/>
-                <a:cs typeface="Times New Roman" panose="02020603050405020304" pitchFamily="18" charset="0"/>
-              </a:rPr>
-              <a:t>GitHub</a:t>
-            </a:r>
-          </a:p>
-          <a:p>
-            <a:r>
-              <a:rPr lang="hu-HU" dirty="0">
-                <a:latin typeface="Times New Roman" panose="02020603050405020304" pitchFamily="18" charset="0"/>
-                <a:cs typeface="Times New Roman" panose="02020603050405020304" pitchFamily="18" charset="0"/>
-              </a:rPr>
-              <a:t>Google Drive</a:t>
-            </a:r>
-          </a:p>
-          <a:p>
-            <a:r>
-              <a:rPr lang="hu-HU" dirty="0">
-                <a:latin typeface="Times New Roman" panose="02020603050405020304" pitchFamily="18" charset="0"/>
-                <a:cs typeface="Times New Roman" panose="02020603050405020304" pitchFamily="18" charset="0"/>
-              </a:rPr>
-              <a:t>Messenger</a:t>
-            </a:r>
-          </a:p>
-          <a:p>
-            <a:endParaRPr lang="hu-HU" dirty="0"/>
-          </a:p>
-        </p:txBody>
-      </p:sp>
       <p:pic>
         <p:nvPicPr>
-          <p:cNvPr id="9" name="Kép 8">
-            <a:extLst>
-              <a:ext uri="{FF2B5EF4-FFF2-40B4-BE49-F238E27FC236}">
-                <a16:creationId xmlns:a16="http://schemas.microsoft.com/office/drawing/2014/main" id="{95A3F57A-2CEB-49D2-B2EE-C3A9F97981B4}"/>
+          <p:cNvPr id="10" name="Kép 9">
+            <a:extLst>
+              <a:ext uri="{FF2B5EF4-FFF2-40B4-BE49-F238E27FC236}">
+                <a16:creationId xmlns:a16="http://schemas.microsoft.com/office/drawing/2014/main" id="{8DDE1B41-B9D2-4AC3-8FC3-143E40A507A3}"/>
               </a:ext>
             </a:extLst>
           </p:cNvPr>
@@ -4562,6 +5425,137 @@
         </p:nvPicPr>
         <p:blipFill>
           <a:blip r:embed="rId2">
+            <a:extLst>
+              <a:ext uri="{28A0092B-C50C-407E-A947-70E740481C1C}">
+                <a14:useLocalDpi xmlns:a14="http://schemas.microsoft.com/office/drawing/2010/main" val="0"/>
+              </a:ext>
+            </a:extLst>
+          </a:blip>
+          <a:stretch>
+            <a:fillRect/>
+          </a:stretch>
+        </p:blipFill>
+        <p:spPr>
+          <a:xfrm>
+            <a:off x="0" y="-6376"/>
+            <a:ext cx="12192000" cy="6864376"/>
+          </a:xfrm>
+          <a:prstGeom prst="rect">
+            <a:avLst/>
+          </a:prstGeom>
+        </p:spPr>
+      </p:pic>
+      <p:sp>
+        <p:nvSpPr>
+          <p:cNvPr id="7" name="Cím 6">
+            <a:extLst>
+              <a:ext uri="{FF2B5EF4-FFF2-40B4-BE49-F238E27FC236}">
+                <a16:creationId xmlns:a16="http://schemas.microsoft.com/office/drawing/2014/main" id="{6D732CAD-ACD9-4D47-B378-2E1BECA11B29}"/>
+              </a:ext>
+            </a:extLst>
+          </p:cNvPr>
+          <p:cNvSpPr>
+            <a:spLocks noGrp="1"/>
+          </p:cNvSpPr>
+          <p:nvPr>
+            <p:ph type="title"/>
+          </p:nvPr>
+        </p:nvSpPr>
+        <p:spPr/>
+        <p:txBody>
+          <a:bodyPr/>
+          <a:lstStyle/>
+          <a:p>
+            <a:r>
+              <a:rPr lang="hu-HU" dirty="0">
+                <a:solidFill>
+                  <a:schemeClr val="bg1"/>
+                </a:solidFill>
+                <a:latin typeface="Times New Roman" panose="02020603050405020304" pitchFamily="18" charset="0"/>
+                <a:cs typeface="Times New Roman" panose="02020603050405020304" pitchFamily="18" charset="0"/>
+              </a:rPr>
+              <a:t>Csapatmunka</a:t>
+            </a:r>
+          </a:p>
+        </p:txBody>
+      </p:sp>
+      <p:sp>
+        <p:nvSpPr>
+          <p:cNvPr id="8" name="Tartalom helye 7">
+            <a:extLst>
+              <a:ext uri="{FF2B5EF4-FFF2-40B4-BE49-F238E27FC236}">
+                <a16:creationId xmlns:a16="http://schemas.microsoft.com/office/drawing/2014/main" id="{6016BF16-FC6A-4835-B6F2-1A13A288492E}"/>
+              </a:ext>
+            </a:extLst>
+          </p:cNvPr>
+          <p:cNvSpPr>
+            <a:spLocks noGrp="1"/>
+          </p:cNvSpPr>
+          <p:nvPr>
+            <p:ph idx="1"/>
+          </p:nvPr>
+        </p:nvSpPr>
+        <p:spPr/>
+        <p:txBody>
+          <a:bodyPr/>
+          <a:lstStyle/>
+          <a:p>
+            <a:r>
+              <a:rPr lang="hu-HU" dirty="0">
+                <a:solidFill>
+                  <a:schemeClr val="bg1"/>
+                </a:solidFill>
+                <a:latin typeface="Times New Roman" panose="02020603050405020304" pitchFamily="18" charset="0"/>
+                <a:cs typeface="Times New Roman" panose="02020603050405020304" pitchFamily="18" charset="0"/>
+              </a:rPr>
+              <a:t>GitHub</a:t>
+            </a:r>
+          </a:p>
+          <a:p>
+            <a:r>
+              <a:rPr lang="hu-HU" dirty="0">
+                <a:solidFill>
+                  <a:schemeClr val="bg1"/>
+                </a:solidFill>
+                <a:latin typeface="Times New Roman" panose="02020603050405020304" pitchFamily="18" charset="0"/>
+                <a:cs typeface="Times New Roman" panose="02020603050405020304" pitchFamily="18" charset="0"/>
+              </a:rPr>
+              <a:t>Google Drive</a:t>
+            </a:r>
+          </a:p>
+          <a:p>
+            <a:r>
+              <a:rPr lang="hu-HU" dirty="0">
+                <a:solidFill>
+                  <a:schemeClr val="bg1"/>
+                </a:solidFill>
+                <a:latin typeface="Times New Roman" panose="02020603050405020304" pitchFamily="18" charset="0"/>
+                <a:cs typeface="Times New Roman" panose="02020603050405020304" pitchFamily="18" charset="0"/>
+              </a:rPr>
+              <a:t>Messenger</a:t>
+            </a:r>
+          </a:p>
+          <a:p>
+            <a:endParaRPr lang="hu-HU" dirty="0"/>
+          </a:p>
+        </p:txBody>
+      </p:sp>
+      <p:pic>
+        <p:nvPicPr>
+          <p:cNvPr id="9" name="Kép 8">
+            <a:extLst>
+              <a:ext uri="{FF2B5EF4-FFF2-40B4-BE49-F238E27FC236}">
+                <a16:creationId xmlns:a16="http://schemas.microsoft.com/office/drawing/2014/main" id="{95A3F57A-2CEB-49D2-B2EE-C3A9F97981B4}"/>
+              </a:ext>
+            </a:extLst>
+          </p:cNvPr>
+          <p:cNvPicPr>
+            <a:picLocks noChangeAspect="1"/>
+          </p:cNvPicPr>
+          <p:nvPr/>
+        </p:nvPicPr>
+        <p:blipFill>
+          <a:blip r:embed="rId3">
             <a:extLst>
               <a:ext uri="{28A0092B-C50C-407E-A947-70E740481C1C}">
                 <a14:useLocalDpi xmlns:a14="http://schemas.microsoft.com/office/drawing/2010/main" val="0"/>
@@ -4580,6 +5574,147 @@
           <a:prstGeom prst="rect">
             <a:avLst/>
           </a:prstGeom>
+        </p:spPr>
+      </p:pic>
+      <p:pic>
+        <p:nvPicPr>
+          <p:cNvPr id="2050" name="Picture 2" descr="With GitHub - PyXAI documentation">
+            <a:extLst>
+              <a:ext uri="{FF2B5EF4-FFF2-40B4-BE49-F238E27FC236}">
+                <a16:creationId xmlns:a16="http://schemas.microsoft.com/office/drawing/2014/main" id="{C91D4B1C-28D8-4B24-9C45-7AF0768E9EC1}"/>
+              </a:ext>
+            </a:extLst>
+          </p:cNvPr>
+          <p:cNvPicPr>
+            <a:picLocks noChangeAspect="1" noChangeArrowheads="1"/>
+          </p:cNvPicPr>
+          <p:nvPr/>
+        </p:nvPicPr>
+        <p:blipFill>
+          <a:blip r:embed="rId4">
+            <a:extLst>
+              <a:ext uri="{28A0092B-C50C-407E-A947-70E740481C1C}">
+                <a14:useLocalDpi xmlns:a14="http://schemas.microsoft.com/office/drawing/2010/main" val="0"/>
+              </a:ext>
+            </a:extLst>
+          </a:blip>
+          <a:srcRect/>
+          <a:stretch>
+            <a:fillRect/>
+          </a:stretch>
+        </p:blipFill>
+        <p:spPr bwMode="auto">
+          <a:xfrm>
+            <a:off x="6580625" y="834615"/>
+            <a:ext cx="2067726" cy="1168714"/>
+          </a:xfrm>
+          <a:prstGeom prst="rect">
+            <a:avLst/>
+          </a:prstGeom>
+          <a:noFill/>
+          <a:extLst>
+            <a:ext uri="{909E8E84-426E-40DD-AFC4-6F175D3DCCD1}">
+              <a14:hiddenFill xmlns:a14="http://schemas.microsoft.com/office/drawing/2010/main">
+                <a:solidFill>
+                  <a:srgbClr val="FFFFFF"/>
+                </a:solidFill>
+              </a14:hiddenFill>
+            </a:ext>
+          </a:extLst>
+        </p:spPr>
+      </p:pic>
+      <p:pic>
+        <p:nvPicPr>
+          <p:cNvPr id="2052" name="Picture 4" descr="Google Drive - Wikipedia">
+            <a:extLst>
+              <a:ext uri="{FF2B5EF4-FFF2-40B4-BE49-F238E27FC236}">
+                <a16:creationId xmlns:a16="http://schemas.microsoft.com/office/drawing/2014/main" id="{C093FB46-E22D-403B-8679-CDC38DFDB5C8}"/>
+              </a:ext>
+            </a:extLst>
+          </p:cNvPr>
+          <p:cNvPicPr>
+            <a:picLocks noChangeAspect="1" noChangeArrowheads="1"/>
+          </p:cNvPicPr>
+          <p:nvPr/>
+        </p:nvPicPr>
+        <p:blipFill>
+          <a:blip r:embed="rId5">
+            <a:extLst>
+              <a:ext uri="{28A0092B-C50C-407E-A947-70E740481C1C}">
+                <a14:useLocalDpi xmlns:a14="http://schemas.microsoft.com/office/drawing/2010/main" val="0"/>
+              </a:ext>
+            </a:extLst>
+          </a:blip>
+          <a:srcRect/>
+          <a:stretch>
+            <a:fillRect/>
+          </a:stretch>
+        </p:blipFill>
+        <p:spPr bwMode="auto">
+          <a:xfrm>
+            <a:off x="8836464" y="793446"/>
+            <a:ext cx="1349378" cy="1207038"/>
+          </a:xfrm>
+          <a:prstGeom prst="rect">
+            <a:avLst/>
+          </a:prstGeom>
+          <a:noFill/>
+          <a:extLst>
+            <a:ext uri="{909E8E84-426E-40DD-AFC4-6F175D3DCCD1}">
+              <a14:hiddenFill xmlns:a14="http://schemas.microsoft.com/office/drawing/2010/main">
+                <a:solidFill>
+                  <a:srgbClr val="FFFFFF"/>
+                </a:solidFill>
+              </a14:hiddenFill>
+            </a:ext>
+          </a:extLst>
+        </p:spPr>
+      </p:pic>
+      <p:pic>
+        <p:nvPicPr>
+          <p:cNvPr id="2054" name="Picture 6">
+            <a:extLst>
+              <a:ext uri="{FF2B5EF4-FFF2-40B4-BE49-F238E27FC236}">
+                <a16:creationId xmlns:a16="http://schemas.microsoft.com/office/drawing/2014/main" id="{4518CB52-3E47-4504-895F-F1150B106FFB}"/>
+              </a:ext>
+            </a:extLst>
+          </p:cNvPr>
+          <p:cNvPicPr>
+            <a:picLocks noChangeAspect="1" noChangeArrowheads="1"/>
+          </p:cNvPicPr>
+          <p:nvPr/>
+        </p:nvPicPr>
+        <p:blipFill>
+          <a:blip r:embed="rId6">
+            <a:extLst>
+              <a:ext uri="{28A0092B-C50C-407E-A947-70E740481C1C}">
+                <a14:useLocalDpi xmlns:a14="http://schemas.microsoft.com/office/drawing/2010/main" val="0"/>
+              </a:ext>
+            </a:extLst>
+          </a:blip>
+          <a:srcRect/>
+          <a:stretch>
+            <a:fillRect/>
+          </a:stretch>
+        </p:blipFill>
+        <p:spPr bwMode="auto">
+          <a:xfrm>
+            <a:off x="8044831" y="2428805"/>
+            <a:ext cx="1207039" cy="1207039"/>
+          </a:xfrm>
+          <a:prstGeom prst="rect">
+            <a:avLst/>
+          </a:prstGeom>
+          <a:noFill/>
+          <a:extLst>
+            <a:ext uri="{909E8E84-426E-40DD-AFC4-6F175D3DCCD1}">
+              <a14:hiddenFill xmlns:a14="http://schemas.microsoft.com/office/drawing/2010/main">
+                <a:solidFill>
+                  <a:srgbClr val="FFFFFF"/>
+                </a:solidFill>
+              </a14:hiddenFill>
+            </a:ext>
+          </a:extLst>
         </p:spPr>
       </p:pic>
     </p:spTree>
@@ -4612,92 +5747,12 @@
           <a:chExt cx="0" cy="0"/>
         </a:xfrm>
       </p:grpSpPr>
-      <p:sp>
-        <p:nvSpPr>
-          <p:cNvPr id="2" name="Cím 1">
-            <a:extLst>
-              <a:ext uri="{FF2B5EF4-FFF2-40B4-BE49-F238E27FC236}">
-                <a16:creationId xmlns:a16="http://schemas.microsoft.com/office/drawing/2014/main" id="{8927A1CC-B626-4FD7-B5EA-AC6C07E391B8}"/>
-              </a:ext>
-            </a:extLst>
-          </p:cNvPr>
-          <p:cNvSpPr>
-            <a:spLocks noGrp="1"/>
-          </p:cNvSpPr>
-          <p:nvPr>
-            <p:ph type="title"/>
-          </p:nvPr>
-        </p:nvSpPr>
-        <p:spPr/>
-        <p:txBody>
-          <a:bodyPr/>
-          <a:lstStyle/>
-          <a:p>
-            <a:r>
-              <a:rPr lang="hu-HU" dirty="0">
-                <a:latin typeface="Times New Roman" panose="02020603050405020304" pitchFamily="18" charset="0"/>
-                <a:cs typeface="Times New Roman" panose="02020603050405020304" pitchFamily="18" charset="0"/>
-              </a:rPr>
-              <a:t>Miért jobb a StockMaster?</a:t>
-            </a:r>
-          </a:p>
-        </p:txBody>
-      </p:sp>
-      <p:sp>
-        <p:nvSpPr>
-          <p:cNvPr id="3" name="Tartalom helye 2">
-            <a:extLst>
-              <a:ext uri="{FF2B5EF4-FFF2-40B4-BE49-F238E27FC236}">
-                <a16:creationId xmlns:a16="http://schemas.microsoft.com/office/drawing/2014/main" id="{9E63D8CE-BC1C-4416-BCBB-04C7AEC9E365}"/>
-              </a:ext>
-            </a:extLst>
-          </p:cNvPr>
-          <p:cNvSpPr>
-            <a:spLocks noGrp="1"/>
-          </p:cNvSpPr>
-          <p:nvPr>
-            <p:ph idx="1"/>
-          </p:nvPr>
-        </p:nvSpPr>
-        <p:spPr/>
-        <p:txBody>
-          <a:bodyPr/>
-          <a:lstStyle/>
-          <a:p>
-            <a:r>
-              <a:rPr lang="hu-HU" dirty="0">
-                <a:latin typeface="Times New Roman" panose="02020603050405020304" pitchFamily="18" charset="0"/>
-                <a:cs typeface="Times New Roman" panose="02020603050405020304" pitchFamily="18" charset="0"/>
-              </a:rPr>
-              <a:t>Összetett oktatás: Nem csak grafikon, hanem tananyag is. </a:t>
-            </a:r>
-          </a:p>
-          <a:p>
-            <a:r>
-              <a:rPr lang="hu-HU" dirty="0">
-                <a:latin typeface="Times New Roman" panose="02020603050405020304" pitchFamily="18" charset="0"/>
-                <a:cs typeface="Times New Roman" panose="02020603050405020304" pitchFamily="18" charset="0"/>
-              </a:rPr>
-              <a:t>Realista szimuláció: Margin és pozíciótípusok kezelése.</a:t>
-            </a:r>
-          </a:p>
-          <a:p>
-            <a:r>
-              <a:rPr lang="hu-HU" dirty="0">
-                <a:latin typeface="Times New Roman" panose="02020603050405020304" pitchFamily="18" charset="0"/>
-                <a:cs typeface="Times New Roman" panose="02020603050405020304" pitchFamily="18" charset="0"/>
-              </a:rPr>
-              <a:t>Fejlődés: A statisztikai modul megmutatja a gyenge pontokat.</a:t>
-            </a:r>
-          </a:p>
-        </p:txBody>
-      </p:sp>
       <p:pic>
         <p:nvPicPr>
-          <p:cNvPr id="5" name="Kép 4">
-            <a:extLst>
-              <a:ext uri="{FF2B5EF4-FFF2-40B4-BE49-F238E27FC236}">
-                <a16:creationId xmlns:a16="http://schemas.microsoft.com/office/drawing/2014/main" id="{7680CDE4-862F-43C6-A965-07B8F9DE1315}"/>
+          <p:cNvPr id="6" name="Kép 5">
+            <a:extLst>
+              <a:ext uri="{FF2B5EF4-FFF2-40B4-BE49-F238E27FC236}">
+                <a16:creationId xmlns:a16="http://schemas.microsoft.com/office/drawing/2014/main" id="{AB058BBB-A56C-4033-9558-393C6400D30E}"/>
               </a:ext>
             </a:extLst>
           </p:cNvPr>
@@ -4708,6 +5763,134 @@
         </p:nvPicPr>
         <p:blipFill>
           <a:blip r:embed="rId3">
+            <a:extLst>
+              <a:ext uri="{28A0092B-C50C-407E-A947-70E740481C1C}">
+                <a14:useLocalDpi xmlns:a14="http://schemas.microsoft.com/office/drawing/2010/main" val="0"/>
+              </a:ext>
+            </a:extLst>
+          </a:blip>
+          <a:stretch>
+            <a:fillRect/>
+          </a:stretch>
+        </p:blipFill>
+        <p:spPr>
+          <a:xfrm>
+            <a:off x="0" y="-6376"/>
+            <a:ext cx="12192000" cy="6864376"/>
+          </a:xfrm>
+          <a:prstGeom prst="rect">
+            <a:avLst/>
+          </a:prstGeom>
+        </p:spPr>
+      </p:pic>
+      <p:sp>
+        <p:nvSpPr>
+          <p:cNvPr id="2" name="Cím 1">
+            <a:extLst>
+              <a:ext uri="{FF2B5EF4-FFF2-40B4-BE49-F238E27FC236}">
+                <a16:creationId xmlns:a16="http://schemas.microsoft.com/office/drawing/2014/main" id="{8927A1CC-B626-4FD7-B5EA-AC6C07E391B8}"/>
+              </a:ext>
+            </a:extLst>
+          </p:cNvPr>
+          <p:cNvSpPr>
+            <a:spLocks noGrp="1"/>
+          </p:cNvSpPr>
+          <p:nvPr>
+            <p:ph type="title"/>
+          </p:nvPr>
+        </p:nvSpPr>
+        <p:spPr/>
+        <p:txBody>
+          <a:bodyPr/>
+          <a:lstStyle/>
+          <a:p>
+            <a:r>
+              <a:rPr lang="hu-HU" dirty="0">
+                <a:solidFill>
+                  <a:schemeClr val="bg1"/>
+                </a:solidFill>
+                <a:latin typeface="Times New Roman" panose="02020603050405020304" pitchFamily="18" charset="0"/>
+                <a:cs typeface="Times New Roman" panose="02020603050405020304" pitchFamily="18" charset="0"/>
+              </a:rPr>
+              <a:t>Miért jobb a StockMaster?</a:t>
+            </a:r>
+          </a:p>
+        </p:txBody>
+      </p:sp>
+      <p:sp>
+        <p:nvSpPr>
+          <p:cNvPr id="3" name="Tartalom helye 2">
+            <a:extLst>
+              <a:ext uri="{FF2B5EF4-FFF2-40B4-BE49-F238E27FC236}">
+                <a16:creationId xmlns:a16="http://schemas.microsoft.com/office/drawing/2014/main" id="{9E63D8CE-BC1C-4416-BCBB-04C7AEC9E365}"/>
+              </a:ext>
+            </a:extLst>
+          </p:cNvPr>
+          <p:cNvSpPr>
+            <a:spLocks noGrp="1"/>
+          </p:cNvSpPr>
+          <p:nvPr>
+            <p:ph idx="1"/>
+          </p:nvPr>
+        </p:nvSpPr>
+        <p:spPr/>
+        <p:txBody>
+          <a:bodyPr/>
+          <a:lstStyle/>
+          <a:p>
+            <a:r>
+              <a:rPr lang="hu-HU" dirty="0">
+                <a:solidFill>
+                  <a:schemeClr val="bg1"/>
+                </a:solidFill>
+                <a:latin typeface="Times New Roman" panose="02020603050405020304" pitchFamily="18" charset="0"/>
+                <a:cs typeface="Times New Roman" panose="02020603050405020304" pitchFamily="18" charset="0"/>
+              </a:rPr>
+              <a:t>Összetett oktatás: Nem csak grafikon, hanem tananyag is. </a:t>
+            </a:r>
+          </a:p>
+          <a:p>
+            <a:r>
+              <a:rPr lang="hu-HU" dirty="0">
+                <a:solidFill>
+                  <a:schemeClr val="bg1"/>
+                </a:solidFill>
+                <a:latin typeface="Times New Roman" panose="02020603050405020304" pitchFamily="18" charset="0"/>
+                <a:cs typeface="Times New Roman" panose="02020603050405020304" pitchFamily="18" charset="0"/>
+              </a:rPr>
+              <a:t>Kockázatmentes Realizmus: Valós piaci adatok és gyertya-diagramok használata virtuális tőkével. </a:t>
+            </a:r>
+          </a:p>
+          <a:p>
+            <a:r>
+              <a:rPr lang="hu-HU" dirty="0">
+                <a:solidFill>
+                  <a:schemeClr val="bg1"/>
+                </a:solidFill>
+                <a:latin typeface="Times New Roman" panose="02020603050405020304" pitchFamily="18" charset="0"/>
+                <a:cs typeface="Times New Roman" panose="02020603050405020304" pitchFamily="18" charset="0"/>
+              </a:rPr>
+              <a:t>Személyre szabhatóság: Felhasználói igényekre szabható felület és értesítési rendszer.</a:t>
+            </a:r>
+          </a:p>
+        </p:txBody>
+      </p:sp>
+      <p:pic>
+        <p:nvPicPr>
+          <p:cNvPr id="5" name="Kép 4">
+            <a:extLst>
+              <a:ext uri="{FF2B5EF4-FFF2-40B4-BE49-F238E27FC236}">
+                <a16:creationId xmlns:a16="http://schemas.microsoft.com/office/drawing/2014/main" id="{7680CDE4-862F-43C6-A965-07B8F9DE1315}"/>
+              </a:ext>
+            </a:extLst>
+          </p:cNvPr>
+          <p:cNvPicPr>
+            <a:picLocks noChangeAspect="1"/>
+          </p:cNvPicPr>
+          <p:nvPr/>
+        </p:nvPicPr>
+        <p:blipFill>
+          <a:blip r:embed="rId4">
             <a:extLst>
               <a:ext uri="{28A0092B-C50C-407E-A947-70E740481C1C}">
                 <a14:useLocalDpi xmlns:a14="http://schemas.microsoft.com/office/drawing/2010/main" val="0"/>
@@ -4758,68 +5941,12 @@
           <a:chExt cx="0" cy="0"/>
         </a:xfrm>
       </p:grpSpPr>
-      <p:sp>
-        <p:nvSpPr>
-          <p:cNvPr id="2" name="Cím 1">
-            <a:extLst>
-              <a:ext uri="{FF2B5EF4-FFF2-40B4-BE49-F238E27FC236}">
-                <a16:creationId xmlns:a16="http://schemas.microsoft.com/office/drawing/2014/main" id="{E4440782-A7ED-4345-8A29-4337A7F82B4E}"/>
-              </a:ext>
-            </a:extLst>
-          </p:cNvPr>
-          <p:cNvSpPr>
-            <a:spLocks noGrp="1"/>
-          </p:cNvSpPr>
-          <p:nvPr>
-            <p:ph type="title"/>
-          </p:nvPr>
-        </p:nvSpPr>
-        <p:spPr/>
-        <p:txBody>
-          <a:bodyPr/>
-          <a:lstStyle/>
-          <a:p>
-            <a:r>
-              <a:rPr lang="hu-HU" dirty="0">
-                <a:latin typeface="Times New Roman" panose="02020603050405020304" pitchFamily="18" charset="0"/>
-                <a:cs typeface="Times New Roman" panose="02020603050405020304" pitchFamily="18" charset="0"/>
-              </a:rPr>
-              <a:t>Jövőbeli fejlesztések</a:t>
-            </a:r>
-          </a:p>
-        </p:txBody>
-      </p:sp>
-      <p:sp>
-        <p:nvSpPr>
-          <p:cNvPr id="3" name="Tartalom helye 2">
-            <a:extLst>
-              <a:ext uri="{FF2B5EF4-FFF2-40B4-BE49-F238E27FC236}">
-                <a16:creationId xmlns:a16="http://schemas.microsoft.com/office/drawing/2014/main" id="{C550714E-464D-4685-89EA-4ECECDF35DEF}"/>
-              </a:ext>
-            </a:extLst>
-          </p:cNvPr>
-          <p:cNvSpPr>
-            <a:spLocks noGrp="1"/>
-          </p:cNvSpPr>
-          <p:nvPr>
-            <p:ph idx="1"/>
-          </p:nvPr>
-        </p:nvSpPr>
-        <p:spPr/>
-        <p:txBody>
-          <a:bodyPr/>
-          <a:lstStyle/>
-          <a:p>
-            <a:endParaRPr lang="hu-HU" dirty="0"/>
-          </a:p>
-        </p:txBody>
-      </p:sp>
       <p:pic>
         <p:nvPicPr>
-          <p:cNvPr id="4" name="Kép 3">
-            <a:extLst>
-              <a:ext uri="{FF2B5EF4-FFF2-40B4-BE49-F238E27FC236}">
-                <a16:creationId xmlns:a16="http://schemas.microsoft.com/office/drawing/2014/main" id="{B75176DE-3290-4929-8BF7-9731DD2A0AA4}"/>
+          <p:cNvPr id="7" name="Kép 6">
+            <a:extLst>
+              <a:ext uri="{FF2B5EF4-FFF2-40B4-BE49-F238E27FC236}">
+                <a16:creationId xmlns:a16="http://schemas.microsoft.com/office/drawing/2014/main" id="{FAFE987A-C355-4DD6-9E62-033024DC627F}"/>
               </a:ext>
             </a:extLst>
           </p:cNvPr>
@@ -4829,7 +5956,119 @@
           <p:nvPr/>
         </p:nvPicPr>
         <p:blipFill>
-          <a:blip r:embed="rId2">
+          <a:blip r:embed="rId3">
+            <a:extLst>
+              <a:ext uri="{28A0092B-C50C-407E-A947-70E740481C1C}">
+                <a14:useLocalDpi xmlns:a14="http://schemas.microsoft.com/office/drawing/2010/main" val="0"/>
+              </a:ext>
+            </a:extLst>
+          </a:blip>
+          <a:stretch>
+            <a:fillRect/>
+          </a:stretch>
+        </p:blipFill>
+        <p:spPr>
+          <a:xfrm>
+            <a:off x="0" y="-6376"/>
+            <a:ext cx="12192000" cy="6864376"/>
+          </a:xfrm>
+          <a:prstGeom prst="rect">
+            <a:avLst/>
+          </a:prstGeom>
+        </p:spPr>
+      </p:pic>
+      <p:sp>
+        <p:nvSpPr>
+          <p:cNvPr id="2" name="Cím 1">
+            <a:extLst>
+              <a:ext uri="{FF2B5EF4-FFF2-40B4-BE49-F238E27FC236}">
+                <a16:creationId xmlns:a16="http://schemas.microsoft.com/office/drawing/2014/main" id="{E4440782-A7ED-4345-8A29-4337A7F82B4E}"/>
+              </a:ext>
+            </a:extLst>
+          </p:cNvPr>
+          <p:cNvSpPr>
+            <a:spLocks noGrp="1"/>
+          </p:cNvSpPr>
+          <p:nvPr>
+            <p:ph type="title"/>
+          </p:nvPr>
+        </p:nvSpPr>
+        <p:spPr/>
+        <p:txBody>
+          <a:bodyPr/>
+          <a:lstStyle/>
+          <a:p>
+            <a:r>
+              <a:rPr lang="hu-HU" dirty="0">
+                <a:solidFill>
+                  <a:schemeClr val="bg1"/>
+                </a:solidFill>
+                <a:latin typeface="Times New Roman" panose="02020603050405020304" pitchFamily="18" charset="0"/>
+                <a:cs typeface="Times New Roman" panose="02020603050405020304" pitchFamily="18" charset="0"/>
+              </a:rPr>
+              <a:t>Jövőbeli fejlesztések</a:t>
+            </a:r>
+          </a:p>
+        </p:txBody>
+      </p:sp>
+      <p:sp>
+        <p:nvSpPr>
+          <p:cNvPr id="3" name="Tartalom helye 2">
+            <a:extLst>
+              <a:ext uri="{FF2B5EF4-FFF2-40B4-BE49-F238E27FC236}">
+                <a16:creationId xmlns:a16="http://schemas.microsoft.com/office/drawing/2014/main" id="{C550714E-464D-4685-89EA-4ECECDF35DEF}"/>
+              </a:ext>
+            </a:extLst>
+          </p:cNvPr>
+          <p:cNvSpPr>
+            <a:spLocks noGrp="1"/>
+          </p:cNvSpPr>
+          <p:nvPr>
+            <p:ph idx="1"/>
+          </p:nvPr>
+        </p:nvSpPr>
+        <p:spPr/>
+        <p:txBody>
+          <a:bodyPr/>
+          <a:lstStyle/>
+          <a:p>
+            <a:r>
+              <a:rPr lang="hu-HU" dirty="0">
+                <a:solidFill>
+                  <a:schemeClr val="bg1"/>
+                </a:solidFill>
+              </a:rPr>
+              <a:t>Mobilalkalmazás (iOS/Android): Kereskedés és tanulás bárhol, bármikor.</a:t>
+            </a:r>
+          </a:p>
+          <a:p>
+            <a:r>
+              <a:rPr lang="hu-HU" dirty="0">
+                <a:solidFill>
+                  <a:schemeClr val="bg1"/>
+                </a:solidFill>
+              </a:rPr>
+              <a:t>Éles számla integráció: Átlépés a demó környezetből a valós tőzsdére.</a:t>
+            </a:r>
+          </a:p>
+        </p:txBody>
+      </p:sp>
+      <p:pic>
+        <p:nvPicPr>
+          <p:cNvPr id="4" name="Kép 3">
+            <a:extLst>
+              <a:ext uri="{FF2B5EF4-FFF2-40B4-BE49-F238E27FC236}">
+                <a16:creationId xmlns:a16="http://schemas.microsoft.com/office/drawing/2014/main" id="{B75176DE-3290-4929-8BF7-9731DD2A0AA4}"/>
+              </a:ext>
+            </a:extLst>
+          </p:cNvPr>
+          <p:cNvPicPr>
+            <a:picLocks noChangeAspect="1"/>
+          </p:cNvPicPr>
+          <p:nvPr/>
+        </p:nvPicPr>
+        <p:blipFill>
+          <a:blip r:embed="rId4">
             <a:extLst>
               <a:ext uri="{28A0092B-C50C-407E-A947-70E740481C1C}">
                 <a14:useLocalDpi xmlns:a14="http://schemas.microsoft.com/office/drawing/2010/main" val="0"/>
@@ -4865,7 +6104,7 @@
           <p:nvPr/>
         </p:nvPicPr>
         <p:blipFill>
-          <a:blip r:embed="rId2">
+          <a:blip r:embed="rId4">
             <a:extLst>
               <a:ext uri="{28A0092B-C50C-407E-A947-70E740481C1C}">
                 <a14:useLocalDpi xmlns:a14="http://schemas.microsoft.com/office/drawing/2010/main" val="0"/>
@@ -5074,154 +6313,12 @@
           <a:chExt cx="0" cy="0"/>
         </a:xfrm>
       </p:grpSpPr>
-      <p:sp>
-        <p:nvSpPr>
-          <p:cNvPr id="2" name="Cím 1">
-            <a:extLst>
-              <a:ext uri="{FF2B5EF4-FFF2-40B4-BE49-F238E27FC236}">
-                <a16:creationId xmlns:a16="http://schemas.microsoft.com/office/drawing/2014/main" id="{1DB3A2EC-3FF1-45FD-9E7F-AD4C29C19B58}"/>
-              </a:ext>
-            </a:extLst>
-          </p:cNvPr>
-          <p:cNvSpPr>
-            <a:spLocks noGrp="1"/>
-          </p:cNvSpPr>
-          <p:nvPr>
-            <p:ph type="title"/>
-          </p:nvPr>
-        </p:nvSpPr>
-        <p:spPr/>
-        <p:txBody>
-          <a:bodyPr/>
-          <a:lstStyle/>
-          <a:p>
-            <a:r>
-              <a:rPr lang="hu-HU" dirty="0">
-                <a:latin typeface="Times New Roman" panose="02020603050405020304" pitchFamily="18" charset="0"/>
-                <a:cs typeface="Times New Roman" panose="02020603050405020304" pitchFamily="18" charset="0"/>
-              </a:rPr>
-              <a:t>Projektleírás-Mi az a StockMaster?</a:t>
-            </a:r>
-          </a:p>
-        </p:txBody>
-      </p:sp>
-      <p:sp>
-        <p:nvSpPr>
-          <p:cNvPr id="3" name="Tartalom helye 2">
-            <a:extLst>
-              <a:ext uri="{FF2B5EF4-FFF2-40B4-BE49-F238E27FC236}">
-                <a16:creationId xmlns:a16="http://schemas.microsoft.com/office/drawing/2014/main" id="{717C6D83-3EED-46B1-B268-15692DF84146}"/>
-              </a:ext>
-            </a:extLst>
-          </p:cNvPr>
-          <p:cNvSpPr>
-            <a:spLocks noGrp="1"/>
-          </p:cNvSpPr>
-          <p:nvPr>
-            <p:ph idx="1"/>
-          </p:nvPr>
-        </p:nvSpPr>
-        <p:spPr/>
-        <p:txBody>
-          <a:bodyPr/>
-          <a:lstStyle/>
-          <a:p>
-            <a:pPr algn="l"/>
-            <a:r>
-              <a:rPr lang="hu-HU" b="0" i="0" dirty="0">
-                <a:solidFill>
-                  <a:srgbClr val="1F1F1F"/>
-                </a:solidFill>
-                <a:effectLst/>
-                <a:latin typeface="Times New Roman" panose="02020603050405020304" pitchFamily="18" charset="0"/>
-                <a:cs typeface="Times New Roman" panose="02020603050405020304" pitchFamily="18" charset="0"/>
-              </a:rPr>
-              <a:t>Felhasználóbarát oktató alkalmazás kezdőknek. </a:t>
-            </a:r>
-          </a:p>
-          <a:p>
-            <a:pPr algn="l"/>
-            <a:r>
-              <a:rPr lang="hu-HU" b="0" i="0" dirty="0">
-                <a:solidFill>
-                  <a:srgbClr val="1F1F1F"/>
-                </a:solidFill>
-                <a:effectLst/>
-                <a:latin typeface="Times New Roman" panose="02020603050405020304" pitchFamily="18" charset="0"/>
-                <a:cs typeface="Times New Roman" panose="02020603050405020304" pitchFamily="18" charset="0"/>
-              </a:rPr>
-              <a:t>Interaktív tanulási környezet: elmélet és gyakorlat együtt.</a:t>
-            </a:r>
-          </a:p>
-          <a:p>
-            <a:pPr algn="l"/>
-            <a:r>
-              <a:rPr lang="hu-HU" b="0" i="0" dirty="0">
-                <a:solidFill>
-                  <a:srgbClr val="1F1F1F"/>
-                </a:solidFill>
-                <a:effectLst/>
-                <a:latin typeface="Times New Roman" panose="02020603050405020304" pitchFamily="18" charset="0"/>
-                <a:cs typeface="Times New Roman" panose="02020603050405020304" pitchFamily="18" charset="0"/>
-              </a:rPr>
-              <a:t>Egy kockázatmentes „</a:t>
-            </a:r>
-            <a:r>
-              <a:rPr lang="hu-HU" b="0" i="0" dirty="0" err="1">
-                <a:solidFill>
-                  <a:srgbClr val="1F1F1F"/>
-                </a:solidFill>
-                <a:effectLst/>
-                <a:latin typeface="Times New Roman" panose="02020603050405020304" pitchFamily="18" charset="0"/>
-                <a:cs typeface="Times New Roman" panose="02020603050405020304" pitchFamily="18" charset="0"/>
-              </a:rPr>
-              <a:t>demo</a:t>
-            </a:r>
-            <a:r>
-              <a:rPr lang="hu-HU" b="0" i="0" dirty="0">
-                <a:solidFill>
-                  <a:srgbClr val="1F1F1F"/>
-                </a:solidFill>
-                <a:effectLst/>
-                <a:latin typeface="Times New Roman" panose="02020603050405020304" pitchFamily="18" charset="0"/>
-                <a:cs typeface="Times New Roman" panose="02020603050405020304" pitchFamily="18" charset="0"/>
-              </a:rPr>
-              <a:t>” környezet, ahol elméleti tudás (</a:t>
-            </a:r>
-            <a:r>
-              <a:rPr lang="hu-HU" b="0" i="0" dirty="0" err="1">
-                <a:solidFill>
-                  <a:srgbClr val="1F1F1F"/>
-                </a:solidFill>
-                <a:effectLst/>
-                <a:latin typeface="Times New Roman" panose="02020603050405020304" pitchFamily="18" charset="0"/>
-                <a:cs typeface="Times New Roman" panose="02020603050405020304" pitchFamily="18" charset="0"/>
-              </a:rPr>
-              <a:t>tutorialok</a:t>
-            </a:r>
-            <a:r>
-              <a:rPr lang="hu-HU" b="0" i="0" dirty="0">
-                <a:solidFill>
-                  <a:srgbClr val="1F1F1F"/>
-                </a:solidFill>
-                <a:effectLst/>
-                <a:latin typeface="Times New Roman" panose="02020603050405020304" pitchFamily="18" charset="0"/>
-                <a:cs typeface="Times New Roman" panose="02020603050405020304" pitchFamily="18" charset="0"/>
-              </a:rPr>
-              <a:t>) és gyakorlati szimuláció találkozik. </a:t>
-            </a:r>
-          </a:p>
-          <a:p>
-            <a:endParaRPr lang="hu-HU" dirty="0"/>
-          </a:p>
-        </p:txBody>
-      </p:sp>
       <p:pic>
         <p:nvPicPr>
-          <p:cNvPr id="12" name="Kép 11">
-            <a:extLst>
-              <a:ext uri="{FF2B5EF4-FFF2-40B4-BE49-F238E27FC236}">
-                <a16:creationId xmlns:a16="http://schemas.microsoft.com/office/drawing/2014/main" id="{9D706776-77F4-47F3-84BC-F5E36CEFA94C}"/>
+          <p:cNvPr id="10" name="Kép 9">
+            <a:extLst>
+              <a:ext uri="{FF2B5EF4-FFF2-40B4-BE49-F238E27FC236}">
+                <a16:creationId xmlns:a16="http://schemas.microsoft.com/office/drawing/2014/main" id="{3F4C0FD4-3B12-4C7B-93C1-8791E1A1077B}"/>
               </a:ext>
             </a:extLst>
           </p:cNvPr>
@@ -5244,7 +6341,212 @@
         </p:blipFill>
         <p:spPr>
           <a:xfrm>
-            <a:off x="0" y="5789176"/>
+            <a:off x="0" y="-6376"/>
+            <a:ext cx="12192000" cy="6864376"/>
+          </a:xfrm>
+          <a:prstGeom prst="rect">
+            <a:avLst/>
+          </a:prstGeom>
+        </p:spPr>
+      </p:pic>
+      <p:sp>
+        <p:nvSpPr>
+          <p:cNvPr id="2" name="Cím 1">
+            <a:extLst>
+              <a:ext uri="{FF2B5EF4-FFF2-40B4-BE49-F238E27FC236}">
+                <a16:creationId xmlns:a16="http://schemas.microsoft.com/office/drawing/2014/main" id="{1DB3A2EC-3FF1-45FD-9E7F-AD4C29C19B58}"/>
+              </a:ext>
+            </a:extLst>
+          </p:cNvPr>
+          <p:cNvSpPr>
+            <a:spLocks noGrp="1"/>
+          </p:cNvSpPr>
+          <p:nvPr>
+            <p:ph type="title"/>
+          </p:nvPr>
+        </p:nvSpPr>
+        <p:spPr>
+          <a:xfrm>
+            <a:off x="896856" y="27989"/>
+            <a:ext cx="12191999" cy="1485900"/>
+          </a:xfrm>
+        </p:spPr>
+        <p:txBody>
+          <a:bodyPr/>
+          <a:lstStyle/>
+          <a:p>
+            <a:r>
+              <a:rPr lang="hu-HU" dirty="0">
+                <a:solidFill>
+                  <a:schemeClr val="bg1"/>
+                </a:solidFill>
+                <a:latin typeface="Times New Roman" panose="02020603050405020304" pitchFamily="18" charset="0"/>
+                <a:cs typeface="Times New Roman" panose="02020603050405020304" pitchFamily="18" charset="0"/>
+              </a:rPr>
+              <a:t>Projektleírás</a:t>
+            </a:r>
+          </a:p>
+        </p:txBody>
+      </p:sp>
+      <p:sp>
+        <p:nvSpPr>
+          <p:cNvPr id="3" name="Tartalom helye 2">
+            <a:extLst>
+              <a:ext uri="{FF2B5EF4-FFF2-40B4-BE49-F238E27FC236}">
+                <a16:creationId xmlns:a16="http://schemas.microsoft.com/office/drawing/2014/main" id="{717C6D83-3EED-46B1-B268-15692DF84146}"/>
+              </a:ext>
+            </a:extLst>
+          </p:cNvPr>
+          <p:cNvSpPr>
+            <a:spLocks noGrp="1"/>
+          </p:cNvSpPr>
+          <p:nvPr>
+            <p:ph idx="1"/>
+          </p:nvPr>
+        </p:nvSpPr>
+        <p:spPr>
+          <a:xfrm>
+            <a:off x="896855" y="1513889"/>
+            <a:ext cx="8114297" cy="4251910"/>
+          </a:xfrm>
+        </p:spPr>
+        <p:txBody>
+          <a:bodyPr/>
+          <a:lstStyle/>
+          <a:p>
+            <a:pPr algn="l"/>
+            <a:r>
+              <a:rPr lang="hu-HU" b="0" i="0" dirty="0">
+                <a:solidFill>
+                  <a:schemeClr val="bg1"/>
+                </a:solidFill>
+                <a:effectLst/>
+                <a:latin typeface="Times New Roman" panose="02020603050405020304" pitchFamily="18" charset="0"/>
+                <a:cs typeface="Times New Roman" panose="02020603050405020304" pitchFamily="18" charset="0"/>
+              </a:rPr>
+              <a:t>Online tőzsdei platform valós idejű árakkal</a:t>
+            </a:r>
+          </a:p>
+          <a:p>
+            <a:pPr algn="l"/>
+            <a:r>
+              <a:rPr lang="hu-HU" b="0" i="0" dirty="0">
+                <a:solidFill>
+                  <a:schemeClr val="bg1"/>
+                </a:solidFill>
+                <a:effectLst/>
+                <a:latin typeface="Times New Roman" panose="02020603050405020304" pitchFamily="18" charset="0"/>
+                <a:cs typeface="Times New Roman" panose="02020603050405020304" pitchFamily="18" charset="0"/>
+              </a:rPr>
+              <a:t>Felhasználóbarát oktató alkalmazás kezdőknek. </a:t>
+            </a:r>
+          </a:p>
+          <a:p>
+            <a:pPr algn="l"/>
+            <a:r>
+              <a:rPr lang="hu-HU" b="0" i="0" dirty="0">
+                <a:solidFill>
+                  <a:schemeClr val="bg1"/>
+                </a:solidFill>
+                <a:effectLst/>
+                <a:latin typeface="Times New Roman" panose="02020603050405020304" pitchFamily="18" charset="0"/>
+                <a:cs typeface="Times New Roman" panose="02020603050405020304" pitchFamily="18" charset="0"/>
+              </a:rPr>
+              <a:t>Interaktív tanulási környezet: elmélet és gyakorlat együtt.</a:t>
+            </a:r>
+          </a:p>
+          <a:p>
+            <a:pPr algn="l"/>
+            <a:r>
+              <a:rPr lang="hu-HU" b="0" i="0" dirty="0">
+                <a:solidFill>
+                  <a:schemeClr val="bg1"/>
+                </a:solidFill>
+                <a:effectLst/>
+                <a:latin typeface="Times New Roman" panose="02020603050405020304" pitchFamily="18" charset="0"/>
+                <a:cs typeface="Times New Roman" panose="02020603050405020304" pitchFamily="18" charset="0"/>
+              </a:rPr>
+              <a:t>Egy kockázatmentes „</a:t>
+            </a:r>
+            <a:r>
+              <a:rPr lang="hu-HU" b="0" i="0" dirty="0" err="1">
+                <a:solidFill>
+                  <a:schemeClr val="bg1"/>
+                </a:solidFill>
+                <a:effectLst/>
+                <a:latin typeface="Times New Roman" panose="02020603050405020304" pitchFamily="18" charset="0"/>
+                <a:cs typeface="Times New Roman" panose="02020603050405020304" pitchFamily="18" charset="0"/>
+              </a:rPr>
+              <a:t>demo</a:t>
+            </a:r>
+            <a:r>
+              <a:rPr lang="hu-HU" b="0" i="0" dirty="0">
+                <a:solidFill>
+                  <a:schemeClr val="bg1"/>
+                </a:solidFill>
+                <a:effectLst/>
+                <a:latin typeface="Times New Roman" panose="02020603050405020304" pitchFamily="18" charset="0"/>
+                <a:cs typeface="Times New Roman" panose="02020603050405020304" pitchFamily="18" charset="0"/>
+              </a:rPr>
+              <a:t>” környezet, ahol elméleti tudás (</a:t>
+            </a:r>
+            <a:r>
+              <a:rPr lang="hu-HU" b="0" i="0" dirty="0" err="1">
+                <a:solidFill>
+                  <a:schemeClr val="bg1"/>
+                </a:solidFill>
+                <a:effectLst/>
+                <a:latin typeface="Times New Roman" panose="02020603050405020304" pitchFamily="18" charset="0"/>
+                <a:cs typeface="Times New Roman" panose="02020603050405020304" pitchFamily="18" charset="0"/>
+              </a:rPr>
+              <a:t>tutorialok</a:t>
+            </a:r>
+            <a:r>
+              <a:rPr lang="hu-HU" b="0" i="0" dirty="0">
+                <a:solidFill>
+                  <a:schemeClr val="bg1"/>
+                </a:solidFill>
+                <a:effectLst/>
+                <a:latin typeface="Times New Roman" panose="02020603050405020304" pitchFamily="18" charset="0"/>
+                <a:cs typeface="Times New Roman" panose="02020603050405020304" pitchFamily="18" charset="0"/>
+              </a:rPr>
+              <a:t>) és gyakorlati szimuláció találkozik. </a:t>
+            </a:r>
+          </a:p>
+          <a:p>
+            <a:endParaRPr lang="hu-HU" dirty="0"/>
+          </a:p>
+        </p:txBody>
+      </p:sp>
+      <p:pic>
+        <p:nvPicPr>
+          <p:cNvPr id="12" name="Kép 11">
+            <a:extLst>
+              <a:ext uri="{FF2B5EF4-FFF2-40B4-BE49-F238E27FC236}">
+                <a16:creationId xmlns:a16="http://schemas.microsoft.com/office/drawing/2014/main" id="{9D706776-77F4-47F3-84BC-F5E36CEFA94C}"/>
+              </a:ext>
+            </a:extLst>
+          </p:cNvPr>
+          <p:cNvPicPr>
+            <a:picLocks noChangeAspect="1"/>
+          </p:cNvPicPr>
+          <p:nvPr/>
+        </p:nvPicPr>
+        <p:blipFill>
+          <a:blip r:embed="rId4">
+            <a:extLst>
+              <a:ext uri="{28A0092B-C50C-407E-A947-70E740481C1C}">
+                <a14:useLocalDpi xmlns:a14="http://schemas.microsoft.com/office/drawing/2010/main" val="0"/>
+              </a:ext>
+            </a:extLst>
+          </a:blip>
+          <a:stretch>
+            <a:fillRect/>
+          </a:stretch>
+        </p:blipFill>
+        <p:spPr>
+          <a:xfrm>
+            <a:off x="0" y="5812553"/>
             <a:ext cx="1045447" cy="1045447"/>
           </a:xfrm>
           <a:prstGeom prst="rect">
@@ -5282,91 +6584,12 @@
           <a:chExt cx="0" cy="0"/>
         </a:xfrm>
       </p:grpSpPr>
-      <p:sp>
-        <p:nvSpPr>
-          <p:cNvPr id="2" name="Cím 1">
-            <a:extLst>
-              <a:ext uri="{FF2B5EF4-FFF2-40B4-BE49-F238E27FC236}">
-                <a16:creationId xmlns:a16="http://schemas.microsoft.com/office/drawing/2014/main" id="{B0CC253A-6FB0-432F-8A80-F7D10E0D42E2}"/>
-              </a:ext>
-            </a:extLst>
-          </p:cNvPr>
-          <p:cNvSpPr>
-            <a:spLocks noGrp="1"/>
-          </p:cNvSpPr>
-          <p:nvPr>
-            <p:ph type="title"/>
-          </p:nvPr>
-        </p:nvSpPr>
-        <p:spPr/>
-        <p:txBody>
-          <a:bodyPr/>
-          <a:lstStyle/>
-          <a:p>
-            <a:r>
-              <a:rPr lang="hu-HU" dirty="0">
-                <a:latin typeface="Times New Roman" panose="02020603050405020304" pitchFamily="18" charset="0"/>
-                <a:cs typeface="Times New Roman" panose="02020603050405020304" pitchFamily="18" charset="0"/>
-              </a:rPr>
-              <a:t>Célfelhasználók</a:t>
-            </a:r>
-          </a:p>
-        </p:txBody>
-      </p:sp>
-      <p:sp>
-        <p:nvSpPr>
-          <p:cNvPr id="3" name="Tartalom helye 2">
-            <a:extLst>
-              <a:ext uri="{FF2B5EF4-FFF2-40B4-BE49-F238E27FC236}">
-                <a16:creationId xmlns:a16="http://schemas.microsoft.com/office/drawing/2014/main" id="{3D5B99B1-1770-4900-B64F-C7300B2AF165}"/>
-              </a:ext>
-            </a:extLst>
-          </p:cNvPr>
-          <p:cNvSpPr>
-            <a:spLocks noGrp="1"/>
-          </p:cNvSpPr>
-          <p:nvPr>
-            <p:ph idx="1"/>
-          </p:nvPr>
-        </p:nvSpPr>
-        <p:spPr/>
-        <p:txBody>
-          <a:bodyPr/>
-          <a:lstStyle/>
-          <a:p>
-            <a:pPr algn="l"/>
-            <a:r>
-              <a:rPr lang="hu-HU" dirty="0">
-                <a:effectLst/>
-                <a:latin typeface="Times New Roman" panose="02020603050405020304" pitchFamily="18" charset="0"/>
-                <a:cs typeface="Times New Roman" panose="02020603050405020304" pitchFamily="18" charset="0"/>
-              </a:rPr>
-              <a:t>Virtuális környezetben k</a:t>
-            </a:r>
-            <a:r>
-              <a:rPr lang="hu-HU" dirty="0">
-                <a:latin typeface="Times New Roman" panose="02020603050405020304" pitchFamily="18" charset="0"/>
-                <a:cs typeface="Times New Roman" panose="02020603050405020304" pitchFamily="18" charset="0"/>
-              </a:rPr>
-              <a:t>o</a:t>
-            </a:r>
-            <a:r>
-              <a:rPr lang="hu-HU" dirty="0">
-                <a:effectLst/>
-                <a:latin typeface="Times New Roman" panose="02020603050405020304" pitchFamily="18" charset="0"/>
-                <a:cs typeface="Times New Roman" panose="02020603050405020304" pitchFamily="18" charset="0"/>
-              </a:rPr>
-              <a:t>ckázatmentesen gyakorolni akaró kezdők</a:t>
-            </a:r>
-          </a:p>
-        </p:txBody>
-      </p:sp>
       <p:pic>
         <p:nvPicPr>
-          <p:cNvPr id="4" name="Kép 3">
-            <a:extLst>
-              <a:ext uri="{FF2B5EF4-FFF2-40B4-BE49-F238E27FC236}">
-                <a16:creationId xmlns:a16="http://schemas.microsoft.com/office/drawing/2014/main" id="{A0A0F055-EBB1-411D-B216-53E39C91179A}"/>
+          <p:cNvPr id="5" name="Kép 4">
+            <a:extLst>
+              <a:ext uri="{FF2B5EF4-FFF2-40B4-BE49-F238E27FC236}">
+                <a16:creationId xmlns:a16="http://schemas.microsoft.com/office/drawing/2014/main" id="{AC3A42DB-A292-418F-8231-71CA72C379F9}"/>
               </a:ext>
             </a:extLst>
           </p:cNvPr>
@@ -5376,7 +6599,168 @@
           <p:nvPr/>
         </p:nvPicPr>
         <p:blipFill>
-          <a:blip r:embed="rId2">
+          <a:blip r:embed="rId3">
+            <a:extLst>
+              <a:ext uri="{28A0092B-C50C-407E-A947-70E740481C1C}">
+                <a14:useLocalDpi xmlns:a14="http://schemas.microsoft.com/office/drawing/2010/main" val="0"/>
+              </a:ext>
+            </a:extLst>
+          </a:blip>
+          <a:stretch>
+            <a:fillRect/>
+          </a:stretch>
+        </p:blipFill>
+        <p:spPr>
+          <a:xfrm>
+            <a:off x="0" y="-6376"/>
+            <a:ext cx="12192000" cy="6864376"/>
+          </a:xfrm>
+          <a:prstGeom prst="rect">
+            <a:avLst/>
+          </a:prstGeom>
+        </p:spPr>
+      </p:pic>
+      <p:sp>
+        <p:nvSpPr>
+          <p:cNvPr id="2" name="Cím 1">
+            <a:extLst>
+              <a:ext uri="{FF2B5EF4-FFF2-40B4-BE49-F238E27FC236}">
+                <a16:creationId xmlns:a16="http://schemas.microsoft.com/office/drawing/2014/main" id="{B0CC253A-6FB0-432F-8A80-F7D10E0D42E2}"/>
+              </a:ext>
+            </a:extLst>
+          </p:cNvPr>
+          <p:cNvSpPr>
+            <a:spLocks noGrp="1"/>
+          </p:cNvSpPr>
+          <p:nvPr>
+            <p:ph type="title"/>
+          </p:nvPr>
+        </p:nvSpPr>
+        <p:spPr/>
+        <p:txBody>
+          <a:bodyPr/>
+          <a:lstStyle/>
+          <a:p>
+            <a:r>
+              <a:rPr lang="hu-HU" dirty="0">
+                <a:solidFill>
+                  <a:schemeClr val="bg1"/>
+                </a:solidFill>
+                <a:latin typeface="Times New Roman" panose="02020603050405020304" pitchFamily="18" charset="0"/>
+                <a:cs typeface="Times New Roman" panose="02020603050405020304" pitchFamily="18" charset="0"/>
+              </a:rPr>
+              <a:t>Célfelhasználók</a:t>
+            </a:r>
+          </a:p>
+        </p:txBody>
+      </p:sp>
+      <p:sp>
+        <p:nvSpPr>
+          <p:cNvPr id="3" name="Tartalom helye 2">
+            <a:extLst>
+              <a:ext uri="{FF2B5EF4-FFF2-40B4-BE49-F238E27FC236}">
+                <a16:creationId xmlns:a16="http://schemas.microsoft.com/office/drawing/2014/main" id="{3D5B99B1-1770-4900-B64F-C7300B2AF165}"/>
+              </a:ext>
+            </a:extLst>
+          </p:cNvPr>
+          <p:cNvSpPr>
+            <a:spLocks noGrp="1"/>
+          </p:cNvSpPr>
+          <p:nvPr>
+            <p:ph idx="1"/>
+          </p:nvPr>
+        </p:nvSpPr>
+        <p:spPr/>
+        <p:txBody>
+          <a:bodyPr/>
+          <a:lstStyle/>
+          <a:p>
+            <a:pPr algn="l"/>
+            <a:r>
+              <a:rPr lang="hu-HU" dirty="0">
+                <a:solidFill>
+                  <a:schemeClr val="bg1"/>
+                </a:solidFill>
+                <a:effectLst/>
+                <a:latin typeface="Times New Roman" panose="02020603050405020304" pitchFamily="18" charset="0"/>
+                <a:cs typeface="Times New Roman" panose="02020603050405020304" pitchFamily="18" charset="0"/>
+              </a:rPr>
+              <a:t>Virtuális környezetben k</a:t>
+            </a:r>
+            <a:r>
+              <a:rPr lang="hu-HU" dirty="0">
+                <a:solidFill>
+                  <a:schemeClr val="bg1"/>
+                </a:solidFill>
+                <a:latin typeface="Times New Roman" panose="02020603050405020304" pitchFamily="18" charset="0"/>
+                <a:cs typeface="Times New Roman" panose="02020603050405020304" pitchFamily="18" charset="0"/>
+              </a:rPr>
+              <a:t>o</a:t>
+            </a:r>
+            <a:r>
+              <a:rPr lang="hu-HU" dirty="0">
+                <a:solidFill>
+                  <a:schemeClr val="bg1"/>
+                </a:solidFill>
+                <a:effectLst/>
+                <a:latin typeface="Times New Roman" panose="02020603050405020304" pitchFamily="18" charset="0"/>
+                <a:cs typeface="Times New Roman" panose="02020603050405020304" pitchFamily="18" charset="0"/>
+              </a:rPr>
+              <a:t>ckázatmentesen gyakorolni akaró kezdők</a:t>
+            </a:r>
+          </a:p>
+          <a:p>
+            <a:pPr algn="l"/>
+            <a:r>
+              <a:rPr lang="hu-HU" dirty="0">
+                <a:solidFill>
+                  <a:schemeClr val="bg1"/>
+                </a:solidFill>
+                <a:latin typeface="Times New Roman" panose="02020603050405020304" pitchFamily="18" charset="0"/>
+                <a:cs typeface="Times New Roman" panose="02020603050405020304" pitchFamily="18" charset="0"/>
+              </a:rPr>
+              <a:t>A nem túl magabiztos, nem sok tapasztalattal rendelkező kezdő kereskedők</a:t>
+            </a:r>
+          </a:p>
+          <a:p>
+            <a:pPr algn="l"/>
+            <a:r>
+              <a:rPr lang="hu-HU" dirty="0">
+                <a:solidFill>
+                  <a:schemeClr val="bg1"/>
+                </a:solidFill>
+                <a:latin typeface="Times New Roman" panose="02020603050405020304" pitchFamily="18" charset="0"/>
+                <a:cs typeface="Times New Roman" panose="02020603050405020304" pitchFamily="18" charset="0"/>
+              </a:rPr>
+              <a:t>A tapasztalt haladó illetve profi kereskedők egyaránt</a:t>
+            </a:r>
+            <a:endParaRPr lang="hu-HU" dirty="0">
+              <a:solidFill>
+                <a:schemeClr val="bg1"/>
+              </a:solidFill>
+              <a:effectLst/>
+              <a:latin typeface="Times New Roman" panose="02020603050405020304" pitchFamily="18" charset="0"/>
+              <a:cs typeface="Times New Roman" panose="02020603050405020304" pitchFamily="18" charset="0"/>
+            </a:endParaRPr>
+          </a:p>
+        </p:txBody>
+      </p:sp>
+      <p:pic>
+        <p:nvPicPr>
+          <p:cNvPr id="4" name="Kép 3">
+            <a:extLst>
+              <a:ext uri="{FF2B5EF4-FFF2-40B4-BE49-F238E27FC236}">
+                <a16:creationId xmlns:a16="http://schemas.microsoft.com/office/drawing/2014/main" id="{A0A0F055-EBB1-411D-B216-53E39C91179A}"/>
+              </a:ext>
+            </a:extLst>
+          </p:cNvPr>
+          <p:cNvPicPr>
+            <a:picLocks noChangeAspect="1"/>
+          </p:cNvPicPr>
+          <p:nvPr/>
+        </p:nvPicPr>
+        <p:blipFill>
+          <a:blip r:embed="rId4">
             <a:extLst>
               <a:ext uri="{28A0092B-C50C-407E-A947-70E740481C1C}">
                 <a14:useLocalDpi xmlns:a14="http://schemas.microsoft.com/office/drawing/2010/main" val="0"/>
@@ -5427,104 +6811,12 @@
           <a:chExt cx="0" cy="0"/>
         </a:xfrm>
       </p:grpSpPr>
-      <p:sp>
-        <p:nvSpPr>
-          <p:cNvPr id="2" name="Cím 1">
-            <a:extLst>
-              <a:ext uri="{FF2B5EF4-FFF2-40B4-BE49-F238E27FC236}">
-                <a16:creationId xmlns:a16="http://schemas.microsoft.com/office/drawing/2014/main" id="{A8261EA8-6DD7-4200-B757-C3D623FF88D6}"/>
-              </a:ext>
-            </a:extLst>
-          </p:cNvPr>
-          <p:cNvSpPr>
-            <a:spLocks noGrp="1"/>
-          </p:cNvSpPr>
-          <p:nvPr>
-            <p:ph type="title"/>
-          </p:nvPr>
-        </p:nvSpPr>
-        <p:spPr/>
-        <p:txBody>
-          <a:bodyPr/>
-          <a:lstStyle/>
-          <a:p>
-            <a:r>
-              <a:rPr lang="hu-HU" dirty="0">
-                <a:latin typeface="Times New Roman" panose="02020603050405020304" pitchFamily="18" charset="0"/>
-                <a:cs typeface="Times New Roman" panose="02020603050405020304" pitchFamily="18" charset="0"/>
-              </a:rPr>
-              <a:t>Használat</a:t>
-            </a:r>
-          </a:p>
-        </p:txBody>
-      </p:sp>
-      <p:sp>
-        <p:nvSpPr>
-          <p:cNvPr id="3" name="Tartalom helye 2">
-            <a:extLst>
-              <a:ext uri="{FF2B5EF4-FFF2-40B4-BE49-F238E27FC236}">
-                <a16:creationId xmlns:a16="http://schemas.microsoft.com/office/drawing/2014/main" id="{8AAFD0D0-46A9-4205-B30F-11CD74A408BB}"/>
-              </a:ext>
-            </a:extLst>
-          </p:cNvPr>
-          <p:cNvSpPr>
-            <a:spLocks noGrp="1"/>
-          </p:cNvSpPr>
-          <p:nvPr>
-            <p:ph idx="1"/>
-          </p:nvPr>
-        </p:nvSpPr>
-        <p:spPr/>
-        <p:txBody>
-          <a:bodyPr/>
-          <a:lstStyle/>
-          <a:p>
-            <a:pPr algn="l"/>
-            <a:r>
-              <a:rPr lang="hu-HU" dirty="0">
-                <a:effectLst/>
-                <a:latin typeface="Times New Roman" panose="02020603050405020304" pitchFamily="18" charset="0"/>
-                <a:cs typeface="Times New Roman" panose="02020603050405020304" pitchFamily="18" charset="0"/>
-              </a:rPr>
-              <a:t>Regisztráció után </a:t>
-            </a:r>
-            <a:r>
-              <a:rPr lang="hu-HU" dirty="0" err="1">
-                <a:effectLst/>
-                <a:latin typeface="Times New Roman" panose="02020603050405020304" pitchFamily="18" charset="0"/>
-                <a:cs typeface="Times New Roman" panose="02020603050405020304" pitchFamily="18" charset="0"/>
-              </a:rPr>
-              <a:t>demo</a:t>
-            </a:r>
-            <a:r>
-              <a:rPr lang="hu-HU" dirty="0">
-                <a:effectLst/>
-                <a:latin typeface="Times New Roman" panose="02020603050405020304" pitchFamily="18" charset="0"/>
-                <a:cs typeface="Times New Roman" panose="02020603050405020304" pitchFamily="18" charset="0"/>
-              </a:rPr>
-              <a:t> számla aktiválása HA van fiók már akkor bejelentkezés</a:t>
-            </a:r>
-          </a:p>
-          <a:p>
-            <a:pPr algn="l"/>
-            <a:r>
-              <a:rPr lang="hu-HU" dirty="0">
-                <a:effectLst/>
-                <a:latin typeface="Times New Roman" panose="02020603050405020304" pitchFamily="18" charset="0"/>
-                <a:cs typeface="Times New Roman" panose="02020603050405020304" pitchFamily="18" charset="0"/>
-              </a:rPr>
-              <a:t>Kereskedési ablak:</a:t>
-            </a:r>
-            <a:endParaRPr lang="hu-HU" dirty="0"/>
-          </a:p>
-        </p:txBody>
-      </p:sp>
       <p:pic>
         <p:nvPicPr>
-          <p:cNvPr id="4" name="Kép 3">
-            <a:extLst>
-              <a:ext uri="{FF2B5EF4-FFF2-40B4-BE49-F238E27FC236}">
-                <a16:creationId xmlns:a16="http://schemas.microsoft.com/office/drawing/2014/main" id="{089A5551-DA22-46DD-AD4F-84FF70D3698F}"/>
+          <p:cNvPr id="5" name="Kép 4">
+            <a:extLst>
+              <a:ext uri="{FF2B5EF4-FFF2-40B4-BE49-F238E27FC236}">
+                <a16:creationId xmlns:a16="http://schemas.microsoft.com/office/drawing/2014/main" id="{15105D4B-44B0-451E-809C-1CEB5F1C5E9C}"/>
               </a:ext>
             </a:extLst>
           </p:cNvPr>
@@ -5534,7 +6826,160 @@
           <p:nvPr/>
         </p:nvPicPr>
         <p:blipFill>
-          <a:blip r:embed="rId2">
+          <a:blip r:embed="rId3">
+            <a:extLst>
+              <a:ext uri="{28A0092B-C50C-407E-A947-70E740481C1C}">
+                <a14:useLocalDpi xmlns:a14="http://schemas.microsoft.com/office/drawing/2010/main" val="0"/>
+              </a:ext>
+            </a:extLst>
+          </a:blip>
+          <a:stretch>
+            <a:fillRect/>
+          </a:stretch>
+        </p:blipFill>
+        <p:spPr>
+          <a:xfrm>
+            <a:off x="0" y="-6376"/>
+            <a:ext cx="12192000" cy="6864376"/>
+          </a:xfrm>
+          <a:prstGeom prst="rect">
+            <a:avLst/>
+          </a:prstGeom>
+        </p:spPr>
+      </p:pic>
+      <p:sp>
+        <p:nvSpPr>
+          <p:cNvPr id="2" name="Cím 1">
+            <a:extLst>
+              <a:ext uri="{FF2B5EF4-FFF2-40B4-BE49-F238E27FC236}">
+                <a16:creationId xmlns:a16="http://schemas.microsoft.com/office/drawing/2014/main" id="{A8261EA8-6DD7-4200-B757-C3D623FF88D6}"/>
+              </a:ext>
+            </a:extLst>
+          </p:cNvPr>
+          <p:cNvSpPr>
+            <a:spLocks noGrp="1"/>
+          </p:cNvSpPr>
+          <p:nvPr>
+            <p:ph type="title"/>
+          </p:nvPr>
+        </p:nvSpPr>
+        <p:spPr/>
+        <p:txBody>
+          <a:bodyPr/>
+          <a:lstStyle/>
+          <a:p>
+            <a:r>
+              <a:rPr lang="hu-HU" dirty="0">
+                <a:solidFill>
+                  <a:schemeClr val="bg1"/>
+                </a:solidFill>
+                <a:latin typeface="Times New Roman" panose="02020603050405020304" pitchFamily="18" charset="0"/>
+                <a:cs typeface="Times New Roman" panose="02020603050405020304" pitchFamily="18" charset="0"/>
+              </a:rPr>
+              <a:t>Használat</a:t>
+            </a:r>
+          </a:p>
+        </p:txBody>
+      </p:sp>
+      <p:sp>
+        <p:nvSpPr>
+          <p:cNvPr id="3" name="Tartalom helye 2">
+            <a:extLst>
+              <a:ext uri="{FF2B5EF4-FFF2-40B4-BE49-F238E27FC236}">
+                <a16:creationId xmlns:a16="http://schemas.microsoft.com/office/drawing/2014/main" id="{8AAFD0D0-46A9-4205-B30F-11CD74A408BB}"/>
+              </a:ext>
+            </a:extLst>
+          </p:cNvPr>
+          <p:cNvSpPr>
+            <a:spLocks noGrp="1"/>
+          </p:cNvSpPr>
+          <p:nvPr>
+            <p:ph idx="1"/>
+          </p:nvPr>
+        </p:nvSpPr>
+        <p:spPr/>
+        <p:txBody>
+          <a:bodyPr/>
+          <a:lstStyle/>
+          <a:p>
+            <a:r>
+              <a:rPr lang="hu-HU" dirty="0">
+                <a:solidFill>
+                  <a:schemeClr val="bg1"/>
+                </a:solidFill>
+                <a:effectLst/>
+                <a:latin typeface="Times New Roman" panose="02020603050405020304" pitchFamily="18" charset="0"/>
+                <a:cs typeface="Times New Roman" panose="02020603050405020304" pitchFamily="18" charset="0"/>
+              </a:rPr>
+              <a:t>Regisztráció után </a:t>
+            </a:r>
+            <a:r>
+              <a:rPr lang="hu-HU" dirty="0" err="1">
+                <a:solidFill>
+                  <a:schemeClr val="bg1"/>
+                </a:solidFill>
+                <a:effectLst/>
+                <a:latin typeface="Times New Roman" panose="02020603050405020304" pitchFamily="18" charset="0"/>
+                <a:cs typeface="Times New Roman" panose="02020603050405020304" pitchFamily="18" charset="0"/>
+              </a:rPr>
+              <a:t>demo</a:t>
+            </a:r>
+            <a:r>
+              <a:rPr lang="hu-HU" dirty="0">
+                <a:solidFill>
+                  <a:schemeClr val="bg1"/>
+                </a:solidFill>
+                <a:effectLst/>
+                <a:latin typeface="Times New Roman" panose="02020603050405020304" pitchFamily="18" charset="0"/>
+                <a:cs typeface="Times New Roman" panose="02020603050405020304" pitchFamily="18" charset="0"/>
+              </a:rPr>
+              <a:t> számla aktiválása HA van már fiók akkor bejelentkezés</a:t>
+            </a:r>
+          </a:p>
+          <a:p>
+            <a:r>
+              <a:rPr lang="hu-HU" dirty="0">
+                <a:solidFill>
+                  <a:schemeClr val="bg1"/>
+                </a:solidFill>
+                <a:latin typeface="Times New Roman" panose="02020603050405020304" pitchFamily="18" charset="0"/>
+                <a:cs typeface="Times New Roman" panose="02020603050405020304" pitchFamily="18" charset="0"/>
+              </a:rPr>
+              <a:t>Kívánt részvény kiválasztása, illetve oktatóanyagok, hírek, riportok diagrammok megfigyelése saját kívánság szerint</a:t>
+            </a:r>
+          </a:p>
+          <a:p>
+            <a:endParaRPr lang="hu-HU" dirty="0">
+              <a:latin typeface="Times New Roman" panose="02020603050405020304" pitchFamily="18" charset="0"/>
+              <a:cs typeface="Times New Roman" panose="02020603050405020304" pitchFamily="18" charset="0"/>
+            </a:endParaRPr>
+          </a:p>
+          <a:p>
+            <a:pPr algn="l"/>
+            <a:endParaRPr lang="hu-HU" dirty="0">
+              <a:effectLst/>
+              <a:latin typeface="Times New Roman" panose="02020603050405020304" pitchFamily="18" charset="0"/>
+              <a:cs typeface="Times New Roman" panose="02020603050405020304" pitchFamily="18" charset="0"/>
+            </a:endParaRPr>
+          </a:p>
+        </p:txBody>
+      </p:sp>
+      <p:pic>
+        <p:nvPicPr>
+          <p:cNvPr id="4" name="Kép 3">
+            <a:extLst>
+              <a:ext uri="{FF2B5EF4-FFF2-40B4-BE49-F238E27FC236}">
+                <a16:creationId xmlns:a16="http://schemas.microsoft.com/office/drawing/2014/main" id="{089A5551-DA22-46DD-AD4F-84FF70D3698F}"/>
+              </a:ext>
+            </a:extLst>
+          </p:cNvPr>
+          <p:cNvPicPr>
+            <a:picLocks noChangeAspect="1"/>
+          </p:cNvPicPr>
+          <p:nvPr/>
+        </p:nvPicPr>
+        <p:blipFill>
+          <a:blip r:embed="rId4">
             <a:extLst>
               <a:ext uri="{28A0092B-C50C-407E-A947-70E740481C1C}">
                 <a14:useLocalDpi xmlns:a14="http://schemas.microsoft.com/office/drawing/2010/main" val="0"/>
@@ -5585,196 +7030,12 @@
           <a:chExt cx="0" cy="0"/>
         </a:xfrm>
       </p:grpSpPr>
-      <p:sp>
-        <p:nvSpPr>
-          <p:cNvPr id="2" name="Cím 1">
-            <a:extLst>
-              <a:ext uri="{FF2B5EF4-FFF2-40B4-BE49-F238E27FC236}">
-                <a16:creationId xmlns:a16="http://schemas.microsoft.com/office/drawing/2014/main" id="{0D78A363-20F9-4484-BBF9-214B2558D5D4}"/>
-              </a:ext>
-            </a:extLst>
-          </p:cNvPr>
-          <p:cNvSpPr>
-            <a:spLocks noGrp="1"/>
-          </p:cNvSpPr>
-          <p:nvPr>
-            <p:ph type="title"/>
-          </p:nvPr>
-        </p:nvSpPr>
-        <p:spPr/>
-        <p:txBody>
-          <a:bodyPr/>
-          <a:lstStyle/>
-          <a:p>
-            <a:r>
-              <a:rPr lang="hu-HU" dirty="0">
-                <a:latin typeface="Times New Roman" panose="02020603050405020304" pitchFamily="18" charset="0"/>
-                <a:cs typeface="Times New Roman" panose="02020603050405020304" pitchFamily="18" charset="0"/>
-              </a:rPr>
-              <a:t>Rendszer áttekintés</a:t>
-            </a:r>
-          </a:p>
-        </p:txBody>
-      </p:sp>
-      <p:sp>
-        <p:nvSpPr>
-          <p:cNvPr id="3" name="Tartalom helye 2">
-            <a:extLst>
-              <a:ext uri="{FF2B5EF4-FFF2-40B4-BE49-F238E27FC236}">
-                <a16:creationId xmlns:a16="http://schemas.microsoft.com/office/drawing/2014/main" id="{77128688-7208-469E-B64E-4ECF1A6E35A5}"/>
-              </a:ext>
-            </a:extLst>
-          </p:cNvPr>
-          <p:cNvSpPr>
-            <a:spLocks noGrp="1"/>
-          </p:cNvSpPr>
-          <p:nvPr>
-            <p:ph idx="1"/>
-          </p:nvPr>
-        </p:nvSpPr>
-        <p:spPr/>
-        <p:txBody>
-          <a:bodyPr/>
-          <a:lstStyle/>
-          <a:p>
-            <a:r>
-              <a:rPr lang="hu-HU" dirty="0">
-                <a:latin typeface="Times New Roman" panose="02020603050405020304" pitchFamily="18" charset="0"/>
-                <a:cs typeface="Times New Roman" panose="02020603050405020304" pitchFamily="18" charset="0"/>
-              </a:rPr>
-              <a:t>Backend</a:t>
-            </a:r>
-          </a:p>
-          <a:p>
-            <a:pPr lvl="1">
-              <a:buFont typeface="Courier New" panose="02070309020205020404" pitchFamily="49" charset="0"/>
-              <a:buChar char="o"/>
-            </a:pPr>
-            <a:r>
-              <a:rPr lang="hu-HU" dirty="0" err="1">
-                <a:latin typeface="Times New Roman" panose="02020603050405020304" pitchFamily="18" charset="0"/>
-                <a:cs typeface="Times New Roman" panose="02020603050405020304" pitchFamily="18" charset="0"/>
-              </a:rPr>
-              <a:t>Swagger</a:t>
-            </a:r>
-            <a:endParaRPr lang="hu-HU" dirty="0">
-              <a:latin typeface="Times New Roman" panose="02020603050405020304" pitchFamily="18" charset="0"/>
-              <a:cs typeface="Times New Roman" panose="02020603050405020304" pitchFamily="18" charset="0"/>
-            </a:endParaRPr>
-          </a:p>
-          <a:p>
-            <a:pPr lvl="1">
-              <a:buFont typeface="Courier New" panose="02070309020205020404" pitchFamily="49" charset="0"/>
-              <a:buChar char="o"/>
-            </a:pPr>
-            <a:r>
-              <a:rPr lang="hu-HU" dirty="0">
-                <a:latin typeface="Times New Roman" panose="02020603050405020304" pitchFamily="18" charset="0"/>
-                <a:cs typeface="Times New Roman" panose="02020603050405020304" pitchFamily="18" charset="0"/>
-              </a:rPr>
-              <a:t>PHP</a:t>
-            </a:r>
-          </a:p>
-          <a:p>
-            <a:pPr lvl="1">
-              <a:buFont typeface="Courier New" panose="02070309020205020404" pitchFamily="49" charset="0"/>
-              <a:buChar char="o"/>
-            </a:pPr>
-            <a:r>
-              <a:rPr lang="hu-HU" dirty="0" err="1">
-                <a:latin typeface="Times New Roman" panose="02020603050405020304" pitchFamily="18" charset="0"/>
-                <a:cs typeface="Times New Roman" panose="02020603050405020304" pitchFamily="18" charset="0"/>
-              </a:rPr>
-              <a:t>MySQL</a:t>
-            </a:r>
-            <a:endParaRPr lang="hu-HU" dirty="0">
-              <a:latin typeface="Times New Roman" panose="02020603050405020304" pitchFamily="18" charset="0"/>
-              <a:cs typeface="Times New Roman" panose="02020603050405020304" pitchFamily="18" charset="0"/>
-            </a:endParaRPr>
-          </a:p>
-          <a:p>
-            <a:r>
-              <a:rPr lang="hu-HU" dirty="0">
-                <a:latin typeface="Times New Roman" panose="02020603050405020304" pitchFamily="18" charset="0"/>
-                <a:cs typeface="Times New Roman" panose="02020603050405020304" pitchFamily="18" charset="0"/>
-              </a:rPr>
-              <a:t>Frontend</a:t>
-            </a:r>
-          </a:p>
-          <a:p>
-            <a:pPr lvl="1">
-              <a:buFont typeface="Courier New" panose="02070309020205020404" pitchFamily="49" charset="0"/>
-              <a:buChar char="o"/>
-            </a:pPr>
-            <a:r>
-              <a:rPr lang="hu-HU" dirty="0">
-                <a:latin typeface="Times New Roman" panose="02020603050405020304" pitchFamily="18" charset="0"/>
-                <a:cs typeface="Times New Roman" panose="02020603050405020304" pitchFamily="18" charset="0"/>
-              </a:rPr>
-              <a:t>HTML5</a:t>
-            </a:r>
-          </a:p>
-          <a:p>
-            <a:pPr lvl="1">
-              <a:buFont typeface="Courier New" panose="02070309020205020404" pitchFamily="49" charset="0"/>
-              <a:buChar char="o"/>
-            </a:pPr>
-            <a:r>
-              <a:rPr lang="hu-HU" dirty="0">
-                <a:latin typeface="Times New Roman" panose="02020603050405020304" pitchFamily="18" charset="0"/>
-                <a:cs typeface="Times New Roman" panose="02020603050405020304" pitchFamily="18" charset="0"/>
-              </a:rPr>
-              <a:t>CSS3</a:t>
-            </a:r>
-          </a:p>
-          <a:p>
-            <a:pPr lvl="1">
-              <a:buFont typeface="Courier New" panose="02070309020205020404" pitchFamily="49" charset="0"/>
-              <a:buChar char="o"/>
-            </a:pPr>
-            <a:r>
-              <a:rPr lang="hu-HU" dirty="0">
-                <a:latin typeface="Times New Roman" panose="02020603050405020304" pitchFamily="18" charset="0"/>
-                <a:cs typeface="Times New Roman" panose="02020603050405020304" pitchFamily="18" charset="0"/>
-              </a:rPr>
-              <a:t>JavaScript</a:t>
-            </a:r>
-          </a:p>
-          <a:p>
-            <a:r>
-              <a:rPr lang="hu-HU" dirty="0" err="1">
-                <a:latin typeface="Times New Roman" panose="02020603050405020304" pitchFamily="18" charset="0"/>
-                <a:cs typeface="Times New Roman" panose="02020603050405020304" pitchFamily="18" charset="0"/>
-              </a:rPr>
-              <a:t>Database</a:t>
-            </a:r>
-            <a:endParaRPr lang="hu-HU" dirty="0">
-              <a:latin typeface="Times New Roman" panose="02020603050405020304" pitchFamily="18" charset="0"/>
-              <a:cs typeface="Times New Roman" panose="02020603050405020304" pitchFamily="18" charset="0"/>
-            </a:endParaRPr>
-          </a:p>
-          <a:p>
-            <a:pPr lvl="1">
-              <a:buFont typeface="Courier New" panose="02070309020205020404" pitchFamily="49" charset="0"/>
-              <a:buChar char="o"/>
-            </a:pPr>
-            <a:endParaRPr lang="hu-HU" dirty="0"/>
-          </a:p>
-          <a:p>
-            <a:pPr lvl="1">
-              <a:buFont typeface="Courier New" panose="02070309020205020404" pitchFamily="49" charset="0"/>
-              <a:buChar char="o"/>
-            </a:pPr>
-            <a:endParaRPr lang="hu-HU" dirty="0"/>
-          </a:p>
-        </p:txBody>
-      </p:sp>
       <p:pic>
         <p:nvPicPr>
-          <p:cNvPr id="4" name="Kép 3">
-            <a:extLst>
-              <a:ext uri="{FF2B5EF4-FFF2-40B4-BE49-F238E27FC236}">
-                <a16:creationId xmlns:a16="http://schemas.microsoft.com/office/drawing/2014/main" id="{0C93CE88-8FC6-4EF8-A497-0C8D4AE41F58}"/>
+          <p:cNvPr id="5" name="Kép 4">
+            <a:extLst>
+              <a:ext uri="{FF2B5EF4-FFF2-40B4-BE49-F238E27FC236}">
+                <a16:creationId xmlns:a16="http://schemas.microsoft.com/office/drawing/2014/main" id="{DC26AD46-D810-4E62-B180-77DB7AD1D84D}"/>
               </a:ext>
             </a:extLst>
           </p:cNvPr>
@@ -5784,7 +7045,255 @@
           <p:nvPr/>
         </p:nvPicPr>
         <p:blipFill>
-          <a:blip r:embed="rId2">
+          <a:blip r:embed="rId3">
+            <a:extLst>
+              <a:ext uri="{28A0092B-C50C-407E-A947-70E740481C1C}">
+                <a14:useLocalDpi xmlns:a14="http://schemas.microsoft.com/office/drawing/2010/main" val="0"/>
+              </a:ext>
+            </a:extLst>
+          </a:blip>
+          <a:stretch>
+            <a:fillRect/>
+          </a:stretch>
+        </p:blipFill>
+        <p:spPr>
+          <a:xfrm>
+            <a:off x="0" y="-6376"/>
+            <a:ext cx="12192000" cy="6864376"/>
+          </a:xfrm>
+          <a:prstGeom prst="rect">
+            <a:avLst/>
+          </a:prstGeom>
+        </p:spPr>
+      </p:pic>
+      <p:sp>
+        <p:nvSpPr>
+          <p:cNvPr id="2" name="Cím 1">
+            <a:extLst>
+              <a:ext uri="{FF2B5EF4-FFF2-40B4-BE49-F238E27FC236}">
+                <a16:creationId xmlns:a16="http://schemas.microsoft.com/office/drawing/2014/main" id="{0D78A363-20F9-4484-BBF9-214B2558D5D4}"/>
+              </a:ext>
+            </a:extLst>
+          </p:cNvPr>
+          <p:cNvSpPr>
+            <a:spLocks noGrp="1"/>
+          </p:cNvSpPr>
+          <p:nvPr>
+            <p:ph type="title"/>
+          </p:nvPr>
+        </p:nvSpPr>
+        <p:spPr/>
+        <p:txBody>
+          <a:bodyPr/>
+          <a:lstStyle/>
+          <a:p>
+            <a:r>
+              <a:rPr lang="hu-HU" dirty="0">
+                <a:solidFill>
+                  <a:schemeClr val="bg1"/>
+                </a:solidFill>
+                <a:latin typeface="Times New Roman" panose="02020603050405020304" pitchFamily="18" charset="0"/>
+                <a:cs typeface="Times New Roman" panose="02020603050405020304" pitchFamily="18" charset="0"/>
+              </a:rPr>
+              <a:t>Program</a:t>
+            </a:r>
+          </a:p>
+        </p:txBody>
+      </p:sp>
+      <p:sp>
+        <p:nvSpPr>
+          <p:cNvPr id="3" name="Tartalom helye 2">
+            <a:extLst>
+              <a:ext uri="{FF2B5EF4-FFF2-40B4-BE49-F238E27FC236}">
+                <a16:creationId xmlns:a16="http://schemas.microsoft.com/office/drawing/2014/main" id="{77128688-7208-469E-B64E-4ECF1A6E35A5}"/>
+              </a:ext>
+            </a:extLst>
+          </p:cNvPr>
+          <p:cNvSpPr>
+            <a:spLocks noGrp="1"/>
+          </p:cNvSpPr>
+          <p:nvPr>
+            <p:ph idx="1"/>
+          </p:nvPr>
+        </p:nvSpPr>
+        <p:spPr/>
+        <p:txBody>
+          <a:bodyPr/>
+          <a:lstStyle/>
+          <a:p>
+            <a:r>
+              <a:rPr lang="hu-HU" dirty="0">
+                <a:solidFill>
+                  <a:schemeClr val="bg1"/>
+                </a:solidFill>
+                <a:latin typeface="Times New Roman" panose="02020603050405020304" pitchFamily="18" charset="0"/>
+                <a:cs typeface="Times New Roman" panose="02020603050405020304" pitchFamily="18" charset="0"/>
+              </a:rPr>
+              <a:t>Backend-</a:t>
+            </a:r>
+            <a:r>
+              <a:rPr lang="hu-HU" dirty="0" err="1">
+                <a:solidFill>
+                  <a:schemeClr val="bg1"/>
+                </a:solidFill>
+                <a:latin typeface="Times New Roman" panose="02020603050405020304" pitchFamily="18" charset="0"/>
+                <a:cs typeface="Times New Roman" panose="02020603050405020304" pitchFamily="18" charset="0"/>
+              </a:rPr>
+              <a:t>Laravel</a:t>
+            </a:r>
+            <a:endParaRPr lang="hu-HU" dirty="0">
+              <a:solidFill>
+                <a:schemeClr val="bg1"/>
+              </a:solidFill>
+              <a:latin typeface="Times New Roman" panose="02020603050405020304" pitchFamily="18" charset="0"/>
+              <a:cs typeface="Times New Roman" panose="02020603050405020304" pitchFamily="18" charset="0"/>
+            </a:endParaRPr>
+          </a:p>
+          <a:p>
+            <a:pPr lvl="1">
+              <a:buFont typeface="Courier New" panose="02070309020205020404" pitchFamily="49" charset="0"/>
+              <a:buChar char="o"/>
+            </a:pPr>
+            <a:r>
+              <a:rPr lang="hu-HU" dirty="0">
+                <a:solidFill>
+                  <a:schemeClr val="bg1"/>
+                </a:solidFill>
+                <a:latin typeface="Times New Roman" panose="02020603050405020304" pitchFamily="18" charset="0"/>
+                <a:cs typeface="Times New Roman" panose="02020603050405020304" pitchFamily="18" charset="0"/>
+              </a:rPr>
+              <a:t>PHP</a:t>
+            </a:r>
+          </a:p>
+          <a:p>
+            <a:pPr lvl="1">
+              <a:buFont typeface="Courier New" panose="02070309020205020404" pitchFamily="49" charset="0"/>
+              <a:buChar char="o"/>
+            </a:pPr>
+            <a:r>
+              <a:rPr lang="hu-HU" dirty="0" err="1">
+                <a:solidFill>
+                  <a:schemeClr val="bg1"/>
+                </a:solidFill>
+                <a:latin typeface="Times New Roman" panose="02020603050405020304" pitchFamily="18" charset="0"/>
+                <a:cs typeface="Times New Roman" panose="02020603050405020304" pitchFamily="18" charset="0"/>
+              </a:rPr>
+              <a:t>MySQL</a:t>
+            </a:r>
+            <a:endParaRPr lang="hu-HU" dirty="0">
+              <a:solidFill>
+                <a:schemeClr val="bg1"/>
+              </a:solidFill>
+              <a:latin typeface="Times New Roman" panose="02020603050405020304" pitchFamily="18" charset="0"/>
+              <a:cs typeface="Times New Roman" panose="02020603050405020304" pitchFamily="18" charset="0"/>
+            </a:endParaRPr>
+          </a:p>
+          <a:p>
+            <a:pPr lvl="1">
+              <a:buFont typeface="Courier New" panose="02070309020205020404" pitchFamily="49" charset="0"/>
+              <a:buChar char="o"/>
+            </a:pPr>
+            <a:r>
+              <a:rPr lang="hu-HU" dirty="0">
+                <a:solidFill>
+                  <a:schemeClr val="bg1"/>
+                </a:solidFill>
+                <a:latin typeface="Times New Roman" panose="02020603050405020304" pitchFamily="18" charset="0"/>
+                <a:cs typeface="Times New Roman" panose="02020603050405020304" pitchFamily="18" charset="0"/>
+              </a:rPr>
+              <a:t>JSON</a:t>
+            </a:r>
+          </a:p>
+          <a:p>
+            <a:r>
+              <a:rPr lang="hu-HU" dirty="0">
+                <a:solidFill>
+                  <a:schemeClr val="bg1"/>
+                </a:solidFill>
+                <a:latin typeface="Times New Roman" panose="02020603050405020304" pitchFamily="18" charset="0"/>
+                <a:cs typeface="Times New Roman" panose="02020603050405020304" pitchFamily="18" charset="0"/>
+              </a:rPr>
+              <a:t>Frontend-Vue.js</a:t>
+            </a:r>
+          </a:p>
+          <a:p>
+            <a:pPr lvl="1">
+              <a:buFont typeface="Courier New" panose="02070309020205020404" pitchFamily="49" charset="0"/>
+              <a:buChar char="o"/>
+            </a:pPr>
+            <a:r>
+              <a:rPr lang="hu-HU" dirty="0">
+                <a:solidFill>
+                  <a:schemeClr val="bg1"/>
+                </a:solidFill>
+                <a:latin typeface="Times New Roman" panose="02020603050405020304" pitchFamily="18" charset="0"/>
+                <a:cs typeface="Times New Roman" panose="02020603050405020304" pitchFamily="18" charset="0"/>
+              </a:rPr>
+              <a:t>HTML5</a:t>
+            </a:r>
+          </a:p>
+          <a:p>
+            <a:pPr lvl="1">
+              <a:buFont typeface="Courier New" panose="02070309020205020404" pitchFamily="49" charset="0"/>
+              <a:buChar char="o"/>
+            </a:pPr>
+            <a:r>
+              <a:rPr lang="hu-HU" dirty="0">
+                <a:solidFill>
+                  <a:schemeClr val="bg1"/>
+                </a:solidFill>
+                <a:latin typeface="Times New Roman" panose="02020603050405020304" pitchFamily="18" charset="0"/>
+                <a:cs typeface="Times New Roman" panose="02020603050405020304" pitchFamily="18" charset="0"/>
+              </a:rPr>
+              <a:t>CSS3</a:t>
+            </a:r>
+          </a:p>
+          <a:p>
+            <a:pPr lvl="1">
+              <a:buFont typeface="Courier New" panose="02070309020205020404" pitchFamily="49" charset="0"/>
+              <a:buChar char="o"/>
+            </a:pPr>
+            <a:r>
+              <a:rPr lang="hu-HU" dirty="0">
+                <a:solidFill>
+                  <a:schemeClr val="bg1"/>
+                </a:solidFill>
+                <a:latin typeface="Times New Roman" panose="02020603050405020304" pitchFamily="18" charset="0"/>
+                <a:cs typeface="Times New Roman" panose="02020603050405020304" pitchFamily="18" charset="0"/>
+              </a:rPr>
+              <a:t>JavaScript</a:t>
+            </a:r>
+            <a:endParaRPr lang="hu-HU" dirty="0">
+              <a:solidFill>
+                <a:schemeClr val="bg1"/>
+              </a:solidFill>
+            </a:endParaRPr>
+          </a:p>
+          <a:p>
+            <a:pPr lvl="1">
+              <a:buFont typeface="Courier New" panose="02070309020205020404" pitchFamily="49" charset="0"/>
+              <a:buChar char="o"/>
+            </a:pPr>
+            <a:endParaRPr lang="hu-HU" dirty="0"/>
+          </a:p>
+        </p:txBody>
+      </p:sp>
+      <p:pic>
+        <p:nvPicPr>
+          <p:cNvPr id="4" name="Kép 3">
+            <a:extLst>
+              <a:ext uri="{FF2B5EF4-FFF2-40B4-BE49-F238E27FC236}">
+                <a16:creationId xmlns:a16="http://schemas.microsoft.com/office/drawing/2014/main" id="{0C93CE88-8FC6-4EF8-A497-0C8D4AE41F58}"/>
+              </a:ext>
+            </a:extLst>
+          </p:cNvPr>
+          <p:cNvPicPr>
+            <a:picLocks noChangeAspect="1"/>
+          </p:cNvPicPr>
+          <p:nvPr/>
+        </p:nvPicPr>
+        <p:blipFill>
+          <a:blip r:embed="rId4">
             <a:extLst>
               <a:ext uri="{28A0092B-C50C-407E-A947-70E740481C1C}">
                 <a14:useLocalDpi xmlns:a14="http://schemas.microsoft.com/office/drawing/2010/main" val="0"/>
@@ -5835,259 +7344,12 @@
           <a:chExt cx="0" cy="0"/>
         </a:xfrm>
       </p:grpSpPr>
-      <p:sp>
-        <p:nvSpPr>
-          <p:cNvPr id="2" name="Cím 1">
-            <a:extLst>
-              <a:ext uri="{FF2B5EF4-FFF2-40B4-BE49-F238E27FC236}">
-                <a16:creationId xmlns:a16="http://schemas.microsoft.com/office/drawing/2014/main" id="{91B49CDF-7F46-448E-BC2A-42B5B82823E1}"/>
-              </a:ext>
-            </a:extLst>
-          </p:cNvPr>
-          <p:cNvSpPr>
-            <a:spLocks noGrp="1"/>
-          </p:cNvSpPr>
-          <p:nvPr>
-            <p:ph type="title"/>
-          </p:nvPr>
-        </p:nvSpPr>
-        <p:spPr/>
-        <p:txBody>
-          <a:bodyPr/>
-          <a:lstStyle/>
-          <a:p>
-            <a:r>
-              <a:rPr lang="hu-HU" dirty="0">
-                <a:latin typeface="Times New Roman" panose="02020603050405020304" pitchFamily="18" charset="0"/>
-                <a:cs typeface="Times New Roman" panose="02020603050405020304" pitchFamily="18" charset="0"/>
-              </a:rPr>
-              <a:t>Adatszerkezet és Adatbázis</a:t>
-            </a:r>
-          </a:p>
-        </p:txBody>
-      </p:sp>
-      <p:sp>
-        <p:nvSpPr>
-          <p:cNvPr id="3" name="Tartalom helye 2">
-            <a:extLst>
-              <a:ext uri="{FF2B5EF4-FFF2-40B4-BE49-F238E27FC236}">
-                <a16:creationId xmlns:a16="http://schemas.microsoft.com/office/drawing/2014/main" id="{055D6986-5082-4874-85AB-732D6A2E2CD7}"/>
-              </a:ext>
-            </a:extLst>
-          </p:cNvPr>
-          <p:cNvSpPr>
-            <a:spLocks noGrp="1"/>
-          </p:cNvSpPr>
-          <p:nvPr>
-            <p:ph idx="1"/>
-          </p:nvPr>
-        </p:nvSpPr>
-        <p:spPr/>
-        <p:txBody>
-          <a:bodyPr/>
-          <a:lstStyle/>
-          <a:p>
-            <a:pPr algn="l"/>
-            <a:r>
-              <a:rPr lang="hu-HU" b="0" i="0" dirty="0">
-                <a:solidFill>
-                  <a:srgbClr val="1F1F1F"/>
-                </a:solidFill>
-                <a:effectLst/>
-                <a:latin typeface="Times New Roman" panose="02020603050405020304" pitchFamily="18" charset="0"/>
-                <a:cs typeface="Times New Roman" panose="02020603050405020304" pitchFamily="18" charset="0"/>
-              </a:rPr>
-              <a:t>Felhasználói adatok: </a:t>
-            </a:r>
-            <a:r>
-              <a:rPr lang="hu-HU" b="0" i="0" dirty="0" err="1">
-                <a:solidFill>
-                  <a:srgbClr val="1F1F1F"/>
-                </a:solidFill>
-                <a:effectLst/>
-                <a:latin typeface="Times New Roman" panose="02020603050405020304" pitchFamily="18" charset="0"/>
-                <a:cs typeface="Times New Roman" panose="02020603050405020304" pitchFamily="18" charset="0"/>
-              </a:rPr>
-              <a:t>Users</a:t>
-            </a:r>
-            <a:r>
-              <a:rPr lang="hu-HU" b="0" i="0" dirty="0">
-                <a:solidFill>
-                  <a:srgbClr val="1F1F1F"/>
-                </a:solidFill>
-                <a:effectLst/>
-                <a:latin typeface="Times New Roman" panose="02020603050405020304" pitchFamily="18" charset="0"/>
-                <a:cs typeface="Times New Roman" panose="02020603050405020304" pitchFamily="18" charset="0"/>
-              </a:rPr>
-              <a:t>, </a:t>
-            </a:r>
-            <a:r>
-              <a:rPr lang="hu-HU" b="0" i="0" dirty="0" err="1">
-                <a:solidFill>
-                  <a:srgbClr val="1F1F1F"/>
-                </a:solidFill>
-                <a:effectLst/>
-                <a:latin typeface="Times New Roman" panose="02020603050405020304" pitchFamily="18" charset="0"/>
-                <a:cs typeface="Times New Roman" panose="02020603050405020304" pitchFamily="18" charset="0"/>
-              </a:rPr>
-              <a:t>Settings</a:t>
-            </a:r>
-            <a:r>
-              <a:rPr lang="hu-HU" b="0" i="0" dirty="0">
-                <a:solidFill>
-                  <a:srgbClr val="1F1F1F"/>
-                </a:solidFill>
-                <a:effectLst/>
-                <a:latin typeface="Times New Roman" panose="02020603050405020304" pitchFamily="18" charset="0"/>
-                <a:cs typeface="Times New Roman" panose="02020603050405020304" pitchFamily="18" charset="0"/>
-              </a:rPr>
-              <a:t>, </a:t>
-            </a:r>
-            <a:r>
-              <a:rPr lang="hu-HU" b="0" i="0" dirty="0" err="1">
-                <a:solidFill>
-                  <a:srgbClr val="1F1F1F"/>
-                </a:solidFill>
-                <a:effectLst/>
-                <a:latin typeface="Times New Roman" panose="02020603050405020304" pitchFamily="18" charset="0"/>
-                <a:cs typeface="Times New Roman" panose="02020603050405020304" pitchFamily="18" charset="0"/>
-              </a:rPr>
-              <a:t>Stats</a:t>
-            </a:r>
-            <a:r>
-              <a:rPr lang="hu-HU" b="0" i="0" dirty="0">
-                <a:solidFill>
-                  <a:srgbClr val="1F1F1F"/>
-                </a:solidFill>
-                <a:effectLst/>
-                <a:latin typeface="Times New Roman" panose="02020603050405020304" pitchFamily="18" charset="0"/>
-                <a:cs typeface="Times New Roman" panose="02020603050405020304" pitchFamily="18" charset="0"/>
-              </a:rPr>
-              <a:t>. </a:t>
-            </a:r>
-          </a:p>
-          <a:p>
-            <a:pPr algn="l"/>
-            <a:r>
-              <a:rPr lang="hu-HU" b="0" i="0" dirty="0">
-                <a:solidFill>
-                  <a:srgbClr val="1F1F1F"/>
-                </a:solidFill>
-                <a:effectLst/>
-                <a:latin typeface="Times New Roman" panose="02020603050405020304" pitchFamily="18" charset="0"/>
-                <a:cs typeface="Times New Roman" panose="02020603050405020304" pitchFamily="18" charset="0"/>
-              </a:rPr>
-              <a:t>Piaci adatok: </a:t>
-            </a:r>
-            <a:r>
-              <a:rPr lang="hu-HU" b="0" i="0" dirty="0" err="1">
-                <a:solidFill>
-                  <a:srgbClr val="1F1F1F"/>
-                </a:solidFill>
-                <a:effectLst/>
-                <a:latin typeface="Times New Roman" panose="02020603050405020304" pitchFamily="18" charset="0"/>
-                <a:cs typeface="Times New Roman" panose="02020603050405020304" pitchFamily="18" charset="0"/>
-              </a:rPr>
-              <a:t>Assets</a:t>
-            </a:r>
-            <a:r>
-              <a:rPr lang="hu-HU" b="0" i="0" dirty="0">
-                <a:solidFill>
-                  <a:srgbClr val="1F1F1F"/>
-                </a:solidFill>
-                <a:effectLst/>
-                <a:latin typeface="Times New Roman" panose="02020603050405020304" pitchFamily="18" charset="0"/>
-                <a:cs typeface="Times New Roman" panose="02020603050405020304" pitchFamily="18" charset="0"/>
-              </a:rPr>
-              <a:t> (részvények), PriceData (történeti árak). </a:t>
-            </a:r>
-          </a:p>
-          <a:p>
-            <a:pPr algn="l"/>
-            <a:r>
-              <a:rPr lang="hu-HU" b="0" i="0" dirty="0">
-                <a:solidFill>
-                  <a:srgbClr val="1F1F1F"/>
-                </a:solidFill>
-                <a:effectLst/>
-                <a:latin typeface="Times New Roman" panose="02020603050405020304" pitchFamily="18" charset="0"/>
-                <a:cs typeface="Times New Roman" panose="02020603050405020304" pitchFamily="18" charset="0"/>
-              </a:rPr>
-              <a:t>Tranzakciók: </a:t>
-            </a:r>
-            <a:r>
-              <a:rPr lang="hu-HU" b="0" i="0" dirty="0" err="1">
-                <a:solidFill>
-                  <a:srgbClr val="1F1F1F"/>
-                </a:solidFill>
-                <a:effectLst/>
-                <a:latin typeface="Times New Roman" panose="02020603050405020304" pitchFamily="18" charset="0"/>
-                <a:cs typeface="Times New Roman" panose="02020603050405020304" pitchFamily="18" charset="0"/>
-              </a:rPr>
-              <a:t>Positions</a:t>
-            </a:r>
-            <a:r>
-              <a:rPr lang="hu-HU" b="0" i="0" dirty="0">
-                <a:solidFill>
-                  <a:srgbClr val="1F1F1F"/>
-                </a:solidFill>
-                <a:effectLst/>
-                <a:latin typeface="Times New Roman" panose="02020603050405020304" pitchFamily="18" charset="0"/>
-                <a:cs typeface="Times New Roman" panose="02020603050405020304" pitchFamily="18" charset="0"/>
-              </a:rPr>
-              <a:t> (nyitott/zárt pozíciók), </a:t>
-            </a:r>
-            <a:r>
-              <a:rPr lang="hu-HU" b="0" i="0" dirty="0" err="1">
-                <a:solidFill>
-                  <a:srgbClr val="1F1F1F"/>
-                </a:solidFill>
-                <a:effectLst/>
-                <a:latin typeface="Times New Roman" panose="02020603050405020304" pitchFamily="18" charset="0"/>
-                <a:cs typeface="Times New Roman" panose="02020603050405020304" pitchFamily="18" charset="0"/>
-              </a:rPr>
-              <a:t>TransactionsLog</a:t>
-            </a:r>
-            <a:r>
-              <a:rPr lang="hu-HU" b="0" i="0" dirty="0">
-                <a:solidFill>
-                  <a:srgbClr val="1F1F1F"/>
-                </a:solidFill>
-                <a:effectLst/>
-                <a:latin typeface="Times New Roman" panose="02020603050405020304" pitchFamily="18" charset="0"/>
-                <a:cs typeface="Times New Roman" panose="02020603050405020304" pitchFamily="18" charset="0"/>
-              </a:rPr>
-              <a:t>. </a:t>
-            </a:r>
-          </a:p>
-          <a:p>
-            <a:pPr algn="l"/>
-            <a:r>
-              <a:rPr lang="hu-HU" b="0" i="0" dirty="0">
-                <a:solidFill>
-                  <a:srgbClr val="1F1F1F"/>
-                </a:solidFill>
-                <a:effectLst/>
-                <a:latin typeface="Times New Roman" panose="02020603050405020304" pitchFamily="18" charset="0"/>
-                <a:cs typeface="Times New Roman" panose="02020603050405020304" pitchFamily="18" charset="0"/>
-              </a:rPr>
-              <a:t>Normalizált adatbázis</a:t>
-            </a:r>
-          </a:p>
-          <a:p>
-            <a:pPr marL="0" indent="0">
-              <a:buNone/>
-            </a:pPr>
-            <a:endParaRPr lang="hu-HU" dirty="0"/>
-          </a:p>
-        </p:txBody>
-      </p:sp>
       <p:pic>
         <p:nvPicPr>
-          <p:cNvPr id="4" name="Kép 3">
-            <a:extLst>
-              <a:ext uri="{FF2B5EF4-FFF2-40B4-BE49-F238E27FC236}">
-                <a16:creationId xmlns:a16="http://schemas.microsoft.com/office/drawing/2014/main" id="{9878BF87-6953-4138-B50E-541A798B6B0A}"/>
+          <p:cNvPr id="5" name="Kép 4">
+            <a:extLst>
+              <a:ext uri="{FF2B5EF4-FFF2-40B4-BE49-F238E27FC236}">
+                <a16:creationId xmlns:a16="http://schemas.microsoft.com/office/drawing/2014/main" id="{E4815600-7136-4366-9460-CECE80029795}"/>
               </a:ext>
             </a:extLst>
           </p:cNvPr>
@@ -6098,6 +7360,292 @@
         </p:nvPicPr>
         <p:blipFill>
           <a:blip r:embed="rId3">
+            <a:extLst>
+              <a:ext uri="{28A0092B-C50C-407E-A947-70E740481C1C}">
+                <a14:useLocalDpi xmlns:a14="http://schemas.microsoft.com/office/drawing/2010/main" val="0"/>
+              </a:ext>
+            </a:extLst>
+          </a:blip>
+          <a:stretch>
+            <a:fillRect/>
+          </a:stretch>
+        </p:blipFill>
+        <p:spPr>
+          <a:xfrm>
+            <a:off x="0" y="-6376"/>
+            <a:ext cx="12192000" cy="6864376"/>
+          </a:xfrm>
+          <a:prstGeom prst="rect">
+            <a:avLst/>
+          </a:prstGeom>
+        </p:spPr>
+      </p:pic>
+      <p:sp>
+        <p:nvSpPr>
+          <p:cNvPr id="2" name="Cím 1">
+            <a:extLst>
+              <a:ext uri="{FF2B5EF4-FFF2-40B4-BE49-F238E27FC236}">
+                <a16:creationId xmlns:a16="http://schemas.microsoft.com/office/drawing/2014/main" id="{91B49CDF-7F46-448E-BC2A-42B5B82823E1}"/>
+              </a:ext>
+            </a:extLst>
+          </p:cNvPr>
+          <p:cNvSpPr>
+            <a:spLocks noGrp="1"/>
+          </p:cNvSpPr>
+          <p:nvPr>
+            <p:ph type="title"/>
+          </p:nvPr>
+        </p:nvSpPr>
+        <p:spPr/>
+        <p:txBody>
+          <a:bodyPr/>
+          <a:lstStyle/>
+          <a:p>
+            <a:r>
+              <a:rPr lang="hu-HU" dirty="0">
+                <a:solidFill>
+                  <a:schemeClr val="bg1"/>
+                </a:solidFill>
+                <a:latin typeface="Times New Roman" panose="02020603050405020304" pitchFamily="18" charset="0"/>
+                <a:cs typeface="Times New Roman" panose="02020603050405020304" pitchFamily="18" charset="0"/>
+              </a:rPr>
+              <a:t>Adatszerkezet és Adatbázis</a:t>
+            </a:r>
+          </a:p>
+        </p:txBody>
+      </p:sp>
+      <p:sp>
+        <p:nvSpPr>
+          <p:cNvPr id="3" name="Tartalom helye 2">
+            <a:extLst>
+              <a:ext uri="{FF2B5EF4-FFF2-40B4-BE49-F238E27FC236}">
+                <a16:creationId xmlns:a16="http://schemas.microsoft.com/office/drawing/2014/main" id="{055D6986-5082-4874-85AB-732D6A2E2CD7}"/>
+              </a:ext>
+            </a:extLst>
+          </p:cNvPr>
+          <p:cNvSpPr>
+            <a:spLocks noGrp="1"/>
+          </p:cNvSpPr>
+          <p:nvPr>
+            <p:ph idx="1"/>
+          </p:nvPr>
+        </p:nvSpPr>
+        <p:spPr/>
+        <p:txBody>
+          <a:bodyPr/>
+          <a:lstStyle/>
+          <a:p>
+            <a:pPr algn="l"/>
+            <a:r>
+              <a:rPr lang="hu-HU" b="0" i="0" dirty="0">
+                <a:solidFill>
+                  <a:schemeClr val="bg1"/>
+                </a:solidFill>
+                <a:effectLst/>
+                <a:latin typeface="Times New Roman" panose="02020603050405020304" pitchFamily="18" charset="0"/>
+                <a:cs typeface="Times New Roman" panose="02020603050405020304" pitchFamily="18" charset="0"/>
+              </a:rPr>
+              <a:t>Felhasználói adatok: </a:t>
+            </a:r>
+            <a:r>
+              <a:rPr lang="hu-HU" b="0" i="0" dirty="0" err="1">
+                <a:solidFill>
+                  <a:schemeClr val="bg1"/>
+                </a:solidFill>
+                <a:effectLst/>
+                <a:latin typeface="Times New Roman" panose="02020603050405020304" pitchFamily="18" charset="0"/>
+                <a:cs typeface="Times New Roman" panose="02020603050405020304" pitchFamily="18" charset="0"/>
+              </a:rPr>
+              <a:t>Users</a:t>
+            </a:r>
+            <a:r>
+              <a:rPr lang="hu-HU" b="0" i="0" dirty="0">
+                <a:solidFill>
+                  <a:schemeClr val="bg1"/>
+                </a:solidFill>
+                <a:effectLst/>
+                <a:latin typeface="Times New Roman" panose="02020603050405020304" pitchFamily="18" charset="0"/>
+                <a:cs typeface="Times New Roman" panose="02020603050405020304" pitchFamily="18" charset="0"/>
+              </a:rPr>
+              <a:t>, </a:t>
+            </a:r>
+            <a:r>
+              <a:rPr lang="hu-HU" b="0" i="0" dirty="0" err="1">
+                <a:solidFill>
+                  <a:schemeClr val="bg1"/>
+                </a:solidFill>
+                <a:effectLst/>
+                <a:latin typeface="Times New Roman" panose="02020603050405020304" pitchFamily="18" charset="0"/>
+                <a:cs typeface="Times New Roman" panose="02020603050405020304" pitchFamily="18" charset="0"/>
+              </a:rPr>
+              <a:t>Settings</a:t>
+            </a:r>
+            <a:r>
+              <a:rPr lang="hu-HU" b="0" i="0" dirty="0">
+                <a:solidFill>
+                  <a:schemeClr val="bg1"/>
+                </a:solidFill>
+                <a:effectLst/>
+                <a:latin typeface="Times New Roman" panose="02020603050405020304" pitchFamily="18" charset="0"/>
+                <a:cs typeface="Times New Roman" panose="02020603050405020304" pitchFamily="18" charset="0"/>
+              </a:rPr>
+              <a:t>, </a:t>
+            </a:r>
+            <a:r>
+              <a:rPr lang="hu-HU" b="0" i="0" dirty="0" err="1">
+                <a:solidFill>
+                  <a:schemeClr val="bg1"/>
+                </a:solidFill>
+                <a:effectLst/>
+                <a:latin typeface="Times New Roman" panose="02020603050405020304" pitchFamily="18" charset="0"/>
+                <a:cs typeface="Times New Roman" panose="02020603050405020304" pitchFamily="18" charset="0"/>
+              </a:rPr>
+              <a:t>Stats</a:t>
+            </a:r>
+            <a:r>
+              <a:rPr lang="hu-HU" b="0" i="0" dirty="0">
+                <a:solidFill>
+                  <a:schemeClr val="bg1"/>
+                </a:solidFill>
+                <a:effectLst/>
+                <a:latin typeface="Times New Roman" panose="02020603050405020304" pitchFamily="18" charset="0"/>
+                <a:cs typeface="Times New Roman" panose="02020603050405020304" pitchFamily="18" charset="0"/>
+              </a:rPr>
+              <a:t>. </a:t>
+            </a:r>
+          </a:p>
+          <a:p>
+            <a:pPr algn="l"/>
+            <a:r>
+              <a:rPr lang="hu-HU" b="0" i="0" dirty="0">
+                <a:solidFill>
+                  <a:schemeClr val="bg1"/>
+                </a:solidFill>
+                <a:effectLst/>
+                <a:latin typeface="Times New Roman" panose="02020603050405020304" pitchFamily="18" charset="0"/>
+                <a:cs typeface="Times New Roman" panose="02020603050405020304" pitchFamily="18" charset="0"/>
+              </a:rPr>
+              <a:t>Piaci adatok: </a:t>
+            </a:r>
+            <a:r>
+              <a:rPr lang="hu-HU" b="0" i="0" dirty="0" err="1">
+                <a:solidFill>
+                  <a:schemeClr val="bg1"/>
+                </a:solidFill>
+                <a:effectLst/>
+                <a:latin typeface="Times New Roman" panose="02020603050405020304" pitchFamily="18" charset="0"/>
+                <a:cs typeface="Times New Roman" panose="02020603050405020304" pitchFamily="18" charset="0"/>
+              </a:rPr>
+              <a:t>Assets</a:t>
+            </a:r>
+            <a:r>
+              <a:rPr lang="hu-HU" b="0" i="0" dirty="0">
+                <a:solidFill>
+                  <a:schemeClr val="bg1"/>
+                </a:solidFill>
+                <a:effectLst/>
+                <a:latin typeface="Times New Roman" panose="02020603050405020304" pitchFamily="18" charset="0"/>
+                <a:cs typeface="Times New Roman" panose="02020603050405020304" pitchFamily="18" charset="0"/>
+              </a:rPr>
+              <a:t> (részvények), PriceData (történeti árak). </a:t>
+            </a:r>
+          </a:p>
+          <a:p>
+            <a:pPr algn="l"/>
+            <a:r>
+              <a:rPr lang="hu-HU" b="0" i="0" dirty="0">
+                <a:solidFill>
+                  <a:schemeClr val="bg1"/>
+                </a:solidFill>
+                <a:effectLst/>
+                <a:latin typeface="Times New Roman" panose="02020603050405020304" pitchFamily="18" charset="0"/>
+                <a:cs typeface="Times New Roman" panose="02020603050405020304" pitchFamily="18" charset="0"/>
+              </a:rPr>
+              <a:t>Tranzakciók: </a:t>
+            </a:r>
+            <a:r>
+              <a:rPr lang="hu-HU" b="0" i="0" dirty="0" err="1">
+                <a:solidFill>
+                  <a:schemeClr val="bg1"/>
+                </a:solidFill>
+                <a:effectLst/>
+                <a:latin typeface="Times New Roman" panose="02020603050405020304" pitchFamily="18" charset="0"/>
+                <a:cs typeface="Times New Roman" panose="02020603050405020304" pitchFamily="18" charset="0"/>
+              </a:rPr>
+              <a:t>Positions</a:t>
+            </a:r>
+            <a:r>
+              <a:rPr lang="hu-HU" b="0" i="0" dirty="0">
+                <a:solidFill>
+                  <a:schemeClr val="bg1"/>
+                </a:solidFill>
+                <a:effectLst/>
+                <a:latin typeface="Times New Roman" panose="02020603050405020304" pitchFamily="18" charset="0"/>
+                <a:cs typeface="Times New Roman" panose="02020603050405020304" pitchFamily="18" charset="0"/>
+              </a:rPr>
+              <a:t> (nyitott/zárt pozíciók), </a:t>
+            </a:r>
+            <a:r>
+              <a:rPr lang="hu-HU" b="0" i="0" dirty="0" err="1">
+                <a:solidFill>
+                  <a:schemeClr val="bg1"/>
+                </a:solidFill>
+                <a:effectLst/>
+                <a:latin typeface="Times New Roman" panose="02020603050405020304" pitchFamily="18" charset="0"/>
+                <a:cs typeface="Times New Roman" panose="02020603050405020304" pitchFamily="18" charset="0"/>
+              </a:rPr>
+              <a:t>TransactionsLog</a:t>
+            </a:r>
+            <a:r>
+              <a:rPr lang="hu-HU" b="0" i="0" dirty="0">
+                <a:solidFill>
+                  <a:schemeClr val="bg1"/>
+                </a:solidFill>
+                <a:effectLst/>
+                <a:latin typeface="Times New Roman" panose="02020603050405020304" pitchFamily="18" charset="0"/>
+                <a:cs typeface="Times New Roman" panose="02020603050405020304" pitchFamily="18" charset="0"/>
+              </a:rPr>
+              <a:t>. </a:t>
+            </a:r>
+          </a:p>
+          <a:p>
+            <a:pPr algn="l"/>
+            <a:r>
+              <a:rPr lang="hu-HU" b="0" i="0" dirty="0">
+                <a:solidFill>
+                  <a:schemeClr val="bg1"/>
+                </a:solidFill>
+                <a:effectLst/>
+                <a:latin typeface="Times New Roman" panose="02020603050405020304" pitchFamily="18" charset="0"/>
+                <a:cs typeface="Times New Roman" panose="02020603050405020304" pitchFamily="18" charset="0"/>
+              </a:rPr>
+              <a:t>Normalizált adatbázis</a:t>
+            </a:r>
+          </a:p>
+          <a:p>
+            <a:pPr marL="0" indent="0">
+              <a:buNone/>
+            </a:pPr>
+            <a:endParaRPr lang="hu-HU" dirty="0"/>
+          </a:p>
+        </p:txBody>
+      </p:sp>
+      <p:pic>
+        <p:nvPicPr>
+          <p:cNvPr id="4" name="Kép 3">
+            <a:extLst>
+              <a:ext uri="{FF2B5EF4-FFF2-40B4-BE49-F238E27FC236}">
+                <a16:creationId xmlns:a16="http://schemas.microsoft.com/office/drawing/2014/main" id="{9878BF87-6953-4138-B50E-541A798B6B0A}"/>
+              </a:ext>
+            </a:extLst>
+          </p:cNvPr>
+          <p:cNvPicPr>
+            <a:picLocks noChangeAspect="1"/>
+          </p:cNvPicPr>
+          <p:nvPr/>
+        </p:nvPicPr>
+        <p:blipFill>
+          <a:blip r:embed="rId4">
             <a:extLst>
               <a:ext uri="{28A0092B-C50C-407E-A947-70E740481C1C}">
                 <a14:useLocalDpi xmlns:a14="http://schemas.microsoft.com/office/drawing/2010/main" val="0"/>
@@ -6148,12 +7696,48 @@
           <a:chExt cx="0" cy="0"/>
         </a:xfrm>
       </p:grpSpPr>
-      <p:sp>
-        <p:nvSpPr>
-          <p:cNvPr id="4" name="Cím 3">
-            <a:extLst>
-              <a:ext uri="{FF2B5EF4-FFF2-40B4-BE49-F238E27FC236}">
-                <a16:creationId xmlns:a16="http://schemas.microsoft.com/office/drawing/2014/main" id="{EDDBBB32-03CC-4D3E-81C0-9D4F92305D56}"/>
+      <p:pic>
+        <p:nvPicPr>
+          <p:cNvPr id="10" name="Kép 9">
+            <a:extLst>
+              <a:ext uri="{FF2B5EF4-FFF2-40B4-BE49-F238E27FC236}">
+                <a16:creationId xmlns:a16="http://schemas.microsoft.com/office/drawing/2014/main" id="{A5EACB98-C764-4344-9B66-DD9F9DCB6491}"/>
+              </a:ext>
+            </a:extLst>
+          </p:cNvPr>
+          <p:cNvPicPr>
+            <a:picLocks noChangeAspect="1"/>
+          </p:cNvPicPr>
+          <p:nvPr/>
+        </p:nvPicPr>
+        <p:blipFill>
+          <a:blip r:embed="rId3">
+            <a:extLst>
+              <a:ext uri="{28A0092B-C50C-407E-A947-70E740481C1C}">
+                <a14:useLocalDpi xmlns:a14="http://schemas.microsoft.com/office/drawing/2010/main" val="0"/>
+              </a:ext>
+            </a:extLst>
+          </a:blip>
+          <a:stretch>
+            <a:fillRect/>
+          </a:stretch>
+        </p:blipFill>
+        <p:spPr>
+          <a:xfrm>
+            <a:off x="0" y="-6376"/>
+            <a:ext cx="12192000" cy="6864376"/>
+          </a:xfrm>
+          <a:prstGeom prst="rect">
+            <a:avLst/>
+          </a:prstGeom>
+        </p:spPr>
+      </p:pic>
+      <p:sp>
+        <p:nvSpPr>
+          <p:cNvPr id="2" name="Cím 1">
+            <a:extLst>
+              <a:ext uri="{FF2B5EF4-FFF2-40B4-BE49-F238E27FC236}">
+                <a16:creationId xmlns:a16="http://schemas.microsoft.com/office/drawing/2014/main" id="{BC670AF5-A981-4FCD-B368-58B8B465D8B5}"/>
               </a:ext>
             </a:extLst>
           </p:cNvPr>
@@ -6171,20 +7755,23 @@
           <a:p>
             <a:r>
               <a:rPr lang="hu-HU" dirty="0">
+                <a:solidFill>
+                  <a:schemeClr val="bg1"/>
+                </a:solidFill>
                 <a:latin typeface="Times New Roman" panose="02020603050405020304" pitchFamily="18" charset="0"/>
                 <a:cs typeface="Times New Roman" panose="02020603050405020304" pitchFamily="18" charset="0"/>
               </a:rPr>
-              <a:t>Backend</a:t>
-            </a:r>
-          </a:p>
-        </p:txBody>
-      </p:sp>
-      <p:sp>
-        <p:nvSpPr>
-          <p:cNvPr id="5" name="Tartalom helye 4">
-            <a:extLst>
-              <a:ext uri="{FF2B5EF4-FFF2-40B4-BE49-F238E27FC236}">
-                <a16:creationId xmlns:a16="http://schemas.microsoft.com/office/drawing/2014/main" id="{C596495D-736B-46DF-9256-99B5FE7DCE1A}"/>
+              <a:t>Frontend</a:t>
+            </a:r>
+          </a:p>
+        </p:txBody>
+      </p:sp>
+      <p:sp>
+        <p:nvSpPr>
+          <p:cNvPr id="3" name="Tartalom helye 2">
+            <a:extLst>
+              <a:ext uri="{FF2B5EF4-FFF2-40B4-BE49-F238E27FC236}">
+                <a16:creationId xmlns:a16="http://schemas.microsoft.com/office/drawing/2014/main" id="{F35CACE6-CDD9-4751-989A-19AC98EE05C8}"/>
               </a:ext>
             </a:extLst>
           </p:cNvPr>
@@ -6200,41 +7787,145 @@
           <a:bodyPr/>
           <a:lstStyle/>
           <a:p>
+            <a:r>
+              <a:rPr lang="hu-HU" dirty="0">
+                <a:solidFill>
+                  <a:schemeClr val="bg1"/>
+                </a:solidFill>
+              </a:rPr>
+              <a:t>Technológiai alapok: HTML5, CSS3, JavaScript.</a:t>
+            </a:r>
+          </a:p>
+          <a:p>
+            <a:r>
+              <a:rPr lang="hu-HU" dirty="0">
+                <a:solidFill>
+                  <a:schemeClr val="bg1"/>
+                </a:solidFill>
+              </a:rPr>
+              <a:t>Modern UI/UX:</a:t>
+            </a:r>
+          </a:p>
+          <a:p>
+            <a:pPr lvl="1"/>
+            <a:r>
+              <a:rPr lang="hu-HU" dirty="0">
+                <a:solidFill>
+                  <a:schemeClr val="bg1"/>
+                </a:solidFill>
+              </a:rPr>
+              <a:t>Letisztult, reszponzív elrendezés.</a:t>
+            </a:r>
+          </a:p>
+          <a:p>
+            <a:r>
+              <a:rPr lang="hu-HU" dirty="0">
+                <a:solidFill>
+                  <a:schemeClr val="bg1"/>
+                </a:solidFill>
+              </a:rPr>
+              <a:t>Valós idejű visszajelzés: Dinamikus egyenlegfrissítés és portfólió-nézet.</a:t>
+            </a:r>
+          </a:p>
+        </p:txBody>
+      </p:sp>
+      <p:sp>
+        <p:nvSpPr>
+          <p:cNvPr id="4" name="Tartalom helye 3">
+            <a:extLst>
+              <a:ext uri="{FF2B5EF4-FFF2-40B4-BE49-F238E27FC236}">
+                <a16:creationId xmlns:a16="http://schemas.microsoft.com/office/drawing/2014/main" id="{2AFDC6D2-89BA-48BB-8BE9-879C8E8C6C3F}"/>
+              </a:ext>
+            </a:extLst>
+          </p:cNvPr>
+          <p:cNvSpPr>
+            <a:spLocks noGrp="1"/>
+          </p:cNvSpPr>
+          <p:nvPr>
+            <p:ph sz="half" idx="2"/>
+          </p:nvPr>
+        </p:nvSpPr>
+        <p:spPr/>
+        <p:txBody>
+          <a:bodyPr/>
+          <a:lstStyle/>
+          <a:p>
             <a:endParaRPr lang="hu-HU" dirty="0"/>
-          </a:p>
-        </p:txBody>
-      </p:sp>
-      <p:sp>
-        <p:nvSpPr>
-          <p:cNvPr id="6" name="Tartalom helye 5">
-            <a:extLst>
-              <a:ext uri="{FF2B5EF4-FFF2-40B4-BE49-F238E27FC236}">
-                <a16:creationId xmlns:a16="http://schemas.microsoft.com/office/drawing/2014/main" id="{E7785558-83B1-4A4B-BC4D-359BC1405AF1}"/>
-              </a:ext>
-            </a:extLst>
-          </p:cNvPr>
-          <p:cNvSpPr>
-            <a:spLocks noGrp="1"/>
-          </p:cNvSpPr>
-          <p:nvPr>
-            <p:ph sz="half" idx="2"/>
-          </p:nvPr>
-        </p:nvSpPr>
-        <p:spPr/>
-        <p:txBody>
-          <a:bodyPr/>
-          <a:lstStyle/>
-          <a:p>
-            <a:endParaRPr lang="hu-HU"/>
           </a:p>
         </p:txBody>
       </p:sp>
       <p:pic>
         <p:nvPicPr>
-          <p:cNvPr id="7" name="Kép 6">
-            <a:extLst>
-              <a:ext uri="{FF2B5EF4-FFF2-40B4-BE49-F238E27FC236}">
-                <a16:creationId xmlns:a16="http://schemas.microsoft.com/office/drawing/2014/main" id="{710A55AD-101D-4AD6-AA19-23B2AE460494}"/>
+          <p:cNvPr id="5" name="Kép 4">
+            <a:extLst>
+              <a:ext uri="{FF2B5EF4-FFF2-40B4-BE49-F238E27FC236}">
+                <a16:creationId xmlns:a16="http://schemas.microsoft.com/office/drawing/2014/main" id="{376C2839-7B5D-4F35-83B6-C16A77152493}"/>
+              </a:ext>
+            </a:extLst>
+          </p:cNvPr>
+          <p:cNvPicPr>
+            <a:picLocks noChangeAspect="1"/>
+          </p:cNvPicPr>
+          <p:nvPr/>
+        </p:nvPicPr>
+        <p:blipFill>
+          <a:blip r:embed="rId4">
+            <a:extLst>
+              <a:ext uri="{28A0092B-C50C-407E-A947-70E740481C1C}">
+                <a14:useLocalDpi xmlns:a14="http://schemas.microsoft.com/office/drawing/2010/main" val="0"/>
+              </a:ext>
+            </a:extLst>
+          </a:blip>
+          <a:stretch>
+            <a:fillRect/>
+          </a:stretch>
+        </p:blipFill>
+        <p:spPr>
+          <a:xfrm>
+            <a:off x="0" y="5812553"/>
+            <a:ext cx="1045447" cy="1045447"/>
+          </a:xfrm>
+          <a:prstGeom prst="rect">
+            <a:avLst/>
+          </a:prstGeom>
+        </p:spPr>
+      </p:pic>
+    </p:spTree>
+    <p:extLst>
+      <p:ext uri="{BB962C8B-B14F-4D97-AF65-F5344CB8AC3E}">
+        <p14:creationId xmlns:p14="http://schemas.microsoft.com/office/powerpoint/2010/main" val="25629498"/>
+      </p:ext>
+    </p:extLst>
+  </p:cSld>
+  <p:clrMapOvr>
+    <a:masterClrMapping/>
+  </p:clrMapOvr>
+</p:sld>
+</file>
+
+<file path=ppt/slides/slide8.xml><?xml version="1.0" encoding="utf-8"?>
+<p:sld xmlns:a="http://schemas.openxmlformats.org/drawingml/2006/main" xmlns:r="http://schemas.openxmlformats.org/officeDocument/2006/relationships" xmlns:p="http://schemas.openxmlformats.org/presentationml/2006/main">
+  <p:cSld>
+    <p:spTree>
+      <p:nvGrpSpPr>
+        <p:cNvPr id="1" name=""/>
+        <p:cNvGrpSpPr/>
+        <p:nvPr/>
+      </p:nvGrpSpPr>
+      <p:grpSpPr>
+        <a:xfrm>
+          <a:off x="0" y="0"/>
+          <a:ext cx="0" cy="0"/>
+          <a:chOff x="0" y="0"/>
+          <a:chExt cx="0" cy="0"/>
+        </a:xfrm>
+      </p:grpSpPr>
+      <p:pic>
+        <p:nvPicPr>
+          <p:cNvPr id="9" name="Kép 8">
+            <a:extLst>
+              <a:ext uri="{FF2B5EF4-FFF2-40B4-BE49-F238E27FC236}">
+                <a16:creationId xmlns:a16="http://schemas.microsoft.com/office/drawing/2014/main" id="{AA529289-132F-4046-B914-F24FDD6CAEF9}"/>
               </a:ext>
             </a:extLst>
           </p:cNvPr>
@@ -6245,6 +7936,126 @@
         </p:nvPicPr>
         <p:blipFill>
           <a:blip r:embed="rId2">
+            <a:extLst>
+              <a:ext uri="{28A0092B-C50C-407E-A947-70E740481C1C}">
+                <a14:useLocalDpi xmlns:a14="http://schemas.microsoft.com/office/drawing/2010/main" val="0"/>
+              </a:ext>
+            </a:extLst>
+          </a:blip>
+          <a:stretch>
+            <a:fillRect/>
+          </a:stretch>
+        </p:blipFill>
+        <p:spPr>
+          <a:xfrm>
+            <a:off x="0" y="-6376"/>
+            <a:ext cx="12192000" cy="6864376"/>
+          </a:xfrm>
+          <a:prstGeom prst="rect">
+            <a:avLst/>
+          </a:prstGeom>
+        </p:spPr>
+      </p:pic>
+      <p:sp>
+        <p:nvSpPr>
+          <p:cNvPr id="4" name="Cím 3">
+            <a:extLst>
+              <a:ext uri="{FF2B5EF4-FFF2-40B4-BE49-F238E27FC236}">
+                <a16:creationId xmlns:a16="http://schemas.microsoft.com/office/drawing/2014/main" id="{EDDBBB32-03CC-4D3E-81C0-9D4F92305D56}"/>
+              </a:ext>
+            </a:extLst>
+          </p:cNvPr>
+          <p:cNvSpPr>
+            <a:spLocks noGrp="1"/>
+          </p:cNvSpPr>
+          <p:nvPr>
+            <p:ph type="title"/>
+          </p:nvPr>
+        </p:nvSpPr>
+        <p:spPr/>
+        <p:txBody>
+          <a:bodyPr/>
+          <a:lstStyle/>
+          <a:p>
+            <a:r>
+              <a:rPr lang="hu-HU" dirty="0">
+                <a:solidFill>
+                  <a:schemeClr val="bg1"/>
+                </a:solidFill>
+                <a:latin typeface="Times New Roman" panose="02020603050405020304" pitchFamily="18" charset="0"/>
+                <a:cs typeface="Times New Roman" panose="02020603050405020304" pitchFamily="18" charset="0"/>
+              </a:rPr>
+              <a:t>Backend</a:t>
+            </a:r>
+          </a:p>
+        </p:txBody>
+      </p:sp>
+      <p:sp>
+        <p:nvSpPr>
+          <p:cNvPr id="5" name="Tartalom helye 4">
+            <a:extLst>
+              <a:ext uri="{FF2B5EF4-FFF2-40B4-BE49-F238E27FC236}">
+                <a16:creationId xmlns:a16="http://schemas.microsoft.com/office/drawing/2014/main" id="{C596495D-736B-46DF-9256-99B5FE7DCE1A}"/>
+              </a:ext>
+            </a:extLst>
+          </p:cNvPr>
+          <p:cNvSpPr>
+            <a:spLocks noGrp="1"/>
+          </p:cNvSpPr>
+          <p:nvPr>
+            <p:ph sz="half" idx="1"/>
+          </p:nvPr>
+        </p:nvSpPr>
+        <p:spPr/>
+        <p:txBody>
+          <a:bodyPr/>
+          <a:lstStyle/>
+          <a:p>
+            <a:endParaRPr lang="hu-HU" dirty="0"/>
+          </a:p>
+        </p:txBody>
+      </p:sp>
+      <p:sp>
+        <p:nvSpPr>
+          <p:cNvPr id="6" name="Tartalom helye 5">
+            <a:extLst>
+              <a:ext uri="{FF2B5EF4-FFF2-40B4-BE49-F238E27FC236}">
+                <a16:creationId xmlns:a16="http://schemas.microsoft.com/office/drawing/2014/main" id="{E7785558-83B1-4A4B-BC4D-359BC1405AF1}"/>
+              </a:ext>
+            </a:extLst>
+          </p:cNvPr>
+          <p:cNvSpPr>
+            <a:spLocks noGrp="1"/>
+          </p:cNvSpPr>
+          <p:nvPr>
+            <p:ph sz="half" idx="2"/>
+          </p:nvPr>
+        </p:nvSpPr>
+        <p:spPr/>
+        <p:txBody>
+          <a:bodyPr/>
+          <a:lstStyle/>
+          <a:p>
+            <a:endParaRPr lang="hu-HU"/>
+          </a:p>
+        </p:txBody>
+      </p:sp>
+      <p:pic>
+        <p:nvPicPr>
+          <p:cNvPr id="7" name="Kép 6">
+            <a:extLst>
+              <a:ext uri="{FF2B5EF4-FFF2-40B4-BE49-F238E27FC236}">
+                <a16:creationId xmlns:a16="http://schemas.microsoft.com/office/drawing/2014/main" id="{710A55AD-101D-4AD6-AA19-23B2AE460494}"/>
+              </a:ext>
+            </a:extLst>
+          </p:cNvPr>
+          <p:cNvPicPr>
+            <a:picLocks noChangeAspect="1"/>
+          </p:cNvPicPr>
+          <p:nvPr/>
+        </p:nvPicPr>
+        <p:blipFill>
+          <a:blip r:embed="rId3">
             <a:extLst>
               <a:ext uri="{28A0092B-C50C-407E-A947-70E740481C1C}">
                 <a14:useLocalDpi xmlns:a14="http://schemas.microsoft.com/office/drawing/2010/main" val="0"/>
@@ -6278,153 +8089,6 @@
 </p:sld>
 </file>
 
-<file path=ppt/slides/slide8.xml><?xml version="1.0" encoding="utf-8"?>
-<p:sld xmlns:a="http://schemas.openxmlformats.org/drawingml/2006/main" xmlns:r="http://schemas.openxmlformats.org/officeDocument/2006/relationships" xmlns:p="http://schemas.openxmlformats.org/presentationml/2006/main">
-  <p:cSld>
-    <p:spTree>
-      <p:nvGrpSpPr>
-        <p:cNvPr id="1" name=""/>
-        <p:cNvGrpSpPr/>
-        <p:nvPr/>
-      </p:nvGrpSpPr>
-      <p:grpSpPr>
-        <a:xfrm>
-          <a:off x="0" y="0"/>
-          <a:ext cx="0" cy="0"/>
-          <a:chOff x="0" y="0"/>
-          <a:chExt cx="0" cy="0"/>
-        </a:xfrm>
-      </p:grpSpPr>
-      <p:sp>
-        <p:nvSpPr>
-          <p:cNvPr id="2" name="Cím 1">
-            <a:extLst>
-              <a:ext uri="{FF2B5EF4-FFF2-40B4-BE49-F238E27FC236}">
-                <a16:creationId xmlns:a16="http://schemas.microsoft.com/office/drawing/2014/main" id="{BC670AF5-A981-4FCD-B368-58B8B465D8B5}"/>
-              </a:ext>
-            </a:extLst>
-          </p:cNvPr>
-          <p:cNvSpPr>
-            <a:spLocks noGrp="1"/>
-          </p:cNvSpPr>
-          <p:nvPr>
-            <p:ph type="title"/>
-          </p:nvPr>
-        </p:nvSpPr>
-        <p:spPr/>
-        <p:txBody>
-          <a:bodyPr/>
-          <a:lstStyle/>
-          <a:p>
-            <a:r>
-              <a:rPr lang="hu-HU" dirty="0">
-                <a:latin typeface="Times New Roman" panose="02020603050405020304" pitchFamily="18" charset="0"/>
-                <a:cs typeface="Times New Roman" panose="02020603050405020304" pitchFamily="18" charset="0"/>
-              </a:rPr>
-              <a:t>Frontend</a:t>
-            </a:r>
-          </a:p>
-        </p:txBody>
-      </p:sp>
-      <p:sp>
-        <p:nvSpPr>
-          <p:cNvPr id="3" name="Tartalom helye 2">
-            <a:extLst>
-              <a:ext uri="{FF2B5EF4-FFF2-40B4-BE49-F238E27FC236}">
-                <a16:creationId xmlns:a16="http://schemas.microsoft.com/office/drawing/2014/main" id="{F35CACE6-CDD9-4751-989A-19AC98EE05C8}"/>
-              </a:ext>
-            </a:extLst>
-          </p:cNvPr>
-          <p:cNvSpPr>
-            <a:spLocks noGrp="1"/>
-          </p:cNvSpPr>
-          <p:nvPr>
-            <p:ph sz="half" idx="1"/>
-          </p:nvPr>
-        </p:nvSpPr>
-        <p:spPr/>
-        <p:txBody>
-          <a:bodyPr/>
-          <a:lstStyle/>
-          <a:p>
-            <a:endParaRPr lang="hu-HU"/>
-          </a:p>
-        </p:txBody>
-      </p:sp>
-      <p:sp>
-        <p:nvSpPr>
-          <p:cNvPr id="4" name="Tartalom helye 3">
-            <a:extLst>
-              <a:ext uri="{FF2B5EF4-FFF2-40B4-BE49-F238E27FC236}">
-                <a16:creationId xmlns:a16="http://schemas.microsoft.com/office/drawing/2014/main" id="{2AFDC6D2-89BA-48BB-8BE9-879C8E8C6C3F}"/>
-              </a:ext>
-            </a:extLst>
-          </p:cNvPr>
-          <p:cNvSpPr>
-            <a:spLocks noGrp="1"/>
-          </p:cNvSpPr>
-          <p:nvPr>
-            <p:ph sz="half" idx="2"/>
-          </p:nvPr>
-        </p:nvSpPr>
-        <p:spPr/>
-        <p:txBody>
-          <a:bodyPr/>
-          <a:lstStyle/>
-          <a:p>
-            <a:endParaRPr lang="hu-HU"/>
-          </a:p>
-        </p:txBody>
-      </p:sp>
-      <p:pic>
-        <p:nvPicPr>
-          <p:cNvPr id="5" name="Kép 4">
-            <a:extLst>
-              <a:ext uri="{FF2B5EF4-FFF2-40B4-BE49-F238E27FC236}">
-                <a16:creationId xmlns:a16="http://schemas.microsoft.com/office/drawing/2014/main" id="{376C2839-7B5D-4F35-83B6-C16A77152493}"/>
-              </a:ext>
-            </a:extLst>
-          </p:cNvPr>
-          <p:cNvPicPr>
-            <a:picLocks noChangeAspect="1"/>
-          </p:cNvPicPr>
-          <p:nvPr/>
-        </p:nvPicPr>
-        <p:blipFill>
-          <a:blip r:embed="rId2">
-            <a:extLst>
-              <a:ext uri="{28A0092B-C50C-407E-A947-70E740481C1C}">
-                <a14:useLocalDpi xmlns:a14="http://schemas.microsoft.com/office/drawing/2010/main" val="0"/>
-              </a:ext>
-            </a:extLst>
-          </a:blip>
-          <a:stretch>
-            <a:fillRect/>
-          </a:stretch>
-        </p:blipFill>
-        <p:spPr>
-          <a:xfrm>
-            <a:off x="0" y="5812553"/>
-            <a:ext cx="1045447" cy="1045447"/>
-          </a:xfrm>
-          <a:prstGeom prst="rect">
-            <a:avLst/>
-          </a:prstGeom>
-        </p:spPr>
-      </p:pic>
-    </p:spTree>
-    <p:extLst>
-      <p:ext uri="{BB962C8B-B14F-4D97-AF65-F5344CB8AC3E}">
-        <p14:creationId xmlns:p14="http://schemas.microsoft.com/office/powerpoint/2010/main" val="25629498"/>
-      </p:ext>
-    </p:extLst>
-  </p:cSld>
-  <p:clrMapOvr>
-    <a:masterClrMapping/>
-  </p:clrMapOvr>
-</p:sld>
-</file>
-
 <file path=ppt/slides/slide9.xml><?xml version="1.0" encoding="utf-8"?>
 <p:sld xmlns:a="http://schemas.openxmlformats.org/drawingml/2006/main" xmlns:r="http://schemas.openxmlformats.org/officeDocument/2006/relationships" xmlns:p="http://schemas.openxmlformats.org/presentationml/2006/main">
   <p:cSld>
@@ -6442,97 +8106,12 @@
           <a:chExt cx="0" cy="0"/>
         </a:xfrm>
       </p:grpSpPr>
-      <p:sp>
-        <p:nvSpPr>
-          <p:cNvPr id="2" name="Cím 1">
-            <a:extLst>
-              <a:ext uri="{FF2B5EF4-FFF2-40B4-BE49-F238E27FC236}">
-                <a16:creationId xmlns:a16="http://schemas.microsoft.com/office/drawing/2014/main" id="{87B51EC9-EB86-4951-A671-CC73DF66F59A}"/>
-              </a:ext>
-            </a:extLst>
-          </p:cNvPr>
-          <p:cNvSpPr>
-            <a:spLocks noGrp="1"/>
-          </p:cNvSpPr>
-          <p:nvPr>
-            <p:ph type="title"/>
-          </p:nvPr>
-        </p:nvSpPr>
-        <p:spPr/>
-        <p:txBody>
-          <a:bodyPr/>
-          <a:lstStyle/>
-          <a:p>
-            <a:r>
-              <a:rPr lang="hu-HU" dirty="0" err="1">
-                <a:latin typeface="Times New Roman" panose="02020603050405020304" pitchFamily="18" charset="0"/>
-                <a:cs typeface="Times New Roman" panose="02020603050405020304" pitchFamily="18" charset="0"/>
-              </a:rPr>
-              <a:t>Database</a:t>
-            </a:r>
-            <a:endParaRPr lang="hu-HU" dirty="0">
-              <a:latin typeface="Times New Roman" panose="02020603050405020304" pitchFamily="18" charset="0"/>
-              <a:cs typeface="Times New Roman" panose="02020603050405020304" pitchFamily="18" charset="0"/>
-            </a:endParaRPr>
-          </a:p>
-        </p:txBody>
-      </p:sp>
-      <p:sp>
-        <p:nvSpPr>
-          <p:cNvPr id="3" name="Tartalom helye 2">
-            <a:extLst>
-              <a:ext uri="{FF2B5EF4-FFF2-40B4-BE49-F238E27FC236}">
-                <a16:creationId xmlns:a16="http://schemas.microsoft.com/office/drawing/2014/main" id="{786D785C-34A0-42E8-98F0-32F64DFFECCA}"/>
-              </a:ext>
-            </a:extLst>
-          </p:cNvPr>
-          <p:cNvSpPr>
-            <a:spLocks noGrp="1"/>
-          </p:cNvSpPr>
-          <p:nvPr>
-            <p:ph sz="half" idx="1"/>
-          </p:nvPr>
-        </p:nvSpPr>
-        <p:spPr/>
-        <p:txBody>
-          <a:bodyPr/>
-          <a:lstStyle/>
-          <a:p>
-            <a:endParaRPr lang="hu-HU"/>
-          </a:p>
-        </p:txBody>
-      </p:sp>
-      <p:sp>
-        <p:nvSpPr>
-          <p:cNvPr id="4" name="Tartalom helye 3">
-            <a:extLst>
-              <a:ext uri="{FF2B5EF4-FFF2-40B4-BE49-F238E27FC236}">
-                <a16:creationId xmlns:a16="http://schemas.microsoft.com/office/drawing/2014/main" id="{6C45ABEE-EEB4-4C58-AC78-4E5F8691FCF3}"/>
-              </a:ext>
-            </a:extLst>
-          </p:cNvPr>
-          <p:cNvSpPr>
-            <a:spLocks noGrp="1"/>
-          </p:cNvSpPr>
-          <p:nvPr>
-            <p:ph sz="half" idx="2"/>
-          </p:nvPr>
-        </p:nvSpPr>
-        <p:spPr/>
-        <p:txBody>
-          <a:bodyPr/>
-          <a:lstStyle/>
-          <a:p>
-            <a:endParaRPr lang="hu-HU"/>
-          </a:p>
-        </p:txBody>
-      </p:sp>
       <p:pic>
         <p:nvPicPr>
-          <p:cNvPr id="5" name="Kép 4">
-            <a:extLst>
-              <a:ext uri="{FF2B5EF4-FFF2-40B4-BE49-F238E27FC236}">
-                <a16:creationId xmlns:a16="http://schemas.microsoft.com/office/drawing/2014/main" id="{D8E5C7D0-A4C1-4D45-A993-5859B2D5E34F}"/>
+          <p:cNvPr id="12" name="Kép 11">
+            <a:extLst>
+              <a:ext uri="{FF2B5EF4-FFF2-40B4-BE49-F238E27FC236}">
+                <a16:creationId xmlns:a16="http://schemas.microsoft.com/office/drawing/2014/main" id="{9FE15EF2-FE62-4DEE-A7ED-C984CA7E9C97}"/>
               </a:ext>
             </a:extLst>
           </p:cNvPr>
@@ -6542,7 +8121,176 @@
           <p:nvPr/>
         </p:nvPicPr>
         <p:blipFill>
-          <a:blip r:embed="rId2">
+          <a:blip r:embed="rId3">
+            <a:extLst>
+              <a:ext uri="{28A0092B-C50C-407E-A947-70E740481C1C}">
+                <a14:useLocalDpi xmlns:a14="http://schemas.microsoft.com/office/drawing/2010/main" val="0"/>
+              </a:ext>
+            </a:extLst>
+          </a:blip>
+          <a:stretch>
+            <a:fillRect/>
+          </a:stretch>
+        </p:blipFill>
+        <p:spPr>
+          <a:xfrm>
+            <a:off x="0" y="-6376"/>
+            <a:ext cx="12192000" cy="6864376"/>
+          </a:xfrm>
+          <a:prstGeom prst="rect">
+            <a:avLst/>
+          </a:prstGeom>
+        </p:spPr>
+      </p:pic>
+      <p:sp>
+        <p:nvSpPr>
+          <p:cNvPr id="5" name="Cím 4">
+            <a:extLst>
+              <a:ext uri="{FF2B5EF4-FFF2-40B4-BE49-F238E27FC236}">
+                <a16:creationId xmlns:a16="http://schemas.microsoft.com/office/drawing/2014/main" id="{854DA53C-BA5F-4190-8443-2E8F0A21033B}"/>
+              </a:ext>
+            </a:extLst>
+          </p:cNvPr>
+          <p:cNvSpPr>
+            <a:spLocks noGrp="1"/>
+          </p:cNvSpPr>
+          <p:nvPr>
+            <p:ph type="title"/>
+          </p:nvPr>
+        </p:nvSpPr>
+        <p:spPr/>
+        <p:txBody>
+          <a:bodyPr/>
+          <a:lstStyle/>
+          <a:p>
+            <a:r>
+              <a:rPr lang="hu-HU" dirty="0">
+                <a:solidFill>
+                  <a:schemeClr val="bg1"/>
+                </a:solidFill>
+              </a:rPr>
+              <a:t>Frontend-Tesztelés</a:t>
+            </a:r>
+          </a:p>
+        </p:txBody>
+      </p:sp>
+      <p:sp>
+        <p:nvSpPr>
+          <p:cNvPr id="6" name="Tartalom helye 5">
+            <a:extLst>
+              <a:ext uri="{FF2B5EF4-FFF2-40B4-BE49-F238E27FC236}">
+                <a16:creationId xmlns:a16="http://schemas.microsoft.com/office/drawing/2014/main" id="{4EC9F170-742E-4283-982F-8FA8307E3A9E}"/>
+              </a:ext>
+            </a:extLst>
+          </p:cNvPr>
+          <p:cNvSpPr>
+            <a:spLocks noGrp="1"/>
+          </p:cNvSpPr>
+          <p:nvPr>
+            <p:ph idx="1"/>
+          </p:nvPr>
+        </p:nvSpPr>
+        <p:spPr>
+          <a:xfrm>
+            <a:off x="838200" y="1825625"/>
+            <a:ext cx="6541168" cy="4351338"/>
+          </a:xfrm>
+        </p:spPr>
+        <p:txBody>
+          <a:bodyPr/>
+          <a:lstStyle/>
+          <a:p>
+            <a:r>
+              <a:rPr lang="hu-HU" dirty="0">
+                <a:solidFill>
+                  <a:schemeClr val="bg1"/>
+                </a:solidFill>
+                <a:latin typeface="Times New Roman" panose="02020603050405020304" pitchFamily="18" charset="0"/>
+                <a:cs typeface="Times New Roman" panose="02020603050405020304" pitchFamily="18" charset="0"/>
+              </a:rPr>
+              <a:t>Sikeres tesztek: Belépés, regisztráció, vétel, tranzakciók, kijelentkezés, gombok és funkciói</a:t>
+            </a:r>
+          </a:p>
+          <a:p>
+            <a:r>
+              <a:rPr lang="hu-HU" dirty="0">
+                <a:solidFill>
+                  <a:schemeClr val="bg1"/>
+                </a:solidFill>
+                <a:latin typeface="Times New Roman" panose="02020603050405020304" pitchFamily="18" charset="0"/>
+                <a:cs typeface="Times New Roman" panose="02020603050405020304" pitchFamily="18" charset="0"/>
+              </a:rPr>
+              <a:t>Magas prioritású tesztesetek a biztonságos működésért</a:t>
+            </a:r>
+          </a:p>
+          <a:p>
+            <a:endParaRPr lang="hu-HU" dirty="0"/>
+          </a:p>
+        </p:txBody>
+      </p:sp>
+      <p:pic>
+        <p:nvPicPr>
+          <p:cNvPr id="1030" name="Picture 6" descr="Robot Framework - Wikipedia">
+            <a:extLst>
+              <a:ext uri="{FF2B5EF4-FFF2-40B4-BE49-F238E27FC236}">
+                <a16:creationId xmlns:a16="http://schemas.microsoft.com/office/drawing/2014/main" id="{5187D23B-744E-4B90-8D94-D4E09A6FEAD1}"/>
+              </a:ext>
+            </a:extLst>
+          </p:cNvPr>
+          <p:cNvPicPr>
+            <a:picLocks noChangeAspect="1" noChangeArrowheads="1"/>
+          </p:cNvPicPr>
+          <p:nvPr/>
+        </p:nvPicPr>
+        <p:blipFill>
+          <a:blip r:embed="rId4">
+            <a:extLst>
+              <a:ext uri="{28A0092B-C50C-407E-A947-70E740481C1C}">
+                <a14:useLocalDpi xmlns:a14="http://schemas.microsoft.com/office/drawing/2010/main" val="0"/>
+              </a:ext>
+            </a:extLst>
+          </a:blip>
+          <a:srcRect/>
+          <a:stretch>
+            <a:fillRect/>
+          </a:stretch>
+        </p:blipFill>
+        <p:spPr bwMode="auto">
+          <a:xfrm>
+            <a:off x="693822" y="4001294"/>
+            <a:ext cx="1388394" cy="1388394"/>
+          </a:xfrm>
+          <a:prstGeom prst="rect">
+            <a:avLst/>
+          </a:prstGeom>
+          <a:noFill/>
+          <a:extLst>
+            <a:ext uri="{909E8E84-426E-40DD-AFC4-6F175D3DCCD1}">
+              <a14:hiddenFill xmlns:a14="http://schemas.microsoft.com/office/drawing/2010/main">
+                <a:solidFill>
+                  <a:srgbClr val="FFFFFF"/>
+                </a:solidFill>
+              </a14:hiddenFill>
+            </a:ext>
+          </a:extLst>
+        </p:spPr>
+      </p:pic>
+      <p:pic>
+        <p:nvPicPr>
+          <p:cNvPr id="10" name="Kép 9">
+            <a:extLst>
+              <a:ext uri="{FF2B5EF4-FFF2-40B4-BE49-F238E27FC236}">
+                <a16:creationId xmlns:a16="http://schemas.microsoft.com/office/drawing/2014/main" id="{18B9E51B-6861-4D84-A5E1-61D7D419B582}"/>
+              </a:ext>
+            </a:extLst>
+          </p:cNvPr>
+          <p:cNvPicPr>
+            <a:picLocks noChangeAspect="1"/>
+          </p:cNvPicPr>
+          <p:nvPr/>
+        </p:nvPicPr>
+        <p:blipFill>
+          <a:blip r:embed="rId5">
             <a:extLst>
               <a:ext uri="{28A0092B-C50C-407E-A947-70E740481C1C}">
                 <a14:useLocalDpi xmlns:a14="http://schemas.microsoft.com/office/drawing/2010/main" val="0"/>
@@ -6563,10 +8311,57 @@
           </a:prstGeom>
         </p:spPr>
       </p:pic>
+      <p:pic>
+        <p:nvPicPr>
+          <p:cNvPr id="1032" name="Picture 8" descr="Selenium Automation Testing Services Company India, Singapore, Hong Kong,  Canada – ANGLER Technologies">
+            <a:extLst>
+              <a:ext uri="{FF2B5EF4-FFF2-40B4-BE49-F238E27FC236}">
+                <a16:creationId xmlns:a16="http://schemas.microsoft.com/office/drawing/2014/main" id="{821A2D7D-F81E-4584-8CB0-0112B782824B}"/>
+              </a:ext>
+            </a:extLst>
+          </p:cNvPr>
+          <p:cNvPicPr>
+            <a:picLocks noChangeAspect="1" noChangeArrowheads="1"/>
+          </p:cNvPicPr>
+          <p:nvPr/>
+        </p:nvPicPr>
+        <p:blipFill>
+          <a:blip r:embed="rId6">
+            <a:extLst>
+              <a:ext uri="{28A0092B-C50C-407E-A947-70E740481C1C}">
+                <a14:useLocalDpi xmlns:a14="http://schemas.microsoft.com/office/drawing/2010/main" val="0"/>
+              </a:ext>
+            </a:extLst>
+          </a:blip>
+          <a:srcRect/>
+          <a:stretch>
+            <a:fillRect/>
+          </a:stretch>
+        </p:blipFill>
+        <p:spPr bwMode="auto">
+          <a:xfrm>
+            <a:off x="2082216" y="4030143"/>
+            <a:ext cx="1648326" cy="1494482"/>
+          </a:xfrm>
+          <a:prstGeom prst="rect">
+            <a:avLst/>
+          </a:prstGeom>
+          <a:noFill/>
+          <a:extLst>
+            <a:ext uri="{909E8E84-426E-40DD-AFC4-6F175D3DCCD1}">
+              <a14:hiddenFill xmlns:a14="http://schemas.microsoft.com/office/drawing/2010/main">
+                <a:solidFill>
+                  <a:srgbClr val="FFFFFF"/>
+                </a:solidFill>
+              </a14:hiddenFill>
+            </a:ext>
+          </a:extLst>
+        </p:spPr>
+      </p:pic>
     </p:spTree>
     <p:extLst>
       <p:ext uri="{BB962C8B-B14F-4D97-AF65-F5344CB8AC3E}">
-        <p14:creationId xmlns:p14="http://schemas.microsoft.com/office/powerpoint/2010/main" val="3300843720"/>
+        <p14:creationId xmlns:p14="http://schemas.microsoft.com/office/powerpoint/2010/main" val="1820299457"/>
       </p:ext>
     </p:extLst>
   </p:cSld>

--- a/Dokumentáció/StockMaster_Prezentacio.pptx
+++ b/Dokumentáció/StockMaster_Prezentacio.pptx
@@ -5,7 +5,7 @@
     <p:sldMasterId id="2147483648" r:id="rId1"/>
   </p:sldMasterIdLst>
   <p:notesMasterIdLst>
-    <p:notesMasterId r:id="rId16"/>
+    <p:notesMasterId r:id="rId15"/>
   </p:notesMasterIdLst>
   <p:sldIdLst>
     <p:sldId id="256" r:id="rId2"/>
@@ -14,14 +14,13 @@
     <p:sldId id="259" r:id="rId5"/>
     <p:sldId id="260" r:id="rId6"/>
     <p:sldId id="269" r:id="rId7"/>
-    <p:sldId id="264" r:id="rId8"/>
-    <p:sldId id="263" r:id="rId9"/>
-    <p:sldId id="272" r:id="rId10"/>
-    <p:sldId id="273" r:id="rId11"/>
-    <p:sldId id="267" r:id="rId12"/>
-    <p:sldId id="270" r:id="rId13"/>
-    <p:sldId id="268" r:id="rId14"/>
-    <p:sldId id="271" r:id="rId15"/>
+    <p:sldId id="272" r:id="rId8"/>
+    <p:sldId id="273" r:id="rId9"/>
+    <p:sldId id="267" r:id="rId10"/>
+    <p:sldId id="270" r:id="rId11"/>
+    <p:sldId id="268" r:id="rId12"/>
+    <p:sldId id="271" r:id="rId13"/>
+    <p:sldId id="274" r:id="rId14"/>
   </p:sldIdLst>
   <p:sldSz cx="12192000" cy="6858000"/>
   <p:notesSz cx="6858000" cy="9144000"/>
@@ -210,7 +209,7 @@
           <a:p>
             <a:fld id="{DBB7823A-862C-422A-A575-936A9871EC5A}" type="datetimeFigureOut">
               <a:rPr lang="hu-HU" smtClean="0"/>
-              <a:t>2026. 03. 04.</a:t>
+              <a:t>2026. 03. 24.</a:t>
             </a:fld>
             <a:endParaRPr lang="hu-HU"/>
           </a:p>
@@ -661,7 +660,7 @@
           <a:p>
             <a:fld id="{7A8BB5B3-9749-486C-A43B-73D16959CA08}" type="slidenum">
               <a:rPr lang="hu-HU" smtClean="0"/>
-              <a:t>13</a:t>
+              <a:t>11</a:t>
             </a:fld>
             <a:endParaRPr lang="hu-HU"/>
           </a:p>
@@ -1413,36 +1412,57 @@
           <a:p>
             <a:r>
               <a:rPr lang="hu-HU" dirty="0"/>
-              <a:t>A frontend fejlesztésekor a legfőbb szempontunk az volt, hogy egy tőzsdei szoftver komplexitását érthetővé és átláthatóvá tegyük a kezdők számára is.</a:t>
-            </a:r>
-          </a:p>
-          <a:p>
+              <a:t>A frontend tesztelése során az volt a célunk, hogy a felhasználói felület minden interaktív eleme stabilan </a:t>
+            </a:r>
+            <a:r>
+              <a:rPr lang="hu-HU" dirty="0" err="1"/>
+              <a:t>működjön</a:t>
+            </a:r>
             <a:r>
               <a:rPr lang="hu-HU" dirty="0"/>
-              <a:t>A technológiai alapokat a </a:t>
+              <a:t>. Ehhez a </a:t>
             </a:r>
             <a:r>
               <a:rPr lang="hu-HU" b="1" dirty="0"/>
-              <a:t>HTML5, CSS3 és a JavaScript</a:t>
+              <a:t>Robot Framework</a:t>
             </a:r>
             <a:r>
               <a:rPr lang="hu-HU" dirty="0"/>
-              <a:t> szolgáltatják. Utóbbi teszi lehetővé, hogy a platformunk ne legyen statikus: a gyertya-diagramok dinamikusan rajzolódnak ki, és a felhasználó igénye szerint válthat az idősíkok között, legyen szó 1 perces vagy akár heti bontásról.</a:t>
-            </a:r>
-          </a:p>
-          <a:p>
+              <a:t> keretrendszert használtuk, </a:t>
+            </a:r>
+            <a:r>
+              <a:rPr lang="hu-HU" b="1" dirty="0" err="1"/>
+              <a:t>Selenium</a:t>
+            </a:r>
             <a:r>
               <a:rPr lang="hu-HU" dirty="0"/>
-              <a:t>nagy hangsúlyt fektettünk az esztétikára. A bal oldali keresősáv segítségével a felhasználók gyorsan válthatnak a különböző részvények és </a:t>
+              <a:t> könyvtárral kiegészítve, a teszteseteket pedig a </a:t>
+            </a:r>
+            <a:r>
+              <a:rPr lang="hu-HU" b="1" dirty="0"/>
+              <a:t>RIDE</a:t>
+            </a:r>
+            <a:r>
+              <a:rPr lang="hu-HU" dirty="0"/>
+              <a:t> grafikus felületén menedzseltük.</a:t>
+            </a:r>
+          </a:p>
+          <a:p>
+            <a:r>
+              <a:rPr lang="hu-HU" dirty="0"/>
+              <a:t>Az automatizált tesztjeink lefedték a teljes felhasználói utat a regisztrációtól kezdve a részvényvásárláson át a kijelentkezésig. A tesztek során a kritikus funkciók – mint például az egyenleg csökkenése vétel után – hibátlanul futottak le. Ugyanakkor azonosítottunk egy magas prioritású esztétikai hibát: az eladás, azaz a </a:t>
             </a:r>
             <a:r>
               <a:rPr lang="hu-HU" dirty="0" err="1"/>
-              <a:t>kriptovaluták</a:t>
+              <a:t>short</a:t>
             </a:r>
             <a:r>
               <a:rPr lang="hu-HU" dirty="0"/>
-              <a:t> között. A tranzakciós felületen a vétel és eladás gombok azonnali vizuális visszajelzést adnak, a portfólió pedig valós időben mutatja az egyenleg változását.</a:t>
-            </a:r>
+              <a:t> pozíciók megnyitásakor a grafikus felületen az árfolyam kijelzése néha szétcsúszik. Ezt a hibajegyet rögzítettük, és a vizuális korrekció már folyamatban van.</a:t>
+            </a:r>
+          </a:p>
+          <a:p>
+            <a:endParaRPr lang="hu-HU" dirty="0"/>
           </a:p>
         </p:txBody>
       </p:sp>
@@ -1472,7 +1492,7 @@
     </p:spTree>
     <p:extLst>
       <p:ext uri="{BB962C8B-B14F-4D97-AF65-F5344CB8AC3E}">
-        <p14:creationId xmlns:p14="http://schemas.microsoft.com/office/powerpoint/2010/main" val="514705530"/>
+        <p14:creationId xmlns:p14="http://schemas.microsoft.com/office/powerpoint/2010/main" val="1195591999"/>
       </p:ext>
     </p:extLst>
   </p:cSld>
@@ -1528,53 +1548,36 @@
           <a:p>
             <a:r>
               <a:rPr lang="hu-HU" dirty="0"/>
-              <a:t>A frontend tesztelése során az volt a célunk, hogy a felhasználói felület minden interaktív eleme stabilan </a:t>
+              <a:t>A backend tesztelés biztosítja, hogy az alkalmazás üzleti logikája, API végpontjai és adatkezelése hibamentesen működjenek.</a:t>
+            </a:r>
+            <a:br>
+              <a:rPr lang="hu-HU" dirty="0"/>
+            </a:br>
+            <a:r>
+              <a:rPr lang="hu-HU" dirty="0"/>
+              <a:t>A képen egy automatizált tesztfuttatás látható, ahol különböző API funkciók kerülnek ellenőrzésre (pl. validációk, limit kezelések, hibakezelés).</a:t>
+            </a:r>
+          </a:p>
+          <a:p>
+            <a:r>
+              <a:rPr lang="hu-HU" dirty="0"/>
+              <a:t>A sikeres tesztek (PASS) azt jelzik, hogy a rendszer stabil, és a különböző </a:t>
             </a:r>
             <a:r>
               <a:rPr lang="hu-HU" dirty="0" err="1"/>
-              <a:t>működjön</a:t>
+              <a:t>edge</a:t>
             </a:r>
             <a:r>
               <a:rPr lang="hu-HU" dirty="0"/>
-              <a:t>. Ehhez a </a:t>
-            </a:r>
-            <a:r>
-              <a:rPr lang="hu-HU" b="1" dirty="0"/>
-              <a:t>Robot Framework</a:t>
+              <a:t> </a:t>
+            </a:r>
+            <a:r>
+              <a:rPr lang="hu-HU" dirty="0" err="1"/>
+              <a:t>case-eket</a:t>
             </a:r>
             <a:r>
               <a:rPr lang="hu-HU" dirty="0"/>
-              <a:t> keretrendszert használtuk, </a:t>
-            </a:r>
-            <a:r>
-              <a:rPr lang="hu-HU" b="1" dirty="0" err="1"/>
-              <a:t>Selenium</a:t>
-            </a:r>
-            <a:r>
-              <a:rPr lang="hu-HU" dirty="0"/>
-              <a:t> könyvtárral kiegészítve, a teszteseteket pedig a </a:t>
-            </a:r>
-            <a:r>
-              <a:rPr lang="hu-HU" b="1" dirty="0"/>
-              <a:t>RIDE</a:t>
-            </a:r>
-            <a:r>
-              <a:rPr lang="hu-HU" dirty="0"/>
-              <a:t> grafikus felületén menedzseltük.</a:t>
-            </a:r>
-          </a:p>
-          <a:p>
-            <a:r>
-              <a:rPr lang="hu-HU" dirty="0"/>
-              <a:t>Az automatizált tesztjeink lefedték a teljes felhasználói utat a regisztrációtól kezdve a részvényvásárláson át a kijelentkezésig. A tesztek során a kritikus funkciók – mint például az egyenleg csökkenése vétel után – hibátlanul futottak le. Ugyanakkor azonosítottunk egy magas prioritású esztétikai hibát: az eladás, azaz a </a:t>
-            </a:r>
-            <a:r>
-              <a:rPr lang="hu-HU" dirty="0" err="1"/>
-              <a:t>short</a:t>
-            </a:r>
-            <a:r>
-              <a:rPr lang="hu-HU" dirty="0"/>
-              <a:t> pozíciók megnyitásakor a grafikus felületen az árfolyam kijelzése néha szétcsúszik. Ezt a hibajegyet rögzítettük, és a vizuális korrekció már folyamatban van.</a:t>
+              <a:t> is megfelelően kezeli. Az automatizált tesztelés kulcsfontosságú a megbízható és skálázható backend fejlesztéshez.</a:t>
             </a:r>
           </a:p>
           <a:p>
@@ -1599,7 +1602,7 @@
           <a:p>
             <a:fld id="{7A8BB5B3-9749-486C-A43B-73D16959CA08}" type="slidenum">
               <a:rPr lang="hu-HU" smtClean="0"/>
-              <a:t>9</a:t>
+              <a:t>8</a:t>
             </a:fld>
             <a:endParaRPr lang="hu-HU"/>
           </a:p>
@@ -1608,7 +1611,7 @@
     </p:spTree>
     <p:extLst>
       <p:ext uri="{BB962C8B-B14F-4D97-AF65-F5344CB8AC3E}">
-        <p14:creationId xmlns:p14="http://schemas.microsoft.com/office/powerpoint/2010/main" val="1195591999"/>
+        <p14:creationId xmlns:p14="http://schemas.microsoft.com/office/powerpoint/2010/main" val="2999666632"/>
       </p:ext>
     </p:extLst>
   </p:cSld>
@@ -1768,7 +1771,7 @@
           <a:p>
             <a:fld id="{7A8BB5B3-9749-486C-A43B-73D16959CA08}" type="slidenum">
               <a:rPr lang="hu-HU" smtClean="0"/>
-              <a:t>12</a:t>
+              <a:t>10</a:t>
             </a:fld>
             <a:endParaRPr lang="hu-HU"/>
           </a:p>
@@ -1934,7 +1937,7 @@
           <a:p>
             <a:fld id="{D31F9038-47AD-43A3-BBBF-D66692911134}" type="datetimeFigureOut">
               <a:rPr lang="hu-HU" smtClean="0"/>
-              <a:t>2026. 03. 04.</a:t>
+              <a:t>2026. 03. 24.</a:t>
             </a:fld>
             <a:endParaRPr lang="hu-HU"/>
           </a:p>
@@ -2132,7 +2135,7 @@
           <a:p>
             <a:fld id="{D31F9038-47AD-43A3-BBBF-D66692911134}" type="datetimeFigureOut">
               <a:rPr lang="hu-HU" smtClean="0"/>
-              <a:t>2026. 03. 04.</a:t>
+              <a:t>2026. 03. 24.</a:t>
             </a:fld>
             <a:endParaRPr lang="hu-HU"/>
           </a:p>
@@ -2340,7 +2343,7 @@
           <a:p>
             <a:fld id="{D31F9038-47AD-43A3-BBBF-D66692911134}" type="datetimeFigureOut">
               <a:rPr lang="hu-HU" smtClean="0"/>
-              <a:t>2026. 03. 04.</a:t>
+              <a:t>2026. 03. 24.</a:t>
             </a:fld>
             <a:endParaRPr lang="hu-HU"/>
           </a:p>
@@ -2538,7 +2541,7 @@
           <a:p>
             <a:fld id="{D31F9038-47AD-43A3-BBBF-D66692911134}" type="datetimeFigureOut">
               <a:rPr lang="hu-HU" smtClean="0"/>
-              <a:t>2026. 03. 04.</a:t>
+              <a:t>2026. 03. 24.</a:t>
             </a:fld>
             <a:endParaRPr lang="hu-HU"/>
           </a:p>
@@ -2813,7 +2816,7 @@
           <a:p>
             <a:fld id="{D31F9038-47AD-43A3-BBBF-D66692911134}" type="datetimeFigureOut">
               <a:rPr lang="hu-HU" smtClean="0"/>
-              <a:t>2026. 03. 04.</a:t>
+              <a:t>2026. 03. 24.</a:t>
             </a:fld>
             <a:endParaRPr lang="hu-HU"/>
           </a:p>
@@ -3078,7 +3081,7 @@
           <a:p>
             <a:fld id="{D31F9038-47AD-43A3-BBBF-D66692911134}" type="datetimeFigureOut">
               <a:rPr lang="hu-HU" smtClean="0"/>
-              <a:t>2026. 03. 04.</a:t>
+              <a:t>2026. 03. 24.</a:t>
             </a:fld>
             <a:endParaRPr lang="hu-HU"/>
           </a:p>
@@ -3490,7 +3493,7 @@
           <a:p>
             <a:fld id="{D31F9038-47AD-43A3-BBBF-D66692911134}" type="datetimeFigureOut">
               <a:rPr lang="hu-HU" smtClean="0"/>
-              <a:t>2026. 03. 04.</a:t>
+              <a:t>2026. 03. 24.</a:t>
             </a:fld>
             <a:endParaRPr lang="hu-HU"/>
           </a:p>
@@ -3631,7 +3634,7 @@
           <a:p>
             <a:fld id="{D31F9038-47AD-43A3-BBBF-D66692911134}" type="datetimeFigureOut">
               <a:rPr lang="hu-HU" smtClean="0"/>
-              <a:t>2026. 03. 04.</a:t>
+              <a:t>2026. 03. 24.</a:t>
             </a:fld>
             <a:endParaRPr lang="hu-HU"/>
           </a:p>
@@ -3744,7 +3747,7 @@
           <a:p>
             <a:fld id="{D31F9038-47AD-43A3-BBBF-D66692911134}" type="datetimeFigureOut">
               <a:rPr lang="hu-HU" smtClean="0"/>
-              <a:t>2026. 03. 04.</a:t>
+              <a:t>2026. 03. 24.</a:t>
             </a:fld>
             <a:endParaRPr lang="hu-HU"/>
           </a:p>
@@ -4055,7 +4058,7 @@
           <a:p>
             <a:fld id="{D31F9038-47AD-43A3-BBBF-D66692911134}" type="datetimeFigureOut">
               <a:rPr lang="hu-HU" smtClean="0"/>
-              <a:t>2026. 03. 04.</a:t>
+              <a:t>2026. 03. 24.</a:t>
             </a:fld>
             <a:endParaRPr lang="hu-HU"/>
           </a:p>
@@ -4343,7 +4346,7 @@
           <a:p>
             <a:fld id="{D31F9038-47AD-43A3-BBBF-D66692911134}" type="datetimeFigureOut">
               <a:rPr lang="hu-HU" smtClean="0"/>
-              <a:t>2026. 03. 04.</a:t>
+              <a:t>2026. 03. 24.</a:t>
             </a:fld>
             <a:endParaRPr lang="hu-HU"/>
           </a:p>
@@ -4584,7 +4587,7 @@
           <a:p>
             <a:fld id="{D31F9038-47AD-43A3-BBBF-D66692911134}" type="datetimeFigureOut">
               <a:rPr lang="hu-HU" smtClean="0"/>
-              <a:t>2026. 03. 04.</a:t>
+              <a:t>2026. 03. 24.</a:t>
             </a:fld>
             <a:endParaRPr lang="hu-HU"/>
           </a:p>
@@ -5053,7 +5056,12 @@
             <p:ph type="ctrTitle"/>
           </p:nvPr>
         </p:nvSpPr>
-        <p:spPr/>
+        <p:spPr>
+          <a:xfrm>
+            <a:off x="1524000" y="257175"/>
+            <a:ext cx="9144000" cy="2062163"/>
+          </a:xfrm>
+        </p:spPr>
         <p:txBody>
           <a:bodyPr/>
           <a:lstStyle/>
@@ -5095,7 +5103,12 @@
             <p:ph type="subTitle" idx="1"/>
           </p:nvPr>
         </p:nvSpPr>
-        <p:spPr/>
+        <p:spPr>
+          <a:xfrm>
+            <a:off x="1524000" y="2319338"/>
+            <a:ext cx="9144000" cy="452437"/>
+          </a:xfrm>
+        </p:spPr>
         <p:txBody>
           <a:bodyPr/>
           <a:lstStyle/>
@@ -5157,8 +5170,8 @@
         </p:nvSpPr>
         <p:spPr>
           <a:xfrm>
-            <a:off x="8610599" y="6540500"/>
-            <a:ext cx="3581401" cy="369332"/>
+            <a:off x="5676900" y="2771775"/>
+            <a:ext cx="1038226" cy="369332"/>
           </a:xfrm>
           <a:prstGeom prst="rect">
             <a:avLst/>
@@ -5179,7 +5192,7 @@
                 <a:latin typeface="Times New Roman" panose="02020603050405020304" pitchFamily="18" charset="0"/>
                 <a:cs typeface="Times New Roman" panose="02020603050405020304" pitchFamily="18" charset="0"/>
               </a:rPr>
-              <a:t>Készítők: Csáki Balázs, Zsígó Róbert</a:t>
+              <a:t>Készítők:</a:t>
             </a:r>
           </a:p>
         </p:txBody>
@@ -5212,7 +5225,7 @@
         </p:blipFill>
         <p:spPr>
           <a:xfrm>
-            <a:off x="0" y="5812553"/>
+            <a:off x="5676900" y="5812553"/>
             <a:ext cx="1045447" cy="1045447"/>
           </a:xfrm>
           <a:prstGeom prst="rect">
@@ -5252,503 +5265,6 @@
       </p:grpSpPr>
       <p:pic>
         <p:nvPicPr>
-          <p:cNvPr id="5" name="Kép 4">
-            <a:extLst>
-              <a:ext uri="{FF2B5EF4-FFF2-40B4-BE49-F238E27FC236}">
-                <a16:creationId xmlns:a16="http://schemas.microsoft.com/office/drawing/2014/main" id="{CEFF17C2-5026-403D-A101-6AC9B36B708D}"/>
-              </a:ext>
-            </a:extLst>
-          </p:cNvPr>
-          <p:cNvPicPr>
-            <a:picLocks noChangeAspect="1"/>
-          </p:cNvPicPr>
-          <p:nvPr/>
-        </p:nvPicPr>
-        <p:blipFill>
-          <a:blip r:embed="rId2">
-            <a:extLst>
-              <a:ext uri="{28A0092B-C50C-407E-A947-70E740481C1C}">
-                <a14:useLocalDpi xmlns:a14="http://schemas.microsoft.com/office/drawing/2010/main" val="0"/>
-              </a:ext>
-            </a:extLst>
-          </a:blip>
-          <a:stretch>
-            <a:fillRect/>
-          </a:stretch>
-        </p:blipFill>
-        <p:spPr>
-          <a:xfrm>
-            <a:off x="0" y="-6376"/>
-            <a:ext cx="12192000" cy="6864376"/>
-          </a:xfrm>
-          <a:prstGeom prst="rect">
-            <a:avLst/>
-          </a:prstGeom>
-        </p:spPr>
-      </p:pic>
-      <p:sp>
-        <p:nvSpPr>
-          <p:cNvPr id="2" name="Cím 1">
-            <a:extLst>
-              <a:ext uri="{FF2B5EF4-FFF2-40B4-BE49-F238E27FC236}">
-                <a16:creationId xmlns:a16="http://schemas.microsoft.com/office/drawing/2014/main" id="{66C7BBF2-3BAE-4485-A30E-E3D573859C88}"/>
-              </a:ext>
-            </a:extLst>
-          </p:cNvPr>
-          <p:cNvSpPr>
-            <a:spLocks noGrp="1"/>
-          </p:cNvSpPr>
-          <p:nvPr>
-            <p:ph type="title"/>
-          </p:nvPr>
-        </p:nvSpPr>
-        <p:spPr/>
-        <p:txBody>
-          <a:bodyPr/>
-          <a:lstStyle/>
-          <a:p>
-            <a:r>
-              <a:rPr lang="hu-HU" dirty="0">
-                <a:solidFill>
-                  <a:schemeClr val="bg1"/>
-                </a:solidFill>
-              </a:rPr>
-              <a:t>Backend-Tesztelés</a:t>
-            </a:r>
-          </a:p>
-        </p:txBody>
-      </p:sp>
-      <p:sp>
-        <p:nvSpPr>
-          <p:cNvPr id="3" name="Tartalom helye 2">
-            <a:extLst>
-              <a:ext uri="{FF2B5EF4-FFF2-40B4-BE49-F238E27FC236}">
-                <a16:creationId xmlns:a16="http://schemas.microsoft.com/office/drawing/2014/main" id="{37E8E98B-FF77-45AF-B726-8E6D315B4593}"/>
-              </a:ext>
-            </a:extLst>
-          </p:cNvPr>
-          <p:cNvSpPr>
-            <a:spLocks noGrp="1"/>
-          </p:cNvSpPr>
-          <p:nvPr>
-            <p:ph idx="1"/>
-          </p:nvPr>
-        </p:nvSpPr>
-        <p:spPr/>
-        <p:txBody>
-          <a:bodyPr/>
-          <a:lstStyle/>
-          <a:p>
-            <a:endParaRPr lang="hu-HU" dirty="0"/>
-          </a:p>
-        </p:txBody>
-      </p:sp>
-      <p:pic>
-        <p:nvPicPr>
-          <p:cNvPr id="4" name="Kép 3">
-            <a:extLst>
-              <a:ext uri="{FF2B5EF4-FFF2-40B4-BE49-F238E27FC236}">
-                <a16:creationId xmlns:a16="http://schemas.microsoft.com/office/drawing/2014/main" id="{58A924F7-ECFE-48E4-8CF6-A10FD1DD425C}"/>
-              </a:ext>
-            </a:extLst>
-          </p:cNvPr>
-          <p:cNvPicPr>
-            <a:picLocks noChangeAspect="1"/>
-          </p:cNvPicPr>
-          <p:nvPr/>
-        </p:nvPicPr>
-        <p:blipFill>
-          <a:blip r:embed="rId3">
-            <a:extLst>
-              <a:ext uri="{28A0092B-C50C-407E-A947-70E740481C1C}">
-                <a14:useLocalDpi xmlns:a14="http://schemas.microsoft.com/office/drawing/2010/main" val="0"/>
-              </a:ext>
-            </a:extLst>
-          </a:blip>
-          <a:stretch>
-            <a:fillRect/>
-          </a:stretch>
-        </p:blipFill>
-        <p:spPr>
-          <a:xfrm>
-            <a:off x="0" y="5812553"/>
-            <a:ext cx="1045447" cy="1045447"/>
-          </a:xfrm>
-          <a:prstGeom prst="rect">
-            <a:avLst/>
-          </a:prstGeom>
-        </p:spPr>
-      </p:pic>
-    </p:spTree>
-    <p:extLst>
-      <p:ext uri="{BB962C8B-B14F-4D97-AF65-F5344CB8AC3E}">
-        <p14:creationId xmlns:p14="http://schemas.microsoft.com/office/powerpoint/2010/main" val="1588990733"/>
-      </p:ext>
-    </p:extLst>
-  </p:cSld>
-  <p:clrMapOvr>
-    <a:masterClrMapping/>
-  </p:clrMapOvr>
-</p:sld>
-</file>
-
-<file path=ppt/slides/slide11.xml><?xml version="1.0" encoding="utf-8"?>
-<p:sld xmlns:a="http://schemas.openxmlformats.org/drawingml/2006/main" xmlns:r="http://schemas.openxmlformats.org/officeDocument/2006/relationships" xmlns:p="http://schemas.openxmlformats.org/presentationml/2006/main">
-  <p:cSld>
-    <p:spTree>
-      <p:nvGrpSpPr>
-        <p:cNvPr id="1" name=""/>
-        <p:cNvGrpSpPr/>
-        <p:nvPr/>
-      </p:nvGrpSpPr>
-      <p:grpSpPr>
-        <a:xfrm>
-          <a:off x="0" y="0"/>
-          <a:ext cx="0" cy="0"/>
-          <a:chOff x="0" y="0"/>
-          <a:chExt cx="0" cy="0"/>
-        </a:xfrm>
-      </p:grpSpPr>
-      <p:pic>
-        <p:nvPicPr>
-          <p:cNvPr id="10" name="Kép 9">
-            <a:extLst>
-              <a:ext uri="{FF2B5EF4-FFF2-40B4-BE49-F238E27FC236}">
-                <a16:creationId xmlns:a16="http://schemas.microsoft.com/office/drawing/2014/main" id="{8DDE1B41-B9D2-4AC3-8FC3-143E40A507A3}"/>
-              </a:ext>
-            </a:extLst>
-          </p:cNvPr>
-          <p:cNvPicPr>
-            <a:picLocks noChangeAspect="1"/>
-          </p:cNvPicPr>
-          <p:nvPr/>
-        </p:nvPicPr>
-        <p:blipFill>
-          <a:blip r:embed="rId2">
-            <a:extLst>
-              <a:ext uri="{28A0092B-C50C-407E-A947-70E740481C1C}">
-                <a14:useLocalDpi xmlns:a14="http://schemas.microsoft.com/office/drawing/2010/main" val="0"/>
-              </a:ext>
-            </a:extLst>
-          </a:blip>
-          <a:stretch>
-            <a:fillRect/>
-          </a:stretch>
-        </p:blipFill>
-        <p:spPr>
-          <a:xfrm>
-            <a:off x="0" y="-6376"/>
-            <a:ext cx="12192000" cy="6864376"/>
-          </a:xfrm>
-          <a:prstGeom prst="rect">
-            <a:avLst/>
-          </a:prstGeom>
-        </p:spPr>
-      </p:pic>
-      <p:sp>
-        <p:nvSpPr>
-          <p:cNvPr id="7" name="Cím 6">
-            <a:extLst>
-              <a:ext uri="{FF2B5EF4-FFF2-40B4-BE49-F238E27FC236}">
-                <a16:creationId xmlns:a16="http://schemas.microsoft.com/office/drawing/2014/main" id="{6D732CAD-ACD9-4D47-B378-2E1BECA11B29}"/>
-              </a:ext>
-            </a:extLst>
-          </p:cNvPr>
-          <p:cNvSpPr>
-            <a:spLocks noGrp="1"/>
-          </p:cNvSpPr>
-          <p:nvPr>
-            <p:ph type="title"/>
-          </p:nvPr>
-        </p:nvSpPr>
-        <p:spPr/>
-        <p:txBody>
-          <a:bodyPr/>
-          <a:lstStyle/>
-          <a:p>
-            <a:r>
-              <a:rPr lang="hu-HU" dirty="0">
-                <a:solidFill>
-                  <a:schemeClr val="bg1"/>
-                </a:solidFill>
-                <a:latin typeface="Times New Roman" panose="02020603050405020304" pitchFamily="18" charset="0"/>
-                <a:cs typeface="Times New Roman" panose="02020603050405020304" pitchFamily="18" charset="0"/>
-              </a:rPr>
-              <a:t>Csapatmunka</a:t>
-            </a:r>
-          </a:p>
-        </p:txBody>
-      </p:sp>
-      <p:sp>
-        <p:nvSpPr>
-          <p:cNvPr id="8" name="Tartalom helye 7">
-            <a:extLst>
-              <a:ext uri="{FF2B5EF4-FFF2-40B4-BE49-F238E27FC236}">
-                <a16:creationId xmlns:a16="http://schemas.microsoft.com/office/drawing/2014/main" id="{6016BF16-FC6A-4835-B6F2-1A13A288492E}"/>
-              </a:ext>
-            </a:extLst>
-          </p:cNvPr>
-          <p:cNvSpPr>
-            <a:spLocks noGrp="1"/>
-          </p:cNvSpPr>
-          <p:nvPr>
-            <p:ph idx="1"/>
-          </p:nvPr>
-        </p:nvSpPr>
-        <p:spPr/>
-        <p:txBody>
-          <a:bodyPr/>
-          <a:lstStyle/>
-          <a:p>
-            <a:r>
-              <a:rPr lang="hu-HU" dirty="0">
-                <a:solidFill>
-                  <a:schemeClr val="bg1"/>
-                </a:solidFill>
-                <a:latin typeface="Times New Roman" panose="02020603050405020304" pitchFamily="18" charset="0"/>
-                <a:cs typeface="Times New Roman" panose="02020603050405020304" pitchFamily="18" charset="0"/>
-              </a:rPr>
-              <a:t>GitHub</a:t>
-            </a:r>
-          </a:p>
-          <a:p>
-            <a:r>
-              <a:rPr lang="hu-HU" dirty="0">
-                <a:solidFill>
-                  <a:schemeClr val="bg1"/>
-                </a:solidFill>
-                <a:latin typeface="Times New Roman" panose="02020603050405020304" pitchFamily="18" charset="0"/>
-                <a:cs typeface="Times New Roman" panose="02020603050405020304" pitchFamily="18" charset="0"/>
-              </a:rPr>
-              <a:t>Google Drive</a:t>
-            </a:r>
-          </a:p>
-          <a:p>
-            <a:r>
-              <a:rPr lang="hu-HU" dirty="0">
-                <a:solidFill>
-                  <a:schemeClr val="bg1"/>
-                </a:solidFill>
-                <a:latin typeface="Times New Roman" panose="02020603050405020304" pitchFamily="18" charset="0"/>
-                <a:cs typeface="Times New Roman" panose="02020603050405020304" pitchFamily="18" charset="0"/>
-              </a:rPr>
-              <a:t>Messenger</a:t>
-            </a:r>
-          </a:p>
-          <a:p>
-            <a:endParaRPr lang="hu-HU" dirty="0"/>
-          </a:p>
-        </p:txBody>
-      </p:sp>
-      <p:pic>
-        <p:nvPicPr>
-          <p:cNvPr id="9" name="Kép 8">
-            <a:extLst>
-              <a:ext uri="{FF2B5EF4-FFF2-40B4-BE49-F238E27FC236}">
-                <a16:creationId xmlns:a16="http://schemas.microsoft.com/office/drawing/2014/main" id="{95A3F57A-2CEB-49D2-B2EE-C3A9F97981B4}"/>
-              </a:ext>
-            </a:extLst>
-          </p:cNvPr>
-          <p:cNvPicPr>
-            <a:picLocks noChangeAspect="1"/>
-          </p:cNvPicPr>
-          <p:nvPr/>
-        </p:nvPicPr>
-        <p:blipFill>
-          <a:blip r:embed="rId3">
-            <a:extLst>
-              <a:ext uri="{28A0092B-C50C-407E-A947-70E740481C1C}">
-                <a14:useLocalDpi xmlns:a14="http://schemas.microsoft.com/office/drawing/2010/main" val="0"/>
-              </a:ext>
-            </a:extLst>
-          </a:blip>
-          <a:stretch>
-            <a:fillRect/>
-          </a:stretch>
-        </p:blipFill>
-        <p:spPr>
-          <a:xfrm>
-            <a:off x="0" y="5812553"/>
-            <a:ext cx="1045447" cy="1045447"/>
-          </a:xfrm>
-          <a:prstGeom prst="rect">
-            <a:avLst/>
-          </a:prstGeom>
-        </p:spPr>
-      </p:pic>
-      <p:pic>
-        <p:nvPicPr>
-          <p:cNvPr id="2050" name="Picture 2" descr="With GitHub - PyXAI documentation">
-            <a:extLst>
-              <a:ext uri="{FF2B5EF4-FFF2-40B4-BE49-F238E27FC236}">
-                <a16:creationId xmlns:a16="http://schemas.microsoft.com/office/drawing/2014/main" id="{C91D4B1C-28D8-4B24-9C45-7AF0768E9EC1}"/>
-              </a:ext>
-            </a:extLst>
-          </p:cNvPr>
-          <p:cNvPicPr>
-            <a:picLocks noChangeAspect="1" noChangeArrowheads="1"/>
-          </p:cNvPicPr>
-          <p:nvPr/>
-        </p:nvPicPr>
-        <p:blipFill>
-          <a:blip r:embed="rId4">
-            <a:extLst>
-              <a:ext uri="{28A0092B-C50C-407E-A947-70E740481C1C}">
-                <a14:useLocalDpi xmlns:a14="http://schemas.microsoft.com/office/drawing/2010/main" val="0"/>
-              </a:ext>
-            </a:extLst>
-          </a:blip>
-          <a:srcRect/>
-          <a:stretch>
-            <a:fillRect/>
-          </a:stretch>
-        </p:blipFill>
-        <p:spPr bwMode="auto">
-          <a:xfrm>
-            <a:off x="6580625" y="834615"/>
-            <a:ext cx="2067726" cy="1168714"/>
-          </a:xfrm>
-          <a:prstGeom prst="rect">
-            <a:avLst/>
-          </a:prstGeom>
-          <a:noFill/>
-          <a:extLst>
-            <a:ext uri="{909E8E84-426E-40DD-AFC4-6F175D3DCCD1}">
-              <a14:hiddenFill xmlns:a14="http://schemas.microsoft.com/office/drawing/2010/main">
-                <a:solidFill>
-                  <a:srgbClr val="FFFFFF"/>
-                </a:solidFill>
-              </a14:hiddenFill>
-            </a:ext>
-          </a:extLst>
-        </p:spPr>
-      </p:pic>
-      <p:pic>
-        <p:nvPicPr>
-          <p:cNvPr id="2052" name="Picture 4" descr="Google Drive - Wikipedia">
-            <a:extLst>
-              <a:ext uri="{FF2B5EF4-FFF2-40B4-BE49-F238E27FC236}">
-                <a16:creationId xmlns:a16="http://schemas.microsoft.com/office/drawing/2014/main" id="{C093FB46-E22D-403B-8679-CDC38DFDB5C8}"/>
-              </a:ext>
-            </a:extLst>
-          </p:cNvPr>
-          <p:cNvPicPr>
-            <a:picLocks noChangeAspect="1" noChangeArrowheads="1"/>
-          </p:cNvPicPr>
-          <p:nvPr/>
-        </p:nvPicPr>
-        <p:blipFill>
-          <a:blip r:embed="rId5">
-            <a:extLst>
-              <a:ext uri="{28A0092B-C50C-407E-A947-70E740481C1C}">
-                <a14:useLocalDpi xmlns:a14="http://schemas.microsoft.com/office/drawing/2010/main" val="0"/>
-              </a:ext>
-            </a:extLst>
-          </a:blip>
-          <a:srcRect/>
-          <a:stretch>
-            <a:fillRect/>
-          </a:stretch>
-        </p:blipFill>
-        <p:spPr bwMode="auto">
-          <a:xfrm>
-            <a:off x="8836464" y="793446"/>
-            <a:ext cx="1349378" cy="1207038"/>
-          </a:xfrm>
-          <a:prstGeom prst="rect">
-            <a:avLst/>
-          </a:prstGeom>
-          <a:noFill/>
-          <a:extLst>
-            <a:ext uri="{909E8E84-426E-40DD-AFC4-6F175D3DCCD1}">
-              <a14:hiddenFill xmlns:a14="http://schemas.microsoft.com/office/drawing/2010/main">
-                <a:solidFill>
-                  <a:srgbClr val="FFFFFF"/>
-                </a:solidFill>
-              </a14:hiddenFill>
-            </a:ext>
-          </a:extLst>
-        </p:spPr>
-      </p:pic>
-      <p:pic>
-        <p:nvPicPr>
-          <p:cNvPr id="2054" name="Picture 6">
-            <a:extLst>
-              <a:ext uri="{FF2B5EF4-FFF2-40B4-BE49-F238E27FC236}">
-                <a16:creationId xmlns:a16="http://schemas.microsoft.com/office/drawing/2014/main" id="{4518CB52-3E47-4504-895F-F1150B106FFB}"/>
-              </a:ext>
-            </a:extLst>
-          </p:cNvPr>
-          <p:cNvPicPr>
-            <a:picLocks noChangeAspect="1" noChangeArrowheads="1"/>
-          </p:cNvPicPr>
-          <p:nvPr/>
-        </p:nvPicPr>
-        <p:blipFill>
-          <a:blip r:embed="rId6">
-            <a:extLst>
-              <a:ext uri="{28A0092B-C50C-407E-A947-70E740481C1C}">
-                <a14:useLocalDpi xmlns:a14="http://schemas.microsoft.com/office/drawing/2010/main" val="0"/>
-              </a:ext>
-            </a:extLst>
-          </a:blip>
-          <a:srcRect/>
-          <a:stretch>
-            <a:fillRect/>
-          </a:stretch>
-        </p:blipFill>
-        <p:spPr bwMode="auto">
-          <a:xfrm>
-            <a:off x="8044831" y="2428805"/>
-            <a:ext cx="1207039" cy="1207039"/>
-          </a:xfrm>
-          <a:prstGeom prst="rect">
-            <a:avLst/>
-          </a:prstGeom>
-          <a:noFill/>
-          <a:extLst>
-            <a:ext uri="{909E8E84-426E-40DD-AFC4-6F175D3DCCD1}">
-              <a14:hiddenFill xmlns:a14="http://schemas.microsoft.com/office/drawing/2010/main">
-                <a:solidFill>
-                  <a:srgbClr val="FFFFFF"/>
-                </a:solidFill>
-              </a14:hiddenFill>
-            </a:ext>
-          </a:extLst>
-        </p:spPr>
-      </p:pic>
-    </p:spTree>
-    <p:extLst>
-      <p:ext uri="{BB962C8B-B14F-4D97-AF65-F5344CB8AC3E}">
-        <p14:creationId xmlns:p14="http://schemas.microsoft.com/office/powerpoint/2010/main" val="238496185"/>
-      </p:ext>
-    </p:extLst>
-  </p:cSld>
-  <p:clrMapOvr>
-    <a:masterClrMapping/>
-  </p:clrMapOvr>
-</p:sld>
-</file>
-
-<file path=ppt/slides/slide12.xml><?xml version="1.0" encoding="utf-8"?>
-<p:sld xmlns:a="http://schemas.openxmlformats.org/drawingml/2006/main" xmlns:r="http://schemas.openxmlformats.org/officeDocument/2006/relationships" xmlns:p="http://schemas.openxmlformats.org/presentationml/2006/main">
-  <p:cSld>
-    <p:spTree>
-      <p:nvGrpSpPr>
-        <p:cNvPr id="1" name=""/>
-        <p:cNvGrpSpPr/>
-        <p:nvPr/>
-      </p:nvGrpSpPr>
-      <p:grpSpPr>
-        <a:xfrm>
-          <a:off x="0" y="0"/>
-          <a:ext cx="0" cy="0"/>
-          <a:chOff x="0" y="0"/>
-          <a:chExt cx="0" cy="0"/>
-        </a:xfrm>
-      </p:grpSpPr>
-      <p:pic>
-        <p:nvPicPr>
           <p:cNvPr id="6" name="Kép 5">
             <a:extLst>
               <a:ext uri="{FF2B5EF4-FFF2-40B4-BE49-F238E27FC236}">
@@ -5921,10 +5437,410 @@
   <p:clrMapOvr>
     <a:masterClrMapping/>
   </p:clrMapOvr>
+  <p:transition spd="slow">
+    <p:push dir="u"/>
+  </p:transition>
+  <p:timing>
+    <p:tnLst>
+      <p:par>
+        <p:cTn id="1" dur="indefinite" restart="never" nodeType="tmRoot">
+          <p:childTnLst>
+            <p:seq concurrent="1" nextAc="seek">
+              <p:cTn id="2" dur="indefinite" nodeType="mainSeq">
+                <p:childTnLst>
+                  <p:par>
+                    <p:cTn id="3" fill="hold">
+                      <p:stCondLst>
+                        <p:cond delay="indefinite"/>
+                      </p:stCondLst>
+                      <p:childTnLst>
+                        <p:par>
+                          <p:cTn id="4" fill="hold">
+                            <p:stCondLst>
+                              <p:cond delay="0"/>
+                            </p:stCondLst>
+                            <p:childTnLst>
+                              <p:par>
+                                <p:cTn id="5" presetID="2" presetClass="entr" presetSubtype="4" fill="hold" grpId="0" nodeType="clickEffect">
+                                  <p:stCondLst>
+                                    <p:cond delay="0"/>
+                                  </p:stCondLst>
+                                  <p:childTnLst>
+                                    <p:set>
+                                      <p:cBhvr>
+                                        <p:cTn id="6" dur="1" fill="hold">
+                                          <p:stCondLst>
+                                            <p:cond delay="0"/>
+                                          </p:stCondLst>
+                                        </p:cTn>
+                                        <p:tgtEl>
+                                          <p:spTgt spid="2"/>
+                                        </p:tgtEl>
+                                        <p:attrNameLst>
+                                          <p:attrName>style.visibility</p:attrName>
+                                        </p:attrNameLst>
+                                      </p:cBhvr>
+                                      <p:to>
+                                        <p:strVal val="visible"/>
+                                      </p:to>
+                                    </p:set>
+                                    <p:anim calcmode="lin" valueType="num">
+                                      <p:cBhvr additive="base">
+                                        <p:cTn id="7" dur="500" fill="hold"/>
+                                        <p:tgtEl>
+                                          <p:spTgt spid="2"/>
+                                        </p:tgtEl>
+                                        <p:attrNameLst>
+                                          <p:attrName>ppt_x</p:attrName>
+                                        </p:attrNameLst>
+                                      </p:cBhvr>
+                                      <p:tavLst>
+                                        <p:tav tm="0">
+                                          <p:val>
+                                            <p:strVal val="#ppt_x"/>
+                                          </p:val>
+                                        </p:tav>
+                                        <p:tav tm="100000">
+                                          <p:val>
+                                            <p:strVal val="#ppt_x"/>
+                                          </p:val>
+                                        </p:tav>
+                                      </p:tavLst>
+                                    </p:anim>
+                                    <p:anim calcmode="lin" valueType="num">
+                                      <p:cBhvr additive="base">
+                                        <p:cTn id="8" dur="500" fill="hold"/>
+                                        <p:tgtEl>
+                                          <p:spTgt spid="2"/>
+                                        </p:tgtEl>
+                                        <p:attrNameLst>
+                                          <p:attrName>ppt_y</p:attrName>
+                                        </p:attrNameLst>
+                                      </p:cBhvr>
+                                      <p:tavLst>
+                                        <p:tav tm="0">
+                                          <p:val>
+                                            <p:strVal val="1+#ppt_h/2"/>
+                                          </p:val>
+                                        </p:tav>
+                                        <p:tav tm="100000">
+                                          <p:val>
+                                            <p:strVal val="#ppt_y"/>
+                                          </p:val>
+                                        </p:tav>
+                                      </p:tavLst>
+                                    </p:anim>
+                                  </p:childTnLst>
+                                </p:cTn>
+                              </p:par>
+                            </p:childTnLst>
+                          </p:cTn>
+                        </p:par>
+                      </p:childTnLst>
+                    </p:cTn>
+                  </p:par>
+                  <p:par>
+                    <p:cTn id="9" fill="hold">
+                      <p:stCondLst>
+                        <p:cond delay="indefinite"/>
+                      </p:stCondLst>
+                      <p:childTnLst>
+                        <p:par>
+                          <p:cTn id="10" fill="hold">
+                            <p:stCondLst>
+                              <p:cond delay="0"/>
+                            </p:stCondLst>
+                            <p:childTnLst>
+                              <p:par>
+                                <p:cTn id="11" presetID="2" presetClass="entr" presetSubtype="4" fill="hold" nodeType="clickEffect">
+                                  <p:stCondLst>
+                                    <p:cond delay="0"/>
+                                  </p:stCondLst>
+                                  <p:childTnLst>
+                                    <p:set>
+                                      <p:cBhvr>
+                                        <p:cTn id="12" dur="1" fill="hold">
+                                          <p:stCondLst>
+                                            <p:cond delay="0"/>
+                                          </p:stCondLst>
+                                        </p:cTn>
+                                        <p:tgtEl>
+                                          <p:spTgt spid="3">
+                                            <p:txEl>
+                                              <p:pRg st="0" end="0"/>
+                                            </p:txEl>
+                                          </p:spTgt>
+                                        </p:tgtEl>
+                                        <p:attrNameLst>
+                                          <p:attrName>style.visibility</p:attrName>
+                                        </p:attrNameLst>
+                                      </p:cBhvr>
+                                      <p:to>
+                                        <p:strVal val="visible"/>
+                                      </p:to>
+                                    </p:set>
+                                    <p:anim calcmode="lin" valueType="num">
+                                      <p:cBhvr additive="base">
+                                        <p:cTn id="13" dur="500" fill="hold"/>
+                                        <p:tgtEl>
+                                          <p:spTgt spid="3">
+                                            <p:txEl>
+                                              <p:pRg st="0" end="0"/>
+                                            </p:txEl>
+                                          </p:spTgt>
+                                        </p:tgtEl>
+                                        <p:attrNameLst>
+                                          <p:attrName>ppt_x</p:attrName>
+                                        </p:attrNameLst>
+                                      </p:cBhvr>
+                                      <p:tavLst>
+                                        <p:tav tm="0">
+                                          <p:val>
+                                            <p:strVal val="#ppt_x"/>
+                                          </p:val>
+                                        </p:tav>
+                                        <p:tav tm="100000">
+                                          <p:val>
+                                            <p:strVal val="#ppt_x"/>
+                                          </p:val>
+                                        </p:tav>
+                                      </p:tavLst>
+                                    </p:anim>
+                                    <p:anim calcmode="lin" valueType="num">
+                                      <p:cBhvr additive="base">
+                                        <p:cTn id="14" dur="500" fill="hold"/>
+                                        <p:tgtEl>
+                                          <p:spTgt spid="3">
+                                            <p:txEl>
+                                              <p:pRg st="0" end="0"/>
+                                            </p:txEl>
+                                          </p:spTgt>
+                                        </p:tgtEl>
+                                        <p:attrNameLst>
+                                          <p:attrName>ppt_y</p:attrName>
+                                        </p:attrNameLst>
+                                      </p:cBhvr>
+                                      <p:tavLst>
+                                        <p:tav tm="0">
+                                          <p:val>
+                                            <p:strVal val="1+#ppt_h/2"/>
+                                          </p:val>
+                                        </p:tav>
+                                        <p:tav tm="100000">
+                                          <p:val>
+                                            <p:strVal val="#ppt_y"/>
+                                          </p:val>
+                                        </p:tav>
+                                      </p:tavLst>
+                                    </p:anim>
+                                  </p:childTnLst>
+                                </p:cTn>
+                              </p:par>
+                              <p:par>
+                                <p:cTn id="15" presetID="2" presetClass="entr" presetSubtype="4" fill="hold" nodeType="withEffect">
+                                  <p:stCondLst>
+                                    <p:cond delay="0"/>
+                                  </p:stCondLst>
+                                  <p:childTnLst>
+                                    <p:set>
+                                      <p:cBhvr>
+                                        <p:cTn id="16" dur="1" fill="hold">
+                                          <p:stCondLst>
+                                            <p:cond delay="0"/>
+                                          </p:stCondLst>
+                                        </p:cTn>
+                                        <p:tgtEl>
+                                          <p:spTgt spid="3">
+                                            <p:txEl>
+                                              <p:pRg st="1" end="1"/>
+                                            </p:txEl>
+                                          </p:spTgt>
+                                        </p:tgtEl>
+                                        <p:attrNameLst>
+                                          <p:attrName>style.visibility</p:attrName>
+                                        </p:attrNameLst>
+                                      </p:cBhvr>
+                                      <p:to>
+                                        <p:strVal val="visible"/>
+                                      </p:to>
+                                    </p:set>
+                                    <p:anim calcmode="lin" valueType="num">
+                                      <p:cBhvr additive="base">
+                                        <p:cTn id="17" dur="500" fill="hold"/>
+                                        <p:tgtEl>
+                                          <p:spTgt spid="3">
+                                            <p:txEl>
+                                              <p:pRg st="1" end="1"/>
+                                            </p:txEl>
+                                          </p:spTgt>
+                                        </p:tgtEl>
+                                        <p:attrNameLst>
+                                          <p:attrName>ppt_x</p:attrName>
+                                        </p:attrNameLst>
+                                      </p:cBhvr>
+                                      <p:tavLst>
+                                        <p:tav tm="0">
+                                          <p:val>
+                                            <p:strVal val="#ppt_x"/>
+                                          </p:val>
+                                        </p:tav>
+                                        <p:tav tm="100000">
+                                          <p:val>
+                                            <p:strVal val="#ppt_x"/>
+                                          </p:val>
+                                        </p:tav>
+                                      </p:tavLst>
+                                    </p:anim>
+                                    <p:anim calcmode="lin" valueType="num">
+                                      <p:cBhvr additive="base">
+                                        <p:cTn id="18" dur="500" fill="hold"/>
+                                        <p:tgtEl>
+                                          <p:spTgt spid="3">
+                                            <p:txEl>
+                                              <p:pRg st="1" end="1"/>
+                                            </p:txEl>
+                                          </p:spTgt>
+                                        </p:tgtEl>
+                                        <p:attrNameLst>
+                                          <p:attrName>ppt_y</p:attrName>
+                                        </p:attrNameLst>
+                                      </p:cBhvr>
+                                      <p:tavLst>
+                                        <p:tav tm="0">
+                                          <p:val>
+                                            <p:strVal val="1+#ppt_h/2"/>
+                                          </p:val>
+                                        </p:tav>
+                                        <p:tav tm="100000">
+                                          <p:val>
+                                            <p:strVal val="#ppt_y"/>
+                                          </p:val>
+                                        </p:tav>
+                                      </p:tavLst>
+                                    </p:anim>
+                                  </p:childTnLst>
+                                </p:cTn>
+                              </p:par>
+                              <p:par>
+                                <p:cTn id="19" presetID="2" presetClass="entr" presetSubtype="4" fill="hold" nodeType="withEffect">
+                                  <p:stCondLst>
+                                    <p:cond delay="0"/>
+                                  </p:stCondLst>
+                                  <p:childTnLst>
+                                    <p:set>
+                                      <p:cBhvr>
+                                        <p:cTn id="20" dur="1" fill="hold">
+                                          <p:stCondLst>
+                                            <p:cond delay="0"/>
+                                          </p:stCondLst>
+                                        </p:cTn>
+                                        <p:tgtEl>
+                                          <p:spTgt spid="3">
+                                            <p:txEl>
+                                              <p:pRg st="2" end="2"/>
+                                            </p:txEl>
+                                          </p:spTgt>
+                                        </p:tgtEl>
+                                        <p:attrNameLst>
+                                          <p:attrName>style.visibility</p:attrName>
+                                        </p:attrNameLst>
+                                      </p:cBhvr>
+                                      <p:to>
+                                        <p:strVal val="visible"/>
+                                      </p:to>
+                                    </p:set>
+                                    <p:anim calcmode="lin" valueType="num">
+                                      <p:cBhvr additive="base">
+                                        <p:cTn id="21" dur="500" fill="hold"/>
+                                        <p:tgtEl>
+                                          <p:spTgt spid="3">
+                                            <p:txEl>
+                                              <p:pRg st="2" end="2"/>
+                                            </p:txEl>
+                                          </p:spTgt>
+                                        </p:tgtEl>
+                                        <p:attrNameLst>
+                                          <p:attrName>ppt_x</p:attrName>
+                                        </p:attrNameLst>
+                                      </p:cBhvr>
+                                      <p:tavLst>
+                                        <p:tav tm="0">
+                                          <p:val>
+                                            <p:strVal val="#ppt_x"/>
+                                          </p:val>
+                                        </p:tav>
+                                        <p:tav tm="100000">
+                                          <p:val>
+                                            <p:strVal val="#ppt_x"/>
+                                          </p:val>
+                                        </p:tav>
+                                      </p:tavLst>
+                                    </p:anim>
+                                    <p:anim calcmode="lin" valueType="num">
+                                      <p:cBhvr additive="base">
+                                        <p:cTn id="22" dur="500" fill="hold"/>
+                                        <p:tgtEl>
+                                          <p:spTgt spid="3">
+                                            <p:txEl>
+                                              <p:pRg st="2" end="2"/>
+                                            </p:txEl>
+                                          </p:spTgt>
+                                        </p:tgtEl>
+                                        <p:attrNameLst>
+                                          <p:attrName>ppt_y</p:attrName>
+                                        </p:attrNameLst>
+                                      </p:cBhvr>
+                                      <p:tavLst>
+                                        <p:tav tm="0">
+                                          <p:val>
+                                            <p:strVal val="1+#ppt_h/2"/>
+                                          </p:val>
+                                        </p:tav>
+                                        <p:tav tm="100000">
+                                          <p:val>
+                                            <p:strVal val="#ppt_y"/>
+                                          </p:val>
+                                        </p:tav>
+                                      </p:tavLst>
+                                    </p:anim>
+                                  </p:childTnLst>
+                                </p:cTn>
+                              </p:par>
+                            </p:childTnLst>
+                          </p:cTn>
+                        </p:par>
+                      </p:childTnLst>
+                    </p:cTn>
+                  </p:par>
+                </p:childTnLst>
+              </p:cTn>
+              <p:prevCondLst>
+                <p:cond evt="onPrev" delay="0">
+                  <p:tgtEl>
+                    <p:sldTgt/>
+                  </p:tgtEl>
+                </p:cond>
+              </p:prevCondLst>
+              <p:nextCondLst>
+                <p:cond evt="onNext" delay="0">
+                  <p:tgtEl>
+                    <p:sldTgt/>
+                  </p:tgtEl>
+                </p:cond>
+              </p:nextCondLst>
+            </p:seq>
+          </p:childTnLst>
+        </p:cTn>
+      </p:par>
+    </p:tnLst>
+    <p:bldLst>
+      <p:bldP spid="2" grpId="0"/>
+    </p:bldLst>
+  </p:timing>
 </p:sld>
 </file>
 
-<file path=ppt/slides/slide13.xml><?xml version="1.0" encoding="utf-8"?>
+<file path=ppt/slides/slide11.xml><?xml version="1.0" encoding="utf-8"?>
 <p:sld xmlns:a="http://schemas.openxmlformats.org/drawingml/2006/main" xmlns:r="http://schemas.openxmlformats.org/officeDocument/2006/relationships" xmlns:p="http://schemas.openxmlformats.org/presentationml/2006/main">
   <p:cSld>
     <p:spTree>
@@ -6135,10 +6051,325 @@
   <p:clrMapOvr>
     <a:masterClrMapping/>
   </p:clrMapOvr>
+  <p:transition spd="slow">
+    <p:push dir="u"/>
+  </p:transition>
+  <p:timing>
+    <p:tnLst>
+      <p:par>
+        <p:cTn id="1" dur="indefinite" restart="never" nodeType="tmRoot">
+          <p:childTnLst>
+            <p:seq concurrent="1" nextAc="seek">
+              <p:cTn id="2" dur="indefinite" nodeType="mainSeq">
+                <p:childTnLst>
+                  <p:par>
+                    <p:cTn id="3" fill="hold">
+                      <p:stCondLst>
+                        <p:cond delay="indefinite"/>
+                      </p:stCondLst>
+                      <p:childTnLst>
+                        <p:par>
+                          <p:cTn id="4" fill="hold">
+                            <p:stCondLst>
+                              <p:cond delay="0"/>
+                            </p:stCondLst>
+                            <p:childTnLst>
+                              <p:par>
+                                <p:cTn id="5" presetID="2" presetClass="entr" presetSubtype="4" fill="hold" grpId="0" nodeType="clickEffect">
+                                  <p:stCondLst>
+                                    <p:cond delay="0"/>
+                                  </p:stCondLst>
+                                  <p:childTnLst>
+                                    <p:set>
+                                      <p:cBhvr>
+                                        <p:cTn id="6" dur="1" fill="hold">
+                                          <p:stCondLst>
+                                            <p:cond delay="0"/>
+                                          </p:stCondLst>
+                                        </p:cTn>
+                                        <p:tgtEl>
+                                          <p:spTgt spid="2"/>
+                                        </p:tgtEl>
+                                        <p:attrNameLst>
+                                          <p:attrName>style.visibility</p:attrName>
+                                        </p:attrNameLst>
+                                      </p:cBhvr>
+                                      <p:to>
+                                        <p:strVal val="visible"/>
+                                      </p:to>
+                                    </p:set>
+                                    <p:anim calcmode="lin" valueType="num">
+                                      <p:cBhvr additive="base">
+                                        <p:cTn id="7" dur="500" fill="hold"/>
+                                        <p:tgtEl>
+                                          <p:spTgt spid="2"/>
+                                        </p:tgtEl>
+                                        <p:attrNameLst>
+                                          <p:attrName>ppt_x</p:attrName>
+                                        </p:attrNameLst>
+                                      </p:cBhvr>
+                                      <p:tavLst>
+                                        <p:tav tm="0">
+                                          <p:val>
+                                            <p:strVal val="#ppt_x"/>
+                                          </p:val>
+                                        </p:tav>
+                                        <p:tav tm="100000">
+                                          <p:val>
+                                            <p:strVal val="#ppt_x"/>
+                                          </p:val>
+                                        </p:tav>
+                                      </p:tavLst>
+                                    </p:anim>
+                                    <p:anim calcmode="lin" valueType="num">
+                                      <p:cBhvr additive="base">
+                                        <p:cTn id="8" dur="500" fill="hold"/>
+                                        <p:tgtEl>
+                                          <p:spTgt spid="2"/>
+                                        </p:tgtEl>
+                                        <p:attrNameLst>
+                                          <p:attrName>ppt_y</p:attrName>
+                                        </p:attrNameLst>
+                                      </p:cBhvr>
+                                      <p:tavLst>
+                                        <p:tav tm="0">
+                                          <p:val>
+                                            <p:strVal val="1+#ppt_h/2"/>
+                                          </p:val>
+                                        </p:tav>
+                                        <p:tav tm="100000">
+                                          <p:val>
+                                            <p:strVal val="#ppt_y"/>
+                                          </p:val>
+                                        </p:tav>
+                                      </p:tavLst>
+                                    </p:anim>
+                                  </p:childTnLst>
+                                </p:cTn>
+                              </p:par>
+                            </p:childTnLst>
+                          </p:cTn>
+                        </p:par>
+                      </p:childTnLst>
+                    </p:cTn>
+                  </p:par>
+                  <p:par>
+                    <p:cTn id="9" fill="hold">
+                      <p:stCondLst>
+                        <p:cond delay="indefinite"/>
+                      </p:stCondLst>
+                      <p:childTnLst>
+                        <p:par>
+                          <p:cTn id="10" fill="hold">
+                            <p:stCondLst>
+                              <p:cond delay="0"/>
+                            </p:stCondLst>
+                            <p:childTnLst>
+                              <p:par>
+                                <p:cTn id="11" presetID="2" presetClass="entr" presetSubtype="4" fill="hold" nodeType="clickEffect">
+                                  <p:stCondLst>
+                                    <p:cond delay="0"/>
+                                  </p:stCondLst>
+                                  <p:childTnLst>
+                                    <p:set>
+                                      <p:cBhvr>
+                                        <p:cTn id="12" dur="1" fill="hold">
+                                          <p:stCondLst>
+                                            <p:cond delay="0"/>
+                                          </p:stCondLst>
+                                        </p:cTn>
+                                        <p:tgtEl>
+                                          <p:spTgt spid="3">
+                                            <p:txEl>
+                                              <p:pRg st="0" end="0"/>
+                                            </p:txEl>
+                                          </p:spTgt>
+                                        </p:tgtEl>
+                                        <p:attrNameLst>
+                                          <p:attrName>style.visibility</p:attrName>
+                                        </p:attrNameLst>
+                                      </p:cBhvr>
+                                      <p:to>
+                                        <p:strVal val="visible"/>
+                                      </p:to>
+                                    </p:set>
+                                    <p:anim calcmode="lin" valueType="num">
+                                      <p:cBhvr additive="base">
+                                        <p:cTn id="13" dur="500" fill="hold"/>
+                                        <p:tgtEl>
+                                          <p:spTgt spid="3">
+                                            <p:txEl>
+                                              <p:pRg st="0" end="0"/>
+                                            </p:txEl>
+                                          </p:spTgt>
+                                        </p:tgtEl>
+                                        <p:attrNameLst>
+                                          <p:attrName>ppt_x</p:attrName>
+                                        </p:attrNameLst>
+                                      </p:cBhvr>
+                                      <p:tavLst>
+                                        <p:tav tm="0">
+                                          <p:val>
+                                            <p:strVal val="#ppt_x"/>
+                                          </p:val>
+                                        </p:tav>
+                                        <p:tav tm="100000">
+                                          <p:val>
+                                            <p:strVal val="#ppt_x"/>
+                                          </p:val>
+                                        </p:tav>
+                                      </p:tavLst>
+                                    </p:anim>
+                                    <p:anim calcmode="lin" valueType="num">
+                                      <p:cBhvr additive="base">
+                                        <p:cTn id="14" dur="500" fill="hold"/>
+                                        <p:tgtEl>
+                                          <p:spTgt spid="3">
+                                            <p:txEl>
+                                              <p:pRg st="0" end="0"/>
+                                            </p:txEl>
+                                          </p:spTgt>
+                                        </p:tgtEl>
+                                        <p:attrNameLst>
+                                          <p:attrName>ppt_y</p:attrName>
+                                        </p:attrNameLst>
+                                      </p:cBhvr>
+                                      <p:tavLst>
+                                        <p:tav tm="0">
+                                          <p:val>
+                                            <p:strVal val="1+#ppt_h/2"/>
+                                          </p:val>
+                                        </p:tav>
+                                        <p:tav tm="100000">
+                                          <p:val>
+                                            <p:strVal val="#ppt_y"/>
+                                          </p:val>
+                                        </p:tav>
+                                      </p:tavLst>
+                                    </p:anim>
+                                  </p:childTnLst>
+                                </p:cTn>
+                              </p:par>
+                              <p:par>
+                                <p:cTn id="15" presetID="2" presetClass="entr" presetSubtype="4" fill="hold" nodeType="withEffect">
+                                  <p:stCondLst>
+                                    <p:cond delay="0"/>
+                                  </p:stCondLst>
+                                  <p:childTnLst>
+                                    <p:set>
+                                      <p:cBhvr>
+                                        <p:cTn id="16" dur="1" fill="hold">
+                                          <p:stCondLst>
+                                            <p:cond delay="0"/>
+                                          </p:stCondLst>
+                                        </p:cTn>
+                                        <p:tgtEl>
+                                          <p:spTgt spid="3">
+                                            <p:txEl>
+                                              <p:pRg st="1" end="1"/>
+                                            </p:txEl>
+                                          </p:spTgt>
+                                        </p:tgtEl>
+                                        <p:attrNameLst>
+                                          <p:attrName>style.visibility</p:attrName>
+                                        </p:attrNameLst>
+                                      </p:cBhvr>
+                                      <p:to>
+                                        <p:strVal val="visible"/>
+                                      </p:to>
+                                    </p:set>
+                                    <p:anim calcmode="lin" valueType="num">
+                                      <p:cBhvr additive="base">
+                                        <p:cTn id="17" dur="500" fill="hold"/>
+                                        <p:tgtEl>
+                                          <p:spTgt spid="3">
+                                            <p:txEl>
+                                              <p:pRg st="1" end="1"/>
+                                            </p:txEl>
+                                          </p:spTgt>
+                                        </p:tgtEl>
+                                        <p:attrNameLst>
+                                          <p:attrName>ppt_x</p:attrName>
+                                        </p:attrNameLst>
+                                      </p:cBhvr>
+                                      <p:tavLst>
+                                        <p:tav tm="0">
+                                          <p:val>
+                                            <p:strVal val="#ppt_x"/>
+                                          </p:val>
+                                        </p:tav>
+                                        <p:tav tm="100000">
+                                          <p:val>
+                                            <p:strVal val="#ppt_x"/>
+                                          </p:val>
+                                        </p:tav>
+                                      </p:tavLst>
+                                    </p:anim>
+                                    <p:anim calcmode="lin" valueType="num">
+                                      <p:cBhvr additive="base">
+                                        <p:cTn id="18" dur="500" fill="hold"/>
+                                        <p:tgtEl>
+                                          <p:spTgt spid="3">
+                                            <p:txEl>
+                                              <p:pRg st="1" end="1"/>
+                                            </p:txEl>
+                                          </p:spTgt>
+                                        </p:tgtEl>
+                                        <p:attrNameLst>
+                                          <p:attrName>ppt_y</p:attrName>
+                                        </p:attrNameLst>
+                                      </p:cBhvr>
+                                      <p:tavLst>
+                                        <p:tav tm="0">
+                                          <p:val>
+                                            <p:strVal val="1+#ppt_h/2"/>
+                                          </p:val>
+                                        </p:tav>
+                                        <p:tav tm="100000">
+                                          <p:val>
+                                            <p:strVal val="#ppt_y"/>
+                                          </p:val>
+                                        </p:tav>
+                                      </p:tavLst>
+                                    </p:anim>
+                                  </p:childTnLst>
+                                </p:cTn>
+                              </p:par>
+                            </p:childTnLst>
+                          </p:cTn>
+                        </p:par>
+                      </p:childTnLst>
+                    </p:cTn>
+                  </p:par>
+                </p:childTnLst>
+              </p:cTn>
+              <p:prevCondLst>
+                <p:cond evt="onPrev" delay="0">
+                  <p:tgtEl>
+                    <p:sldTgt/>
+                  </p:tgtEl>
+                </p:cond>
+              </p:prevCondLst>
+              <p:nextCondLst>
+                <p:cond evt="onNext" delay="0">
+                  <p:tgtEl>
+                    <p:sldTgt/>
+                  </p:tgtEl>
+                </p:cond>
+              </p:nextCondLst>
+            </p:seq>
+          </p:childTnLst>
+        </p:cTn>
+      </p:par>
+    </p:tnLst>
+    <p:bldLst>
+      <p:bldP spid="2" grpId="0"/>
+    </p:bldLst>
+  </p:timing>
 </p:sld>
 </file>
 
-<file path=ppt/slides/slide14.xml><?xml version="1.0" encoding="utf-8"?>
+<file path=ppt/slides/slide12.xml><?xml version="1.0" encoding="utf-8"?>
 <p:sld xmlns:a="http://schemas.openxmlformats.org/drawingml/2006/main" xmlns:r="http://schemas.openxmlformats.org/officeDocument/2006/relationships" xmlns:p="http://schemas.openxmlformats.org/presentationml/2006/main">
   <p:cSld>
     <p:spTree>
@@ -6155,6 +6386,42 @@
           <a:chExt cx="0" cy="0"/>
         </a:xfrm>
       </p:grpSpPr>
+      <p:pic>
+        <p:nvPicPr>
+          <p:cNvPr id="5" name="Kép 4">
+            <a:extLst>
+              <a:ext uri="{FF2B5EF4-FFF2-40B4-BE49-F238E27FC236}">
+                <a16:creationId xmlns:a16="http://schemas.microsoft.com/office/drawing/2014/main" id="{DBBEA73C-9919-4FA6-88CC-F864FB01208D}"/>
+              </a:ext>
+            </a:extLst>
+          </p:cNvPr>
+          <p:cNvPicPr>
+            <a:picLocks noChangeAspect="1"/>
+          </p:cNvPicPr>
+          <p:nvPr/>
+        </p:nvPicPr>
+        <p:blipFill>
+          <a:blip r:embed="rId2">
+            <a:extLst>
+              <a:ext uri="{28A0092B-C50C-407E-A947-70E740481C1C}">
+                <a14:useLocalDpi xmlns:a14="http://schemas.microsoft.com/office/drawing/2010/main" val="0"/>
+              </a:ext>
+            </a:extLst>
+          </a:blip>
+          <a:stretch>
+            <a:fillRect/>
+          </a:stretch>
+        </p:blipFill>
+        <p:spPr>
+          <a:xfrm>
+            <a:off x="0" y="-6376"/>
+            <a:ext cx="12192000" cy="6864376"/>
+          </a:xfrm>
+          <a:prstGeom prst="rect">
+            <a:avLst/>
+          </a:prstGeom>
+        </p:spPr>
+      </p:pic>
       <p:sp>
         <p:nvSpPr>
           <p:cNvPr id="2" name="Cím 1">
@@ -6178,6 +6445,9 @@
           <a:p>
             <a:r>
               <a:rPr lang="hu-HU" dirty="0">
+                <a:solidFill>
+                  <a:schemeClr val="bg1"/>
+                </a:solidFill>
                 <a:latin typeface="Times New Roman" panose="02020603050405020304" pitchFamily="18" charset="0"/>
                 <a:cs typeface="Times New Roman" panose="02020603050405020304" pitchFamily="18" charset="0"/>
               </a:rPr>
@@ -6209,6 +6479,9 @@
           <a:p>
             <a:r>
               <a:rPr lang="hu-HU" dirty="0">
+                <a:solidFill>
+                  <a:schemeClr val="bg1"/>
+                </a:solidFill>
                 <a:latin typeface="Times New Roman" panose="02020603050405020304" pitchFamily="18" charset="0"/>
                 <a:cs typeface="Times New Roman" panose="02020603050405020304" pitchFamily="18" charset="0"/>
               </a:rPr>
@@ -6221,7 +6494,7 @@
               <a:rPr lang="hu-HU" dirty="0">
                 <a:latin typeface="Times New Roman" panose="02020603050405020304" pitchFamily="18" charset="0"/>
                 <a:cs typeface="Times New Roman" panose="02020603050405020304" pitchFamily="18" charset="0"/>
-                <a:hlinkClick r:id="rId2"/>
+                <a:hlinkClick r:id="rId3"/>
               </a:rPr>
               <a:t>csaki.balazs@diak.szbi-pg.hu</a:t>
             </a:r>
@@ -6236,7 +6509,7 @@
               <a:rPr lang="hu-HU" dirty="0">
                 <a:latin typeface="Times New Roman" panose="02020603050405020304" pitchFamily="18" charset="0"/>
                 <a:cs typeface="Times New Roman" panose="02020603050405020304" pitchFamily="18" charset="0"/>
-                <a:hlinkClick r:id="rId3"/>
+                <a:hlinkClick r:id="rId4"/>
               </a:rPr>
               <a:t>zsigo.robert.jozsef@diak.szbi-pg.hu</a:t>
             </a:r>
@@ -6262,7 +6535,7 @@
           <p:nvPr/>
         </p:nvPicPr>
         <p:blipFill>
-          <a:blip r:embed="rId4">
+          <a:blip r:embed="rId5">
             <a:extLst>
               <a:ext uri="{28A0092B-C50C-407E-A947-70E740481C1C}">
                 <a14:useLocalDpi xmlns:a14="http://schemas.microsoft.com/office/drawing/2010/main" val="0"/>
@@ -6287,6 +6560,154 @@
     <p:extLst>
       <p:ext uri="{BB962C8B-B14F-4D97-AF65-F5344CB8AC3E}">
         <p14:creationId xmlns:p14="http://schemas.microsoft.com/office/powerpoint/2010/main" val="1445229942"/>
+      </p:ext>
+    </p:extLst>
+  </p:cSld>
+  <p:clrMapOvr>
+    <a:masterClrMapping/>
+  </p:clrMapOvr>
+  <p:transition spd="slow">
+    <p:push dir="u"/>
+  </p:transition>
+</p:sld>
+</file>
+
+<file path=ppt/slides/slide13.xml><?xml version="1.0" encoding="utf-8"?>
+<p:sld xmlns:a="http://schemas.openxmlformats.org/drawingml/2006/main" xmlns:r="http://schemas.openxmlformats.org/officeDocument/2006/relationships" xmlns:p="http://schemas.openxmlformats.org/presentationml/2006/main">
+  <p:cSld>
+    <p:spTree>
+      <p:nvGrpSpPr>
+        <p:cNvPr id="1" name=""/>
+        <p:cNvGrpSpPr/>
+        <p:nvPr/>
+      </p:nvGrpSpPr>
+      <p:grpSpPr>
+        <a:xfrm>
+          <a:off x="0" y="0"/>
+          <a:ext cx="0" cy="0"/>
+          <a:chOff x="0" y="0"/>
+          <a:chExt cx="0" cy="0"/>
+        </a:xfrm>
+      </p:grpSpPr>
+      <p:pic>
+        <p:nvPicPr>
+          <p:cNvPr id="5" name="Kép 4">
+            <a:extLst>
+              <a:ext uri="{FF2B5EF4-FFF2-40B4-BE49-F238E27FC236}">
+                <a16:creationId xmlns:a16="http://schemas.microsoft.com/office/drawing/2014/main" id="{1492A8B7-213D-48A2-A400-215142688095}"/>
+              </a:ext>
+            </a:extLst>
+          </p:cNvPr>
+          <p:cNvPicPr>
+            <a:picLocks noChangeAspect="1"/>
+          </p:cNvPicPr>
+          <p:nvPr/>
+        </p:nvPicPr>
+        <p:blipFill>
+          <a:blip r:embed="rId2">
+            <a:extLst>
+              <a:ext uri="{28A0092B-C50C-407E-A947-70E740481C1C}">
+                <a14:useLocalDpi xmlns:a14="http://schemas.microsoft.com/office/drawing/2010/main" val="0"/>
+              </a:ext>
+            </a:extLst>
+          </a:blip>
+          <a:stretch>
+            <a:fillRect/>
+          </a:stretch>
+        </p:blipFill>
+        <p:spPr>
+          <a:xfrm>
+            <a:off x="0" y="-6376"/>
+            <a:ext cx="12192000" cy="6864376"/>
+          </a:xfrm>
+          <a:prstGeom prst="rect">
+            <a:avLst/>
+          </a:prstGeom>
+        </p:spPr>
+      </p:pic>
+      <p:sp>
+        <p:nvSpPr>
+          <p:cNvPr id="2" name="Cím 1">
+            <a:extLst>
+              <a:ext uri="{FF2B5EF4-FFF2-40B4-BE49-F238E27FC236}">
+                <a16:creationId xmlns:a16="http://schemas.microsoft.com/office/drawing/2014/main" id="{118ED8F9-B759-4BCC-8D27-393FB748CB23}"/>
+              </a:ext>
+            </a:extLst>
+          </p:cNvPr>
+          <p:cNvSpPr>
+            <a:spLocks noGrp="1"/>
+          </p:cNvSpPr>
+          <p:nvPr>
+            <p:ph type="title"/>
+          </p:nvPr>
+        </p:nvSpPr>
+        <p:spPr/>
+        <p:txBody>
+          <a:bodyPr/>
+          <a:lstStyle/>
+          <a:p>
+            <a:r>
+              <a:rPr lang="hu-HU" dirty="0">
+                <a:solidFill>
+                  <a:schemeClr val="bg1"/>
+                </a:solidFill>
+              </a:rPr>
+              <a:t>Források</a:t>
+            </a:r>
+          </a:p>
+        </p:txBody>
+      </p:sp>
+      <p:sp>
+        <p:nvSpPr>
+          <p:cNvPr id="3" name="Tartalom helye 2">
+            <a:extLst>
+              <a:ext uri="{FF2B5EF4-FFF2-40B4-BE49-F238E27FC236}">
+                <a16:creationId xmlns:a16="http://schemas.microsoft.com/office/drawing/2014/main" id="{2B113B84-4F05-4D56-BCA0-02417EBAAF78}"/>
+              </a:ext>
+            </a:extLst>
+          </p:cNvPr>
+          <p:cNvSpPr>
+            <a:spLocks noGrp="1"/>
+          </p:cNvSpPr>
+          <p:nvPr>
+            <p:ph idx="1"/>
+          </p:nvPr>
+        </p:nvSpPr>
+        <p:spPr/>
+        <p:txBody>
+          <a:bodyPr>
+            <a:normAutofit/>
+          </a:bodyPr>
+          <a:lstStyle/>
+          <a:p>
+            <a:r>
+              <a:rPr lang="hu-HU" sz="1600" dirty="0">
+                <a:solidFill>
+                  <a:schemeClr val="bg1"/>
+                </a:solidFill>
+                <a:hlinkClick r:id="rId3"/>
+              </a:rPr>
+              <a:t>https://pixabay.com/hu/photos/k%c3%a9szlet-keresked%c3%a9s-monitor-%c3%bczleti-1863880/</a:t>
+            </a:r>
+            <a:endParaRPr lang="hu-HU" sz="1600" dirty="0">
+              <a:solidFill>
+                <a:schemeClr val="bg1"/>
+              </a:solidFill>
+            </a:endParaRPr>
+          </a:p>
+          <a:p>
+            <a:endParaRPr lang="hu-HU" sz="1600" dirty="0">
+              <a:solidFill>
+                <a:schemeClr val="bg1"/>
+              </a:solidFill>
+            </a:endParaRPr>
+          </a:p>
+        </p:txBody>
+      </p:sp>
+    </p:spTree>
+    <p:extLst>
+      <p:ext uri="{BB962C8B-B14F-4D97-AF65-F5344CB8AC3E}">
+        <p14:creationId xmlns:p14="http://schemas.microsoft.com/office/powerpoint/2010/main" val="3749060679"/>
       </p:ext>
     </p:extLst>
   </p:cSld>
@@ -6564,6 +6985,491 @@
   <p:clrMapOvr>
     <a:masterClrMapping/>
   </p:clrMapOvr>
+  <p:transition spd="slow">
+    <p:push dir="u"/>
+  </p:transition>
+  <p:timing>
+    <p:tnLst>
+      <p:par>
+        <p:cTn id="1" dur="indefinite" restart="never" nodeType="tmRoot">
+          <p:childTnLst>
+            <p:seq concurrent="1" nextAc="seek">
+              <p:cTn id="2" dur="indefinite" nodeType="mainSeq">
+                <p:childTnLst>
+                  <p:par>
+                    <p:cTn id="3" fill="hold">
+                      <p:stCondLst>
+                        <p:cond delay="indefinite"/>
+                      </p:stCondLst>
+                      <p:childTnLst>
+                        <p:par>
+                          <p:cTn id="4" fill="hold">
+                            <p:stCondLst>
+                              <p:cond delay="0"/>
+                            </p:stCondLst>
+                            <p:childTnLst>
+                              <p:par>
+                                <p:cTn id="5" presetID="2" presetClass="entr" presetSubtype="4" fill="hold" grpId="0" nodeType="clickEffect">
+                                  <p:stCondLst>
+                                    <p:cond delay="0"/>
+                                  </p:stCondLst>
+                                  <p:childTnLst>
+                                    <p:set>
+                                      <p:cBhvr>
+                                        <p:cTn id="6" dur="1" fill="hold">
+                                          <p:stCondLst>
+                                            <p:cond delay="0"/>
+                                          </p:stCondLst>
+                                        </p:cTn>
+                                        <p:tgtEl>
+                                          <p:spTgt spid="2"/>
+                                        </p:tgtEl>
+                                        <p:attrNameLst>
+                                          <p:attrName>style.visibility</p:attrName>
+                                        </p:attrNameLst>
+                                      </p:cBhvr>
+                                      <p:to>
+                                        <p:strVal val="visible"/>
+                                      </p:to>
+                                    </p:set>
+                                    <p:anim calcmode="lin" valueType="num">
+                                      <p:cBhvr additive="base">
+                                        <p:cTn id="7" dur="500" fill="hold"/>
+                                        <p:tgtEl>
+                                          <p:spTgt spid="2"/>
+                                        </p:tgtEl>
+                                        <p:attrNameLst>
+                                          <p:attrName>ppt_x</p:attrName>
+                                        </p:attrNameLst>
+                                      </p:cBhvr>
+                                      <p:tavLst>
+                                        <p:tav tm="0">
+                                          <p:val>
+                                            <p:strVal val="#ppt_x"/>
+                                          </p:val>
+                                        </p:tav>
+                                        <p:tav tm="100000">
+                                          <p:val>
+                                            <p:strVal val="#ppt_x"/>
+                                          </p:val>
+                                        </p:tav>
+                                      </p:tavLst>
+                                    </p:anim>
+                                    <p:anim calcmode="lin" valueType="num">
+                                      <p:cBhvr additive="base">
+                                        <p:cTn id="8" dur="500" fill="hold"/>
+                                        <p:tgtEl>
+                                          <p:spTgt spid="2"/>
+                                        </p:tgtEl>
+                                        <p:attrNameLst>
+                                          <p:attrName>ppt_y</p:attrName>
+                                        </p:attrNameLst>
+                                      </p:cBhvr>
+                                      <p:tavLst>
+                                        <p:tav tm="0">
+                                          <p:val>
+                                            <p:strVal val="1+#ppt_h/2"/>
+                                          </p:val>
+                                        </p:tav>
+                                        <p:tav tm="100000">
+                                          <p:val>
+                                            <p:strVal val="#ppt_y"/>
+                                          </p:val>
+                                        </p:tav>
+                                      </p:tavLst>
+                                    </p:anim>
+                                  </p:childTnLst>
+                                </p:cTn>
+                              </p:par>
+                            </p:childTnLst>
+                          </p:cTn>
+                        </p:par>
+                      </p:childTnLst>
+                    </p:cTn>
+                  </p:par>
+                  <p:par>
+                    <p:cTn id="9" fill="hold">
+                      <p:stCondLst>
+                        <p:cond delay="indefinite"/>
+                      </p:stCondLst>
+                      <p:childTnLst>
+                        <p:par>
+                          <p:cTn id="10" fill="hold">
+                            <p:stCondLst>
+                              <p:cond delay="0"/>
+                            </p:stCondLst>
+                            <p:childTnLst>
+                              <p:par>
+                                <p:cTn id="11" presetID="2" presetClass="entr" presetSubtype="4" fill="hold" nodeType="clickEffect">
+                                  <p:stCondLst>
+                                    <p:cond delay="0"/>
+                                  </p:stCondLst>
+                                  <p:childTnLst>
+                                    <p:set>
+                                      <p:cBhvr>
+                                        <p:cTn id="12" dur="1" fill="hold">
+                                          <p:stCondLst>
+                                            <p:cond delay="0"/>
+                                          </p:stCondLst>
+                                        </p:cTn>
+                                        <p:tgtEl>
+                                          <p:spTgt spid="3">
+                                            <p:txEl>
+                                              <p:pRg st="0" end="0"/>
+                                            </p:txEl>
+                                          </p:spTgt>
+                                        </p:tgtEl>
+                                        <p:attrNameLst>
+                                          <p:attrName>style.visibility</p:attrName>
+                                        </p:attrNameLst>
+                                      </p:cBhvr>
+                                      <p:to>
+                                        <p:strVal val="visible"/>
+                                      </p:to>
+                                    </p:set>
+                                    <p:anim calcmode="lin" valueType="num">
+                                      <p:cBhvr additive="base">
+                                        <p:cTn id="13" dur="500" fill="hold"/>
+                                        <p:tgtEl>
+                                          <p:spTgt spid="3">
+                                            <p:txEl>
+                                              <p:pRg st="0" end="0"/>
+                                            </p:txEl>
+                                          </p:spTgt>
+                                        </p:tgtEl>
+                                        <p:attrNameLst>
+                                          <p:attrName>ppt_x</p:attrName>
+                                        </p:attrNameLst>
+                                      </p:cBhvr>
+                                      <p:tavLst>
+                                        <p:tav tm="0">
+                                          <p:val>
+                                            <p:strVal val="#ppt_x"/>
+                                          </p:val>
+                                        </p:tav>
+                                        <p:tav tm="100000">
+                                          <p:val>
+                                            <p:strVal val="#ppt_x"/>
+                                          </p:val>
+                                        </p:tav>
+                                      </p:tavLst>
+                                    </p:anim>
+                                    <p:anim calcmode="lin" valueType="num">
+                                      <p:cBhvr additive="base">
+                                        <p:cTn id="14" dur="500" fill="hold"/>
+                                        <p:tgtEl>
+                                          <p:spTgt spid="3">
+                                            <p:txEl>
+                                              <p:pRg st="0" end="0"/>
+                                            </p:txEl>
+                                          </p:spTgt>
+                                        </p:tgtEl>
+                                        <p:attrNameLst>
+                                          <p:attrName>ppt_y</p:attrName>
+                                        </p:attrNameLst>
+                                      </p:cBhvr>
+                                      <p:tavLst>
+                                        <p:tav tm="0">
+                                          <p:val>
+                                            <p:strVal val="1+#ppt_h/2"/>
+                                          </p:val>
+                                        </p:tav>
+                                        <p:tav tm="100000">
+                                          <p:val>
+                                            <p:strVal val="#ppt_y"/>
+                                          </p:val>
+                                        </p:tav>
+                                      </p:tavLst>
+                                    </p:anim>
+                                  </p:childTnLst>
+                                </p:cTn>
+                              </p:par>
+                              <p:par>
+                                <p:cTn id="15" presetID="2" presetClass="entr" presetSubtype="4" fill="hold" nodeType="withEffect">
+                                  <p:stCondLst>
+                                    <p:cond delay="0"/>
+                                  </p:stCondLst>
+                                  <p:childTnLst>
+                                    <p:set>
+                                      <p:cBhvr>
+                                        <p:cTn id="16" dur="1" fill="hold">
+                                          <p:stCondLst>
+                                            <p:cond delay="0"/>
+                                          </p:stCondLst>
+                                        </p:cTn>
+                                        <p:tgtEl>
+                                          <p:spTgt spid="3">
+                                            <p:txEl>
+                                              <p:pRg st="1" end="1"/>
+                                            </p:txEl>
+                                          </p:spTgt>
+                                        </p:tgtEl>
+                                        <p:attrNameLst>
+                                          <p:attrName>style.visibility</p:attrName>
+                                        </p:attrNameLst>
+                                      </p:cBhvr>
+                                      <p:to>
+                                        <p:strVal val="visible"/>
+                                      </p:to>
+                                    </p:set>
+                                    <p:anim calcmode="lin" valueType="num">
+                                      <p:cBhvr additive="base">
+                                        <p:cTn id="17" dur="500" fill="hold"/>
+                                        <p:tgtEl>
+                                          <p:spTgt spid="3">
+                                            <p:txEl>
+                                              <p:pRg st="1" end="1"/>
+                                            </p:txEl>
+                                          </p:spTgt>
+                                        </p:tgtEl>
+                                        <p:attrNameLst>
+                                          <p:attrName>ppt_x</p:attrName>
+                                        </p:attrNameLst>
+                                      </p:cBhvr>
+                                      <p:tavLst>
+                                        <p:tav tm="0">
+                                          <p:val>
+                                            <p:strVal val="#ppt_x"/>
+                                          </p:val>
+                                        </p:tav>
+                                        <p:tav tm="100000">
+                                          <p:val>
+                                            <p:strVal val="#ppt_x"/>
+                                          </p:val>
+                                        </p:tav>
+                                      </p:tavLst>
+                                    </p:anim>
+                                    <p:anim calcmode="lin" valueType="num">
+                                      <p:cBhvr additive="base">
+                                        <p:cTn id="18" dur="500" fill="hold"/>
+                                        <p:tgtEl>
+                                          <p:spTgt spid="3">
+                                            <p:txEl>
+                                              <p:pRg st="1" end="1"/>
+                                            </p:txEl>
+                                          </p:spTgt>
+                                        </p:tgtEl>
+                                        <p:attrNameLst>
+                                          <p:attrName>ppt_y</p:attrName>
+                                        </p:attrNameLst>
+                                      </p:cBhvr>
+                                      <p:tavLst>
+                                        <p:tav tm="0">
+                                          <p:val>
+                                            <p:strVal val="1+#ppt_h/2"/>
+                                          </p:val>
+                                        </p:tav>
+                                        <p:tav tm="100000">
+                                          <p:val>
+                                            <p:strVal val="#ppt_y"/>
+                                          </p:val>
+                                        </p:tav>
+                                      </p:tavLst>
+                                    </p:anim>
+                                  </p:childTnLst>
+                                </p:cTn>
+                              </p:par>
+                              <p:par>
+                                <p:cTn id="19" presetID="2" presetClass="entr" presetSubtype="4" fill="hold" nodeType="withEffect">
+                                  <p:stCondLst>
+                                    <p:cond delay="0"/>
+                                  </p:stCondLst>
+                                  <p:childTnLst>
+                                    <p:set>
+                                      <p:cBhvr>
+                                        <p:cTn id="20" dur="1" fill="hold">
+                                          <p:stCondLst>
+                                            <p:cond delay="0"/>
+                                          </p:stCondLst>
+                                        </p:cTn>
+                                        <p:tgtEl>
+                                          <p:spTgt spid="3">
+                                            <p:txEl>
+                                              <p:pRg st="2" end="2"/>
+                                            </p:txEl>
+                                          </p:spTgt>
+                                        </p:tgtEl>
+                                        <p:attrNameLst>
+                                          <p:attrName>style.visibility</p:attrName>
+                                        </p:attrNameLst>
+                                      </p:cBhvr>
+                                      <p:to>
+                                        <p:strVal val="visible"/>
+                                      </p:to>
+                                    </p:set>
+                                    <p:anim calcmode="lin" valueType="num">
+                                      <p:cBhvr additive="base">
+                                        <p:cTn id="21" dur="500" fill="hold"/>
+                                        <p:tgtEl>
+                                          <p:spTgt spid="3">
+                                            <p:txEl>
+                                              <p:pRg st="2" end="2"/>
+                                            </p:txEl>
+                                          </p:spTgt>
+                                        </p:tgtEl>
+                                        <p:attrNameLst>
+                                          <p:attrName>ppt_x</p:attrName>
+                                        </p:attrNameLst>
+                                      </p:cBhvr>
+                                      <p:tavLst>
+                                        <p:tav tm="0">
+                                          <p:val>
+                                            <p:strVal val="#ppt_x"/>
+                                          </p:val>
+                                        </p:tav>
+                                        <p:tav tm="100000">
+                                          <p:val>
+                                            <p:strVal val="#ppt_x"/>
+                                          </p:val>
+                                        </p:tav>
+                                      </p:tavLst>
+                                    </p:anim>
+                                    <p:anim calcmode="lin" valueType="num">
+                                      <p:cBhvr additive="base">
+                                        <p:cTn id="22" dur="500" fill="hold"/>
+                                        <p:tgtEl>
+                                          <p:spTgt spid="3">
+                                            <p:txEl>
+                                              <p:pRg st="2" end="2"/>
+                                            </p:txEl>
+                                          </p:spTgt>
+                                        </p:tgtEl>
+                                        <p:attrNameLst>
+                                          <p:attrName>ppt_y</p:attrName>
+                                        </p:attrNameLst>
+                                      </p:cBhvr>
+                                      <p:tavLst>
+                                        <p:tav tm="0">
+                                          <p:val>
+                                            <p:strVal val="1+#ppt_h/2"/>
+                                          </p:val>
+                                        </p:tav>
+                                        <p:tav tm="100000">
+                                          <p:val>
+                                            <p:strVal val="#ppt_y"/>
+                                          </p:val>
+                                        </p:tav>
+                                      </p:tavLst>
+                                    </p:anim>
+                                  </p:childTnLst>
+                                </p:cTn>
+                              </p:par>
+                              <p:par>
+                                <p:cTn id="23" presetID="2" presetClass="entr" presetSubtype="4" fill="hold" nodeType="withEffect">
+                                  <p:stCondLst>
+                                    <p:cond delay="0"/>
+                                  </p:stCondLst>
+                                  <p:childTnLst>
+                                    <p:set>
+                                      <p:cBhvr>
+                                        <p:cTn id="24" dur="1" fill="hold">
+                                          <p:stCondLst>
+                                            <p:cond delay="0"/>
+                                          </p:stCondLst>
+                                        </p:cTn>
+                                        <p:tgtEl>
+                                          <p:spTgt spid="3">
+                                            <p:txEl>
+                                              <p:pRg st="3" end="3"/>
+                                            </p:txEl>
+                                          </p:spTgt>
+                                        </p:tgtEl>
+                                        <p:attrNameLst>
+                                          <p:attrName>style.visibility</p:attrName>
+                                        </p:attrNameLst>
+                                      </p:cBhvr>
+                                      <p:to>
+                                        <p:strVal val="visible"/>
+                                      </p:to>
+                                    </p:set>
+                                    <p:anim calcmode="lin" valueType="num">
+                                      <p:cBhvr additive="base">
+                                        <p:cTn id="25" dur="500" fill="hold"/>
+                                        <p:tgtEl>
+                                          <p:spTgt spid="3">
+                                            <p:txEl>
+                                              <p:pRg st="3" end="3"/>
+                                            </p:txEl>
+                                          </p:spTgt>
+                                        </p:tgtEl>
+                                        <p:attrNameLst>
+                                          <p:attrName>ppt_x</p:attrName>
+                                        </p:attrNameLst>
+                                      </p:cBhvr>
+                                      <p:tavLst>
+                                        <p:tav tm="0">
+                                          <p:val>
+                                            <p:strVal val="#ppt_x"/>
+                                          </p:val>
+                                        </p:tav>
+                                        <p:tav tm="100000">
+                                          <p:val>
+                                            <p:strVal val="#ppt_x"/>
+                                          </p:val>
+                                        </p:tav>
+                                      </p:tavLst>
+                                    </p:anim>
+                                    <p:anim calcmode="lin" valueType="num">
+                                      <p:cBhvr additive="base">
+                                        <p:cTn id="26" dur="500" fill="hold"/>
+                                        <p:tgtEl>
+                                          <p:spTgt spid="3">
+                                            <p:txEl>
+                                              <p:pRg st="3" end="3"/>
+                                            </p:txEl>
+                                          </p:spTgt>
+                                        </p:tgtEl>
+                                        <p:attrNameLst>
+                                          <p:attrName>ppt_y</p:attrName>
+                                        </p:attrNameLst>
+                                      </p:cBhvr>
+                                      <p:tavLst>
+                                        <p:tav tm="0">
+                                          <p:val>
+                                            <p:strVal val="1+#ppt_h/2"/>
+                                          </p:val>
+                                        </p:tav>
+                                        <p:tav tm="100000">
+                                          <p:val>
+                                            <p:strVal val="#ppt_y"/>
+                                          </p:val>
+                                        </p:tav>
+                                      </p:tavLst>
+                                    </p:anim>
+                                  </p:childTnLst>
+                                </p:cTn>
+                              </p:par>
+                            </p:childTnLst>
+                          </p:cTn>
+                        </p:par>
+                      </p:childTnLst>
+                    </p:cTn>
+                  </p:par>
+                </p:childTnLst>
+              </p:cTn>
+              <p:prevCondLst>
+                <p:cond evt="onPrev" delay="0">
+                  <p:tgtEl>
+                    <p:sldTgt/>
+                  </p:tgtEl>
+                </p:cond>
+              </p:prevCondLst>
+              <p:nextCondLst>
+                <p:cond evt="onNext" delay="0">
+                  <p:tgtEl>
+                    <p:sldTgt/>
+                  </p:tgtEl>
+                </p:cond>
+              </p:nextCondLst>
+            </p:seq>
+          </p:childTnLst>
+        </p:cTn>
+      </p:par>
+    </p:tnLst>
+    <p:bldLst>
+      <p:bldP spid="2" grpId="0"/>
+    </p:bldLst>
+  </p:timing>
 </p:sld>
 </file>
 
@@ -6791,6 +7697,406 @@
   <p:clrMapOvr>
     <a:masterClrMapping/>
   </p:clrMapOvr>
+  <p:transition spd="slow">
+    <p:push dir="u"/>
+  </p:transition>
+  <p:timing>
+    <p:tnLst>
+      <p:par>
+        <p:cTn id="1" dur="indefinite" restart="never" nodeType="tmRoot">
+          <p:childTnLst>
+            <p:seq concurrent="1" nextAc="seek">
+              <p:cTn id="2" dur="indefinite" nodeType="mainSeq">
+                <p:childTnLst>
+                  <p:par>
+                    <p:cTn id="3" fill="hold">
+                      <p:stCondLst>
+                        <p:cond delay="indefinite"/>
+                      </p:stCondLst>
+                      <p:childTnLst>
+                        <p:par>
+                          <p:cTn id="4" fill="hold">
+                            <p:stCondLst>
+                              <p:cond delay="0"/>
+                            </p:stCondLst>
+                            <p:childTnLst>
+                              <p:par>
+                                <p:cTn id="5" presetID="2" presetClass="entr" presetSubtype="4" fill="hold" grpId="0" nodeType="clickEffect">
+                                  <p:stCondLst>
+                                    <p:cond delay="0"/>
+                                  </p:stCondLst>
+                                  <p:childTnLst>
+                                    <p:set>
+                                      <p:cBhvr>
+                                        <p:cTn id="6" dur="1" fill="hold">
+                                          <p:stCondLst>
+                                            <p:cond delay="0"/>
+                                          </p:stCondLst>
+                                        </p:cTn>
+                                        <p:tgtEl>
+                                          <p:spTgt spid="2"/>
+                                        </p:tgtEl>
+                                        <p:attrNameLst>
+                                          <p:attrName>style.visibility</p:attrName>
+                                        </p:attrNameLst>
+                                      </p:cBhvr>
+                                      <p:to>
+                                        <p:strVal val="visible"/>
+                                      </p:to>
+                                    </p:set>
+                                    <p:anim calcmode="lin" valueType="num">
+                                      <p:cBhvr additive="base">
+                                        <p:cTn id="7" dur="500" fill="hold"/>
+                                        <p:tgtEl>
+                                          <p:spTgt spid="2"/>
+                                        </p:tgtEl>
+                                        <p:attrNameLst>
+                                          <p:attrName>ppt_x</p:attrName>
+                                        </p:attrNameLst>
+                                      </p:cBhvr>
+                                      <p:tavLst>
+                                        <p:tav tm="0">
+                                          <p:val>
+                                            <p:strVal val="#ppt_x"/>
+                                          </p:val>
+                                        </p:tav>
+                                        <p:tav tm="100000">
+                                          <p:val>
+                                            <p:strVal val="#ppt_x"/>
+                                          </p:val>
+                                        </p:tav>
+                                      </p:tavLst>
+                                    </p:anim>
+                                    <p:anim calcmode="lin" valueType="num">
+                                      <p:cBhvr additive="base">
+                                        <p:cTn id="8" dur="500" fill="hold"/>
+                                        <p:tgtEl>
+                                          <p:spTgt spid="2"/>
+                                        </p:tgtEl>
+                                        <p:attrNameLst>
+                                          <p:attrName>ppt_y</p:attrName>
+                                        </p:attrNameLst>
+                                      </p:cBhvr>
+                                      <p:tavLst>
+                                        <p:tav tm="0">
+                                          <p:val>
+                                            <p:strVal val="1+#ppt_h/2"/>
+                                          </p:val>
+                                        </p:tav>
+                                        <p:tav tm="100000">
+                                          <p:val>
+                                            <p:strVal val="#ppt_y"/>
+                                          </p:val>
+                                        </p:tav>
+                                      </p:tavLst>
+                                    </p:anim>
+                                  </p:childTnLst>
+                                </p:cTn>
+                              </p:par>
+                            </p:childTnLst>
+                          </p:cTn>
+                        </p:par>
+                      </p:childTnLst>
+                    </p:cTn>
+                  </p:par>
+                  <p:par>
+                    <p:cTn id="9" fill="hold">
+                      <p:stCondLst>
+                        <p:cond delay="indefinite"/>
+                      </p:stCondLst>
+                      <p:childTnLst>
+                        <p:par>
+                          <p:cTn id="10" fill="hold">
+                            <p:stCondLst>
+                              <p:cond delay="0"/>
+                            </p:stCondLst>
+                            <p:childTnLst>
+                              <p:par>
+                                <p:cTn id="11" presetID="2" presetClass="entr" presetSubtype="4" fill="hold" nodeType="clickEffect">
+                                  <p:stCondLst>
+                                    <p:cond delay="0"/>
+                                  </p:stCondLst>
+                                  <p:childTnLst>
+                                    <p:set>
+                                      <p:cBhvr>
+                                        <p:cTn id="12" dur="1" fill="hold">
+                                          <p:stCondLst>
+                                            <p:cond delay="0"/>
+                                          </p:stCondLst>
+                                        </p:cTn>
+                                        <p:tgtEl>
+                                          <p:spTgt spid="3">
+                                            <p:txEl>
+                                              <p:pRg st="0" end="0"/>
+                                            </p:txEl>
+                                          </p:spTgt>
+                                        </p:tgtEl>
+                                        <p:attrNameLst>
+                                          <p:attrName>style.visibility</p:attrName>
+                                        </p:attrNameLst>
+                                      </p:cBhvr>
+                                      <p:to>
+                                        <p:strVal val="visible"/>
+                                      </p:to>
+                                    </p:set>
+                                    <p:anim calcmode="lin" valueType="num">
+                                      <p:cBhvr additive="base">
+                                        <p:cTn id="13" dur="500" fill="hold"/>
+                                        <p:tgtEl>
+                                          <p:spTgt spid="3">
+                                            <p:txEl>
+                                              <p:pRg st="0" end="0"/>
+                                            </p:txEl>
+                                          </p:spTgt>
+                                        </p:tgtEl>
+                                        <p:attrNameLst>
+                                          <p:attrName>ppt_x</p:attrName>
+                                        </p:attrNameLst>
+                                      </p:cBhvr>
+                                      <p:tavLst>
+                                        <p:tav tm="0">
+                                          <p:val>
+                                            <p:strVal val="#ppt_x"/>
+                                          </p:val>
+                                        </p:tav>
+                                        <p:tav tm="100000">
+                                          <p:val>
+                                            <p:strVal val="#ppt_x"/>
+                                          </p:val>
+                                        </p:tav>
+                                      </p:tavLst>
+                                    </p:anim>
+                                    <p:anim calcmode="lin" valueType="num">
+                                      <p:cBhvr additive="base">
+                                        <p:cTn id="14" dur="500" fill="hold"/>
+                                        <p:tgtEl>
+                                          <p:spTgt spid="3">
+                                            <p:txEl>
+                                              <p:pRg st="0" end="0"/>
+                                            </p:txEl>
+                                          </p:spTgt>
+                                        </p:tgtEl>
+                                        <p:attrNameLst>
+                                          <p:attrName>ppt_y</p:attrName>
+                                        </p:attrNameLst>
+                                      </p:cBhvr>
+                                      <p:tavLst>
+                                        <p:tav tm="0">
+                                          <p:val>
+                                            <p:strVal val="1+#ppt_h/2"/>
+                                          </p:val>
+                                        </p:tav>
+                                        <p:tav tm="100000">
+                                          <p:val>
+                                            <p:strVal val="#ppt_y"/>
+                                          </p:val>
+                                        </p:tav>
+                                      </p:tavLst>
+                                    </p:anim>
+                                  </p:childTnLst>
+                                </p:cTn>
+                              </p:par>
+                              <p:par>
+                                <p:cTn id="15" presetID="2" presetClass="entr" presetSubtype="4" fill="hold" nodeType="withEffect">
+                                  <p:stCondLst>
+                                    <p:cond delay="0"/>
+                                  </p:stCondLst>
+                                  <p:childTnLst>
+                                    <p:set>
+                                      <p:cBhvr>
+                                        <p:cTn id="16" dur="1" fill="hold">
+                                          <p:stCondLst>
+                                            <p:cond delay="0"/>
+                                          </p:stCondLst>
+                                        </p:cTn>
+                                        <p:tgtEl>
+                                          <p:spTgt spid="3">
+                                            <p:txEl>
+                                              <p:pRg st="1" end="1"/>
+                                            </p:txEl>
+                                          </p:spTgt>
+                                        </p:tgtEl>
+                                        <p:attrNameLst>
+                                          <p:attrName>style.visibility</p:attrName>
+                                        </p:attrNameLst>
+                                      </p:cBhvr>
+                                      <p:to>
+                                        <p:strVal val="visible"/>
+                                      </p:to>
+                                    </p:set>
+                                    <p:anim calcmode="lin" valueType="num">
+                                      <p:cBhvr additive="base">
+                                        <p:cTn id="17" dur="500" fill="hold"/>
+                                        <p:tgtEl>
+                                          <p:spTgt spid="3">
+                                            <p:txEl>
+                                              <p:pRg st="1" end="1"/>
+                                            </p:txEl>
+                                          </p:spTgt>
+                                        </p:tgtEl>
+                                        <p:attrNameLst>
+                                          <p:attrName>ppt_x</p:attrName>
+                                        </p:attrNameLst>
+                                      </p:cBhvr>
+                                      <p:tavLst>
+                                        <p:tav tm="0">
+                                          <p:val>
+                                            <p:strVal val="#ppt_x"/>
+                                          </p:val>
+                                        </p:tav>
+                                        <p:tav tm="100000">
+                                          <p:val>
+                                            <p:strVal val="#ppt_x"/>
+                                          </p:val>
+                                        </p:tav>
+                                      </p:tavLst>
+                                    </p:anim>
+                                    <p:anim calcmode="lin" valueType="num">
+                                      <p:cBhvr additive="base">
+                                        <p:cTn id="18" dur="500" fill="hold"/>
+                                        <p:tgtEl>
+                                          <p:spTgt spid="3">
+                                            <p:txEl>
+                                              <p:pRg st="1" end="1"/>
+                                            </p:txEl>
+                                          </p:spTgt>
+                                        </p:tgtEl>
+                                        <p:attrNameLst>
+                                          <p:attrName>ppt_y</p:attrName>
+                                        </p:attrNameLst>
+                                      </p:cBhvr>
+                                      <p:tavLst>
+                                        <p:tav tm="0">
+                                          <p:val>
+                                            <p:strVal val="1+#ppt_h/2"/>
+                                          </p:val>
+                                        </p:tav>
+                                        <p:tav tm="100000">
+                                          <p:val>
+                                            <p:strVal val="#ppt_y"/>
+                                          </p:val>
+                                        </p:tav>
+                                      </p:tavLst>
+                                    </p:anim>
+                                  </p:childTnLst>
+                                </p:cTn>
+                              </p:par>
+                              <p:par>
+                                <p:cTn id="19" presetID="2" presetClass="entr" presetSubtype="4" fill="hold" nodeType="withEffect">
+                                  <p:stCondLst>
+                                    <p:cond delay="0"/>
+                                  </p:stCondLst>
+                                  <p:childTnLst>
+                                    <p:set>
+                                      <p:cBhvr>
+                                        <p:cTn id="20" dur="1" fill="hold">
+                                          <p:stCondLst>
+                                            <p:cond delay="0"/>
+                                          </p:stCondLst>
+                                        </p:cTn>
+                                        <p:tgtEl>
+                                          <p:spTgt spid="3">
+                                            <p:txEl>
+                                              <p:pRg st="2" end="2"/>
+                                            </p:txEl>
+                                          </p:spTgt>
+                                        </p:tgtEl>
+                                        <p:attrNameLst>
+                                          <p:attrName>style.visibility</p:attrName>
+                                        </p:attrNameLst>
+                                      </p:cBhvr>
+                                      <p:to>
+                                        <p:strVal val="visible"/>
+                                      </p:to>
+                                    </p:set>
+                                    <p:anim calcmode="lin" valueType="num">
+                                      <p:cBhvr additive="base">
+                                        <p:cTn id="21" dur="500" fill="hold"/>
+                                        <p:tgtEl>
+                                          <p:spTgt spid="3">
+                                            <p:txEl>
+                                              <p:pRg st="2" end="2"/>
+                                            </p:txEl>
+                                          </p:spTgt>
+                                        </p:tgtEl>
+                                        <p:attrNameLst>
+                                          <p:attrName>ppt_x</p:attrName>
+                                        </p:attrNameLst>
+                                      </p:cBhvr>
+                                      <p:tavLst>
+                                        <p:tav tm="0">
+                                          <p:val>
+                                            <p:strVal val="#ppt_x"/>
+                                          </p:val>
+                                        </p:tav>
+                                        <p:tav tm="100000">
+                                          <p:val>
+                                            <p:strVal val="#ppt_x"/>
+                                          </p:val>
+                                        </p:tav>
+                                      </p:tavLst>
+                                    </p:anim>
+                                    <p:anim calcmode="lin" valueType="num">
+                                      <p:cBhvr additive="base">
+                                        <p:cTn id="22" dur="500" fill="hold"/>
+                                        <p:tgtEl>
+                                          <p:spTgt spid="3">
+                                            <p:txEl>
+                                              <p:pRg st="2" end="2"/>
+                                            </p:txEl>
+                                          </p:spTgt>
+                                        </p:tgtEl>
+                                        <p:attrNameLst>
+                                          <p:attrName>ppt_y</p:attrName>
+                                        </p:attrNameLst>
+                                      </p:cBhvr>
+                                      <p:tavLst>
+                                        <p:tav tm="0">
+                                          <p:val>
+                                            <p:strVal val="1+#ppt_h/2"/>
+                                          </p:val>
+                                        </p:tav>
+                                        <p:tav tm="100000">
+                                          <p:val>
+                                            <p:strVal val="#ppt_y"/>
+                                          </p:val>
+                                        </p:tav>
+                                      </p:tavLst>
+                                    </p:anim>
+                                  </p:childTnLst>
+                                </p:cTn>
+                              </p:par>
+                            </p:childTnLst>
+                          </p:cTn>
+                        </p:par>
+                      </p:childTnLst>
+                    </p:cTn>
+                  </p:par>
+                </p:childTnLst>
+              </p:cTn>
+              <p:prevCondLst>
+                <p:cond evt="onPrev" delay="0">
+                  <p:tgtEl>
+                    <p:sldTgt/>
+                  </p:tgtEl>
+                </p:cond>
+              </p:prevCondLst>
+              <p:nextCondLst>
+                <p:cond evt="onNext" delay="0">
+                  <p:tgtEl>
+                    <p:sldTgt/>
+                  </p:tgtEl>
+                </p:cond>
+              </p:nextCondLst>
+            </p:seq>
+          </p:childTnLst>
+        </p:cTn>
+      </p:par>
+    </p:tnLst>
+    <p:bldLst>
+      <p:bldP spid="2" grpId="0"/>
+    </p:bldLst>
+  </p:timing>
 </p:sld>
 </file>
 
@@ -7010,6 +8316,321 @@
   <p:clrMapOvr>
     <a:masterClrMapping/>
   </p:clrMapOvr>
+  <p:transition spd="slow">
+    <p:push dir="u"/>
+  </p:transition>
+  <p:timing>
+    <p:tnLst>
+      <p:par>
+        <p:cTn id="1" dur="indefinite" restart="never" nodeType="tmRoot">
+          <p:childTnLst>
+            <p:seq concurrent="1" nextAc="seek">
+              <p:cTn id="2" dur="indefinite" nodeType="mainSeq">
+                <p:childTnLst>
+                  <p:par>
+                    <p:cTn id="3" fill="hold">
+                      <p:stCondLst>
+                        <p:cond delay="indefinite"/>
+                      </p:stCondLst>
+                      <p:childTnLst>
+                        <p:par>
+                          <p:cTn id="4" fill="hold">
+                            <p:stCondLst>
+                              <p:cond delay="0"/>
+                            </p:stCondLst>
+                            <p:childTnLst>
+                              <p:par>
+                                <p:cTn id="5" presetID="2" presetClass="entr" presetSubtype="4" fill="hold" grpId="0" nodeType="clickEffect">
+                                  <p:stCondLst>
+                                    <p:cond delay="0"/>
+                                  </p:stCondLst>
+                                  <p:childTnLst>
+                                    <p:set>
+                                      <p:cBhvr>
+                                        <p:cTn id="6" dur="1" fill="hold">
+                                          <p:stCondLst>
+                                            <p:cond delay="0"/>
+                                          </p:stCondLst>
+                                        </p:cTn>
+                                        <p:tgtEl>
+                                          <p:spTgt spid="2"/>
+                                        </p:tgtEl>
+                                        <p:attrNameLst>
+                                          <p:attrName>style.visibility</p:attrName>
+                                        </p:attrNameLst>
+                                      </p:cBhvr>
+                                      <p:to>
+                                        <p:strVal val="visible"/>
+                                      </p:to>
+                                    </p:set>
+                                    <p:anim calcmode="lin" valueType="num">
+                                      <p:cBhvr additive="base">
+                                        <p:cTn id="7" dur="500" fill="hold"/>
+                                        <p:tgtEl>
+                                          <p:spTgt spid="2"/>
+                                        </p:tgtEl>
+                                        <p:attrNameLst>
+                                          <p:attrName>ppt_x</p:attrName>
+                                        </p:attrNameLst>
+                                      </p:cBhvr>
+                                      <p:tavLst>
+                                        <p:tav tm="0">
+                                          <p:val>
+                                            <p:strVal val="#ppt_x"/>
+                                          </p:val>
+                                        </p:tav>
+                                        <p:tav tm="100000">
+                                          <p:val>
+                                            <p:strVal val="#ppt_x"/>
+                                          </p:val>
+                                        </p:tav>
+                                      </p:tavLst>
+                                    </p:anim>
+                                    <p:anim calcmode="lin" valueType="num">
+                                      <p:cBhvr additive="base">
+                                        <p:cTn id="8" dur="500" fill="hold"/>
+                                        <p:tgtEl>
+                                          <p:spTgt spid="2"/>
+                                        </p:tgtEl>
+                                        <p:attrNameLst>
+                                          <p:attrName>ppt_y</p:attrName>
+                                        </p:attrNameLst>
+                                      </p:cBhvr>
+                                      <p:tavLst>
+                                        <p:tav tm="0">
+                                          <p:val>
+                                            <p:strVal val="1+#ppt_h/2"/>
+                                          </p:val>
+                                        </p:tav>
+                                        <p:tav tm="100000">
+                                          <p:val>
+                                            <p:strVal val="#ppt_y"/>
+                                          </p:val>
+                                        </p:tav>
+                                      </p:tavLst>
+                                    </p:anim>
+                                  </p:childTnLst>
+                                </p:cTn>
+                              </p:par>
+                            </p:childTnLst>
+                          </p:cTn>
+                        </p:par>
+                      </p:childTnLst>
+                    </p:cTn>
+                  </p:par>
+                  <p:par>
+                    <p:cTn id="9" fill="hold">
+                      <p:stCondLst>
+                        <p:cond delay="indefinite"/>
+                      </p:stCondLst>
+                      <p:childTnLst>
+                        <p:par>
+                          <p:cTn id="10" fill="hold">
+                            <p:stCondLst>
+                              <p:cond delay="0"/>
+                            </p:stCondLst>
+                            <p:childTnLst>
+                              <p:par>
+                                <p:cTn id="11" presetID="2" presetClass="entr" presetSubtype="4" fill="hold" nodeType="clickEffect">
+                                  <p:stCondLst>
+                                    <p:cond delay="0"/>
+                                  </p:stCondLst>
+                                  <p:childTnLst>
+                                    <p:set>
+                                      <p:cBhvr>
+                                        <p:cTn id="12" dur="1" fill="hold">
+                                          <p:stCondLst>
+                                            <p:cond delay="0"/>
+                                          </p:stCondLst>
+                                        </p:cTn>
+                                        <p:tgtEl>
+                                          <p:spTgt spid="3">
+                                            <p:txEl>
+                                              <p:pRg st="0" end="0"/>
+                                            </p:txEl>
+                                          </p:spTgt>
+                                        </p:tgtEl>
+                                        <p:attrNameLst>
+                                          <p:attrName>style.visibility</p:attrName>
+                                        </p:attrNameLst>
+                                      </p:cBhvr>
+                                      <p:to>
+                                        <p:strVal val="visible"/>
+                                      </p:to>
+                                    </p:set>
+                                    <p:anim calcmode="lin" valueType="num">
+                                      <p:cBhvr additive="base">
+                                        <p:cTn id="13" dur="500" fill="hold"/>
+                                        <p:tgtEl>
+                                          <p:spTgt spid="3">
+                                            <p:txEl>
+                                              <p:pRg st="0" end="0"/>
+                                            </p:txEl>
+                                          </p:spTgt>
+                                        </p:tgtEl>
+                                        <p:attrNameLst>
+                                          <p:attrName>ppt_x</p:attrName>
+                                        </p:attrNameLst>
+                                      </p:cBhvr>
+                                      <p:tavLst>
+                                        <p:tav tm="0">
+                                          <p:val>
+                                            <p:strVal val="#ppt_x"/>
+                                          </p:val>
+                                        </p:tav>
+                                        <p:tav tm="100000">
+                                          <p:val>
+                                            <p:strVal val="#ppt_x"/>
+                                          </p:val>
+                                        </p:tav>
+                                      </p:tavLst>
+                                    </p:anim>
+                                    <p:anim calcmode="lin" valueType="num">
+                                      <p:cBhvr additive="base">
+                                        <p:cTn id="14" dur="500" fill="hold"/>
+                                        <p:tgtEl>
+                                          <p:spTgt spid="3">
+                                            <p:txEl>
+                                              <p:pRg st="0" end="0"/>
+                                            </p:txEl>
+                                          </p:spTgt>
+                                        </p:tgtEl>
+                                        <p:attrNameLst>
+                                          <p:attrName>ppt_y</p:attrName>
+                                        </p:attrNameLst>
+                                      </p:cBhvr>
+                                      <p:tavLst>
+                                        <p:tav tm="0">
+                                          <p:val>
+                                            <p:strVal val="1+#ppt_h/2"/>
+                                          </p:val>
+                                        </p:tav>
+                                        <p:tav tm="100000">
+                                          <p:val>
+                                            <p:strVal val="#ppt_y"/>
+                                          </p:val>
+                                        </p:tav>
+                                      </p:tavLst>
+                                    </p:anim>
+                                  </p:childTnLst>
+                                </p:cTn>
+                              </p:par>
+                              <p:par>
+                                <p:cTn id="15" presetID="2" presetClass="entr" presetSubtype="4" fill="hold" nodeType="withEffect">
+                                  <p:stCondLst>
+                                    <p:cond delay="0"/>
+                                  </p:stCondLst>
+                                  <p:childTnLst>
+                                    <p:set>
+                                      <p:cBhvr>
+                                        <p:cTn id="16" dur="1" fill="hold">
+                                          <p:stCondLst>
+                                            <p:cond delay="0"/>
+                                          </p:stCondLst>
+                                        </p:cTn>
+                                        <p:tgtEl>
+                                          <p:spTgt spid="3">
+                                            <p:txEl>
+                                              <p:pRg st="1" end="1"/>
+                                            </p:txEl>
+                                          </p:spTgt>
+                                        </p:tgtEl>
+                                        <p:attrNameLst>
+                                          <p:attrName>style.visibility</p:attrName>
+                                        </p:attrNameLst>
+                                      </p:cBhvr>
+                                      <p:to>
+                                        <p:strVal val="visible"/>
+                                      </p:to>
+                                    </p:set>
+                                    <p:anim calcmode="lin" valueType="num">
+                                      <p:cBhvr additive="base">
+                                        <p:cTn id="17" dur="500" fill="hold"/>
+                                        <p:tgtEl>
+                                          <p:spTgt spid="3">
+                                            <p:txEl>
+                                              <p:pRg st="1" end="1"/>
+                                            </p:txEl>
+                                          </p:spTgt>
+                                        </p:tgtEl>
+                                        <p:attrNameLst>
+                                          <p:attrName>ppt_x</p:attrName>
+                                        </p:attrNameLst>
+                                      </p:cBhvr>
+                                      <p:tavLst>
+                                        <p:tav tm="0">
+                                          <p:val>
+                                            <p:strVal val="#ppt_x"/>
+                                          </p:val>
+                                        </p:tav>
+                                        <p:tav tm="100000">
+                                          <p:val>
+                                            <p:strVal val="#ppt_x"/>
+                                          </p:val>
+                                        </p:tav>
+                                      </p:tavLst>
+                                    </p:anim>
+                                    <p:anim calcmode="lin" valueType="num">
+                                      <p:cBhvr additive="base">
+                                        <p:cTn id="18" dur="500" fill="hold"/>
+                                        <p:tgtEl>
+                                          <p:spTgt spid="3">
+                                            <p:txEl>
+                                              <p:pRg st="1" end="1"/>
+                                            </p:txEl>
+                                          </p:spTgt>
+                                        </p:tgtEl>
+                                        <p:attrNameLst>
+                                          <p:attrName>ppt_y</p:attrName>
+                                        </p:attrNameLst>
+                                      </p:cBhvr>
+                                      <p:tavLst>
+                                        <p:tav tm="0">
+                                          <p:val>
+                                            <p:strVal val="1+#ppt_h/2"/>
+                                          </p:val>
+                                        </p:tav>
+                                        <p:tav tm="100000">
+                                          <p:val>
+                                            <p:strVal val="#ppt_y"/>
+                                          </p:val>
+                                        </p:tav>
+                                      </p:tavLst>
+                                    </p:anim>
+                                  </p:childTnLst>
+                                </p:cTn>
+                              </p:par>
+                            </p:childTnLst>
+                          </p:cTn>
+                        </p:par>
+                      </p:childTnLst>
+                    </p:cTn>
+                  </p:par>
+                </p:childTnLst>
+              </p:cTn>
+              <p:prevCondLst>
+                <p:cond evt="onPrev" delay="0">
+                  <p:tgtEl>
+                    <p:sldTgt/>
+                  </p:tgtEl>
+                </p:cond>
+              </p:prevCondLst>
+              <p:nextCondLst>
+                <p:cond evt="onNext" delay="0">
+                  <p:tgtEl>
+                    <p:sldTgt/>
+                  </p:tgtEl>
+                </p:cond>
+              </p:nextCondLst>
+            </p:seq>
+          </p:childTnLst>
+        </p:cTn>
+      </p:par>
+    </p:tnLst>
+    <p:bldLst>
+      <p:bldP spid="2" grpId="0"/>
+    </p:bldLst>
+  </p:timing>
 </p:sld>
 </file>
 
@@ -7324,6 +8945,849 @@
   <p:clrMapOvr>
     <a:masterClrMapping/>
   </p:clrMapOvr>
+  <p:transition spd="slow">
+    <p:push dir="u"/>
+  </p:transition>
+  <p:timing>
+    <p:tnLst>
+      <p:par>
+        <p:cTn id="1" dur="indefinite" restart="never" nodeType="tmRoot">
+          <p:childTnLst>
+            <p:seq concurrent="1" nextAc="seek">
+              <p:cTn id="2" dur="indefinite" nodeType="mainSeq">
+                <p:childTnLst>
+                  <p:par>
+                    <p:cTn id="3" fill="hold">
+                      <p:stCondLst>
+                        <p:cond delay="indefinite"/>
+                      </p:stCondLst>
+                      <p:childTnLst>
+                        <p:par>
+                          <p:cTn id="4" fill="hold">
+                            <p:stCondLst>
+                              <p:cond delay="0"/>
+                            </p:stCondLst>
+                            <p:childTnLst>
+                              <p:par>
+                                <p:cTn id="5" presetID="2" presetClass="entr" presetSubtype="4" fill="hold" grpId="0" nodeType="clickEffect">
+                                  <p:stCondLst>
+                                    <p:cond delay="0"/>
+                                  </p:stCondLst>
+                                  <p:childTnLst>
+                                    <p:set>
+                                      <p:cBhvr>
+                                        <p:cTn id="6" dur="1" fill="hold">
+                                          <p:stCondLst>
+                                            <p:cond delay="0"/>
+                                          </p:stCondLst>
+                                        </p:cTn>
+                                        <p:tgtEl>
+                                          <p:spTgt spid="2"/>
+                                        </p:tgtEl>
+                                        <p:attrNameLst>
+                                          <p:attrName>style.visibility</p:attrName>
+                                        </p:attrNameLst>
+                                      </p:cBhvr>
+                                      <p:to>
+                                        <p:strVal val="visible"/>
+                                      </p:to>
+                                    </p:set>
+                                    <p:anim calcmode="lin" valueType="num">
+                                      <p:cBhvr additive="base">
+                                        <p:cTn id="7" dur="500" fill="hold"/>
+                                        <p:tgtEl>
+                                          <p:spTgt spid="2"/>
+                                        </p:tgtEl>
+                                        <p:attrNameLst>
+                                          <p:attrName>ppt_x</p:attrName>
+                                        </p:attrNameLst>
+                                      </p:cBhvr>
+                                      <p:tavLst>
+                                        <p:tav tm="0">
+                                          <p:val>
+                                            <p:strVal val="#ppt_x"/>
+                                          </p:val>
+                                        </p:tav>
+                                        <p:tav tm="100000">
+                                          <p:val>
+                                            <p:strVal val="#ppt_x"/>
+                                          </p:val>
+                                        </p:tav>
+                                      </p:tavLst>
+                                    </p:anim>
+                                    <p:anim calcmode="lin" valueType="num">
+                                      <p:cBhvr additive="base">
+                                        <p:cTn id="8" dur="500" fill="hold"/>
+                                        <p:tgtEl>
+                                          <p:spTgt spid="2"/>
+                                        </p:tgtEl>
+                                        <p:attrNameLst>
+                                          <p:attrName>ppt_y</p:attrName>
+                                        </p:attrNameLst>
+                                      </p:cBhvr>
+                                      <p:tavLst>
+                                        <p:tav tm="0">
+                                          <p:val>
+                                            <p:strVal val="1+#ppt_h/2"/>
+                                          </p:val>
+                                        </p:tav>
+                                        <p:tav tm="100000">
+                                          <p:val>
+                                            <p:strVal val="#ppt_y"/>
+                                          </p:val>
+                                        </p:tav>
+                                      </p:tavLst>
+                                    </p:anim>
+                                  </p:childTnLst>
+                                </p:cTn>
+                              </p:par>
+                            </p:childTnLst>
+                          </p:cTn>
+                        </p:par>
+                      </p:childTnLst>
+                    </p:cTn>
+                  </p:par>
+                  <p:par>
+                    <p:cTn id="9" fill="hold">
+                      <p:stCondLst>
+                        <p:cond delay="indefinite"/>
+                      </p:stCondLst>
+                      <p:childTnLst>
+                        <p:par>
+                          <p:cTn id="10" fill="hold">
+                            <p:stCondLst>
+                              <p:cond delay="0"/>
+                            </p:stCondLst>
+                            <p:childTnLst>
+                              <p:par>
+                                <p:cTn id="11" presetID="2" presetClass="entr" presetSubtype="4" fill="hold" nodeType="clickEffect">
+                                  <p:stCondLst>
+                                    <p:cond delay="0"/>
+                                  </p:stCondLst>
+                                  <p:childTnLst>
+                                    <p:set>
+                                      <p:cBhvr>
+                                        <p:cTn id="12" dur="1" fill="hold">
+                                          <p:stCondLst>
+                                            <p:cond delay="0"/>
+                                          </p:stCondLst>
+                                        </p:cTn>
+                                        <p:tgtEl>
+                                          <p:spTgt spid="3">
+                                            <p:txEl>
+                                              <p:pRg st="0" end="0"/>
+                                            </p:txEl>
+                                          </p:spTgt>
+                                        </p:tgtEl>
+                                        <p:attrNameLst>
+                                          <p:attrName>style.visibility</p:attrName>
+                                        </p:attrNameLst>
+                                      </p:cBhvr>
+                                      <p:to>
+                                        <p:strVal val="visible"/>
+                                      </p:to>
+                                    </p:set>
+                                    <p:anim calcmode="lin" valueType="num">
+                                      <p:cBhvr additive="base">
+                                        <p:cTn id="13" dur="500" fill="hold"/>
+                                        <p:tgtEl>
+                                          <p:spTgt spid="3">
+                                            <p:txEl>
+                                              <p:pRg st="0" end="0"/>
+                                            </p:txEl>
+                                          </p:spTgt>
+                                        </p:tgtEl>
+                                        <p:attrNameLst>
+                                          <p:attrName>ppt_x</p:attrName>
+                                        </p:attrNameLst>
+                                      </p:cBhvr>
+                                      <p:tavLst>
+                                        <p:tav tm="0">
+                                          <p:val>
+                                            <p:strVal val="#ppt_x"/>
+                                          </p:val>
+                                        </p:tav>
+                                        <p:tav tm="100000">
+                                          <p:val>
+                                            <p:strVal val="#ppt_x"/>
+                                          </p:val>
+                                        </p:tav>
+                                      </p:tavLst>
+                                    </p:anim>
+                                    <p:anim calcmode="lin" valueType="num">
+                                      <p:cBhvr additive="base">
+                                        <p:cTn id="14" dur="500" fill="hold"/>
+                                        <p:tgtEl>
+                                          <p:spTgt spid="3">
+                                            <p:txEl>
+                                              <p:pRg st="0" end="0"/>
+                                            </p:txEl>
+                                          </p:spTgt>
+                                        </p:tgtEl>
+                                        <p:attrNameLst>
+                                          <p:attrName>ppt_y</p:attrName>
+                                        </p:attrNameLst>
+                                      </p:cBhvr>
+                                      <p:tavLst>
+                                        <p:tav tm="0">
+                                          <p:val>
+                                            <p:strVal val="1+#ppt_h/2"/>
+                                          </p:val>
+                                        </p:tav>
+                                        <p:tav tm="100000">
+                                          <p:val>
+                                            <p:strVal val="#ppt_y"/>
+                                          </p:val>
+                                        </p:tav>
+                                      </p:tavLst>
+                                    </p:anim>
+                                  </p:childTnLst>
+                                </p:cTn>
+                              </p:par>
+                              <p:par>
+                                <p:cTn id="15" presetID="2" presetClass="entr" presetSubtype="4" fill="hold" nodeType="withEffect">
+                                  <p:stCondLst>
+                                    <p:cond delay="0"/>
+                                  </p:stCondLst>
+                                  <p:childTnLst>
+                                    <p:set>
+                                      <p:cBhvr>
+                                        <p:cTn id="16" dur="1" fill="hold">
+                                          <p:stCondLst>
+                                            <p:cond delay="0"/>
+                                          </p:stCondLst>
+                                        </p:cTn>
+                                        <p:tgtEl>
+                                          <p:spTgt spid="3">
+                                            <p:txEl>
+                                              <p:pRg st="1" end="1"/>
+                                            </p:txEl>
+                                          </p:spTgt>
+                                        </p:tgtEl>
+                                        <p:attrNameLst>
+                                          <p:attrName>style.visibility</p:attrName>
+                                        </p:attrNameLst>
+                                      </p:cBhvr>
+                                      <p:to>
+                                        <p:strVal val="visible"/>
+                                      </p:to>
+                                    </p:set>
+                                    <p:anim calcmode="lin" valueType="num">
+                                      <p:cBhvr additive="base">
+                                        <p:cTn id="17" dur="500" fill="hold"/>
+                                        <p:tgtEl>
+                                          <p:spTgt spid="3">
+                                            <p:txEl>
+                                              <p:pRg st="1" end="1"/>
+                                            </p:txEl>
+                                          </p:spTgt>
+                                        </p:tgtEl>
+                                        <p:attrNameLst>
+                                          <p:attrName>ppt_x</p:attrName>
+                                        </p:attrNameLst>
+                                      </p:cBhvr>
+                                      <p:tavLst>
+                                        <p:tav tm="0">
+                                          <p:val>
+                                            <p:strVal val="#ppt_x"/>
+                                          </p:val>
+                                        </p:tav>
+                                        <p:tav tm="100000">
+                                          <p:val>
+                                            <p:strVal val="#ppt_x"/>
+                                          </p:val>
+                                        </p:tav>
+                                      </p:tavLst>
+                                    </p:anim>
+                                    <p:anim calcmode="lin" valueType="num">
+                                      <p:cBhvr additive="base">
+                                        <p:cTn id="18" dur="500" fill="hold"/>
+                                        <p:tgtEl>
+                                          <p:spTgt spid="3">
+                                            <p:txEl>
+                                              <p:pRg st="1" end="1"/>
+                                            </p:txEl>
+                                          </p:spTgt>
+                                        </p:tgtEl>
+                                        <p:attrNameLst>
+                                          <p:attrName>ppt_y</p:attrName>
+                                        </p:attrNameLst>
+                                      </p:cBhvr>
+                                      <p:tavLst>
+                                        <p:tav tm="0">
+                                          <p:val>
+                                            <p:strVal val="1+#ppt_h/2"/>
+                                          </p:val>
+                                        </p:tav>
+                                        <p:tav tm="100000">
+                                          <p:val>
+                                            <p:strVal val="#ppt_y"/>
+                                          </p:val>
+                                        </p:tav>
+                                      </p:tavLst>
+                                    </p:anim>
+                                  </p:childTnLst>
+                                </p:cTn>
+                              </p:par>
+                              <p:par>
+                                <p:cTn id="19" presetID="2" presetClass="entr" presetSubtype="4" fill="hold" nodeType="withEffect">
+                                  <p:stCondLst>
+                                    <p:cond delay="0"/>
+                                  </p:stCondLst>
+                                  <p:childTnLst>
+                                    <p:set>
+                                      <p:cBhvr>
+                                        <p:cTn id="20" dur="1" fill="hold">
+                                          <p:stCondLst>
+                                            <p:cond delay="0"/>
+                                          </p:stCondLst>
+                                        </p:cTn>
+                                        <p:tgtEl>
+                                          <p:spTgt spid="3">
+                                            <p:txEl>
+                                              <p:pRg st="2" end="2"/>
+                                            </p:txEl>
+                                          </p:spTgt>
+                                        </p:tgtEl>
+                                        <p:attrNameLst>
+                                          <p:attrName>style.visibility</p:attrName>
+                                        </p:attrNameLst>
+                                      </p:cBhvr>
+                                      <p:to>
+                                        <p:strVal val="visible"/>
+                                      </p:to>
+                                    </p:set>
+                                    <p:anim calcmode="lin" valueType="num">
+                                      <p:cBhvr additive="base">
+                                        <p:cTn id="21" dur="500" fill="hold"/>
+                                        <p:tgtEl>
+                                          <p:spTgt spid="3">
+                                            <p:txEl>
+                                              <p:pRg st="2" end="2"/>
+                                            </p:txEl>
+                                          </p:spTgt>
+                                        </p:tgtEl>
+                                        <p:attrNameLst>
+                                          <p:attrName>ppt_x</p:attrName>
+                                        </p:attrNameLst>
+                                      </p:cBhvr>
+                                      <p:tavLst>
+                                        <p:tav tm="0">
+                                          <p:val>
+                                            <p:strVal val="#ppt_x"/>
+                                          </p:val>
+                                        </p:tav>
+                                        <p:tav tm="100000">
+                                          <p:val>
+                                            <p:strVal val="#ppt_x"/>
+                                          </p:val>
+                                        </p:tav>
+                                      </p:tavLst>
+                                    </p:anim>
+                                    <p:anim calcmode="lin" valueType="num">
+                                      <p:cBhvr additive="base">
+                                        <p:cTn id="22" dur="500" fill="hold"/>
+                                        <p:tgtEl>
+                                          <p:spTgt spid="3">
+                                            <p:txEl>
+                                              <p:pRg st="2" end="2"/>
+                                            </p:txEl>
+                                          </p:spTgt>
+                                        </p:tgtEl>
+                                        <p:attrNameLst>
+                                          <p:attrName>ppt_y</p:attrName>
+                                        </p:attrNameLst>
+                                      </p:cBhvr>
+                                      <p:tavLst>
+                                        <p:tav tm="0">
+                                          <p:val>
+                                            <p:strVal val="1+#ppt_h/2"/>
+                                          </p:val>
+                                        </p:tav>
+                                        <p:tav tm="100000">
+                                          <p:val>
+                                            <p:strVal val="#ppt_y"/>
+                                          </p:val>
+                                        </p:tav>
+                                      </p:tavLst>
+                                    </p:anim>
+                                  </p:childTnLst>
+                                </p:cTn>
+                              </p:par>
+                              <p:par>
+                                <p:cTn id="23" presetID="2" presetClass="entr" presetSubtype="4" fill="hold" nodeType="withEffect">
+                                  <p:stCondLst>
+                                    <p:cond delay="0"/>
+                                  </p:stCondLst>
+                                  <p:childTnLst>
+                                    <p:set>
+                                      <p:cBhvr>
+                                        <p:cTn id="24" dur="1" fill="hold">
+                                          <p:stCondLst>
+                                            <p:cond delay="0"/>
+                                          </p:stCondLst>
+                                        </p:cTn>
+                                        <p:tgtEl>
+                                          <p:spTgt spid="3">
+                                            <p:txEl>
+                                              <p:pRg st="3" end="3"/>
+                                            </p:txEl>
+                                          </p:spTgt>
+                                        </p:tgtEl>
+                                        <p:attrNameLst>
+                                          <p:attrName>style.visibility</p:attrName>
+                                        </p:attrNameLst>
+                                      </p:cBhvr>
+                                      <p:to>
+                                        <p:strVal val="visible"/>
+                                      </p:to>
+                                    </p:set>
+                                    <p:anim calcmode="lin" valueType="num">
+                                      <p:cBhvr additive="base">
+                                        <p:cTn id="25" dur="500" fill="hold"/>
+                                        <p:tgtEl>
+                                          <p:spTgt spid="3">
+                                            <p:txEl>
+                                              <p:pRg st="3" end="3"/>
+                                            </p:txEl>
+                                          </p:spTgt>
+                                        </p:tgtEl>
+                                        <p:attrNameLst>
+                                          <p:attrName>ppt_x</p:attrName>
+                                        </p:attrNameLst>
+                                      </p:cBhvr>
+                                      <p:tavLst>
+                                        <p:tav tm="0">
+                                          <p:val>
+                                            <p:strVal val="#ppt_x"/>
+                                          </p:val>
+                                        </p:tav>
+                                        <p:tav tm="100000">
+                                          <p:val>
+                                            <p:strVal val="#ppt_x"/>
+                                          </p:val>
+                                        </p:tav>
+                                      </p:tavLst>
+                                    </p:anim>
+                                    <p:anim calcmode="lin" valueType="num">
+                                      <p:cBhvr additive="base">
+                                        <p:cTn id="26" dur="500" fill="hold"/>
+                                        <p:tgtEl>
+                                          <p:spTgt spid="3">
+                                            <p:txEl>
+                                              <p:pRg st="3" end="3"/>
+                                            </p:txEl>
+                                          </p:spTgt>
+                                        </p:tgtEl>
+                                        <p:attrNameLst>
+                                          <p:attrName>ppt_y</p:attrName>
+                                        </p:attrNameLst>
+                                      </p:cBhvr>
+                                      <p:tavLst>
+                                        <p:tav tm="0">
+                                          <p:val>
+                                            <p:strVal val="1+#ppt_h/2"/>
+                                          </p:val>
+                                        </p:tav>
+                                        <p:tav tm="100000">
+                                          <p:val>
+                                            <p:strVal val="#ppt_y"/>
+                                          </p:val>
+                                        </p:tav>
+                                      </p:tavLst>
+                                    </p:anim>
+                                  </p:childTnLst>
+                                </p:cTn>
+                              </p:par>
+                            </p:childTnLst>
+                          </p:cTn>
+                        </p:par>
+                      </p:childTnLst>
+                    </p:cTn>
+                  </p:par>
+                  <p:par>
+                    <p:cTn id="27" fill="hold">
+                      <p:stCondLst>
+                        <p:cond delay="indefinite"/>
+                      </p:stCondLst>
+                      <p:childTnLst>
+                        <p:par>
+                          <p:cTn id="28" fill="hold">
+                            <p:stCondLst>
+                              <p:cond delay="0"/>
+                            </p:stCondLst>
+                            <p:childTnLst>
+                              <p:par>
+                                <p:cTn id="29" presetID="2" presetClass="entr" presetSubtype="4" fill="hold" nodeType="clickEffect">
+                                  <p:stCondLst>
+                                    <p:cond delay="0"/>
+                                  </p:stCondLst>
+                                  <p:childTnLst>
+                                    <p:set>
+                                      <p:cBhvr>
+                                        <p:cTn id="30" dur="1" fill="hold">
+                                          <p:stCondLst>
+                                            <p:cond delay="0"/>
+                                          </p:stCondLst>
+                                        </p:cTn>
+                                        <p:tgtEl>
+                                          <p:spTgt spid="3">
+                                            <p:txEl>
+                                              <p:pRg st="4" end="4"/>
+                                            </p:txEl>
+                                          </p:spTgt>
+                                        </p:tgtEl>
+                                        <p:attrNameLst>
+                                          <p:attrName>style.visibility</p:attrName>
+                                        </p:attrNameLst>
+                                      </p:cBhvr>
+                                      <p:to>
+                                        <p:strVal val="visible"/>
+                                      </p:to>
+                                    </p:set>
+                                    <p:anim calcmode="lin" valueType="num">
+                                      <p:cBhvr additive="base">
+                                        <p:cTn id="31" dur="500" fill="hold"/>
+                                        <p:tgtEl>
+                                          <p:spTgt spid="3">
+                                            <p:txEl>
+                                              <p:pRg st="4" end="4"/>
+                                            </p:txEl>
+                                          </p:spTgt>
+                                        </p:tgtEl>
+                                        <p:attrNameLst>
+                                          <p:attrName>ppt_x</p:attrName>
+                                        </p:attrNameLst>
+                                      </p:cBhvr>
+                                      <p:tavLst>
+                                        <p:tav tm="0">
+                                          <p:val>
+                                            <p:strVal val="#ppt_x"/>
+                                          </p:val>
+                                        </p:tav>
+                                        <p:tav tm="100000">
+                                          <p:val>
+                                            <p:strVal val="#ppt_x"/>
+                                          </p:val>
+                                        </p:tav>
+                                      </p:tavLst>
+                                    </p:anim>
+                                    <p:anim calcmode="lin" valueType="num">
+                                      <p:cBhvr additive="base">
+                                        <p:cTn id="32" dur="500" fill="hold"/>
+                                        <p:tgtEl>
+                                          <p:spTgt spid="3">
+                                            <p:txEl>
+                                              <p:pRg st="4" end="4"/>
+                                            </p:txEl>
+                                          </p:spTgt>
+                                        </p:tgtEl>
+                                        <p:attrNameLst>
+                                          <p:attrName>ppt_y</p:attrName>
+                                        </p:attrNameLst>
+                                      </p:cBhvr>
+                                      <p:tavLst>
+                                        <p:tav tm="0">
+                                          <p:val>
+                                            <p:strVal val="1+#ppt_h/2"/>
+                                          </p:val>
+                                        </p:tav>
+                                        <p:tav tm="100000">
+                                          <p:val>
+                                            <p:strVal val="#ppt_y"/>
+                                          </p:val>
+                                        </p:tav>
+                                      </p:tavLst>
+                                    </p:anim>
+                                  </p:childTnLst>
+                                </p:cTn>
+                              </p:par>
+                              <p:par>
+                                <p:cTn id="33" presetID="2" presetClass="entr" presetSubtype="4" fill="hold" nodeType="withEffect">
+                                  <p:stCondLst>
+                                    <p:cond delay="0"/>
+                                  </p:stCondLst>
+                                  <p:childTnLst>
+                                    <p:set>
+                                      <p:cBhvr>
+                                        <p:cTn id="34" dur="1" fill="hold">
+                                          <p:stCondLst>
+                                            <p:cond delay="0"/>
+                                          </p:stCondLst>
+                                        </p:cTn>
+                                        <p:tgtEl>
+                                          <p:spTgt spid="3">
+                                            <p:txEl>
+                                              <p:pRg st="5" end="5"/>
+                                            </p:txEl>
+                                          </p:spTgt>
+                                        </p:tgtEl>
+                                        <p:attrNameLst>
+                                          <p:attrName>style.visibility</p:attrName>
+                                        </p:attrNameLst>
+                                      </p:cBhvr>
+                                      <p:to>
+                                        <p:strVal val="visible"/>
+                                      </p:to>
+                                    </p:set>
+                                    <p:anim calcmode="lin" valueType="num">
+                                      <p:cBhvr additive="base">
+                                        <p:cTn id="35" dur="500" fill="hold"/>
+                                        <p:tgtEl>
+                                          <p:spTgt spid="3">
+                                            <p:txEl>
+                                              <p:pRg st="5" end="5"/>
+                                            </p:txEl>
+                                          </p:spTgt>
+                                        </p:tgtEl>
+                                        <p:attrNameLst>
+                                          <p:attrName>ppt_x</p:attrName>
+                                        </p:attrNameLst>
+                                      </p:cBhvr>
+                                      <p:tavLst>
+                                        <p:tav tm="0">
+                                          <p:val>
+                                            <p:strVal val="#ppt_x"/>
+                                          </p:val>
+                                        </p:tav>
+                                        <p:tav tm="100000">
+                                          <p:val>
+                                            <p:strVal val="#ppt_x"/>
+                                          </p:val>
+                                        </p:tav>
+                                      </p:tavLst>
+                                    </p:anim>
+                                    <p:anim calcmode="lin" valueType="num">
+                                      <p:cBhvr additive="base">
+                                        <p:cTn id="36" dur="500" fill="hold"/>
+                                        <p:tgtEl>
+                                          <p:spTgt spid="3">
+                                            <p:txEl>
+                                              <p:pRg st="5" end="5"/>
+                                            </p:txEl>
+                                          </p:spTgt>
+                                        </p:tgtEl>
+                                        <p:attrNameLst>
+                                          <p:attrName>ppt_y</p:attrName>
+                                        </p:attrNameLst>
+                                      </p:cBhvr>
+                                      <p:tavLst>
+                                        <p:tav tm="0">
+                                          <p:val>
+                                            <p:strVal val="1+#ppt_h/2"/>
+                                          </p:val>
+                                        </p:tav>
+                                        <p:tav tm="100000">
+                                          <p:val>
+                                            <p:strVal val="#ppt_y"/>
+                                          </p:val>
+                                        </p:tav>
+                                      </p:tavLst>
+                                    </p:anim>
+                                  </p:childTnLst>
+                                </p:cTn>
+                              </p:par>
+                              <p:par>
+                                <p:cTn id="37" presetID="2" presetClass="entr" presetSubtype="4" fill="hold" nodeType="withEffect">
+                                  <p:stCondLst>
+                                    <p:cond delay="0"/>
+                                  </p:stCondLst>
+                                  <p:childTnLst>
+                                    <p:set>
+                                      <p:cBhvr>
+                                        <p:cTn id="38" dur="1" fill="hold">
+                                          <p:stCondLst>
+                                            <p:cond delay="0"/>
+                                          </p:stCondLst>
+                                        </p:cTn>
+                                        <p:tgtEl>
+                                          <p:spTgt spid="3">
+                                            <p:txEl>
+                                              <p:pRg st="6" end="6"/>
+                                            </p:txEl>
+                                          </p:spTgt>
+                                        </p:tgtEl>
+                                        <p:attrNameLst>
+                                          <p:attrName>style.visibility</p:attrName>
+                                        </p:attrNameLst>
+                                      </p:cBhvr>
+                                      <p:to>
+                                        <p:strVal val="visible"/>
+                                      </p:to>
+                                    </p:set>
+                                    <p:anim calcmode="lin" valueType="num">
+                                      <p:cBhvr additive="base">
+                                        <p:cTn id="39" dur="500" fill="hold"/>
+                                        <p:tgtEl>
+                                          <p:spTgt spid="3">
+                                            <p:txEl>
+                                              <p:pRg st="6" end="6"/>
+                                            </p:txEl>
+                                          </p:spTgt>
+                                        </p:tgtEl>
+                                        <p:attrNameLst>
+                                          <p:attrName>ppt_x</p:attrName>
+                                        </p:attrNameLst>
+                                      </p:cBhvr>
+                                      <p:tavLst>
+                                        <p:tav tm="0">
+                                          <p:val>
+                                            <p:strVal val="#ppt_x"/>
+                                          </p:val>
+                                        </p:tav>
+                                        <p:tav tm="100000">
+                                          <p:val>
+                                            <p:strVal val="#ppt_x"/>
+                                          </p:val>
+                                        </p:tav>
+                                      </p:tavLst>
+                                    </p:anim>
+                                    <p:anim calcmode="lin" valueType="num">
+                                      <p:cBhvr additive="base">
+                                        <p:cTn id="40" dur="500" fill="hold"/>
+                                        <p:tgtEl>
+                                          <p:spTgt spid="3">
+                                            <p:txEl>
+                                              <p:pRg st="6" end="6"/>
+                                            </p:txEl>
+                                          </p:spTgt>
+                                        </p:tgtEl>
+                                        <p:attrNameLst>
+                                          <p:attrName>ppt_y</p:attrName>
+                                        </p:attrNameLst>
+                                      </p:cBhvr>
+                                      <p:tavLst>
+                                        <p:tav tm="0">
+                                          <p:val>
+                                            <p:strVal val="1+#ppt_h/2"/>
+                                          </p:val>
+                                        </p:tav>
+                                        <p:tav tm="100000">
+                                          <p:val>
+                                            <p:strVal val="#ppt_y"/>
+                                          </p:val>
+                                        </p:tav>
+                                      </p:tavLst>
+                                    </p:anim>
+                                  </p:childTnLst>
+                                </p:cTn>
+                              </p:par>
+                              <p:par>
+                                <p:cTn id="41" presetID="2" presetClass="entr" presetSubtype="4" fill="hold" nodeType="withEffect">
+                                  <p:stCondLst>
+                                    <p:cond delay="0"/>
+                                  </p:stCondLst>
+                                  <p:childTnLst>
+                                    <p:set>
+                                      <p:cBhvr>
+                                        <p:cTn id="42" dur="1" fill="hold">
+                                          <p:stCondLst>
+                                            <p:cond delay="0"/>
+                                          </p:stCondLst>
+                                        </p:cTn>
+                                        <p:tgtEl>
+                                          <p:spTgt spid="3">
+                                            <p:txEl>
+                                              <p:pRg st="7" end="7"/>
+                                            </p:txEl>
+                                          </p:spTgt>
+                                        </p:tgtEl>
+                                        <p:attrNameLst>
+                                          <p:attrName>style.visibility</p:attrName>
+                                        </p:attrNameLst>
+                                      </p:cBhvr>
+                                      <p:to>
+                                        <p:strVal val="visible"/>
+                                      </p:to>
+                                    </p:set>
+                                    <p:anim calcmode="lin" valueType="num">
+                                      <p:cBhvr additive="base">
+                                        <p:cTn id="43" dur="500" fill="hold"/>
+                                        <p:tgtEl>
+                                          <p:spTgt spid="3">
+                                            <p:txEl>
+                                              <p:pRg st="7" end="7"/>
+                                            </p:txEl>
+                                          </p:spTgt>
+                                        </p:tgtEl>
+                                        <p:attrNameLst>
+                                          <p:attrName>ppt_x</p:attrName>
+                                        </p:attrNameLst>
+                                      </p:cBhvr>
+                                      <p:tavLst>
+                                        <p:tav tm="0">
+                                          <p:val>
+                                            <p:strVal val="#ppt_x"/>
+                                          </p:val>
+                                        </p:tav>
+                                        <p:tav tm="100000">
+                                          <p:val>
+                                            <p:strVal val="#ppt_x"/>
+                                          </p:val>
+                                        </p:tav>
+                                      </p:tavLst>
+                                    </p:anim>
+                                    <p:anim calcmode="lin" valueType="num">
+                                      <p:cBhvr additive="base">
+                                        <p:cTn id="44" dur="500" fill="hold"/>
+                                        <p:tgtEl>
+                                          <p:spTgt spid="3">
+                                            <p:txEl>
+                                              <p:pRg st="7" end="7"/>
+                                            </p:txEl>
+                                          </p:spTgt>
+                                        </p:tgtEl>
+                                        <p:attrNameLst>
+                                          <p:attrName>ppt_y</p:attrName>
+                                        </p:attrNameLst>
+                                      </p:cBhvr>
+                                      <p:tavLst>
+                                        <p:tav tm="0">
+                                          <p:val>
+                                            <p:strVal val="1+#ppt_h/2"/>
+                                          </p:val>
+                                        </p:tav>
+                                        <p:tav tm="100000">
+                                          <p:val>
+                                            <p:strVal val="#ppt_y"/>
+                                          </p:val>
+                                        </p:tav>
+                                      </p:tavLst>
+                                    </p:anim>
+                                  </p:childTnLst>
+                                </p:cTn>
+                              </p:par>
+                            </p:childTnLst>
+                          </p:cTn>
+                        </p:par>
+                      </p:childTnLst>
+                    </p:cTn>
+                  </p:par>
+                </p:childTnLst>
+              </p:cTn>
+              <p:prevCondLst>
+                <p:cond evt="onPrev" delay="0">
+                  <p:tgtEl>
+                    <p:sldTgt/>
+                  </p:tgtEl>
+                </p:cond>
+              </p:prevCondLst>
+              <p:nextCondLst>
+                <p:cond evt="onNext" delay="0">
+                  <p:tgtEl>
+                    <p:sldTgt/>
+                  </p:tgtEl>
+                </p:cond>
+              </p:nextCondLst>
+            </p:seq>
+          </p:childTnLst>
+        </p:cTn>
+      </p:par>
+    </p:tnLst>
+    <p:bldLst>
+      <p:bldP spid="2" grpId="0"/>
+    </p:bldLst>
+  </p:timing>
 </p:sld>
 </file>
 
@@ -7676,6 +10140,491 @@
   <p:clrMapOvr>
     <a:masterClrMapping/>
   </p:clrMapOvr>
+  <p:transition spd="slow">
+    <p:push dir="u"/>
+  </p:transition>
+  <p:timing>
+    <p:tnLst>
+      <p:par>
+        <p:cTn id="1" dur="indefinite" restart="never" nodeType="tmRoot">
+          <p:childTnLst>
+            <p:seq concurrent="1" nextAc="seek">
+              <p:cTn id="2" dur="indefinite" nodeType="mainSeq">
+                <p:childTnLst>
+                  <p:par>
+                    <p:cTn id="3" fill="hold">
+                      <p:stCondLst>
+                        <p:cond delay="indefinite"/>
+                      </p:stCondLst>
+                      <p:childTnLst>
+                        <p:par>
+                          <p:cTn id="4" fill="hold">
+                            <p:stCondLst>
+                              <p:cond delay="0"/>
+                            </p:stCondLst>
+                            <p:childTnLst>
+                              <p:par>
+                                <p:cTn id="5" presetID="2" presetClass="entr" presetSubtype="4" fill="hold" grpId="0" nodeType="clickEffect">
+                                  <p:stCondLst>
+                                    <p:cond delay="0"/>
+                                  </p:stCondLst>
+                                  <p:childTnLst>
+                                    <p:set>
+                                      <p:cBhvr>
+                                        <p:cTn id="6" dur="1" fill="hold">
+                                          <p:stCondLst>
+                                            <p:cond delay="0"/>
+                                          </p:stCondLst>
+                                        </p:cTn>
+                                        <p:tgtEl>
+                                          <p:spTgt spid="2"/>
+                                        </p:tgtEl>
+                                        <p:attrNameLst>
+                                          <p:attrName>style.visibility</p:attrName>
+                                        </p:attrNameLst>
+                                      </p:cBhvr>
+                                      <p:to>
+                                        <p:strVal val="visible"/>
+                                      </p:to>
+                                    </p:set>
+                                    <p:anim calcmode="lin" valueType="num">
+                                      <p:cBhvr additive="base">
+                                        <p:cTn id="7" dur="500" fill="hold"/>
+                                        <p:tgtEl>
+                                          <p:spTgt spid="2"/>
+                                        </p:tgtEl>
+                                        <p:attrNameLst>
+                                          <p:attrName>ppt_x</p:attrName>
+                                        </p:attrNameLst>
+                                      </p:cBhvr>
+                                      <p:tavLst>
+                                        <p:tav tm="0">
+                                          <p:val>
+                                            <p:strVal val="#ppt_x"/>
+                                          </p:val>
+                                        </p:tav>
+                                        <p:tav tm="100000">
+                                          <p:val>
+                                            <p:strVal val="#ppt_x"/>
+                                          </p:val>
+                                        </p:tav>
+                                      </p:tavLst>
+                                    </p:anim>
+                                    <p:anim calcmode="lin" valueType="num">
+                                      <p:cBhvr additive="base">
+                                        <p:cTn id="8" dur="500" fill="hold"/>
+                                        <p:tgtEl>
+                                          <p:spTgt spid="2"/>
+                                        </p:tgtEl>
+                                        <p:attrNameLst>
+                                          <p:attrName>ppt_y</p:attrName>
+                                        </p:attrNameLst>
+                                      </p:cBhvr>
+                                      <p:tavLst>
+                                        <p:tav tm="0">
+                                          <p:val>
+                                            <p:strVal val="1+#ppt_h/2"/>
+                                          </p:val>
+                                        </p:tav>
+                                        <p:tav tm="100000">
+                                          <p:val>
+                                            <p:strVal val="#ppt_y"/>
+                                          </p:val>
+                                        </p:tav>
+                                      </p:tavLst>
+                                    </p:anim>
+                                  </p:childTnLst>
+                                </p:cTn>
+                              </p:par>
+                            </p:childTnLst>
+                          </p:cTn>
+                        </p:par>
+                      </p:childTnLst>
+                    </p:cTn>
+                  </p:par>
+                  <p:par>
+                    <p:cTn id="9" fill="hold">
+                      <p:stCondLst>
+                        <p:cond delay="indefinite"/>
+                      </p:stCondLst>
+                      <p:childTnLst>
+                        <p:par>
+                          <p:cTn id="10" fill="hold">
+                            <p:stCondLst>
+                              <p:cond delay="0"/>
+                            </p:stCondLst>
+                            <p:childTnLst>
+                              <p:par>
+                                <p:cTn id="11" presetID="2" presetClass="entr" presetSubtype="4" fill="hold" nodeType="clickEffect">
+                                  <p:stCondLst>
+                                    <p:cond delay="0"/>
+                                  </p:stCondLst>
+                                  <p:childTnLst>
+                                    <p:set>
+                                      <p:cBhvr>
+                                        <p:cTn id="12" dur="1" fill="hold">
+                                          <p:stCondLst>
+                                            <p:cond delay="0"/>
+                                          </p:stCondLst>
+                                        </p:cTn>
+                                        <p:tgtEl>
+                                          <p:spTgt spid="3">
+                                            <p:txEl>
+                                              <p:pRg st="0" end="0"/>
+                                            </p:txEl>
+                                          </p:spTgt>
+                                        </p:tgtEl>
+                                        <p:attrNameLst>
+                                          <p:attrName>style.visibility</p:attrName>
+                                        </p:attrNameLst>
+                                      </p:cBhvr>
+                                      <p:to>
+                                        <p:strVal val="visible"/>
+                                      </p:to>
+                                    </p:set>
+                                    <p:anim calcmode="lin" valueType="num">
+                                      <p:cBhvr additive="base">
+                                        <p:cTn id="13" dur="500" fill="hold"/>
+                                        <p:tgtEl>
+                                          <p:spTgt spid="3">
+                                            <p:txEl>
+                                              <p:pRg st="0" end="0"/>
+                                            </p:txEl>
+                                          </p:spTgt>
+                                        </p:tgtEl>
+                                        <p:attrNameLst>
+                                          <p:attrName>ppt_x</p:attrName>
+                                        </p:attrNameLst>
+                                      </p:cBhvr>
+                                      <p:tavLst>
+                                        <p:tav tm="0">
+                                          <p:val>
+                                            <p:strVal val="#ppt_x"/>
+                                          </p:val>
+                                        </p:tav>
+                                        <p:tav tm="100000">
+                                          <p:val>
+                                            <p:strVal val="#ppt_x"/>
+                                          </p:val>
+                                        </p:tav>
+                                      </p:tavLst>
+                                    </p:anim>
+                                    <p:anim calcmode="lin" valueType="num">
+                                      <p:cBhvr additive="base">
+                                        <p:cTn id="14" dur="500" fill="hold"/>
+                                        <p:tgtEl>
+                                          <p:spTgt spid="3">
+                                            <p:txEl>
+                                              <p:pRg st="0" end="0"/>
+                                            </p:txEl>
+                                          </p:spTgt>
+                                        </p:tgtEl>
+                                        <p:attrNameLst>
+                                          <p:attrName>ppt_y</p:attrName>
+                                        </p:attrNameLst>
+                                      </p:cBhvr>
+                                      <p:tavLst>
+                                        <p:tav tm="0">
+                                          <p:val>
+                                            <p:strVal val="1+#ppt_h/2"/>
+                                          </p:val>
+                                        </p:tav>
+                                        <p:tav tm="100000">
+                                          <p:val>
+                                            <p:strVal val="#ppt_y"/>
+                                          </p:val>
+                                        </p:tav>
+                                      </p:tavLst>
+                                    </p:anim>
+                                  </p:childTnLst>
+                                </p:cTn>
+                              </p:par>
+                              <p:par>
+                                <p:cTn id="15" presetID="2" presetClass="entr" presetSubtype="4" fill="hold" nodeType="withEffect">
+                                  <p:stCondLst>
+                                    <p:cond delay="0"/>
+                                  </p:stCondLst>
+                                  <p:childTnLst>
+                                    <p:set>
+                                      <p:cBhvr>
+                                        <p:cTn id="16" dur="1" fill="hold">
+                                          <p:stCondLst>
+                                            <p:cond delay="0"/>
+                                          </p:stCondLst>
+                                        </p:cTn>
+                                        <p:tgtEl>
+                                          <p:spTgt spid="3">
+                                            <p:txEl>
+                                              <p:pRg st="1" end="1"/>
+                                            </p:txEl>
+                                          </p:spTgt>
+                                        </p:tgtEl>
+                                        <p:attrNameLst>
+                                          <p:attrName>style.visibility</p:attrName>
+                                        </p:attrNameLst>
+                                      </p:cBhvr>
+                                      <p:to>
+                                        <p:strVal val="visible"/>
+                                      </p:to>
+                                    </p:set>
+                                    <p:anim calcmode="lin" valueType="num">
+                                      <p:cBhvr additive="base">
+                                        <p:cTn id="17" dur="500" fill="hold"/>
+                                        <p:tgtEl>
+                                          <p:spTgt spid="3">
+                                            <p:txEl>
+                                              <p:pRg st="1" end="1"/>
+                                            </p:txEl>
+                                          </p:spTgt>
+                                        </p:tgtEl>
+                                        <p:attrNameLst>
+                                          <p:attrName>ppt_x</p:attrName>
+                                        </p:attrNameLst>
+                                      </p:cBhvr>
+                                      <p:tavLst>
+                                        <p:tav tm="0">
+                                          <p:val>
+                                            <p:strVal val="#ppt_x"/>
+                                          </p:val>
+                                        </p:tav>
+                                        <p:tav tm="100000">
+                                          <p:val>
+                                            <p:strVal val="#ppt_x"/>
+                                          </p:val>
+                                        </p:tav>
+                                      </p:tavLst>
+                                    </p:anim>
+                                    <p:anim calcmode="lin" valueType="num">
+                                      <p:cBhvr additive="base">
+                                        <p:cTn id="18" dur="500" fill="hold"/>
+                                        <p:tgtEl>
+                                          <p:spTgt spid="3">
+                                            <p:txEl>
+                                              <p:pRg st="1" end="1"/>
+                                            </p:txEl>
+                                          </p:spTgt>
+                                        </p:tgtEl>
+                                        <p:attrNameLst>
+                                          <p:attrName>ppt_y</p:attrName>
+                                        </p:attrNameLst>
+                                      </p:cBhvr>
+                                      <p:tavLst>
+                                        <p:tav tm="0">
+                                          <p:val>
+                                            <p:strVal val="1+#ppt_h/2"/>
+                                          </p:val>
+                                        </p:tav>
+                                        <p:tav tm="100000">
+                                          <p:val>
+                                            <p:strVal val="#ppt_y"/>
+                                          </p:val>
+                                        </p:tav>
+                                      </p:tavLst>
+                                    </p:anim>
+                                  </p:childTnLst>
+                                </p:cTn>
+                              </p:par>
+                              <p:par>
+                                <p:cTn id="19" presetID="2" presetClass="entr" presetSubtype="4" fill="hold" nodeType="withEffect">
+                                  <p:stCondLst>
+                                    <p:cond delay="0"/>
+                                  </p:stCondLst>
+                                  <p:childTnLst>
+                                    <p:set>
+                                      <p:cBhvr>
+                                        <p:cTn id="20" dur="1" fill="hold">
+                                          <p:stCondLst>
+                                            <p:cond delay="0"/>
+                                          </p:stCondLst>
+                                        </p:cTn>
+                                        <p:tgtEl>
+                                          <p:spTgt spid="3">
+                                            <p:txEl>
+                                              <p:pRg st="2" end="2"/>
+                                            </p:txEl>
+                                          </p:spTgt>
+                                        </p:tgtEl>
+                                        <p:attrNameLst>
+                                          <p:attrName>style.visibility</p:attrName>
+                                        </p:attrNameLst>
+                                      </p:cBhvr>
+                                      <p:to>
+                                        <p:strVal val="visible"/>
+                                      </p:to>
+                                    </p:set>
+                                    <p:anim calcmode="lin" valueType="num">
+                                      <p:cBhvr additive="base">
+                                        <p:cTn id="21" dur="500" fill="hold"/>
+                                        <p:tgtEl>
+                                          <p:spTgt spid="3">
+                                            <p:txEl>
+                                              <p:pRg st="2" end="2"/>
+                                            </p:txEl>
+                                          </p:spTgt>
+                                        </p:tgtEl>
+                                        <p:attrNameLst>
+                                          <p:attrName>ppt_x</p:attrName>
+                                        </p:attrNameLst>
+                                      </p:cBhvr>
+                                      <p:tavLst>
+                                        <p:tav tm="0">
+                                          <p:val>
+                                            <p:strVal val="#ppt_x"/>
+                                          </p:val>
+                                        </p:tav>
+                                        <p:tav tm="100000">
+                                          <p:val>
+                                            <p:strVal val="#ppt_x"/>
+                                          </p:val>
+                                        </p:tav>
+                                      </p:tavLst>
+                                    </p:anim>
+                                    <p:anim calcmode="lin" valueType="num">
+                                      <p:cBhvr additive="base">
+                                        <p:cTn id="22" dur="500" fill="hold"/>
+                                        <p:tgtEl>
+                                          <p:spTgt spid="3">
+                                            <p:txEl>
+                                              <p:pRg st="2" end="2"/>
+                                            </p:txEl>
+                                          </p:spTgt>
+                                        </p:tgtEl>
+                                        <p:attrNameLst>
+                                          <p:attrName>ppt_y</p:attrName>
+                                        </p:attrNameLst>
+                                      </p:cBhvr>
+                                      <p:tavLst>
+                                        <p:tav tm="0">
+                                          <p:val>
+                                            <p:strVal val="1+#ppt_h/2"/>
+                                          </p:val>
+                                        </p:tav>
+                                        <p:tav tm="100000">
+                                          <p:val>
+                                            <p:strVal val="#ppt_y"/>
+                                          </p:val>
+                                        </p:tav>
+                                      </p:tavLst>
+                                    </p:anim>
+                                  </p:childTnLst>
+                                </p:cTn>
+                              </p:par>
+                              <p:par>
+                                <p:cTn id="23" presetID="2" presetClass="entr" presetSubtype="4" fill="hold" nodeType="withEffect">
+                                  <p:stCondLst>
+                                    <p:cond delay="0"/>
+                                  </p:stCondLst>
+                                  <p:childTnLst>
+                                    <p:set>
+                                      <p:cBhvr>
+                                        <p:cTn id="24" dur="1" fill="hold">
+                                          <p:stCondLst>
+                                            <p:cond delay="0"/>
+                                          </p:stCondLst>
+                                        </p:cTn>
+                                        <p:tgtEl>
+                                          <p:spTgt spid="3">
+                                            <p:txEl>
+                                              <p:pRg st="3" end="3"/>
+                                            </p:txEl>
+                                          </p:spTgt>
+                                        </p:tgtEl>
+                                        <p:attrNameLst>
+                                          <p:attrName>style.visibility</p:attrName>
+                                        </p:attrNameLst>
+                                      </p:cBhvr>
+                                      <p:to>
+                                        <p:strVal val="visible"/>
+                                      </p:to>
+                                    </p:set>
+                                    <p:anim calcmode="lin" valueType="num">
+                                      <p:cBhvr additive="base">
+                                        <p:cTn id="25" dur="500" fill="hold"/>
+                                        <p:tgtEl>
+                                          <p:spTgt spid="3">
+                                            <p:txEl>
+                                              <p:pRg st="3" end="3"/>
+                                            </p:txEl>
+                                          </p:spTgt>
+                                        </p:tgtEl>
+                                        <p:attrNameLst>
+                                          <p:attrName>ppt_x</p:attrName>
+                                        </p:attrNameLst>
+                                      </p:cBhvr>
+                                      <p:tavLst>
+                                        <p:tav tm="0">
+                                          <p:val>
+                                            <p:strVal val="#ppt_x"/>
+                                          </p:val>
+                                        </p:tav>
+                                        <p:tav tm="100000">
+                                          <p:val>
+                                            <p:strVal val="#ppt_x"/>
+                                          </p:val>
+                                        </p:tav>
+                                      </p:tavLst>
+                                    </p:anim>
+                                    <p:anim calcmode="lin" valueType="num">
+                                      <p:cBhvr additive="base">
+                                        <p:cTn id="26" dur="500" fill="hold"/>
+                                        <p:tgtEl>
+                                          <p:spTgt spid="3">
+                                            <p:txEl>
+                                              <p:pRg st="3" end="3"/>
+                                            </p:txEl>
+                                          </p:spTgt>
+                                        </p:tgtEl>
+                                        <p:attrNameLst>
+                                          <p:attrName>ppt_y</p:attrName>
+                                        </p:attrNameLst>
+                                      </p:cBhvr>
+                                      <p:tavLst>
+                                        <p:tav tm="0">
+                                          <p:val>
+                                            <p:strVal val="1+#ppt_h/2"/>
+                                          </p:val>
+                                        </p:tav>
+                                        <p:tav tm="100000">
+                                          <p:val>
+                                            <p:strVal val="#ppt_y"/>
+                                          </p:val>
+                                        </p:tav>
+                                      </p:tavLst>
+                                    </p:anim>
+                                  </p:childTnLst>
+                                </p:cTn>
+                              </p:par>
+                            </p:childTnLst>
+                          </p:cTn>
+                        </p:par>
+                      </p:childTnLst>
+                    </p:cTn>
+                  </p:par>
+                </p:childTnLst>
+              </p:cTn>
+              <p:prevCondLst>
+                <p:cond evt="onPrev" delay="0">
+                  <p:tgtEl>
+                    <p:sldTgt/>
+                  </p:tgtEl>
+                </p:cond>
+              </p:prevCondLst>
+              <p:nextCondLst>
+                <p:cond evt="onNext" delay="0">
+                  <p:tgtEl>
+                    <p:sldTgt/>
+                  </p:tgtEl>
+                </p:cond>
+              </p:nextCondLst>
+            </p:seq>
+          </p:childTnLst>
+        </p:cTn>
+      </p:par>
+    </p:tnLst>
+    <p:bldLst>
+      <p:bldP spid="2" grpId="0"/>
+    </p:bldLst>
+  </p:timing>
 </p:sld>
 </file>
 
@@ -7698,416 +10647,6 @@
       </p:grpSpPr>
       <p:pic>
         <p:nvPicPr>
-          <p:cNvPr id="10" name="Kép 9">
-            <a:extLst>
-              <a:ext uri="{FF2B5EF4-FFF2-40B4-BE49-F238E27FC236}">
-                <a16:creationId xmlns:a16="http://schemas.microsoft.com/office/drawing/2014/main" id="{A5EACB98-C764-4344-9B66-DD9F9DCB6491}"/>
-              </a:ext>
-            </a:extLst>
-          </p:cNvPr>
-          <p:cNvPicPr>
-            <a:picLocks noChangeAspect="1"/>
-          </p:cNvPicPr>
-          <p:nvPr/>
-        </p:nvPicPr>
-        <p:blipFill>
-          <a:blip r:embed="rId3">
-            <a:extLst>
-              <a:ext uri="{28A0092B-C50C-407E-A947-70E740481C1C}">
-                <a14:useLocalDpi xmlns:a14="http://schemas.microsoft.com/office/drawing/2010/main" val="0"/>
-              </a:ext>
-            </a:extLst>
-          </a:blip>
-          <a:stretch>
-            <a:fillRect/>
-          </a:stretch>
-        </p:blipFill>
-        <p:spPr>
-          <a:xfrm>
-            <a:off x="0" y="-6376"/>
-            <a:ext cx="12192000" cy="6864376"/>
-          </a:xfrm>
-          <a:prstGeom prst="rect">
-            <a:avLst/>
-          </a:prstGeom>
-        </p:spPr>
-      </p:pic>
-      <p:sp>
-        <p:nvSpPr>
-          <p:cNvPr id="2" name="Cím 1">
-            <a:extLst>
-              <a:ext uri="{FF2B5EF4-FFF2-40B4-BE49-F238E27FC236}">
-                <a16:creationId xmlns:a16="http://schemas.microsoft.com/office/drawing/2014/main" id="{BC670AF5-A981-4FCD-B368-58B8B465D8B5}"/>
-              </a:ext>
-            </a:extLst>
-          </p:cNvPr>
-          <p:cNvSpPr>
-            <a:spLocks noGrp="1"/>
-          </p:cNvSpPr>
-          <p:nvPr>
-            <p:ph type="title"/>
-          </p:nvPr>
-        </p:nvSpPr>
-        <p:spPr/>
-        <p:txBody>
-          <a:bodyPr/>
-          <a:lstStyle/>
-          <a:p>
-            <a:r>
-              <a:rPr lang="hu-HU" dirty="0">
-                <a:solidFill>
-                  <a:schemeClr val="bg1"/>
-                </a:solidFill>
-                <a:latin typeface="Times New Roman" panose="02020603050405020304" pitchFamily="18" charset="0"/>
-                <a:cs typeface="Times New Roman" panose="02020603050405020304" pitchFamily="18" charset="0"/>
-              </a:rPr>
-              <a:t>Frontend</a:t>
-            </a:r>
-          </a:p>
-        </p:txBody>
-      </p:sp>
-      <p:sp>
-        <p:nvSpPr>
-          <p:cNvPr id="3" name="Tartalom helye 2">
-            <a:extLst>
-              <a:ext uri="{FF2B5EF4-FFF2-40B4-BE49-F238E27FC236}">
-                <a16:creationId xmlns:a16="http://schemas.microsoft.com/office/drawing/2014/main" id="{F35CACE6-CDD9-4751-989A-19AC98EE05C8}"/>
-              </a:ext>
-            </a:extLst>
-          </p:cNvPr>
-          <p:cNvSpPr>
-            <a:spLocks noGrp="1"/>
-          </p:cNvSpPr>
-          <p:nvPr>
-            <p:ph sz="half" idx="1"/>
-          </p:nvPr>
-        </p:nvSpPr>
-        <p:spPr/>
-        <p:txBody>
-          <a:bodyPr/>
-          <a:lstStyle/>
-          <a:p>
-            <a:r>
-              <a:rPr lang="hu-HU" dirty="0">
-                <a:solidFill>
-                  <a:schemeClr val="bg1"/>
-                </a:solidFill>
-              </a:rPr>
-              <a:t>Technológiai alapok: HTML5, CSS3, JavaScript.</a:t>
-            </a:r>
-          </a:p>
-          <a:p>
-            <a:r>
-              <a:rPr lang="hu-HU" dirty="0">
-                <a:solidFill>
-                  <a:schemeClr val="bg1"/>
-                </a:solidFill>
-              </a:rPr>
-              <a:t>Modern UI/UX:</a:t>
-            </a:r>
-          </a:p>
-          <a:p>
-            <a:pPr lvl="1"/>
-            <a:r>
-              <a:rPr lang="hu-HU" dirty="0">
-                <a:solidFill>
-                  <a:schemeClr val="bg1"/>
-                </a:solidFill>
-              </a:rPr>
-              <a:t>Letisztult, reszponzív elrendezés.</a:t>
-            </a:r>
-          </a:p>
-          <a:p>
-            <a:r>
-              <a:rPr lang="hu-HU" dirty="0">
-                <a:solidFill>
-                  <a:schemeClr val="bg1"/>
-                </a:solidFill>
-              </a:rPr>
-              <a:t>Valós idejű visszajelzés: Dinamikus egyenlegfrissítés és portfólió-nézet.</a:t>
-            </a:r>
-          </a:p>
-        </p:txBody>
-      </p:sp>
-      <p:sp>
-        <p:nvSpPr>
-          <p:cNvPr id="4" name="Tartalom helye 3">
-            <a:extLst>
-              <a:ext uri="{FF2B5EF4-FFF2-40B4-BE49-F238E27FC236}">
-                <a16:creationId xmlns:a16="http://schemas.microsoft.com/office/drawing/2014/main" id="{2AFDC6D2-89BA-48BB-8BE9-879C8E8C6C3F}"/>
-              </a:ext>
-            </a:extLst>
-          </p:cNvPr>
-          <p:cNvSpPr>
-            <a:spLocks noGrp="1"/>
-          </p:cNvSpPr>
-          <p:nvPr>
-            <p:ph sz="half" idx="2"/>
-          </p:nvPr>
-        </p:nvSpPr>
-        <p:spPr/>
-        <p:txBody>
-          <a:bodyPr/>
-          <a:lstStyle/>
-          <a:p>
-            <a:endParaRPr lang="hu-HU" dirty="0"/>
-          </a:p>
-        </p:txBody>
-      </p:sp>
-      <p:pic>
-        <p:nvPicPr>
-          <p:cNvPr id="5" name="Kép 4">
-            <a:extLst>
-              <a:ext uri="{FF2B5EF4-FFF2-40B4-BE49-F238E27FC236}">
-                <a16:creationId xmlns:a16="http://schemas.microsoft.com/office/drawing/2014/main" id="{376C2839-7B5D-4F35-83B6-C16A77152493}"/>
-              </a:ext>
-            </a:extLst>
-          </p:cNvPr>
-          <p:cNvPicPr>
-            <a:picLocks noChangeAspect="1"/>
-          </p:cNvPicPr>
-          <p:nvPr/>
-        </p:nvPicPr>
-        <p:blipFill>
-          <a:blip r:embed="rId4">
-            <a:extLst>
-              <a:ext uri="{28A0092B-C50C-407E-A947-70E740481C1C}">
-                <a14:useLocalDpi xmlns:a14="http://schemas.microsoft.com/office/drawing/2010/main" val="0"/>
-              </a:ext>
-            </a:extLst>
-          </a:blip>
-          <a:stretch>
-            <a:fillRect/>
-          </a:stretch>
-        </p:blipFill>
-        <p:spPr>
-          <a:xfrm>
-            <a:off x="0" y="5812553"/>
-            <a:ext cx="1045447" cy="1045447"/>
-          </a:xfrm>
-          <a:prstGeom prst="rect">
-            <a:avLst/>
-          </a:prstGeom>
-        </p:spPr>
-      </p:pic>
-    </p:spTree>
-    <p:extLst>
-      <p:ext uri="{BB962C8B-B14F-4D97-AF65-F5344CB8AC3E}">
-        <p14:creationId xmlns:p14="http://schemas.microsoft.com/office/powerpoint/2010/main" val="25629498"/>
-      </p:ext>
-    </p:extLst>
-  </p:cSld>
-  <p:clrMapOvr>
-    <a:masterClrMapping/>
-  </p:clrMapOvr>
-</p:sld>
-</file>
-
-<file path=ppt/slides/slide8.xml><?xml version="1.0" encoding="utf-8"?>
-<p:sld xmlns:a="http://schemas.openxmlformats.org/drawingml/2006/main" xmlns:r="http://schemas.openxmlformats.org/officeDocument/2006/relationships" xmlns:p="http://schemas.openxmlformats.org/presentationml/2006/main">
-  <p:cSld>
-    <p:spTree>
-      <p:nvGrpSpPr>
-        <p:cNvPr id="1" name=""/>
-        <p:cNvGrpSpPr/>
-        <p:nvPr/>
-      </p:nvGrpSpPr>
-      <p:grpSpPr>
-        <a:xfrm>
-          <a:off x="0" y="0"/>
-          <a:ext cx="0" cy="0"/>
-          <a:chOff x="0" y="0"/>
-          <a:chExt cx="0" cy="0"/>
-        </a:xfrm>
-      </p:grpSpPr>
-      <p:pic>
-        <p:nvPicPr>
-          <p:cNvPr id="9" name="Kép 8">
-            <a:extLst>
-              <a:ext uri="{FF2B5EF4-FFF2-40B4-BE49-F238E27FC236}">
-                <a16:creationId xmlns:a16="http://schemas.microsoft.com/office/drawing/2014/main" id="{AA529289-132F-4046-B914-F24FDD6CAEF9}"/>
-              </a:ext>
-            </a:extLst>
-          </p:cNvPr>
-          <p:cNvPicPr>
-            <a:picLocks noChangeAspect="1"/>
-          </p:cNvPicPr>
-          <p:nvPr/>
-        </p:nvPicPr>
-        <p:blipFill>
-          <a:blip r:embed="rId2">
-            <a:extLst>
-              <a:ext uri="{28A0092B-C50C-407E-A947-70E740481C1C}">
-                <a14:useLocalDpi xmlns:a14="http://schemas.microsoft.com/office/drawing/2010/main" val="0"/>
-              </a:ext>
-            </a:extLst>
-          </a:blip>
-          <a:stretch>
-            <a:fillRect/>
-          </a:stretch>
-        </p:blipFill>
-        <p:spPr>
-          <a:xfrm>
-            <a:off x="0" y="-6376"/>
-            <a:ext cx="12192000" cy="6864376"/>
-          </a:xfrm>
-          <a:prstGeom prst="rect">
-            <a:avLst/>
-          </a:prstGeom>
-        </p:spPr>
-      </p:pic>
-      <p:sp>
-        <p:nvSpPr>
-          <p:cNvPr id="4" name="Cím 3">
-            <a:extLst>
-              <a:ext uri="{FF2B5EF4-FFF2-40B4-BE49-F238E27FC236}">
-                <a16:creationId xmlns:a16="http://schemas.microsoft.com/office/drawing/2014/main" id="{EDDBBB32-03CC-4D3E-81C0-9D4F92305D56}"/>
-              </a:ext>
-            </a:extLst>
-          </p:cNvPr>
-          <p:cNvSpPr>
-            <a:spLocks noGrp="1"/>
-          </p:cNvSpPr>
-          <p:nvPr>
-            <p:ph type="title"/>
-          </p:nvPr>
-        </p:nvSpPr>
-        <p:spPr/>
-        <p:txBody>
-          <a:bodyPr/>
-          <a:lstStyle/>
-          <a:p>
-            <a:r>
-              <a:rPr lang="hu-HU" dirty="0">
-                <a:solidFill>
-                  <a:schemeClr val="bg1"/>
-                </a:solidFill>
-                <a:latin typeface="Times New Roman" panose="02020603050405020304" pitchFamily="18" charset="0"/>
-                <a:cs typeface="Times New Roman" panose="02020603050405020304" pitchFamily="18" charset="0"/>
-              </a:rPr>
-              <a:t>Backend</a:t>
-            </a:r>
-          </a:p>
-        </p:txBody>
-      </p:sp>
-      <p:sp>
-        <p:nvSpPr>
-          <p:cNvPr id="5" name="Tartalom helye 4">
-            <a:extLst>
-              <a:ext uri="{FF2B5EF4-FFF2-40B4-BE49-F238E27FC236}">
-                <a16:creationId xmlns:a16="http://schemas.microsoft.com/office/drawing/2014/main" id="{C596495D-736B-46DF-9256-99B5FE7DCE1A}"/>
-              </a:ext>
-            </a:extLst>
-          </p:cNvPr>
-          <p:cNvSpPr>
-            <a:spLocks noGrp="1"/>
-          </p:cNvSpPr>
-          <p:nvPr>
-            <p:ph sz="half" idx="1"/>
-          </p:nvPr>
-        </p:nvSpPr>
-        <p:spPr/>
-        <p:txBody>
-          <a:bodyPr/>
-          <a:lstStyle/>
-          <a:p>
-            <a:endParaRPr lang="hu-HU" dirty="0"/>
-          </a:p>
-        </p:txBody>
-      </p:sp>
-      <p:sp>
-        <p:nvSpPr>
-          <p:cNvPr id="6" name="Tartalom helye 5">
-            <a:extLst>
-              <a:ext uri="{FF2B5EF4-FFF2-40B4-BE49-F238E27FC236}">
-                <a16:creationId xmlns:a16="http://schemas.microsoft.com/office/drawing/2014/main" id="{E7785558-83B1-4A4B-BC4D-359BC1405AF1}"/>
-              </a:ext>
-            </a:extLst>
-          </p:cNvPr>
-          <p:cNvSpPr>
-            <a:spLocks noGrp="1"/>
-          </p:cNvSpPr>
-          <p:nvPr>
-            <p:ph sz="half" idx="2"/>
-          </p:nvPr>
-        </p:nvSpPr>
-        <p:spPr/>
-        <p:txBody>
-          <a:bodyPr/>
-          <a:lstStyle/>
-          <a:p>
-            <a:endParaRPr lang="hu-HU"/>
-          </a:p>
-        </p:txBody>
-      </p:sp>
-      <p:pic>
-        <p:nvPicPr>
-          <p:cNvPr id="7" name="Kép 6">
-            <a:extLst>
-              <a:ext uri="{FF2B5EF4-FFF2-40B4-BE49-F238E27FC236}">
-                <a16:creationId xmlns:a16="http://schemas.microsoft.com/office/drawing/2014/main" id="{710A55AD-101D-4AD6-AA19-23B2AE460494}"/>
-              </a:ext>
-            </a:extLst>
-          </p:cNvPr>
-          <p:cNvPicPr>
-            <a:picLocks noChangeAspect="1"/>
-          </p:cNvPicPr>
-          <p:nvPr/>
-        </p:nvPicPr>
-        <p:blipFill>
-          <a:blip r:embed="rId3">
-            <a:extLst>
-              <a:ext uri="{28A0092B-C50C-407E-A947-70E740481C1C}">
-                <a14:useLocalDpi xmlns:a14="http://schemas.microsoft.com/office/drawing/2010/main" val="0"/>
-              </a:ext>
-            </a:extLst>
-          </a:blip>
-          <a:stretch>
-            <a:fillRect/>
-          </a:stretch>
-        </p:blipFill>
-        <p:spPr>
-          <a:xfrm>
-            <a:off x="0" y="5812553"/>
-            <a:ext cx="1045447" cy="1045447"/>
-          </a:xfrm>
-          <a:prstGeom prst="rect">
-            <a:avLst/>
-          </a:prstGeom>
-        </p:spPr>
-      </p:pic>
-    </p:spTree>
-    <p:extLst>
-      <p:ext uri="{BB962C8B-B14F-4D97-AF65-F5344CB8AC3E}">
-        <p14:creationId xmlns:p14="http://schemas.microsoft.com/office/powerpoint/2010/main" val="3218653803"/>
-      </p:ext>
-    </p:extLst>
-  </p:cSld>
-  <p:clrMapOvr>
-    <a:masterClrMapping/>
-  </p:clrMapOvr>
-</p:sld>
-</file>
-
-<file path=ppt/slides/slide9.xml><?xml version="1.0" encoding="utf-8"?>
-<p:sld xmlns:a="http://schemas.openxmlformats.org/drawingml/2006/main" xmlns:r="http://schemas.openxmlformats.org/officeDocument/2006/relationships" xmlns:p="http://schemas.openxmlformats.org/presentationml/2006/main">
-  <p:cSld>
-    <p:spTree>
-      <p:nvGrpSpPr>
-        <p:cNvPr id="1" name=""/>
-        <p:cNvGrpSpPr/>
-        <p:nvPr/>
-      </p:nvGrpSpPr>
-      <p:grpSpPr>
-        <a:xfrm>
-          <a:off x="0" y="0"/>
-          <a:ext cx="0" cy="0"/>
-          <a:chOff x="0" y="0"/>
-          <a:chExt cx="0" cy="0"/>
-        </a:xfrm>
-      </p:grpSpPr>
-      <p:pic>
-        <p:nvPicPr>
           <p:cNvPr id="12" name="Kép 11">
             <a:extLst>
               <a:ext uri="{FF2B5EF4-FFF2-40B4-BE49-F238E27FC236}">
@@ -8257,7 +10796,7 @@
         </p:blipFill>
         <p:spPr bwMode="auto">
           <a:xfrm>
-            <a:off x="693822" y="4001294"/>
+            <a:off x="8217568" y="1486694"/>
             <a:ext cx="1388394" cy="1388394"/>
           </a:xfrm>
           <a:prstGeom prst="rect">
@@ -8340,8 +10879,8 @@
         </p:blipFill>
         <p:spPr bwMode="auto">
           <a:xfrm>
-            <a:off x="2082216" y="4030143"/>
-            <a:ext cx="1648326" cy="1494482"/>
+            <a:off x="9605962" y="1486694"/>
+            <a:ext cx="1388394" cy="1388394"/>
           </a:xfrm>
           <a:prstGeom prst="rect">
             <a:avLst/>
@@ -8368,6 +10907,2598 @@
   <p:clrMapOvr>
     <a:masterClrMapping/>
   </p:clrMapOvr>
+  <p:transition spd="slow">
+    <p:push dir="u"/>
+  </p:transition>
+  <p:timing>
+    <p:tnLst>
+      <p:par>
+        <p:cTn id="1" dur="indefinite" restart="never" nodeType="tmRoot">
+          <p:childTnLst>
+            <p:seq concurrent="1" nextAc="seek">
+              <p:cTn id="2" dur="indefinite" nodeType="mainSeq">
+                <p:childTnLst>
+                  <p:par>
+                    <p:cTn id="3" fill="hold">
+                      <p:stCondLst>
+                        <p:cond delay="indefinite"/>
+                      </p:stCondLst>
+                      <p:childTnLst>
+                        <p:par>
+                          <p:cTn id="4" fill="hold">
+                            <p:stCondLst>
+                              <p:cond delay="0"/>
+                            </p:stCondLst>
+                            <p:childTnLst>
+                              <p:par>
+                                <p:cTn id="5" presetID="2" presetClass="entr" presetSubtype="4" fill="hold" grpId="0" nodeType="clickEffect">
+                                  <p:stCondLst>
+                                    <p:cond delay="0"/>
+                                  </p:stCondLst>
+                                  <p:childTnLst>
+                                    <p:set>
+                                      <p:cBhvr>
+                                        <p:cTn id="6" dur="1" fill="hold">
+                                          <p:stCondLst>
+                                            <p:cond delay="0"/>
+                                          </p:stCondLst>
+                                        </p:cTn>
+                                        <p:tgtEl>
+                                          <p:spTgt spid="5"/>
+                                        </p:tgtEl>
+                                        <p:attrNameLst>
+                                          <p:attrName>style.visibility</p:attrName>
+                                        </p:attrNameLst>
+                                      </p:cBhvr>
+                                      <p:to>
+                                        <p:strVal val="visible"/>
+                                      </p:to>
+                                    </p:set>
+                                    <p:anim calcmode="lin" valueType="num">
+                                      <p:cBhvr additive="base">
+                                        <p:cTn id="7" dur="500" fill="hold"/>
+                                        <p:tgtEl>
+                                          <p:spTgt spid="5"/>
+                                        </p:tgtEl>
+                                        <p:attrNameLst>
+                                          <p:attrName>ppt_x</p:attrName>
+                                        </p:attrNameLst>
+                                      </p:cBhvr>
+                                      <p:tavLst>
+                                        <p:tav tm="0">
+                                          <p:val>
+                                            <p:strVal val="#ppt_x"/>
+                                          </p:val>
+                                        </p:tav>
+                                        <p:tav tm="100000">
+                                          <p:val>
+                                            <p:strVal val="#ppt_x"/>
+                                          </p:val>
+                                        </p:tav>
+                                      </p:tavLst>
+                                    </p:anim>
+                                    <p:anim calcmode="lin" valueType="num">
+                                      <p:cBhvr additive="base">
+                                        <p:cTn id="8" dur="500" fill="hold"/>
+                                        <p:tgtEl>
+                                          <p:spTgt spid="5"/>
+                                        </p:tgtEl>
+                                        <p:attrNameLst>
+                                          <p:attrName>ppt_y</p:attrName>
+                                        </p:attrNameLst>
+                                      </p:cBhvr>
+                                      <p:tavLst>
+                                        <p:tav tm="0">
+                                          <p:val>
+                                            <p:strVal val="1+#ppt_h/2"/>
+                                          </p:val>
+                                        </p:tav>
+                                        <p:tav tm="100000">
+                                          <p:val>
+                                            <p:strVal val="#ppt_y"/>
+                                          </p:val>
+                                        </p:tav>
+                                      </p:tavLst>
+                                    </p:anim>
+                                  </p:childTnLst>
+                                </p:cTn>
+                              </p:par>
+                            </p:childTnLst>
+                          </p:cTn>
+                        </p:par>
+                      </p:childTnLst>
+                    </p:cTn>
+                  </p:par>
+                  <p:par>
+                    <p:cTn id="9" fill="hold">
+                      <p:stCondLst>
+                        <p:cond delay="indefinite"/>
+                      </p:stCondLst>
+                      <p:childTnLst>
+                        <p:par>
+                          <p:cTn id="10" fill="hold">
+                            <p:stCondLst>
+                              <p:cond delay="0"/>
+                            </p:stCondLst>
+                            <p:childTnLst>
+                              <p:par>
+                                <p:cTn id="11" presetID="2" presetClass="entr" presetSubtype="4" fill="hold" nodeType="clickEffect">
+                                  <p:stCondLst>
+                                    <p:cond delay="0"/>
+                                  </p:stCondLst>
+                                  <p:childTnLst>
+                                    <p:set>
+                                      <p:cBhvr>
+                                        <p:cTn id="12" dur="1" fill="hold">
+                                          <p:stCondLst>
+                                            <p:cond delay="0"/>
+                                          </p:stCondLst>
+                                        </p:cTn>
+                                        <p:tgtEl>
+                                          <p:spTgt spid="6">
+                                            <p:txEl>
+                                              <p:pRg st="0" end="0"/>
+                                            </p:txEl>
+                                          </p:spTgt>
+                                        </p:tgtEl>
+                                        <p:attrNameLst>
+                                          <p:attrName>style.visibility</p:attrName>
+                                        </p:attrNameLst>
+                                      </p:cBhvr>
+                                      <p:to>
+                                        <p:strVal val="visible"/>
+                                      </p:to>
+                                    </p:set>
+                                    <p:anim calcmode="lin" valueType="num">
+                                      <p:cBhvr additive="base">
+                                        <p:cTn id="13" dur="500" fill="hold"/>
+                                        <p:tgtEl>
+                                          <p:spTgt spid="6">
+                                            <p:txEl>
+                                              <p:pRg st="0" end="0"/>
+                                            </p:txEl>
+                                          </p:spTgt>
+                                        </p:tgtEl>
+                                        <p:attrNameLst>
+                                          <p:attrName>ppt_x</p:attrName>
+                                        </p:attrNameLst>
+                                      </p:cBhvr>
+                                      <p:tavLst>
+                                        <p:tav tm="0">
+                                          <p:val>
+                                            <p:strVal val="#ppt_x"/>
+                                          </p:val>
+                                        </p:tav>
+                                        <p:tav tm="100000">
+                                          <p:val>
+                                            <p:strVal val="#ppt_x"/>
+                                          </p:val>
+                                        </p:tav>
+                                      </p:tavLst>
+                                    </p:anim>
+                                    <p:anim calcmode="lin" valueType="num">
+                                      <p:cBhvr additive="base">
+                                        <p:cTn id="14" dur="500" fill="hold"/>
+                                        <p:tgtEl>
+                                          <p:spTgt spid="6">
+                                            <p:txEl>
+                                              <p:pRg st="0" end="0"/>
+                                            </p:txEl>
+                                          </p:spTgt>
+                                        </p:tgtEl>
+                                        <p:attrNameLst>
+                                          <p:attrName>ppt_y</p:attrName>
+                                        </p:attrNameLst>
+                                      </p:cBhvr>
+                                      <p:tavLst>
+                                        <p:tav tm="0">
+                                          <p:val>
+                                            <p:strVal val="1+#ppt_h/2"/>
+                                          </p:val>
+                                        </p:tav>
+                                        <p:tav tm="100000">
+                                          <p:val>
+                                            <p:strVal val="#ppt_y"/>
+                                          </p:val>
+                                        </p:tav>
+                                      </p:tavLst>
+                                    </p:anim>
+                                  </p:childTnLst>
+                                </p:cTn>
+                              </p:par>
+                              <p:par>
+                                <p:cTn id="15" presetID="2" presetClass="entr" presetSubtype="4" fill="hold" nodeType="withEffect">
+                                  <p:stCondLst>
+                                    <p:cond delay="0"/>
+                                  </p:stCondLst>
+                                  <p:childTnLst>
+                                    <p:set>
+                                      <p:cBhvr>
+                                        <p:cTn id="16" dur="1" fill="hold">
+                                          <p:stCondLst>
+                                            <p:cond delay="0"/>
+                                          </p:stCondLst>
+                                        </p:cTn>
+                                        <p:tgtEl>
+                                          <p:spTgt spid="6">
+                                            <p:txEl>
+                                              <p:pRg st="1" end="1"/>
+                                            </p:txEl>
+                                          </p:spTgt>
+                                        </p:tgtEl>
+                                        <p:attrNameLst>
+                                          <p:attrName>style.visibility</p:attrName>
+                                        </p:attrNameLst>
+                                      </p:cBhvr>
+                                      <p:to>
+                                        <p:strVal val="visible"/>
+                                      </p:to>
+                                    </p:set>
+                                    <p:anim calcmode="lin" valueType="num">
+                                      <p:cBhvr additive="base">
+                                        <p:cTn id="17" dur="500" fill="hold"/>
+                                        <p:tgtEl>
+                                          <p:spTgt spid="6">
+                                            <p:txEl>
+                                              <p:pRg st="1" end="1"/>
+                                            </p:txEl>
+                                          </p:spTgt>
+                                        </p:tgtEl>
+                                        <p:attrNameLst>
+                                          <p:attrName>ppt_x</p:attrName>
+                                        </p:attrNameLst>
+                                      </p:cBhvr>
+                                      <p:tavLst>
+                                        <p:tav tm="0">
+                                          <p:val>
+                                            <p:strVal val="#ppt_x"/>
+                                          </p:val>
+                                        </p:tav>
+                                        <p:tav tm="100000">
+                                          <p:val>
+                                            <p:strVal val="#ppt_x"/>
+                                          </p:val>
+                                        </p:tav>
+                                      </p:tavLst>
+                                    </p:anim>
+                                    <p:anim calcmode="lin" valueType="num">
+                                      <p:cBhvr additive="base">
+                                        <p:cTn id="18" dur="500" fill="hold"/>
+                                        <p:tgtEl>
+                                          <p:spTgt spid="6">
+                                            <p:txEl>
+                                              <p:pRg st="1" end="1"/>
+                                            </p:txEl>
+                                          </p:spTgt>
+                                        </p:tgtEl>
+                                        <p:attrNameLst>
+                                          <p:attrName>ppt_y</p:attrName>
+                                        </p:attrNameLst>
+                                      </p:cBhvr>
+                                      <p:tavLst>
+                                        <p:tav tm="0">
+                                          <p:val>
+                                            <p:strVal val="1+#ppt_h/2"/>
+                                          </p:val>
+                                        </p:tav>
+                                        <p:tav tm="100000">
+                                          <p:val>
+                                            <p:strVal val="#ppt_y"/>
+                                          </p:val>
+                                        </p:tav>
+                                      </p:tavLst>
+                                    </p:anim>
+                                  </p:childTnLst>
+                                </p:cTn>
+                              </p:par>
+                              <p:par>
+                                <p:cTn id="19" presetID="2" presetClass="entr" presetSubtype="4" fill="hold" nodeType="withEffect">
+                                  <p:stCondLst>
+                                    <p:cond delay="0"/>
+                                  </p:stCondLst>
+                                  <p:childTnLst>
+                                    <p:set>
+                                      <p:cBhvr>
+                                        <p:cTn id="20" dur="1" fill="hold">
+                                          <p:stCondLst>
+                                            <p:cond delay="0"/>
+                                          </p:stCondLst>
+                                        </p:cTn>
+                                        <p:tgtEl>
+                                          <p:spTgt spid="1030"/>
+                                        </p:tgtEl>
+                                        <p:attrNameLst>
+                                          <p:attrName>style.visibility</p:attrName>
+                                        </p:attrNameLst>
+                                      </p:cBhvr>
+                                      <p:to>
+                                        <p:strVal val="visible"/>
+                                      </p:to>
+                                    </p:set>
+                                    <p:anim calcmode="lin" valueType="num">
+                                      <p:cBhvr additive="base">
+                                        <p:cTn id="21" dur="500" fill="hold"/>
+                                        <p:tgtEl>
+                                          <p:spTgt spid="1030"/>
+                                        </p:tgtEl>
+                                        <p:attrNameLst>
+                                          <p:attrName>ppt_x</p:attrName>
+                                        </p:attrNameLst>
+                                      </p:cBhvr>
+                                      <p:tavLst>
+                                        <p:tav tm="0">
+                                          <p:val>
+                                            <p:strVal val="#ppt_x"/>
+                                          </p:val>
+                                        </p:tav>
+                                        <p:tav tm="100000">
+                                          <p:val>
+                                            <p:strVal val="#ppt_x"/>
+                                          </p:val>
+                                        </p:tav>
+                                      </p:tavLst>
+                                    </p:anim>
+                                    <p:anim calcmode="lin" valueType="num">
+                                      <p:cBhvr additive="base">
+                                        <p:cTn id="22" dur="500" fill="hold"/>
+                                        <p:tgtEl>
+                                          <p:spTgt spid="1030"/>
+                                        </p:tgtEl>
+                                        <p:attrNameLst>
+                                          <p:attrName>ppt_y</p:attrName>
+                                        </p:attrNameLst>
+                                      </p:cBhvr>
+                                      <p:tavLst>
+                                        <p:tav tm="0">
+                                          <p:val>
+                                            <p:strVal val="1+#ppt_h/2"/>
+                                          </p:val>
+                                        </p:tav>
+                                        <p:tav tm="100000">
+                                          <p:val>
+                                            <p:strVal val="#ppt_y"/>
+                                          </p:val>
+                                        </p:tav>
+                                      </p:tavLst>
+                                    </p:anim>
+                                  </p:childTnLst>
+                                </p:cTn>
+                              </p:par>
+                              <p:par>
+                                <p:cTn id="23" presetID="2" presetClass="entr" presetSubtype="4" fill="hold" nodeType="withEffect">
+                                  <p:stCondLst>
+                                    <p:cond delay="0"/>
+                                  </p:stCondLst>
+                                  <p:childTnLst>
+                                    <p:set>
+                                      <p:cBhvr>
+                                        <p:cTn id="24" dur="1" fill="hold">
+                                          <p:stCondLst>
+                                            <p:cond delay="0"/>
+                                          </p:stCondLst>
+                                        </p:cTn>
+                                        <p:tgtEl>
+                                          <p:spTgt spid="1032"/>
+                                        </p:tgtEl>
+                                        <p:attrNameLst>
+                                          <p:attrName>style.visibility</p:attrName>
+                                        </p:attrNameLst>
+                                      </p:cBhvr>
+                                      <p:to>
+                                        <p:strVal val="visible"/>
+                                      </p:to>
+                                    </p:set>
+                                    <p:anim calcmode="lin" valueType="num">
+                                      <p:cBhvr additive="base">
+                                        <p:cTn id="25" dur="500" fill="hold"/>
+                                        <p:tgtEl>
+                                          <p:spTgt spid="1032"/>
+                                        </p:tgtEl>
+                                        <p:attrNameLst>
+                                          <p:attrName>ppt_x</p:attrName>
+                                        </p:attrNameLst>
+                                      </p:cBhvr>
+                                      <p:tavLst>
+                                        <p:tav tm="0">
+                                          <p:val>
+                                            <p:strVal val="#ppt_x"/>
+                                          </p:val>
+                                        </p:tav>
+                                        <p:tav tm="100000">
+                                          <p:val>
+                                            <p:strVal val="#ppt_x"/>
+                                          </p:val>
+                                        </p:tav>
+                                      </p:tavLst>
+                                    </p:anim>
+                                    <p:anim calcmode="lin" valueType="num">
+                                      <p:cBhvr additive="base">
+                                        <p:cTn id="26" dur="500" fill="hold"/>
+                                        <p:tgtEl>
+                                          <p:spTgt spid="1032"/>
+                                        </p:tgtEl>
+                                        <p:attrNameLst>
+                                          <p:attrName>ppt_y</p:attrName>
+                                        </p:attrNameLst>
+                                      </p:cBhvr>
+                                      <p:tavLst>
+                                        <p:tav tm="0">
+                                          <p:val>
+                                            <p:strVal val="1+#ppt_h/2"/>
+                                          </p:val>
+                                        </p:tav>
+                                        <p:tav tm="100000">
+                                          <p:val>
+                                            <p:strVal val="#ppt_y"/>
+                                          </p:val>
+                                        </p:tav>
+                                      </p:tavLst>
+                                    </p:anim>
+                                  </p:childTnLst>
+                                </p:cTn>
+                              </p:par>
+                            </p:childTnLst>
+                          </p:cTn>
+                        </p:par>
+                      </p:childTnLst>
+                    </p:cTn>
+                  </p:par>
+                </p:childTnLst>
+              </p:cTn>
+              <p:prevCondLst>
+                <p:cond evt="onPrev" delay="0">
+                  <p:tgtEl>
+                    <p:sldTgt/>
+                  </p:tgtEl>
+                </p:cond>
+              </p:prevCondLst>
+              <p:nextCondLst>
+                <p:cond evt="onNext" delay="0">
+                  <p:tgtEl>
+                    <p:sldTgt/>
+                  </p:tgtEl>
+                </p:cond>
+              </p:nextCondLst>
+            </p:seq>
+          </p:childTnLst>
+        </p:cTn>
+      </p:par>
+    </p:tnLst>
+    <p:bldLst>
+      <p:bldP spid="5" grpId="0"/>
+    </p:bldLst>
+  </p:timing>
+</p:sld>
+</file>
+
+<file path=ppt/slides/slide8.xml><?xml version="1.0" encoding="utf-8"?>
+<p:sld xmlns:a="http://schemas.openxmlformats.org/drawingml/2006/main" xmlns:r="http://schemas.openxmlformats.org/officeDocument/2006/relationships" xmlns:p="http://schemas.openxmlformats.org/presentationml/2006/main">
+  <p:cSld>
+    <p:spTree>
+      <p:nvGrpSpPr>
+        <p:cNvPr id="1" name=""/>
+        <p:cNvGrpSpPr/>
+        <p:nvPr/>
+      </p:nvGrpSpPr>
+      <p:grpSpPr>
+        <a:xfrm>
+          <a:off x="0" y="0"/>
+          <a:ext cx="0" cy="0"/>
+          <a:chOff x="0" y="0"/>
+          <a:chExt cx="0" cy="0"/>
+        </a:xfrm>
+      </p:grpSpPr>
+      <p:pic>
+        <p:nvPicPr>
+          <p:cNvPr id="5" name="Kép 4">
+            <a:extLst>
+              <a:ext uri="{FF2B5EF4-FFF2-40B4-BE49-F238E27FC236}">
+                <a16:creationId xmlns:a16="http://schemas.microsoft.com/office/drawing/2014/main" id="{CEFF17C2-5026-403D-A101-6AC9B36B708D}"/>
+              </a:ext>
+            </a:extLst>
+          </p:cNvPr>
+          <p:cNvPicPr>
+            <a:picLocks noChangeAspect="1"/>
+          </p:cNvPicPr>
+          <p:nvPr/>
+        </p:nvPicPr>
+        <p:blipFill>
+          <a:blip r:embed="rId3">
+            <a:extLst>
+              <a:ext uri="{28A0092B-C50C-407E-A947-70E740481C1C}">
+                <a14:useLocalDpi xmlns:a14="http://schemas.microsoft.com/office/drawing/2010/main" val="0"/>
+              </a:ext>
+            </a:extLst>
+          </a:blip>
+          <a:stretch>
+            <a:fillRect/>
+          </a:stretch>
+        </p:blipFill>
+        <p:spPr>
+          <a:xfrm>
+            <a:off x="0" y="-6376"/>
+            <a:ext cx="12192000" cy="6864376"/>
+          </a:xfrm>
+          <a:prstGeom prst="rect">
+            <a:avLst/>
+          </a:prstGeom>
+        </p:spPr>
+      </p:pic>
+      <p:sp>
+        <p:nvSpPr>
+          <p:cNvPr id="2" name="Cím 1">
+            <a:extLst>
+              <a:ext uri="{FF2B5EF4-FFF2-40B4-BE49-F238E27FC236}">
+                <a16:creationId xmlns:a16="http://schemas.microsoft.com/office/drawing/2014/main" id="{66C7BBF2-3BAE-4485-A30E-E3D573859C88}"/>
+              </a:ext>
+            </a:extLst>
+          </p:cNvPr>
+          <p:cNvSpPr>
+            <a:spLocks noGrp="1"/>
+          </p:cNvSpPr>
+          <p:nvPr>
+            <p:ph type="title"/>
+          </p:nvPr>
+        </p:nvSpPr>
+        <p:spPr/>
+        <p:txBody>
+          <a:bodyPr/>
+          <a:lstStyle/>
+          <a:p>
+            <a:r>
+              <a:rPr lang="hu-HU" dirty="0">
+                <a:solidFill>
+                  <a:schemeClr val="bg1"/>
+                </a:solidFill>
+              </a:rPr>
+              <a:t>Backend-Tesztelés</a:t>
+            </a:r>
+          </a:p>
+        </p:txBody>
+      </p:sp>
+      <p:sp>
+        <p:nvSpPr>
+          <p:cNvPr id="7" name="Tartalom helye 6">
+            <a:extLst>
+              <a:ext uri="{FF2B5EF4-FFF2-40B4-BE49-F238E27FC236}">
+                <a16:creationId xmlns:a16="http://schemas.microsoft.com/office/drawing/2014/main" id="{F626411F-FE9B-4941-AB11-D890EF19562D}"/>
+              </a:ext>
+            </a:extLst>
+          </p:cNvPr>
+          <p:cNvSpPr>
+            <a:spLocks noGrp="1"/>
+          </p:cNvSpPr>
+          <p:nvPr>
+            <p:ph idx="1"/>
+          </p:nvPr>
+        </p:nvSpPr>
+        <p:spPr/>
+        <p:txBody>
+          <a:bodyPr/>
+          <a:lstStyle/>
+          <a:p>
+            <a:pPr marL="0" marR="0" lvl="0" indent="0" algn="l" defTabSz="914400" rtl="0" eaLnBrk="0" fontAlgn="base" latinLnBrk="0" hangingPunct="0">
+              <a:lnSpc>
+                <a:spcPct val="100000"/>
+              </a:lnSpc>
+              <a:spcBef>
+                <a:spcPct val="0"/>
+              </a:spcBef>
+              <a:spcAft>
+                <a:spcPct val="0"/>
+              </a:spcAft>
+              <a:buClrTx/>
+              <a:buSzTx/>
+              <a:buFontTx/>
+              <a:buChar char="•"/>
+              <a:tabLst/>
+            </a:pPr>
+            <a:r>
+              <a:rPr kumimoji="0" lang="hu-HU" altLang="hu-HU" sz="2800" b="0" i="0" u="none" strike="noStrike" cap="none" normalizeH="0" baseline="0" dirty="0">
+                <a:ln>
+                  <a:noFill/>
+                </a:ln>
+                <a:solidFill>
+                  <a:schemeClr val="bg1"/>
+                </a:solidFill>
+                <a:effectLst/>
+                <a:latin typeface="Times New Roman" panose="02020603050405020304" pitchFamily="18" charset="0"/>
+                <a:cs typeface="Times New Roman" panose="02020603050405020304" pitchFamily="18" charset="0"/>
+              </a:rPr>
+              <a:t>Automatizált API tesztek futtatása (</a:t>
+            </a:r>
+            <a:r>
+              <a:rPr kumimoji="0" lang="hu-HU" altLang="hu-HU" sz="2800" b="0" i="0" u="none" strike="noStrike" cap="none" normalizeH="0" baseline="0" dirty="0" err="1">
+                <a:ln>
+                  <a:noFill/>
+                </a:ln>
+                <a:solidFill>
+                  <a:schemeClr val="bg1"/>
+                </a:solidFill>
+                <a:effectLst/>
+                <a:latin typeface="Times New Roman" panose="02020603050405020304" pitchFamily="18" charset="0"/>
+                <a:cs typeface="Times New Roman" panose="02020603050405020304" pitchFamily="18" charset="0"/>
+              </a:rPr>
+              <a:t>Laravel</a:t>
+            </a:r>
+            <a:r>
+              <a:rPr kumimoji="0" lang="hu-HU" altLang="hu-HU" sz="2800" b="0" i="0" u="none" strike="noStrike" cap="none" normalizeH="0" baseline="0" dirty="0">
+                <a:ln>
+                  <a:noFill/>
+                </a:ln>
+                <a:solidFill>
+                  <a:schemeClr val="bg1"/>
+                </a:solidFill>
+                <a:effectLst/>
+                <a:latin typeface="Times New Roman" panose="02020603050405020304" pitchFamily="18" charset="0"/>
+                <a:cs typeface="Times New Roman" panose="02020603050405020304" pitchFamily="18" charset="0"/>
+              </a:rPr>
+              <a:t> </a:t>
+            </a:r>
+            <a:r>
+              <a:rPr kumimoji="0" lang="hu-HU" altLang="hu-HU" sz="2800" b="0" i="0" u="none" strike="noStrike" cap="none" normalizeH="0" baseline="0" dirty="0" err="1">
+                <a:ln>
+                  <a:noFill/>
+                </a:ln>
+                <a:solidFill>
+                  <a:schemeClr val="bg1"/>
+                </a:solidFill>
+                <a:effectLst/>
+                <a:latin typeface="Times New Roman" panose="02020603050405020304" pitchFamily="18" charset="0"/>
+                <a:cs typeface="Times New Roman" panose="02020603050405020304" pitchFamily="18" charset="0"/>
+              </a:rPr>
+              <a:t>Artisan</a:t>
+            </a:r>
+            <a:r>
+              <a:rPr kumimoji="0" lang="hu-HU" altLang="hu-HU" sz="2800" b="0" i="0" u="none" strike="noStrike" cap="none" normalizeH="0" baseline="0" dirty="0">
+                <a:ln>
+                  <a:noFill/>
+                </a:ln>
+                <a:solidFill>
+                  <a:schemeClr val="bg1"/>
+                </a:solidFill>
+                <a:effectLst/>
+                <a:latin typeface="Times New Roman" panose="02020603050405020304" pitchFamily="18" charset="0"/>
+                <a:cs typeface="Times New Roman" panose="02020603050405020304" pitchFamily="18" charset="0"/>
+              </a:rPr>
+              <a:t>) </a:t>
+            </a:r>
+          </a:p>
+          <a:p>
+            <a:pPr marL="0" marR="0" lvl="0" indent="0" algn="l" defTabSz="914400" rtl="0" eaLnBrk="0" fontAlgn="base" latinLnBrk="0" hangingPunct="0">
+              <a:lnSpc>
+                <a:spcPct val="100000"/>
+              </a:lnSpc>
+              <a:spcBef>
+                <a:spcPct val="0"/>
+              </a:spcBef>
+              <a:spcAft>
+                <a:spcPct val="0"/>
+              </a:spcAft>
+              <a:buClrTx/>
+              <a:buSzTx/>
+              <a:buFontTx/>
+              <a:buChar char="•"/>
+              <a:tabLst/>
+            </a:pPr>
+            <a:r>
+              <a:rPr kumimoji="0" lang="hu-HU" altLang="hu-HU" sz="2800" b="0" i="0" u="none" strike="noStrike" cap="none" normalizeH="0" baseline="0" dirty="0">
+                <a:ln>
+                  <a:noFill/>
+                </a:ln>
+                <a:solidFill>
+                  <a:schemeClr val="bg1"/>
+                </a:solidFill>
+                <a:effectLst/>
+                <a:latin typeface="Times New Roman" panose="02020603050405020304" pitchFamily="18" charset="0"/>
+                <a:cs typeface="Times New Roman" panose="02020603050405020304" pitchFamily="18" charset="0"/>
+              </a:rPr>
+              <a:t>Minden </a:t>
+            </a:r>
+            <a:r>
+              <a:rPr kumimoji="0" lang="hu-HU" altLang="hu-HU" sz="2800" b="0" i="0" u="none" strike="noStrike" cap="none" normalizeH="0" baseline="0" dirty="0" err="1">
+                <a:ln>
+                  <a:noFill/>
+                </a:ln>
+                <a:solidFill>
+                  <a:schemeClr val="bg1"/>
+                </a:solidFill>
+                <a:effectLst/>
+                <a:latin typeface="Times New Roman" panose="02020603050405020304" pitchFamily="18" charset="0"/>
+                <a:cs typeface="Times New Roman" panose="02020603050405020304" pitchFamily="18" charset="0"/>
+              </a:rPr>
+              <a:t>endpoint</a:t>
+            </a:r>
+            <a:r>
+              <a:rPr kumimoji="0" lang="hu-HU" altLang="hu-HU" sz="2800" b="0" i="0" u="none" strike="noStrike" cap="none" normalizeH="0" baseline="0" dirty="0">
+                <a:ln>
+                  <a:noFill/>
+                </a:ln>
+                <a:solidFill>
+                  <a:schemeClr val="bg1"/>
+                </a:solidFill>
+                <a:effectLst/>
+                <a:latin typeface="Times New Roman" panose="02020603050405020304" pitchFamily="18" charset="0"/>
+                <a:cs typeface="Times New Roman" panose="02020603050405020304" pitchFamily="18" charset="0"/>
+              </a:rPr>
+              <a:t> külön </a:t>
+            </a:r>
+            <a:r>
+              <a:rPr kumimoji="0" lang="hu-HU" altLang="hu-HU" sz="2800" b="0" i="0" u="none" strike="noStrike" cap="none" normalizeH="0" baseline="0" dirty="0" err="1">
+                <a:ln>
+                  <a:noFill/>
+                </a:ln>
+                <a:solidFill>
+                  <a:schemeClr val="bg1"/>
+                </a:solidFill>
+                <a:effectLst/>
+                <a:latin typeface="Times New Roman" panose="02020603050405020304" pitchFamily="18" charset="0"/>
+                <a:cs typeface="Times New Roman" panose="02020603050405020304" pitchFamily="18" charset="0"/>
+              </a:rPr>
+              <a:t>validálva</a:t>
+            </a:r>
+            <a:r>
+              <a:rPr kumimoji="0" lang="hu-HU" altLang="hu-HU" sz="2800" b="0" i="0" u="none" strike="noStrike" cap="none" normalizeH="0" baseline="0" dirty="0">
+                <a:ln>
+                  <a:noFill/>
+                </a:ln>
+                <a:solidFill>
+                  <a:schemeClr val="bg1"/>
+                </a:solidFill>
+                <a:effectLst/>
+                <a:latin typeface="Times New Roman" panose="02020603050405020304" pitchFamily="18" charset="0"/>
+                <a:cs typeface="Times New Roman" panose="02020603050405020304" pitchFamily="18" charset="0"/>
+              </a:rPr>
+              <a:t> </a:t>
+            </a:r>
+          </a:p>
+          <a:p>
+            <a:pPr marL="0" marR="0" lvl="0" indent="0" algn="l" defTabSz="914400" rtl="0" eaLnBrk="0" fontAlgn="base" latinLnBrk="0" hangingPunct="0">
+              <a:lnSpc>
+                <a:spcPct val="100000"/>
+              </a:lnSpc>
+              <a:spcBef>
+                <a:spcPct val="0"/>
+              </a:spcBef>
+              <a:spcAft>
+                <a:spcPct val="0"/>
+              </a:spcAft>
+              <a:buClrTx/>
+              <a:buSzTx/>
+              <a:buFontTx/>
+              <a:buChar char="•"/>
+              <a:tabLst/>
+            </a:pPr>
+            <a:r>
+              <a:rPr kumimoji="0" lang="hu-HU" altLang="hu-HU" sz="2800" b="0" i="0" u="none" strike="noStrike" cap="none" normalizeH="0" baseline="0" dirty="0">
+                <a:ln>
+                  <a:noFill/>
+                </a:ln>
+                <a:solidFill>
+                  <a:schemeClr val="bg1"/>
+                </a:solidFill>
+                <a:effectLst/>
+                <a:latin typeface="Times New Roman" panose="02020603050405020304" pitchFamily="18" charset="0"/>
+                <a:cs typeface="Times New Roman" panose="02020603050405020304" pitchFamily="18" charset="0"/>
+              </a:rPr>
+              <a:t>Hibakezelés és </a:t>
+            </a:r>
+            <a:r>
+              <a:rPr kumimoji="0" lang="hu-HU" altLang="hu-HU" sz="2800" b="0" i="0" u="none" strike="noStrike" cap="none" normalizeH="0" baseline="0" dirty="0" err="1">
+                <a:ln>
+                  <a:noFill/>
+                </a:ln>
+                <a:solidFill>
+                  <a:schemeClr val="bg1"/>
+                </a:solidFill>
+                <a:effectLst/>
+                <a:latin typeface="Times New Roman" panose="02020603050405020304" pitchFamily="18" charset="0"/>
+                <a:cs typeface="Times New Roman" panose="02020603050405020304" pitchFamily="18" charset="0"/>
+              </a:rPr>
+              <a:t>rate</a:t>
+            </a:r>
+            <a:r>
+              <a:rPr kumimoji="0" lang="hu-HU" altLang="hu-HU" sz="2800" b="0" i="0" u="none" strike="noStrike" cap="none" normalizeH="0" baseline="0" dirty="0">
+                <a:ln>
+                  <a:noFill/>
+                </a:ln>
+                <a:solidFill>
+                  <a:schemeClr val="bg1"/>
+                </a:solidFill>
+                <a:effectLst/>
+                <a:latin typeface="Times New Roman" panose="02020603050405020304" pitchFamily="18" charset="0"/>
+                <a:cs typeface="Times New Roman" panose="02020603050405020304" pitchFamily="18" charset="0"/>
+              </a:rPr>
+              <a:t> limit is tesztelve </a:t>
+            </a:r>
+          </a:p>
+          <a:p>
+            <a:pPr marL="0" marR="0" lvl="0" indent="0" algn="l" defTabSz="914400" rtl="0" eaLnBrk="0" fontAlgn="base" latinLnBrk="0" hangingPunct="0">
+              <a:lnSpc>
+                <a:spcPct val="100000"/>
+              </a:lnSpc>
+              <a:spcBef>
+                <a:spcPct val="0"/>
+              </a:spcBef>
+              <a:spcAft>
+                <a:spcPct val="0"/>
+              </a:spcAft>
+              <a:buClrTx/>
+              <a:buSzTx/>
+              <a:buFontTx/>
+              <a:buChar char="•"/>
+              <a:tabLst/>
+            </a:pPr>
+            <a:r>
+              <a:rPr kumimoji="0" lang="hu-HU" altLang="hu-HU" sz="2800" b="0" i="0" u="none" strike="noStrike" cap="none" normalizeH="0" baseline="0" dirty="0">
+                <a:ln>
+                  <a:noFill/>
+                </a:ln>
+                <a:solidFill>
+                  <a:schemeClr val="bg1"/>
+                </a:solidFill>
+                <a:effectLst/>
+                <a:latin typeface="Times New Roman" panose="02020603050405020304" pitchFamily="18" charset="0"/>
+                <a:cs typeface="Times New Roman" panose="02020603050405020304" pitchFamily="18" charset="0"/>
+              </a:rPr>
+              <a:t>25 teszt, 129 ellenőrzés → minden sikeres </a:t>
+            </a:r>
+          </a:p>
+          <a:p>
+            <a:pPr marL="0" marR="0" lvl="0" indent="0" algn="l" defTabSz="914400" rtl="0" eaLnBrk="0" fontAlgn="base" latinLnBrk="0" hangingPunct="0">
+              <a:lnSpc>
+                <a:spcPct val="100000"/>
+              </a:lnSpc>
+              <a:spcBef>
+                <a:spcPct val="0"/>
+              </a:spcBef>
+              <a:spcAft>
+                <a:spcPct val="0"/>
+              </a:spcAft>
+              <a:buClrTx/>
+              <a:buSzTx/>
+              <a:buFontTx/>
+              <a:buChar char="•"/>
+              <a:tabLst/>
+            </a:pPr>
+            <a:r>
+              <a:rPr kumimoji="0" lang="hu-HU" altLang="hu-HU" sz="2800" b="0" i="0" u="none" strike="noStrike" cap="none" normalizeH="0" baseline="0" dirty="0">
+                <a:ln>
+                  <a:noFill/>
+                </a:ln>
+                <a:solidFill>
+                  <a:schemeClr val="bg1"/>
+                </a:solidFill>
+                <a:effectLst/>
+                <a:latin typeface="Times New Roman" panose="02020603050405020304" pitchFamily="18" charset="0"/>
+                <a:cs typeface="Times New Roman" panose="02020603050405020304" pitchFamily="18" charset="0"/>
+              </a:rPr>
+              <a:t>Gyors visszajelzés fejlesztés közben </a:t>
+            </a:r>
+          </a:p>
+          <a:p>
+            <a:endParaRPr lang="hu-HU" dirty="0"/>
+          </a:p>
+        </p:txBody>
+      </p:sp>
+      <p:pic>
+        <p:nvPicPr>
+          <p:cNvPr id="4" name="Kép 3">
+            <a:extLst>
+              <a:ext uri="{FF2B5EF4-FFF2-40B4-BE49-F238E27FC236}">
+                <a16:creationId xmlns:a16="http://schemas.microsoft.com/office/drawing/2014/main" id="{58A924F7-ECFE-48E4-8CF6-A10FD1DD425C}"/>
+              </a:ext>
+            </a:extLst>
+          </p:cNvPr>
+          <p:cNvPicPr>
+            <a:picLocks noChangeAspect="1"/>
+          </p:cNvPicPr>
+          <p:nvPr/>
+        </p:nvPicPr>
+        <p:blipFill>
+          <a:blip r:embed="rId4">
+            <a:extLst>
+              <a:ext uri="{28A0092B-C50C-407E-A947-70E740481C1C}">
+                <a14:useLocalDpi xmlns:a14="http://schemas.microsoft.com/office/drawing/2010/main" val="0"/>
+              </a:ext>
+            </a:extLst>
+          </a:blip>
+          <a:stretch>
+            <a:fillRect/>
+          </a:stretch>
+        </p:blipFill>
+        <p:spPr>
+          <a:xfrm>
+            <a:off x="0" y="5812553"/>
+            <a:ext cx="1045447" cy="1045447"/>
+          </a:xfrm>
+          <a:prstGeom prst="rect">
+            <a:avLst/>
+          </a:prstGeom>
+        </p:spPr>
+      </p:pic>
+      <p:pic>
+        <p:nvPicPr>
+          <p:cNvPr id="9" name="Kép 8">
+            <a:extLst>
+              <a:ext uri="{FF2B5EF4-FFF2-40B4-BE49-F238E27FC236}">
+                <a16:creationId xmlns:a16="http://schemas.microsoft.com/office/drawing/2014/main" id="{3BB05DED-A3C6-4A36-BE0E-04F2C7E3EAA9}"/>
+              </a:ext>
+            </a:extLst>
+          </p:cNvPr>
+          <p:cNvPicPr>
+            <a:picLocks noChangeAspect="1"/>
+          </p:cNvPicPr>
+          <p:nvPr/>
+        </p:nvPicPr>
+        <p:blipFill>
+          <a:blip r:embed="rId5">
+            <a:extLst>
+              <a:ext uri="{28A0092B-C50C-407E-A947-70E740481C1C}">
+                <a14:useLocalDpi xmlns:a14="http://schemas.microsoft.com/office/drawing/2010/main" val="0"/>
+              </a:ext>
+            </a:extLst>
+          </a:blip>
+          <a:stretch>
+            <a:fillRect/>
+          </a:stretch>
+        </p:blipFill>
+        <p:spPr>
+          <a:xfrm>
+            <a:off x="7807960" y="3543036"/>
+            <a:ext cx="4384040" cy="3314964"/>
+          </a:xfrm>
+          <a:prstGeom prst="rect">
+            <a:avLst/>
+          </a:prstGeom>
+        </p:spPr>
+      </p:pic>
+    </p:spTree>
+    <p:extLst>
+      <p:ext uri="{BB962C8B-B14F-4D97-AF65-F5344CB8AC3E}">
+        <p14:creationId xmlns:p14="http://schemas.microsoft.com/office/powerpoint/2010/main" val="1588990733"/>
+      </p:ext>
+    </p:extLst>
+  </p:cSld>
+  <p:clrMapOvr>
+    <a:masterClrMapping/>
+  </p:clrMapOvr>
+  <p:transition spd="slow">
+    <p:push dir="u"/>
+  </p:transition>
+  <p:timing>
+    <p:tnLst>
+      <p:par>
+        <p:cTn id="1" dur="indefinite" restart="never" nodeType="tmRoot">
+          <p:childTnLst>
+            <p:seq concurrent="1" nextAc="seek">
+              <p:cTn id="2" dur="indefinite" nodeType="mainSeq">
+                <p:childTnLst>
+                  <p:par>
+                    <p:cTn id="3" fill="hold">
+                      <p:stCondLst>
+                        <p:cond delay="indefinite"/>
+                      </p:stCondLst>
+                      <p:childTnLst>
+                        <p:par>
+                          <p:cTn id="4" fill="hold">
+                            <p:stCondLst>
+                              <p:cond delay="0"/>
+                            </p:stCondLst>
+                            <p:childTnLst>
+                              <p:par>
+                                <p:cTn id="5" presetID="2" presetClass="entr" presetSubtype="4" fill="hold" grpId="0" nodeType="clickEffect">
+                                  <p:stCondLst>
+                                    <p:cond delay="0"/>
+                                  </p:stCondLst>
+                                  <p:childTnLst>
+                                    <p:set>
+                                      <p:cBhvr>
+                                        <p:cTn id="6" dur="1" fill="hold">
+                                          <p:stCondLst>
+                                            <p:cond delay="0"/>
+                                          </p:stCondLst>
+                                        </p:cTn>
+                                        <p:tgtEl>
+                                          <p:spTgt spid="2"/>
+                                        </p:tgtEl>
+                                        <p:attrNameLst>
+                                          <p:attrName>style.visibility</p:attrName>
+                                        </p:attrNameLst>
+                                      </p:cBhvr>
+                                      <p:to>
+                                        <p:strVal val="visible"/>
+                                      </p:to>
+                                    </p:set>
+                                    <p:anim calcmode="lin" valueType="num">
+                                      <p:cBhvr additive="base">
+                                        <p:cTn id="7" dur="500" fill="hold"/>
+                                        <p:tgtEl>
+                                          <p:spTgt spid="2"/>
+                                        </p:tgtEl>
+                                        <p:attrNameLst>
+                                          <p:attrName>ppt_x</p:attrName>
+                                        </p:attrNameLst>
+                                      </p:cBhvr>
+                                      <p:tavLst>
+                                        <p:tav tm="0">
+                                          <p:val>
+                                            <p:strVal val="#ppt_x"/>
+                                          </p:val>
+                                        </p:tav>
+                                        <p:tav tm="100000">
+                                          <p:val>
+                                            <p:strVal val="#ppt_x"/>
+                                          </p:val>
+                                        </p:tav>
+                                      </p:tavLst>
+                                    </p:anim>
+                                    <p:anim calcmode="lin" valueType="num">
+                                      <p:cBhvr additive="base">
+                                        <p:cTn id="8" dur="500" fill="hold"/>
+                                        <p:tgtEl>
+                                          <p:spTgt spid="2"/>
+                                        </p:tgtEl>
+                                        <p:attrNameLst>
+                                          <p:attrName>ppt_y</p:attrName>
+                                        </p:attrNameLst>
+                                      </p:cBhvr>
+                                      <p:tavLst>
+                                        <p:tav tm="0">
+                                          <p:val>
+                                            <p:strVal val="1+#ppt_h/2"/>
+                                          </p:val>
+                                        </p:tav>
+                                        <p:tav tm="100000">
+                                          <p:val>
+                                            <p:strVal val="#ppt_y"/>
+                                          </p:val>
+                                        </p:tav>
+                                      </p:tavLst>
+                                    </p:anim>
+                                  </p:childTnLst>
+                                </p:cTn>
+                              </p:par>
+                            </p:childTnLst>
+                          </p:cTn>
+                        </p:par>
+                      </p:childTnLst>
+                    </p:cTn>
+                  </p:par>
+                  <p:par>
+                    <p:cTn id="9" fill="hold">
+                      <p:stCondLst>
+                        <p:cond delay="indefinite"/>
+                      </p:stCondLst>
+                      <p:childTnLst>
+                        <p:par>
+                          <p:cTn id="10" fill="hold">
+                            <p:stCondLst>
+                              <p:cond delay="0"/>
+                            </p:stCondLst>
+                            <p:childTnLst>
+                              <p:par>
+                                <p:cTn id="11" presetID="2" presetClass="entr" presetSubtype="4" fill="hold" nodeType="clickEffect">
+                                  <p:stCondLst>
+                                    <p:cond delay="0"/>
+                                  </p:stCondLst>
+                                  <p:childTnLst>
+                                    <p:set>
+                                      <p:cBhvr>
+                                        <p:cTn id="12" dur="1" fill="hold">
+                                          <p:stCondLst>
+                                            <p:cond delay="0"/>
+                                          </p:stCondLst>
+                                        </p:cTn>
+                                        <p:tgtEl>
+                                          <p:spTgt spid="7">
+                                            <p:txEl>
+                                              <p:pRg st="0" end="0"/>
+                                            </p:txEl>
+                                          </p:spTgt>
+                                        </p:tgtEl>
+                                        <p:attrNameLst>
+                                          <p:attrName>style.visibility</p:attrName>
+                                        </p:attrNameLst>
+                                      </p:cBhvr>
+                                      <p:to>
+                                        <p:strVal val="visible"/>
+                                      </p:to>
+                                    </p:set>
+                                    <p:anim calcmode="lin" valueType="num">
+                                      <p:cBhvr additive="base">
+                                        <p:cTn id="13" dur="500" fill="hold"/>
+                                        <p:tgtEl>
+                                          <p:spTgt spid="7">
+                                            <p:txEl>
+                                              <p:pRg st="0" end="0"/>
+                                            </p:txEl>
+                                          </p:spTgt>
+                                        </p:tgtEl>
+                                        <p:attrNameLst>
+                                          <p:attrName>ppt_x</p:attrName>
+                                        </p:attrNameLst>
+                                      </p:cBhvr>
+                                      <p:tavLst>
+                                        <p:tav tm="0">
+                                          <p:val>
+                                            <p:strVal val="#ppt_x"/>
+                                          </p:val>
+                                        </p:tav>
+                                        <p:tav tm="100000">
+                                          <p:val>
+                                            <p:strVal val="#ppt_x"/>
+                                          </p:val>
+                                        </p:tav>
+                                      </p:tavLst>
+                                    </p:anim>
+                                    <p:anim calcmode="lin" valueType="num">
+                                      <p:cBhvr additive="base">
+                                        <p:cTn id="14" dur="500" fill="hold"/>
+                                        <p:tgtEl>
+                                          <p:spTgt spid="7">
+                                            <p:txEl>
+                                              <p:pRg st="0" end="0"/>
+                                            </p:txEl>
+                                          </p:spTgt>
+                                        </p:tgtEl>
+                                        <p:attrNameLst>
+                                          <p:attrName>ppt_y</p:attrName>
+                                        </p:attrNameLst>
+                                      </p:cBhvr>
+                                      <p:tavLst>
+                                        <p:tav tm="0">
+                                          <p:val>
+                                            <p:strVal val="1+#ppt_h/2"/>
+                                          </p:val>
+                                        </p:tav>
+                                        <p:tav tm="100000">
+                                          <p:val>
+                                            <p:strVal val="#ppt_y"/>
+                                          </p:val>
+                                        </p:tav>
+                                      </p:tavLst>
+                                    </p:anim>
+                                  </p:childTnLst>
+                                </p:cTn>
+                              </p:par>
+                              <p:par>
+                                <p:cTn id="15" presetID="2" presetClass="entr" presetSubtype="4" fill="hold" nodeType="withEffect">
+                                  <p:stCondLst>
+                                    <p:cond delay="0"/>
+                                  </p:stCondLst>
+                                  <p:childTnLst>
+                                    <p:set>
+                                      <p:cBhvr>
+                                        <p:cTn id="16" dur="1" fill="hold">
+                                          <p:stCondLst>
+                                            <p:cond delay="0"/>
+                                          </p:stCondLst>
+                                        </p:cTn>
+                                        <p:tgtEl>
+                                          <p:spTgt spid="7">
+                                            <p:txEl>
+                                              <p:pRg st="1" end="1"/>
+                                            </p:txEl>
+                                          </p:spTgt>
+                                        </p:tgtEl>
+                                        <p:attrNameLst>
+                                          <p:attrName>style.visibility</p:attrName>
+                                        </p:attrNameLst>
+                                      </p:cBhvr>
+                                      <p:to>
+                                        <p:strVal val="visible"/>
+                                      </p:to>
+                                    </p:set>
+                                    <p:anim calcmode="lin" valueType="num">
+                                      <p:cBhvr additive="base">
+                                        <p:cTn id="17" dur="500" fill="hold"/>
+                                        <p:tgtEl>
+                                          <p:spTgt spid="7">
+                                            <p:txEl>
+                                              <p:pRg st="1" end="1"/>
+                                            </p:txEl>
+                                          </p:spTgt>
+                                        </p:tgtEl>
+                                        <p:attrNameLst>
+                                          <p:attrName>ppt_x</p:attrName>
+                                        </p:attrNameLst>
+                                      </p:cBhvr>
+                                      <p:tavLst>
+                                        <p:tav tm="0">
+                                          <p:val>
+                                            <p:strVal val="#ppt_x"/>
+                                          </p:val>
+                                        </p:tav>
+                                        <p:tav tm="100000">
+                                          <p:val>
+                                            <p:strVal val="#ppt_x"/>
+                                          </p:val>
+                                        </p:tav>
+                                      </p:tavLst>
+                                    </p:anim>
+                                    <p:anim calcmode="lin" valueType="num">
+                                      <p:cBhvr additive="base">
+                                        <p:cTn id="18" dur="500" fill="hold"/>
+                                        <p:tgtEl>
+                                          <p:spTgt spid="7">
+                                            <p:txEl>
+                                              <p:pRg st="1" end="1"/>
+                                            </p:txEl>
+                                          </p:spTgt>
+                                        </p:tgtEl>
+                                        <p:attrNameLst>
+                                          <p:attrName>ppt_y</p:attrName>
+                                        </p:attrNameLst>
+                                      </p:cBhvr>
+                                      <p:tavLst>
+                                        <p:tav tm="0">
+                                          <p:val>
+                                            <p:strVal val="1+#ppt_h/2"/>
+                                          </p:val>
+                                        </p:tav>
+                                        <p:tav tm="100000">
+                                          <p:val>
+                                            <p:strVal val="#ppt_y"/>
+                                          </p:val>
+                                        </p:tav>
+                                      </p:tavLst>
+                                    </p:anim>
+                                  </p:childTnLst>
+                                </p:cTn>
+                              </p:par>
+                              <p:par>
+                                <p:cTn id="19" presetID="2" presetClass="entr" presetSubtype="4" fill="hold" nodeType="withEffect">
+                                  <p:stCondLst>
+                                    <p:cond delay="0"/>
+                                  </p:stCondLst>
+                                  <p:childTnLst>
+                                    <p:set>
+                                      <p:cBhvr>
+                                        <p:cTn id="20" dur="1" fill="hold">
+                                          <p:stCondLst>
+                                            <p:cond delay="0"/>
+                                          </p:stCondLst>
+                                        </p:cTn>
+                                        <p:tgtEl>
+                                          <p:spTgt spid="7">
+                                            <p:txEl>
+                                              <p:pRg st="2" end="2"/>
+                                            </p:txEl>
+                                          </p:spTgt>
+                                        </p:tgtEl>
+                                        <p:attrNameLst>
+                                          <p:attrName>style.visibility</p:attrName>
+                                        </p:attrNameLst>
+                                      </p:cBhvr>
+                                      <p:to>
+                                        <p:strVal val="visible"/>
+                                      </p:to>
+                                    </p:set>
+                                    <p:anim calcmode="lin" valueType="num">
+                                      <p:cBhvr additive="base">
+                                        <p:cTn id="21" dur="500" fill="hold"/>
+                                        <p:tgtEl>
+                                          <p:spTgt spid="7">
+                                            <p:txEl>
+                                              <p:pRg st="2" end="2"/>
+                                            </p:txEl>
+                                          </p:spTgt>
+                                        </p:tgtEl>
+                                        <p:attrNameLst>
+                                          <p:attrName>ppt_x</p:attrName>
+                                        </p:attrNameLst>
+                                      </p:cBhvr>
+                                      <p:tavLst>
+                                        <p:tav tm="0">
+                                          <p:val>
+                                            <p:strVal val="#ppt_x"/>
+                                          </p:val>
+                                        </p:tav>
+                                        <p:tav tm="100000">
+                                          <p:val>
+                                            <p:strVal val="#ppt_x"/>
+                                          </p:val>
+                                        </p:tav>
+                                      </p:tavLst>
+                                    </p:anim>
+                                    <p:anim calcmode="lin" valueType="num">
+                                      <p:cBhvr additive="base">
+                                        <p:cTn id="22" dur="500" fill="hold"/>
+                                        <p:tgtEl>
+                                          <p:spTgt spid="7">
+                                            <p:txEl>
+                                              <p:pRg st="2" end="2"/>
+                                            </p:txEl>
+                                          </p:spTgt>
+                                        </p:tgtEl>
+                                        <p:attrNameLst>
+                                          <p:attrName>ppt_y</p:attrName>
+                                        </p:attrNameLst>
+                                      </p:cBhvr>
+                                      <p:tavLst>
+                                        <p:tav tm="0">
+                                          <p:val>
+                                            <p:strVal val="1+#ppt_h/2"/>
+                                          </p:val>
+                                        </p:tav>
+                                        <p:tav tm="100000">
+                                          <p:val>
+                                            <p:strVal val="#ppt_y"/>
+                                          </p:val>
+                                        </p:tav>
+                                      </p:tavLst>
+                                    </p:anim>
+                                  </p:childTnLst>
+                                </p:cTn>
+                              </p:par>
+                              <p:par>
+                                <p:cTn id="23" presetID="2" presetClass="entr" presetSubtype="4" fill="hold" nodeType="withEffect">
+                                  <p:stCondLst>
+                                    <p:cond delay="0"/>
+                                  </p:stCondLst>
+                                  <p:childTnLst>
+                                    <p:set>
+                                      <p:cBhvr>
+                                        <p:cTn id="24" dur="1" fill="hold">
+                                          <p:stCondLst>
+                                            <p:cond delay="0"/>
+                                          </p:stCondLst>
+                                        </p:cTn>
+                                        <p:tgtEl>
+                                          <p:spTgt spid="7">
+                                            <p:txEl>
+                                              <p:pRg st="3" end="3"/>
+                                            </p:txEl>
+                                          </p:spTgt>
+                                        </p:tgtEl>
+                                        <p:attrNameLst>
+                                          <p:attrName>style.visibility</p:attrName>
+                                        </p:attrNameLst>
+                                      </p:cBhvr>
+                                      <p:to>
+                                        <p:strVal val="visible"/>
+                                      </p:to>
+                                    </p:set>
+                                    <p:anim calcmode="lin" valueType="num">
+                                      <p:cBhvr additive="base">
+                                        <p:cTn id="25" dur="500" fill="hold"/>
+                                        <p:tgtEl>
+                                          <p:spTgt spid="7">
+                                            <p:txEl>
+                                              <p:pRg st="3" end="3"/>
+                                            </p:txEl>
+                                          </p:spTgt>
+                                        </p:tgtEl>
+                                        <p:attrNameLst>
+                                          <p:attrName>ppt_x</p:attrName>
+                                        </p:attrNameLst>
+                                      </p:cBhvr>
+                                      <p:tavLst>
+                                        <p:tav tm="0">
+                                          <p:val>
+                                            <p:strVal val="#ppt_x"/>
+                                          </p:val>
+                                        </p:tav>
+                                        <p:tav tm="100000">
+                                          <p:val>
+                                            <p:strVal val="#ppt_x"/>
+                                          </p:val>
+                                        </p:tav>
+                                      </p:tavLst>
+                                    </p:anim>
+                                    <p:anim calcmode="lin" valueType="num">
+                                      <p:cBhvr additive="base">
+                                        <p:cTn id="26" dur="500" fill="hold"/>
+                                        <p:tgtEl>
+                                          <p:spTgt spid="7">
+                                            <p:txEl>
+                                              <p:pRg st="3" end="3"/>
+                                            </p:txEl>
+                                          </p:spTgt>
+                                        </p:tgtEl>
+                                        <p:attrNameLst>
+                                          <p:attrName>ppt_y</p:attrName>
+                                        </p:attrNameLst>
+                                      </p:cBhvr>
+                                      <p:tavLst>
+                                        <p:tav tm="0">
+                                          <p:val>
+                                            <p:strVal val="1+#ppt_h/2"/>
+                                          </p:val>
+                                        </p:tav>
+                                        <p:tav tm="100000">
+                                          <p:val>
+                                            <p:strVal val="#ppt_y"/>
+                                          </p:val>
+                                        </p:tav>
+                                      </p:tavLst>
+                                    </p:anim>
+                                  </p:childTnLst>
+                                </p:cTn>
+                              </p:par>
+                              <p:par>
+                                <p:cTn id="27" presetID="2" presetClass="entr" presetSubtype="4" fill="hold" nodeType="withEffect">
+                                  <p:stCondLst>
+                                    <p:cond delay="0"/>
+                                  </p:stCondLst>
+                                  <p:childTnLst>
+                                    <p:set>
+                                      <p:cBhvr>
+                                        <p:cTn id="28" dur="1" fill="hold">
+                                          <p:stCondLst>
+                                            <p:cond delay="0"/>
+                                          </p:stCondLst>
+                                        </p:cTn>
+                                        <p:tgtEl>
+                                          <p:spTgt spid="7">
+                                            <p:txEl>
+                                              <p:pRg st="4" end="4"/>
+                                            </p:txEl>
+                                          </p:spTgt>
+                                        </p:tgtEl>
+                                        <p:attrNameLst>
+                                          <p:attrName>style.visibility</p:attrName>
+                                        </p:attrNameLst>
+                                      </p:cBhvr>
+                                      <p:to>
+                                        <p:strVal val="visible"/>
+                                      </p:to>
+                                    </p:set>
+                                    <p:anim calcmode="lin" valueType="num">
+                                      <p:cBhvr additive="base">
+                                        <p:cTn id="29" dur="500" fill="hold"/>
+                                        <p:tgtEl>
+                                          <p:spTgt spid="7">
+                                            <p:txEl>
+                                              <p:pRg st="4" end="4"/>
+                                            </p:txEl>
+                                          </p:spTgt>
+                                        </p:tgtEl>
+                                        <p:attrNameLst>
+                                          <p:attrName>ppt_x</p:attrName>
+                                        </p:attrNameLst>
+                                      </p:cBhvr>
+                                      <p:tavLst>
+                                        <p:tav tm="0">
+                                          <p:val>
+                                            <p:strVal val="#ppt_x"/>
+                                          </p:val>
+                                        </p:tav>
+                                        <p:tav tm="100000">
+                                          <p:val>
+                                            <p:strVal val="#ppt_x"/>
+                                          </p:val>
+                                        </p:tav>
+                                      </p:tavLst>
+                                    </p:anim>
+                                    <p:anim calcmode="lin" valueType="num">
+                                      <p:cBhvr additive="base">
+                                        <p:cTn id="30" dur="500" fill="hold"/>
+                                        <p:tgtEl>
+                                          <p:spTgt spid="7">
+                                            <p:txEl>
+                                              <p:pRg st="4" end="4"/>
+                                            </p:txEl>
+                                          </p:spTgt>
+                                        </p:tgtEl>
+                                        <p:attrNameLst>
+                                          <p:attrName>ppt_y</p:attrName>
+                                        </p:attrNameLst>
+                                      </p:cBhvr>
+                                      <p:tavLst>
+                                        <p:tav tm="0">
+                                          <p:val>
+                                            <p:strVal val="1+#ppt_h/2"/>
+                                          </p:val>
+                                        </p:tav>
+                                        <p:tav tm="100000">
+                                          <p:val>
+                                            <p:strVal val="#ppt_y"/>
+                                          </p:val>
+                                        </p:tav>
+                                      </p:tavLst>
+                                    </p:anim>
+                                  </p:childTnLst>
+                                </p:cTn>
+                              </p:par>
+                              <p:par>
+                                <p:cTn id="31" presetID="2" presetClass="entr" presetSubtype="4" fill="hold" nodeType="withEffect">
+                                  <p:stCondLst>
+                                    <p:cond delay="0"/>
+                                  </p:stCondLst>
+                                  <p:childTnLst>
+                                    <p:set>
+                                      <p:cBhvr>
+                                        <p:cTn id="32" dur="1" fill="hold">
+                                          <p:stCondLst>
+                                            <p:cond delay="0"/>
+                                          </p:stCondLst>
+                                        </p:cTn>
+                                        <p:tgtEl>
+                                          <p:spTgt spid="9"/>
+                                        </p:tgtEl>
+                                        <p:attrNameLst>
+                                          <p:attrName>style.visibility</p:attrName>
+                                        </p:attrNameLst>
+                                      </p:cBhvr>
+                                      <p:to>
+                                        <p:strVal val="visible"/>
+                                      </p:to>
+                                    </p:set>
+                                    <p:anim calcmode="lin" valueType="num">
+                                      <p:cBhvr additive="base">
+                                        <p:cTn id="33" dur="500" fill="hold"/>
+                                        <p:tgtEl>
+                                          <p:spTgt spid="9"/>
+                                        </p:tgtEl>
+                                        <p:attrNameLst>
+                                          <p:attrName>ppt_x</p:attrName>
+                                        </p:attrNameLst>
+                                      </p:cBhvr>
+                                      <p:tavLst>
+                                        <p:tav tm="0">
+                                          <p:val>
+                                            <p:strVal val="#ppt_x"/>
+                                          </p:val>
+                                        </p:tav>
+                                        <p:tav tm="100000">
+                                          <p:val>
+                                            <p:strVal val="#ppt_x"/>
+                                          </p:val>
+                                        </p:tav>
+                                      </p:tavLst>
+                                    </p:anim>
+                                    <p:anim calcmode="lin" valueType="num">
+                                      <p:cBhvr additive="base">
+                                        <p:cTn id="34" dur="500" fill="hold"/>
+                                        <p:tgtEl>
+                                          <p:spTgt spid="9"/>
+                                        </p:tgtEl>
+                                        <p:attrNameLst>
+                                          <p:attrName>ppt_y</p:attrName>
+                                        </p:attrNameLst>
+                                      </p:cBhvr>
+                                      <p:tavLst>
+                                        <p:tav tm="0">
+                                          <p:val>
+                                            <p:strVal val="1+#ppt_h/2"/>
+                                          </p:val>
+                                        </p:tav>
+                                        <p:tav tm="100000">
+                                          <p:val>
+                                            <p:strVal val="#ppt_y"/>
+                                          </p:val>
+                                        </p:tav>
+                                      </p:tavLst>
+                                    </p:anim>
+                                  </p:childTnLst>
+                                </p:cTn>
+                              </p:par>
+                            </p:childTnLst>
+                          </p:cTn>
+                        </p:par>
+                      </p:childTnLst>
+                    </p:cTn>
+                  </p:par>
+                </p:childTnLst>
+              </p:cTn>
+              <p:prevCondLst>
+                <p:cond evt="onPrev" delay="0">
+                  <p:tgtEl>
+                    <p:sldTgt/>
+                  </p:tgtEl>
+                </p:cond>
+              </p:prevCondLst>
+              <p:nextCondLst>
+                <p:cond evt="onNext" delay="0">
+                  <p:tgtEl>
+                    <p:sldTgt/>
+                  </p:tgtEl>
+                </p:cond>
+              </p:nextCondLst>
+            </p:seq>
+          </p:childTnLst>
+        </p:cTn>
+      </p:par>
+    </p:tnLst>
+    <p:bldLst>
+      <p:bldP spid="2" grpId="0"/>
+    </p:bldLst>
+  </p:timing>
+</p:sld>
+</file>
+
+<file path=ppt/slides/slide9.xml><?xml version="1.0" encoding="utf-8"?>
+<p:sld xmlns:a="http://schemas.openxmlformats.org/drawingml/2006/main" xmlns:r="http://schemas.openxmlformats.org/officeDocument/2006/relationships" xmlns:p="http://schemas.openxmlformats.org/presentationml/2006/main">
+  <p:cSld>
+    <p:spTree>
+      <p:nvGrpSpPr>
+        <p:cNvPr id="1" name=""/>
+        <p:cNvGrpSpPr/>
+        <p:nvPr/>
+      </p:nvGrpSpPr>
+      <p:grpSpPr>
+        <a:xfrm>
+          <a:off x="0" y="0"/>
+          <a:ext cx="0" cy="0"/>
+          <a:chOff x="0" y="0"/>
+          <a:chExt cx="0" cy="0"/>
+        </a:xfrm>
+      </p:grpSpPr>
+      <p:pic>
+        <p:nvPicPr>
+          <p:cNvPr id="10" name="Kép 9">
+            <a:extLst>
+              <a:ext uri="{FF2B5EF4-FFF2-40B4-BE49-F238E27FC236}">
+                <a16:creationId xmlns:a16="http://schemas.microsoft.com/office/drawing/2014/main" id="{8DDE1B41-B9D2-4AC3-8FC3-143E40A507A3}"/>
+              </a:ext>
+            </a:extLst>
+          </p:cNvPr>
+          <p:cNvPicPr>
+            <a:picLocks noChangeAspect="1"/>
+          </p:cNvPicPr>
+          <p:nvPr/>
+        </p:nvPicPr>
+        <p:blipFill>
+          <a:blip r:embed="rId2">
+            <a:extLst>
+              <a:ext uri="{28A0092B-C50C-407E-A947-70E740481C1C}">
+                <a14:useLocalDpi xmlns:a14="http://schemas.microsoft.com/office/drawing/2010/main" val="0"/>
+              </a:ext>
+            </a:extLst>
+          </a:blip>
+          <a:stretch>
+            <a:fillRect/>
+          </a:stretch>
+        </p:blipFill>
+        <p:spPr>
+          <a:xfrm>
+            <a:off x="0" y="-6376"/>
+            <a:ext cx="12192000" cy="6864376"/>
+          </a:xfrm>
+          <a:prstGeom prst="rect">
+            <a:avLst/>
+          </a:prstGeom>
+        </p:spPr>
+      </p:pic>
+      <p:sp>
+        <p:nvSpPr>
+          <p:cNvPr id="7" name="Cím 6">
+            <a:extLst>
+              <a:ext uri="{FF2B5EF4-FFF2-40B4-BE49-F238E27FC236}">
+                <a16:creationId xmlns:a16="http://schemas.microsoft.com/office/drawing/2014/main" id="{6D732CAD-ACD9-4D47-B378-2E1BECA11B29}"/>
+              </a:ext>
+            </a:extLst>
+          </p:cNvPr>
+          <p:cNvSpPr>
+            <a:spLocks noGrp="1"/>
+          </p:cNvSpPr>
+          <p:nvPr>
+            <p:ph type="title"/>
+          </p:nvPr>
+        </p:nvSpPr>
+        <p:spPr/>
+        <p:txBody>
+          <a:bodyPr/>
+          <a:lstStyle/>
+          <a:p>
+            <a:r>
+              <a:rPr lang="hu-HU" dirty="0">
+                <a:solidFill>
+                  <a:schemeClr val="bg1"/>
+                </a:solidFill>
+                <a:latin typeface="Times New Roman" panose="02020603050405020304" pitchFamily="18" charset="0"/>
+                <a:cs typeface="Times New Roman" panose="02020603050405020304" pitchFamily="18" charset="0"/>
+              </a:rPr>
+              <a:t>Csapatmunka</a:t>
+            </a:r>
+          </a:p>
+        </p:txBody>
+      </p:sp>
+      <p:sp>
+        <p:nvSpPr>
+          <p:cNvPr id="8" name="Tartalom helye 7">
+            <a:extLst>
+              <a:ext uri="{FF2B5EF4-FFF2-40B4-BE49-F238E27FC236}">
+                <a16:creationId xmlns:a16="http://schemas.microsoft.com/office/drawing/2014/main" id="{6016BF16-FC6A-4835-B6F2-1A13A288492E}"/>
+              </a:ext>
+            </a:extLst>
+          </p:cNvPr>
+          <p:cNvSpPr>
+            <a:spLocks noGrp="1"/>
+          </p:cNvSpPr>
+          <p:nvPr>
+            <p:ph idx="1"/>
+          </p:nvPr>
+        </p:nvSpPr>
+        <p:spPr/>
+        <p:txBody>
+          <a:bodyPr/>
+          <a:lstStyle/>
+          <a:p>
+            <a:r>
+              <a:rPr lang="hu-HU" dirty="0">
+                <a:solidFill>
+                  <a:schemeClr val="bg1"/>
+                </a:solidFill>
+                <a:latin typeface="Times New Roman" panose="02020603050405020304" pitchFamily="18" charset="0"/>
+                <a:cs typeface="Times New Roman" panose="02020603050405020304" pitchFamily="18" charset="0"/>
+              </a:rPr>
+              <a:t>GitHub</a:t>
+            </a:r>
+          </a:p>
+          <a:p>
+            <a:r>
+              <a:rPr lang="hu-HU" dirty="0">
+                <a:solidFill>
+                  <a:schemeClr val="bg1"/>
+                </a:solidFill>
+                <a:latin typeface="Times New Roman" panose="02020603050405020304" pitchFamily="18" charset="0"/>
+                <a:cs typeface="Times New Roman" panose="02020603050405020304" pitchFamily="18" charset="0"/>
+              </a:rPr>
+              <a:t>Google Drive</a:t>
+            </a:r>
+          </a:p>
+          <a:p>
+            <a:r>
+              <a:rPr lang="hu-HU" dirty="0">
+                <a:solidFill>
+                  <a:schemeClr val="bg1"/>
+                </a:solidFill>
+                <a:latin typeface="Times New Roman" panose="02020603050405020304" pitchFamily="18" charset="0"/>
+                <a:cs typeface="Times New Roman" panose="02020603050405020304" pitchFamily="18" charset="0"/>
+              </a:rPr>
+              <a:t>Messenger</a:t>
+            </a:r>
+          </a:p>
+          <a:p>
+            <a:endParaRPr lang="hu-HU" dirty="0"/>
+          </a:p>
+        </p:txBody>
+      </p:sp>
+      <p:pic>
+        <p:nvPicPr>
+          <p:cNvPr id="9" name="Kép 8">
+            <a:extLst>
+              <a:ext uri="{FF2B5EF4-FFF2-40B4-BE49-F238E27FC236}">
+                <a16:creationId xmlns:a16="http://schemas.microsoft.com/office/drawing/2014/main" id="{95A3F57A-2CEB-49D2-B2EE-C3A9F97981B4}"/>
+              </a:ext>
+            </a:extLst>
+          </p:cNvPr>
+          <p:cNvPicPr>
+            <a:picLocks noChangeAspect="1"/>
+          </p:cNvPicPr>
+          <p:nvPr/>
+        </p:nvPicPr>
+        <p:blipFill>
+          <a:blip r:embed="rId3">
+            <a:extLst>
+              <a:ext uri="{28A0092B-C50C-407E-A947-70E740481C1C}">
+                <a14:useLocalDpi xmlns:a14="http://schemas.microsoft.com/office/drawing/2010/main" val="0"/>
+              </a:ext>
+            </a:extLst>
+          </a:blip>
+          <a:stretch>
+            <a:fillRect/>
+          </a:stretch>
+        </p:blipFill>
+        <p:spPr>
+          <a:xfrm>
+            <a:off x="0" y="5812553"/>
+            <a:ext cx="1045447" cy="1045447"/>
+          </a:xfrm>
+          <a:prstGeom prst="rect">
+            <a:avLst/>
+          </a:prstGeom>
+        </p:spPr>
+      </p:pic>
+      <p:pic>
+        <p:nvPicPr>
+          <p:cNvPr id="2050" name="Picture 2" descr="With GitHub - PyXAI documentation">
+            <a:extLst>
+              <a:ext uri="{FF2B5EF4-FFF2-40B4-BE49-F238E27FC236}">
+                <a16:creationId xmlns:a16="http://schemas.microsoft.com/office/drawing/2014/main" id="{C91D4B1C-28D8-4B24-9C45-7AF0768E9EC1}"/>
+              </a:ext>
+            </a:extLst>
+          </p:cNvPr>
+          <p:cNvPicPr>
+            <a:picLocks noChangeAspect="1" noChangeArrowheads="1"/>
+          </p:cNvPicPr>
+          <p:nvPr/>
+        </p:nvPicPr>
+        <p:blipFill>
+          <a:blip r:embed="rId4">
+            <a:extLst>
+              <a:ext uri="{28A0092B-C50C-407E-A947-70E740481C1C}">
+                <a14:useLocalDpi xmlns:a14="http://schemas.microsoft.com/office/drawing/2010/main" val="0"/>
+              </a:ext>
+            </a:extLst>
+          </a:blip>
+          <a:srcRect/>
+          <a:stretch>
+            <a:fillRect/>
+          </a:stretch>
+        </p:blipFill>
+        <p:spPr bwMode="auto">
+          <a:xfrm>
+            <a:off x="872404" y="3635844"/>
+            <a:ext cx="2067726" cy="1168714"/>
+          </a:xfrm>
+          <a:prstGeom prst="rect">
+            <a:avLst/>
+          </a:prstGeom>
+          <a:noFill/>
+          <a:extLst>
+            <a:ext uri="{909E8E84-426E-40DD-AFC4-6F175D3DCCD1}">
+              <a14:hiddenFill xmlns:a14="http://schemas.microsoft.com/office/drawing/2010/main">
+                <a:solidFill>
+                  <a:srgbClr val="FFFFFF"/>
+                </a:solidFill>
+              </a14:hiddenFill>
+            </a:ext>
+          </a:extLst>
+        </p:spPr>
+      </p:pic>
+      <p:pic>
+        <p:nvPicPr>
+          <p:cNvPr id="2052" name="Picture 4" descr="Google Drive - Wikipedia">
+            <a:extLst>
+              <a:ext uri="{FF2B5EF4-FFF2-40B4-BE49-F238E27FC236}">
+                <a16:creationId xmlns:a16="http://schemas.microsoft.com/office/drawing/2014/main" id="{C093FB46-E22D-403B-8679-CDC38DFDB5C8}"/>
+              </a:ext>
+            </a:extLst>
+          </p:cNvPr>
+          <p:cNvPicPr>
+            <a:picLocks noChangeAspect="1" noChangeArrowheads="1"/>
+          </p:cNvPicPr>
+          <p:nvPr/>
+        </p:nvPicPr>
+        <p:blipFill>
+          <a:blip r:embed="rId5">
+            <a:extLst>
+              <a:ext uri="{28A0092B-C50C-407E-A947-70E740481C1C}">
+                <a14:useLocalDpi xmlns:a14="http://schemas.microsoft.com/office/drawing/2010/main" val="0"/>
+              </a:ext>
+            </a:extLst>
+          </a:blip>
+          <a:srcRect/>
+          <a:stretch>
+            <a:fillRect/>
+          </a:stretch>
+        </p:blipFill>
+        <p:spPr bwMode="auto">
+          <a:xfrm>
+            <a:off x="5268212" y="3597520"/>
+            <a:ext cx="1349378" cy="1207038"/>
+          </a:xfrm>
+          <a:prstGeom prst="rect">
+            <a:avLst/>
+          </a:prstGeom>
+          <a:noFill/>
+          <a:extLst>
+            <a:ext uri="{909E8E84-426E-40DD-AFC4-6F175D3DCCD1}">
+              <a14:hiddenFill xmlns:a14="http://schemas.microsoft.com/office/drawing/2010/main">
+                <a:solidFill>
+                  <a:srgbClr val="FFFFFF"/>
+                </a:solidFill>
+              </a14:hiddenFill>
+            </a:ext>
+          </a:extLst>
+        </p:spPr>
+      </p:pic>
+      <p:pic>
+        <p:nvPicPr>
+          <p:cNvPr id="2054" name="Picture 6">
+            <a:extLst>
+              <a:ext uri="{FF2B5EF4-FFF2-40B4-BE49-F238E27FC236}">
+                <a16:creationId xmlns:a16="http://schemas.microsoft.com/office/drawing/2014/main" id="{4518CB52-3E47-4504-895F-F1150B106FFB}"/>
+              </a:ext>
+            </a:extLst>
+          </p:cNvPr>
+          <p:cNvPicPr>
+            <a:picLocks noChangeAspect="1" noChangeArrowheads="1"/>
+          </p:cNvPicPr>
+          <p:nvPr/>
+        </p:nvPicPr>
+        <p:blipFill>
+          <a:blip r:embed="rId6">
+            <a:extLst>
+              <a:ext uri="{28A0092B-C50C-407E-A947-70E740481C1C}">
+                <a14:useLocalDpi xmlns:a14="http://schemas.microsoft.com/office/drawing/2010/main" val="0"/>
+              </a:ext>
+            </a:extLst>
+          </a:blip>
+          <a:srcRect/>
+          <a:stretch>
+            <a:fillRect/>
+          </a:stretch>
+        </p:blipFill>
+        <p:spPr bwMode="auto">
+          <a:xfrm>
+            <a:off x="9702181" y="3591368"/>
+            <a:ext cx="1207039" cy="1207039"/>
+          </a:xfrm>
+          <a:prstGeom prst="rect">
+            <a:avLst/>
+          </a:prstGeom>
+          <a:noFill/>
+          <a:extLst>
+            <a:ext uri="{909E8E84-426E-40DD-AFC4-6F175D3DCCD1}">
+              <a14:hiddenFill xmlns:a14="http://schemas.microsoft.com/office/drawing/2010/main">
+                <a:solidFill>
+                  <a:srgbClr val="FFFFFF"/>
+                </a:solidFill>
+              </a14:hiddenFill>
+            </a:ext>
+          </a:extLst>
+        </p:spPr>
+      </p:pic>
+    </p:spTree>
+    <p:extLst>
+      <p:ext uri="{BB962C8B-B14F-4D97-AF65-F5344CB8AC3E}">
+        <p14:creationId xmlns:p14="http://schemas.microsoft.com/office/powerpoint/2010/main" val="238496185"/>
+      </p:ext>
+    </p:extLst>
+  </p:cSld>
+  <p:clrMapOvr>
+    <a:masterClrMapping/>
+  </p:clrMapOvr>
+  <p:transition spd="slow">
+    <p:push dir="u"/>
+  </p:transition>
+  <p:timing>
+    <p:tnLst>
+      <p:par>
+        <p:cTn id="1" dur="indefinite" restart="never" nodeType="tmRoot">
+          <p:childTnLst>
+            <p:seq concurrent="1" nextAc="seek">
+              <p:cTn id="2" dur="indefinite" nodeType="mainSeq">
+                <p:childTnLst>
+                  <p:par>
+                    <p:cTn id="3" fill="hold">
+                      <p:stCondLst>
+                        <p:cond delay="indefinite"/>
+                      </p:stCondLst>
+                      <p:childTnLst>
+                        <p:par>
+                          <p:cTn id="4" fill="hold">
+                            <p:stCondLst>
+                              <p:cond delay="0"/>
+                            </p:stCondLst>
+                            <p:childTnLst>
+                              <p:par>
+                                <p:cTn id="5" presetID="2" presetClass="entr" presetSubtype="4" fill="hold" grpId="0" nodeType="clickEffect">
+                                  <p:stCondLst>
+                                    <p:cond delay="0"/>
+                                  </p:stCondLst>
+                                  <p:childTnLst>
+                                    <p:set>
+                                      <p:cBhvr>
+                                        <p:cTn id="6" dur="1" fill="hold">
+                                          <p:stCondLst>
+                                            <p:cond delay="0"/>
+                                          </p:stCondLst>
+                                        </p:cTn>
+                                        <p:tgtEl>
+                                          <p:spTgt spid="7"/>
+                                        </p:tgtEl>
+                                        <p:attrNameLst>
+                                          <p:attrName>style.visibility</p:attrName>
+                                        </p:attrNameLst>
+                                      </p:cBhvr>
+                                      <p:to>
+                                        <p:strVal val="visible"/>
+                                      </p:to>
+                                    </p:set>
+                                    <p:anim calcmode="lin" valueType="num">
+                                      <p:cBhvr additive="base">
+                                        <p:cTn id="7" dur="500" fill="hold"/>
+                                        <p:tgtEl>
+                                          <p:spTgt spid="7"/>
+                                        </p:tgtEl>
+                                        <p:attrNameLst>
+                                          <p:attrName>ppt_x</p:attrName>
+                                        </p:attrNameLst>
+                                      </p:cBhvr>
+                                      <p:tavLst>
+                                        <p:tav tm="0">
+                                          <p:val>
+                                            <p:strVal val="#ppt_x"/>
+                                          </p:val>
+                                        </p:tav>
+                                        <p:tav tm="100000">
+                                          <p:val>
+                                            <p:strVal val="#ppt_x"/>
+                                          </p:val>
+                                        </p:tav>
+                                      </p:tavLst>
+                                    </p:anim>
+                                    <p:anim calcmode="lin" valueType="num">
+                                      <p:cBhvr additive="base">
+                                        <p:cTn id="8" dur="500" fill="hold"/>
+                                        <p:tgtEl>
+                                          <p:spTgt spid="7"/>
+                                        </p:tgtEl>
+                                        <p:attrNameLst>
+                                          <p:attrName>ppt_y</p:attrName>
+                                        </p:attrNameLst>
+                                      </p:cBhvr>
+                                      <p:tavLst>
+                                        <p:tav tm="0">
+                                          <p:val>
+                                            <p:strVal val="1+#ppt_h/2"/>
+                                          </p:val>
+                                        </p:tav>
+                                        <p:tav tm="100000">
+                                          <p:val>
+                                            <p:strVal val="#ppt_y"/>
+                                          </p:val>
+                                        </p:tav>
+                                      </p:tavLst>
+                                    </p:anim>
+                                  </p:childTnLst>
+                                </p:cTn>
+                              </p:par>
+                            </p:childTnLst>
+                          </p:cTn>
+                        </p:par>
+                      </p:childTnLst>
+                    </p:cTn>
+                  </p:par>
+                  <p:par>
+                    <p:cTn id="9" fill="hold">
+                      <p:stCondLst>
+                        <p:cond delay="indefinite"/>
+                      </p:stCondLst>
+                      <p:childTnLst>
+                        <p:par>
+                          <p:cTn id="10" fill="hold">
+                            <p:stCondLst>
+                              <p:cond delay="0"/>
+                            </p:stCondLst>
+                            <p:childTnLst>
+                              <p:par>
+                                <p:cTn id="11" presetID="2" presetClass="entr" presetSubtype="4" fill="hold" nodeType="clickEffect">
+                                  <p:stCondLst>
+                                    <p:cond delay="0"/>
+                                  </p:stCondLst>
+                                  <p:childTnLst>
+                                    <p:set>
+                                      <p:cBhvr>
+                                        <p:cTn id="12" dur="1" fill="hold">
+                                          <p:stCondLst>
+                                            <p:cond delay="0"/>
+                                          </p:stCondLst>
+                                        </p:cTn>
+                                        <p:tgtEl>
+                                          <p:spTgt spid="8">
+                                            <p:txEl>
+                                              <p:pRg st="0" end="0"/>
+                                            </p:txEl>
+                                          </p:spTgt>
+                                        </p:tgtEl>
+                                        <p:attrNameLst>
+                                          <p:attrName>style.visibility</p:attrName>
+                                        </p:attrNameLst>
+                                      </p:cBhvr>
+                                      <p:to>
+                                        <p:strVal val="visible"/>
+                                      </p:to>
+                                    </p:set>
+                                    <p:anim calcmode="lin" valueType="num">
+                                      <p:cBhvr additive="base">
+                                        <p:cTn id="13" dur="500" fill="hold"/>
+                                        <p:tgtEl>
+                                          <p:spTgt spid="8">
+                                            <p:txEl>
+                                              <p:pRg st="0" end="0"/>
+                                            </p:txEl>
+                                          </p:spTgt>
+                                        </p:tgtEl>
+                                        <p:attrNameLst>
+                                          <p:attrName>ppt_x</p:attrName>
+                                        </p:attrNameLst>
+                                      </p:cBhvr>
+                                      <p:tavLst>
+                                        <p:tav tm="0">
+                                          <p:val>
+                                            <p:strVal val="#ppt_x"/>
+                                          </p:val>
+                                        </p:tav>
+                                        <p:tav tm="100000">
+                                          <p:val>
+                                            <p:strVal val="#ppt_x"/>
+                                          </p:val>
+                                        </p:tav>
+                                      </p:tavLst>
+                                    </p:anim>
+                                    <p:anim calcmode="lin" valueType="num">
+                                      <p:cBhvr additive="base">
+                                        <p:cTn id="14" dur="500" fill="hold"/>
+                                        <p:tgtEl>
+                                          <p:spTgt spid="8">
+                                            <p:txEl>
+                                              <p:pRg st="0" end="0"/>
+                                            </p:txEl>
+                                          </p:spTgt>
+                                        </p:tgtEl>
+                                        <p:attrNameLst>
+                                          <p:attrName>ppt_y</p:attrName>
+                                        </p:attrNameLst>
+                                      </p:cBhvr>
+                                      <p:tavLst>
+                                        <p:tav tm="0">
+                                          <p:val>
+                                            <p:strVal val="1+#ppt_h/2"/>
+                                          </p:val>
+                                        </p:tav>
+                                        <p:tav tm="100000">
+                                          <p:val>
+                                            <p:strVal val="#ppt_y"/>
+                                          </p:val>
+                                        </p:tav>
+                                      </p:tavLst>
+                                    </p:anim>
+                                  </p:childTnLst>
+                                </p:cTn>
+                              </p:par>
+                              <p:par>
+                                <p:cTn id="15" presetID="2" presetClass="entr" presetSubtype="4" fill="hold" nodeType="withEffect">
+                                  <p:stCondLst>
+                                    <p:cond delay="0"/>
+                                  </p:stCondLst>
+                                  <p:childTnLst>
+                                    <p:set>
+                                      <p:cBhvr>
+                                        <p:cTn id="16" dur="1" fill="hold">
+                                          <p:stCondLst>
+                                            <p:cond delay="0"/>
+                                          </p:stCondLst>
+                                        </p:cTn>
+                                        <p:tgtEl>
+                                          <p:spTgt spid="2050"/>
+                                        </p:tgtEl>
+                                        <p:attrNameLst>
+                                          <p:attrName>style.visibility</p:attrName>
+                                        </p:attrNameLst>
+                                      </p:cBhvr>
+                                      <p:to>
+                                        <p:strVal val="visible"/>
+                                      </p:to>
+                                    </p:set>
+                                    <p:anim calcmode="lin" valueType="num">
+                                      <p:cBhvr additive="base">
+                                        <p:cTn id="17" dur="500" fill="hold"/>
+                                        <p:tgtEl>
+                                          <p:spTgt spid="2050"/>
+                                        </p:tgtEl>
+                                        <p:attrNameLst>
+                                          <p:attrName>ppt_x</p:attrName>
+                                        </p:attrNameLst>
+                                      </p:cBhvr>
+                                      <p:tavLst>
+                                        <p:tav tm="0">
+                                          <p:val>
+                                            <p:strVal val="#ppt_x"/>
+                                          </p:val>
+                                        </p:tav>
+                                        <p:tav tm="100000">
+                                          <p:val>
+                                            <p:strVal val="#ppt_x"/>
+                                          </p:val>
+                                        </p:tav>
+                                      </p:tavLst>
+                                    </p:anim>
+                                    <p:anim calcmode="lin" valueType="num">
+                                      <p:cBhvr additive="base">
+                                        <p:cTn id="18" dur="500" fill="hold"/>
+                                        <p:tgtEl>
+                                          <p:spTgt spid="2050"/>
+                                        </p:tgtEl>
+                                        <p:attrNameLst>
+                                          <p:attrName>ppt_y</p:attrName>
+                                        </p:attrNameLst>
+                                      </p:cBhvr>
+                                      <p:tavLst>
+                                        <p:tav tm="0">
+                                          <p:val>
+                                            <p:strVal val="1+#ppt_h/2"/>
+                                          </p:val>
+                                        </p:tav>
+                                        <p:tav tm="100000">
+                                          <p:val>
+                                            <p:strVal val="#ppt_y"/>
+                                          </p:val>
+                                        </p:tav>
+                                      </p:tavLst>
+                                    </p:anim>
+                                  </p:childTnLst>
+                                </p:cTn>
+                              </p:par>
+                            </p:childTnLst>
+                          </p:cTn>
+                        </p:par>
+                      </p:childTnLst>
+                    </p:cTn>
+                  </p:par>
+                  <p:par>
+                    <p:cTn id="19" fill="hold">
+                      <p:stCondLst>
+                        <p:cond delay="indefinite"/>
+                      </p:stCondLst>
+                      <p:childTnLst>
+                        <p:par>
+                          <p:cTn id="20" fill="hold">
+                            <p:stCondLst>
+                              <p:cond delay="0"/>
+                            </p:stCondLst>
+                            <p:childTnLst>
+                              <p:par>
+                                <p:cTn id="21" presetID="2" presetClass="entr" presetSubtype="4" fill="hold" nodeType="clickEffect">
+                                  <p:stCondLst>
+                                    <p:cond delay="0"/>
+                                  </p:stCondLst>
+                                  <p:childTnLst>
+                                    <p:set>
+                                      <p:cBhvr>
+                                        <p:cTn id="22" dur="1" fill="hold">
+                                          <p:stCondLst>
+                                            <p:cond delay="0"/>
+                                          </p:stCondLst>
+                                        </p:cTn>
+                                        <p:tgtEl>
+                                          <p:spTgt spid="8">
+                                            <p:txEl>
+                                              <p:pRg st="1" end="1"/>
+                                            </p:txEl>
+                                          </p:spTgt>
+                                        </p:tgtEl>
+                                        <p:attrNameLst>
+                                          <p:attrName>style.visibility</p:attrName>
+                                        </p:attrNameLst>
+                                      </p:cBhvr>
+                                      <p:to>
+                                        <p:strVal val="visible"/>
+                                      </p:to>
+                                    </p:set>
+                                    <p:anim calcmode="lin" valueType="num">
+                                      <p:cBhvr additive="base">
+                                        <p:cTn id="23" dur="500" fill="hold"/>
+                                        <p:tgtEl>
+                                          <p:spTgt spid="8">
+                                            <p:txEl>
+                                              <p:pRg st="1" end="1"/>
+                                            </p:txEl>
+                                          </p:spTgt>
+                                        </p:tgtEl>
+                                        <p:attrNameLst>
+                                          <p:attrName>ppt_x</p:attrName>
+                                        </p:attrNameLst>
+                                      </p:cBhvr>
+                                      <p:tavLst>
+                                        <p:tav tm="0">
+                                          <p:val>
+                                            <p:strVal val="#ppt_x"/>
+                                          </p:val>
+                                        </p:tav>
+                                        <p:tav tm="100000">
+                                          <p:val>
+                                            <p:strVal val="#ppt_x"/>
+                                          </p:val>
+                                        </p:tav>
+                                      </p:tavLst>
+                                    </p:anim>
+                                    <p:anim calcmode="lin" valueType="num">
+                                      <p:cBhvr additive="base">
+                                        <p:cTn id="24" dur="500" fill="hold"/>
+                                        <p:tgtEl>
+                                          <p:spTgt spid="8">
+                                            <p:txEl>
+                                              <p:pRg st="1" end="1"/>
+                                            </p:txEl>
+                                          </p:spTgt>
+                                        </p:tgtEl>
+                                        <p:attrNameLst>
+                                          <p:attrName>ppt_y</p:attrName>
+                                        </p:attrNameLst>
+                                      </p:cBhvr>
+                                      <p:tavLst>
+                                        <p:tav tm="0">
+                                          <p:val>
+                                            <p:strVal val="1+#ppt_h/2"/>
+                                          </p:val>
+                                        </p:tav>
+                                        <p:tav tm="100000">
+                                          <p:val>
+                                            <p:strVal val="#ppt_y"/>
+                                          </p:val>
+                                        </p:tav>
+                                      </p:tavLst>
+                                    </p:anim>
+                                  </p:childTnLst>
+                                </p:cTn>
+                              </p:par>
+                              <p:par>
+                                <p:cTn id="25" presetID="2" presetClass="entr" presetSubtype="4" fill="hold" nodeType="withEffect">
+                                  <p:stCondLst>
+                                    <p:cond delay="0"/>
+                                  </p:stCondLst>
+                                  <p:childTnLst>
+                                    <p:set>
+                                      <p:cBhvr>
+                                        <p:cTn id="26" dur="1" fill="hold">
+                                          <p:stCondLst>
+                                            <p:cond delay="0"/>
+                                          </p:stCondLst>
+                                        </p:cTn>
+                                        <p:tgtEl>
+                                          <p:spTgt spid="2052"/>
+                                        </p:tgtEl>
+                                        <p:attrNameLst>
+                                          <p:attrName>style.visibility</p:attrName>
+                                        </p:attrNameLst>
+                                      </p:cBhvr>
+                                      <p:to>
+                                        <p:strVal val="visible"/>
+                                      </p:to>
+                                    </p:set>
+                                    <p:anim calcmode="lin" valueType="num">
+                                      <p:cBhvr additive="base">
+                                        <p:cTn id="27" dur="500" fill="hold"/>
+                                        <p:tgtEl>
+                                          <p:spTgt spid="2052"/>
+                                        </p:tgtEl>
+                                        <p:attrNameLst>
+                                          <p:attrName>ppt_x</p:attrName>
+                                        </p:attrNameLst>
+                                      </p:cBhvr>
+                                      <p:tavLst>
+                                        <p:tav tm="0">
+                                          <p:val>
+                                            <p:strVal val="#ppt_x"/>
+                                          </p:val>
+                                        </p:tav>
+                                        <p:tav tm="100000">
+                                          <p:val>
+                                            <p:strVal val="#ppt_x"/>
+                                          </p:val>
+                                        </p:tav>
+                                      </p:tavLst>
+                                    </p:anim>
+                                    <p:anim calcmode="lin" valueType="num">
+                                      <p:cBhvr additive="base">
+                                        <p:cTn id="28" dur="500" fill="hold"/>
+                                        <p:tgtEl>
+                                          <p:spTgt spid="2052"/>
+                                        </p:tgtEl>
+                                        <p:attrNameLst>
+                                          <p:attrName>ppt_y</p:attrName>
+                                        </p:attrNameLst>
+                                      </p:cBhvr>
+                                      <p:tavLst>
+                                        <p:tav tm="0">
+                                          <p:val>
+                                            <p:strVal val="1+#ppt_h/2"/>
+                                          </p:val>
+                                        </p:tav>
+                                        <p:tav tm="100000">
+                                          <p:val>
+                                            <p:strVal val="#ppt_y"/>
+                                          </p:val>
+                                        </p:tav>
+                                      </p:tavLst>
+                                    </p:anim>
+                                  </p:childTnLst>
+                                </p:cTn>
+                              </p:par>
+                            </p:childTnLst>
+                          </p:cTn>
+                        </p:par>
+                      </p:childTnLst>
+                    </p:cTn>
+                  </p:par>
+                  <p:par>
+                    <p:cTn id="29" fill="hold">
+                      <p:stCondLst>
+                        <p:cond delay="indefinite"/>
+                      </p:stCondLst>
+                      <p:childTnLst>
+                        <p:par>
+                          <p:cTn id="30" fill="hold">
+                            <p:stCondLst>
+                              <p:cond delay="0"/>
+                            </p:stCondLst>
+                            <p:childTnLst>
+                              <p:par>
+                                <p:cTn id="31" presetID="2" presetClass="entr" presetSubtype="4" fill="hold" nodeType="clickEffect">
+                                  <p:stCondLst>
+                                    <p:cond delay="0"/>
+                                  </p:stCondLst>
+                                  <p:childTnLst>
+                                    <p:set>
+                                      <p:cBhvr>
+                                        <p:cTn id="32" dur="1" fill="hold">
+                                          <p:stCondLst>
+                                            <p:cond delay="0"/>
+                                          </p:stCondLst>
+                                        </p:cTn>
+                                        <p:tgtEl>
+                                          <p:spTgt spid="8">
+                                            <p:txEl>
+                                              <p:pRg st="2" end="2"/>
+                                            </p:txEl>
+                                          </p:spTgt>
+                                        </p:tgtEl>
+                                        <p:attrNameLst>
+                                          <p:attrName>style.visibility</p:attrName>
+                                        </p:attrNameLst>
+                                      </p:cBhvr>
+                                      <p:to>
+                                        <p:strVal val="visible"/>
+                                      </p:to>
+                                    </p:set>
+                                    <p:anim calcmode="lin" valueType="num">
+                                      <p:cBhvr additive="base">
+                                        <p:cTn id="33" dur="500" fill="hold"/>
+                                        <p:tgtEl>
+                                          <p:spTgt spid="8">
+                                            <p:txEl>
+                                              <p:pRg st="2" end="2"/>
+                                            </p:txEl>
+                                          </p:spTgt>
+                                        </p:tgtEl>
+                                        <p:attrNameLst>
+                                          <p:attrName>ppt_x</p:attrName>
+                                        </p:attrNameLst>
+                                      </p:cBhvr>
+                                      <p:tavLst>
+                                        <p:tav tm="0">
+                                          <p:val>
+                                            <p:strVal val="#ppt_x"/>
+                                          </p:val>
+                                        </p:tav>
+                                        <p:tav tm="100000">
+                                          <p:val>
+                                            <p:strVal val="#ppt_x"/>
+                                          </p:val>
+                                        </p:tav>
+                                      </p:tavLst>
+                                    </p:anim>
+                                    <p:anim calcmode="lin" valueType="num">
+                                      <p:cBhvr additive="base">
+                                        <p:cTn id="34" dur="500" fill="hold"/>
+                                        <p:tgtEl>
+                                          <p:spTgt spid="8">
+                                            <p:txEl>
+                                              <p:pRg st="2" end="2"/>
+                                            </p:txEl>
+                                          </p:spTgt>
+                                        </p:tgtEl>
+                                        <p:attrNameLst>
+                                          <p:attrName>ppt_y</p:attrName>
+                                        </p:attrNameLst>
+                                      </p:cBhvr>
+                                      <p:tavLst>
+                                        <p:tav tm="0">
+                                          <p:val>
+                                            <p:strVal val="1+#ppt_h/2"/>
+                                          </p:val>
+                                        </p:tav>
+                                        <p:tav tm="100000">
+                                          <p:val>
+                                            <p:strVal val="#ppt_y"/>
+                                          </p:val>
+                                        </p:tav>
+                                      </p:tavLst>
+                                    </p:anim>
+                                  </p:childTnLst>
+                                </p:cTn>
+                              </p:par>
+                              <p:par>
+                                <p:cTn id="35" presetID="2" presetClass="entr" presetSubtype="4" fill="hold" nodeType="withEffect">
+                                  <p:stCondLst>
+                                    <p:cond delay="0"/>
+                                  </p:stCondLst>
+                                  <p:childTnLst>
+                                    <p:set>
+                                      <p:cBhvr>
+                                        <p:cTn id="36" dur="1" fill="hold">
+                                          <p:stCondLst>
+                                            <p:cond delay="0"/>
+                                          </p:stCondLst>
+                                        </p:cTn>
+                                        <p:tgtEl>
+                                          <p:spTgt spid="2054"/>
+                                        </p:tgtEl>
+                                        <p:attrNameLst>
+                                          <p:attrName>style.visibility</p:attrName>
+                                        </p:attrNameLst>
+                                      </p:cBhvr>
+                                      <p:to>
+                                        <p:strVal val="visible"/>
+                                      </p:to>
+                                    </p:set>
+                                    <p:anim calcmode="lin" valueType="num">
+                                      <p:cBhvr additive="base">
+                                        <p:cTn id="37" dur="500" fill="hold"/>
+                                        <p:tgtEl>
+                                          <p:spTgt spid="2054"/>
+                                        </p:tgtEl>
+                                        <p:attrNameLst>
+                                          <p:attrName>ppt_x</p:attrName>
+                                        </p:attrNameLst>
+                                      </p:cBhvr>
+                                      <p:tavLst>
+                                        <p:tav tm="0">
+                                          <p:val>
+                                            <p:strVal val="#ppt_x"/>
+                                          </p:val>
+                                        </p:tav>
+                                        <p:tav tm="100000">
+                                          <p:val>
+                                            <p:strVal val="#ppt_x"/>
+                                          </p:val>
+                                        </p:tav>
+                                      </p:tavLst>
+                                    </p:anim>
+                                    <p:anim calcmode="lin" valueType="num">
+                                      <p:cBhvr additive="base">
+                                        <p:cTn id="38" dur="500" fill="hold"/>
+                                        <p:tgtEl>
+                                          <p:spTgt spid="2054"/>
+                                        </p:tgtEl>
+                                        <p:attrNameLst>
+                                          <p:attrName>ppt_y</p:attrName>
+                                        </p:attrNameLst>
+                                      </p:cBhvr>
+                                      <p:tavLst>
+                                        <p:tav tm="0">
+                                          <p:val>
+                                            <p:strVal val="1+#ppt_h/2"/>
+                                          </p:val>
+                                        </p:tav>
+                                        <p:tav tm="100000">
+                                          <p:val>
+                                            <p:strVal val="#ppt_y"/>
+                                          </p:val>
+                                        </p:tav>
+                                      </p:tavLst>
+                                    </p:anim>
+                                  </p:childTnLst>
+                                </p:cTn>
+                              </p:par>
+                            </p:childTnLst>
+                          </p:cTn>
+                        </p:par>
+                      </p:childTnLst>
+                    </p:cTn>
+                  </p:par>
+                </p:childTnLst>
+              </p:cTn>
+              <p:prevCondLst>
+                <p:cond evt="onPrev" delay="0">
+                  <p:tgtEl>
+                    <p:sldTgt/>
+                  </p:tgtEl>
+                </p:cond>
+              </p:prevCondLst>
+              <p:nextCondLst>
+                <p:cond evt="onNext" delay="0">
+                  <p:tgtEl>
+                    <p:sldTgt/>
+                  </p:tgtEl>
+                </p:cond>
+              </p:nextCondLst>
+            </p:seq>
+          </p:childTnLst>
+        </p:cTn>
+      </p:par>
+    </p:tnLst>
+    <p:bldLst>
+      <p:bldP spid="7" grpId="0"/>
+    </p:bldLst>
+  </p:timing>
 </p:sld>
 </file>
 

--- a/Dokumentáció/StockMaster_Prezentacio.pptx
+++ b/Dokumentáció/StockMaster_Prezentacio.pptx
@@ -5233,6 +5233,160 @@
           </a:prstGeom>
         </p:spPr>
       </p:pic>
+      <p:pic>
+        <p:nvPicPr>
+          <p:cNvPr id="10" name="Kép 9">
+            <a:extLst>
+              <a:ext uri="{FF2B5EF4-FFF2-40B4-BE49-F238E27FC236}">
+                <a16:creationId xmlns:a16="http://schemas.microsoft.com/office/drawing/2014/main" id="{5B6CA038-5013-40F4-A471-299167ED60A8}"/>
+              </a:ext>
+            </a:extLst>
+          </p:cNvPr>
+          <p:cNvPicPr>
+            <a:picLocks noChangeAspect="1"/>
+          </p:cNvPicPr>
+          <p:nvPr/>
+        </p:nvPicPr>
+        <p:blipFill>
+          <a:blip r:embed="rId5">
+            <a:extLst>
+              <a:ext uri="{28A0092B-C50C-407E-A947-70E740481C1C}">
+                <a14:useLocalDpi xmlns:a14="http://schemas.microsoft.com/office/drawing/2010/main" val="0"/>
+              </a:ext>
+            </a:extLst>
+          </a:blip>
+          <a:stretch>
+            <a:fillRect/>
+          </a:stretch>
+        </p:blipFill>
+        <p:spPr>
+          <a:xfrm>
+            <a:off x="9095233" y="2160909"/>
+            <a:ext cx="1743461" cy="2582536"/>
+          </a:xfrm>
+          <a:prstGeom prst="rect">
+            <a:avLst/>
+          </a:prstGeom>
+        </p:spPr>
+      </p:pic>
+      <p:pic>
+        <p:nvPicPr>
+          <p:cNvPr id="8" name="Kép 7">
+            <a:extLst>
+              <a:ext uri="{FF2B5EF4-FFF2-40B4-BE49-F238E27FC236}">
+                <a16:creationId xmlns:a16="http://schemas.microsoft.com/office/drawing/2014/main" id="{A34E71C7-6215-49A2-96E2-03461FB5C83E}"/>
+              </a:ext>
+            </a:extLst>
+          </p:cNvPr>
+          <p:cNvPicPr>
+            <a:picLocks noChangeAspect="1"/>
+          </p:cNvPicPr>
+          <p:nvPr/>
+        </p:nvPicPr>
+        <p:blipFill>
+          <a:blip r:embed="rId6">
+            <a:extLst>
+              <a:ext uri="{28A0092B-C50C-407E-A947-70E740481C1C}">
+                <a14:useLocalDpi xmlns:a14="http://schemas.microsoft.com/office/drawing/2010/main" val="0"/>
+              </a:ext>
+            </a:extLst>
+          </a:blip>
+          <a:stretch>
+            <a:fillRect/>
+          </a:stretch>
+        </p:blipFill>
+        <p:spPr>
+          <a:xfrm>
+            <a:off x="1353306" y="2160909"/>
+            <a:ext cx="1743461" cy="2582533"/>
+          </a:xfrm>
+          <a:prstGeom prst="rect">
+            <a:avLst/>
+          </a:prstGeom>
+        </p:spPr>
+      </p:pic>
+      <p:sp>
+        <p:nvSpPr>
+          <p:cNvPr id="11" name="Szövegdoboz 10">
+            <a:extLst>
+              <a:ext uri="{FF2B5EF4-FFF2-40B4-BE49-F238E27FC236}">
+                <a16:creationId xmlns:a16="http://schemas.microsoft.com/office/drawing/2014/main" id="{820E0DAE-EE69-48EF-B767-A1A763AD42F5}"/>
+              </a:ext>
+            </a:extLst>
+          </p:cNvPr>
+          <p:cNvSpPr txBox="1"/>
+          <p:nvPr/>
+        </p:nvSpPr>
+        <p:spPr>
+          <a:xfrm>
+            <a:off x="1714500" y="4743442"/>
+            <a:ext cx="1315592" cy="276999"/>
+          </a:xfrm>
+          <a:prstGeom prst="rect">
+            <a:avLst/>
+          </a:prstGeom>
+          <a:noFill/>
+        </p:spPr>
+        <p:txBody>
+          <a:bodyPr wrap="square" rtlCol="0">
+            <a:spAutoFit/>
+          </a:bodyPr>
+          <a:lstStyle/>
+          <a:p>
+            <a:r>
+              <a:rPr lang="hu-HU" sz="1200" dirty="0">
+                <a:solidFill>
+                  <a:schemeClr val="bg1"/>
+                </a:solidFill>
+                <a:latin typeface="Times New Roman" panose="02020603050405020304" pitchFamily="18" charset="0"/>
+                <a:cs typeface="Times New Roman" panose="02020603050405020304" pitchFamily="18" charset="0"/>
+              </a:rPr>
+              <a:t>Csáki Balázs</a:t>
+            </a:r>
+          </a:p>
+        </p:txBody>
+      </p:sp>
+      <p:sp>
+        <p:nvSpPr>
+          <p:cNvPr id="12" name="Szövegdoboz 11">
+            <a:extLst>
+              <a:ext uri="{FF2B5EF4-FFF2-40B4-BE49-F238E27FC236}">
+                <a16:creationId xmlns:a16="http://schemas.microsoft.com/office/drawing/2014/main" id="{6BBD5AED-F91F-46D2-A146-519A31FB0257}"/>
+              </a:ext>
+            </a:extLst>
+          </p:cNvPr>
+          <p:cNvSpPr txBox="1"/>
+          <p:nvPr/>
+        </p:nvSpPr>
+        <p:spPr>
+          <a:xfrm>
+            <a:off x="9476233" y="4743441"/>
+            <a:ext cx="1743461" cy="276999"/>
+          </a:xfrm>
+          <a:prstGeom prst="rect">
+            <a:avLst/>
+          </a:prstGeom>
+          <a:noFill/>
+        </p:spPr>
+        <p:txBody>
+          <a:bodyPr wrap="square" rtlCol="0">
+            <a:spAutoFit/>
+          </a:bodyPr>
+          <a:lstStyle/>
+          <a:p>
+            <a:r>
+              <a:rPr lang="hu-HU" sz="1200" dirty="0">
+                <a:solidFill>
+                  <a:schemeClr val="bg1"/>
+                </a:solidFill>
+                <a:latin typeface="Times New Roman" panose="02020603050405020304" pitchFamily="18" charset="0"/>
+                <a:cs typeface="Times New Roman" panose="02020603050405020304" pitchFamily="18" charset="0"/>
+              </a:rPr>
+              <a:t>Zsígó Róbert</a:t>
+            </a:r>
+          </a:p>
+        </p:txBody>
+      </p:sp>
     </p:spTree>
     <p:extLst>
       <p:ext uri="{BB962C8B-B14F-4D97-AF65-F5344CB8AC3E}">

--- a/Dokumentáció/StockMaster_Prezentacio.pptx
+++ b/Dokumentáció/StockMaster_Prezentacio.pptx
@@ -209,7 +209,7 @@
           <a:p>
             <a:fld id="{DBB7823A-862C-422A-A575-936A9871EC5A}" type="datetimeFigureOut">
               <a:rPr lang="hu-HU" smtClean="0"/>
-              <a:t>2026. 03. 24.</a:t>
+              <a:t>2026. 03. 27.</a:t>
             </a:fld>
             <a:endParaRPr lang="hu-HU"/>
           </a:p>
@@ -1937,7 +1937,7 @@
           <a:p>
             <a:fld id="{D31F9038-47AD-43A3-BBBF-D66692911134}" type="datetimeFigureOut">
               <a:rPr lang="hu-HU" smtClean="0"/>
-              <a:t>2026. 03. 24.</a:t>
+              <a:t>2026. 03. 27.</a:t>
             </a:fld>
             <a:endParaRPr lang="hu-HU"/>
           </a:p>
@@ -2135,7 +2135,7 @@
           <a:p>
             <a:fld id="{D31F9038-47AD-43A3-BBBF-D66692911134}" type="datetimeFigureOut">
               <a:rPr lang="hu-HU" smtClean="0"/>
-              <a:t>2026. 03. 24.</a:t>
+              <a:t>2026. 03. 27.</a:t>
             </a:fld>
             <a:endParaRPr lang="hu-HU"/>
           </a:p>
@@ -2343,7 +2343,7 @@
           <a:p>
             <a:fld id="{D31F9038-47AD-43A3-BBBF-D66692911134}" type="datetimeFigureOut">
               <a:rPr lang="hu-HU" smtClean="0"/>
-              <a:t>2026. 03. 24.</a:t>
+              <a:t>2026. 03. 27.</a:t>
             </a:fld>
             <a:endParaRPr lang="hu-HU"/>
           </a:p>
@@ -2541,7 +2541,7 @@
           <a:p>
             <a:fld id="{D31F9038-47AD-43A3-BBBF-D66692911134}" type="datetimeFigureOut">
               <a:rPr lang="hu-HU" smtClean="0"/>
-              <a:t>2026. 03. 24.</a:t>
+              <a:t>2026. 03. 27.</a:t>
             </a:fld>
             <a:endParaRPr lang="hu-HU"/>
           </a:p>
@@ -2816,7 +2816,7 @@
           <a:p>
             <a:fld id="{D31F9038-47AD-43A3-BBBF-D66692911134}" type="datetimeFigureOut">
               <a:rPr lang="hu-HU" smtClean="0"/>
-              <a:t>2026. 03. 24.</a:t>
+              <a:t>2026. 03. 27.</a:t>
             </a:fld>
             <a:endParaRPr lang="hu-HU"/>
           </a:p>
@@ -3081,7 +3081,7 @@
           <a:p>
             <a:fld id="{D31F9038-47AD-43A3-BBBF-D66692911134}" type="datetimeFigureOut">
               <a:rPr lang="hu-HU" smtClean="0"/>
-              <a:t>2026. 03. 24.</a:t>
+              <a:t>2026. 03. 27.</a:t>
             </a:fld>
             <a:endParaRPr lang="hu-HU"/>
           </a:p>
@@ -3493,7 +3493,7 @@
           <a:p>
             <a:fld id="{D31F9038-47AD-43A3-BBBF-D66692911134}" type="datetimeFigureOut">
               <a:rPr lang="hu-HU" smtClean="0"/>
-              <a:t>2026. 03. 24.</a:t>
+              <a:t>2026. 03. 27.</a:t>
             </a:fld>
             <a:endParaRPr lang="hu-HU"/>
           </a:p>
@@ -3634,7 +3634,7 @@
           <a:p>
             <a:fld id="{D31F9038-47AD-43A3-BBBF-D66692911134}" type="datetimeFigureOut">
               <a:rPr lang="hu-HU" smtClean="0"/>
-              <a:t>2026. 03. 24.</a:t>
+              <a:t>2026. 03. 27.</a:t>
             </a:fld>
             <a:endParaRPr lang="hu-HU"/>
           </a:p>
@@ -3747,7 +3747,7 @@
           <a:p>
             <a:fld id="{D31F9038-47AD-43A3-BBBF-D66692911134}" type="datetimeFigureOut">
               <a:rPr lang="hu-HU" smtClean="0"/>
-              <a:t>2026. 03. 24.</a:t>
+              <a:t>2026. 03. 27.</a:t>
             </a:fld>
             <a:endParaRPr lang="hu-HU"/>
           </a:p>
@@ -4058,7 +4058,7 @@
           <a:p>
             <a:fld id="{D31F9038-47AD-43A3-BBBF-D66692911134}" type="datetimeFigureOut">
               <a:rPr lang="hu-HU" smtClean="0"/>
-              <a:t>2026. 03. 24.</a:t>
+              <a:t>2026. 03. 27.</a:t>
             </a:fld>
             <a:endParaRPr lang="hu-HU"/>
           </a:p>
@@ -4346,7 +4346,7 @@
           <a:p>
             <a:fld id="{D31F9038-47AD-43A3-BBBF-D66692911134}" type="datetimeFigureOut">
               <a:rPr lang="hu-HU" smtClean="0"/>
-              <a:t>2026. 03. 24.</a:t>
+              <a:t>2026. 03. 27.</a:t>
             </a:fld>
             <a:endParaRPr lang="hu-HU"/>
           </a:p>
@@ -4587,7 +4587,7 @@
           <a:p>
             <a:fld id="{D31F9038-47AD-43A3-BBBF-D66692911134}" type="datetimeFigureOut">
               <a:rPr lang="hu-HU" smtClean="0"/>
-              <a:t>2026. 03. 24.</a:t>
+              <a:t>2026. 03. 27.</a:t>
             </a:fld>
             <a:endParaRPr lang="hu-HU"/>
           </a:p>

--- a/Dokumentáció/StockMaster_Prezentacio.pptx
+++ b/Dokumentáció/StockMaster_Prezentacio.pptx
@@ -210,7 +210,7 @@
           <a:p>
             <a:fld id="{DBB7823A-862C-422A-A575-936A9871EC5A}" type="datetimeFigureOut">
               <a:rPr lang="hu-HU" smtClean="0"/>
-              <a:t>2026. 03. 04.</a:t>
+              <a:t>2026. 03. 06.</a:t>
             </a:fld>
             <a:endParaRPr lang="hu-HU"/>
           </a:p>
@@ -1934,7 +1934,7 @@
           <a:p>
             <a:fld id="{D31F9038-47AD-43A3-BBBF-D66692911134}" type="datetimeFigureOut">
               <a:rPr lang="hu-HU" smtClean="0"/>
-              <a:t>2026. 03. 04.</a:t>
+              <a:t>2026. 03. 06.</a:t>
             </a:fld>
             <a:endParaRPr lang="hu-HU"/>
           </a:p>
@@ -2132,7 +2132,7 @@
           <a:p>
             <a:fld id="{D31F9038-47AD-43A3-BBBF-D66692911134}" type="datetimeFigureOut">
               <a:rPr lang="hu-HU" smtClean="0"/>
-              <a:t>2026. 03. 04.</a:t>
+              <a:t>2026. 03. 06.</a:t>
             </a:fld>
             <a:endParaRPr lang="hu-HU"/>
           </a:p>
@@ -2340,7 +2340,7 @@
           <a:p>
             <a:fld id="{D31F9038-47AD-43A3-BBBF-D66692911134}" type="datetimeFigureOut">
               <a:rPr lang="hu-HU" smtClean="0"/>
-              <a:t>2026. 03. 04.</a:t>
+              <a:t>2026. 03. 06.</a:t>
             </a:fld>
             <a:endParaRPr lang="hu-HU"/>
           </a:p>
@@ -2538,7 +2538,7 @@
           <a:p>
             <a:fld id="{D31F9038-47AD-43A3-BBBF-D66692911134}" type="datetimeFigureOut">
               <a:rPr lang="hu-HU" smtClean="0"/>
-              <a:t>2026. 03. 04.</a:t>
+              <a:t>2026. 03. 06.</a:t>
             </a:fld>
             <a:endParaRPr lang="hu-HU"/>
           </a:p>
@@ -2813,7 +2813,7 @@
           <a:p>
             <a:fld id="{D31F9038-47AD-43A3-BBBF-D66692911134}" type="datetimeFigureOut">
               <a:rPr lang="hu-HU" smtClean="0"/>
-              <a:t>2026. 03. 04.</a:t>
+              <a:t>2026. 03. 06.</a:t>
             </a:fld>
             <a:endParaRPr lang="hu-HU"/>
           </a:p>
@@ -3078,7 +3078,7 @@
           <a:p>
             <a:fld id="{D31F9038-47AD-43A3-BBBF-D66692911134}" type="datetimeFigureOut">
               <a:rPr lang="hu-HU" smtClean="0"/>
-              <a:t>2026. 03. 04.</a:t>
+              <a:t>2026. 03. 06.</a:t>
             </a:fld>
             <a:endParaRPr lang="hu-HU"/>
           </a:p>
@@ -3490,7 +3490,7 @@
           <a:p>
             <a:fld id="{D31F9038-47AD-43A3-BBBF-D66692911134}" type="datetimeFigureOut">
               <a:rPr lang="hu-HU" smtClean="0"/>
-              <a:t>2026. 03. 04.</a:t>
+              <a:t>2026. 03. 06.</a:t>
             </a:fld>
             <a:endParaRPr lang="hu-HU"/>
           </a:p>
@@ -3631,7 +3631,7 @@
           <a:p>
             <a:fld id="{D31F9038-47AD-43A3-BBBF-D66692911134}" type="datetimeFigureOut">
               <a:rPr lang="hu-HU" smtClean="0"/>
-              <a:t>2026. 03. 04.</a:t>
+              <a:t>2026. 03. 06.</a:t>
             </a:fld>
             <a:endParaRPr lang="hu-HU"/>
           </a:p>
@@ -3744,7 +3744,7 @@
           <a:p>
             <a:fld id="{D31F9038-47AD-43A3-BBBF-D66692911134}" type="datetimeFigureOut">
               <a:rPr lang="hu-HU" smtClean="0"/>
-              <a:t>2026. 03. 04.</a:t>
+              <a:t>2026. 03. 06.</a:t>
             </a:fld>
             <a:endParaRPr lang="hu-HU"/>
           </a:p>
@@ -4055,7 +4055,7 @@
           <a:p>
             <a:fld id="{D31F9038-47AD-43A3-BBBF-D66692911134}" type="datetimeFigureOut">
               <a:rPr lang="hu-HU" smtClean="0"/>
-              <a:t>2026. 03. 04.</a:t>
+              <a:t>2026. 03. 06.</a:t>
             </a:fld>
             <a:endParaRPr lang="hu-HU"/>
           </a:p>
@@ -4343,7 +4343,7 @@
           <a:p>
             <a:fld id="{D31F9038-47AD-43A3-BBBF-D66692911134}" type="datetimeFigureOut">
               <a:rPr lang="hu-HU" smtClean="0"/>
-              <a:t>2026. 03. 04.</a:t>
+              <a:t>2026. 03. 06.</a:t>
             </a:fld>
             <a:endParaRPr lang="hu-HU"/>
           </a:p>
@@ -4584,7 +4584,7 @@
           <a:p>
             <a:fld id="{D31F9038-47AD-43A3-BBBF-D66692911134}" type="datetimeFigureOut">
               <a:rPr lang="hu-HU" smtClean="0"/>
-              <a:t>2026. 03. 04.</a:t>
+              <a:t>2026. 03. 06.</a:t>
             </a:fld>
             <a:endParaRPr lang="hu-HU"/>
           </a:p>
@@ -8340,8 +8340,8 @@
         </p:blipFill>
         <p:spPr bwMode="auto">
           <a:xfrm>
-            <a:off x="2082216" y="4030143"/>
-            <a:ext cx="1648326" cy="1494482"/>
+            <a:off x="3539214" y="3948250"/>
+            <a:ext cx="1589822" cy="1441438"/>
           </a:xfrm>
           <a:prstGeom prst="rect">
             <a:avLst/>

--- a/Dokumentáció/StockMaster_Prezentacio.pptx
+++ b/Dokumentáció/StockMaster_Prezentacio.pptx
@@ -5,7 +5,7 @@
     <p:sldMasterId id="2147483648" r:id="rId1"/>
   </p:sldMasterIdLst>
   <p:notesMasterIdLst>
-    <p:notesMasterId r:id="rId16"/>
+    <p:notesMasterId r:id="rId17"/>
   </p:notesMasterIdLst>
   <p:sldIdLst>
     <p:sldId id="256" r:id="rId2"/>
@@ -15,13 +15,14 @@
     <p:sldId id="260" r:id="rId6"/>
     <p:sldId id="269" r:id="rId7"/>
     <p:sldId id="264" r:id="rId8"/>
-    <p:sldId id="263" r:id="rId9"/>
-    <p:sldId id="272" r:id="rId10"/>
+    <p:sldId id="272" r:id="rId9"/>
+    <p:sldId id="263" r:id="rId10"/>
     <p:sldId id="273" r:id="rId11"/>
     <p:sldId id="267" r:id="rId12"/>
     <p:sldId id="270" r:id="rId13"/>
     <p:sldId id="268" r:id="rId14"/>
     <p:sldId id="271" r:id="rId15"/>
+    <p:sldId id="274" r:id="rId16"/>
   </p:sldIdLst>
   <p:sldSz cx="12192000" cy="6858000"/>
   <p:notesSz cx="6858000" cy="9144000"/>
@@ -210,7 +211,7 @@
           <a:p>
             <a:fld id="{DBB7823A-862C-422A-A575-936A9871EC5A}" type="datetimeFigureOut">
               <a:rPr lang="hu-HU" smtClean="0"/>
-              <a:t>2026. 03. 06.</a:t>
+              <a:t>2026. 04. 14.</a:t>
             </a:fld>
             <a:endParaRPr lang="hu-HU"/>
           </a:p>
@@ -618,6 +619,294 @@
           <a:p>
             <a:r>
               <a:rPr lang="hu-HU" dirty="0"/>
+              <a:t>A backend tesztelés biztosítja, hogy az alkalmazás üzleti logikája, API végpontjai és adatkezelése hibamentesen működjenek.</a:t>
+            </a:r>
+            <a:br>
+              <a:rPr lang="hu-HU" dirty="0"/>
+            </a:br>
+            <a:r>
+              <a:rPr lang="hu-HU" dirty="0"/>
+              <a:t>A képen egy automatizált tesztfuttatás látható, ahol különböző API funkciók kerülnek ellenőrzésre (pl. validációk, limit kezelések, hibakezelés).</a:t>
+            </a:r>
+          </a:p>
+          <a:p>
+            <a:r>
+              <a:rPr lang="hu-HU" dirty="0"/>
+              <a:t>A sikeres tesztek (PASS) azt jelzik, hogy a rendszer stabil, és a különböző </a:t>
+            </a:r>
+            <a:r>
+              <a:rPr lang="hu-HU" dirty="0" err="1"/>
+              <a:t>edge</a:t>
+            </a:r>
+            <a:r>
+              <a:rPr lang="hu-HU" dirty="0"/>
+              <a:t> </a:t>
+            </a:r>
+            <a:r>
+              <a:rPr lang="hu-HU" dirty="0" err="1"/>
+              <a:t>case-eket</a:t>
+            </a:r>
+            <a:r>
+              <a:rPr lang="hu-HU" dirty="0"/>
+              <a:t> is megfelelően kezeli. Az automatizált tesztelés kulcsfontosságú a megbízható és skálázható backend fejlesztéshez.</a:t>
+            </a:r>
+          </a:p>
+          <a:p>
+            <a:endParaRPr lang="hu-HU" dirty="0"/>
+          </a:p>
+        </p:txBody>
+      </p:sp>
+      <p:sp>
+        <p:nvSpPr>
+          <p:cNvPr id="4" name="Dia számának helye 3"/>
+          <p:cNvSpPr>
+            <a:spLocks noGrp="1"/>
+          </p:cNvSpPr>
+          <p:nvPr>
+            <p:ph type="sldNum" sz="quarter" idx="5"/>
+          </p:nvPr>
+        </p:nvSpPr>
+        <p:spPr/>
+        <p:txBody>
+          <a:bodyPr/>
+          <a:lstStyle/>
+          <a:p>
+            <a:fld id="{7A8BB5B3-9749-486C-A43B-73D16959CA08}" type="slidenum">
+              <a:rPr lang="hu-HU" smtClean="0"/>
+              <a:t>10</a:t>
+            </a:fld>
+            <a:endParaRPr lang="hu-HU"/>
+          </a:p>
+        </p:txBody>
+      </p:sp>
+    </p:spTree>
+    <p:extLst>
+      <p:ext uri="{BB962C8B-B14F-4D97-AF65-F5344CB8AC3E}">
+        <p14:creationId xmlns:p14="http://schemas.microsoft.com/office/powerpoint/2010/main" val="2923390516"/>
+      </p:ext>
+    </p:extLst>
+  </p:cSld>
+  <p:clrMapOvr>
+    <a:masterClrMapping/>
+  </p:clrMapOvr>
+</p:notes>
+</file>
+
+<file path=ppt/notesSlides/notesSlide11.xml><?xml version="1.0" encoding="utf-8"?>
+<p:notes xmlns:a="http://schemas.openxmlformats.org/drawingml/2006/main" xmlns:r="http://schemas.openxmlformats.org/officeDocument/2006/relationships" xmlns:p="http://schemas.openxmlformats.org/presentationml/2006/main">
+  <p:cSld>
+    <p:spTree>
+      <p:nvGrpSpPr>
+        <p:cNvPr id="1" name=""/>
+        <p:cNvGrpSpPr/>
+        <p:nvPr/>
+      </p:nvGrpSpPr>
+      <p:grpSpPr>
+        <a:xfrm>
+          <a:off x="0" y="0"/>
+          <a:ext cx="0" cy="0"/>
+          <a:chOff x="0" y="0"/>
+          <a:chExt cx="0" cy="0"/>
+        </a:xfrm>
+      </p:grpSpPr>
+      <p:sp>
+        <p:nvSpPr>
+          <p:cNvPr id="2" name="Diakép helye 1"/>
+          <p:cNvSpPr>
+            <a:spLocks noGrp="1" noRot="1" noChangeAspect="1"/>
+          </p:cNvSpPr>
+          <p:nvPr>
+            <p:ph type="sldImg"/>
+          </p:nvPr>
+        </p:nvSpPr>
+        <p:spPr/>
+      </p:sp>
+      <p:sp>
+        <p:nvSpPr>
+          <p:cNvPr id="3" name="Jegyzetek helye 2"/>
+          <p:cNvSpPr>
+            <a:spLocks noGrp="1"/>
+          </p:cNvSpPr>
+          <p:nvPr>
+            <p:ph type="body" idx="1"/>
+          </p:nvPr>
+        </p:nvSpPr>
+        <p:spPr/>
+        <p:txBody>
+          <a:bodyPr/>
+          <a:lstStyle/>
+          <a:p>
+            <a:r>
+              <a:rPr lang="hu-HU" dirty="0"/>
+              <a:t>Miben más, mint a többi? A legtöbb </a:t>
+            </a:r>
+            <a:r>
+              <a:rPr lang="hu-HU" dirty="0" err="1"/>
+              <a:t>platformrögtön</a:t>
+            </a:r>
+            <a:r>
+              <a:rPr lang="hu-HU" dirty="0"/>
+              <a:t> mélyvízbe dob a grafikonokkal, ahol a kezdő felhasználó csak találgat. A StockMaster ezzel szemben egy zárt ökoszisztémát alkot.</a:t>
+            </a:r>
+          </a:p>
+          <a:p>
+            <a:r>
+              <a:rPr lang="hu-HU" b="1" dirty="0"/>
+              <a:t>Először is</a:t>
+            </a:r>
+            <a:r>
+              <a:rPr lang="hu-HU" dirty="0"/>
+              <a:t>, nálunk az oktatóanyagok (</a:t>
+            </a:r>
+            <a:r>
+              <a:rPr lang="hu-HU" dirty="0" err="1"/>
+              <a:t>Tutorials</a:t>
+            </a:r>
+            <a:r>
+              <a:rPr lang="hu-HU" dirty="0"/>
+              <a:t>) közvetlenül össze vannak kötve a gyakorlattal. A felhasználó elolvassa a stratégiát, és egy kattintással már tesztelheti is a szimulátorban. </a:t>
+            </a:r>
+            <a:r>
+              <a:rPr lang="hu-HU" b="1" dirty="0"/>
+              <a:t>Másodszor</a:t>
+            </a:r>
+            <a:r>
+              <a:rPr lang="hu-HU" dirty="0"/>
+              <a:t>, a programunk kiemelkedik az analitika terén. Míg más szoftvereknél neked kell vezetned a kereskedési naplót, a mi backendünk minden zárás után azonnal </a:t>
+            </a:r>
+            <a:r>
+              <a:rPr lang="hu-HU" dirty="0" err="1"/>
+              <a:t>újraszámolja</a:t>
+            </a:r>
+            <a:r>
+              <a:rPr lang="hu-HU" dirty="0"/>
+              <a:t> a statisztikákat. Pontosan látod a győzelmi arányodat (</a:t>
+            </a:r>
+            <a:r>
+              <a:rPr lang="hu-HU" dirty="0" err="1"/>
+              <a:t>WinRate</a:t>
+            </a:r>
+            <a:r>
+              <a:rPr lang="hu-HU" dirty="0"/>
+              <a:t>) és azt, hogy melyik eszközzel vagy a leghatékonyabb. Ezt a </a:t>
+            </a:r>
+            <a:r>
+              <a:rPr lang="hu-HU" dirty="0" err="1"/>
+              <a:t>UserStats</a:t>
+            </a:r>
+            <a:r>
+              <a:rPr lang="hu-HU" dirty="0"/>
+              <a:t> táblánk automatizáltan végzi.</a:t>
+            </a:r>
+          </a:p>
+          <a:p>
+            <a:r>
+              <a:rPr lang="hu-HU" b="1" dirty="0"/>
+              <a:t>Harmadszor</a:t>
+            </a:r>
+            <a:r>
+              <a:rPr lang="hu-HU" dirty="0"/>
+              <a:t>, a stabilitás. A projekt során nem csak összedobtuk a kódot, hanem a Robot Framework és </a:t>
+            </a:r>
+            <a:r>
+              <a:rPr lang="hu-HU" dirty="0" err="1"/>
+              <a:t>Selenium</a:t>
+            </a:r>
+            <a:r>
+              <a:rPr lang="hu-HU" dirty="0"/>
+              <a:t> segítségével ipari sztenderdek szerint teszteltük a frontendet, biztosítva a hibátlan felhasználói utat.</a:t>
+            </a:r>
+          </a:p>
+          <a:p>
+            <a:endParaRPr lang="hu-HU" dirty="0"/>
+          </a:p>
+          <a:p>
+            <a:endParaRPr lang="hu-HU" dirty="0"/>
+          </a:p>
+        </p:txBody>
+      </p:sp>
+      <p:sp>
+        <p:nvSpPr>
+          <p:cNvPr id="4" name="Dia számának helye 3"/>
+          <p:cNvSpPr>
+            <a:spLocks noGrp="1"/>
+          </p:cNvSpPr>
+          <p:nvPr>
+            <p:ph type="sldNum" sz="quarter" idx="5"/>
+          </p:nvPr>
+        </p:nvSpPr>
+        <p:spPr/>
+        <p:txBody>
+          <a:bodyPr/>
+          <a:lstStyle/>
+          <a:p>
+            <a:fld id="{7A8BB5B3-9749-486C-A43B-73D16959CA08}" type="slidenum">
+              <a:rPr lang="hu-HU" smtClean="0"/>
+              <a:t>12</a:t>
+            </a:fld>
+            <a:endParaRPr lang="hu-HU"/>
+          </a:p>
+        </p:txBody>
+      </p:sp>
+    </p:spTree>
+    <p:extLst>
+      <p:ext uri="{BB962C8B-B14F-4D97-AF65-F5344CB8AC3E}">
+        <p14:creationId xmlns:p14="http://schemas.microsoft.com/office/powerpoint/2010/main" val="1913783901"/>
+      </p:ext>
+    </p:extLst>
+  </p:cSld>
+  <p:clrMapOvr>
+    <a:masterClrMapping/>
+  </p:clrMapOvr>
+</p:notes>
+</file>
+
+<file path=ppt/notesSlides/notesSlide12.xml><?xml version="1.0" encoding="utf-8"?>
+<p:notes xmlns:a="http://schemas.openxmlformats.org/drawingml/2006/main" xmlns:r="http://schemas.openxmlformats.org/officeDocument/2006/relationships" xmlns:p="http://schemas.openxmlformats.org/presentationml/2006/main">
+  <p:cSld>
+    <p:spTree>
+      <p:nvGrpSpPr>
+        <p:cNvPr id="1" name=""/>
+        <p:cNvGrpSpPr/>
+        <p:nvPr/>
+      </p:nvGrpSpPr>
+      <p:grpSpPr>
+        <a:xfrm>
+          <a:off x="0" y="0"/>
+          <a:ext cx="0" cy="0"/>
+          <a:chOff x="0" y="0"/>
+          <a:chExt cx="0" cy="0"/>
+        </a:xfrm>
+      </p:grpSpPr>
+      <p:sp>
+        <p:nvSpPr>
+          <p:cNvPr id="2" name="Diakép helye 1"/>
+          <p:cNvSpPr>
+            <a:spLocks noGrp="1" noRot="1" noChangeAspect="1"/>
+          </p:cNvSpPr>
+          <p:nvPr>
+            <p:ph type="sldImg"/>
+          </p:nvPr>
+        </p:nvSpPr>
+        <p:spPr/>
+      </p:sp>
+      <p:sp>
+        <p:nvSpPr>
+          <p:cNvPr id="3" name="Jegyzetek helye 2"/>
+          <p:cNvSpPr>
+            <a:spLocks noGrp="1"/>
+          </p:cNvSpPr>
+          <p:nvPr>
+            <p:ph type="body" idx="1"/>
+          </p:nvPr>
+        </p:nvSpPr>
+        <p:spPr/>
+        <p:txBody>
+          <a:bodyPr/>
+          <a:lstStyle/>
+          <a:p>
+            <a:r>
+              <a:rPr lang="hu-HU" dirty="0"/>
               <a:t>Zárásként szeretnénk beszélni arról, hogy merre tovább. </a:t>
             </a:r>
             <a:r>
@@ -1599,7 +1888,7 @@
           <a:p>
             <a:fld id="{7A8BB5B3-9749-486C-A43B-73D16959CA08}" type="slidenum">
               <a:rPr lang="hu-HU" smtClean="0"/>
-              <a:t>9</a:t>
+              <a:t>8</a:t>
             </a:fld>
             <a:endParaRPr lang="hu-HU"/>
           </a:p>
@@ -1664,87 +1953,90 @@
           <a:p>
             <a:r>
               <a:rPr lang="hu-HU" dirty="0"/>
-              <a:t>Miben más, mint a többi? A legtöbb </a:t>
+              <a:t>Ezen a dián a StockMaster technológiai hátterét, vagyis a projektünk 'motorháztető alatti' részét mutatjuk be. A szoftver fejlesztése során a klasszikus és megbízható webes technológiák kombinációját választottuk, hogy egy stabil, mégis gyors platformot kapjunk.</a:t>
+            </a:r>
+          </a:p>
+          <a:p>
+            <a:r>
+              <a:rPr lang="hu-HU" dirty="0"/>
+              <a:t>A </a:t>
+            </a:r>
+            <a:r>
+              <a:rPr lang="hu-HU" b="1" dirty="0"/>
+              <a:t>Frontend</a:t>
+            </a:r>
+            <a:r>
+              <a:rPr lang="hu-HU" dirty="0"/>
+              <a:t> réteg alapjait a </a:t>
+            </a:r>
+            <a:r>
+              <a:rPr lang="hu-HU" b="1" dirty="0"/>
+              <a:t>HTML5 és a CSS3</a:t>
+            </a:r>
+            <a:r>
+              <a:rPr lang="hu-HU" dirty="0"/>
+              <a:t> adja, ami biztosítja a letisztult megjelenést és a </a:t>
             </a:r>
             <a:r>
               <a:rPr lang="hu-HU" dirty="0" err="1"/>
-              <a:t>platformrögtön</a:t>
+              <a:t>reszponzivitást</a:t>
             </a:r>
             <a:r>
               <a:rPr lang="hu-HU" dirty="0"/>
-              <a:t> mélyvízbe dob a grafikonokkal, ahol a kezdő felhasználó csak találgat. A StockMaster ezzel szemben egy zárt ökoszisztémát alkot.</a:t>
-            </a:r>
-          </a:p>
-          <a:p>
+              <a:t>. A </a:t>
+            </a:r>
             <a:r>
               <a:rPr lang="hu-HU" b="1" dirty="0"/>
-              <a:t>Először is</a:t>
+              <a:t>JavaScript</a:t>
             </a:r>
             <a:r>
               <a:rPr lang="hu-HU" dirty="0"/>
-              <a:t>, nálunk az oktatóanyagok (</a:t>
+              <a:t> kulcsszerepet játszik nálunk: ez teszi lehetővé, hogy a gyertya-diagramok és az árfolyamok az oldal </a:t>
             </a:r>
             <a:r>
               <a:rPr lang="hu-HU" dirty="0" err="1"/>
-              <a:t>Tutorials</a:t>
+              <a:t>újratöltése</a:t>
             </a:r>
             <a:r>
               <a:rPr lang="hu-HU" dirty="0"/>
-              <a:t>) közvetlenül össze vannak kötve a gyakorlattal. A felhasználó elolvassa a stratégiát, és egy kattintással már tesztelheti is a szimulátorban. </a:t>
+              <a:t> nélkül, dinamikusan frissüljenek, valódi tőzsdei élményt nyújtva.</a:t>
+            </a:r>
+          </a:p>
+          <a:p>
+            <a:r>
+              <a:rPr lang="hu-HU" dirty="0"/>
+              <a:t>A </a:t>
             </a:r>
             <a:r>
               <a:rPr lang="hu-HU" b="1" dirty="0"/>
-              <a:t>Másodszor</a:t>
+              <a:t>Backend</a:t>
             </a:r>
             <a:r>
               <a:rPr lang="hu-HU" dirty="0"/>
-              <a:t>, a programunk kiemelkedik az analitika terén. Míg más szoftvereknél neked kell vezetned a kereskedési naplót, a mi backendünk minden zárás után azonnal </a:t>
-            </a:r>
-            <a:r>
-              <a:rPr lang="hu-HU" dirty="0" err="1"/>
-              <a:t>újraszámolja</a:t>
+              <a:t>, tehát a szoftver agya, </a:t>
+            </a:r>
+            <a:r>
+              <a:rPr lang="hu-HU" b="1" dirty="0"/>
+              <a:t>PHP</a:t>
             </a:r>
             <a:r>
               <a:rPr lang="hu-HU" dirty="0"/>
-              <a:t> a statisztikákat. Pontosan látod a győzelmi arányodat (</a:t>
-            </a:r>
-            <a:r>
-              <a:rPr lang="hu-HU" dirty="0" err="1"/>
-              <a:t>WinRate</a:t>
-            </a:r>
+              <a:t> nyelven készült. Ez a réteg felel a kritikus üzleti logikáért: itt futnak le a vétel-eladási algoritmusok, itt történik a fedezetellenőrzés, és ez a modul számolja ki a profitot vagy veszteséget minden zárás után.</a:t>
+            </a:r>
+          </a:p>
+          <a:p>
             <a:r>
               <a:rPr lang="hu-HU" dirty="0"/>
-              <a:t>) és azt, hogy melyik eszközzel vagy a leghatékonyabb. Ezt a </a:t>
-            </a:r>
-            <a:r>
-              <a:rPr lang="hu-HU" dirty="0" err="1"/>
-              <a:t>UserStats</a:t>
+              <a:t>Az adatok tárolására </a:t>
+            </a:r>
+            <a:r>
+              <a:rPr lang="hu-HU" b="1" dirty="0" err="1"/>
+              <a:t>MySQL</a:t>
             </a:r>
             <a:r>
               <a:rPr lang="hu-HU" dirty="0"/>
-              <a:t> táblánk automatizáltan végzi.</a:t>
-            </a:r>
-          </a:p>
-          <a:p>
-            <a:r>
-              <a:rPr lang="hu-HU" b="1" dirty="0"/>
-              <a:t>Harmadszor</a:t>
-            </a:r>
-            <a:r>
-              <a:rPr lang="hu-HU" dirty="0"/>
-              <a:t>, a stabilitás. A projekt során nem csak összedobtuk a kódot, hanem a Robot Framework és </a:t>
-            </a:r>
-            <a:r>
-              <a:rPr lang="hu-HU" dirty="0" err="1"/>
-              <a:t>Selenium</a:t>
-            </a:r>
-            <a:r>
-              <a:rPr lang="hu-HU" dirty="0"/>
-              <a:t> segítségével ipari sztenderdek szerint teszteltük a frontendet, biztosítva a hibátlan felhasználói utat.</a:t>
-            </a:r>
-          </a:p>
-          <a:p>
-            <a:endParaRPr lang="hu-HU" dirty="0"/>
+              <a:t> relációs adatbázist használunk. Ahogy az adatszerkezeti dokumentációnkban is látható, a rendszerünk normalizált táblákban tárolja a felhasználói profilokat, a kereskedési naplókat és a fejlődési statisztikákat. Ez az összeállítás garantálja, hogy a StockMaster egyszerre legyen biztonságos és villámgyors a lekérdezések során.</a:t>
+            </a:r>
           </a:p>
           <a:p>
             <a:endParaRPr lang="hu-HU" dirty="0"/>
@@ -1768,7 +2060,7 @@
           <a:p>
             <a:fld id="{7A8BB5B3-9749-486C-A43B-73D16959CA08}" type="slidenum">
               <a:rPr lang="hu-HU" smtClean="0"/>
-              <a:t>12</a:t>
+              <a:t>9</a:t>
             </a:fld>
             <a:endParaRPr lang="hu-HU"/>
           </a:p>
@@ -1777,7 +2069,7 @@
     </p:spTree>
     <p:extLst>
       <p:ext uri="{BB962C8B-B14F-4D97-AF65-F5344CB8AC3E}">
-        <p14:creationId xmlns:p14="http://schemas.microsoft.com/office/powerpoint/2010/main" val="1913783901"/>
+        <p14:creationId xmlns:p14="http://schemas.microsoft.com/office/powerpoint/2010/main" val="2805143975"/>
       </p:ext>
     </p:extLst>
   </p:cSld>
@@ -1934,7 +2226,7 @@
           <a:p>
             <a:fld id="{D31F9038-47AD-43A3-BBBF-D66692911134}" type="datetimeFigureOut">
               <a:rPr lang="hu-HU" smtClean="0"/>
-              <a:t>2026. 03. 06.</a:t>
+              <a:t>2026. 04. 14.</a:t>
             </a:fld>
             <a:endParaRPr lang="hu-HU"/>
           </a:p>
@@ -2132,7 +2424,7 @@
           <a:p>
             <a:fld id="{D31F9038-47AD-43A3-BBBF-D66692911134}" type="datetimeFigureOut">
               <a:rPr lang="hu-HU" smtClean="0"/>
-              <a:t>2026. 03. 06.</a:t>
+              <a:t>2026. 04. 14.</a:t>
             </a:fld>
             <a:endParaRPr lang="hu-HU"/>
           </a:p>
@@ -2340,7 +2632,7 @@
           <a:p>
             <a:fld id="{D31F9038-47AD-43A3-BBBF-D66692911134}" type="datetimeFigureOut">
               <a:rPr lang="hu-HU" smtClean="0"/>
-              <a:t>2026. 03. 06.</a:t>
+              <a:t>2026. 04. 14.</a:t>
             </a:fld>
             <a:endParaRPr lang="hu-HU"/>
           </a:p>
@@ -2538,7 +2830,7 @@
           <a:p>
             <a:fld id="{D31F9038-47AD-43A3-BBBF-D66692911134}" type="datetimeFigureOut">
               <a:rPr lang="hu-HU" smtClean="0"/>
-              <a:t>2026. 03. 06.</a:t>
+              <a:t>2026. 04. 14.</a:t>
             </a:fld>
             <a:endParaRPr lang="hu-HU"/>
           </a:p>
@@ -2813,7 +3105,7 @@
           <a:p>
             <a:fld id="{D31F9038-47AD-43A3-BBBF-D66692911134}" type="datetimeFigureOut">
               <a:rPr lang="hu-HU" smtClean="0"/>
-              <a:t>2026. 03. 06.</a:t>
+              <a:t>2026. 04. 14.</a:t>
             </a:fld>
             <a:endParaRPr lang="hu-HU"/>
           </a:p>
@@ -3078,7 +3370,7 @@
           <a:p>
             <a:fld id="{D31F9038-47AD-43A3-BBBF-D66692911134}" type="datetimeFigureOut">
               <a:rPr lang="hu-HU" smtClean="0"/>
-              <a:t>2026. 03. 06.</a:t>
+              <a:t>2026. 04. 14.</a:t>
             </a:fld>
             <a:endParaRPr lang="hu-HU"/>
           </a:p>
@@ -3490,7 +3782,7 @@
           <a:p>
             <a:fld id="{D31F9038-47AD-43A3-BBBF-D66692911134}" type="datetimeFigureOut">
               <a:rPr lang="hu-HU" smtClean="0"/>
-              <a:t>2026. 03. 06.</a:t>
+              <a:t>2026. 04. 14.</a:t>
             </a:fld>
             <a:endParaRPr lang="hu-HU"/>
           </a:p>
@@ -3631,7 +3923,7 @@
           <a:p>
             <a:fld id="{D31F9038-47AD-43A3-BBBF-D66692911134}" type="datetimeFigureOut">
               <a:rPr lang="hu-HU" smtClean="0"/>
-              <a:t>2026. 03. 06.</a:t>
+              <a:t>2026. 04. 14.</a:t>
             </a:fld>
             <a:endParaRPr lang="hu-HU"/>
           </a:p>
@@ -3744,7 +4036,7 @@
           <a:p>
             <a:fld id="{D31F9038-47AD-43A3-BBBF-D66692911134}" type="datetimeFigureOut">
               <a:rPr lang="hu-HU" smtClean="0"/>
-              <a:t>2026. 03. 06.</a:t>
+              <a:t>2026. 04. 14.</a:t>
             </a:fld>
             <a:endParaRPr lang="hu-HU"/>
           </a:p>
@@ -4055,7 +4347,7 @@
           <a:p>
             <a:fld id="{D31F9038-47AD-43A3-BBBF-D66692911134}" type="datetimeFigureOut">
               <a:rPr lang="hu-HU" smtClean="0"/>
-              <a:t>2026. 03. 06.</a:t>
+              <a:t>2026. 04. 14.</a:t>
             </a:fld>
             <a:endParaRPr lang="hu-HU"/>
           </a:p>
@@ -4343,7 +4635,7 @@
           <a:p>
             <a:fld id="{D31F9038-47AD-43A3-BBBF-D66692911134}" type="datetimeFigureOut">
               <a:rPr lang="hu-HU" smtClean="0"/>
-              <a:t>2026. 03. 06.</a:t>
+              <a:t>2026. 04. 14.</a:t>
             </a:fld>
             <a:endParaRPr lang="hu-HU"/>
           </a:p>
@@ -4584,7 +4876,7 @@
           <a:p>
             <a:fld id="{D31F9038-47AD-43A3-BBBF-D66692911134}" type="datetimeFigureOut">
               <a:rPr lang="hu-HU" smtClean="0"/>
-              <a:t>2026. 03. 06.</a:t>
+              <a:t>2026. 04. 14.</a:t>
             </a:fld>
             <a:endParaRPr lang="hu-HU"/>
           </a:p>
@@ -5053,7 +5345,12 @@
             <p:ph type="ctrTitle"/>
           </p:nvPr>
         </p:nvSpPr>
-        <p:spPr/>
+        <p:spPr>
+          <a:xfrm>
+            <a:off x="1524000" y="-45583"/>
+            <a:ext cx="9144000" cy="2387600"/>
+          </a:xfrm>
+        </p:spPr>
         <p:txBody>
           <a:bodyPr/>
           <a:lstStyle/>
@@ -5095,13 +5392,18 @@
             <p:ph type="subTitle" idx="1"/>
           </p:nvPr>
         </p:nvSpPr>
-        <p:spPr/>
+        <p:spPr>
+          <a:xfrm>
+            <a:off x="1524000" y="2341809"/>
+            <a:ext cx="9144000" cy="494832"/>
+          </a:xfrm>
+        </p:spPr>
         <p:txBody>
           <a:bodyPr/>
           <a:lstStyle/>
           <a:p>
             <a:r>
-              <a:rPr lang="hu-HU" b="1" dirty="0" err="1">
+              <a:rPr lang="hu-HU" b="1" i="1" dirty="0" err="1">
                 <a:solidFill>
                   <a:schemeClr val="bg1"/>
                 </a:solidFill>
@@ -5112,7 +5414,7 @@
               <a:t>Invest</a:t>
             </a:r>
             <a:r>
-              <a:rPr lang="hu-HU" b="1" dirty="0">
+              <a:rPr lang="hu-HU" b="1" i="1" dirty="0">
                 <a:solidFill>
                   <a:schemeClr val="bg1"/>
                 </a:solidFill>
@@ -5123,7 +5425,7 @@
               <a:t> In </a:t>
             </a:r>
             <a:r>
-              <a:rPr lang="hu-HU" b="1" dirty="0" err="1">
+              <a:rPr lang="hu-HU" b="1" i="1" dirty="0" err="1">
                 <a:solidFill>
                   <a:schemeClr val="bg1"/>
                 </a:solidFill>
@@ -5133,7 +5435,7 @@
               </a:rPr>
               <a:t>Skill</a:t>
             </a:r>
-            <a:endParaRPr lang="hu-HU" dirty="0">
+            <a:endParaRPr lang="hu-HU" i="1" dirty="0">
               <a:solidFill>
                 <a:schemeClr val="bg1"/>
               </a:solidFill>
@@ -5157,8 +5459,8 @@
         </p:nvSpPr>
         <p:spPr>
           <a:xfrm>
-            <a:off x="8610599" y="6540500"/>
-            <a:ext cx="3581401" cy="369332"/>
+            <a:off x="5776167" y="4349425"/>
+            <a:ext cx="1044389" cy="369332"/>
           </a:xfrm>
           <a:prstGeom prst="rect">
             <a:avLst/>
@@ -5179,7 +5481,7 @@
                 <a:latin typeface="Times New Roman" panose="02020603050405020304" pitchFamily="18" charset="0"/>
                 <a:cs typeface="Times New Roman" panose="02020603050405020304" pitchFamily="18" charset="0"/>
               </a:rPr>
-              <a:t>Készítők: Csáki Balázs, Zsígó Róbert</a:t>
+              <a:t>Készítők:</a:t>
             </a:r>
           </a:p>
         </p:txBody>
@@ -5212,7 +5514,7 @@
         </p:blipFill>
         <p:spPr>
           <a:xfrm>
-            <a:off x="0" y="5812553"/>
+            <a:off x="5776167" y="5812553"/>
             <a:ext cx="1045447" cy="1045447"/>
           </a:xfrm>
           <a:prstGeom prst="rect">
@@ -5220,6 +5522,160 @@
           </a:prstGeom>
         </p:spPr>
       </p:pic>
+      <p:pic>
+        <p:nvPicPr>
+          <p:cNvPr id="8" name="Kép 7">
+            <a:extLst>
+              <a:ext uri="{FF2B5EF4-FFF2-40B4-BE49-F238E27FC236}">
+                <a16:creationId xmlns:a16="http://schemas.microsoft.com/office/drawing/2014/main" id="{9334BAC2-4FA1-415F-8C03-674269CFCEF5}"/>
+              </a:ext>
+            </a:extLst>
+          </p:cNvPr>
+          <p:cNvPicPr>
+            <a:picLocks noChangeAspect="1"/>
+          </p:cNvPicPr>
+          <p:nvPr/>
+        </p:nvPicPr>
+        <p:blipFill>
+          <a:blip r:embed="rId5">
+            <a:extLst>
+              <a:ext uri="{28A0092B-C50C-407E-A947-70E740481C1C}">
+                <a14:useLocalDpi xmlns:a14="http://schemas.microsoft.com/office/drawing/2010/main" val="0"/>
+              </a:ext>
+            </a:extLst>
+          </a:blip>
+          <a:stretch>
+            <a:fillRect/>
+          </a:stretch>
+        </p:blipFill>
+        <p:spPr>
+          <a:xfrm>
+            <a:off x="9784723" y="1791665"/>
+            <a:ext cx="1766553" cy="2616743"/>
+          </a:xfrm>
+          <a:prstGeom prst="rect">
+            <a:avLst/>
+          </a:prstGeom>
+        </p:spPr>
+      </p:pic>
+      <p:pic>
+        <p:nvPicPr>
+          <p:cNvPr id="10" name="Kép 9">
+            <a:extLst>
+              <a:ext uri="{FF2B5EF4-FFF2-40B4-BE49-F238E27FC236}">
+                <a16:creationId xmlns:a16="http://schemas.microsoft.com/office/drawing/2014/main" id="{BBFDB473-7389-4BDD-8FF4-17D43F747491}"/>
+              </a:ext>
+            </a:extLst>
+          </p:cNvPr>
+          <p:cNvPicPr>
+            <a:picLocks noChangeAspect="1"/>
+          </p:cNvPicPr>
+          <p:nvPr/>
+        </p:nvPicPr>
+        <p:blipFill>
+          <a:blip r:embed="rId6">
+            <a:extLst>
+              <a:ext uri="{28A0092B-C50C-407E-A947-70E740481C1C}">
+                <a14:useLocalDpi xmlns:a14="http://schemas.microsoft.com/office/drawing/2010/main" val="0"/>
+              </a:ext>
+            </a:extLst>
+          </a:blip>
+          <a:stretch>
+            <a:fillRect/>
+          </a:stretch>
+        </p:blipFill>
+        <p:spPr>
+          <a:xfrm>
+            <a:off x="1045447" y="1791665"/>
+            <a:ext cx="1766553" cy="2616743"/>
+          </a:xfrm>
+          <a:prstGeom prst="rect">
+            <a:avLst/>
+          </a:prstGeom>
+        </p:spPr>
+      </p:pic>
+      <p:sp>
+        <p:nvSpPr>
+          <p:cNvPr id="11" name="Szövegdoboz 10">
+            <a:extLst>
+              <a:ext uri="{FF2B5EF4-FFF2-40B4-BE49-F238E27FC236}">
+                <a16:creationId xmlns:a16="http://schemas.microsoft.com/office/drawing/2014/main" id="{B353ED62-C537-4F88-A943-113BB8ACB2EE}"/>
+              </a:ext>
+            </a:extLst>
+          </p:cNvPr>
+          <p:cNvSpPr txBox="1"/>
+          <p:nvPr/>
+        </p:nvSpPr>
+        <p:spPr>
+          <a:xfrm>
+            <a:off x="1365810" y="4408408"/>
+            <a:ext cx="1287744" cy="338554"/>
+          </a:xfrm>
+          <a:prstGeom prst="rect">
+            <a:avLst/>
+          </a:prstGeom>
+          <a:noFill/>
+        </p:spPr>
+        <p:txBody>
+          <a:bodyPr wrap="square" rtlCol="0">
+            <a:spAutoFit/>
+          </a:bodyPr>
+          <a:lstStyle/>
+          <a:p>
+            <a:r>
+              <a:rPr lang="hu-HU" sz="1600" i="1" dirty="0">
+                <a:solidFill>
+                  <a:schemeClr val="bg1"/>
+                </a:solidFill>
+                <a:latin typeface="Times New Roman" panose="02020603050405020304" pitchFamily="18" charset="0"/>
+                <a:cs typeface="Times New Roman" panose="02020603050405020304" pitchFamily="18" charset="0"/>
+              </a:rPr>
+              <a:t>Csáki Balázs</a:t>
+            </a:r>
+          </a:p>
+        </p:txBody>
+      </p:sp>
+      <p:sp>
+        <p:nvSpPr>
+          <p:cNvPr id="12" name="Szövegdoboz 11">
+            <a:extLst>
+              <a:ext uri="{FF2B5EF4-FFF2-40B4-BE49-F238E27FC236}">
+                <a16:creationId xmlns:a16="http://schemas.microsoft.com/office/drawing/2014/main" id="{97DBFB24-75DB-44A0-AB4B-FF40CF25AC0F}"/>
+              </a:ext>
+            </a:extLst>
+          </p:cNvPr>
+          <p:cNvSpPr txBox="1"/>
+          <p:nvPr/>
+        </p:nvSpPr>
+        <p:spPr>
+          <a:xfrm>
+            <a:off x="9784723" y="4408408"/>
+            <a:ext cx="1842500" cy="338554"/>
+          </a:xfrm>
+          <a:prstGeom prst="rect">
+            <a:avLst/>
+          </a:prstGeom>
+          <a:noFill/>
+        </p:spPr>
+        <p:txBody>
+          <a:bodyPr wrap="square" rtlCol="0">
+            <a:spAutoFit/>
+          </a:bodyPr>
+          <a:lstStyle/>
+          <a:p>
+            <a:r>
+              <a:rPr lang="hu-HU" sz="1600" i="1" dirty="0">
+                <a:solidFill>
+                  <a:schemeClr val="bg1"/>
+                </a:solidFill>
+                <a:latin typeface="Times New Roman" panose="02020603050405020304" pitchFamily="18" charset="0"/>
+                <a:cs typeface="Times New Roman" panose="02020603050405020304" pitchFamily="18" charset="0"/>
+              </a:rPr>
+              <a:t>Zsígó Róbert József</a:t>
+            </a:r>
+          </a:p>
+        </p:txBody>
+      </p:sp>
     </p:spTree>
     <p:extLst>
       <p:ext uri="{BB962C8B-B14F-4D97-AF65-F5344CB8AC3E}">
@@ -5230,6 +5686,18 @@
   <p:clrMapOvr>
     <a:masterClrMapping/>
   </p:clrMapOvr>
+  <mc:AlternateContent xmlns:mc="http://schemas.openxmlformats.org/markup-compatibility/2006">
+    <mc:Choice xmlns:p14="http://schemas.microsoft.com/office/powerpoint/2010/main" Requires="p14">
+      <p:transition spd="med" p14:dur="700">
+        <p:fade/>
+      </p:transition>
+    </mc:Choice>
+    <mc:Fallback>
+      <p:transition spd="med">
+        <p:fade/>
+      </p:transition>
+    </mc:Fallback>
+  </mc:AlternateContent>
 </p:sld>
 </file>
 
@@ -5265,7 +5733,7 @@
           <p:nvPr/>
         </p:nvPicPr>
         <p:blipFill>
-          <a:blip r:embed="rId2">
+          <a:blip r:embed="rId3">
             <a:extLst>
               <a:ext uri="{28A0092B-C50C-407E-A947-70E740481C1C}">
                 <a14:useLocalDpi xmlns:a14="http://schemas.microsoft.com/office/drawing/2010/main" val="0"/>
@@ -5312,6 +5780,8 @@
                 <a:solidFill>
                   <a:schemeClr val="bg1"/>
                 </a:solidFill>
+                <a:latin typeface="Times New Roman" panose="02020603050405020304" pitchFamily="18" charset="0"/>
+                <a:cs typeface="Times New Roman" panose="02020603050405020304" pitchFamily="18" charset="0"/>
               </a:rPr>
               <a:t>Backend-Tesztelés</a:t>
             </a:r>
@@ -5339,7 +5809,161 @@
           <a:bodyPr/>
           <a:lstStyle/>
           <a:p>
-            <a:endParaRPr lang="hu-HU" dirty="0"/>
+            <a:r>
+              <a:rPr lang="hu-HU" dirty="0">
+                <a:solidFill>
+                  <a:schemeClr val="bg1"/>
+                </a:solidFill>
+                <a:latin typeface="Times New Roman" panose="02020603050405020304" pitchFamily="18" charset="0"/>
+                <a:cs typeface="Times New Roman" panose="02020603050405020304" pitchFamily="18" charset="0"/>
+              </a:rPr>
+              <a:t>Automatizált API tesztek futtatása (</a:t>
+            </a:r>
+            <a:r>
+              <a:rPr lang="hu-HU" dirty="0" err="1">
+                <a:solidFill>
+                  <a:schemeClr val="bg1"/>
+                </a:solidFill>
+                <a:latin typeface="Times New Roman" panose="02020603050405020304" pitchFamily="18" charset="0"/>
+                <a:cs typeface="Times New Roman" panose="02020603050405020304" pitchFamily="18" charset="0"/>
+              </a:rPr>
+              <a:t>Laravel</a:t>
+            </a:r>
+            <a:r>
+              <a:rPr lang="hu-HU" dirty="0">
+                <a:solidFill>
+                  <a:schemeClr val="bg1"/>
+                </a:solidFill>
+                <a:latin typeface="Times New Roman" panose="02020603050405020304" pitchFamily="18" charset="0"/>
+                <a:cs typeface="Times New Roman" panose="02020603050405020304" pitchFamily="18" charset="0"/>
+              </a:rPr>
+              <a:t> </a:t>
+            </a:r>
+            <a:r>
+              <a:rPr lang="hu-HU" dirty="0" err="1">
+                <a:solidFill>
+                  <a:schemeClr val="bg1"/>
+                </a:solidFill>
+                <a:latin typeface="Times New Roman" panose="02020603050405020304" pitchFamily="18" charset="0"/>
+                <a:cs typeface="Times New Roman" panose="02020603050405020304" pitchFamily="18" charset="0"/>
+              </a:rPr>
+              <a:t>Artisan</a:t>
+            </a:r>
+            <a:r>
+              <a:rPr lang="hu-HU" dirty="0">
+                <a:solidFill>
+                  <a:schemeClr val="bg1"/>
+                </a:solidFill>
+                <a:latin typeface="Times New Roman" panose="02020603050405020304" pitchFamily="18" charset="0"/>
+                <a:cs typeface="Times New Roman" panose="02020603050405020304" pitchFamily="18" charset="0"/>
+              </a:rPr>
+              <a:t>)</a:t>
+            </a:r>
+          </a:p>
+          <a:p>
+            <a:r>
+              <a:rPr lang="hu-HU" dirty="0">
+                <a:solidFill>
+                  <a:schemeClr val="bg1"/>
+                </a:solidFill>
+                <a:latin typeface="Times New Roman" panose="02020603050405020304" pitchFamily="18" charset="0"/>
+                <a:cs typeface="Times New Roman" panose="02020603050405020304" pitchFamily="18" charset="0"/>
+              </a:rPr>
+              <a:t>Minden </a:t>
+            </a:r>
+            <a:r>
+              <a:rPr lang="hu-HU" dirty="0" err="1">
+                <a:solidFill>
+                  <a:schemeClr val="bg1"/>
+                </a:solidFill>
+                <a:latin typeface="Times New Roman" panose="02020603050405020304" pitchFamily="18" charset="0"/>
+                <a:cs typeface="Times New Roman" panose="02020603050405020304" pitchFamily="18" charset="0"/>
+              </a:rPr>
+              <a:t>endpoint</a:t>
+            </a:r>
+            <a:r>
+              <a:rPr lang="hu-HU" dirty="0">
+                <a:solidFill>
+                  <a:schemeClr val="bg1"/>
+                </a:solidFill>
+                <a:latin typeface="Times New Roman" panose="02020603050405020304" pitchFamily="18" charset="0"/>
+                <a:cs typeface="Times New Roman" panose="02020603050405020304" pitchFamily="18" charset="0"/>
+              </a:rPr>
+              <a:t> külön </a:t>
+            </a:r>
+            <a:r>
+              <a:rPr lang="hu-HU" dirty="0" err="1">
+                <a:solidFill>
+                  <a:schemeClr val="bg1"/>
+                </a:solidFill>
+                <a:latin typeface="Times New Roman" panose="02020603050405020304" pitchFamily="18" charset="0"/>
+                <a:cs typeface="Times New Roman" panose="02020603050405020304" pitchFamily="18" charset="0"/>
+              </a:rPr>
+              <a:t>validálva</a:t>
+            </a:r>
+            <a:endParaRPr lang="hu-HU" dirty="0">
+              <a:solidFill>
+                <a:schemeClr val="bg1"/>
+              </a:solidFill>
+              <a:latin typeface="Times New Roman" panose="02020603050405020304" pitchFamily="18" charset="0"/>
+              <a:cs typeface="Times New Roman" panose="02020603050405020304" pitchFamily="18" charset="0"/>
+            </a:endParaRPr>
+          </a:p>
+          <a:p>
+            <a:r>
+              <a:rPr lang="hu-HU" dirty="0">
+                <a:solidFill>
+                  <a:schemeClr val="bg1"/>
+                </a:solidFill>
+                <a:latin typeface="Times New Roman" panose="02020603050405020304" pitchFamily="18" charset="0"/>
+                <a:cs typeface="Times New Roman" panose="02020603050405020304" pitchFamily="18" charset="0"/>
+              </a:rPr>
+              <a:t>Hibakezelés és </a:t>
+            </a:r>
+            <a:r>
+              <a:rPr lang="hu-HU" dirty="0" err="1">
+                <a:solidFill>
+                  <a:schemeClr val="bg1"/>
+                </a:solidFill>
+                <a:latin typeface="Times New Roman" panose="02020603050405020304" pitchFamily="18" charset="0"/>
+                <a:cs typeface="Times New Roman" panose="02020603050405020304" pitchFamily="18" charset="0"/>
+              </a:rPr>
+              <a:t>rate</a:t>
+            </a:r>
+            <a:r>
+              <a:rPr lang="hu-HU" dirty="0">
+                <a:solidFill>
+                  <a:schemeClr val="bg1"/>
+                </a:solidFill>
+                <a:latin typeface="Times New Roman" panose="02020603050405020304" pitchFamily="18" charset="0"/>
+                <a:cs typeface="Times New Roman" panose="02020603050405020304" pitchFamily="18" charset="0"/>
+              </a:rPr>
+              <a:t> limit is tesztelve</a:t>
+            </a:r>
+          </a:p>
+          <a:p>
+            <a:r>
+              <a:rPr lang="hu-HU" dirty="0">
+                <a:solidFill>
+                  <a:schemeClr val="bg1"/>
+                </a:solidFill>
+                <a:latin typeface="Times New Roman" panose="02020603050405020304" pitchFamily="18" charset="0"/>
+                <a:cs typeface="Times New Roman" panose="02020603050405020304" pitchFamily="18" charset="0"/>
+              </a:rPr>
+              <a:t>25 teszt, 129 ellenőrzés → minden sikeres</a:t>
+            </a:r>
+          </a:p>
+          <a:p>
+            <a:r>
+              <a:rPr lang="hu-HU" dirty="0">
+                <a:solidFill>
+                  <a:schemeClr val="bg1"/>
+                </a:solidFill>
+                <a:latin typeface="Times New Roman" panose="02020603050405020304" pitchFamily="18" charset="0"/>
+                <a:cs typeface="Times New Roman" panose="02020603050405020304" pitchFamily="18" charset="0"/>
+              </a:rPr>
+              <a:t>Gyors visszajelzés fejlesztés közben</a:t>
+            </a:r>
           </a:p>
         </p:txBody>
       </p:sp>
@@ -5358,7 +5982,7 @@
           <p:nvPr/>
         </p:nvPicPr>
         <p:blipFill>
-          <a:blip r:embed="rId3">
+          <a:blip r:embed="rId4">
             <a:extLst>
               <a:ext uri="{28A0092B-C50C-407E-A947-70E740481C1C}">
                 <a14:useLocalDpi xmlns:a14="http://schemas.microsoft.com/office/drawing/2010/main" val="0"/>
@@ -5373,6 +5997,42 @@
           <a:xfrm>
             <a:off x="0" y="5812553"/>
             <a:ext cx="1045447" cy="1045447"/>
+          </a:xfrm>
+          <a:prstGeom prst="rect">
+            <a:avLst/>
+          </a:prstGeom>
+        </p:spPr>
+      </p:pic>
+      <p:pic>
+        <p:nvPicPr>
+          <p:cNvPr id="10" name="Kép 9">
+            <a:extLst>
+              <a:ext uri="{FF2B5EF4-FFF2-40B4-BE49-F238E27FC236}">
+                <a16:creationId xmlns:a16="http://schemas.microsoft.com/office/drawing/2014/main" id="{DE7ED009-EA02-43F7-968A-5BA416DD895D}"/>
+              </a:ext>
+            </a:extLst>
+          </p:cNvPr>
+          <p:cNvPicPr>
+            <a:picLocks noChangeAspect="1"/>
+          </p:cNvPicPr>
+          <p:nvPr/>
+        </p:nvPicPr>
+        <p:blipFill>
+          <a:blip r:embed="rId5">
+            <a:extLst>
+              <a:ext uri="{28A0092B-C50C-407E-A947-70E740481C1C}">
+                <a14:useLocalDpi xmlns:a14="http://schemas.microsoft.com/office/drawing/2010/main" val="0"/>
+              </a:ext>
+            </a:extLst>
+          </a:blip>
+          <a:stretch>
+            <a:fillRect/>
+          </a:stretch>
+        </p:blipFill>
+        <p:spPr>
+          <a:xfrm>
+            <a:off x="7942728" y="3528933"/>
+            <a:ext cx="3711389" cy="2806343"/>
           </a:xfrm>
           <a:prstGeom prst="rect">
             <a:avLst/>
@@ -5389,6 +6049,372 @@
   <p:clrMapOvr>
     <a:masterClrMapping/>
   </p:clrMapOvr>
+  <mc:AlternateContent xmlns:mc="http://schemas.openxmlformats.org/markup-compatibility/2006">
+    <mc:Choice xmlns:p14="http://schemas.microsoft.com/office/powerpoint/2010/main" Requires="p14">
+      <p:transition spd="med" p14:dur="700">
+        <p:fade/>
+      </p:transition>
+    </mc:Choice>
+    <mc:Fallback>
+      <p:transition spd="med">
+        <p:fade/>
+      </p:transition>
+    </mc:Fallback>
+  </mc:AlternateContent>
+  <p:timing>
+    <p:tnLst>
+      <p:par>
+        <p:cTn id="1" dur="indefinite" restart="never" nodeType="tmRoot">
+          <p:childTnLst>
+            <p:seq concurrent="1" nextAc="seek">
+              <p:cTn id="2" dur="indefinite" nodeType="mainSeq">
+                <p:childTnLst>
+                  <p:par>
+                    <p:cTn id="3" fill="hold">
+                      <p:stCondLst>
+                        <p:cond delay="indefinite"/>
+                      </p:stCondLst>
+                      <p:childTnLst>
+                        <p:par>
+                          <p:cTn id="4" fill="hold">
+                            <p:stCondLst>
+                              <p:cond delay="0"/>
+                            </p:stCondLst>
+                            <p:childTnLst>
+                              <p:par>
+                                <p:cTn id="5" presetID="10" presetClass="entr" presetSubtype="0" fill="hold" grpId="0" nodeType="clickEffect">
+                                  <p:stCondLst>
+                                    <p:cond delay="0"/>
+                                  </p:stCondLst>
+                                  <p:childTnLst>
+                                    <p:set>
+                                      <p:cBhvr>
+                                        <p:cTn id="6" dur="1" fill="hold">
+                                          <p:stCondLst>
+                                            <p:cond delay="0"/>
+                                          </p:stCondLst>
+                                        </p:cTn>
+                                        <p:tgtEl>
+                                          <p:spTgt spid="2"/>
+                                        </p:tgtEl>
+                                        <p:attrNameLst>
+                                          <p:attrName>style.visibility</p:attrName>
+                                        </p:attrNameLst>
+                                      </p:cBhvr>
+                                      <p:to>
+                                        <p:strVal val="visible"/>
+                                      </p:to>
+                                    </p:set>
+                                    <p:animEffect transition="in" filter="fade">
+                                      <p:cBhvr>
+                                        <p:cTn id="7" dur="500"/>
+                                        <p:tgtEl>
+                                          <p:spTgt spid="2"/>
+                                        </p:tgtEl>
+                                      </p:cBhvr>
+                                    </p:animEffect>
+                                  </p:childTnLst>
+                                </p:cTn>
+                              </p:par>
+                            </p:childTnLst>
+                          </p:cTn>
+                        </p:par>
+                      </p:childTnLst>
+                    </p:cTn>
+                  </p:par>
+                  <p:par>
+                    <p:cTn id="8" fill="hold">
+                      <p:stCondLst>
+                        <p:cond delay="indefinite"/>
+                      </p:stCondLst>
+                      <p:childTnLst>
+                        <p:par>
+                          <p:cTn id="9" fill="hold">
+                            <p:stCondLst>
+                              <p:cond delay="0"/>
+                            </p:stCondLst>
+                            <p:childTnLst>
+                              <p:par>
+                                <p:cTn id="10" presetID="10" presetClass="entr" presetSubtype="0" fill="hold" nodeType="clickEffect">
+                                  <p:stCondLst>
+                                    <p:cond delay="0"/>
+                                  </p:stCondLst>
+                                  <p:childTnLst>
+                                    <p:set>
+                                      <p:cBhvr>
+                                        <p:cTn id="11" dur="1" fill="hold">
+                                          <p:stCondLst>
+                                            <p:cond delay="0"/>
+                                          </p:stCondLst>
+                                        </p:cTn>
+                                        <p:tgtEl>
+                                          <p:spTgt spid="3">
+                                            <p:txEl>
+                                              <p:pRg st="0" end="0"/>
+                                            </p:txEl>
+                                          </p:spTgt>
+                                        </p:tgtEl>
+                                        <p:attrNameLst>
+                                          <p:attrName>style.visibility</p:attrName>
+                                        </p:attrNameLst>
+                                      </p:cBhvr>
+                                      <p:to>
+                                        <p:strVal val="visible"/>
+                                      </p:to>
+                                    </p:set>
+                                    <p:animEffect transition="in" filter="fade">
+                                      <p:cBhvr>
+                                        <p:cTn id="12" dur="500"/>
+                                        <p:tgtEl>
+                                          <p:spTgt spid="3">
+                                            <p:txEl>
+                                              <p:pRg st="0" end="0"/>
+                                            </p:txEl>
+                                          </p:spTgt>
+                                        </p:tgtEl>
+                                      </p:cBhvr>
+                                    </p:animEffect>
+                                  </p:childTnLst>
+                                </p:cTn>
+                              </p:par>
+                              <p:par>
+                                <p:cTn id="13" presetID="10" presetClass="entr" presetSubtype="0" fill="hold" nodeType="withEffect">
+                                  <p:stCondLst>
+                                    <p:cond delay="0"/>
+                                  </p:stCondLst>
+                                  <p:childTnLst>
+                                    <p:set>
+                                      <p:cBhvr>
+                                        <p:cTn id="14" dur="1" fill="hold">
+                                          <p:stCondLst>
+                                            <p:cond delay="0"/>
+                                          </p:stCondLst>
+                                        </p:cTn>
+                                        <p:tgtEl>
+                                          <p:spTgt spid="3">
+                                            <p:txEl>
+                                              <p:pRg st="1" end="1"/>
+                                            </p:txEl>
+                                          </p:spTgt>
+                                        </p:tgtEl>
+                                        <p:attrNameLst>
+                                          <p:attrName>style.visibility</p:attrName>
+                                        </p:attrNameLst>
+                                      </p:cBhvr>
+                                      <p:to>
+                                        <p:strVal val="visible"/>
+                                      </p:to>
+                                    </p:set>
+                                    <p:animEffect transition="in" filter="fade">
+                                      <p:cBhvr>
+                                        <p:cTn id="15" dur="500"/>
+                                        <p:tgtEl>
+                                          <p:spTgt spid="3">
+                                            <p:txEl>
+                                              <p:pRg st="1" end="1"/>
+                                            </p:txEl>
+                                          </p:spTgt>
+                                        </p:tgtEl>
+                                      </p:cBhvr>
+                                    </p:animEffect>
+                                  </p:childTnLst>
+                                </p:cTn>
+                              </p:par>
+                              <p:par>
+                                <p:cTn id="16" presetID="10" presetClass="entr" presetSubtype="0" fill="hold" nodeType="withEffect">
+                                  <p:stCondLst>
+                                    <p:cond delay="0"/>
+                                  </p:stCondLst>
+                                  <p:childTnLst>
+                                    <p:set>
+                                      <p:cBhvr>
+                                        <p:cTn id="17" dur="1" fill="hold">
+                                          <p:stCondLst>
+                                            <p:cond delay="0"/>
+                                          </p:stCondLst>
+                                        </p:cTn>
+                                        <p:tgtEl>
+                                          <p:spTgt spid="3">
+                                            <p:txEl>
+                                              <p:pRg st="2" end="2"/>
+                                            </p:txEl>
+                                          </p:spTgt>
+                                        </p:tgtEl>
+                                        <p:attrNameLst>
+                                          <p:attrName>style.visibility</p:attrName>
+                                        </p:attrNameLst>
+                                      </p:cBhvr>
+                                      <p:to>
+                                        <p:strVal val="visible"/>
+                                      </p:to>
+                                    </p:set>
+                                    <p:animEffect transition="in" filter="fade">
+                                      <p:cBhvr>
+                                        <p:cTn id="18" dur="500"/>
+                                        <p:tgtEl>
+                                          <p:spTgt spid="3">
+                                            <p:txEl>
+                                              <p:pRg st="2" end="2"/>
+                                            </p:txEl>
+                                          </p:spTgt>
+                                        </p:tgtEl>
+                                      </p:cBhvr>
+                                    </p:animEffect>
+                                  </p:childTnLst>
+                                </p:cTn>
+                              </p:par>
+                              <p:par>
+                                <p:cTn id="19" presetID="10" presetClass="entr" presetSubtype="0" fill="hold" nodeType="withEffect">
+                                  <p:stCondLst>
+                                    <p:cond delay="0"/>
+                                  </p:stCondLst>
+                                  <p:childTnLst>
+                                    <p:set>
+                                      <p:cBhvr>
+                                        <p:cTn id="20" dur="1" fill="hold">
+                                          <p:stCondLst>
+                                            <p:cond delay="0"/>
+                                          </p:stCondLst>
+                                        </p:cTn>
+                                        <p:tgtEl>
+                                          <p:spTgt spid="3">
+                                            <p:txEl>
+                                              <p:pRg st="3" end="3"/>
+                                            </p:txEl>
+                                          </p:spTgt>
+                                        </p:tgtEl>
+                                        <p:attrNameLst>
+                                          <p:attrName>style.visibility</p:attrName>
+                                        </p:attrNameLst>
+                                      </p:cBhvr>
+                                      <p:to>
+                                        <p:strVal val="visible"/>
+                                      </p:to>
+                                    </p:set>
+                                    <p:animEffect transition="in" filter="fade">
+                                      <p:cBhvr>
+                                        <p:cTn id="21" dur="500"/>
+                                        <p:tgtEl>
+                                          <p:spTgt spid="3">
+                                            <p:txEl>
+                                              <p:pRg st="3" end="3"/>
+                                            </p:txEl>
+                                          </p:spTgt>
+                                        </p:tgtEl>
+                                      </p:cBhvr>
+                                    </p:animEffect>
+                                  </p:childTnLst>
+                                </p:cTn>
+                              </p:par>
+                              <p:par>
+                                <p:cTn id="22" presetID="10" presetClass="entr" presetSubtype="0" fill="hold" nodeType="withEffect">
+                                  <p:stCondLst>
+                                    <p:cond delay="0"/>
+                                  </p:stCondLst>
+                                  <p:childTnLst>
+                                    <p:set>
+                                      <p:cBhvr>
+                                        <p:cTn id="23" dur="1" fill="hold">
+                                          <p:stCondLst>
+                                            <p:cond delay="0"/>
+                                          </p:stCondLst>
+                                        </p:cTn>
+                                        <p:tgtEl>
+                                          <p:spTgt spid="3">
+                                            <p:txEl>
+                                              <p:pRg st="4" end="4"/>
+                                            </p:txEl>
+                                          </p:spTgt>
+                                        </p:tgtEl>
+                                        <p:attrNameLst>
+                                          <p:attrName>style.visibility</p:attrName>
+                                        </p:attrNameLst>
+                                      </p:cBhvr>
+                                      <p:to>
+                                        <p:strVal val="visible"/>
+                                      </p:to>
+                                    </p:set>
+                                    <p:animEffect transition="in" filter="fade">
+                                      <p:cBhvr>
+                                        <p:cTn id="24" dur="500"/>
+                                        <p:tgtEl>
+                                          <p:spTgt spid="3">
+                                            <p:txEl>
+                                              <p:pRg st="4" end="4"/>
+                                            </p:txEl>
+                                          </p:spTgt>
+                                        </p:tgtEl>
+                                      </p:cBhvr>
+                                    </p:animEffect>
+                                  </p:childTnLst>
+                                </p:cTn>
+                              </p:par>
+                              <p:par>
+                                <p:cTn id="25" presetID="10" presetClass="entr" presetSubtype="0" fill="hold" nodeType="withEffect">
+                                  <p:stCondLst>
+                                    <p:cond delay="0"/>
+                                  </p:stCondLst>
+                                  <p:childTnLst>
+                                    <p:set>
+                                      <p:cBhvr>
+                                        <p:cTn id="26" dur="1" fill="hold">
+                                          <p:stCondLst>
+                                            <p:cond delay="0"/>
+                                          </p:stCondLst>
+                                        </p:cTn>
+                                        <p:tgtEl>
+                                          <p:spTgt spid="10"/>
+                                        </p:tgtEl>
+                                        <p:attrNameLst>
+                                          <p:attrName>style.visibility</p:attrName>
+                                        </p:attrNameLst>
+                                      </p:cBhvr>
+                                      <p:to>
+                                        <p:strVal val="visible"/>
+                                      </p:to>
+                                    </p:set>
+                                    <p:animEffect transition="in" filter="fade">
+                                      <p:cBhvr>
+                                        <p:cTn id="27" dur="500"/>
+                                        <p:tgtEl>
+                                          <p:spTgt spid="10"/>
+                                        </p:tgtEl>
+                                      </p:cBhvr>
+                                    </p:animEffect>
+                                  </p:childTnLst>
+                                </p:cTn>
+                              </p:par>
+                            </p:childTnLst>
+                          </p:cTn>
+                        </p:par>
+                      </p:childTnLst>
+                    </p:cTn>
+                  </p:par>
+                </p:childTnLst>
+              </p:cTn>
+              <p:prevCondLst>
+                <p:cond evt="onPrev" delay="0">
+                  <p:tgtEl>
+                    <p:sldTgt/>
+                  </p:tgtEl>
+                </p:cond>
+              </p:prevCondLst>
+              <p:nextCondLst>
+                <p:cond evt="onNext" delay="0">
+                  <p:tgtEl>
+                    <p:sldTgt/>
+                  </p:tgtEl>
+                </p:cond>
+              </p:nextCondLst>
+            </p:seq>
+          </p:childTnLst>
+        </p:cTn>
+      </p:par>
+    </p:tnLst>
+    <p:bldLst>
+      <p:bldP spid="2" grpId="0"/>
+    </p:bldLst>
+  </p:timing>
 </p:sld>
 </file>
 
@@ -5605,8 +6631,8 @@
         </p:blipFill>
         <p:spPr bwMode="auto">
           <a:xfrm>
-            <a:off x="6580625" y="834615"/>
-            <a:ext cx="2067726" cy="1168714"/>
+            <a:off x="6286388" y="1355579"/>
+            <a:ext cx="1708552" cy="1027991"/>
           </a:xfrm>
           <a:prstGeom prst="rect">
             <a:avLst/>
@@ -5652,7 +6678,7 @@
         </p:blipFill>
         <p:spPr bwMode="auto">
           <a:xfrm>
-            <a:off x="8836464" y="793446"/>
+            <a:off x="5807362" y="2383572"/>
             <a:ext cx="1349378" cy="1207038"/>
           </a:xfrm>
           <a:prstGeom prst="rect">
@@ -5699,7 +6725,7 @@
         </p:blipFill>
         <p:spPr bwMode="auto">
           <a:xfrm>
-            <a:off x="8044831" y="2428805"/>
+            <a:off x="7156740" y="2383571"/>
             <a:ext cx="1207039" cy="1207039"/>
           </a:xfrm>
           <a:prstGeom prst="rect">
@@ -5727,6 +6753,392 @@
   <p:clrMapOvr>
     <a:masterClrMapping/>
   </p:clrMapOvr>
+  <mc:AlternateContent xmlns:mc="http://schemas.openxmlformats.org/markup-compatibility/2006">
+    <mc:Choice xmlns:p14="http://schemas.microsoft.com/office/powerpoint/2010/main" Requires="p14">
+      <p:transition spd="med" p14:dur="700">
+        <p:fade/>
+      </p:transition>
+    </mc:Choice>
+    <mc:Fallback>
+      <p:transition spd="med">
+        <p:fade/>
+      </p:transition>
+    </mc:Fallback>
+  </mc:AlternateContent>
+  <p:timing>
+    <p:tnLst>
+      <p:par>
+        <p:cTn id="1" dur="indefinite" restart="never" nodeType="tmRoot">
+          <p:childTnLst>
+            <p:seq concurrent="1" nextAc="seek">
+              <p:cTn id="2" dur="indefinite" nodeType="mainSeq">
+                <p:childTnLst>
+                  <p:par>
+                    <p:cTn id="3" fill="hold">
+                      <p:stCondLst>
+                        <p:cond delay="indefinite"/>
+                      </p:stCondLst>
+                      <p:childTnLst>
+                        <p:par>
+                          <p:cTn id="4" fill="hold">
+                            <p:stCondLst>
+                              <p:cond delay="0"/>
+                            </p:stCondLst>
+                            <p:childTnLst>
+                              <p:par>
+                                <p:cTn id="5" presetID="10" presetClass="entr" presetSubtype="0" fill="hold" grpId="0" nodeType="clickEffect">
+                                  <p:stCondLst>
+                                    <p:cond delay="0"/>
+                                  </p:stCondLst>
+                                  <p:childTnLst>
+                                    <p:set>
+                                      <p:cBhvr>
+                                        <p:cTn id="6" dur="1" fill="hold">
+                                          <p:stCondLst>
+                                            <p:cond delay="0"/>
+                                          </p:stCondLst>
+                                        </p:cTn>
+                                        <p:tgtEl>
+                                          <p:spTgt spid="7"/>
+                                        </p:tgtEl>
+                                        <p:attrNameLst>
+                                          <p:attrName>style.visibility</p:attrName>
+                                        </p:attrNameLst>
+                                      </p:cBhvr>
+                                      <p:to>
+                                        <p:strVal val="visible"/>
+                                      </p:to>
+                                    </p:set>
+                                    <p:animEffect transition="in" filter="fade">
+                                      <p:cBhvr>
+                                        <p:cTn id="7" dur="500"/>
+                                        <p:tgtEl>
+                                          <p:spTgt spid="7"/>
+                                        </p:tgtEl>
+                                      </p:cBhvr>
+                                    </p:animEffect>
+                                  </p:childTnLst>
+                                </p:cTn>
+                              </p:par>
+                            </p:childTnLst>
+                          </p:cTn>
+                        </p:par>
+                      </p:childTnLst>
+                    </p:cTn>
+                  </p:par>
+                  <p:par>
+                    <p:cTn id="8" fill="hold">
+                      <p:stCondLst>
+                        <p:cond delay="indefinite"/>
+                      </p:stCondLst>
+                      <p:childTnLst>
+                        <p:par>
+                          <p:cTn id="9" fill="hold">
+                            <p:stCondLst>
+                              <p:cond delay="0"/>
+                            </p:stCondLst>
+                            <p:childTnLst>
+                              <p:par>
+                                <p:cTn id="10" presetID="10" presetClass="entr" presetSubtype="0" fill="hold" nodeType="clickEffect">
+                                  <p:stCondLst>
+                                    <p:cond delay="0"/>
+                                  </p:stCondLst>
+                                  <p:childTnLst>
+                                    <p:set>
+                                      <p:cBhvr>
+                                        <p:cTn id="11" dur="1" fill="hold">
+                                          <p:stCondLst>
+                                            <p:cond delay="0"/>
+                                          </p:stCondLst>
+                                        </p:cTn>
+                                        <p:tgtEl>
+                                          <p:spTgt spid="8">
+                                            <p:txEl>
+                                              <p:pRg st="0" end="0"/>
+                                            </p:txEl>
+                                          </p:spTgt>
+                                        </p:tgtEl>
+                                        <p:attrNameLst>
+                                          <p:attrName>style.visibility</p:attrName>
+                                        </p:attrNameLst>
+                                      </p:cBhvr>
+                                      <p:to>
+                                        <p:strVal val="visible"/>
+                                      </p:to>
+                                    </p:set>
+                                    <p:animEffect transition="in" filter="fade">
+                                      <p:cBhvr>
+                                        <p:cTn id="12" dur="500"/>
+                                        <p:tgtEl>
+                                          <p:spTgt spid="8">
+                                            <p:txEl>
+                                              <p:pRg st="0" end="0"/>
+                                            </p:txEl>
+                                          </p:spTgt>
+                                        </p:tgtEl>
+                                      </p:cBhvr>
+                                    </p:animEffect>
+                                  </p:childTnLst>
+                                </p:cTn>
+                              </p:par>
+                              <p:par>
+                                <p:cTn id="13" presetID="10" presetClass="entr" presetSubtype="0" fill="hold" nodeType="withEffect">
+                                  <p:stCondLst>
+                                    <p:cond delay="0"/>
+                                  </p:stCondLst>
+                                  <p:childTnLst>
+                                    <p:set>
+                                      <p:cBhvr>
+                                        <p:cTn id="14" dur="1" fill="hold">
+                                          <p:stCondLst>
+                                            <p:cond delay="0"/>
+                                          </p:stCondLst>
+                                        </p:cTn>
+                                        <p:tgtEl>
+                                          <p:spTgt spid="2050"/>
+                                        </p:tgtEl>
+                                        <p:attrNameLst>
+                                          <p:attrName>style.visibility</p:attrName>
+                                        </p:attrNameLst>
+                                      </p:cBhvr>
+                                      <p:to>
+                                        <p:strVal val="visible"/>
+                                      </p:to>
+                                    </p:set>
+                                    <p:animEffect transition="in" filter="fade">
+                                      <p:cBhvr>
+                                        <p:cTn id="15" dur="500"/>
+                                        <p:tgtEl>
+                                          <p:spTgt spid="2050"/>
+                                        </p:tgtEl>
+                                      </p:cBhvr>
+                                    </p:animEffect>
+                                  </p:childTnLst>
+                                </p:cTn>
+                              </p:par>
+                            </p:childTnLst>
+                          </p:cTn>
+                        </p:par>
+                      </p:childTnLst>
+                    </p:cTn>
+                  </p:par>
+                  <p:par>
+                    <p:cTn id="16" fill="hold">
+                      <p:stCondLst>
+                        <p:cond delay="indefinite"/>
+                      </p:stCondLst>
+                      <p:childTnLst>
+                        <p:par>
+                          <p:cTn id="17" fill="hold">
+                            <p:stCondLst>
+                              <p:cond delay="0"/>
+                            </p:stCondLst>
+                            <p:childTnLst>
+                              <p:par>
+                                <p:cTn id="18" presetID="10" presetClass="entr" presetSubtype="0" fill="hold" nodeType="clickEffect">
+                                  <p:stCondLst>
+                                    <p:cond delay="0"/>
+                                  </p:stCondLst>
+                                  <p:childTnLst>
+                                    <p:set>
+                                      <p:cBhvr>
+                                        <p:cTn id="19" dur="1" fill="hold">
+                                          <p:stCondLst>
+                                            <p:cond delay="0"/>
+                                          </p:stCondLst>
+                                        </p:cTn>
+                                        <p:tgtEl>
+                                          <p:spTgt spid="8">
+                                            <p:txEl>
+                                              <p:pRg st="1" end="1"/>
+                                            </p:txEl>
+                                          </p:spTgt>
+                                        </p:tgtEl>
+                                        <p:attrNameLst>
+                                          <p:attrName>style.visibility</p:attrName>
+                                        </p:attrNameLst>
+                                      </p:cBhvr>
+                                      <p:to>
+                                        <p:strVal val="visible"/>
+                                      </p:to>
+                                    </p:set>
+                                    <p:animEffect transition="in" filter="fade">
+                                      <p:cBhvr>
+                                        <p:cTn id="20" dur="500"/>
+                                        <p:tgtEl>
+                                          <p:spTgt spid="8">
+                                            <p:txEl>
+                                              <p:pRg st="1" end="1"/>
+                                            </p:txEl>
+                                          </p:spTgt>
+                                        </p:tgtEl>
+                                      </p:cBhvr>
+                                    </p:animEffect>
+                                  </p:childTnLst>
+                                </p:cTn>
+                              </p:par>
+                              <p:par>
+                                <p:cTn id="21" presetID="10" presetClass="entr" presetSubtype="0" fill="hold" nodeType="withEffect">
+                                  <p:stCondLst>
+                                    <p:cond delay="0"/>
+                                  </p:stCondLst>
+                                  <p:childTnLst>
+                                    <p:set>
+                                      <p:cBhvr>
+                                        <p:cTn id="22" dur="1" fill="hold">
+                                          <p:stCondLst>
+                                            <p:cond delay="0"/>
+                                          </p:stCondLst>
+                                        </p:cTn>
+                                        <p:tgtEl>
+                                          <p:spTgt spid="2052"/>
+                                        </p:tgtEl>
+                                        <p:attrNameLst>
+                                          <p:attrName>style.visibility</p:attrName>
+                                        </p:attrNameLst>
+                                      </p:cBhvr>
+                                      <p:to>
+                                        <p:strVal val="visible"/>
+                                      </p:to>
+                                    </p:set>
+                                    <p:animEffect transition="in" filter="fade">
+                                      <p:cBhvr>
+                                        <p:cTn id="23" dur="500"/>
+                                        <p:tgtEl>
+                                          <p:spTgt spid="2052"/>
+                                        </p:tgtEl>
+                                      </p:cBhvr>
+                                    </p:animEffect>
+                                  </p:childTnLst>
+                                </p:cTn>
+                              </p:par>
+                            </p:childTnLst>
+                          </p:cTn>
+                        </p:par>
+                      </p:childTnLst>
+                    </p:cTn>
+                  </p:par>
+                  <p:par>
+                    <p:cTn id="24" fill="hold">
+                      <p:stCondLst>
+                        <p:cond delay="indefinite"/>
+                      </p:stCondLst>
+                      <p:childTnLst>
+                        <p:par>
+                          <p:cTn id="25" fill="hold">
+                            <p:stCondLst>
+                              <p:cond delay="0"/>
+                            </p:stCondLst>
+                            <p:childTnLst>
+                              <p:par>
+                                <p:cTn id="26" presetID="10" presetClass="entr" presetSubtype="0" fill="hold" nodeType="clickEffect">
+                                  <p:stCondLst>
+                                    <p:cond delay="0"/>
+                                  </p:stCondLst>
+                                  <p:childTnLst>
+                                    <p:set>
+                                      <p:cBhvr>
+                                        <p:cTn id="27" dur="1" fill="hold">
+                                          <p:stCondLst>
+                                            <p:cond delay="0"/>
+                                          </p:stCondLst>
+                                        </p:cTn>
+                                        <p:tgtEl>
+                                          <p:spTgt spid="8">
+                                            <p:txEl>
+                                              <p:pRg st="2" end="2"/>
+                                            </p:txEl>
+                                          </p:spTgt>
+                                        </p:tgtEl>
+                                        <p:attrNameLst>
+                                          <p:attrName>style.visibility</p:attrName>
+                                        </p:attrNameLst>
+                                      </p:cBhvr>
+                                      <p:to>
+                                        <p:strVal val="visible"/>
+                                      </p:to>
+                                    </p:set>
+                                    <p:animEffect transition="in" filter="fade">
+                                      <p:cBhvr>
+                                        <p:cTn id="28" dur="500"/>
+                                        <p:tgtEl>
+                                          <p:spTgt spid="8">
+                                            <p:txEl>
+                                              <p:pRg st="2" end="2"/>
+                                            </p:txEl>
+                                          </p:spTgt>
+                                        </p:tgtEl>
+                                      </p:cBhvr>
+                                    </p:animEffect>
+                                  </p:childTnLst>
+                                </p:cTn>
+                              </p:par>
+                              <p:par>
+                                <p:cTn id="29" presetID="10" presetClass="entr" presetSubtype="0" fill="hold" nodeType="withEffect">
+                                  <p:stCondLst>
+                                    <p:cond delay="0"/>
+                                  </p:stCondLst>
+                                  <p:childTnLst>
+                                    <p:set>
+                                      <p:cBhvr>
+                                        <p:cTn id="30" dur="1" fill="hold">
+                                          <p:stCondLst>
+                                            <p:cond delay="0"/>
+                                          </p:stCondLst>
+                                        </p:cTn>
+                                        <p:tgtEl>
+                                          <p:spTgt spid="2054"/>
+                                        </p:tgtEl>
+                                        <p:attrNameLst>
+                                          <p:attrName>style.visibility</p:attrName>
+                                        </p:attrNameLst>
+                                      </p:cBhvr>
+                                      <p:to>
+                                        <p:strVal val="visible"/>
+                                      </p:to>
+                                    </p:set>
+                                    <p:animEffect transition="in" filter="fade">
+                                      <p:cBhvr>
+                                        <p:cTn id="31" dur="500"/>
+                                        <p:tgtEl>
+                                          <p:spTgt spid="2054"/>
+                                        </p:tgtEl>
+                                      </p:cBhvr>
+                                    </p:animEffect>
+                                  </p:childTnLst>
+                                </p:cTn>
+                              </p:par>
+                            </p:childTnLst>
+                          </p:cTn>
+                        </p:par>
+                      </p:childTnLst>
+                    </p:cTn>
+                  </p:par>
+                </p:childTnLst>
+              </p:cTn>
+              <p:prevCondLst>
+                <p:cond evt="onPrev" delay="0">
+                  <p:tgtEl>
+                    <p:sldTgt/>
+                  </p:tgtEl>
+                </p:cond>
+              </p:prevCondLst>
+              <p:nextCondLst>
+                <p:cond evt="onNext" delay="0">
+                  <p:tgtEl>
+                    <p:sldTgt/>
+                  </p:tgtEl>
+                </p:cond>
+              </p:nextCondLst>
+            </p:seq>
+          </p:childTnLst>
+        </p:cTn>
+      </p:par>
+    </p:tnLst>
+    <p:bldLst>
+      <p:bldP spid="7" grpId="0"/>
+    </p:bldLst>
+  </p:timing>
 </p:sld>
 </file>
 
@@ -5921,6 +7333,251 @@
   <p:clrMapOvr>
     <a:masterClrMapping/>
   </p:clrMapOvr>
+  <mc:AlternateContent xmlns:mc="http://schemas.openxmlformats.org/markup-compatibility/2006">
+    <mc:Choice xmlns:p14="http://schemas.microsoft.com/office/powerpoint/2010/main" Requires="p14">
+      <p:transition spd="med" p14:dur="700">
+        <p:fade/>
+      </p:transition>
+    </mc:Choice>
+    <mc:Fallback>
+      <p:transition spd="med">
+        <p:fade/>
+      </p:transition>
+    </mc:Fallback>
+  </mc:AlternateContent>
+  <p:timing>
+    <p:tnLst>
+      <p:par>
+        <p:cTn id="1" dur="indefinite" restart="never" nodeType="tmRoot">
+          <p:childTnLst>
+            <p:seq concurrent="1" nextAc="seek">
+              <p:cTn id="2" dur="indefinite" nodeType="mainSeq">
+                <p:childTnLst>
+                  <p:par>
+                    <p:cTn id="3" fill="hold">
+                      <p:stCondLst>
+                        <p:cond delay="indefinite"/>
+                      </p:stCondLst>
+                      <p:childTnLst>
+                        <p:par>
+                          <p:cTn id="4" fill="hold">
+                            <p:stCondLst>
+                              <p:cond delay="0"/>
+                            </p:stCondLst>
+                            <p:childTnLst>
+                              <p:par>
+                                <p:cTn id="5" presetID="10" presetClass="entr" presetSubtype="0" fill="hold" grpId="0" nodeType="clickEffect">
+                                  <p:stCondLst>
+                                    <p:cond delay="0"/>
+                                  </p:stCondLst>
+                                  <p:childTnLst>
+                                    <p:set>
+                                      <p:cBhvr>
+                                        <p:cTn id="6" dur="1" fill="hold">
+                                          <p:stCondLst>
+                                            <p:cond delay="0"/>
+                                          </p:stCondLst>
+                                        </p:cTn>
+                                        <p:tgtEl>
+                                          <p:spTgt spid="2"/>
+                                        </p:tgtEl>
+                                        <p:attrNameLst>
+                                          <p:attrName>style.visibility</p:attrName>
+                                        </p:attrNameLst>
+                                      </p:cBhvr>
+                                      <p:to>
+                                        <p:strVal val="visible"/>
+                                      </p:to>
+                                    </p:set>
+                                    <p:animEffect transition="in" filter="fade">
+                                      <p:cBhvr>
+                                        <p:cTn id="7" dur="500"/>
+                                        <p:tgtEl>
+                                          <p:spTgt spid="2"/>
+                                        </p:tgtEl>
+                                      </p:cBhvr>
+                                    </p:animEffect>
+                                  </p:childTnLst>
+                                </p:cTn>
+                              </p:par>
+                            </p:childTnLst>
+                          </p:cTn>
+                        </p:par>
+                      </p:childTnLst>
+                    </p:cTn>
+                  </p:par>
+                  <p:par>
+                    <p:cTn id="8" fill="hold">
+                      <p:stCondLst>
+                        <p:cond delay="indefinite"/>
+                      </p:stCondLst>
+                      <p:childTnLst>
+                        <p:par>
+                          <p:cTn id="9" fill="hold">
+                            <p:stCondLst>
+                              <p:cond delay="0"/>
+                            </p:stCondLst>
+                            <p:childTnLst>
+                              <p:par>
+                                <p:cTn id="10" presetID="10" presetClass="entr" presetSubtype="0" fill="hold" nodeType="clickEffect">
+                                  <p:stCondLst>
+                                    <p:cond delay="0"/>
+                                  </p:stCondLst>
+                                  <p:childTnLst>
+                                    <p:set>
+                                      <p:cBhvr>
+                                        <p:cTn id="11" dur="1" fill="hold">
+                                          <p:stCondLst>
+                                            <p:cond delay="0"/>
+                                          </p:stCondLst>
+                                        </p:cTn>
+                                        <p:tgtEl>
+                                          <p:spTgt spid="3">
+                                            <p:txEl>
+                                              <p:pRg st="0" end="0"/>
+                                            </p:txEl>
+                                          </p:spTgt>
+                                        </p:tgtEl>
+                                        <p:attrNameLst>
+                                          <p:attrName>style.visibility</p:attrName>
+                                        </p:attrNameLst>
+                                      </p:cBhvr>
+                                      <p:to>
+                                        <p:strVal val="visible"/>
+                                      </p:to>
+                                    </p:set>
+                                    <p:animEffect transition="in" filter="fade">
+                                      <p:cBhvr>
+                                        <p:cTn id="12" dur="500"/>
+                                        <p:tgtEl>
+                                          <p:spTgt spid="3">
+                                            <p:txEl>
+                                              <p:pRg st="0" end="0"/>
+                                            </p:txEl>
+                                          </p:spTgt>
+                                        </p:tgtEl>
+                                      </p:cBhvr>
+                                    </p:animEffect>
+                                  </p:childTnLst>
+                                </p:cTn>
+                              </p:par>
+                              <p:par>
+                                <p:cTn id="13" presetID="10" presetClass="entr" presetSubtype="0" fill="hold" nodeType="withEffect">
+                                  <p:stCondLst>
+                                    <p:cond delay="0"/>
+                                  </p:stCondLst>
+                                  <p:childTnLst>
+                                    <p:set>
+                                      <p:cBhvr>
+                                        <p:cTn id="14" dur="1" fill="hold">
+                                          <p:stCondLst>
+                                            <p:cond delay="0"/>
+                                          </p:stCondLst>
+                                        </p:cTn>
+                                        <p:tgtEl>
+                                          <p:spTgt spid="3">
+                                            <p:txEl>
+                                              <p:pRg st="1" end="1"/>
+                                            </p:txEl>
+                                          </p:spTgt>
+                                        </p:tgtEl>
+                                        <p:attrNameLst>
+                                          <p:attrName>style.visibility</p:attrName>
+                                        </p:attrNameLst>
+                                      </p:cBhvr>
+                                      <p:to>
+                                        <p:strVal val="visible"/>
+                                      </p:to>
+                                    </p:set>
+                                    <p:animEffect transition="in" filter="fade">
+                                      <p:cBhvr>
+                                        <p:cTn id="15" dur="500"/>
+                                        <p:tgtEl>
+                                          <p:spTgt spid="3">
+                                            <p:txEl>
+                                              <p:pRg st="1" end="1"/>
+                                            </p:txEl>
+                                          </p:spTgt>
+                                        </p:tgtEl>
+                                      </p:cBhvr>
+                                    </p:animEffect>
+                                  </p:childTnLst>
+                                </p:cTn>
+                              </p:par>
+                              <p:par>
+                                <p:cTn id="16" presetID="10" presetClass="entr" presetSubtype="0" fill="hold" nodeType="withEffect">
+                                  <p:stCondLst>
+                                    <p:cond delay="0"/>
+                                  </p:stCondLst>
+                                  <p:childTnLst>
+                                    <p:set>
+                                      <p:cBhvr>
+                                        <p:cTn id="17" dur="1" fill="hold">
+                                          <p:stCondLst>
+                                            <p:cond delay="0"/>
+                                          </p:stCondLst>
+                                        </p:cTn>
+                                        <p:tgtEl>
+                                          <p:spTgt spid="3">
+                                            <p:txEl>
+                                              <p:pRg st="2" end="2"/>
+                                            </p:txEl>
+                                          </p:spTgt>
+                                        </p:tgtEl>
+                                        <p:attrNameLst>
+                                          <p:attrName>style.visibility</p:attrName>
+                                        </p:attrNameLst>
+                                      </p:cBhvr>
+                                      <p:to>
+                                        <p:strVal val="visible"/>
+                                      </p:to>
+                                    </p:set>
+                                    <p:animEffect transition="in" filter="fade">
+                                      <p:cBhvr>
+                                        <p:cTn id="18" dur="500"/>
+                                        <p:tgtEl>
+                                          <p:spTgt spid="3">
+                                            <p:txEl>
+                                              <p:pRg st="2" end="2"/>
+                                            </p:txEl>
+                                          </p:spTgt>
+                                        </p:tgtEl>
+                                      </p:cBhvr>
+                                    </p:animEffect>
+                                  </p:childTnLst>
+                                </p:cTn>
+                              </p:par>
+                            </p:childTnLst>
+                          </p:cTn>
+                        </p:par>
+                      </p:childTnLst>
+                    </p:cTn>
+                  </p:par>
+                </p:childTnLst>
+              </p:cTn>
+              <p:prevCondLst>
+                <p:cond evt="onPrev" delay="0">
+                  <p:tgtEl>
+                    <p:sldTgt/>
+                  </p:tgtEl>
+                </p:cond>
+              </p:prevCondLst>
+              <p:nextCondLst>
+                <p:cond evt="onNext" delay="0">
+                  <p:tgtEl>
+                    <p:sldTgt/>
+                  </p:tgtEl>
+                </p:cond>
+              </p:nextCondLst>
+            </p:seq>
+          </p:childTnLst>
+        </p:cTn>
+      </p:par>
+    </p:tnLst>
+    <p:bldLst>
+      <p:bldP spid="2" grpId="0"/>
+    </p:bldLst>
+  </p:timing>
 </p:sld>
 </file>
 
@@ -6037,6 +7694,8 @@
                 <a:solidFill>
                   <a:schemeClr val="bg1"/>
                 </a:solidFill>
+                <a:latin typeface="Times New Roman" panose="02020603050405020304" pitchFamily="18" charset="0"/>
+                <a:cs typeface="Times New Roman" panose="02020603050405020304" pitchFamily="18" charset="0"/>
               </a:rPr>
               <a:t>Mobilalkalmazás (iOS/Android): Kereskedés és tanulás bárhol, bármikor.</a:t>
             </a:r>
@@ -6047,6 +7706,8 @@
                 <a:solidFill>
                   <a:schemeClr val="bg1"/>
                 </a:solidFill>
+                <a:latin typeface="Times New Roman" panose="02020603050405020304" pitchFamily="18" charset="0"/>
+                <a:cs typeface="Times New Roman" panose="02020603050405020304" pitchFamily="18" charset="0"/>
               </a:rPr>
               <a:t>Éles számla integráció: Átlépés a demó környezetből a valós tőzsdére.</a:t>
             </a:r>
@@ -6135,6 +7796,208 @@
   <p:clrMapOvr>
     <a:masterClrMapping/>
   </p:clrMapOvr>
+  <mc:AlternateContent xmlns:mc="http://schemas.openxmlformats.org/markup-compatibility/2006">
+    <mc:Choice xmlns:p14="http://schemas.microsoft.com/office/powerpoint/2010/main" Requires="p14">
+      <p:transition spd="med" p14:dur="700">
+        <p:fade/>
+      </p:transition>
+    </mc:Choice>
+    <mc:Fallback>
+      <p:transition spd="med">
+        <p:fade/>
+      </p:transition>
+    </mc:Fallback>
+  </mc:AlternateContent>
+  <p:timing>
+    <p:tnLst>
+      <p:par>
+        <p:cTn id="1" dur="indefinite" restart="never" nodeType="tmRoot">
+          <p:childTnLst>
+            <p:seq concurrent="1" nextAc="seek">
+              <p:cTn id="2" dur="indefinite" nodeType="mainSeq">
+                <p:childTnLst>
+                  <p:par>
+                    <p:cTn id="3" fill="hold">
+                      <p:stCondLst>
+                        <p:cond delay="indefinite"/>
+                      </p:stCondLst>
+                      <p:childTnLst>
+                        <p:par>
+                          <p:cTn id="4" fill="hold">
+                            <p:stCondLst>
+                              <p:cond delay="0"/>
+                            </p:stCondLst>
+                            <p:childTnLst>
+                              <p:par>
+                                <p:cTn id="5" presetID="10" presetClass="entr" presetSubtype="0" fill="hold" grpId="0" nodeType="clickEffect">
+                                  <p:stCondLst>
+                                    <p:cond delay="0"/>
+                                  </p:stCondLst>
+                                  <p:childTnLst>
+                                    <p:set>
+                                      <p:cBhvr>
+                                        <p:cTn id="6" dur="1" fill="hold">
+                                          <p:stCondLst>
+                                            <p:cond delay="0"/>
+                                          </p:stCondLst>
+                                        </p:cTn>
+                                        <p:tgtEl>
+                                          <p:spTgt spid="2"/>
+                                        </p:tgtEl>
+                                        <p:attrNameLst>
+                                          <p:attrName>style.visibility</p:attrName>
+                                        </p:attrNameLst>
+                                      </p:cBhvr>
+                                      <p:to>
+                                        <p:strVal val="visible"/>
+                                      </p:to>
+                                    </p:set>
+                                    <p:animEffect transition="in" filter="fade">
+                                      <p:cBhvr>
+                                        <p:cTn id="7" dur="500"/>
+                                        <p:tgtEl>
+                                          <p:spTgt spid="2"/>
+                                        </p:tgtEl>
+                                      </p:cBhvr>
+                                    </p:animEffect>
+                                  </p:childTnLst>
+                                </p:cTn>
+                              </p:par>
+                            </p:childTnLst>
+                          </p:cTn>
+                        </p:par>
+                      </p:childTnLst>
+                    </p:cTn>
+                  </p:par>
+                  <p:par>
+                    <p:cTn id="8" fill="hold">
+                      <p:stCondLst>
+                        <p:cond delay="indefinite"/>
+                      </p:stCondLst>
+                      <p:childTnLst>
+                        <p:par>
+                          <p:cTn id="9" fill="hold">
+                            <p:stCondLst>
+                              <p:cond delay="0"/>
+                            </p:stCondLst>
+                            <p:childTnLst>
+                              <p:par>
+                                <p:cTn id="10" presetID="10" presetClass="entr" presetSubtype="0" fill="hold" nodeType="clickEffect">
+                                  <p:stCondLst>
+                                    <p:cond delay="0"/>
+                                  </p:stCondLst>
+                                  <p:childTnLst>
+                                    <p:set>
+                                      <p:cBhvr>
+                                        <p:cTn id="11" dur="1" fill="hold">
+                                          <p:stCondLst>
+                                            <p:cond delay="0"/>
+                                          </p:stCondLst>
+                                        </p:cTn>
+                                        <p:tgtEl>
+                                          <p:spTgt spid="3">
+                                            <p:txEl>
+                                              <p:pRg st="0" end="0"/>
+                                            </p:txEl>
+                                          </p:spTgt>
+                                        </p:tgtEl>
+                                        <p:attrNameLst>
+                                          <p:attrName>style.visibility</p:attrName>
+                                        </p:attrNameLst>
+                                      </p:cBhvr>
+                                      <p:to>
+                                        <p:strVal val="visible"/>
+                                      </p:to>
+                                    </p:set>
+                                    <p:animEffect transition="in" filter="fade">
+                                      <p:cBhvr>
+                                        <p:cTn id="12" dur="500"/>
+                                        <p:tgtEl>
+                                          <p:spTgt spid="3">
+                                            <p:txEl>
+                                              <p:pRg st="0" end="0"/>
+                                            </p:txEl>
+                                          </p:spTgt>
+                                        </p:tgtEl>
+                                      </p:cBhvr>
+                                    </p:animEffect>
+                                  </p:childTnLst>
+                                </p:cTn>
+                              </p:par>
+                              <p:par>
+                                <p:cTn id="13" presetID="10" presetClass="entr" presetSubtype="0" fill="hold" nodeType="withEffect">
+                                  <p:stCondLst>
+                                    <p:cond delay="0"/>
+                                  </p:stCondLst>
+                                  <p:childTnLst>
+                                    <p:set>
+                                      <p:cBhvr>
+                                        <p:cTn id="14" dur="1" fill="hold">
+                                          <p:stCondLst>
+                                            <p:cond delay="0"/>
+                                          </p:stCondLst>
+                                        </p:cTn>
+                                        <p:tgtEl>
+                                          <p:spTgt spid="3">
+                                            <p:txEl>
+                                              <p:pRg st="1" end="1"/>
+                                            </p:txEl>
+                                          </p:spTgt>
+                                        </p:tgtEl>
+                                        <p:attrNameLst>
+                                          <p:attrName>style.visibility</p:attrName>
+                                        </p:attrNameLst>
+                                      </p:cBhvr>
+                                      <p:to>
+                                        <p:strVal val="visible"/>
+                                      </p:to>
+                                    </p:set>
+                                    <p:animEffect transition="in" filter="fade">
+                                      <p:cBhvr>
+                                        <p:cTn id="15" dur="500"/>
+                                        <p:tgtEl>
+                                          <p:spTgt spid="3">
+                                            <p:txEl>
+                                              <p:pRg st="1" end="1"/>
+                                            </p:txEl>
+                                          </p:spTgt>
+                                        </p:tgtEl>
+                                      </p:cBhvr>
+                                    </p:animEffect>
+                                  </p:childTnLst>
+                                </p:cTn>
+                              </p:par>
+                            </p:childTnLst>
+                          </p:cTn>
+                        </p:par>
+                      </p:childTnLst>
+                    </p:cTn>
+                  </p:par>
+                </p:childTnLst>
+              </p:cTn>
+              <p:prevCondLst>
+                <p:cond evt="onPrev" delay="0">
+                  <p:tgtEl>
+                    <p:sldTgt/>
+                  </p:tgtEl>
+                </p:cond>
+              </p:prevCondLst>
+              <p:nextCondLst>
+                <p:cond evt="onNext" delay="0">
+                  <p:tgtEl>
+                    <p:sldTgt/>
+                  </p:tgtEl>
+                </p:cond>
+              </p:nextCondLst>
+            </p:seq>
+          </p:childTnLst>
+        </p:cTn>
+      </p:par>
+    </p:tnLst>
+    <p:bldLst>
+      <p:bldP spid="2" grpId="0"/>
+    </p:bldLst>
+  </p:timing>
 </p:sld>
 </file>
 
@@ -6155,6 +8018,42 @@
           <a:chExt cx="0" cy="0"/>
         </a:xfrm>
       </p:grpSpPr>
+      <p:pic>
+        <p:nvPicPr>
+          <p:cNvPr id="5" name="Kép 4">
+            <a:extLst>
+              <a:ext uri="{FF2B5EF4-FFF2-40B4-BE49-F238E27FC236}">
+                <a16:creationId xmlns:a16="http://schemas.microsoft.com/office/drawing/2014/main" id="{36542336-43BB-4E68-B4DA-0A6106F9963E}"/>
+              </a:ext>
+            </a:extLst>
+          </p:cNvPr>
+          <p:cNvPicPr>
+            <a:picLocks noChangeAspect="1"/>
+          </p:cNvPicPr>
+          <p:nvPr/>
+        </p:nvPicPr>
+        <p:blipFill>
+          <a:blip r:embed="rId2">
+            <a:extLst>
+              <a:ext uri="{28A0092B-C50C-407E-A947-70E740481C1C}">
+                <a14:useLocalDpi xmlns:a14="http://schemas.microsoft.com/office/drawing/2010/main" val="0"/>
+              </a:ext>
+            </a:extLst>
+          </a:blip>
+          <a:stretch>
+            <a:fillRect/>
+          </a:stretch>
+        </p:blipFill>
+        <p:spPr>
+          <a:xfrm>
+            <a:off x="0" y="-6376"/>
+            <a:ext cx="12192000" cy="6864376"/>
+          </a:xfrm>
+          <a:prstGeom prst="rect">
+            <a:avLst/>
+          </a:prstGeom>
+        </p:spPr>
+      </p:pic>
       <p:sp>
         <p:nvSpPr>
           <p:cNvPr id="2" name="Cím 1">
@@ -6178,6 +8077,9 @@
           <a:p>
             <a:r>
               <a:rPr lang="hu-HU" dirty="0">
+                <a:solidFill>
+                  <a:schemeClr val="bg1"/>
+                </a:solidFill>
                 <a:latin typeface="Times New Roman" panose="02020603050405020304" pitchFamily="18" charset="0"/>
                 <a:cs typeface="Times New Roman" panose="02020603050405020304" pitchFamily="18" charset="0"/>
               </a:rPr>
@@ -6209,6 +8111,9 @@
           <a:p>
             <a:r>
               <a:rPr lang="hu-HU" dirty="0">
+                <a:solidFill>
+                  <a:schemeClr val="bg1"/>
+                </a:solidFill>
                 <a:latin typeface="Times New Roman" panose="02020603050405020304" pitchFamily="18" charset="0"/>
                 <a:cs typeface="Times New Roman" panose="02020603050405020304" pitchFamily="18" charset="0"/>
               </a:rPr>
@@ -6219,13 +8124,25 @@
             <a:pPr lvl="1"/>
             <a:r>
               <a:rPr lang="hu-HU" dirty="0">
+                <a:solidFill>
+                  <a:schemeClr val="bg1"/>
+                </a:solidFill>
                 <a:latin typeface="Times New Roman" panose="02020603050405020304" pitchFamily="18" charset="0"/>
                 <a:cs typeface="Times New Roman" panose="02020603050405020304" pitchFamily="18" charset="0"/>
-                <a:hlinkClick r:id="rId2"/>
+                <a:hlinkClick r:id="rId3">
+                  <a:extLst>
+                    <a:ext uri="{A12FA001-AC4F-418D-AE19-62706E023703}">
+                      <ahyp:hlinkClr xmlns:ahyp="http://schemas.microsoft.com/office/drawing/2018/hyperlinkcolor" val="tx"/>
+                    </a:ext>
+                  </a:extLst>
+                </a:hlinkClick>
               </a:rPr>
               <a:t>csaki.balazs@diak.szbi-pg.hu</a:t>
             </a:r>
             <a:endParaRPr lang="hu-HU" dirty="0">
+              <a:solidFill>
+                <a:schemeClr val="bg1"/>
+              </a:solidFill>
               <a:latin typeface="Times New Roman" panose="02020603050405020304" pitchFamily="18" charset="0"/>
               <a:cs typeface="Times New Roman" panose="02020603050405020304" pitchFamily="18" charset="0"/>
             </a:endParaRPr>
@@ -6234,13 +8151,25 @@
             <a:pPr lvl="1"/>
             <a:r>
               <a:rPr lang="hu-HU" dirty="0">
+                <a:solidFill>
+                  <a:schemeClr val="bg1"/>
+                </a:solidFill>
                 <a:latin typeface="Times New Roman" panose="02020603050405020304" pitchFamily="18" charset="0"/>
                 <a:cs typeface="Times New Roman" panose="02020603050405020304" pitchFamily="18" charset="0"/>
-                <a:hlinkClick r:id="rId3"/>
+                <a:hlinkClick r:id="rId4">
+                  <a:extLst>
+                    <a:ext uri="{A12FA001-AC4F-418D-AE19-62706E023703}">
+                      <ahyp:hlinkClr xmlns:ahyp="http://schemas.microsoft.com/office/drawing/2018/hyperlinkcolor" val="tx"/>
+                    </a:ext>
+                  </a:extLst>
+                </a:hlinkClick>
               </a:rPr>
               <a:t>zsigo.robert.jozsef@diak.szbi-pg.hu</a:t>
             </a:r>
             <a:endParaRPr lang="hu-HU" dirty="0">
+              <a:solidFill>
+                <a:schemeClr val="bg1"/>
+              </a:solidFill>
               <a:latin typeface="Times New Roman" panose="02020603050405020304" pitchFamily="18" charset="0"/>
               <a:cs typeface="Times New Roman" panose="02020603050405020304" pitchFamily="18" charset="0"/>
             </a:endParaRPr>
@@ -6262,7 +8191,7 @@
           <p:nvPr/>
         </p:nvPicPr>
         <p:blipFill>
-          <a:blip r:embed="rId4">
+          <a:blip r:embed="rId5">
             <a:extLst>
               <a:ext uri="{28A0092B-C50C-407E-A947-70E740481C1C}">
                 <a14:useLocalDpi xmlns:a14="http://schemas.microsoft.com/office/drawing/2010/main" val="0"/>
@@ -6287,6 +8216,251 @@
     <p:extLst>
       <p:ext uri="{BB962C8B-B14F-4D97-AF65-F5344CB8AC3E}">
         <p14:creationId xmlns:p14="http://schemas.microsoft.com/office/powerpoint/2010/main" val="1445229942"/>
+      </p:ext>
+    </p:extLst>
+  </p:cSld>
+  <p:clrMapOvr>
+    <a:masterClrMapping/>
+  </p:clrMapOvr>
+  <mc:AlternateContent xmlns:mc="http://schemas.openxmlformats.org/markup-compatibility/2006">
+    <mc:Choice xmlns:p14="http://schemas.microsoft.com/office/powerpoint/2010/main" Requires="p14">
+      <p:transition spd="med" p14:dur="700">
+        <p:fade/>
+      </p:transition>
+    </mc:Choice>
+    <mc:Fallback>
+      <p:transition spd="med">
+        <p:fade/>
+      </p:transition>
+    </mc:Fallback>
+  </mc:AlternateContent>
+</p:sld>
+</file>
+
+<file path=ppt/slides/slide15.xml><?xml version="1.0" encoding="utf-8"?>
+<p:sld xmlns:a="http://schemas.openxmlformats.org/drawingml/2006/main" xmlns:r="http://schemas.openxmlformats.org/officeDocument/2006/relationships" xmlns:p="http://schemas.openxmlformats.org/presentationml/2006/main">
+  <p:cSld>
+    <p:spTree>
+      <p:nvGrpSpPr>
+        <p:cNvPr id="1" name=""/>
+        <p:cNvGrpSpPr/>
+        <p:nvPr/>
+      </p:nvGrpSpPr>
+      <p:grpSpPr>
+        <a:xfrm>
+          <a:off x="0" y="0"/>
+          <a:ext cx="0" cy="0"/>
+          <a:chOff x="0" y="0"/>
+          <a:chExt cx="0" cy="0"/>
+        </a:xfrm>
+      </p:grpSpPr>
+      <p:pic>
+        <p:nvPicPr>
+          <p:cNvPr id="4" name="Kép 3">
+            <a:extLst>
+              <a:ext uri="{FF2B5EF4-FFF2-40B4-BE49-F238E27FC236}">
+                <a16:creationId xmlns:a16="http://schemas.microsoft.com/office/drawing/2014/main" id="{22C4131A-EBD7-411F-A0AD-12A9E564191A}"/>
+              </a:ext>
+            </a:extLst>
+          </p:cNvPr>
+          <p:cNvPicPr>
+            <a:picLocks noChangeAspect="1"/>
+          </p:cNvPicPr>
+          <p:nvPr/>
+        </p:nvPicPr>
+        <p:blipFill>
+          <a:blip r:embed="rId2">
+            <a:extLst>
+              <a:ext uri="{28A0092B-C50C-407E-A947-70E740481C1C}">
+                <a14:useLocalDpi xmlns:a14="http://schemas.microsoft.com/office/drawing/2010/main" val="0"/>
+              </a:ext>
+            </a:extLst>
+          </a:blip>
+          <a:stretch>
+            <a:fillRect/>
+          </a:stretch>
+        </p:blipFill>
+        <p:spPr>
+          <a:xfrm>
+            <a:off x="0" y="-6376"/>
+            <a:ext cx="12192000" cy="6864376"/>
+          </a:xfrm>
+          <a:prstGeom prst="rect">
+            <a:avLst/>
+          </a:prstGeom>
+        </p:spPr>
+      </p:pic>
+      <p:sp>
+        <p:nvSpPr>
+          <p:cNvPr id="2" name="Cím 1">
+            <a:extLst>
+              <a:ext uri="{FF2B5EF4-FFF2-40B4-BE49-F238E27FC236}">
+                <a16:creationId xmlns:a16="http://schemas.microsoft.com/office/drawing/2014/main" id="{40BE56E0-9B19-409D-9B53-F4195744009D}"/>
+              </a:ext>
+            </a:extLst>
+          </p:cNvPr>
+          <p:cNvSpPr>
+            <a:spLocks noGrp="1"/>
+          </p:cNvSpPr>
+          <p:nvPr>
+            <p:ph type="title"/>
+          </p:nvPr>
+        </p:nvSpPr>
+        <p:spPr/>
+        <p:txBody>
+          <a:bodyPr/>
+          <a:lstStyle/>
+          <a:p>
+            <a:r>
+              <a:rPr lang="hu-HU" dirty="0">
+                <a:solidFill>
+                  <a:schemeClr val="bg1"/>
+                </a:solidFill>
+                <a:latin typeface="Times New Roman" panose="02020603050405020304" pitchFamily="18" charset="0"/>
+                <a:cs typeface="Times New Roman" panose="02020603050405020304" pitchFamily="18" charset="0"/>
+              </a:rPr>
+              <a:t>Forrás</a:t>
+            </a:r>
+          </a:p>
+        </p:txBody>
+      </p:sp>
+      <p:sp>
+        <p:nvSpPr>
+          <p:cNvPr id="3" name="Tartalom helye 2">
+            <a:extLst>
+              <a:ext uri="{FF2B5EF4-FFF2-40B4-BE49-F238E27FC236}">
+                <a16:creationId xmlns:a16="http://schemas.microsoft.com/office/drawing/2014/main" id="{5DC6C1E0-77D0-445B-898D-2953DE2C7E33}"/>
+              </a:ext>
+            </a:extLst>
+          </p:cNvPr>
+          <p:cNvSpPr>
+            <a:spLocks noGrp="1"/>
+          </p:cNvSpPr>
+          <p:nvPr>
+            <p:ph idx="1"/>
+          </p:nvPr>
+        </p:nvSpPr>
+        <p:spPr/>
+        <p:txBody>
+          <a:bodyPr/>
+          <a:lstStyle/>
+          <a:p>
+            <a:r>
+              <a:rPr lang="hu-HU" sz="1400" dirty="0">
+                <a:solidFill>
+                  <a:schemeClr val="bg1"/>
+                </a:solidFill>
+                <a:latin typeface="Times New Roman" panose="02020603050405020304" pitchFamily="18" charset="0"/>
+                <a:cs typeface="Times New Roman" panose="02020603050405020304" pitchFamily="18" charset="0"/>
+                <a:hlinkClick r:id="rId3">
+                  <a:extLst>
+                    <a:ext uri="{A12FA001-AC4F-418D-AE19-62706E023703}">
+                      <ahyp:hlinkClr xmlns:ahyp="http://schemas.microsoft.com/office/drawing/2018/hyperlinkcolor" val="tx"/>
+                    </a:ext>
+                  </a:extLst>
+                </a:hlinkClick>
+              </a:rPr>
+              <a:t>https://pixabay.com/hu/images/download/3844328-stock-1863880_1920.jpg</a:t>
+            </a:r>
+            <a:endParaRPr lang="hu-HU" sz="1400" dirty="0">
+              <a:solidFill>
+                <a:schemeClr val="bg1"/>
+              </a:solidFill>
+              <a:latin typeface="Times New Roman" panose="02020603050405020304" pitchFamily="18" charset="0"/>
+              <a:cs typeface="Times New Roman" panose="02020603050405020304" pitchFamily="18" charset="0"/>
+            </a:endParaRPr>
+          </a:p>
+          <a:p>
+            <a:r>
+              <a:rPr lang="hu-HU" sz="1400" dirty="0">
+                <a:solidFill>
+                  <a:schemeClr val="bg1"/>
+                </a:solidFill>
+                <a:latin typeface="Times New Roman" panose="02020603050405020304" pitchFamily="18" charset="0"/>
+                <a:cs typeface="Times New Roman" panose="02020603050405020304" pitchFamily="18" charset="0"/>
+                <a:hlinkClick r:id="rId4">
+                  <a:extLst>
+                    <a:ext uri="{A12FA001-AC4F-418D-AE19-62706E023703}">
+                      <ahyp:hlinkClr xmlns:ahyp="http://schemas.microsoft.com/office/drawing/2018/hyperlinkcolor" val="tx"/>
+                    </a:ext>
+                  </a:extLst>
+                </a:hlinkClick>
+              </a:rPr>
+              <a:t>https://www.facebook.com/GitHub/</a:t>
+            </a:r>
+            <a:endParaRPr lang="hu-HU" sz="1400" dirty="0">
+              <a:solidFill>
+                <a:schemeClr val="bg1"/>
+              </a:solidFill>
+              <a:latin typeface="Times New Roman" panose="02020603050405020304" pitchFamily="18" charset="0"/>
+              <a:cs typeface="Times New Roman" panose="02020603050405020304" pitchFamily="18" charset="0"/>
+            </a:endParaRPr>
+          </a:p>
+          <a:p>
+            <a:r>
+              <a:rPr lang="hu-HU" sz="1400" dirty="0">
+                <a:solidFill>
+                  <a:schemeClr val="bg1"/>
+                </a:solidFill>
+                <a:latin typeface="Times New Roman" panose="02020603050405020304" pitchFamily="18" charset="0"/>
+                <a:cs typeface="Times New Roman" panose="02020603050405020304" pitchFamily="18" charset="0"/>
+                <a:hlinkClick r:id="rId5">
+                  <a:extLst>
+                    <a:ext uri="{A12FA001-AC4F-418D-AE19-62706E023703}">
+                      <ahyp:hlinkClr xmlns:ahyp="http://schemas.microsoft.com/office/drawing/2018/hyperlinkcolor" val="tx"/>
+                    </a:ext>
+                  </a:extLst>
+                </a:hlinkClick>
+              </a:rPr>
+              <a:t>https://www.facebook.com/messenger/?locale=hu_HU</a:t>
+            </a:r>
+            <a:endParaRPr lang="hu-HU" sz="1400" dirty="0">
+              <a:solidFill>
+                <a:schemeClr val="bg1"/>
+              </a:solidFill>
+              <a:latin typeface="Times New Roman" panose="02020603050405020304" pitchFamily="18" charset="0"/>
+              <a:cs typeface="Times New Roman" panose="02020603050405020304" pitchFamily="18" charset="0"/>
+            </a:endParaRPr>
+          </a:p>
+          <a:p>
+            <a:r>
+              <a:rPr lang="hu-HU" sz="1400" dirty="0">
+                <a:solidFill>
+                  <a:schemeClr val="bg1"/>
+                </a:solidFill>
+                <a:latin typeface="Times New Roman" panose="02020603050405020304" pitchFamily="18" charset="0"/>
+                <a:cs typeface="Times New Roman" panose="02020603050405020304" pitchFamily="18" charset="0"/>
+                <a:hlinkClick r:id="rId6">
+                  <a:extLst>
+                    <a:ext uri="{A12FA001-AC4F-418D-AE19-62706E023703}">
+                      <ahyp:hlinkClr xmlns:ahyp="http://schemas.microsoft.com/office/drawing/2018/hyperlinkcolor" val="tx"/>
+                    </a:ext>
+                  </a:extLst>
+                </a:hlinkClick>
+              </a:rPr>
+              <a:t>https://ipv4.google.com/intl/hu/drive/download/</a:t>
+            </a:r>
+            <a:endParaRPr lang="hu-HU" sz="1400" dirty="0">
+              <a:solidFill>
+                <a:schemeClr val="bg1"/>
+              </a:solidFill>
+              <a:latin typeface="Times New Roman" panose="02020603050405020304" pitchFamily="18" charset="0"/>
+              <a:cs typeface="Times New Roman" panose="02020603050405020304" pitchFamily="18" charset="0"/>
+            </a:endParaRPr>
+          </a:p>
+          <a:p>
+            <a:endParaRPr lang="hu-HU" dirty="0">
+              <a:solidFill>
+                <a:schemeClr val="bg1"/>
+              </a:solidFill>
+            </a:endParaRPr>
+          </a:p>
+        </p:txBody>
+      </p:sp>
+    </p:spTree>
+    <p:extLst>
+      <p:ext uri="{BB962C8B-B14F-4D97-AF65-F5344CB8AC3E}">
+        <p14:creationId xmlns:p14="http://schemas.microsoft.com/office/powerpoint/2010/main" val="1645074220"/>
       </p:ext>
     </p:extLst>
   </p:cSld>
@@ -6564,6 +8738,294 @@
   <p:clrMapOvr>
     <a:masterClrMapping/>
   </p:clrMapOvr>
+  <mc:AlternateContent xmlns:mc="http://schemas.openxmlformats.org/markup-compatibility/2006">
+    <mc:Choice xmlns:p14="http://schemas.microsoft.com/office/powerpoint/2010/main" Requires="p14">
+      <p:transition spd="med" p14:dur="700">
+        <p:fade/>
+      </p:transition>
+    </mc:Choice>
+    <mc:Fallback>
+      <p:transition spd="med">
+        <p:fade/>
+      </p:transition>
+    </mc:Fallback>
+  </mc:AlternateContent>
+  <p:timing>
+    <p:tnLst>
+      <p:par>
+        <p:cTn id="1" dur="indefinite" restart="never" nodeType="tmRoot">
+          <p:childTnLst>
+            <p:seq concurrent="1" nextAc="seek">
+              <p:cTn id="2" dur="indefinite" nodeType="mainSeq">
+                <p:childTnLst>
+                  <p:par>
+                    <p:cTn id="3" fill="hold">
+                      <p:stCondLst>
+                        <p:cond delay="indefinite"/>
+                      </p:stCondLst>
+                      <p:childTnLst>
+                        <p:par>
+                          <p:cTn id="4" fill="hold">
+                            <p:stCondLst>
+                              <p:cond delay="0"/>
+                            </p:stCondLst>
+                            <p:childTnLst>
+                              <p:par>
+                                <p:cTn id="5" presetID="10" presetClass="entr" presetSubtype="0" fill="hold" grpId="0" nodeType="clickEffect">
+                                  <p:stCondLst>
+                                    <p:cond delay="0"/>
+                                  </p:stCondLst>
+                                  <p:childTnLst>
+                                    <p:set>
+                                      <p:cBhvr>
+                                        <p:cTn id="6" dur="1" fill="hold">
+                                          <p:stCondLst>
+                                            <p:cond delay="0"/>
+                                          </p:stCondLst>
+                                        </p:cTn>
+                                        <p:tgtEl>
+                                          <p:spTgt spid="2"/>
+                                        </p:tgtEl>
+                                        <p:attrNameLst>
+                                          <p:attrName>style.visibility</p:attrName>
+                                        </p:attrNameLst>
+                                      </p:cBhvr>
+                                      <p:to>
+                                        <p:strVal val="visible"/>
+                                      </p:to>
+                                    </p:set>
+                                    <p:animEffect transition="in" filter="fade">
+                                      <p:cBhvr>
+                                        <p:cTn id="7" dur="500"/>
+                                        <p:tgtEl>
+                                          <p:spTgt spid="2"/>
+                                        </p:tgtEl>
+                                      </p:cBhvr>
+                                    </p:animEffect>
+                                  </p:childTnLst>
+                                </p:cTn>
+                              </p:par>
+                            </p:childTnLst>
+                          </p:cTn>
+                        </p:par>
+                      </p:childTnLst>
+                    </p:cTn>
+                  </p:par>
+                  <p:par>
+                    <p:cTn id="8" fill="hold">
+                      <p:stCondLst>
+                        <p:cond delay="indefinite"/>
+                      </p:stCondLst>
+                      <p:childTnLst>
+                        <p:par>
+                          <p:cTn id="9" fill="hold">
+                            <p:stCondLst>
+                              <p:cond delay="0"/>
+                            </p:stCondLst>
+                            <p:childTnLst>
+                              <p:par>
+                                <p:cTn id="10" presetID="10" presetClass="entr" presetSubtype="0" fill="hold" nodeType="clickEffect">
+                                  <p:stCondLst>
+                                    <p:cond delay="0"/>
+                                  </p:stCondLst>
+                                  <p:childTnLst>
+                                    <p:set>
+                                      <p:cBhvr>
+                                        <p:cTn id="11" dur="1" fill="hold">
+                                          <p:stCondLst>
+                                            <p:cond delay="0"/>
+                                          </p:stCondLst>
+                                        </p:cTn>
+                                        <p:tgtEl>
+                                          <p:spTgt spid="3">
+                                            <p:txEl>
+                                              <p:pRg st="0" end="0"/>
+                                            </p:txEl>
+                                          </p:spTgt>
+                                        </p:tgtEl>
+                                        <p:attrNameLst>
+                                          <p:attrName>style.visibility</p:attrName>
+                                        </p:attrNameLst>
+                                      </p:cBhvr>
+                                      <p:to>
+                                        <p:strVal val="visible"/>
+                                      </p:to>
+                                    </p:set>
+                                    <p:animEffect transition="in" filter="fade">
+                                      <p:cBhvr>
+                                        <p:cTn id="12" dur="500"/>
+                                        <p:tgtEl>
+                                          <p:spTgt spid="3">
+                                            <p:txEl>
+                                              <p:pRg st="0" end="0"/>
+                                            </p:txEl>
+                                          </p:spTgt>
+                                        </p:tgtEl>
+                                      </p:cBhvr>
+                                    </p:animEffect>
+                                  </p:childTnLst>
+                                </p:cTn>
+                              </p:par>
+                              <p:par>
+                                <p:cTn id="13" presetID="10" presetClass="entr" presetSubtype="0" fill="hold" nodeType="withEffect">
+                                  <p:stCondLst>
+                                    <p:cond delay="0"/>
+                                  </p:stCondLst>
+                                  <p:childTnLst>
+                                    <p:set>
+                                      <p:cBhvr>
+                                        <p:cTn id="14" dur="1" fill="hold">
+                                          <p:stCondLst>
+                                            <p:cond delay="0"/>
+                                          </p:stCondLst>
+                                        </p:cTn>
+                                        <p:tgtEl>
+                                          <p:spTgt spid="3">
+                                            <p:txEl>
+                                              <p:pRg st="1" end="1"/>
+                                            </p:txEl>
+                                          </p:spTgt>
+                                        </p:tgtEl>
+                                        <p:attrNameLst>
+                                          <p:attrName>style.visibility</p:attrName>
+                                        </p:attrNameLst>
+                                      </p:cBhvr>
+                                      <p:to>
+                                        <p:strVal val="visible"/>
+                                      </p:to>
+                                    </p:set>
+                                    <p:animEffect transition="in" filter="fade">
+                                      <p:cBhvr>
+                                        <p:cTn id="15" dur="500"/>
+                                        <p:tgtEl>
+                                          <p:spTgt spid="3">
+                                            <p:txEl>
+                                              <p:pRg st="1" end="1"/>
+                                            </p:txEl>
+                                          </p:spTgt>
+                                        </p:tgtEl>
+                                      </p:cBhvr>
+                                    </p:animEffect>
+                                  </p:childTnLst>
+                                </p:cTn>
+                              </p:par>
+                              <p:par>
+                                <p:cTn id="16" presetID="10" presetClass="entr" presetSubtype="0" fill="hold" nodeType="withEffect">
+                                  <p:stCondLst>
+                                    <p:cond delay="0"/>
+                                  </p:stCondLst>
+                                  <p:childTnLst>
+                                    <p:set>
+                                      <p:cBhvr>
+                                        <p:cTn id="17" dur="1" fill="hold">
+                                          <p:stCondLst>
+                                            <p:cond delay="0"/>
+                                          </p:stCondLst>
+                                        </p:cTn>
+                                        <p:tgtEl>
+                                          <p:spTgt spid="3">
+                                            <p:txEl>
+                                              <p:pRg st="2" end="2"/>
+                                            </p:txEl>
+                                          </p:spTgt>
+                                        </p:tgtEl>
+                                        <p:attrNameLst>
+                                          <p:attrName>style.visibility</p:attrName>
+                                        </p:attrNameLst>
+                                      </p:cBhvr>
+                                      <p:to>
+                                        <p:strVal val="visible"/>
+                                      </p:to>
+                                    </p:set>
+                                    <p:animEffect transition="in" filter="fade">
+                                      <p:cBhvr>
+                                        <p:cTn id="18" dur="500"/>
+                                        <p:tgtEl>
+                                          <p:spTgt spid="3">
+                                            <p:txEl>
+                                              <p:pRg st="2" end="2"/>
+                                            </p:txEl>
+                                          </p:spTgt>
+                                        </p:tgtEl>
+                                      </p:cBhvr>
+                                    </p:animEffect>
+                                  </p:childTnLst>
+                                </p:cTn>
+                              </p:par>
+                              <p:par>
+                                <p:cTn id="19" presetID="10" presetClass="entr" presetSubtype="0" fill="hold" nodeType="withEffect">
+                                  <p:stCondLst>
+                                    <p:cond delay="0"/>
+                                  </p:stCondLst>
+                                  <p:childTnLst>
+                                    <p:set>
+                                      <p:cBhvr>
+                                        <p:cTn id="20" dur="1" fill="hold">
+                                          <p:stCondLst>
+                                            <p:cond delay="0"/>
+                                          </p:stCondLst>
+                                        </p:cTn>
+                                        <p:tgtEl>
+                                          <p:spTgt spid="3">
+                                            <p:txEl>
+                                              <p:pRg st="3" end="3"/>
+                                            </p:txEl>
+                                          </p:spTgt>
+                                        </p:tgtEl>
+                                        <p:attrNameLst>
+                                          <p:attrName>style.visibility</p:attrName>
+                                        </p:attrNameLst>
+                                      </p:cBhvr>
+                                      <p:to>
+                                        <p:strVal val="visible"/>
+                                      </p:to>
+                                    </p:set>
+                                    <p:animEffect transition="in" filter="fade">
+                                      <p:cBhvr>
+                                        <p:cTn id="21" dur="500"/>
+                                        <p:tgtEl>
+                                          <p:spTgt spid="3">
+                                            <p:txEl>
+                                              <p:pRg st="3" end="3"/>
+                                            </p:txEl>
+                                          </p:spTgt>
+                                        </p:tgtEl>
+                                      </p:cBhvr>
+                                    </p:animEffect>
+                                  </p:childTnLst>
+                                </p:cTn>
+                              </p:par>
+                            </p:childTnLst>
+                          </p:cTn>
+                        </p:par>
+                      </p:childTnLst>
+                    </p:cTn>
+                  </p:par>
+                </p:childTnLst>
+              </p:cTn>
+              <p:prevCondLst>
+                <p:cond evt="onPrev" delay="0">
+                  <p:tgtEl>
+                    <p:sldTgt/>
+                  </p:tgtEl>
+                </p:cond>
+              </p:prevCondLst>
+              <p:nextCondLst>
+                <p:cond evt="onNext" delay="0">
+                  <p:tgtEl>
+                    <p:sldTgt/>
+                  </p:tgtEl>
+                </p:cond>
+              </p:nextCondLst>
+            </p:seq>
+          </p:childTnLst>
+        </p:cTn>
+      </p:par>
+    </p:tnLst>
+    <p:bldLst>
+      <p:bldP spid="2" grpId="0"/>
+    </p:bldLst>
+  </p:timing>
 </p:sld>
 </file>
 
@@ -6791,6 +9253,251 @@
   <p:clrMapOvr>
     <a:masterClrMapping/>
   </p:clrMapOvr>
+  <mc:AlternateContent xmlns:mc="http://schemas.openxmlformats.org/markup-compatibility/2006">
+    <mc:Choice xmlns:p14="http://schemas.microsoft.com/office/powerpoint/2010/main" Requires="p14">
+      <p:transition spd="med" p14:dur="700">
+        <p:fade/>
+      </p:transition>
+    </mc:Choice>
+    <mc:Fallback>
+      <p:transition spd="med">
+        <p:fade/>
+      </p:transition>
+    </mc:Fallback>
+  </mc:AlternateContent>
+  <p:timing>
+    <p:tnLst>
+      <p:par>
+        <p:cTn id="1" dur="indefinite" restart="never" nodeType="tmRoot">
+          <p:childTnLst>
+            <p:seq concurrent="1" nextAc="seek">
+              <p:cTn id="2" dur="indefinite" nodeType="mainSeq">
+                <p:childTnLst>
+                  <p:par>
+                    <p:cTn id="3" fill="hold">
+                      <p:stCondLst>
+                        <p:cond delay="indefinite"/>
+                      </p:stCondLst>
+                      <p:childTnLst>
+                        <p:par>
+                          <p:cTn id="4" fill="hold">
+                            <p:stCondLst>
+                              <p:cond delay="0"/>
+                            </p:stCondLst>
+                            <p:childTnLst>
+                              <p:par>
+                                <p:cTn id="5" presetID="10" presetClass="entr" presetSubtype="0" fill="hold" grpId="0" nodeType="clickEffect">
+                                  <p:stCondLst>
+                                    <p:cond delay="0"/>
+                                  </p:stCondLst>
+                                  <p:childTnLst>
+                                    <p:set>
+                                      <p:cBhvr>
+                                        <p:cTn id="6" dur="1" fill="hold">
+                                          <p:stCondLst>
+                                            <p:cond delay="0"/>
+                                          </p:stCondLst>
+                                        </p:cTn>
+                                        <p:tgtEl>
+                                          <p:spTgt spid="2"/>
+                                        </p:tgtEl>
+                                        <p:attrNameLst>
+                                          <p:attrName>style.visibility</p:attrName>
+                                        </p:attrNameLst>
+                                      </p:cBhvr>
+                                      <p:to>
+                                        <p:strVal val="visible"/>
+                                      </p:to>
+                                    </p:set>
+                                    <p:animEffect transition="in" filter="fade">
+                                      <p:cBhvr>
+                                        <p:cTn id="7" dur="500"/>
+                                        <p:tgtEl>
+                                          <p:spTgt spid="2"/>
+                                        </p:tgtEl>
+                                      </p:cBhvr>
+                                    </p:animEffect>
+                                  </p:childTnLst>
+                                </p:cTn>
+                              </p:par>
+                            </p:childTnLst>
+                          </p:cTn>
+                        </p:par>
+                      </p:childTnLst>
+                    </p:cTn>
+                  </p:par>
+                  <p:par>
+                    <p:cTn id="8" fill="hold">
+                      <p:stCondLst>
+                        <p:cond delay="indefinite"/>
+                      </p:stCondLst>
+                      <p:childTnLst>
+                        <p:par>
+                          <p:cTn id="9" fill="hold">
+                            <p:stCondLst>
+                              <p:cond delay="0"/>
+                            </p:stCondLst>
+                            <p:childTnLst>
+                              <p:par>
+                                <p:cTn id="10" presetID="10" presetClass="entr" presetSubtype="0" fill="hold" nodeType="clickEffect">
+                                  <p:stCondLst>
+                                    <p:cond delay="0"/>
+                                  </p:stCondLst>
+                                  <p:childTnLst>
+                                    <p:set>
+                                      <p:cBhvr>
+                                        <p:cTn id="11" dur="1" fill="hold">
+                                          <p:stCondLst>
+                                            <p:cond delay="0"/>
+                                          </p:stCondLst>
+                                        </p:cTn>
+                                        <p:tgtEl>
+                                          <p:spTgt spid="3">
+                                            <p:txEl>
+                                              <p:pRg st="0" end="0"/>
+                                            </p:txEl>
+                                          </p:spTgt>
+                                        </p:tgtEl>
+                                        <p:attrNameLst>
+                                          <p:attrName>style.visibility</p:attrName>
+                                        </p:attrNameLst>
+                                      </p:cBhvr>
+                                      <p:to>
+                                        <p:strVal val="visible"/>
+                                      </p:to>
+                                    </p:set>
+                                    <p:animEffect transition="in" filter="fade">
+                                      <p:cBhvr>
+                                        <p:cTn id="12" dur="500"/>
+                                        <p:tgtEl>
+                                          <p:spTgt spid="3">
+                                            <p:txEl>
+                                              <p:pRg st="0" end="0"/>
+                                            </p:txEl>
+                                          </p:spTgt>
+                                        </p:tgtEl>
+                                      </p:cBhvr>
+                                    </p:animEffect>
+                                  </p:childTnLst>
+                                </p:cTn>
+                              </p:par>
+                              <p:par>
+                                <p:cTn id="13" presetID="10" presetClass="entr" presetSubtype="0" fill="hold" nodeType="withEffect">
+                                  <p:stCondLst>
+                                    <p:cond delay="0"/>
+                                  </p:stCondLst>
+                                  <p:childTnLst>
+                                    <p:set>
+                                      <p:cBhvr>
+                                        <p:cTn id="14" dur="1" fill="hold">
+                                          <p:stCondLst>
+                                            <p:cond delay="0"/>
+                                          </p:stCondLst>
+                                        </p:cTn>
+                                        <p:tgtEl>
+                                          <p:spTgt spid="3">
+                                            <p:txEl>
+                                              <p:pRg st="1" end="1"/>
+                                            </p:txEl>
+                                          </p:spTgt>
+                                        </p:tgtEl>
+                                        <p:attrNameLst>
+                                          <p:attrName>style.visibility</p:attrName>
+                                        </p:attrNameLst>
+                                      </p:cBhvr>
+                                      <p:to>
+                                        <p:strVal val="visible"/>
+                                      </p:to>
+                                    </p:set>
+                                    <p:animEffect transition="in" filter="fade">
+                                      <p:cBhvr>
+                                        <p:cTn id="15" dur="500"/>
+                                        <p:tgtEl>
+                                          <p:spTgt spid="3">
+                                            <p:txEl>
+                                              <p:pRg st="1" end="1"/>
+                                            </p:txEl>
+                                          </p:spTgt>
+                                        </p:tgtEl>
+                                      </p:cBhvr>
+                                    </p:animEffect>
+                                  </p:childTnLst>
+                                </p:cTn>
+                              </p:par>
+                              <p:par>
+                                <p:cTn id="16" presetID="10" presetClass="entr" presetSubtype="0" fill="hold" nodeType="withEffect">
+                                  <p:stCondLst>
+                                    <p:cond delay="0"/>
+                                  </p:stCondLst>
+                                  <p:childTnLst>
+                                    <p:set>
+                                      <p:cBhvr>
+                                        <p:cTn id="17" dur="1" fill="hold">
+                                          <p:stCondLst>
+                                            <p:cond delay="0"/>
+                                          </p:stCondLst>
+                                        </p:cTn>
+                                        <p:tgtEl>
+                                          <p:spTgt spid="3">
+                                            <p:txEl>
+                                              <p:pRg st="2" end="2"/>
+                                            </p:txEl>
+                                          </p:spTgt>
+                                        </p:tgtEl>
+                                        <p:attrNameLst>
+                                          <p:attrName>style.visibility</p:attrName>
+                                        </p:attrNameLst>
+                                      </p:cBhvr>
+                                      <p:to>
+                                        <p:strVal val="visible"/>
+                                      </p:to>
+                                    </p:set>
+                                    <p:animEffect transition="in" filter="fade">
+                                      <p:cBhvr>
+                                        <p:cTn id="18" dur="500"/>
+                                        <p:tgtEl>
+                                          <p:spTgt spid="3">
+                                            <p:txEl>
+                                              <p:pRg st="2" end="2"/>
+                                            </p:txEl>
+                                          </p:spTgt>
+                                        </p:tgtEl>
+                                      </p:cBhvr>
+                                    </p:animEffect>
+                                  </p:childTnLst>
+                                </p:cTn>
+                              </p:par>
+                            </p:childTnLst>
+                          </p:cTn>
+                        </p:par>
+                      </p:childTnLst>
+                    </p:cTn>
+                  </p:par>
+                </p:childTnLst>
+              </p:cTn>
+              <p:prevCondLst>
+                <p:cond evt="onPrev" delay="0">
+                  <p:tgtEl>
+                    <p:sldTgt/>
+                  </p:tgtEl>
+                </p:cond>
+              </p:prevCondLst>
+              <p:nextCondLst>
+                <p:cond evt="onNext" delay="0">
+                  <p:tgtEl>
+                    <p:sldTgt/>
+                  </p:tgtEl>
+                </p:cond>
+              </p:nextCondLst>
+            </p:seq>
+          </p:childTnLst>
+        </p:cTn>
+      </p:par>
+    </p:tnLst>
+    <p:bldLst>
+      <p:bldP spid="2" grpId="0"/>
+    </p:bldLst>
+  </p:timing>
 </p:sld>
 </file>
 
@@ -7010,6 +9717,208 @@
   <p:clrMapOvr>
     <a:masterClrMapping/>
   </p:clrMapOvr>
+  <mc:AlternateContent xmlns:mc="http://schemas.openxmlformats.org/markup-compatibility/2006">
+    <mc:Choice xmlns:p14="http://schemas.microsoft.com/office/powerpoint/2010/main" Requires="p14">
+      <p:transition spd="med" p14:dur="700">
+        <p:fade/>
+      </p:transition>
+    </mc:Choice>
+    <mc:Fallback>
+      <p:transition spd="med">
+        <p:fade/>
+      </p:transition>
+    </mc:Fallback>
+  </mc:AlternateContent>
+  <p:timing>
+    <p:tnLst>
+      <p:par>
+        <p:cTn id="1" dur="indefinite" restart="never" nodeType="tmRoot">
+          <p:childTnLst>
+            <p:seq concurrent="1" nextAc="seek">
+              <p:cTn id="2" dur="indefinite" nodeType="mainSeq">
+                <p:childTnLst>
+                  <p:par>
+                    <p:cTn id="3" fill="hold">
+                      <p:stCondLst>
+                        <p:cond delay="indefinite"/>
+                      </p:stCondLst>
+                      <p:childTnLst>
+                        <p:par>
+                          <p:cTn id="4" fill="hold">
+                            <p:stCondLst>
+                              <p:cond delay="0"/>
+                            </p:stCondLst>
+                            <p:childTnLst>
+                              <p:par>
+                                <p:cTn id="5" presetID="10" presetClass="entr" presetSubtype="0" fill="hold" grpId="0" nodeType="clickEffect">
+                                  <p:stCondLst>
+                                    <p:cond delay="0"/>
+                                  </p:stCondLst>
+                                  <p:childTnLst>
+                                    <p:set>
+                                      <p:cBhvr>
+                                        <p:cTn id="6" dur="1" fill="hold">
+                                          <p:stCondLst>
+                                            <p:cond delay="0"/>
+                                          </p:stCondLst>
+                                        </p:cTn>
+                                        <p:tgtEl>
+                                          <p:spTgt spid="2"/>
+                                        </p:tgtEl>
+                                        <p:attrNameLst>
+                                          <p:attrName>style.visibility</p:attrName>
+                                        </p:attrNameLst>
+                                      </p:cBhvr>
+                                      <p:to>
+                                        <p:strVal val="visible"/>
+                                      </p:to>
+                                    </p:set>
+                                    <p:animEffect transition="in" filter="fade">
+                                      <p:cBhvr>
+                                        <p:cTn id="7" dur="500"/>
+                                        <p:tgtEl>
+                                          <p:spTgt spid="2"/>
+                                        </p:tgtEl>
+                                      </p:cBhvr>
+                                    </p:animEffect>
+                                  </p:childTnLst>
+                                </p:cTn>
+                              </p:par>
+                            </p:childTnLst>
+                          </p:cTn>
+                        </p:par>
+                      </p:childTnLst>
+                    </p:cTn>
+                  </p:par>
+                  <p:par>
+                    <p:cTn id="8" fill="hold">
+                      <p:stCondLst>
+                        <p:cond delay="indefinite"/>
+                      </p:stCondLst>
+                      <p:childTnLst>
+                        <p:par>
+                          <p:cTn id="9" fill="hold">
+                            <p:stCondLst>
+                              <p:cond delay="0"/>
+                            </p:stCondLst>
+                            <p:childTnLst>
+                              <p:par>
+                                <p:cTn id="10" presetID="10" presetClass="entr" presetSubtype="0" fill="hold" nodeType="clickEffect">
+                                  <p:stCondLst>
+                                    <p:cond delay="0"/>
+                                  </p:stCondLst>
+                                  <p:childTnLst>
+                                    <p:set>
+                                      <p:cBhvr>
+                                        <p:cTn id="11" dur="1" fill="hold">
+                                          <p:stCondLst>
+                                            <p:cond delay="0"/>
+                                          </p:stCondLst>
+                                        </p:cTn>
+                                        <p:tgtEl>
+                                          <p:spTgt spid="3">
+                                            <p:txEl>
+                                              <p:pRg st="0" end="0"/>
+                                            </p:txEl>
+                                          </p:spTgt>
+                                        </p:tgtEl>
+                                        <p:attrNameLst>
+                                          <p:attrName>style.visibility</p:attrName>
+                                        </p:attrNameLst>
+                                      </p:cBhvr>
+                                      <p:to>
+                                        <p:strVal val="visible"/>
+                                      </p:to>
+                                    </p:set>
+                                    <p:animEffect transition="in" filter="fade">
+                                      <p:cBhvr>
+                                        <p:cTn id="12" dur="500"/>
+                                        <p:tgtEl>
+                                          <p:spTgt spid="3">
+                                            <p:txEl>
+                                              <p:pRg st="0" end="0"/>
+                                            </p:txEl>
+                                          </p:spTgt>
+                                        </p:tgtEl>
+                                      </p:cBhvr>
+                                    </p:animEffect>
+                                  </p:childTnLst>
+                                </p:cTn>
+                              </p:par>
+                              <p:par>
+                                <p:cTn id="13" presetID="10" presetClass="entr" presetSubtype="0" fill="hold" nodeType="withEffect">
+                                  <p:stCondLst>
+                                    <p:cond delay="0"/>
+                                  </p:stCondLst>
+                                  <p:childTnLst>
+                                    <p:set>
+                                      <p:cBhvr>
+                                        <p:cTn id="14" dur="1" fill="hold">
+                                          <p:stCondLst>
+                                            <p:cond delay="0"/>
+                                          </p:stCondLst>
+                                        </p:cTn>
+                                        <p:tgtEl>
+                                          <p:spTgt spid="3">
+                                            <p:txEl>
+                                              <p:pRg st="1" end="1"/>
+                                            </p:txEl>
+                                          </p:spTgt>
+                                        </p:tgtEl>
+                                        <p:attrNameLst>
+                                          <p:attrName>style.visibility</p:attrName>
+                                        </p:attrNameLst>
+                                      </p:cBhvr>
+                                      <p:to>
+                                        <p:strVal val="visible"/>
+                                      </p:to>
+                                    </p:set>
+                                    <p:animEffect transition="in" filter="fade">
+                                      <p:cBhvr>
+                                        <p:cTn id="15" dur="500"/>
+                                        <p:tgtEl>
+                                          <p:spTgt spid="3">
+                                            <p:txEl>
+                                              <p:pRg st="1" end="1"/>
+                                            </p:txEl>
+                                          </p:spTgt>
+                                        </p:tgtEl>
+                                      </p:cBhvr>
+                                    </p:animEffect>
+                                  </p:childTnLst>
+                                </p:cTn>
+                              </p:par>
+                            </p:childTnLst>
+                          </p:cTn>
+                        </p:par>
+                      </p:childTnLst>
+                    </p:cTn>
+                  </p:par>
+                </p:childTnLst>
+              </p:cTn>
+              <p:prevCondLst>
+                <p:cond evt="onPrev" delay="0">
+                  <p:tgtEl>
+                    <p:sldTgt/>
+                  </p:tgtEl>
+                </p:cond>
+              </p:prevCondLst>
+              <p:nextCondLst>
+                <p:cond evt="onNext" delay="0">
+                  <p:tgtEl>
+                    <p:sldTgt/>
+                  </p:tgtEl>
+                </p:cond>
+              </p:nextCondLst>
+            </p:seq>
+          </p:childTnLst>
+        </p:cTn>
+      </p:par>
+    </p:tnLst>
+    <p:bldLst>
+      <p:bldP spid="2" grpId="0"/>
+    </p:bldLst>
+  </p:timing>
 </p:sld>
 </file>
 
@@ -7129,6 +10038,66 @@
                 <a:latin typeface="Times New Roman" panose="02020603050405020304" pitchFamily="18" charset="0"/>
                 <a:cs typeface="Times New Roman" panose="02020603050405020304" pitchFamily="18" charset="0"/>
               </a:rPr>
+              <a:t>Frontend-Vue.js</a:t>
+            </a:r>
+          </a:p>
+          <a:p>
+            <a:pPr lvl="1">
+              <a:buFont typeface="Courier New" panose="02070309020205020404" pitchFamily="49" charset="0"/>
+              <a:buChar char="o"/>
+            </a:pPr>
+            <a:r>
+              <a:rPr lang="hu-HU" dirty="0">
+                <a:solidFill>
+                  <a:schemeClr val="bg1"/>
+                </a:solidFill>
+                <a:latin typeface="Times New Roman" panose="02020603050405020304" pitchFamily="18" charset="0"/>
+                <a:cs typeface="Times New Roman" panose="02020603050405020304" pitchFamily="18" charset="0"/>
+              </a:rPr>
+              <a:t>HTML5</a:t>
+            </a:r>
+          </a:p>
+          <a:p>
+            <a:pPr lvl="1">
+              <a:buFont typeface="Courier New" panose="02070309020205020404" pitchFamily="49" charset="0"/>
+              <a:buChar char="o"/>
+            </a:pPr>
+            <a:r>
+              <a:rPr lang="hu-HU" dirty="0">
+                <a:solidFill>
+                  <a:schemeClr val="bg1"/>
+                </a:solidFill>
+                <a:latin typeface="Times New Roman" panose="02020603050405020304" pitchFamily="18" charset="0"/>
+                <a:cs typeface="Times New Roman" panose="02020603050405020304" pitchFamily="18" charset="0"/>
+              </a:rPr>
+              <a:t>CSS3</a:t>
+            </a:r>
+          </a:p>
+          <a:p>
+            <a:pPr lvl="1">
+              <a:buFont typeface="Courier New" panose="02070309020205020404" pitchFamily="49" charset="0"/>
+              <a:buChar char="o"/>
+            </a:pPr>
+            <a:r>
+              <a:rPr lang="hu-HU" dirty="0">
+                <a:solidFill>
+                  <a:schemeClr val="bg1"/>
+                </a:solidFill>
+                <a:latin typeface="Times New Roman" panose="02020603050405020304" pitchFamily="18" charset="0"/>
+                <a:cs typeface="Times New Roman" panose="02020603050405020304" pitchFamily="18" charset="0"/>
+              </a:rPr>
+              <a:t>JavaScript</a:t>
+            </a:r>
+          </a:p>
+          <a:p>
+            <a:r>
+              <a:rPr lang="hu-HU" dirty="0">
+                <a:solidFill>
+                  <a:schemeClr val="bg1"/>
+                </a:solidFill>
+                <a:latin typeface="Times New Roman" panose="02020603050405020304" pitchFamily="18" charset="0"/>
+                <a:cs typeface="Times New Roman" panose="02020603050405020304" pitchFamily="18" charset="0"/>
+              </a:rPr>
               <a:t>Backend-</a:t>
             </a:r>
             <a:r>
@@ -7203,78 +10172,6 @@
               </a:rPr>
               <a:t>JSON</a:t>
             </a:r>
-          </a:p>
-          <a:p>
-            <a:r>
-              <a:rPr lang="hu-HU" dirty="0">
-                <a:solidFill>
-                  <a:schemeClr val="bg1"/>
-                </a:solidFill>
-                <a:latin typeface="Times New Roman" panose="02020603050405020304" pitchFamily="18" charset="0"/>
-                <a:cs typeface="Times New Roman" panose="02020603050405020304" pitchFamily="18" charset="0"/>
-              </a:rPr>
-              <a:t>Frontend-Vue.js</a:t>
-            </a:r>
-          </a:p>
-          <a:p>
-            <a:pPr lvl="1">
-              <a:buFont typeface="Courier New" panose="02070309020205020404" pitchFamily="49" charset="0"/>
-              <a:buChar char="o"/>
-            </a:pPr>
-            <a:r>
-              <a:rPr lang="hu-HU" dirty="0">
-                <a:solidFill>
-                  <a:schemeClr val="bg1"/>
-                </a:solidFill>
-                <a:latin typeface="Times New Roman" panose="02020603050405020304" pitchFamily="18" charset="0"/>
-                <a:cs typeface="Times New Roman" panose="02020603050405020304" pitchFamily="18" charset="0"/>
-              </a:rPr>
-              <a:t>HTML5</a:t>
-            </a:r>
-          </a:p>
-          <a:p>
-            <a:pPr lvl="1">
-              <a:buFont typeface="Courier New" panose="02070309020205020404" pitchFamily="49" charset="0"/>
-              <a:buChar char="o"/>
-            </a:pPr>
-            <a:r>
-              <a:rPr lang="hu-HU" dirty="0">
-                <a:solidFill>
-                  <a:schemeClr val="bg1"/>
-                </a:solidFill>
-                <a:latin typeface="Times New Roman" panose="02020603050405020304" pitchFamily="18" charset="0"/>
-                <a:cs typeface="Times New Roman" panose="02020603050405020304" pitchFamily="18" charset="0"/>
-              </a:rPr>
-              <a:t>CSS3</a:t>
-            </a:r>
-          </a:p>
-          <a:p>
-            <a:pPr lvl="1">
-              <a:buFont typeface="Courier New" panose="02070309020205020404" pitchFamily="49" charset="0"/>
-              <a:buChar char="o"/>
-            </a:pPr>
-            <a:r>
-              <a:rPr lang="hu-HU" dirty="0">
-                <a:solidFill>
-                  <a:schemeClr val="bg1"/>
-                </a:solidFill>
-                <a:latin typeface="Times New Roman" panose="02020603050405020304" pitchFamily="18" charset="0"/>
-                <a:cs typeface="Times New Roman" panose="02020603050405020304" pitchFamily="18" charset="0"/>
-              </a:rPr>
-              <a:t>JavaScript</a:t>
-            </a:r>
-            <a:endParaRPr lang="hu-HU" dirty="0">
-              <a:solidFill>
-                <a:schemeClr val="bg1"/>
-              </a:solidFill>
-            </a:endParaRPr>
-          </a:p>
-          <a:p>
-            <a:pPr lvl="1">
-              <a:buFont typeface="Courier New" panose="02070309020205020404" pitchFamily="49" charset="0"/>
-              <a:buChar char="o"/>
-            </a:pPr>
-            <a:endParaRPr lang="hu-HU" dirty="0"/>
           </a:p>
         </p:txBody>
       </p:sp>
@@ -7324,6 +10221,484 @@
   <p:clrMapOvr>
     <a:masterClrMapping/>
   </p:clrMapOvr>
+  <mc:AlternateContent xmlns:mc="http://schemas.openxmlformats.org/markup-compatibility/2006">
+    <mc:Choice xmlns:p14="http://schemas.microsoft.com/office/powerpoint/2010/main" Requires="p14">
+      <p:transition spd="med" p14:dur="700">
+        <p:fade/>
+      </p:transition>
+    </mc:Choice>
+    <mc:Fallback>
+      <p:transition spd="med">
+        <p:fade/>
+      </p:transition>
+    </mc:Fallback>
+  </mc:AlternateContent>
+  <p:timing>
+    <p:tnLst>
+      <p:par>
+        <p:cTn id="1" dur="indefinite" restart="never" nodeType="tmRoot">
+          <p:childTnLst>
+            <p:seq concurrent="1" nextAc="seek">
+              <p:cTn id="2" dur="indefinite" nodeType="mainSeq">
+                <p:childTnLst>
+                  <p:par>
+                    <p:cTn id="3" fill="hold">
+                      <p:stCondLst>
+                        <p:cond delay="indefinite"/>
+                      </p:stCondLst>
+                      <p:childTnLst>
+                        <p:par>
+                          <p:cTn id="4" fill="hold">
+                            <p:stCondLst>
+                              <p:cond delay="0"/>
+                            </p:stCondLst>
+                            <p:childTnLst>
+                              <p:par>
+                                <p:cTn id="5" presetID="10" presetClass="entr" presetSubtype="0" fill="hold" grpId="0" nodeType="clickEffect">
+                                  <p:stCondLst>
+                                    <p:cond delay="0"/>
+                                  </p:stCondLst>
+                                  <p:childTnLst>
+                                    <p:set>
+                                      <p:cBhvr>
+                                        <p:cTn id="6" dur="1" fill="hold">
+                                          <p:stCondLst>
+                                            <p:cond delay="0"/>
+                                          </p:stCondLst>
+                                        </p:cTn>
+                                        <p:tgtEl>
+                                          <p:spTgt spid="2"/>
+                                        </p:tgtEl>
+                                        <p:attrNameLst>
+                                          <p:attrName>style.visibility</p:attrName>
+                                        </p:attrNameLst>
+                                      </p:cBhvr>
+                                      <p:to>
+                                        <p:strVal val="visible"/>
+                                      </p:to>
+                                    </p:set>
+                                    <p:animEffect transition="in" filter="fade">
+                                      <p:cBhvr>
+                                        <p:cTn id="7" dur="500"/>
+                                        <p:tgtEl>
+                                          <p:spTgt spid="2"/>
+                                        </p:tgtEl>
+                                      </p:cBhvr>
+                                    </p:animEffect>
+                                  </p:childTnLst>
+                                </p:cTn>
+                              </p:par>
+                            </p:childTnLst>
+                          </p:cTn>
+                        </p:par>
+                      </p:childTnLst>
+                    </p:cTn>
+                  </p:par>
+                  <p:par>
+                    <p:cTn id="8" fill="hold">
+                      <p:stCondLst>
+                        <p:cond delay="indefinite"/>
+                      </p:stCondLst>
+                      <p:childTnLst>
+                        <p:par>
+                          <p:cTn id="9" fill="hold">
+                            <p:stCondLst>
+                              <p:cond delay="0"/>
+                            </p:stCondLst>
+                            <p:childTnLst>
+                              <p:par>
+                                <p:cTn id="10" presetID="10" presetClass="entr" presetSubtype="0" fill="hold" nodeType="clickEffect">
+                                  <p:stCondLst>
+                                    <p:cond delay="0"/>
+                                  </p:stCondLst>
+                                  <p:childTnLst>
+                                    <p:set>
+                                      <p:cBhvr>
+                                        <p:cTn id="11" dur="1" fill="hold">
+                                          <p:stCondLst>
+                                            <p:cond delay="0"/>
+                                          </p:stCondLst>
+                                        </p:cTn>
+                                        <p:tgtEl>
+                                          <p:spTgt spid="3">
+                                            <p:txEl>
+                                              <p:pRg st="0" end="0"/>
+                                            </p:txEl>
+                                          </p:spTgt>
+                                        </p:tgtEl>
+                                        <p:attrNameLst>
+                                          <p:attrName>style.visibility</p:attrName>
+                                        </p:attrNameLst>
+                                      </p:cBhvr>
+                                      <p:to>
+                                        <p:strVal val="visible"/>
+                                      </p:to>
+                                    </p:set>
+                                    <p:animEffect transition="in" filter="fade">
+                                      <p:cBhvr>
+                                        <p:cTn id="12" dur="500"/>
+                                        <p:tgtEl>
+                                          <p:spTgt spid="3">
+                                            <p:txEl>
+                                              <p:pRg st="0" end="0"/>
+                                            </p:txEl>
+                                          </p:spTgt>
+                                        </p:tgtEl>
+                                      </p:cBhvr>
+                                    </p:animEffect>
+                                  </p:childTnLst>
+                                </p:cTn>
+                              </p:par>
+                              <p:par>
+                                <p:cTn id="13" presetID="10" presetClass="entr" presetSubtype="0" fill="hold" nodeType="withEffect">
+                                  <p:stCondLst>
+                                    <p:cond delay="0"/>
+                                  </p:stCondLst>
+                                  <p:childTnLst>
+                                    <p:set>
+                                      <p:cBhvr>
+                                        <p:cTn id="14" dur="1" fill="hold">
+                                          <p:stCondLst>
+                                            <p:cond delay="0"/>
+                                          </p:stCondLst>
+                                        </p:cTn>
+                                        <p:tgtEl>
+                                          <p:spTgt spid="3">
+                                            <p:txEl>
+                                              <p:pRg st="1" end="1"/>
+                                            </p:txEl>
+                                          </p:spTgt>
+                                        </p:tgtEl>
+                                        <p:attrNameLst>
+                                          <p:attrName>style.visibility</p:attrName>
+                                        </p:attrNameLst>
+                                      </p:cBhvr>
+                                      <p:to>
+                                        <p:strVal val="visible"/>
+                                      </p:to>
+                                    </p:set>
+                                    <p:animEffect transition="in" filter="fade">
+                                      <p:cBhvr>
+                                        <p:cTn id="15" dur="500"/>
+                                        <p:tgtEl>
+                                          <p:spTgt spid="3">
+                                            <p:txEl>
+                                              <p:pRg st="1" end="1"/>
+                                            </p:txEl>
+                                          </p:spTgt>
+                                        </p:tgtEl>
+                                      </p:cBhvr>
+                                    </p:animEffect>
+                                  </p:childTnLst>
+                                </p:cTn>
+                              </p:par>
+                              <p:par>
+                                <p:cTn id="16" presetID="10" presetClass="entr" presetSubtype="0" fill="hold" nodeType="withEffect">
+                                  <p:stCondLst>
+                                    <p:cond delay="0"/>
+                                  </p:stCondLst>
+                                  <p:childTnLst>
+                                    <p:set>
+                                      <p:cBhvr>
+                                        <p:cTn id="17" dur="1" fill="hold">
+                                          <p:stCondLst>
+                                            <p:cond delay="0"/>
+                                          </p:stCondLst>
+                                        </p:cTn>
+                                        <p:tgtEl>
+                                          <p:spTgt spid="3">
+                                            <p:txEl>
+                                              <p:pRg st="2" end="2"/>
+                                            </p:txEl>
+                                          </p:spTgt>
+                                        </p:tgtEl>
+                                        <p:attrNameLst>
+                                          <p:attrName>style.visibility</p:attrName>
+                                        </p:attrNameLst>
+                                      </p:cBhvr>
+                                      <p:to>
+                                        <p:strVal val="visible"/>
+                                      </p:to>
+                                    </p:set>
+                                    <p:animEffect transition="in" filter="fade">
+                                      <p:cBhvr>
+                                        <p:cTn id="18" dur="500"/>
+                                        <p:tgtEl>
+                                          <p:spTgt spid="3">
+                                            <p:txEl>
+                                              <p:pRg st="2" end="2"/>
+                                            </p:txEl>
+                                          </p:spTgt>
+                                        </p:tgtEl>
+                                      </p:cBhvr>
+                                    </p:animEffect>
+                                  </p:childTnLst>
+                                </p:cTn>
+                              </p:par>
+                              <p:par>
+                                <p:cTn id="19" presetID="10" presetClass="entr" presetSubtype="0" fill="hold" nodeType="withEffect">
+                                  <p:stCondLst>
+                                    <p:cond delay="0"/>
+                                  </p:stCondLst>
+                                  <p:childTnLst>
+                                    <p:set>
+                                      <p:cBhvr>
+                                        <p:cTn id="20" dur="1" fill="hold">
+                                          <p:stCondLst>
+                                            <p:cond delay="0"/>
+                                          </p:stCondLst>
+                                        </p:cTn>
+                                        <p:tgtEl>
+                                          <p:spTgt spid="3">
+                                            <p:txEl>
+                                              <p:pRg st="3" end="3"/>
+                                            </p:txEl>
+                                          </p:spTgt>
+                                        </p:tgtEl>
+                                        <p:attrNameLst>
+                                          <p:attrName>style.visibility</p:attrName>
+                                        </p:attrNameLst>
+                                      </p:cBhvr>
+                                      <p:to>
+                                        <p:strVal val="visible"/>
+                                      </p:to>
+                                    </p:set>
+                                    <p:animEffect transition="in" filter="fade">
+                                      <p:cBhvr>
+                                        <p:cTn id="21" dur="500"/>
+                                        <p:tgtEl>
+                                          <p:spTgt spid="3">
+                                            <p:txEl>
+                                              <p:pRg st="3" end="3"/>
+                                            </p:txEl>
+                                          </p:spTgt>
+                                        </p:tgtEl>
+                                      </p:cBhvr>
+                                    </p:animEffect>
+                                  </p:childTnLst>
+                                </p:cTn>
+                              </p:par>
+                            </p:childTnLst>
+                          </p:cTn>
+                        </p:par>
+                      </p:childTnLst>
+                    </p:cTn>
+                  </p:par>
+                  <p:par>
+                    <p:cTn id="22" fill="hold">
+                      <p:stCondLst>
+                        <p:cond delay="indefinite"/>
+                      </p:stCondLst>
+                      <p:childTnLst>
+                        <p:par>
+                          <p:cTn id="23" fill="hold">
+                            <p:stCondLst>
+                              <p:cond delay="0"/>
+                            </p:stCondLst>
+                            <p:childTnLst>
+                              <p:par>
+                                <p:cTn id="24" presetID="10" presetClass="entr" presetSubtype="0" fill="hold" nodeType="clickEffect">
+                                  <p:stCondLst>
+                                    <p:cond delay="0"/>
+                                  </p:stCondLst>
+                                  <p:childTnLst>
+                                    <p:set>
+                                      <p:cBhvr>
+                                        <p:cTn id="25" dur="1" fill="hold">
+                                          <p:stCondLst>
+                                            <p:cond delay="0"/>
+                                          </p:stCondLst>
+                                        </p:cTn>
+                                        <p:tgtEl>
+                                          <p:spTgt spid="3">
+                                            <p:txEl>
+                                              <p:pRg st="4" end="4"/>
+                                            </p:txEl>
+                                          </p:spTgt>
+                                        </p:tgtEl>
+                                        <p:attrNameLst>
+                                          <p:attrName>style.visibility</p:attrName>
+                                        </p:attrNameLst>
+                                      </p:cBhvr>
+                                      <p:to>
+                                        <p:strVal val="visible"/>
+                                      </p:to>
+                                    </p:set>
+                                    <p:animEffect transition="in" filter="fade">
+                                      <p:cBhvr>
+                                        <p:cTn id="26" dur="500"/>
+                                        <p:tgtEl>
+                                          <p:spTgt spid="3">
+                                            <p:txEl>
+                                              <p:pRg st="4" end="4"/>
+                                            </p:txEl>
+                                          </p:spTgt>
+                                        </p:tgtEl>
+                                      </p:cBhvr>
+                                    </p:animEffect>
+                                  </p:childTnLst>
+                                </p:cTn>
+                              </p:par>
+                              <p:par>
+                                <p:cTn id="27" presetID="10" presetClass="entr" presetSubtype="0" fill="hold" nodeType="withEffect">
+                                  <p:stCondLst>
+                                    <p:cond delay="0"/>
+                                  </p:stCondLst>
+                                  <p:childTnLst>
+                                    <p:set>
+                                      <p:cBhvr>
+                                        <p:cTn id="28" dur="1" fill="hold">
+                                          <p:stCondLst>
+                                            <p:cond delay="0"/>
+                                          </p:stCondLst>
+                                        </p:cTn>
+                                        <p:tgtEl>
+                                          <p:spTgt spid="3">
+                                            <p:txEl>
+                                              <p:pRg st="5" end="5"/>
+                                            </p:txEl>
+                                          </p:spTgt>
+                                        </p:tgtEl>
+                                        <p:attrNameLst>
+                                          <p:attrName>style.visibility</p:attrName>
+                                        </p:attrNameLst>
+                                      </p:cBhvr>
+                                      <p:to>
+                                        <p:strVal val="visible"/>
+                                      </p:to>
+                                    </p:set>
+                                    <p:animEffect transition="in" filter="fade">
+                                      <p:cBhvr>
+                                        <p:cTn id="29" dur="500"/>
+                                        <p:tgtEl>
+                                          <p:spTgt spid="3">
+                                            <p:txEl>
+                                              <p:pRg st="5" end="5"/>
+                                            </p:txEl>
+                                          </p:spTgt>
+                                        </p:tgtEl>
+                                      </p:cBhvr>
+                                    </p:animEffect>
+                                  </p:childTnLst>
+                                </p:cTn>
+                              </p:par>
+                              <p:par>
+                                <p:cTn id="30" presetID="10" presetClass="entr" presetSubtype="0" fill="hold" nodeType="withEffect">
+                                  <p:stCondLst>
+                                    <p:cond delay="0"/>
+                                  </p:stCondLst>
+                                  <p:childTnLst>
+                                    <p:set>
+                                      <p:cBhvr>
+                                        <p:cTn id="31" dur="1" fill="hold">
+                                          <p:stCondLst>
+                                            <p:cond delay="0"/>
+                                          </p:stCondLst>
+                                        </p:cTn>
+                                        <p:tgtEl>
+                                          <p:spTgt spid="3">
+                                            <p:txEl>
+                                              <p:pRg st="6" end="6"/>
+                                            </p:txEl>
+                                          </p:spTgt>
+                                        </p:tgtEl>
+                                        <p:attrNameLst>
+                                          <p:attrName>style.visibility</p:attrName>
+                                        </p:attrNameLst>
+                                      </p:cBhvr>
+                                      <p:to>
+                                        <p:strVal val="visible"/>
+                                      </p:to>
+                                    </p:set>
+                                    <p:animEffect transition="in" filter="fade">
+                                      <p:cBhvr>
+                                        <p:cTn id="32" dur="500"/>
+                                        <p:tgtEl>
+                                          <p:spTgt spid="3">
+                                            <p:txEl>
+                                              <p:pRg st="6" end="6"/>
+                                            </p:txEl>
+                                          </p:spTgt>
+                                        </p:tgtEl>
+                                      </p:cBhvr>
+                                    </p:animEffect>
+                                  </p:childTnLst>
+                                </p:cTn>
+                              </p:par>
+                              <p:par>
+                                <p:cTn id="33" presetID="10" presetClass="entr" presetSubtype="0" fill="hold" nodeType="withEffect">
+                                  <p:stCondLst>
+                                    <p:cond delay="0"/>
+                                  </p:stCondLst>
+                                  <p:childTnLst>
+                                    <p:set>
+                                      <p:cBhvr>
+                                        <p:cTn id="34" dur="1" fill="hold">
+                                          <p:stCondLst>
+                                            <p:cond delay="0"/>
+                                          </p:stCondLst>
+                                        </p:cTn>
+                                        <p:tgtEl>
+                                          <p:spTgt spid="3">
+                                            <p:txEl>
+                                              <p:pRg st="7" end="7"/>
+                                            </p:txEl>
+                                          </p:spTgt>
+                                        </p:tgtEl>
+                                        <p:attrNameLst>
+                                          <p:attrName>style.visibility</p:attrName>
+                                        </p:attrNameLst>
+                                      </p:cBhvr>
+                                      <p:to>
+                                        <p:strVal val="visible"/>
+                                      </p:to>
+                                    </p:set>
+                                    <p:animEffect transition="in" filter="fade">
+                                      <p:cBhvr>
+                                        <p:cTn id="35" dur="500"/>
+                                        <p:tgtEl>
+                                          <p:spTgt spid="3">
+                                            <p:txEl>
+                                              <p:pRg st="7" end="7"/>
+                                            </p:txEl>
+                                          </p:spTgt>
+                                        </p:tgtEl>
+                                      </p:cBhvr>
+                                    </p:animEffect>
+                                  </p:childTnLst>
+                                </p:cTn>
+                              </p:par>
+                            </p:childTnLst>
+                          </p:cTn>
+                        </p:par>
+                      </p:childTnLst>
+                    </p:cTn>
+                  </p:par>
+                </p:childTnLst>
+              </p:cTn>
+              <p:prevCondLst>
+                <p:cond evt="onPrev" delay="0">
+                  <p:tgtEl>
+                    <p:sldTgt/>
+                  </p:tgtEl>
+                </p:cond>
+              </p:prevCondLst>
+              <p:nextCondLst>
+                <p:cond evt="onNext" delay="0">
+                  <p:tgtEl>
+                    <p:sldTgt/>
+                  </p:tgtEl>
+                </p:cond>
+              </p:nextCondLst>
+            </p:seq>
+          </p:childTnLst>
+        </p:cTn>
+      </p:par>
+    </p:tnLst>
+    <p:bldLst>
+      <p:bldP spid="2" grpId="0"/>
+    </p:bldLst>
+  </p:timing>
 </p:sld>
 </file>
 
@@ -7676,6 +11051,294 @@
   <p:clrMapOvr>
     <a:masterClrMapping/>
   </p:clrMapOvr>
+  <mc:AlternateContent xmlns:mc="http://schemas.openxmlformats.org/markup-compatibility/2006">
+    <mc:Choice xmlns:p14="http://schemas.microsoft.com/office/powerpoint/2010/main" Requires="p14">
+      <p:transition spd="med" p14:dur="700">
+        <p:fade/>
+      </p:transition>
+    </mc:Choice>
+    <mc:Fallback>
+      <p:transition spd="med">
+        <p:fade/>
+      </p:transition>
+    </mc:Fallback>
+  </mc:AlternateContent>
+  <p:timing>
+    <p:tnLst>
+      <p:par>
+        <p:cTn id="1" dur="indefinite" restart="never" nodeType="tmRoot">
+          <p:childTnLst>
+            <p:seq concurrent="1" nextAc="seek">
+              <p:cTn id="2" dur="indefinite" nodeType="mainSeq">
+                <p:childTnLst>
+                  <p:par>
+                    <p:cTn id="3" fill="hold">
+                      <p:stCondLst>
+                        <p:cond delay="indefinite"/>
+                      </p:stCondLst>
+                      <p:childTnLst>
+                        <p:par>
+                          <p:cTn id="4" fill="hold">
+                            <p:stCondLst>
+                              <p:cond delay="0"/>
+                            </p:stCondLst>
+                            <p:childTnLst>
+                              <p:par>
+                                <p:cTn id="5" presetID="10" presetClass="entr" presetSubtype="0" fill="hold" grpId="0" nodeType="clickEffect">
+                                  <p:stCondLst>
+                                    <p:cond delay="0"/>
+                                  </p:stCondLst>
+                                  <p:childTnLst>
+                                    <p:set>
+                                      <p:cBhvr>
+                                        <p:cTn id="6" dur="1" fill="hold">
+                                          <p:stCondLst>
+                                            <p:cond delay="0"/>
+                                          </p:stCondLst>
+                                        </p:cTn>
+                                        <p:tgtEl>
+                                          <p:spTgt spid="2"/>
+                                        </p:tgtEl>
+                                        <p:attrNameLst>
+                                          <p:attrName>style.visibility</p:attrName>
+                                        </p:attrNameLst>
+                                      </p:cBhvr>
+                                      <p:to>
+                                        <p:strVal val="visible"/>
+                                      </p:to>
+                                    </p:set>
+                                    <p:animEffect transition="in" filter="fade">
+                                      <p:cBhvr>
+                                        <p:cTn id="7" dur="500"/>
+                                        <p:tgtEl>
+                                          <p:spTgt spid="2"/>
+                                        </p:tgtEl>
+                                      </p:cBhvr>
+                                    </p:animEffect>
+                                  </p:childTnLst>
+                                </p:cTn>
+                              </p:par>
+                            </p:childTnLst>
+                          </p:cTn>
+                        </p:par>
+                      </p:childTnLst>
+                    </p:cTn>
+                  </p:par>
+                  <p:par>
+                    <p:cTn id="8" fill="hold">
+                      <p:stCondLst>
+                        <p:cond delay="indefinite"/>
+                      </p:stCondLst>
+                      <p:childTnLst>
+                        <p:par>
+                          <p:cTn id="9" fill="hold">
+                            <p:stCondLst>
+                              <p:cond delay="0"/>
+                            </p:stCondLst>
+                            <p:childTnLst>
+                              <p:par>
+                                <p:cTn id="10" presetID="10" presetClass="entr" presetSubtype="0" fill="hold" nodeType="clickEffect">
+                                  <p:stCondLst>
+                                    <p:cond delay="0"/>
+                                  </p:stCondLst>
+                                  <p:childTnLst>
+                                    <p:set>
+                                      <p:cBhvr>
+                                        <p:cTn id="11" dur="1" fill="hold">
+                                          <p:stCondLst>
+                                            <p:cond delay="0"/>
+                                          </p:stCondLst>
+                                        </p:cTn>
+                                        <p:tgtEl>
+                                          <p:spTgt spid="3">
+                                            <p:txEl>
+                                              <p:pRg st="0" end="0"/>
+                                            </p:txEl>
+                                          </p:spTgt>
+                                        </p:tgtEl>
+                                        <p:attrNameLst>
+                                          <p:attrName>style.visibility</p:attrName>
+                                        </p:attrNameLst>
+                                      </p:cBhvr>
+                                      <p:to>
+                                        <p:strVal val="visible"/>
+                                      </p:to>
+                                    </p:set>
+                                    <p:animEffect transition="in" filter="fade">
+                                      <p:cBhvr>
+                                        <p:cTn id="12" dur="500"/>
+                                        <p:tgtEl>
+                                          <p:spTgt spid="3">
+                                            <p:txEl>
+                                              <p:pRg st="0" end="0"/>
+                                            </p:txEl>
+                                          </p:spTgt>
+                                        </p:tgtEl>
+                                      </p:cBhvr>
+                                    </p:animEffect>
+                                  </p:childTnLst>
+                                </p:cTn>
+                              </p:par>
+                              <p:par>
+                                <p:cTn id="13" presetID="10" presetClass="entr" presetSubtype="0" fill="hold" nodeType="withEffect">
+                                  <p:stCondLst>
+                                    <p:cond delay="0"/>
+                                  </p:stCondLst>
+                                  <p:childTnLst>
+                                    <p:set>
+                                      <p:cBhvr>
+                                        <p:cTn id="14" dur="1" fill="hold">
+                                          <p:stCondLst>
+                                            <p:cond delay="0"/>
+                                          </p:stCondLst>
+                                        </p:cTn>
+                                        <p:tgtEl>
+                                          <p:spTgt spid="3">
+                                            <p:txEl>
+                                              <p:pRg st="1" end="1"/>
+                                            </p:txEl>
+                                          </p:spTgt>
+                                        </p:tgtEl>
+                                        <p:attrNameLst>
+                                          <p:attrName>style.visibility</p:attrName>
+                                        </p:attrNameLst>
+                                      </p:cBhvr>
+                                      <p:to>
+                                        <p:strVal val="visible"/>
+                                      </p:to>
+                                    </p:set>
+                                    <p:animEffect transition="in" filter="fade">
+                                      <p:cBhvr>
+                                        <p:cTn id="15" dur="500"/>
+                                        <p:tgtEl>
+                                          <p:spTgt spid="3">
+                                            <p:txEl>
+                                              <p:pRg st="1" end="1"/>
+                                            </p:txEl>
+                                          </p:spTgt>
+                                        </p:tgtEl>
+                                      </p:cBhvr>
+                                    </p:animEffect>
+                                  </p:childTnLst>
+                                </p:cTn>
+                              </p:par>
+                              <p:par>
+                                <p:cTn id="16" presetID="10" presetClass="entr" presetSubtype="0" fill="hold" nodeType="withEffect">
+                                  <p:stCondLst>
+                                    <p:cond delay="0"/>
+                                  </p:stCondLst>
+                                  <p:childTnLst>
+                                    <p:set>
+                                      <p:cBhvr>
+                                        <p:cTn id="17" dur="1" fill="hold">
+                                          <p:stCondLst>
+                                            <p:cond delay="0"/>
+                                          </p:stCondLst>
+                                        </p:cTn>
+                                        <p:tgtEl>
+                                          <p:spTgt spid="3">
+                                            <p:txEl>
+                                              <p:pRg st="2" end="2"/>
+                                            </p:txEl>
+                                          </p:spTgt>
+                                        </p:tgtEl>
+                                        <p:attrNameLst>
+                                          <p:attrName>style.visibility</p:attrName>
+                                        </p:attrNameLst>
+                                      </p:cBhvr>
+                                      <p:to>
+                                        <p:strVal val="visible"/>
+                                      </p:to>
+                                    </p:set>
+                                    <p:animEffect transition="in" filter="fade">
+                                      <p:cBhvr>
+                                        <p:cTn id="18" dur="500"/>
+                                        <p:tgtEl>
+                                          <p:spTgt spid="3">
+                                            <p:txEl>
+                                              <p:pRg st="2" end="2"/>
+                                            </p:txEl>
+                                          </p:spTgt>
+                                        </p:tgtEl>
+                                      </p:cBhvr>
+                                    </p:animEffect>
+                                  </p:childTnLst>
+                                </p:cTn>
+                              </p:par>
+                              <p:par>
+                                <p:cTn id="19" presetID="10" presetClass="entr" presetSubtype="0" fill="hold" nodeType="withEffect">
+                                  <p:stCondLst>
+                                    <p:cond delay="0"/>
+                                  </p:stCondLst>
+                                  <p:childTnLst>
+                                    <p:set>
+                                      <p:cBhvr>
+                                        <p:cTn id="20" dur="1" fill="hold">
+                                          <p:stCondLst>
+                                            <p:cond delay="0"/>
+                                          </p:stCondLst>
+                                        </p:cTn>
+                                        <p:tgtEl>
+                                          <p:spTgt spid="3">
+                                            <p:txEl>
+                                              <p:pRg st="3" end="3"/>
+                                            </p:txEl>
+                                          </p:spTgt>
+                                        </p:tgtEl>
+                                        <p:attrNameLst>
+                                          <p:attrName>style.visibility</p:attrName>
+                                        </p:attrNameLst>
+                                      </p:cBhvr>
+                                      <p:to>
+                                        <p:strVal val="visible"/>
+                                      </p:to>
+                                    </p:set>
+                                    <p:animEffect transition="in" filter="fade">
+                                      <p:cBhvr>
+                                        <p:cTn id="21" dur="500"/>
+                                        <p:tgtEl>
+                                          <p:spTgt spid="3">
+                                            <p:txEl>
+                                              <p:pRg st="3" end="3"/>
+                                            </p:txEl>
+                                          </p:spTgt>
+                                        </p:tgtEl>
+                                      </p:cBhvr>
+                                    </p:animEffect>
+                                  </p:childTnLst>
+                                </p:cTn>
+                              </p:par>
+                            </p:childTnLst>
+                          </p:cTn>
+                        </p:par>
+                      </p:childTnLst>
+                    </p:cTn>
+                  </p:par>
+                </p:childTnLst>
+              </p:cTn>
+              <p:prevCondLst>
+                <p:cond evt="onPrev" delay="0">
+                  <p:tgtEl>
+                    <p:sldTgt/>
+                  </p:tgtEl>
+                </p:cond>
+              </p:prevCondLst>
+              <p:nextCondLst>
+                <p:cond evt="onNext" delay="0">
+                  <p:tgtEl>
+                    <p:sldTgt/>
+                  </p:tgtEl>
+                </p:cond>
+              </p:nextCondLst>
+            </p:seq>
+          </p:childTnLst>
+        </p:cTn>
+      </p:par>
+    </p:tnLst>
+    <p:bldLst>
+      <p:bldP spid="2" grpId="0"/>
+    </p:bldLst>
+  </p:timing>
 </p:sld>
 </file>
 
@@ -7779,7 +11442,7 @@
             <a:spLocks noGrp="1"/>
           </p:cNvSpPr>
           <p:nvPr>
-            <p:ph sz="half" idx="1"/>
+            <p:ph idx="1"/>
           </p:nvPr>
         </p:nvSpPr>
         <p:spPr/>
@@ -7792,6 +11455,8 @@
                 <a:solidFill>
                   <a:schemeClr val="bg1"/>
                 </a:solidFill>
+                <a:latin typeface="Times New Roman" panose="02020603050405020304" pitchFamily="18" charset="0"/>
+                <a:cs typeface="Times New Roman" panose="02020603050405020304" pitchFamily="18" charset="0"/>
               </a:rPr>
               <a:t>Technológiai alapok: HTML5, CSS3, JavaScript.</a:t>
             </a:r>
@@ -7802,6 +11467,8 @@
                 <a:solidFill>
                   <a:schemeClr val="bg1"/>
                 </a:solidFill>
+                <a:latin typeface="Times New Roman" panose="02020603050405020304" pitchFamily="18" charset="0"/>
+                <a:cs typeface="Times New Roman" panose="02020603050405020304" pitchFamily="18" charset="0"/>
               </a:rPr>
               <a:t>Modern UI/UX:</a:t>
             </a:r>
@@ -7813,6 +11480,8 @@
                 <a:solidFill>
                   <a:schemeClr val="bg1"/>
                 </a:solidFill>
+                <a:latin typeface="Times New Roman" panose="02020603050405020304" pitchFamily="18" charset="0"/>
+                <a:cs typeface="Times New Roman" panose="02020603050405020304" pitchFamily="18" charset="0"/>
               </a:rPr>
               <a:t>Letisztult, reszponzív elrendezés.</a:t>
             </a:r>
@@ -7823,34 +11492,24 @@
                 <a:solidFill>
                   <a:schemeClr val="bg1"/>
                 </a:solidFill>
+                <a:latin typeface="Times New Roman" panose="02020603050405020304" pitchFamily="18" charset="0"/>
+                <a:cs typeface="Times New Roman" panose="02020603050405020304" pitchFamily="18" charset="0"/>
               </a:rPr>
-              <a:t>Valós idejű visszajelzés: Dinamikus egyenlegfrissítés és portfólió-nézet.</a:t>
-            </a:r>
-          </a:p>
-        </p:txBody>
-      </p:sp>
-      <p:sp>
-        <p:nvSpPr>
-          <p:cNvPr id="4" name="Tartalom helye 3">
-            <a:extLst>
-              <a:ext uri="{FF2B5EF4-FFF2-40B4-BE49-F238E27FC236}">
-                <a16:creationId xmlns:a16="http://schemas.microsoft.com/office/drawing/2014/main" id="{2AFDC6D2-89BA-48BB-8BE9-879C8E8C6C3F}"/>
-              </a:ext>
-            </a:extLst>
-          </p:cNvPr>
-          <p:cNvSpPr>
-            <a:spLocks noGrp="1"/>
-          </p:cNvSpPr>
-          <p:nvPr>
-            <p:ph sz="half" idx="2"/>
-          </p:nvPr>
-        </p:nvSpPr>
-        <p:spPr/>
-        <p:txBody>
-          <a:bodyPr/>
-          <a:lstStyle/>
-          <a:p>
-            <a:endParaRPr lang="hu-HU" dirty="0"/>
+              <a:t>Valós idejű visszajelzés:</a:t>
+            </a:r>
+          </a:p>
+          <a:p>
+            <a:pPr lvl="1"/>
+            <a:r>
+              <a:rPr lang="hu-HU" dirty="0">
+                <a:solidFill>
+                  <a:schemeClr val="bg1"/>
+                </a:solidFill>
+                <a:latin typeface="Times New Roman" panose="02020603050405020304" pitchFamily="18" charset="0"/>
+                <a:cs typeface="Times New Roman" panose="02020603050405020304" pitchFamily="18" charset="0"/>
+              </a:rPr>
+              <a:t>Dinamikus egyenlegfrissítés és portfólió-nézet.</a:t>
+            </a:r>
           </a:p>
         </p:txBody>
       </p:sp>
@@ -7900,6 +11559,337 @@
   <p:clrMapOvr>
     <a:masterClrMapping/>
   </p:clrMapOvr>
+  <mc:AlternateContent xmlns:mc="http://schemas.openxmlformats.org/markup-compatibility/2006">
+    <mc:Choice xmlns:p14="http://schemas.microsoft.com/office/powerpoint/2010/main" Requires="p14">
+      <p:transition spd="med" p14:dur="700">
+        <p:fade/>
+      </p:transition>
+    </mc:Choice>
+    <mc:Fallback>
+      <p:transition spd="med">
+        <p:fade/>
+      </p:transition>
+    </mc:Fallback>
+  </mc:AlternateContent>
+  <p:timing>
+    <p:tnLst>
+      <p:par>
+        <p:cTn id="1" dur="indefinite" restart="never" nodeType="tmRoot">
+          <p:childTnLst>
+            <p:seq concurrent="1" nextAc="seek">
+              <p:cTn id="2" dur="indefinite" nodeType="mainSeq">
+                <p:childTnLst>
+                  <p:par>
+                    <p:cTn id="3" fill="hold">
+                      <p:stCondLst>
+                        <p:cond delay="indefinite"/>
+                      </p:stCondLst>
+                      <p:childTnLst>
+                        <p:par>
+                          <p:cTn id="4" fill="hold">
+                            <p:stCondLst>
+                              <p:cond delay="0"/>
+                            </p:stCondLst>
+                            <p:childTnLst>
+                              <p:par>
+                                <p:cTn id="5" presetID="10" presetClass="entr" presetSubtype="0" fill="hold" grpId="0" nodeType="clickEffect">
+                                  <p:stCondLst>
+                                    <p:cond delay="0"/>
+                                  </p:stCondLst>
+                                  <p:childTnLst>
+                                    <p:set>
+                                      <p:cBhvr>
+                                        <p:cTn id="6" dur="1" fill="hold">
+                                          <p:stCondLst>
+                                            <p:cond delay="0"/>
+                                          </p:stCondLst>
+                                        </p:cTn>
+                                        <p:tgtEl>
+                                          <p:spTgt spid="2"/>
+                                        </p:tgtEl>
+                                        <p:attrNameLst>
+                                          <p:attrName>style.visibility</p:attrName>
+                                        </p:attrNameLst>
+                                      </p:cBhvr>
+                                      <p:to>
+                                        <p:strVal val="visible"/>
+                                      </p:to>
+                                    </p:set>
+                                    <p:animEffect transition="in" filter="fade">
+                                      <p:cBhvr>
+                                        <p:cTn id="7" dur="500"/>
+                                        <p:tgtEl>
+                                          <p:spTgt spid="2"/>
+                                        </p:tgtEl>
+                                      </p:cBhvr>
+                                    </p:animEffect>
+                                  </p:childTnLst>
+                                </p:cTn>
+                              </p:par>
+                            </p:childTnLst>
+                          </p:cTn>
+                        </p:par>
+                      </p:childTnLst>
+                    </p:cTn>
+                  </p:par>
+                  <p:par>
+                    <p:cTn id="8" fill="hold">
+                      <p:stCondLst>
+                        <p:cond delay="indefinite"/>
+                      </p:stCondLst>
+                      <p:childTnLst>
+                        <p:par>
+                          <p:cTn id="9" fill="hold">
+                            <p:stCondLst>
+                              <p:cond delay="0"/>
+                            </p:stCondLst>
+                            <p:childTnLst>
+                              <p:par>
+                                <p:cTn id="10" presetID="10" presetClass="entr" presetSubtype="0" fill="hold" nodeType="clickEffect">
+                                  <p:stCondLst>
+                                    <p:cond delay="0"/>
+                                  </p:stCondLst>
+                                  <p:childTnLst>
+                                    <p:set>
+                                      <p:cBhvr>
+                                        <p:cTn id="11" dur="1" fill="hold">
+                                          <p:stCondLst>
+                                            <p:cond delay="0"/>
+                                          </p:stCondLst>
+                                        </p:cTn>
+                                        <p:tgtEl>
+                                          <p:spTgt spid="3">
+                                            <p:txEl>
+                                              <p:pRg st="0" end="0"/>
+                                            </p:txEl>
+                                          </p:spTgt>
+                                        </p:tgtEl>
+                                        <p:attrNameLst>
+                                          <p:attrName>style.visibility</p:attrName>
+                                        </p:attrNameLst>
+                                      </p:cBhvr>
+                                      <p:to>
+                                        <p:strVal val="visible"/>
+                                      </p:to>
+                                    </p:set>
+                                    <p:animEffect transition="in" filter="fade">
+                                      <p:cBhvr>
+                                        <p:cTn id="12" dur="500"/>
+                                        <p:tgtEl>
+                                          <p:spTgt spid="3">
+                                            <p:txEl>
+                                              <p:pRg st="0" end="0"/>
+                                            </p:txEl>
+                                          </p:spTgt>
+                                        </p:tgtEl>
+                                      </p:cBhvr>
+                                    </p:animEffect>
+                                  </p:childTnLst>
+                                </p:cTn>
+                              </p:par>
+                              <p:par>
+                                <p:cTn id="13" presetID="10" presetClass="entr" presetSubtype="0" fill="hold" nodeType="withEffect">
+                                  <p:stCondLst>
+                                    <p:cond delay="0"/>
+                                  </p:stCondLst>
+                                  <p:childTnLst>
+                                    <p:set>
+                                      <p:cBhvr>
+                                        <p:cTn id="14" dur="1" fill="hold">
+                                          <p:stCondLst>
+                                            <p:cond delay="0"/>
+                                          </p:stCondLst>
+                                        </p:cTn>
+                                        <p:tgtEl>
+                                          <p:spTgt spid="3">
+                                            <p:txEl>
+                                              <p:pRg st="1" end="1"/>
+                                            </p:txEl>
+                                          </p:spTgt>
+                                        </p:tgtEl>
+                                        <p:attrNameLst>
+                                          <p:attrName>style.visibility</p:attrName>
+                                        </p:attrNameLst>
+                                      </p:cBhvr>
+                                      <p:to>
+                                        <p:strVal val="visible"/>
+                                      </p:to>
+                                    </p:set>
+                                    <p:animEffect transition="in" filter="fade">
+                                      <p:cBhvr>
+                                        <p:cTn id="15" dur="500"/>
+                                        <p:tgtEl>
+                                          <p:spTgt spid="3">
+                                            <p:txEl>
+                                              <p:pRg st="1" end="1"/>
+                                            </p:txEl>
+                                          </p:spTgt>
+                                        </p:tgtEl>
+                                      </p:cBhvr>
+                                    </p:animEffect>
+                                  </p:childTnLst>
+                                </p:cTn>
+                              </p:par>
+                              <p:par>
+                                <p:cTn id="16" presetID="10" presetClass="entr" presetSubtype="0" fill="hold" nodeType="withEffect">
+                                  <p:stCondLst>
+                                    <p:cond delay="0"/>
+                                  </p:stCondLst>
+                                  <p:childTnLst>
+                                    <p:set>
+                                      <p:cBhvr>
+                                        <p:cTn id="17" dur="1" fill="hold">
+                                          <p:stCondLst>
+                                            <p:cond delay="0"/>
+                                          </p:stCondLst>
+                                        </p:cTn>
+                                        <p:tgtEl>
+                                          <p:spTgt spid="3">
+                                            <p:txEl>
+                                              <p:pRg st="2" end="2"/>
+                                            </p:txEl>
+                                          </p:spTgt>
+                                        </p:tgtEl>
+                                        <p:attrNameLst>
+                                          <p:attrName>style.visibility</p:attrName>
+                                        </p:attrNameLst>
+                                      </p:cBhvr>
+                                      <p:to>
+                                        <p:strVal val="visible"/>
+                                      </p:to>
+                                    </p:set>
+                                    <p:animEffect transition="in" filter="fade">
+                                      <p:cBhvr>
+                                        <p:cTn id="18" dur="500"/>
+                                        <p:tgtEl>
+                                          <p:spTgt spid="3">
+                                            <p:txEl>
+                                              <p:pRg st="2" end="2"/>
+                                            </p:txEl>
+                                          </p:spTgt>
+                                        </p:tgtEl>
+                                      </p:cBhvr>
+                                    </p:animEffect>
+                                  </p:childTnLst>
+                                </p:cTn>
+                              </p:par>
+                              <p:par>
+                                <p:cTn id="19" presetID="10" presetClass="entr" presetSubtype="0" fill="hold" nodeType="withEffect">
+                                  <p:stCondLst>
+                                    <p:cond delay="0"/>
+                                  </p:stCondLst>
+                                  <p:childTnLst>
+                                    <p:set>
+                                      <p:cBhvr>
+                                        <p:cTn id="20" dur="1" fill="hold">
+                                          <p:stCondLst>
+                                            <p:cond delay="0"/>
+                                          </p:stCondLst>
+                                        </p:cTn>
+                                        <p:tgtEl>
+                                          <p:spTgt spid="3">
+                                            <p:txEl>
+                                              <p:pRg st="3" end="3"/>
+                                            </p:txEl>
+                                          </p:spTgt>
+                                        </p:tgtEl>
+                                        <p:attrNameLst>
+                                          <p:attrName>style.visibility</p:attrName>
+                                        </p:attrNameLst>
+                                      </p:cBhvr>
+                                      <p:to>
+                                        <p:strVal val="visible"/>
+                                      </p:to>
+                                    </p:set>
+                                    <p:animEffect transition="in" filter="fade">
+                                      <p:cBhvr>
+                                        <p:cTn id="21" dur="500"/>
+                                        <p:tgtEl>
+                                          <p:spTgt spid="3">
+                                            <p:txEl>
+                                              <p:pRg st="3" end="3"/>
+                                            </p:txEl>
+                                          </p:spTgt>
+                                        </p:tgtEl>
+                                      </p:cBhvr>
+                                    </p:animEffect>
+                                  </p:childTnLst>
+                                </p:cTn>
+                              </p:par>
+                              <p:par>
+                                <p:cTn id="22" presetID="10" presetClass="entr" presetSubtype="0" fill="hold" nodeType="withEffect">
+                                  <p:stCondLst>
+                                    <p:cond delay="0"/>
+                                  </p:stCondLst>
+                                  <p:childTnLst>
+                                    <p:set>
+                                      <p:cBhvr>
+                                        <p:cTn id="23" dur="1" fill="hold">
+                                          <p:stCondLst>
+                                            <p:cond delay="0"/>
+                                          </p:stCondLst>
+                                        </p:cTn>
+                                        <p:tgtEl>
+                                          <p:spTgt spid="3">
+                                            <p:txEl>
+                                              <p:pRg st="4" end="4"/>
+                                            </p:txEl>
+                                          </p:spTgt>
+                                        </p:tgtEl>
+                                        <p:attrNameLst>
+                                          <p:attrName>style.visibility</p:attrName>
+                                        </p:attrNameLst>
+                                      </p:cBhvr>
+                                      <p:to>
+                                        <p:strVal val="visible"/>
+                                      </p:to>
+                                    </p:set>
+                                    <p:animEffect transition="in" filter="fade">
+                                      <p:cBhvr>
+                                        <p:cTn id="24" dur="500"/>
+                                        <p:tgtEl>
+                                          <p:spTgt spid="3">
+                                            <p:txEl>
+                                              <p:pRg st="4" end="4"/>
+                                            </p:txEl>
+                                          </p:spTgt>
+                                        </p:tgtEl>
+                                      </p:cBhvr>
+                                    </p:animEffect>
+                                  </p:childTnLst>
+                                </p:cTn>
+                              </p:par>
+                            </p:childTnLst>
+                          </p:cTn>
+                        </p:par>
+                      </p:childTnLst>
+                    </p:cTn>
+                  </p:par>
+                </p:childTnLst>
+              </p:cTn>
+              <p:prevCondLst>
+                <p:cond evt="onPrev" delay="0">
+                  <p:tgtEl>
+                    <p:sldTgt/>
+                  </p:tgtEl>
+                </p:cond>
+              </p:prevCondLst>
+              <p:nextCondLst>
+                <p:cond evt="onNext" delay="0">
+                  <p:tgtEl>
+                    <p:sldTgt/>
+                  </p:tgtEl>
+                </p:cond>
+              </p:nextCondLst>
+            </p:seq>
+          </p:childTnLst>
+        </p:cTn>
+      </p:par>
+    </p:tnLst>
+    <p:bldLst>
+      <p:bldP spid="2" grpId="0"/>
+    </p:bldLst>
+  </p:timing>
 </p:sld>
 </file>
 
@@ -7922,10 +11912,10 @@
       </p:grpSpPr>
       <p:pic>
         <p:nvPicPr>
-          <p:cNvPr id="9" name="Kép 8">
+          <p:cNvPr id="12" name="Kép 11">
             <a:extLst>
               <a:ext uri="{FF2B5EF4-FFF2-40B4-BE49-F238E27FC236}">
-                <a16:creationId xmlns:a16="http://schemas.microsoft.com/office/drawing/2014/main" id="{AA529289-132F-4046-B914-F24FDD6CAEF9}"/>
+                <a16:creationId xmlns:a16="http://schemas.microsoft.com/office/drawing/2014/main" id="{9FE15EF2-FE62-4DEE-A7ED-C984CA7E9C97}"/>
               </a:ext>
             </a:extLst>
           </p:cNvPr>
@@ -7935,7 +11925,7 @@
           <p:nvPr/>
         </p:nvPicPr>
         <p:blipFill>
-          <a:blip r:embed="rId2">
+          <a:blip r:embed="rId3">
             <a:extLst>
               <a:ext uri="{28A0092B-C50C-407E-A947-70E740481C1C}">
                 <a14:useLocalDpi xmlns:a14="http://schemas.microsoft.com/office/drawing/2010/main" val="0"/>
@@ -7958,6 +11948,687 @@
       </p:pic>
       <p:sp>
         <p:nvSpPr>
+          <p:cNvPr id="5" name="Cím 4">
+            <a:extLst>
+              <a:ext uri="{FF2B5EF4-FFF2-40B4-BE49-F238E27FC236}">
+                <a16:creationId xmlns:a16="http://schemas.microsoft.com/office/drawing/2014/main" id="{854DA53C-BA5F-4190-8443-2E8F0A21033B}"/>
+              </a:ext>
+            </a:extLst>
+          </p:cNvPr>
+          <p:cNvSpPr>
+            <a:spLocks noGrp="1"/>
+          </p:cNvSpPr>
+          <p:nvPr>
+            <p:ph type="title"/>
+          </p:nvPr>
+        </p:nvSpPr>
+        <p:spPr/>
+        <p:txBody>
+          <a:bodyPr/>
+          <a:lstStyle/>
+          <a:p>
+            <a:r>
+              <a:rPr lang="hu-HU" dirty="0">
+                <a:solidFill>
+                  <a:schemeClr val="bg1"/>
+                </a:solidFill>
+                <a:latin typeface="Times New Roman" panose="02020603050405020304" pitchFamily="18" charset="0"/>
+                <a:cs typeface="Times New Roman" panose="02020603050405020304" pitchFamily="18" charset="0"/>
+              </a:rPr>
+              <a:t>Frontend-Tesztelés</a:t>
+            </a:r>
+          </a:p>
+        </p:txBody>
+      </p:sp>
+      <p:sp>
+        <p:nvSpPr>
+          <p:cNvPr id="6" name="Tartalom helye 5">
+            <a:extLst>
+              <a:ext uri="{FF2B5EF4-FFF2-40B4-BE49-F238E27FC236}">
+                <a16:creationId xmlns:a16="http://schemas.microsoft.com/office/drawing/2014/main" id="{4EC9F170-742E-4283-982F-8FA8307E3A9E}"/>
+              </a:ext>
+            </a:extLst>
+          </p:cNvPr>
+          <p:cNvSpPr>
+            <a:spLocks noGrp="1"/>
+          </p:cNvSpPr>
+          <p:nvPr>
+            <p:ph idx="1"/>
+          </p:nvPr>
+        </p:nvSpPr>
+        <p:spPr>
+          <a:xfrm>
+            <a:off x="838200" y="1825625"/>
+            <a:ext cx="6541168" cy="4351338"/>
+          </a:xfrm>
+        </p:spPr>
+        <p:txBody>
+          <a:bodyPr/>
+          <a:lstStyle/>
+          <a:p>
+            <a:r>
+              <a:rPr lang="hu-HU" sz="2400" dirty="0">
+                <a:solidFill>
+                  <a:schemeClr val="bg1"/>
+                </a:solidFill>
+                <a:latin typeface="Times New Roman" panose="02020603050405020304" pitchFamily="18" charset="0"/>
+                <a:cs typeface="Times New Roman" panose="02020603050405020304" pitchFamily="18" charset="0"/>
+              </a:rPr>
+              <a:t>Sikeres tesztek:</a:t>
+            </a:r>
+          </a:p>
+          <a:p>
+            <a:pPr lvl="1"/>
+            <a:r>
+              <a:rPr lang="hu-HU" sz="2000" dirty="0">
+                <a:solidFill>
+                  <a:schemeClr val="bg1"/>
+                </a:solidFill>
+                <a:latin typeface="Times New Roman" panose="02020603050405020304" pitchFamily="18" charset="0"/>
+                <a:cs typeface="Times New Roman" panose="02020603050405020304" pitchFamily="18" charset="0"/>
+              </a:rPr>
+              <a:t>Belépés, regisztráció, vétel, tranzakciók, kijelentkezés, gombok és funkciói</a:t>
+            </a:r>
+          </a:p>
+          <a:p>
+            <a:r>
+              <a:rPr lang="hu-HU" sz="2400" dirty="0">
+                <a:solidFill>
+                  <a:schemeClr val="bg1"/>
+                </a:solidFill>
+                <a:latin typeface="Times New Roman" panose="02020603050405020304" pitchFamily="18" charset="0"/>
+                <a:cs typeface="Times New Roman" panose="02020603050405020304" pitchFamily="18" charset="0"/>
+              </a:rPr>
+              <a:t>Magas prioritású tesztesetek a biztonságos működésért</a:t>
+            </a:r>
+          </a:p>
+          <a:p>
+            <a:endParaRPr lang="hu-HU" dirty="0"/>
+          </a:p>
+        </p:txBody>
+      </p:sp>
+      <p:pic>
+        <p:nvPicPr>
+          <p:cNvPr id="1030" name="Picture 6" descr="Robot Framework - Wikipedia">
+            <a:extLst>
+              <a:ext uri="{FF2B5EF4-FFF2-40B4-BE49-F238E27FC236}">
+                <a16:creationId xmlns:a16="http://schemas.microsoft.com/office/drawing/2014/main" id="{5187D23B-744E-4B90-8D94-D4E09A6FEAD1}"/>
+              </a:ext>
+            </a:extLst>
+          </p:cNvPr>
+          <p:cNvPicPr>
+            <a:picLocks noChangeAspect="1" noChangeArrowheads="1"/>
+          </p:cNvPicPr>
+          <p:nvPr/>
+        </p:nvPicPr>
+        <p:blipFill>
+          <a:blip r:embed="rId4">
+            <a:extLst>
+              <a:ext uri="{28A0092B-C50C-407E-A947-70E740481C1C}">
+                <a14:useLocalDpi xmlns:a14="http://schemas.microsoft.com/office/drawing/2010/main" val="0"/>
+              </a:ext>
+            </a:extLst>
+          </a:blip>
+          <a:srcRect/>
+          <a:stretch>
+            <a:fillRect/>
+          </a:stretch>
+        </p:blipFill>
+        <p:spPr bwMode="auto">
+          <a:xfrm>
+            <a:off x="10604894" y="3887775"/>
+            <a:ext cx="1589822" cy="1589822"/>
+          </a:xfrm>
+          <a:prstGeom prst="rect">
+            <a:avLst/>
+          </a:prstGeom>
+          <a:noFill/>
+          <a:extLst>
+            <a:ext uri="{909E8E84-426E-40DD-AFC4-6F175D3DCCD1}">
+              <a14:hiddenFill xmlns:a14="http://schemas.microsoft.com/office/drawing/2010/main">
+                <a:solidFill>
+                  <a:srgbClr val="FFFFFF"/>
+                </a:solidFill>
+              </a14:hiddenFill>
+            </a:ext>
+          </a:extLst>
+        </p:spPr>
+      </p:pic>
+      <p:pic>
+        <p:nvPicPr>
+          <p:cNvPr id="10" name="Kép 9">
+            <a:extLst>
+              <a:ext uri="{FF2B5EF4-FFF2-40B4-BE49-F238E27FC236}">
+                <a16:creationId xmlns:a16="http://schemas.microsoft.com/office/drawing/2014/main" id="{18B9E51B-6861-4D84-A5E1-61D7D419B582}"/>
+              </a:ext>
+            </a:extLst>
+          </p:cNvPr>
+          <p:cNvPicPr>
+            <a:picLocks noChangeAspect="1"/>
+          </p:cNvPicPr>
+          <p:nvPr/>
+        </p:nvPicPr>
+        <p:blipFill>
+          <a:blip r:embed="rId5">
+            <a:extLst>
+              <a:ext uri="{28A0092B-C50C-407E-A947-70E740481C1C}">
+                <a14:useLocalDpi xmlns:a14="http://schemas.microsoft.com/office/drawing/2010/main" val="0"/>
+              </a:ext>
+            </a:extLst>
+          </a:blip>
+          <a:stretch>
+            <a:fillRect/>
+          </a:stretch>
+        </p:blipFill>
+        <p:spPr>
+          <a:xfrm>
+            <a:off x="0" y="5812553"/>
+            <a:ext cx="1045447" cy="1045447"/>
+          </a:xfrm>
+          <a:prstGeom prst="rect">
+            <a:avLst/>
+          </a:prstGeom>
+        </p:spPr>
+      </p:pic>
+      <p:pic>
+        <p:nvPicPr>
+          <p:cNvPr id="1032" name="Picture 8" descr="Selenium Automation Testing Services Company India, Singapore, Hong Kong,  Canada – ANGLER Technologies">
+            <a:extLst>
+              <a:ext uri="{FF2B5EF4-FFF2-40B4-BE49-F238E27FC236}">
+                <a16:creationId xmlns:a16="http://schemas.microsoft.com/office/drawing/2014/main" id="{821A2D7D-F81E-4584-8CB0-0112B782824B}"/>
+              </a:ext>
+            </a:extLst>
+          </p:cNvPr>
+          <p:cNvPicPr>
+            <a:picLocks noChangeAspect="1" noChangeArrowheads="1"/>
+          </p:cNvPicPr>
+          <p:nvPr/>
+        </p:nvPicPr>
+        <p:blipFill>
+          <a:blip r:embed="rId6">
+            <a:extLst>
+              <a:ext uri="{28A0092B-C50C-407E-A947-70E740481C1C}">
+                <a14:useLocalDpi xmlns:a14="http://schemas.microsoft.com/office/drawing/2010/main" val="0"/>
+              </a:ext>
+            </a:extLst>
+          </a:blip>
+          <a:srcRect/>
+          <a:stretch>
+            <a:fillRect/>
+          </a:stretch>
+        </p:blipFill>
+        <p:spPr bwMode="auto">
+          <a:xfrm>
+            <a:off x="10602178" y="5415261"/>
+            <a:ext cx="1589822" cy="1441438"/>
+          </a:xfrm>
+          <a:prstGeom prst="rect">
+            <a:avLst/>
+          </a:prstGeom>
+          <a:noFill/>
+          <a:extLst>
+            <a:ext uri="{909E8E84-426E-40DD-AFC4-6F175D3DCCD1}">
+              <a14:hiddenFill xmlns:a14="http://schemas.microsoft.com/office/drawing/2010/main">
+                <a:solidFill>
+                  <a:srgbClr val="FFFFFF"/>
+                </a:solidFill>
+              </a14:hiddenFill>
+            </a:ext>
+          </a:extLst>
+        </p:spPr>
+      </p:pic>
+      <p:pic>
+        <p:nvPicPr>
+          <p:cNvPr id="8" name="drawing">
+            <a:extLst>
+              <a:ext uri="{FF2B5EF4-FFF2-40B4-BE49-F238E27FC236}">
+                <a16:creationId xmlns:a16="http://schemas.microsoft.com/office/drawing/2014/main" id="{0FE7203E-6743-43E8-8060-3839CBE08552}"/>
+              </a:ext>
+            </a:extLst>
+          </p:cNvPr>
+          <p:cNvPicPr/>
+          <p:nvPr/>
+        </p:nvPicPr>
+        <p:blipFill>
+          <a:blip r:embed="rId7">
+            <a:extLst>
+              <a:ext uri="{28A0092B-C50C-407E-A947-70E740481C1C}">
+                <a14:useLocalDpi xmlns:a14="http://schemas.microsoft.com/office/drawing/2010/main"/>
+              </a:ext>
+            </a:extLst>
+          </a:blip>
+          <a:stretch>
+            <a:fillRect/>
+          </a:stretch>
+        </p:blipFill>
+        <p:spPr>
+          <a:xfrm>
+            <a:off x="5914520" y="3886474"/>
+            <a:ext cx="4686300" cy="2970225"/>
+          </a:xfrm>
+          <a:prstGeom prst="rect">
+            <a:avLst/>
+          </a:prstGeom>
+        </p:spPr>
+      </p:pic>
+    </p:spTree>
+    <p:extLst>
+      <p:ext uri="{BB962C8B-B14F-4D97-AF65-F5344CB8AC3E}">
+        <p14:creationId xmlns:p14="http://schemas.microsoft.com/office/powerpoint/2010/main" val="1820299457"/>
+      </p:ext>
+    </p:extLst>
+  </p:cSld>
+  <p:clrMapOvr>
+    <a:masterClrMapping/>
+  </p:clrMapOvr>
+  <mc:AlternateContent xmlns:mc="http://schemas.openxmlformats.org/markup-compatibility/2006">
+    <mc:Choice xmlns:p14="http://schemas.microsoft.com/office/powerpoint/2010/main" Requires="p14">
+      <p:transition spd="med" p14:dur="700">
+        <p:fade/>
+      </p:transition>
+    </mc:Choice>
+    <mc:Fallback>
+      <p:transition spd="med">
+        <p:fade/>
+      </p:transition>
+    </mc:Fallback>
+  </mc:AlternateContent>
+  <p:timing>
+    <p:tnLst>
+      <p:par>
+        <p:cTn id="1" dur="indefinite" restart="never" nodeType="tmRoot">
+          <p:childTnLst>
+            <p:seq concurrent="1" nextAc="seek">
+              <p:cTn id="2" dur="indefinite" nodeType="mainSeq">
+                <p:childTnLst>
+                  <p:par>
+                    <p:cTn id="3" fill="hold">
+                      <p:stCondLst>
+                        <p:cond delay="indefinite"/>
+                      </p:stCondLst>
+                      <p:childTnLst>
+                        <p:par>
+                          <p:cTn id="4" fill="hold">
+                            <p:stCondLst>
+                              <p:cond delay="0"/>
+                            </p:stCondLst>
+                            <p:childTnLst>
+                              <p:par>
+                                <p:cTn id="5" presetID="10" presetClass="entr" presetSubtype="0" fill="hold" grpId="0" nodeType="clickEffect">
+                                  <p:stCondLst>
+                                    <p:cond delay="0"/>
+                                  </p:stCondLst>
+                                  <p:childTnLst>
+                                    <p:set>
+                                      <p:cBhvr>
+                                        <p:cTn id="6" dur="1" fill="hold">
+                                          <p:stCondLst>
+                                            <p:cond delay="0"/>
+                                          </p:stCondLst>
+                                        </p:cTn>
+                                        <p:tgtEl>
+                                          <p:spTgt spid="5"/>
+                                        </p:tgtEl>
+                                        <p:attrNameLst>
+                                          <p:attrName>style.visibility</p:attrName>
+                                        </p:attrNameLst>
+                                      </p:cBhvr>
+                                      <p:to>
+                                        <p:strVal val="visible"/>
+                                      </p:to>
+                                    </p:set>
+                                    <p:animEffect transition="in" filter="fade">
+                                      <p:cBhvr>
+                                        <p:cTn id="7" dur="500"/>
+                                        <p:tgtEl>
+                                          <p:spTgt spid="5"/>
+                                        </p:tgtEl>
+                                      </p:cBhvr>
+                                    </p:animEffect>
+                                  </p:childTnLst>
+                                </p:cTn>
+                              </p:par>
+                            </p:childTnLst>
+                          </p:cTn>
+                        </p:par>
+                      </p:childTnLst>
+                    </p:cTn>
+                  </p:par>
+                  <p:par>
+                    <p:cTn id="8" fill="hold">
+                      <p:stCondLst>
+                        <p:cond delay="indefinite"/>
+                      </p:stCondLst>
+                      <p:childTnLst>
+                        <p:par>
+                          <p:cTn id="9" fill="hold">
+                            <p:stCondLst>
+                              <p:cond delay="0"/>
+                            </p:stCondLst>
+                            <p:childTnLst>
+                              <p:par>
+                                <p:cTn id="10" presetID="10" presetClass="entr" presetSubtype="0" fill="hold" nodeType="clickEffect">
+                                  <p:stCondLst>
+                                    <p:cond delay="0"/>
+                                  </p:stCondLst>
+                                  <p:childTnLst>
+                                    <p:set>
+                                      <p:cBhvr>
+                                        <p:cTn id="11" dur="1" fill="hold">
+                                          <p:stCondLst>
+                                            <p:cond delay="0"/>
+                                          </p:stCondLst>
+                                        </p:cTn>
+                                        <p:tgtEl>
+                                          <p:spTgt spid="6">
+                                            <p:txEl>
+                                              <p:pRg st="0" end="0"/>
+                                            </p:txEl>
+                                          </p:spTgt>
+                                        </p:tgtEl>
+                                        <p:attrNameLst>
+                                          <p:attrName>style.visibility</p:attrName>
+                                        </p:attrNameLst>
+                                      </p:cBhvr>
+                                      <p:to>
+                                        <p:strVal val="visible"/>
+                                      </p:to>
+                                    </p:set>
+                                    <p:animEffect transition="in" filter="fade">
+                                      <p:cBhvr>
+                                        <p:cTn id="12" dur="500"/>
+                                        <p:tgtEl>
+                                          <p:spTgt spid="6">
+                                            <p:txEl>
+                                              <p:pRg st="0" end="0"/>
+                                            </p:txEl>
+                                          </p:spTgt>
+                                        </p:tgtEl>
+                                      </p:cBhvr>
+                                    </p:animEffect>
+                                  </p:childTnLst>
+                                </p:cTn>
+                              </p:par>
+                              <p:par>
+                                <p:cTn id="13" presetID="10" presetClass="entr" presetSubtype="0" fill="hold" nodeType="withEffect">
+                                  <p:stCondLst>
+                                    <p:cond delay="0"/>
+                                  </p:stCondLst>
+                                  <p:childTnLst>
+                                    <p:set>
+                                      <p:cBhvr>
+                                        <p:cTn id="14" dur="1" fill="hold">
+                                          <p:stCondLst>
+                                            <p:cond delay="0"/>
+                                          </p:stCondLst>
+                                        </p:cTn>
+                                        <p:tgtEl>
+                                          <p:spTgt spid="6">
+                                            <p:txEl>
+                                              <p:pRg st="1" end="1"/>
+                                            </p:txEl>
+                                          </p:spTgt>
+                                        </p:tgtEl>
+                                        <p:attrNameLst>
+                                          <p:attrName>style.visibility</p:attrName>
+                                        </p:attrNameLst>
+                                      </p:cBhvr>
+                                      <p:to>
+                                        <p:strVal val="visible"/>
+                                      </p:to>
+                                    </p:set>
+                                    <p:animEffect transition="in" filter="fade">
+                                      <p:cBhvr>
+                                        <p:cTn id="15" dur="500"/>
+                                        <p:tgtEl>
+                                          <p:spTgt spid="6">
+                                            <p:txEl>
+                                              <p:pRg st="1" end="1"/>
+                                            </p:txEl>
+                                          </p:spTgt>
+                                        </p:tgtEl>
+                                      </p:cBhvr>
+                                    </p:animEffect>
+                                  </p:childTnLst>
+                                </p:cTn>
+                              </p:par>
+                              <p:par>
+                                <p:cTn id="16" presetID="10" presetClass="entr" presetSubtype="0" fill="hold" nodeType="withEffect">
+                                  <p:stCondLst>
+                                    <p:cond delay="0"/>
+                                  </p:stCondLst>
+                                  <p:childTnLst>
+                                    <p:set>
+                                      <p:cBhvr>
+                                        <p:cTn id="17" dur="1" fill="hold">
+                                          <p:stCondLst>
+                                            <p:cond delay="0"/>
+                                          </p:stCondLst>
+                                        </p:cTn>
+                                        <p:tgtEl>
+                                          <p:spTgt spid="6">
+                                            <p:txEl>
+                                              <p:pRg st="2" end="2"/>
+                                            </p:txEl>
+                                          </p:spTgt>
+                                        </p:tgtEl>
+                                        <p:attrNameLst>
+                                          <p:attrName>style.visibility</p:attrName>
+                                        </p:attrNameLst>
+                                      </p:cBhvr>
+                                      <p:to>
+                                        <p:strVal val="visible"/>
+                                      </p:to>
+                                    </p:set>
+                                    <p:animEffect transition="in" filter="fade">
+                                      <p:cBhvr>
+                                        <p:cTn id="18" dur="500"/>
+                                        <p:tgtEl>
+                                          <p:spTgt spid="6">
+                                            <p:txEl>
+                                              <p:pRg st="2" end="2"/>
+                                            </p:txEl>
+                                          </p:spTgt>
+                                        </p:tgtEl>
+                                      </p:cBhvr>
+                                    </p:animEffect>
+                                  </p:childTnLst>
+                                </p:cTn>
+                              </p:par>
+                              <p:par>
+                                <p:cTn id="19" presetID="10" presetClass="entr" presetSubtype="0" fill="hold" nodeType="withEffect">
+                                  <p:stCondLst>
+                                    <p:cond delay="0"/>
+                                  </p:stCondLst>
+                                  <p:childTnLst>
+                                    <p:set>
+                                      <p:cBhvr>
+                                        <p:cTn id="20" dur="1" fill="hold">
+                                          <p:stCondLst>
+                                            <p:cond delay="0"/>
+                                          </p:stCondLst>
+                                        </p:cTn>
+                                        <p:tgtEl>
+                                          <p:spTgt spid="8"/>
+                                        </p:tgtEl>
+                                        <p:attrNameLst>
+                                          <p:attrName>style.visibility</p:attrName>
+                                        </p:attrNameLst>
+                                      </p:cBhvr>
+                                      <p:to>
+                                        <p:strVal val="visible"/>
+                                      </p:to>
+                                    </p:set>
+                                    <p:animEffect transition="in" filter="fade">
+                                      <p:cBhvr>
+                                        <p:cTn id="21" dur="500"/>
+                                        <p:tgtEl>
+                                          <p:spTgt spid="8"/>
+                                        </p:tgtEl>
+                                      </p:cBhvr>
+                                    </p:animEffect>
+                                  </p:childTnLst>
+                                </p:cTn>
+                              </p:par>
+                              <p:par>
+                                <p:cTn id="22" presetID="10" presetClass="entr" presetSubtype="0" fill="hold" nodeType="withEffect">
+                                  <p:stCondLst>
+                                    <p:cond delay="0"/>
+                                  </p:stCondLst>
+                                  <p:childTnLst>
+                                    <p:set>
+                                      <p:cBhvr>
+                                        <p:cTn id="23" dur="1" fill="hold">
+                                          <p:stCondLst>
+                                            <p:cond delay="0"/>
+                                          </p:stCondLst>
+                                        </p:cTn>
+                                        <p:tgtEl>
+                                          <p:spTgt spid="1030"/>
+                                        </p:tgtEl>
+                                        <p:attrNameLst>
+                                          <p:attrName>style.visibility</p:attrName>
+                                        </p:attrNameLst>
+                                      </p:cBhvr>
+                                      <p:to>
+                                        <p:strVal val="visible"/>
+                                      </p:to>
+                                    </p:set>
+                                    <p:animEffect transition="in" filter="fade">
+                                      <p:cBhvr>
+                                        <p:cTn id="24" dur="500"/>
+                                        <p:tgtEl>
+                                          <p:spTgt spid="1030"/>
+                                        </p:tgtEl>
+                                      </p:cBhvr>
+                                    </p:animEffect>
+                                  </p:childTnLst>
+                                </p:cTn>
+                              </p:par>
+                              <p:par>
+                                <p:cTn id="25" presetID="10" presetClass="entr" presetSubtype="0" fill="hold" nodeType="withEffect">
+                                  <p:stCondLst>
+                                    <p:cond delay="0"/>
+                                  </p:stCondLst>
+                                  <p:childTnLst>
+                                    <p:set>
+                                      <p:cBhvr>
+                                        <p:cTn id="26" dur="1" fill="hold">
+                                          <p:stCondLst>
+                                            <p:cond delay="0"/>
+                                          </p:stCondLst>
+                                        </p:cTn>
+                                        <p:tgtEl>
+                                          <p:spTgt spid="1032"/>
+                                        </p:tgtEl>
+                                        <p:attrNameLst>
+                                          <p:attrName>style.visibility</p:attrName>
+                                        </p:attrNameLst>
+                                      </p:cBhvr>
+                                      <p:to>
+                                        <p:strVal val="visible"/>
+                                      </p:to>
+                                    </p:set>
+                                    <p:animEffect transition="in" filter="fade">
+                                      <p:cBhvr>
+                                        <p:cTn id="27" dur="500"/>
+                                        <p:tgtEl>
+                                          <p:spTgt spid="1032"/>
+                                        </p:tgtEl>
+                                      </p:cBhvr>
+                                    </p:animEffect>
+                                  </p:childTnLst>
+                                </p:cTn>
+                              </p:par>
+                            </p:childTnLst>
+                          </p:cTn>
+                        </p:par>
+                      </p:childTnLst>
+                    </p:cTn>
+                  </p:par>
+                </p:childTnLst>
+              </p:cTn>
+              <p:prevCondLst>
+                <p:cond evt="onPrev" delay="0">
+                  <p:tgtEl>
+                    <p:sldTgt/>
+                  </p:tgtEl>
+                </p:cond>
+              </p:prevCondLst>
+              <p:nextCondLst>
+                <p:cond evt="onNext" delay="0">
+                  <p:tgtEl>
+                    <p:sldTgt/>
+                  </p:tgtEl>
+                </p:cond>
+              </p:nextCondLst>
+            </p:seq>
+          </p:childTnLst>
+        </p:cTn>
+      </p:par>
+    </p:tnLst>
+    <p:bldLst>
+      <p:bldP spid="5" grpId="0"/>
+    </p:bldLst>
+  </p:timing>
+</p:sld>
+</file>
+
+<file path=ppt/slides/slide9.xml><?xml version="1.0" encoding="utf-8"?>
+<p:sld xmlns:a="http://schemas.openxmlformats.org/drawingml/2006/main" xmlns:r="http://schemas.openxmlformats.org/officeDocument/2006/relationships" xmlns:p="http://schemas.openxmlformats.org/presentationml/2006/main">
+  <p:cSld>
+    <p:spTree>
+      <p:nvGrpSpPr>
+        <p:cNvPr id="1" name=""/>
+        <p:cNvGrpSpPr/>
+        <p:nvPr/>
+      </p:nvGrpSpPr>
+      <p:grpSpPr>
+        <a:xfrm>
+          <a:off x="0" y="0"/>
+          <a:ext cx="0" cy="0"/>
+          <a:chOff x="0" y="0"/>
+          <a:chExt cx="0" cy="0"/>
+        </a:xfrm>
+      </p:grpSpPr>
+      <p:pic>
+        <p:nvPicPr>
+          <p:cNvPr id="9" name="Kép 8">
+            <a:extLst>
+              <a:ext uri="{FF2B5EF4-FFF2-40B4-BE49-F238E27FC236}">
+                <a16:creationId xmlns:a16="http://schemas.microsoft.com/office/drawing/2014/main" id="{AA529289-132F-4046-B914-F24FDD6CAEF9}"/>
+              </a:ext>
+            </a:extLst>
+          </p:cNvPr>
+          <p:cNvPicPr>
+            <a:picLocks noChangeAspect="1"/>
+          </p:cNvPicPr>
+          <p:nvPr/>
+        </p:nvPicPr>
+        <p:blipFill>
+          <a:blip r:embed="rId3">
+            <a:extLst>
+              <a:ext uri="{28A0092B-C50C-407E-A947-70E740481C1C}">
+                <a14:useLocalDpi xmlns:a14="http://schemas.microsoft.com/office/drawing/2010/main" val="0"/>
+              </a:ext>
+            </a:extLst>
+          </a:blip>
+          <a:stretch>
+            <a:fillRect/>
+          </a:stretch>
+        </p:blipFill>
+        <p:spPr>
+          <a:xfrm>
+            <a:off x="0" y="-6376"/>
+            <a:ext cx="12192000" cy="6864376"/>
+          </a:xfrm>
+          <a:prstGeom prst="rect">
+            <a:avLst/>
+          </a:prstGeom>
+        </p:spPr>
+      </p:pic>
+      <p:sp>
+        <p:nvSpPr>
           <p:cNvPr id="4" name="Cím 3">
             <a:extLst>
               <a:ext uri="{FF2B5EF4-FFF2-40B4-BE49-F238E27FC236}">
@@ -8003,7 +12674,7 @@
             <a:spLocks noGrp="1"/>
           </p:cNvSpPr>
           <p:nvPr>
-            <p:ph sz="half" idx="1"/>
+            <p:ph idx="1"/>
           </p:nvPr>
         </p:nvSpPr>
         <p:spPr/>
@@ -8011,32 +12682,48 @@
           <a:bodyPr/>
           <a:lstStyle/>
           <a:p>
-            <a:endParaRPr lang="hu-HU" dirty="0"/>
-          </a:p>
-        </p:txBody>
-      </p:sp>
-      <p:sp>
-        <p:nvSpPr>
-          <p:cNvPr id="6" name="Tartalom helye 5">
-            <a:extLst>
-              <a:ext uri="{FF2B5EF4-FFF2-40B4-BE49-F238E27FC236}">
-                <a16:creationId xmlns:a16="http://schemas.microsoft.com/office/drawing/2014/main" id="{E7785558-83B1-4A4B-BC4D-359BC1405AF1}"/>
-              </a:ext>
-            </a:extLst>
-          </p:cNvPr>
-          <p:cNvSpPr>
-            <a:spLocks noGrp="1"/>
-          </p:cNvSpPr>
-          <p:nvPr>
-            <p:ph sz="half" idx="2"/>
-          </p:nvPr>
-        </p:nvSpPr>
-        <p:spPr/>
-        <p:txBody>
-          <a:bodyPr/>
-          <a:lstStyle/>
-          <a:p>
-            <a:endParaRPr lang="hu-HU"/>
+            <a:r>
+              <a:rPr lang="hu-HU" b="1" dirty="0">
+                <a:solidFill>
+                  <a:schemeClr val="bg1"/>
+                </a:solidFill>
+                <a:latin typeface="Times New Roman" panose="02020603050405020304" pitchFamily="18" charset="0"/>
+                <a:cs typeface="Times New Roman" panose="02020603050405020304" pitchFamily="18" charset="0"/>
+              </a:rPr>
+              <a:t>PHP</a:t>
+            </a:r>
+            <a:r>
+              <a:rPr lang="hu-HU" dirty="0">
+                <a:solidFill>
+                  <a:schemeClr val="bg1"/>
+                </a:solidFill>
+                <a:latin typeface="Times New Roman" panose="02020603050405020304" pitchFamily="18" charset="0"/>
+                <a:cs typeface="Times New Roman" panose="02020603050405020304" pitchFamily="18" charset="0"/>
+              </a:rPr>
+              <a:t>: Szerveroldali logika, tranzakciókezelés és algoritmusok futtatása.</a:t>
+            </a:r>
+          </a:p>
+          <a:p>
+            <a:r>
+              <a:rPr lang="hu-HU" b="1" dirty="0" err="1">
+                <a:solidFill>
+                  <a:schemeClr val="bg1"/>
+                </a:solidFill>
+                <a:latin typeface="Times New Roman" panose="02020603050405020304" pitchFamily="18" charset="0"/>
+                <a:cs typeface="Times New Roman" panose="02020603050405020304" pitchFamily="18" charset="0"/>
+              </a:rPr>
+              <a:t>MySQL</a:t>
+            </a:r>
+            <a:r>
+              <a:rPr lang="hu-HU" dirty="0">
+                <a:solidFill>
+                  <a:schemeClr val="bg1"/>
+                </a:solidFill>
+                <a:latin typeface="Times New Roman" panose="02020603050405020304" pitchFamily="18" charset="0"/>
+                <a:cs typeface="Times New Roman" panose="02020603050405020304" pitchFamily="18" charset="0"/>
+              </a:rPr>
+              <a:t>: Relációs adatbázis a felhasználók, pozíciók és statisztikák biztonságos tárolására.</a:t>
+            </a:r>
           </a:p>
         </p:txBody>
       </p:sp>
@@ -8055,7 +12742,7 @@
           <p:nvPr/>
         </p:nvPicPr>
         <p:blipFill>
-          <a:blip r:embed="rId3">
+          <a:blip r:embed="rId4">
             <a:extLst>
               <a:ext uri="{28A0092B-C50C-407E-A947-70E740481C1C}">
                 <a14:useLocalDpi xmlns:a14="http://schemas.microsoft.com/office/drawing/2010/main" val="0"/>
@@ -8086,288 +12773,208 @@
   <p:clrMapOvr>
     <a:masterClrMapping/>
   </p:clrMapOvr>
-</p:sld>
-</file>
-
-<file path=ppt/slides/slide9.xml><?xml version="1.0" encoding="utf-8"?>
-<p:sld xmlns:a="http://schemas.openxmlformats.org/drawingml/2006/main" xmlns:r="http://schemas.openxmlformats.org/officeDocument/2006/relationships" xmlns:p="http://schemas.openxmlformats.org/presentationml/2006/main">
-  <p:cSld>
-    <p:spTree>
-      <p:nvGrpSpPr>
-        <p:cNvPr id="1" name=""/>
-        <p:cNvGrpSpPr/>
-        <p:nvPr/>
-      </p:nvGrpSpPr>
-      <p:grpSpPr>
-        <a:xfrm>
-          <a:off x="0" y="0"/>
-          <a:ext cx="0" cy="0"/>
-          <a:chOff x="0" y="0"/>
-          <a:chExt cx="0" cy="0"/>
-        </a:xfrm>
-      </p:grpSpPr>
-      <p:pic>
-        <p:nvPicPr>
-          <p:cNvPr id="12" name="Kép 11">
-            <a:extLst>
-              <a:ext uri="{FF2B5EF4-FFF2-40B4-BE49-F238E27FC236}">
-                <a16:creationId xmlns:a16="http://schemas.microsoft.com/office/drawing/2014/main" id="{9FE15EF2-FE62-4DEE-A7ED-C984CA7E9C97}"/>
-              </a:ext>
-            </a:extLst>
-          </p:cNvPr>
-          <p:cNvPicPr>
-            <a:picLocks noChangeAspect="1"/>
-          </p:cNvPicPr>
-          <p:nvPr/>
-        </p:nvPicPr>
-        <p:blipFill>
-          <a:blip r:embed="rId3">
-            <a:extLst>
-              <a:ext uri="{28A0092B-C50C-407E-A947-70E740481C1C}">
-                <a14:useLocalDpi xmlns:a14="http://schemas.microsoft.com/office/drawing/2010/main" val="0"/>
-              </a:ext>
-            </a:extLst>
-          </a:blip>
-          <a:stretch>
-            <a:fillRect/>
-          </a:stretch>
-        </p:blipFill>
-        <p:spPr>
-          <a:xfrm>
-            <a:off x="0" y="-6376"/>
-            <a:ext cx="12192000" cy="6864376"/>
-          </a:xfrm>
-          <a:prstGeom prst="rect">
-            <a:avLst/>
-          </a:prstGeom>
-        </p:spPr>
-      </p:pic>
-      <p:sp>
-        <p:nvSpPr>
-          <p:cNvPr id="5" name="Cím 4">
-            <a:extLst>
-              <a:ext uri="{FF2B5EF4-FFF2-40B4-BE49-F238E27FC236}">
-                <a16:creationId xmlns:a16="http://schemas.microsoft.com/office/drawing/2014/main" id="{854DA53C-BA5F-4190-8443-2E8F0A21033B}"/>
-              </a:ext>
-            </a:extLst>
-          </p:cNvPr>
-          <p:cNvSpPr>
-            <a:spLocks noGrp="1"/>
-          </p:cNvSpPr>
-          <p:nvPr>
-            <p:ph type="title"/>
-          </p:nvPr>
-        </p:nvSpPr>
-        <p:spPr/>
-        <p:txBody>
-          <a:bodyPr/>
-          <a:lstStyle/>
-          <a:p>
-            <a:r>
-              <a:rPr lang="hu-HU" dirty="0">
-                <a:solidFill>
-                  <a:schemeClr val="bg1"/>
-                </a:solidFill>
-              </a:rPr>
-              <a:t>Frontend-Tesztelés</a:t>
-            </a:r>
-          </a:p>
-        </p:txBody>
-      </p:sp>
-      <p:sp>
-        <p:nvSpPr>
-          <p:cNvPr id="6" name="Tartalom helye 5">
-            <a:extLst>
-              <a:ext uri="{FF2B5EF4-FFF2-40B4-BE49-F238E27FC236}">
-                <a16:creationId xmlns:a16="http://schemas.microsoft.com/office/drawing/2014/main" id="{4EC9F170-742E-4283-982F-8FA8307E3A9E}"/>
-              </a:ext>
-            </a:extLst>
-          </p:cNvPr>
-          <p:cNvSpPr>
-            <a:spLocks noGrp="1"/>
-          </p:cNvSpPr>
-          <p:nvPr>
-            <p:ph idx="1"/>
-          </p:nvPr>
-        </p:nvSpPr>
-        <p:spPr>
-          <a:xfrm>
-            <a:off x="838200" y="1825625"/>
-            <a:ext cx="6541168" cy="4351338"/>
-          </a:xfrm>
-        </p:spPr>
-        <p:txBody>
-          <a:bodyPr/>
-          <a:lstStyle/>
-          <a:p>
-            <a:r>
-              <a:rPr lang="hu-HU" dirty="0">
-                <a:solidFill>
-                  <a:schemeClr val="bg1"/>
-                </a:solidFill>
-                <a:latin typeface="Times New Roman" panose="02020603050405020304" pitchFamily="18" charset="0"/>
-                <a:cs typeface="Times New Roman" panose="02020603050405020304" pitchFamily="18" charset="0"/>
-              </a:rPr>
-              <a:t>Sikeres tesztek: Belépés, regisztráció, vétel, tranzakciók, kijelentkezés, gombok és funkciói</a:t>
-            </a:r>
-          </a:p>
-          <a:p>
-            <a:r>
-              <a:rPr lang="hu-HU" dirty="0">
-                <a:solidFill>
-                  <a:schemeClr val="bg1"/>
-                </a:solidFill>
-                <a:latin typeface="Times New Roman" panose="02020603050405020304" pitchFamily="18" charset="0"/>
-                <a:cs typeface="Times New Roman" panose="02020603050405020304" pitchFamily="18" charset="0"/>
-              </a:rPr>
-              <a:t>Magas prioritású tesztesetek a biztonságos működésért</a:t>
-            </a:r>
-          </a:p>
-          <a:p>
-            <a:endParaRPr lang="hu-HU" dirty="0"/>
-          </a:p>
-        </p:txBody>
-      </p:sp>
-      <p:pic>
-        <p:nvPicPr>
-          <p:cNvPr id="1030" name="Picture 6" descr="Robot Framework - Wikipedia">
-            <a:extLst>
-              <a:ext uri="{FF2B5EF4-FFF2-40B4-BE49-F238E27FC236}">
-                <a16:creationId xmlns:a16="http://schemas.microsoft.com/office/drawing/2014/main" id="{5187D23B-744E-4B90-8D94-D4E09A6FEAD1}"/>
-              </a:ext>
-            </a:extLst>
-          </p:cNvPr>
-          <p:cNvPicPr>
-            <a:picLocks noChangeAspect="1" noChangeArrowheads="1"/>
-          </p:cNvPicPr>
-          <p:nvPr/>
-        </p:nvPicPr>
-        <p:blipFill>
-          <a:blip r:embed="rId4">
-            <a:extLst>
-              <a:ext uri="{28A0092B-C50C-407E-A947-70E740481C1C}">
-                <a14:useLocalDpi xmlns:a14="http://schemas.microsoft.com/office/drawing/2010/main" val="0"/>
-              </a:ext>
-            </a:extLst>
-          </a:blip>
-          <a:srcRect/>
-          <a:stretch>
-            <a:fillRect/>
-          </a:stretch>
-        </p:blipFill>
-        <p:spPr bwMode="auto">
-          <a:xfrm>
-            <a:off x="693822" y="4001294"/>
-            <a:ext cx="1388394" cy="1388394"/>
-          </a:xfrm>
-          <a:prstGeom prst="rect">
-            <a:avLst/>
-          </a:prstGeom>
-          <a:noFill/>
-          <a:extLst>
-            <a:ext uri="{909E8E84-426E-40DD-AFC4-6F175D3DCCD1}">
-              <a14:hiddenFill xmlns:a14="http://schemas.microsoft.com/office/drawing/2010/main">
-                <a:solidFill>
-                  <a:srgbClr val="FFFFFF"/>
-                </a:solidFill>
-              </a14:hiddenFill>
-            </a:ext>
-          </a:extLst>
-        </p:spPr>
-      </p:pic>
-      <p:pic>
-        <p:nvPicPr>
-          <p:cNvPr id="10" name="Kép 9">
-            <a:extLst>
-              <a:ext uri="{FF2B5EF4-FFF2-40B4-BE49-F238E27FC236}">
-                <a16:creationId xmlns:a16="http://schemas.microsoft.com/office/drawing/2014/main" id="{18B9E51B-6861-4D84-A5E1-61D7D419B582}"/>
-              </a:ext>
-            </a:extLst>
-          </p:cNvPr>
-          <p:cNvPicPr>
-            <a:picLocks noChangeAspect="1"/>
-          </p:cNvPicPr>
-          <p:nvPr/>
-        </p:nvPicPr>
-        <p:blipFill>
-          <a:blip r:embed="rId5">
-            <a:extLst>
-              <a:ext uri="{28A0092B-C50C-407E-A947-70E740481C1C}">
-                <a14:useLocalDpi xmlns:a14="http://schemas.microsoft.com/office/drawing/2010/main" val="0"/>
-              </a:ext>
-            </a:extLst>
-          </a:blip>
-          <a:stretch>
-            <a:fillRect/>
-          </a:stretch>
-        </p:blipFill>
-        <p:spPr>
-          <a:xfrm>
-            <a:off x="0" y="5812553"/>
-            <a:ext cx="1045447" cy="1045447"/>
-          </a:xfrm>
-          <a:prstGeom prst="rect">
-            <a:avLst/>
-          </a:prstGeom>
-        </p:spPr>
-      </p:pic>
-      <p:pic>
-        <p:nvPicPr>
-          <p:cNvPr id="1032" name="Picture 8" descr="Selenium Automation Testing Services Company India, Singapore, Hong Kong,  Canada – ANGLER Technologies">
-            <a:extLst>
-              <a:ext uri="{FF2B5EF4-FFF2-40B4-BE49-F238E27FC236}">
-                <a16:creationId xmlns:a16="http://schemas.microsoft.com/office/drawing/2014/main" id="{821A2D7D-F81E-4584-8CB0-0112B782824B}"/>
-              </a:ext>
-            </a:extLst>
-          </p:cNvPr>
-          <p:cNvPicPr>
-            <a:picLocks noChangeAspect="1" noChangeArrowheads="1"/>
-          </p:cNvPicPr>
-          <p:nvPr/>
-        </p:nvPicPr>
-        <p:blipFill>
-          <a:blip r:embed="rId6">
-            <a:extLst>
-              <a:ext uri="{28A0092B-C50C-407E-A947-70E740481C1C}">
-                <a14:useLocalDpi xmlns:a14="http://schemas.microsoft.com/office/drawing/2010/main" val="0"/>
-              </a:ext>
-            </a:extLst>
-          </a:blip>
-          <a:srcRect/>
-          <a:stretch>
-            <a:fillRect/>
-          </a:stretch>
-        </p:blipFill>
-        <p:spPr bwMode="auto">
-          <a:xfrm>
-            <a:off x="3539214" y="3948250"/>
-            <a:ext cx="1589822" cy="1441438"/>
-          </a:xfrm>
-          <a:prstGeom prst="rect">
-            <a:avLst/>
-          </a:prstGeom>
-          <a:noFill/>
-          <a:extLst>
-            <a:ext uri="{909E8E84-426E-40DD-AFC4-6F175D3DCCD1}">
-              <a14:hiddenFill xmlns:a14="http://schemas.microsoft.com/office/drawing/2010/main">
-                <a:solidFill>
-                  <a:srgbClr val="FFFFFF"/>
-                </a:solidFill>
-              </a14:hiddenFill>
-            </a:ext>
-          </a:extLst>
-        </p:spPr>
-      </p:pic>
-    </p:spTree>
-    <p:extLst>
-      <p:ext uri="{BB962C8B-B14F-4D97-AF65-F5344CB8AC3E}">
-        <p14:creationId xmlns:p14="http://schemas.microsoft.com/office/powerpoint/2010/main" val="1820299457"/>
-      </p:ext>
-    </p:extLst>
-  </p:cSld>
-  <p:clrMapOvr>
-    <a:masterClrMapping/>
-  </p:clrMapOvr>
+  <mc:AlternateContent xmlns:mc="http://schemas.openxmlformats.org/markup-compatibility/2006">
+    <mc:Choice xmlns:p14="http://schemas.microsoft.com/office/powerpoint/2010/main" Requires="p14">
+      <p:transition spd="med" p14:dur="700">
+        <p:fade/>
+      </p:transition>
+    </mc:Choice>
+    <mc:Fallback>
+      <p:transition spd="med">
+        <p:fade/>
+      </p:transition>
+    </mc:Fallback>
+  </mc:AlternateContent>
+  <p:timing>
+    <p:tnLst>
+      <p:par>
+        <p:cTn id="1" dur="indefinite" restart="never" nodeType="tmRoot">
+          <p:childTnLst>
+            <p:seq concurrent="1" nextAc="seek">
+              <p:cTn id="2" dur="indefinite" nodeType="mainSeq">
+                <p:childTnLst>
+                  <p:par>
+                    <p:cTn id="3" fill="hold">
+                      <p:stCondLst>
+                        <p:cond delay="indefinite"/>
+                      </p:stCondLst>
+                      <p:childTnLst>
+                        <p:par>
+                          <p:cTn id="4" fill="hold">
+                            <p:stCondLst>
+                              <p:cond delay="0"/>
+                            </p:stCondLst>
+                            <p:childTnLst>
+                              <p:par>
+                                <p:cTn id="5" presetID="10" presetClass="entr" presetSubtype="0" fill="hold" grpId="0" nodeType="clickEffect">
+                                  <p:stCondLst>
+                                    <p:cond delay="0"/>
+                                  </p:stCondLst>
+                                  <p:childTnLst>
+                                    <p:set>
+                                      <p:cBhvr>
+                                        <p:cTn id="6" dur="1" fill="hold">
+                                          <p:stCondLst>
+                                            <p:cond delay="0"/>
+                                          </p:stCondLst>
+                                        </p:cTn>
+                                        <p:tgtEl>
+                                          <p:spTgt spid="4"/>
+                                        </p:tgtEl>
+                                        <p:attrNameLst>
+                                          <p:attrName>style.visibility</p:attrName>
+                                        </p:attrNameLst>
+                                      </p:cBhvr>
+                                      <p:to>
+                                        <p:strVal val="visible"/>
+                                      </p:to>
+                                    </p:set>
+                                    <p:animEffect transition="in" filter="fade">
+                                      <p:cBhvr>
+                                        <p:cTn id="7" dur="500"/>
+                                        <p:tgtEl>
+                                          <p:spTgt spid="4"/>
+                                        </p:tgtEl>
+                                      </p:cBhvr>
+                                    </p:animEffect>
+                                  </p:childTnLst>
+                                </p:cTn>
+                              </p:par>
+                            </p:childTnLst>
+                          </p:cTn>
+                        </p:par>
+                      </p:childTnLst>
+                    </p:cTn>
+                  </p:par>
+                  <p:par>
+                    <p:cTn id="8" fill="hold">
+                      <p:stCondLst>
+                        <p:cond delay="indefinite"/>
+                      </p:stCondLst>
+                      <p:childTnLst>
+                        <p:par>
+                          <p:cTn id="9" fill="hold">
+                            <p:stCondLst>
+                              <p:cond delay="0"/>
+                            </p:stCondLst>
+                            <p:childTnLst>
+                              <p:par>
+                                <p:cTn id="10" presetID="10" presetClass="entr" presetSubtype="0" fill="hold" nodeType="clickEffect">
+                                  <p:stCondLst>
+                                    <p:cond delay="0"/>
+                                  </p:stCondLst>
+                                  <p:childTnLst>
+                                    <p:set>
+                                      <p:cBhvr>
+                                        <p:cTn id="11" dur="1" fill="hold">
+                                          <p:stCondLst>
+                                            <p:cond delay="0"/>
+                                          </p:stCondLst>
+                                        </p:cTn>
+                                        <p:tgtEl>
+                                          <p:spTgt spid="5">
+                                            <p:txEl>
+                                              <p:pRg st="0" end="0"/>
+                                            </p:txEl>
+                                          </p:spTgt>
+                                        </p:tgtEl>
+                                        <p:attrNameLst>
+                                          <p:attrName>style.visibility</p:attrName>
+                                        </p:attrNameLst>
+                                      </p:cBhvr>
+                                      <p:to>
+                                        <p:strVal val="visible"/>
+                                      </p:to>
+                                    </p:set>
+                                    <p:animEffect transition="in" filter="fade">
+                                      <p:cBhvr>
+                                        <p:cTn id="12" dur="500"/>
+                                        <p:tgtEl>
+                                          <p:spTgt spid="5">
+                                            <p:txEl>
+                                              <p:pRg st="0" end="0"/>
+                                            </p:txEl>
+                                          </p:spTgt>
+                                        </p:tgtEl>
+                                      </p:cBhvr>
+                                    </p:animEffect>
+                                  </p:childTnLst>
+                                </p:cTn>
+                              </p:par>
+                              <p:par>
+                                <p:cTn id="13" presetID="10" presetClass="entr" presetSubtype="0" fill="hold" nodeType="withEffect">
+                                  <p:stCondLst>
+                                    <p:cond delay="0"/>
+                                  </p:stCondLst>
+                                  <p:childTnLst>
+                                    <p:set>
+                                      <p:cBhvr>
+                                        <p:cTn id="14" dur="1" fill="hold">
+                                          <p:stCondLst>
+                                            <p:cond delay="0"/>
+                                          </p:stCondLst>
+                                        </p:cTn>
+                                        <p:tgtEl>
+                                          <p:spTgt spid="5">
+                                            <p:txEl>
+                                              <p:pRg st="1" end="1"/>
+                                            </p:txEl>
+                                          </p:spTgt>
+                                        </p:tgtEl>
+                                        <p:attrNameLst>
+                                          <p:attrName>style.visibility</p:attrName>
+                                        </p:attrNameLst>
+                                      </p:cBhvr>
+                                      <p:to>
+                                        <p:strVal val="visible"/>
+                                      </p:to>
+                                    </p:set>
+                                    <p:animEffect transition="in" filter="fade">
+                                      <p:cBhvr>
+                                        <p:cTn id="15" dur="500"/>
+                                        <p:tgtEl>
+                                          <p:spTgt spid="5">
+                                            <p:txEl>
+                                              <p:pRg st="1" end="1"/>
+                                            </p:txEl>
+                                          </p:spTgt>
+                                        </p:tgtEl>
+                                      </p:cBhvr>
+                                    </p:animEffect>
+                                  </p:childTnLst>
+                                </p:cTn>
+                              </p:par>
+                            </p:childTnLst>
+                          </p:cTn>
+                        </p:par>
+                      </p:childTnLst>
+                    </p:cTn>
+                  </p:par>
+                </p:childTnLst>
+              </p:cTn>
+              <p:prevCondLst>
+                <p:cond evt="onPrev" delay="0">
+                  <p:tgtEl>
+                    <p:sldTgt/>
+                  </p:tgtEl>
+                </p:cond>
+              </p:prevCondLst>
+              <p:nextCondLst>
+                <p:cond evt="onNext" delay="0">
+                  <p:tgtEl>
+                    <p:sldTgt/>
+                  </p:tgtEl>
+                </p:cond>
+              </p:nextCondLst>
+            </p:seq>
+          </p:childTnLst>
+        </p:cTn>
+      </p:par>
+    </p:tnLst>
+    <p:bldLst>
+      <p:bldP spid="4" grpId="0"/>
+    </p:bldLst>
+  </p:timing>
 </p:sld>
 </file>
 

--- a/Dokumentáció/StockMaster_Prezentacio.pptx
+++ b/Dokumentáció/StockMaster_Prezentacio.pptx
@@ -13,11 +13,11 @@
     <p:sldId id="258" r:id="rId4"/>
     <p:sldId id="259" r:id="rId5"/>
     <p:sldId id="260" r:id="rId6"/>
-    <p:sldId id="269" r:id="rId7"/>
-    <p:sldId id="264" r:id="rId8"/>
-    <p:sldId id="272" r:id="rId9"/>
-    <p:sldId id="263" r:id="rId10"/>
-    <p:sldId id="273" r:id="rId11"/>
+    <p:sldId id="264" r:id="rId7"/>
+    <p:sldId id="272" r:id="rId8"/>
+    <p:sldId id="263" r:id="rId9"/>
+    <p:sldId id="273" r:id="rId10"/>
+    <p:sldId id="269" r:id="rId11"/>
     <p:sldId id="267" r:id="rId12"/>
     <p:sldId id="270" r:id="rId13"/>
     <p:sldId id="268" r:id="rId14"/>
@@ -211,7 +211,7 @@
           <a:p>
             <a:fld id="{DBB7823A-862C-422A-A575-936A9871EC5A}" type="datetimeFigureOut">
               <a:rPr lang="hu-HU" smtClean="0"/>
-              <a:t>2026. 04. 14.</a:t>
+              <a:t>2026. 04. 17.</a:t>
             </a:fld>
             <a:endParaRPr lang="hu-HU"/>
           </a:p>
@@ -619,40 +619,48 @@
           <a:p>
             <a:r>
               <a:rPr lang="hu-HU" dirty="0"/>
-              <a:t>A backend tesztelés biztosítja, hogy az alkalmazás üzleti logikája, API végpontjai és adatkezelése hibamentesen működjenek.</a:t>
-            </a:r>
-            <a:br>
+              <a:t>Az adatbázisunk normalizált és hierarchikus. A </a:t>
+            </a:r>
+            <a:r>
+              <a:rPr lang="hu-HU" dirty="0" err="1"/>
+              <a:t>Users</a:t>
+            </a:r>
+            <a:r>
               <a:rPr lang="hu-HU" dirty="0"/>
-            </a:br>
+              <a:t> tábla az alap, ehhez kapcsolódnak a beállítások, a statisztikák és a kereskedési pozíciók. Az </a:t>
+            </a:r>
+            <a:r>
+              <a:rPr lang="hu-HU" dirty="0" err="1"/>
+              <a:t>Assets</a:t>
+            </a:r>
             <a:r>
               <a:rPr lang="hu-HU" dirty="0"/>
-              <a:t>A képen egy automatizált tesztfuttatás látható, ahol különböző API funkciók kerülnek ellenőrzésre (pl. validációk, limit kezelések, hibakezelés).</a:t>
-            </a:r>
-          </a:p>
-          <a:p>
+              <a:t> tábla pedig egyfajta katalógusként működik a rendszerben elérhető eszközökhöz. A </a:t>
+            </a:r>
+            <a:r>
+              <a:rPr lang="hu-HU" dirty="0" err="1"/>
+              <a:t>UserStats</a:t>
+            </a:r>
             <a:r>
               <a:rPr lang="hu-HU" dirty="0"/>
-              <a:t>A sikeres tesztek (PASS) azt jelzik, hogy a rendszer stabil, és a különböző </a:t>
+              <a:t> tábla különösen fontos: ez tárolja a </a:t>
             </a:r>
             <a:r>
               <a:rPr lang="hu-HU" dirty="0" err="1"/>
-              <a:t>edge</a:t>
+              <a:t>WinRate-et</a:t>
             </a:r>
             <a:r>
               <a:rPr lang="hu-HU" dirty="0"/>
-              <a:t> </a:t>
+              <a:t> és az átlagos profitot/veszteséget, ami a felhasználó fejlődésének kulcsa. Minden tranzakciót naplózunk a </a:t>
             </a:r>
             <a:r>
               <a:rPr lang="hu-HU" dirty="0" err="1"/>
-              <a:t>case-eket</a:t>
+              <a:t>TransactionsLog</a:t>
             </a:r>
             <a:r>
               <a:rPr lang="hu-HU" dirty="0"/>
-              <a:t> is megfelelően kezeli. Az automatizált tesztelés kulcsfontosságú a megbízható és skálázható backend fejlesztéshez.</a:t>
-            </a:r>
-          </a:p>
-          <a:p>
-            <a:endParaRPr lang="hu-HU" dirty="0"/>
+              <a:t>-ban, így minden fillér visszakövethető.</a:t>
+            </a:r>
           </a:p>
         </p:txBody>
       </p:sp>
@@ -682,7 +690,7 @@
     </p:spTree>
     <p:extLst>
       <p:ext uri="{BB962C8B-B14F-4D97-AF65-F5344CB8AC3E}">
-        <p14:creationId xmlns:p14="http://schemas.microsoft.com/office/powerpoint/2010/main" val="2923390516"/>
+        <p14:creationId xmlns:p14="http://schemas.microsoft.com/office/powerpoint/2010/main" val="2238836791"/>
       </p:ext>
     </p:extLst>
   </p:cSld>
@@ -1575,47 +1583,35 @@
           <a:p>
             <a:r>
               <a:rPr lang="hu-HU" dirty="0"/>
-              <a:t>Az adatbázisunk normalizált és hierarchikus. A </a:t>
+              <a:t>A frontend fejlesztésekor a legfőbb szempontunk az volt, hogy egy tőzsdei szoftver komplexitását érthetővé és átláthatóvá tegyük a kezdők számára is.</a:t>
+            </a:r>
+          </a:p>
+          <a:p>
+            <a:r>
+              <a:rPr lang="hu-HU" dirty="0"/>
+              <a:t>A technológiai alapokat a </a:t>
+            </a:r>
+            <a:r>
+              <a:rPr lang="hu-HU" b="1" dirty="0"/>
+              <a:t>HTML5, CSS3 és a JavaScript</a:t>
+            </a:r>
+            <a:r>
+              <a:rPr lang="hu-HU" dirty="0"/>
+              <a:t> szolgáltatják. Utóbbi teszi lehetővé, hogy a platformunk ne legyen statikus: a gyertya-diagramok dinamikusan rajzolódnak ki, és a felhasználó igénye szerint válthat az idősíkok között, legyen szó 1 perces vagy akár heti bontásról.</a:t>
+            </a:r>
+          </a:p>
+          <a:p>
+            <a:r>
+              <a:rPr lang="hu-HU" dirty="0"/>
+              <a:t>nagy hangsúlyt fektettünk az esztétikára. A bal oldali keresősáv segítségével a felhasználók gyorsan válthatnak a különböző részvények és </a:t>
             </a:r>
             <a:r>
               <a:rPr lang="hu-HU" dirty="0" err="1"/>
-              <a:t>Users</a:t>
+              <a:t>kriptovaluták</a:t>
             </a:r>
             <a:r>
               <a:rPr lang="hu-HU" dirty="0"/>
-              <a:t> tábla az alap, ehhez kapcsolódnak a beállítások, a statisztikák és a kereskedési pozíciók. Az </a:t>
-            </a:r>
-            <a:r>
-              <a:rPr lang="hu-HU" dirty="0" err="1"/>
-              <a:t>Assets</a:t>
-            </a:r>
-            <a:r>
-              <a:rPr lang="hu-HU" dirty="0"/>
-              <a:t> tábla pedig egyfajta katalógusként működik a rendszerben elérhető eszközökhöz. A </a:t>
-            </a:r>
-            <a:r>
-              <a:rPr lang="hu-HU" dirty="0" err="1"/>
-              <a:t>UserStats</a:t>
-            </a:r>
-            <a:r>
-              <a:rPr lang="hu-HU" dirty="0"/>
-              <a:t> tábla különösen fontos: ez tárolja a </a:t>
-            </a:r>
-            <a:r>
-              <a:rPr lang="hu-HU" dirty="0" err="1"/>
-              <a:t>WinRate-et</a:t>
-            </a:r>
-            <a:r>
-              <a:rPr lang="hu-HU" dirty="0"/>
-              <a:t> és az átlagos profitot/veszteséget, ami a felhasználó fejlődésének kulcsa. Minden tranzakciót naplózunk a </a:t>
-            </a:r>
-            <a:r>
-              <a:rPr lang="hu-HU" dirty="0" err="1"/>
-              <a:t>TransactionsLog</a:t>
-            </a:r>
-            <a:r>
-              <a:rPr lang="hu-HU" dirty="0"/>
-              <a:t>-ban, így minden fillér visszakövethető.</a:t>
+              <a:t> között. A tranzakciós felületen a vétel és eladás gombok azonnali vizuális visszajelzést adnak, a portfólió pedig valós időben mutatja az egyenleg változását.</a:t>
             </a:r>
           </a:p>
         </p:txBody>
@@ -1646,7 +1642,7 @@
     </p:spTree>
     <p:extLst>
       <p:ext uri="{BB962C8B-B14F-4D97-AF65-F5344CB8AC3E}">
-        <p14:creationId xmlns:p14="http://schemas.microsoft.com/office/powerpoint/2010/main" val="2238836791"/>
+        <p14:creationId xmlns:p14="http://schemas.microsoft.com/office/powerpoint/2010/main" val="514705530"/>
       </p:ext>
     </p:extLst>
   </p:cSld>
@@ -1702,36 +1698,57 @@
           <a:p>
             <a:r>
               <a:rPr lang="hu-HU" dirty="0"/>
-              <a:t>A frontend fejlesztésekor a legfőbb szempontunk az volt, hogy egy tőzsdei szoftver komplexitását érthetővé és átláthatóvá tegyük a kezdők számára is.</a:t>
-            </a:r>
-          </a:p>
-          <a:p>
+              <a:t>A frontend tesztelése során az volt a célunk, hogy a felhasználói felület minden interaktív eleme stabilan </a:t>
+            </a:r>
+            <a:r>
+              <a:rPr lang="hu-HU" dirty="0" err="1"/>
+              <a:t>működjön</a:t>
+            </a:r>
             <a:r>
               <a:rPr lang="hu-HU" dirty="0"/>
-              <a:t>A technológiai alapokat a </a:t>
+              <a:t>. Ehhez a </a:t>
             </a:r>
             <a:r>
               <a:rPr lang="hu-HU" b="1" dirty="0"/>
-              <a:t>HTML5, CSS3 és a JavaScript</a:t>
+              <a:t>Robot Framework</a:t>
             </a:r>
             <a:r>
               <a:rPr lang="hu-HU" dirty="0"/>
-              <a:t> szolgáltatják. Utóbbi teszi lehetővé, hogy a platformunk ne legyen statikus: a gyertya-diagramok dinamikusan rajzolódnak ki, és a felhasználó igénye szerint válthat az idősíkok között, legyen szó 1 perces vagy akár heti bontásról.</a:t>
-            </a:r>
-          </a:p>
-          <a:p>
+              <a:t> keretrendszert használtuk, </a:t>
+            </a:r>
+            <a:r>
+              <a:rPr lang="hu-HU" b="1" dirty="0" err="1"/>
+              <a:t>Selenium</a:t>
+            </a:r>
             <a:r>
               <a:rPr lang="hu-HU" dirty="0"/>
-              <a:t>nagy hangsúlyt fektettünk az esztétikára. A bal oldali keresősáv segítségével a felhasználók gyorsan válthatnak a különböző részvények és </a:t>
+              <a:t> könyvtárral kiegészítve, a teszteseteket pedig a </a:t>
+            </a:r>
+            <a:r>
+              <a:rPr lang="hu-HU" b="1" dirty="0"/>
+              <a:t>RIDE</a:t>
+            </a:r>
+            <a:r>
+              <a:rPr lang="hu-HU" dirty="0"/>
+              <a:t> grafikus felületén menedzseltük.</a:t>
+            </a:r>
+          </a:p>
+          <a:p>
+            <a:r>
+              <a:rPr lang="hu-HU" dirty="0"/>
+              <a:t>Az automatizált tesztjeink lefedték a teljes felhasználói utat a regisztrációtól kezdve a részvényvásárláson át a kijelentkezésig. A tesztek során a kritikus funkciók – mint például az egyenleg csökkenése vétel után – hibátlanul futottak le. Ugyanakkor azonosítottunk egy magas prioritású esztétikai hibát: az eladás, azaz a </a:t>
             </a:r>
             <a:r>
               <a:rPr lang="hu-HU" dirty="0" err="1"/>
-              <a:t>kriptovaluták</a:t>
+              <a:t>short</a:t>
             </a:r>
             <a:r>
               <a:rPr lang="hu-HU" dirty="0"/>
-              <a:t> között. A tranzakciós felületen a vétel és eladás gombok azonnali vizuális visszajelzést adnak, a portfólió pedig valós időben mutatja az egyenleg változását.</a:t>
-            </a:r>
+              <a:t> pozíciók megnyitásakor a grafikus felületen az árfolyam kijelzése néha szétcsúszik. Ezt a hibajegyet rögzítettük, és a vizuális korrekció már folyamatban van.</a:t>
+            </a:r>
+          </a:p>
+          <a:p>
+            <a:endParaRPr lang="hu-HU" dirty="0"/>
           </a:p>
         </p:txBody>
       </p:sp>
@@ -1761,7 +1778,7 @@
     </p:spTree>
     <p:extLst>
       <p:ext uri="{BB962C8B-B14F-4D97-AF65-F5344CB8AC3E}">
-        <p14:creationId xmlns:p14="http://schemas.microsoft.com/office/powerpoint/2010/main" val="514705530"/>
+        <p14:creationId xmlns:p14="http://schemas.microsoft.com/office/powerpoint/2010/main" val="1195591999"/>
       </p:ext>
     </p:extLst>
   </p:cSld>
@@ -1817,53 +1834,43 @@
           <a:p>
             <a:r>
               <a:rPr lang="hu-HU" dirty="0"/>
-              <a:t>A frontend tesztelése során az volt a célunk, hogy a felhasználói felület minden interaktív eleme stabilan </a:t>
-            </a:r>
-            <a:r>
-              <a:rPr lang="hu-HU" dirty="0" err="1"/>
-              <a:t>működjön</a:t>
-            </a:r>
+              <a:t>Ezen a dián a StockMaster technológiai hátterét, vagyis a projektünk 'motorháztető alatti' részét mutatjuk be. A szoftver fejlesztése során a klasszikus és megbízható webes technológiák kombinációját választottuk, hogy egy stabil, mégis gyors platformot kapjunk.</a:t>
+            </a:r>
+          </a:p>
+          <a:p>
             <a:r>
               <a:rPr lang="hu-HU" dirty="0"/>
-              <a:t>. Ehhez a </a:t>
+              <a:t>A </a:t>
             </a:r>
             <a:r>
               <a:rPr lang="hu-HU" b="1" dirty="0"/>
-              <a:t>Robot Framework</a:t>
+              <a:t>Backend</a:t>
             </a:r>
             <a:r>
               <a:rPr lang="hu-HU" dirty="0"/>
-              <a:t> keretrendszert használtuk, </a:t>
+              <a:t>, tehát a szoftver agya, </a:t>
+            </a:r>
+            <a:r>
+              <a:rPr lang="hu-HU" b="1" dirty="0"/>
+              <a:t>PHP</a:t>
+            </a:r>
+            <a:r>
+              <a:rPr lang="hu-HU" dirty="0"/>
+              <a:t> nyelven készült. Ez a réteg felel a kritikus üzleti logikáért: itt futnak le a vétel-eladási algoritmusok, itt történik a fedezetellenőrzés, és ez a modul számolja ki a profitot vagy veszteséget minden zárás után.</a:t>
+            </a:r>
+          </a:p>
+          <a:p>
+            <a:r>
+              <a:rPr lang="hu-HU" dirty="0"/>
+              <a:t>Az adatok tárolására </a:t>
             </a:r>
             <a:r>
               <a:rPr lang="hu-HU" b="1" dirty="0" err="1"/>
-              <a:t>Selenium</a:t>
+              <a:t>MySQL</a:t>
             </a:r>
             <a:r>
               <a:rPr lang="hu-HU" dirty="0"/>
-              <a:t> könyvtárral kiegészítve, a teszteseteket pedig a </a:t>
-            </a:r>
-            <a:r>
-              <a:rPr lang="hu-HU" b="1" dirty="0"/>
-              <a:t>RIDE</a:t>
-            </a:r>
-            <a:r>
-              <a:rPr lang="hu-HU" dirty="0"/>
-              <a:t> grafikus felületén menedzseltük.</a:t>
-            </a:r>
-          </a:p>
-          <a:p>
-            <a:r>
-              <a:rPr lang="hu-HU" dirty="0"/>
-              <a:t>Az automatizált tesztjeink lefedték a teljes felhasználói utat a regisztrációtól kezdve a részvényvásárláson át a kijelentkezésig. A tesztek során a kritikus funkciók – mint például az egyenleg csökkenése vétel után – hibátlanul futottak le. Ugyanakkor azonosítottunk egy magas prioritású esztétikai hibát: az eladás, azaz a </a:t>
-            </a:r>
-            <a:r>
-              <a:rPr lang="hu-HU" dirty="0" err="1"/>
-              <a:t>short</a:t>
-            </a:r>
-            <a:r>
-              <a:rPr lang="hu-HU" dirty="0"/>
-              <a:t> pozíciók megnyitásakor a grafikus felületen az árfolyam kijelzése néha szétcsúszik. Ezt a hibajegyet rögzítettük, és a vizuális korrekció már folyamatban van.</a:t>
+              <a:t> relációs adatbázist használunk. Ahogy az adatszerkezeti dokumentációnkban is látható, a rendszerünk normalizált táblákban tárolja a felhasználói profilokat, a kereskedési naplókat és a fejlődési statisztikákat. Ez az összeállítás garantálja, hogy a StockMaster egyszerre legyen biztonságos és villámgyors a lekérdezések során.</a:t>
             </a:r>
           </a:p>
           <a:p>
@@ -1897,7 +1904,7 @@
     </p:spTree>
     <p:extLst>
       <p:ext uri="{BB962C8B-B14F-4D97-AF65-F5344CB8AC3E}">
-        <p14:creationId xmlns:p14="http://schemas.microsoft.com/office/powerpoint/2010/main" val="1195591999"/>
+        <p14:creationId xmlns:p14="http://schemas.microsoft.com/office/powerpoint/2010/main" val="2805143975"/>
       </p:ext>
     </p:extLst>
   </p:cSld>
@@ -1953,89 +1960,36 @@
           <a:p>
             <a:r>
               <a:rPr lang="hu-HU" dirty="0"/>
-              <a:t>Ezen a dián a StockMaster technológiai hátterét, vagyis a projektünk 'motorháztető alatti' részét mutatjuk be. A szoftver fejlesztése során a klasszikus és megbízható webes technológiák kombinációját választottuk, hogy egy stabil, mégis gyors platformot kapjunk.</a:t>
-            </a:r>
-          </a:p>
-          <a:p>
-            <a:r>
+              <a:t>A backend tesztelés biztosítja, hogy az alkalmazás üzleti logikája, API végpontjai és adatkezelése hibamentesen működjenek.</a:t>
+            </a:r>
+            <a:br>
               <a:rPr lang="hu-HU" dirty="0"/>
-              <a:t>A </a:t>
-            </a:r>
-            <a:r>
-              <a:rPr lang="hu-HU" b="1" dirty="0"/>
-              <a:t>Frontend</a:t>
-            </a:r>
+            </a:br>
             <a:r>
               <a:rPr lang="hu-HU" dirty="0"/>
-              <a:t> réteg alapjait a </a:t>
-            </a:r>
-            <a:r>
-              <a:rPr lang="hu-HU" b="1" dirty="0"/>
-              <a:t>HTML5 és a CSS3</a:t>
-            </a:r>
+              <a:t>A képen egy automatizált tesztfuttatás látható, ahol különböző API funkciók kerülnek ellenőrzésre (pl. validációk, limit kezelések, hibakezelés).</a:t>
+            </a:r>
+          </a:p>
+          <a:p>
             <a:r>
               <a:rPr lang="hu-HU" dirty="0"/>
-              <a:t> adja, ami biztosítja a letisztult megjelenést és a </a:t>
+              <a:t>A sikeres tesztek (PASS) azt jelzik, hogy a rendszer stabil, és a különböző </a:t>
             </a:r>
             <a:r>
               <a:rPr lang="hu-HU" dirty="0" err="1"/>
-              <a:t>reszponzivitást</a:t>
+              <a:t>edge</a:t>
             </a:r>
             <a:r>
               <a:rPr lang="hu-HU" dirty="0"/>
-              <a:t>. A </a:t>
-            </a:r>
-            <a:r>
-              <a:rPr lang="hu-HU" b="1" dirty="0"/>
-              <a:t>JavaScript</a:t>
+              <a:t> </a:t>
+            </a:r>
+            <a:r>
+              <a:rPr lang="hu-HU" dirty="0" err="1"/>
+              <a:t>case-eket</a:t>
             </a:r>
             <a:r>
               <a:rPr lang="hu-HU" dirty="0"/>
-              <a:t> kulcsszerepet játszik nálunk: ez teszi lehetővé, hogy a gyertya-diagramok és az árfolyamok az oldal </a:t>
-            </a:r>
-            <a:r>
-              <a:rPr lang="hu-HU" dirty="0" err="1"/>
-              <a:t>újratöltése</a:t>
-            </a:r>
-            <a:r>
-              <a:rPr lang="hu-HU" dirty="0"/>
-              <a:t> nélkül, dinamikusan frissüljenek, valódi tőzsdei élményt nyújtva.</a:t>
-            </a:r>
-          </a:p>
-          <a:p>
-            <a:r>
-              <a:rPr lang="hu-HU" dirty="0"/>
-              <a:t>A </a:t>
-            </a:r>
-            <a:r>
-              <a:rPr lang="hu-HU" b="1" dirty="0"/>
-              <a:t>Backend</a:t>
-            </a:r>
-            <a:r>
-              <a:rPr lang="hu-HU" dirty="0"/>
-              <a:t>, tehát a szoftver agya, </a:t>
-            </a:r>
-            <a:r>
-              <a:rPr lang="hu-HU" b="1" dirty="0"/>
-              <a:t>PHP</a:t>
-            </a:r>
-            <a:r>
-              <a:rPr lang="hu-HU" dirty="0"/>
-              <a:t> nyelven készült. Ez a réteg felel a kritikus üzleti logikáért: itt futnak le a vétel-eladási algoritmusok, itt történik a fedezetellenőrzés, és ez a modul számolja ki a profitot vagy veszteséget minden zárás után.</a:t>
-            </a:r>
-          </a:p>
-          <a:p>
-            <a:r>
-              <a:rPr lang="hu-HU" dirty="0"/>
-              <a:t>Az adatok tárolására </a:t>
-            </a:r>
-            <a:r>
-              <a:rPr lang="hu-HU" b="1" dirty="0" err="1"/>
-              <a:t>MySQL</a:t>
-            </a:r>
-            <a:r>
-              <a:rPr lang="hu-HU" dirty="0"/>
-              <a:t> relációs adatbázist használunk. Ahogy az adatszerkezeti dokumentációnkban is látható, a rendszerünk normalizált táblákban tárolja a felhasználói profilokat, a kereskedési naplókat és a fejlődési statisztikákat. Ez az összeállítás garantálja, hogy a StockMaster egyszerre legyen biztonságos és villámgyors a lekérdezések során.</a:t>
+              <a:t> is megfelelően kezeli. Az automatizált tesztelés kulcsfontosságú a megbízható és skálázható backend fejlesztéshez.</a:t>
             </a:r>
           </a:p>
           <a:p>
@@ -2069,7 +2023,7 @@
     </p:spTree>
     <p:extLst>
       <p:ext uri="{BB962C8B-B14F-4D97-AF65-F5344CB8AC3E}">
-        <p14:creationId xmlns:p14="http://schemas.microsoft.com/office/powerpoint/2010/main" val="2805143975"/>
+        <p14:creationId xmlns:p14="http://schemas.microsoft.com/office/powerpoint/2010/main" val="2923390516"/>
       </p:ext>
     </p:extLst>
   </p:cSld>
@@ -2226,7 +2180,7 @@
           <a:p>
             <a:fld id="{D31F9038-47AD-43A3-BBBF-D66692911134}" type="datetimeFigureOut">
               <a:rPr lang="hu-HU" smtClean="0"/>
-              <a:t>2026. 04. 14.</a:t>
+              <a:t>2026. 04. 17.</a:t>
             </a:fld>
             <a:endParaRPr lang="hu-HU"/>
           </a:p>
@@ -2424,7 +2378,7 @@
           <a:p>
             <a:fld id="{D31F9038-47AD-43A3-BBBF-D66692911134}" type="datetimeFigureOut">
               <a:rPr lang="hu-HU" smtClean="0"/>
-              <a:t>2026. 04. 14.</a:t>
+              <a:t>2026. 04. 17.</a:t>
             </a:fld>
             <a:endParaRPr lang="hu-HU"/>
           </a:p>
@@ -2632,7 +2586,7 @@
           <a:p>
             <a:fld id="{D31F9038-47AD-43A3-BBBF-D66692911134}" type="datetimeFigureOut">
               <a:rPr lang="hu-HU" smtClean="0"/>
-              <a:t>2026. 04. 14.</a:t>
+              <a:t>2026. 04. 17.</a:t>
             </a:fld>
             <a:endParaRPr lang="hu-HU"/>
           </a:p>
@@ -2830,7 +2784,7 @@
           <a:p>
             <a:fld id="{D31F9038-47AD-43A3-BBBF-D66692911134}" type="datetimeFigureOut">
               <a:rPr lang="hu-HU" smtClean="0"/>
-              <a:t>2026. 04. 14.</a:t>
+              <a:t>2026. 04. 17.</a:t>
             </a:fld>
             <a:endParaRPr lang="hu-HU"/>
           </a:p>
@@ -3105,7 +3059,7 @@
           <a:p>
             <a:fld id="{D31F9038-47AD-43A3-BBBF-D66692911134}" type="datetimeFigureOut">
               <a:rPr lang="hu-HU" smtClean="0"/>
-              <a:t>2026. 04. 14.</a:t>
+              <a:t>2026. 04. 17.</a:t>
             </a:fld>
             <a:endParaRPr lang="hu-HU"/>
           </a:p>
@@ -3370,7 +3324,7 @@
           <a:p>
             <a:fld id="{D31F9038-47AD-43A3-BBBF-D66692911134}" type="datetimeFigureOut">
               <a:rPr lang="hu-HU" smtClean="0"/>
-              <a:t>2026. 04. 14.</a:t>
+              <a:t>2026. 04. 17.</a:t>
             </a:fld>
             <a:endParaRPr lang="hu-HU"/>
           </a:p>
@@ -3782,7 +3736,7 @@
           <a:p>
             <a:fld id="{D31F9038-47AD-43A3-BBBF-D66692911134}" type="datetimeFigureOut">
               <a:rPr lang="hu-HU" smtClean="0"/>
-              <a:t>2026. 04. 14.</a:t>
+              <a:t>2026. 04. 17.</a:t>
             </a:fld>
             <a:endParaRPr lang="hu-HU"/>
           </a:p>
@@ -3923,7 +3877,7 @@
           <a:p>
             <a:fld id="{D31F9038-47AD-43A3-BBBF-D66692911134}" type="datetimeFigureOut">
               <a:rPr lang="hu-HU" smtClean="0"/>
-              <a:t>2026. 04. 14.</a:t>
+              <a:t>2026. 04. 17.</a:t>
             </a:fld>
             <a:endParaRPr lang="hu-HU"/>
           </a:p>
@@ -4036,7 +3990,7 @@
           <a:p>
             <a:fld id="{D31F9038-47AD-43A3-BBBF-D66692911134}" type="datetimeFigureOut">
               <a:rPr lang="hu-HU" smtClean="0"/>
-              <a:t>2026. 04. 14.</a:t>
+              <a:t>2026. 04. 17.</a:t>
             </a:fld>
             <a:endParaRPr lang="hu-HU"/>
           </a:p>
@@ -4347,7 +4301,7 @@
           <a:p>
             <a:fld id="{D31F9038-47AD-43A3-BBBF-D66692911134}" type="datetimeFigureOut">
               <a:rPr lang="hu-HU" smtClean="0"/>
-              <a:t>2026. 04. 14.</a:t>
+              <a:t>2026. 04. 17.</a:t>
             </a:fld>
             <a:endParaRPr lang="hu-HU"/>
           </a:p>
@@ -4635,7 +4589,7 @@
           <a:p>
             <a:fld id="{D31F9038-47AD-43A3-BBBF-D66692911134}" type="datetimeFigureOut">
               <a:rPr lang="hu-HU" smtClean="0"/>
-              <a:t>2026. 04. 14.</a:t>
+              <a:t>2026. 04. 17.</a:t>
             </a:fld>
             <a:endParaRPr lang="hu-HU"/>
           </a:p>
@@ -4876,7 +4830,7 @@
           <a:p>
             <a:fld id="{D31F9038-47AD-43A3-BBBF-D66692911134}" type="datetimeFigureOut">
               <a:rPr lang="hu-HU" smtClean="0"/>
-              <a:t>2026. 04. 14.</a:t>
+              <a:t>2026. 04. 17.</a:t>
             </a:fld>
             <a:endParaRPr lang="hu-HU"/>
           </a:p>
@@ -5686,13 +5640,13 @@
   <p:clrMapOvr>
     <a:masterClrMapping/>
   </p:clrMapOvr>
-  <mc:AlternateContent xmlns:mc="http://schemas.openxmlformats.org/markup-compatibility/2006">
-    <mc:Choice xmlns:p14="http://schemas.microsoft.com/office/powerpoint/2010/main" Requires="p14">
+  <mc:AlternateContent xmlns:mc="http://schemas.openxmlformats.org/markup-compatibility/2006" xmlns:p14="http://schemas.microsoft.com/office/powerpoint/2010/main">
+    <mc:Choice Requires="p14">
       <p:transition spd="med" p14:dur="700">
         <p:fade/>
       </p:transition>
     </mc:Choice>
-    <mc:Fallback>
+    <mc:Fallback xmlns="">
       <p:transition spd="med">
         <p:fade/>
       </p:transition>
@@ -5723,7 +5677,7 @@
           <p:cNvPr id="5" name="Kép 4">
             <a:extLst>
               <a:ext uri="{FF2B5EF4-FFF2-40B4-BE49-F238E27FC236}">
-                <a16:creationId xmlns:a16="http://schemas.microsoft.com/office/drawing/2014/main" id="{CEFF17C2-5026-403D-A101-6AC9B36B708D}"/>
+                <a16:creationId xmlns:a16="http://schemas.microsoft.com/office/drawing/2014/main" id="{E4815600-7136-4366-9460-CECE80029795}"/>
               </a:ext>
             </a:extLst>
           </p:cNvPr>
@@ -5759,7 +5713,7 @@
           <p:cNvPr id="2" name="Cím 1">
             <a:extLst>
               <a:ext uri="{FF2B5EF4-FFF2-40B4-BE49-F238E27FC236}">
-                <a16:creationId xmlns:a16="http://schemas.microsoft.com/office/drawing/2014/main" id="{66C7BBF2-3BAE-4485-A30E-E3D573859C88}"/>
+                <a16:creationId xmlns:a16="http://schemas.microsoft.com/office/drawing/2014/main" id="{91B49CDF-7F46-448E-BC2A-42B5B82823E1}"/>
               </a:ext>
             </a:extLst>
           </p:cNvPr>
@@ -5783,7 +5737,7 @@
                 <a:latin typeface="Times New Roman" panose="02020603050405020304" pitchFamily="18" charset="0"/>
                 <a:cs typeface="Times New Roman" panose="02020603050405020304" pitchFamily="18" charset="0"/>
               </a:rPr>
-              <a:t>Backend-Tesztelés</a:t>
+              <a:t>Adatszerkezet és Adatbázis</a:t>
             </a:r>
           </a:p>
         </p:txBody>
@@ -5793,7 +5747,7 @@
           <p:cNvPr id="3" name="Tartalom helye 2">
             <a:extLst>
               <a:ext uri="{FF2B5EF4-FFF2-40B4-BE49-F238E27FC236}">
-                <a16:creationId xmlns:a16="http://schemas.microsoft.com/office/drawing/2014/main" id="{37E8E98B-FF77-45AF-B726-8E6D315B4593}"/>
+                <a16:creationId xmlns:a16="http://schemas.microsoft.com/office/drawing/2014/main" id="{055D6986-5082-4874-85AB-732D6A2E2CD7}"/>
               </a:ext>
             </a:extLst>
           </p:cNvPr>
@@ -5809,161 +5763,198 @@
           <a:bodyPr/>
           <a:lstStyle/>
           <a:p>
-            <a:r>
-              <a:rPr lang="hu-HU" dirty="0">
+            <a:pPr algn="l"/>
+            <a:r>
+              <a:rPr lang="hu-HU" b="0" i="0" dirty="0">
                 <a:solidFill>
                   <a:schemeClr val="bg1"/>
                 </a:solidFill>
+                <a:effectLst/>
                 <a:latin typeface="Times New Roman" panose="02020603050405020304" pitchFamily="18" charset="0"/>
                 <a:cs typeface="Times New Roman" panose="02020603050405020304" pitchFamily="18" charset="0"/>
               </a:rPr>
-              <a:t>Automatizált API tesztek futtatása (</a:t>
-            </a:r>
-            <a:r>
-              <a:rPr lang="hu-HU" dirty="0" err="1">
+              <a:t>Felhasználói adatok: </a:t>
+            </a:r>
+            <a:r>
+              <a:rPr lang="hu-HU" b="0" i="0" dirty="0" err="1">
                 <a:solidFill>
                   <a:schemeClr val="bg1"/>
                 </a:solidFill>
+                <a:effectLst/>
                 <a:latin typeface="Times New Roman" panose="02020603050405020304" pitchFamily="18" charset="0"/>
                 <a:cs typeface="Times New Roman" panose="02020603050405020304" pitchFamily="18" charset="0"/>
               </a:rPr>
-              <a:t>Laravel</a:t>
-            </a:r>
-            <a:r>
-              <a:rPr lang="hu-HU" dirty="0">
+              <a:t>Users</a:t>
+            </a:r>
+            <a:r>
+              <a:rPr lang="hu-HU" b="0" i="0" dirty="0">
                 <a:solidFill>
                   <a:schemeClr val="bg1"/>
                 </a:solidFill>
+                <a:effectLst/>
                 <a:latin typeface="Times New Roman" panose="02020603050405020304" pitchFamily="18" charset="0"/>
                 <a:cs typeface="Times New Roman" panose="02020603050405020304" pitchFamily="18" charset="0"/>
               </a:rPr>
-              <a:t> </a:t>
-            </a:r>
-            <a:r>
-              <a:rPr lang="hu-HU" dirty="0" err="1">
+              <a:t>, </a:t>
+            </a:r>
+            <a:r>
+              <a:rPr lang="hu-HU" b="0" i="0" dirty="0" err="1">
                 <a:solidFill>
                   <a:schemeClr val="bg1"/>
                 </a:solidFill>
+                <a:effectLst/>
                 <a:latin typeface="Times New Roman" panose="02020603050405020304" pitchFamily="18" charset="0"/>
                 <a:cs typeface="Times New Roman" panose="02020603050405020304" pitchFamily="18" charset="0"/>
               </a:rPr>
-              <a:t>Artisan</a:t>
-            </a:r>
-            <a:r>
-              <a:rPr lang="hu-HU" dirty="0">
+              <a:t>Settings</a:t>
+            </a:r>
+            <a:r>
+              <a:rPr lang="hu-HU" b="0" i="0" dirty="0">
                 <a:solidFill>
                   <a:schemeClr val="bg1"/>
                 </a:solidFill>
+                <a:effectLst/>
                 <a:latin typeface="Times New Roman" panose="02020603050405020304" pitchFamily="18" charset="0"/>
                 <a:cs typeface="Times New Roman" panose="02020603050405020304" pitchFamily="18" charset="0"/>
               </a:rPr>
-              <a:t>)</a:t>
-            </a:r>
-          </a:p>
-          <a:p>
-            <a:r>
-              <a:rPr lang="hu-HU" dirty="0">
+              <a:t>, </a:t>
+            </a:r>
+            <a:r>
+              <a:rPr lang="hu-HU" b="0" i="0" dirty="0" err="1">
                 <a:solidFill>
                   <a:schemeClr val="bg1"/>
                 </a:solidFill>
+                <a:effectLst/>
                 <a:latin typeface="Times New Roman" panose="02020603050405020304" pitchFamily="18" charset="0"/>
                 <a:cs typeface="Times New Roman" panose="02020603050405020304" pitchFamily="18" charset="0"/>
               </a:rPr>
-              <a:t>Minden </a:t>
-            </a:r>
-            <a:r>
-              <a:rPr lang="hu-HU" dirty="0" err="1">
+              <a:t>Stats</a:t>
+            </a:r>
+            <a:r>
+              <a:rPr lang="hu-HU" b="0" i="0" dirty="0">
                 <a:solidFill>
                   <a:schemeClr val="bg1"/>
                 </a:solidFill>
+                <a:effectLst/>
                 <a:latin typeface="Times New Roman" panose="02020603050405020304" pitchFamily="18" charset="0"/>
                 <a:cs typeface="Times New Roman" panose="02020603050405020304" pitchFamily="18" charset="0"/>
               </a:rPr>
-              <a:t>endpoint</a:t>
-            </a:r>
-            <a:r>
-              <a:rPr lang="hu-HU" dirty="0">
+              <a:t>. </a:t>
+            </a:r>
+          </a:p>
+          <a:p>
+            <a:pPr algn="l"/>
+            <a:r>
+              <a:rPr lang="hu-HU" b="0" i="0" dirty="0">
                 <a:solidFill>
                   <a:schemeClr val="bg1"/>
                 </a:solidFill>
+                <a:effectLst/>
                 <a:latin typeface="Times New Roman" panose="02020603050405020304" pitchFamily="18" charset="0"/>
                 <a:cs typeface="Times New Roman" panose="02020603050405020304" pitchFamily="18" charset="0"/>
               </a:rPr>
-              <a:t> külön </a:t>
-            </a:r>
-            <a:r>
-              <a:rPr lang="hu-HU" dirty="0" err="1">
+              <a:t>Piaci adatok: </a:t>
+            </a:r>
+            <a:r>
+              <a:rPr lang="hu-HU" b="0" i="0" dirty="0" err="1">
                 <a:solidFill>
                   <a:schemeClr val="bg1"/>
                 </a:solidFill>
+                <a:effectLst/>
                 <a:latin typeface="Times New Roman" panose="02020603050405020304" pitchFamily="18" charset="0"/>
                 <a:cs typeface="Times New Roman" panose="02020603050405020304" pitchFamily="18" charset="0"/>
               </a:rPr>
-              <a:t>validálva</a:t>
-            </a:r>
-            <a:endParaRPr lang="hu-HU" dirty="0">
-              <a:solidFill>
-                <a:schemeClr val="bg1"/>
-              </a:solidFill>
-              <a:latin typeface="Times New Roman" panose="02020603050405020304" pitchFamily="18" charset="0"/>
-              <a:cs typeface="Times New Roman" panose="02020603050405020304" pitchFamily="18" charset="0"/>
-            </a:endParaRPr>
-          </a:p>
-          <a:p>
-            <a:r>
-              <a:rPr lang="hu-HU" dirty="0">
+              <a:t>Assets</a:t>
+            </a:r>
+            <a:r>
+              <a:rPr lang="hu-HU" b="0" i="0" dirty="0">
                 <a:solidFill>
                   <a:schemeClr val="bg1"/>
                 </a:solidFill>
+                <a:effectLst/>
                 <a:latin typeface="Times New Roman" panose="02020603050405020304" pitchFamily="18" charset="0"/>
                 <a:cs typeface="Times New Roman" panose="02020603050405020304" pitchFamily="18" charset="0"/>
               </a:rPr>
-              <a:t>Hibakezelés és </a:t>
-            </a:r>
-            <a:r>
-              <a:rPr lang="hu-HU" dirty="0" err="1">
+              <a:t> (részvények), PriceData (történeti árak). </a:t>
+            </a:r>
+          </a:p>
+          <a:p>
+            <a:pPr algn="l"/>
+            <a:r>
+              <a:rPr lang="hu-HU" b="0" i="0" dirty="0">
                 <a:solidFill>
                   <a:schemeClr val="bg1"/>
                 </a:solidFill>
+                <a:effectLst/>
                 <a:latin typeface="Times New Roman" panose="02020603050405020304" pitchFamily="18" charset="0"/>
                 <a:cs typeface="Times New Roman" panose="02020603050405020304" pitchFamily="18" charset="0"/>
               </a:rPr>
-              <a:t>rate</a:t>
-            </a:r>
-            <a:r>
-              <a:rPr lang="hu-HU" dirty="0">
+              <a:t>Tranzakciók: </a:t>
+            </a:r>
+            <a:r>
+              <a:rPr lang="hu-HU" b="0" i="0" dirty="0" err="1">
                 <a:solidFill>
                   <a:schemeClr val="bg1"/>
                 </a:solidFill>
+                <a:effectLst/>
                 <a:latin typeface="Times New Roman" panose="02020603050405020304" pitchFamily="18" charset="0"/>
                 <a:cs typeface="Times New Roman" panose="02020603050405020304" pitchFamily="18" charset="0"/>
               </a:rPr>
-              <a:t> limit is tesztelve</a:t>
-            </a:r>
-          </a:p>
-          <a:p>
-            <a:r>
-              <a:rPr lang="hu-HU" dirty="0">
+              <a:t>Positions</a:t>
+            </a:r>
+            <a:r>
+              <a:rPr lang="hu-HU" b="0" i="0" dirty="0">
                 <a:solidFill>
                   <a:schemeClr val="bg1"/>
                 </a:solidFill>
+                <a:effectLst/>
                 <a:latin typeface="Times New Roman" panose="02020603050405020304" pitchFamily="18" charset="0"/>
                 <a:cs typeface="Times New Roman" panose="02020603050405020304" pitchFamily="18" charset="0"/>
               </a:rPr>
-              <a:t>25 teszt, 129 ellenőrzés → minden sikeres</a:t>
-            </a:r>
-          </a:p>
-          <a:p>
-            <a:r>
-              <a:rPr lang="hu-HU" dirty="0">
+              <a:t> (nyitott/zárt pozíciók), </a:t>
+            </a:r>
+            <a:r>
+              <a:rPr lang="hu-HU" b="0" i="0" dirty="0" err="1">
                 <a:solidFill>
                   <a:schemeClr val="bg1"/>
                 </a:solidFill>
+                <a:effectLst/>
                 <a:latin typeface="Times New Roman" panose="02020603050405020304" pitchFamily="18" charset="0"/>
                 <a:cs typeface="Times New Roman" panose="02020603050405020304" pitchFamily="18" charset="0"/>
               </a:rPr>
-              <a:t>Gyors visszajelzés fejlesztés közben</a:t>
-            </a:r>
+              <a:t>TransactionsLog</a:t>
+            </a:r>
+            <a:r>
+              <a:rPr lang="hu-HU" b="0" i="0" dirty="0">
+                <a:solidFill>
+                  <a:schemeClr val="bg1"/>
+                </a:solidFill>
+                <a:effectLst/>
+                <a:latin typeface="Times New Roman" panose="02020603050405020304" pitchFamily="18" charset="0"/>
+                <a:cs typeface="Times New Roman" panose="02020603050405020304" pitchFamily="18" charset="0"/>
+              </a:rPr>
+              <a:t>. </a:t>
+            </a:r>
+          </a:p>
+          <a:p>
+            <a:pPr algn="l"/>
+            <a:r>
+              <a:rPr lang="hu-HU" b="0" i="0" dirty="0">
+                <a:solidFill>
+                  <a:schemeClr val="bg1"/>
+                </a:solidFill>
+                <a:effectLst/>
+                <a:latin typeface="Times New Roman" panose="02020603050405020304" pitchFamily="18" charset="0"/>
+                <a:cs typeface="Times New Roman" panose="02020603050405020304" pitchFamily="18" charset="0"/>
+              </a:rPr>
+              <a:t>Normalizált adatbázis</a:t>
+            </a:r>
+          </a:p>
+          <a:p>
+            <a:pPr marL="0" indent="0">
+              <a:buNone/>
+            </a:pPr>
+            <a:endParaRPr lang="hu-HU" dirty="0"/>
           </a:p>
         </p:txBody>
       </p:sp>
@@ -5972,7 +5963,7 @@
           <p:cNvPr id="4" name="Kép 3">
             <a:extLst>
               <a:ext uri="{FF2B5EF4-FFF2-40B4-BE49-F238E27FC236}">
-                <a16:creationId xmlns:a16="http://schemas.microsoft.com/office/drawing/2014/main" id="{58A924F7-ECFE-48E4-8CF6-A10FD1DD425C}"/>
+                <a16:creationId xmlns:a16="http://schemas.microsoft.com/office/drawing/2014/main" id="{9878BF87-6953-4138-B50E-541A798B6B0A}"/>
               </a:ext>
             </a:extLst>
           </p:cNvPr>
@@ -6003,59 +5994,23 @@
           </a:prstGeom>
         </p:spPr>
       </p:pic>
-      <p:pic>
-        <p:nvPicPr>
-          <p:cNvPr id="10" name="Kép 9">
-            <a:extLst>
-              <a:ext uri="{FF2B5EF4-FFF2-40B4-BE49-F238E27FC236}">
-                <a16:creationId xmlns:a16="http://schemas.microsoft.com/office/drawing/2014/main" id="{DE7ED009-EA02-43F7-968A-5BA416DD895D}"/>
-              </a:ext>
-            </a:extLst>
-          </p:cNvPr>
-          <p:cNvPicPr>
-            <a:picLocks noChangeAspect="1"/>
-          </p:cNvPicPr>
-          <p:nvPr/>
-        </p:nvPicPr>
-        <p:blipFill>
-          <a:blip r:embed="rId5">
-            <a:extLst>
-              <a:ext uri="{28A0092B-C50C-407E-A947-70E740481C1C}">
-                <a14:useLocalDpi xmlns:a14="http://schemas.microsoft.com/office/drawing/2010/main" val="0"/>
-              </a:ext>
-            </a:extLst>
-          </a:blip>
-          <a:stretch>
-            <a:fillRect/>
-          </a:stretch>
-        </p:blipFill>
-        <p:spPr>
-          <a:xfrm>
-            <a:off x="7942728" y="3528933"/>
-            <a:ext cx="3711389" cy="2806343"/>
-          </a:xfrm>
-          <a:prstGeom prst="rect">
-            <a:avLst/>
-          </a:prstGeom>
-        </p:spPr>
-      </p:pic>
     </p:spTree>
     <p:extLst>
       <p:ext uri="{BB962C8B-B14F-4D97-AF65-F5344CB8AC3E}">
-        <p14:creationId xmlns:p14="http://schemas.microsoft.com/office/powerpoint/2010/main" val="1588990733"/>
+        <p14:creationId xmlns:p14="http://schemas.microsoft.com/office/powerpoint/2010/main" val="1724216664"/>
       </p:ext>
     </p:extLst>
   </p:cSld>
   <p:clrMapOvr>
     <a:masterClrMapping/>
   </p:clrMapOvr>
-  <mc:AlternateContent xmlns:mc="http://schemas.openxmlformats.org/markup-compatibility/2006">
-    <mc:Choice xmlns:p14="http://schemas.microsoft.com/office/powerpoint/2010/main" Requires="p14">
+  <mc:AlternateContent xmlns:mc="http://schemas.openxmlformats.org/markup-compatibility/2006" xmlns:p14="http://schemas.microsoft.com/office/powerpoint/2010/main">
+    <mc:Choice Requires="p14">
       <p:transition spd="med" p14:dur="700">
         <p:fade/>
       </p:transition>
     </mc:Choice>
-    <mc:Fallback>
+    <mc:Fallback xmlns="">
       <p:transition spd="med">
         <p:fade/>
       </p:transition>
@@ -6306,84 +6261,6 @@
                                   </p:childTnLst>
                                 </p:cTn>
                               </p:par>
-                              <p:par>
-                                <p:cTn id="22" presetID="10" presetClass="entr" presetSubtype="0" fill="hold" nodeType="withEffect">
-                                  <p:stCondLst>
-                                    <p:cond delay="0"/>
-                                  </p:stCondLst>
-                                  <p:childTnLst>
-                                    <p:set>
-                                      <p:cBhvr>
-                                        <p:cTn id="23" dur="1" fill="hold">
-                                          <p:stCondLst>
-                                            <p:cond delay="0"/>
-                                          </p:stCondLst>
-                                        </p:cTn>
-                                        <p:tgtEl>
-                                          <p:spTgt spid="3">
-                                            <p:txEl>
-                                              <p:pRg st="4" end="4"/>
-                                            </p:txEl>
-                                          </p:spTgt>
-                                        </p:tgtEl>
-                                        <p:attrNameLst>
-                                          <p:attrName>style.visibility</p:attrName>
-                                        </p:attrNameLst>
-                                      </p:cBhvr>
-                                      <p:to>
-                                        <p:strVal val="visible"/>
-                                      </p:to>
-                                    </p:set>
-                                    <p:animEffect transition="in" filter="fade">
-                                      <p:cBhvr>
-                                        <p:cTn id="24" dur="500"/>
-                                        <p:tgtEl>
-                                          <p:spTgt spid="3">
-                                            <p:txEl>
-                                              <p:pRg st="4" end="4"/>
-                                            </p:txEl>
-                                          </p:spTgt>
-                                        </p:tgtEl>
-                                      </p:cBhvr>
-                                    </p:animEffect>
-                                  </p:childTnLst>
-                                </p:cTn>
-                              </p:par>
-                              <p:par>
-                                <p:cTn id="25" presetID="10" presetClass="entr" presetSubtype="0" fill="hold" nodeType="withEffect">
-                                  <p:stCondLst>
-                                    <p:cond delay="0"/>
-                                  </p:stCondLst>
-                                  <p:childTnLst>
-                                    <p:set>
-                                      <p:cBhvr>
-                                        <p:cTn id="26" dur="1" fill="hold">
-                                          <p:stCondLst>
-                                            <p:cond delay="0"/>
-                                          </p:stCondLst>
-                                        </p:cTn>
-                                        <p:tgtEl>
-                                          <p:spTgt spid="10"/>
-                                        </p:tgtEl>
-                                        <p:attrNameLst>
-                                          <p:attrName>style.visibility</p:attrName>
-                                        </p:attrNameLst>
-                                      </p:cBhvr>
-                                      <p:to>
-                                        <p:strVal val="visible"/>
-                                      </p:to>
-                                    </p:set>
-                                    <p:animEffect transition="in" filter="fade">
-                                      <p:cBhvr>
-                                        <p:cTn id="27" dur="500"/>
-                                        <p:tgtEl>
-                                          <p:spTgt spid="10"/>
-                                        </p:tgtEl>
-                                      </p:cBhvr>
-                                    </p:animEffect>
-                                  </p:childTnLst>
-                                </p:cTn>
-                              </p:par>
                             </p:childTnLst>
                           </p:cTn>
                         </p:par>
@@ -6753,13 +6630,13 @@
   <p:clrMapOvr>
     <a:masterClrMapping/>
   </p:clrMapOvr>
-  <mc:AlternateContent xmlns:mc="http://schemas.openxmlformats.org/markup-compatibility/2006">
-    <mc:Choice xmlns:p14="http://schemas.microsoft.com/office/powerpoint/2010/main" Requires="p14">
+  <mc:AlternateContent xmlns:mc="http://schemas.openxmlformats.org/markup-compatibility/2006" xmlns:p14="http://schemas.microsoft.com/office/powerpoint/2010/main">
+    <mc:Choice Requires="p14">
       <p:transition spd="med" p14:dur="700">
         <p:fade/>
       </p:transition>
     </mc:Choice>
-    <mc:Fallback>
+    <mc:Fallback xmlns="">
       <p:transition spd="med">
         <p:fade/>
       </p:transition>
@@ -7333,13 +7210,13 @@
   <p:clrMapOvr>
     <a:masterClrMapping/>
   </p:clrMapOvr>
-  <mc:AlternateContent xmlns:mc="http://schemas.openxmlformats.org/markup-compatibility/2006">
-    <mc:Choice xmlns:p14="http://schemas.microsoft.com/office/powerpoint/2010/main" Requires="p14">
+  <mc:AlternateContent xmlns:mc="http://schemas.openxmlformats.org/markup-compatibility/2006" xmlns:p14="http://schemas.microsoft.com/office/powerpoint/2010/main">
+    <mc:Choice Requires="p14">
       <p:transition spd="med" p14:dur="700">
         <p:fade/>
       </p:transition>
     </mc:Choice>
-    <mc:Fallback>
+    <mc:Fallback xmlns="">
       <p:transition spd="med">
         <p:fade/>
       </p:transition>
@@ -7796,13 +7673,13 @@
   <p:clrMapOvr>
     <a:masterClrMapping/>
   </p:clrMapOvr>
-  <mc:AlternateContent xmlns:mc="http://schemas.openxmlformats.org/markup-compatibility/2006">
-    <mc:Choice xmlns:p14="http://schemas.microsoft.com/office/powerpoint/2010/main" Requires="p14">
+  <mc:AlternateContent xmlns:mc="http://schemas.openxmlformats.org/markup-compatibility/2006" xmlns:p14="http://schemas.microsoft.com/office/powerpoint/2010/main">
+    <mc:Choice Requires="p14">
       <p:transition spd="med" p14:dur="700">
         <p:fade/>
       </p:transition>
     </mc:Choice>
-    <mc:Fallback>
+    <mc:Fallback xmlns="">
       <p:transition spd="med">
         <p:fade/>
       </p:transition>
@@ -8222,13 +8099,13 @@
   <p:clrMapOvr>
     <a:masterClrMapping/>
   </p:clrMapOvr>
-  <mc:AlternateContent xmlns:mc="http://schemas.openxmlformats.org/markup-compatibility/2006">
-    <mc:Choice xmlns:p14="http://schemas.microsoft.com/office/powerpoint/2010/main" Requires="p14">
+  <mc:AlternateContent xmlns:mc="http://schemas.openxmlformats.org/markup-compatibility/2006" xmlns:p14="http://schemas.microsoft.com/office/powerpoint/2010/main">
+    <mc:Choice Requires="p14">
       <p:transition spd="med" p14:dur="700">
         <p:fade/>
       </p:transition>
     </mc:Choice>
-    <mc:Fallback>
+    <mc:Fallback xmlns="">
       <p:transition spd="med">
         <p:fade/>
       </p:transition>
@@ -8738,13 +8615,13 @@
   <p:clrMapOvr>
     <a:masterClrMapping/>
   </p:clrMapOvr>
-  <mc:AlternateContent xmlns:mc="http://schemas.openxmlformats.org/markup-compatibility/2006">
-    <mc:Choice xmlns:p14="http://schemas.microsoft.com/office/powerpoint/2010/main" Requires="p14">
+  <mc:AlternateContent xmlns:mc="http://schemas.openxmlformats.org/markup-compatibility/2006" xmlns:p14="http://schemas.microsoft.com/office/powerpoint/2010/main">
+    <mc:Choice Requires="p14">
       <p:transition spd="med" p14:dur="700">
         <p:fade/>
       </p:transition>
     </mc:Choice>
-    <mc:Fallback>
+    <mc:Fallback xmlns="">
       <p:transition spd="med">
         <p:fade/>
       </p:transition>
@@ -9253,13 +9130,13 @@
   <p:clrMapOvr>
     <a:masterClrMapping/>
   </p:clrMapOvr>
-  <mc:AlternateContent xmlns:mc="http://schemas.openxmlformats.org/markup-compatibility/2006">
-    <mc:Choice xmlns:p14="http://schemas.microsoft.com/office/powerpoint/2010/main" Requires="p14">
+  <mc:AlternateContent xmlns:mc="http://schemas.openxmlformats.org/markup-compatibility/2006" xmlns:p14="http://schemas.microsoft.com/office/powerpoint/2010/main">
+    <mc:Choice Requires="p14">
       <p:transition spd="med" p14:dur="700">
         <p:fade/>
       </p:transition>
     </mc:Choice>
-    <mc:Fallback>
+    <mc:Fallback xmlns="">
       <p:transition spd="med">
         <p:fade/>
       </p:transition>
@@ -9717,13 +9594,13 @@
   <p:clrMapOvr>
     <a:masterClrMapping/>
   </p:clrMapOvr>
-  <mc:AlternateContent xmlns:mc="http://schemas.openxmlformats.org/markup-compatibility/2006">
-    <mc:Choice xmlns:p14="http://schemas.microsoft.com/office/powerpoint/2010/main" Requires="p14">
+  <mc:AlternateContent xmlns:mc="http://schemas.openxmlformats.org/markup-compatibility/2006" xmlns:p14="http://schemas.microsoft.com/office/powerpoint/2010/main">
+    <mc:Choice Requires="p14">
       <p:transition spd="med" p14:dur="700">
         <p:fade/>
       </p:transition>
     </mc:Choice>
-    <mc:Fallback>
+    <mc:Fallback xmlns="">
       <p:transition spd="med">
         <p:fade/>
       </p:transition>
@@ -10221,13 +10098,13 @@
   <p:clrMapOvr>
     <a:masterClrMapping/>
   </p:clrMapOvr>
-  <mc:AlternateContent xmlns:mc="http://schemas.openxmlformats.org/markup-compatibility/2006">
-    <mc:Choice xmlns:p14="http://schemas.microsoft.com/office/powerpoint/2010/main" Requires="p14">
+  <mc:AlternateContent xmlns:mc="http://schemas.openxmlformats.org/markup-compatibility/2006" xmlns:p14="http://schemas.microsoft.com/office/powerpoint/2010/main">
+    <mc:Choice Requires="p14">
       <p:transition spd="med" p14:dur="700">
         <p:fade/>
       </p:transition>
     </mc:Choice>
-    <mc:Fallback>
+    <mc:Fallback xmlns="">
       <p:transition spd="med">
         <p:fade/>
       </p:transition>
@@ -10721,646 +10598,6 @@
       </p:grpSpPr>
       <p:pic>
         <p:nvPicPr>
-          <p:cNvPr id="5" name="Kép 4">
-            <a:extLst>
-              <a:ext uri="{FF2B5EF4-FFF2-40B4-BE49-F238E27FC236}">
-                <a16:creationId xmlns:a16="http://schemas.microsoft.com/office/drawing/2014/main" id="{E4815600-7136-4366-9460-CECE80029795}"/>
-              </a:ext>
-            </a:extLst>
-          </p:cNvPr>
-          <p:cNvPicPr>
-            <a:picLocks noChangeAspect="1"/>
-          </p:cNvPicPr>
-          <p:nvPr/>
-        </p:nvPicPr>
-        <p:blipFill>
-          <a:blip r:embed="rId3">
-            <a:extLst>
-              <a:ext uri="{28A0092B-C50C-407E-A947-70E740481C1C}">
-                <a14:useLocalDpi xmlns:a14="http://schemas.microsoft.com/office/drawing/2010/main" val="0"/>
-              </a:ext>
-            </a:extLst>
-          </a:blip>
-          <a:stretch>
-            <a:fillRect/>
-          </a:stretch>
-        </p:blipFill>
-        <p:spPr>
-          <a:xfrm>
-            <a:off x="0" y="-6376"/>
-            <a:ext cx="12192000" cy="6864376"/>
-          </a:xfrm>
-          <a:prstGeom prst="rect">
-            <a:avLst/>
-          </a:prstGeom>
-        </p:spPr>
-      </p:pic>
-      <p:sp>
-        <p:nvSpPr>
-          <p:cNvPr id="2" name="Cím 1">
-            <a:extLst>
-              <a:ext uri="{FF2B5EF4-FFF2-40B4-BE49-F238E27FC236}">
-                <a16:creationId xmlns:a16="http://schemas.microsoft.com/office/drawing/2014/main" id="{91B49CDF-7F46-448E-BC2A-42B5B82823E1}"/>
-              </a:ext>
-            </a:extLst>
-          </p:cNvPr>
-          <p:cNvSpPr>
-            <a:spLocks noGrp="1"/>
-          </p:cNvSpPr>
-          <p:nvPr>
-            <p:ph type="title"/>
-          </p:nvPr>
-        </p:nvSpPr>
-        <p:spPr/>
-        <p:txBody>
-          <a:bodyPr/>
-          <a:lstStyle/>
-          <a:p>
-            <a:r>
-              <a:rPr lang="hu-HU" dirty="0">
-                <a:solidFill>
-                  <a:schemeClr val="bg1"/>
-                </a:solidFill>
-                <a:latin typeface="Times New Roman" panose="02020603050405020304" pitchFamily="18" charset="0"/>
-                <a:cs typeface="Times New Roman" panose="02020603050405020304" pitchFamily="18" charset="0"/>
-              </a:rPr>
-              <a:t>Adatszerkezet és Adatbázis</a:t>
-            </a:r>
-          </a:p>
-        </p:txBody>
-      </p:sp>
-      <p:sp>
-        <p:nvSpPr>
-          <p:cNvPr id="3" name="Tartalom helye 2">
-            <a:extLst>
-              <a:ext uri="{FF2B5EF4-FFF2-40B4-BE49-F238E27FC236}">
-                <a16:creationId xmlns:a16="http://schemas.microsoft.com/office/drawing/2014/main" id="{055D6986-5082-4874-85AB-732D6A2E2CD7}"/>
-              </a:ext>
-            </a:extLst>
-          </p:cNvPr>
-          <p:cNvSpPr>
-            <a:spLocks noGrp="1"/>
-          </p:cNvSpPr>
-          <p:nvPr>
-            <p:ph idx="1"/>
-          </p:nvPr>
-        </p:nvSpPr>
-        <p:spPr/>
-        <p:txBody>
-          <a:bodyPr/>
-          <a:lstStyle/>
-          <a:p>
-            <a:pPr algn="l"/>
-            <a:r>
-              <a:rPr lang="hu-HU" b="0" i="0" dirty="0">
-                <a:solidFill>
-                  <a:schemeClr val="bg1"/>
-                </a:solidFill>
-                <a:effectLst/>
-                <a:latin typeface="Times New Roman" panose="02020603050405020304" pitchFamily="18" charset="0"/>
-                <a:cs typeface="Times New Roman" panose="02020603050405020304" pitchFamily="18" charset="0"/>
-              </a:rPr>
-              <a:t>Felhasználói adatok: </a:t>
-            </a:r>
-            <a:r>
-              <a:rPr lang="hu-HU" b="0" i="0" dirty="0" err="1">
-                <a:solidFill>
-                  <a:schemeClr val="bg1"/>
-                </a:solidFill>
-                <a:effectLst/>
-                <a:latin typeface="Times New Roman" panose="02020603050405020304" pitchFamily="18" charset="0"/>
-                <a:cs typeface="Times New Roman" panose="02020603050405020304" pitchFamily="18" charset="0"/>
-              </a:rPr>
-              <a:t>Users</a:t>
-            </a:r>
-            <a:r>
-              <a:rPr lang="hu-HU" b="0" i="0" dirty="0">
-                <a:solidFill>
-                  <a:schemeClr val="bg1"/>
-                </a:solidFill>
-                <a:effectLst/>
-                <a:latin typeface="Times New Roman" panose="02020603050405020304" pitchFamily="18" charset="0"/>
-                <a:cs typeface="Times New Roman" panose="02020603050405020304" pitchFamily="18" charset="0"/>
-              </a:rPr>
-              <a:t>, </a:t>
-            </a:r>
-            <a:r>
-              <a:rPr lang="hu-HU" b="0" i="0" dirty="0" err="1">
-                <a:solidFill>
-                  <a:schemeClr val="bg1"/>
-                </a:solidFill>
-                <a:effectLst/>
-                <a:latin typeface="Times New Roman" panose="02020603050405020304" pitchFamily="18" charset="0"/>
-                <a:cs typeface="Times New Roman" panose="02020603050405020304" pitchFamily="18" charset="0"/>
-              </a:rPr>
-              <a:t>Settings</a:t>
-            </a:r>
-            <a:r>
-              <a:rPr lang="hu-HU" b="0" i="0" dirty="0">
-                <a:solidFill>
-                  <a:schemeClr val="bg1"/>
-                </a:solidFill>
-                <a:effectLst/>
-                <a:latin typeface="Times New Roman" panose="02020603050405020304" pitchFamily="18" charset="0"/>
-                <a:cs typeface="Times New Roman" panose="02020603050405020304" pitchFamily="18" charset="0"/>
-              </a:rPr>
-              <a:t>, </a:t>
-            </a:r>
-            <a:r>
-              <a:rPr lang="hu-HU" b="0" i="0" dirty="0" err="1">
-                <a:solidFill>
-                  <a:schemeClr val="bg1"/>
-                </a:solidFill>
-                <a:effectLst/>
-                <a:latin typeface="Times New Roman" panose="02020603050405020304" pitchFamily="18" charset="0"/>
-                <a:cs typeface="Times New Roman" panose="02020603050405020304" pitchFamily="18" charset="0"/>
-              </a:rPr>
-              <a:t>Stats</a:t>
-            </a:r>
-            <a:r>
-              <a:rPr lang="hu-HU" b="0" i="0" dirty="0">
-                <a:solidFill>
-                  <a:schemeClr val="bg1"/>
-                </a:solidFill>
-                <a:effectLst/>
-                <a:latin typeface="Times New Roman" panose="02020603050405020304" pitchFamily="18" charset="0"/>
-                <a:cs typeface="Times New Roman" panose="02020603050405020304" pitchFamily="18" charset="0"/>
-              </a:rPr>
-              <a:t>. </a:t>
-            </a:r>
-          </a:p>
-          <a:p>
-            <a:pPr algn="l"/>
-            <a:r>
-              <a:rPr lang="hu-HU" b="0" i="0" dirty="0">
-                <a:solidFill>
-                  <a:schemeClr val="bg1"/>
-                </a:solidFill>
-                <a:effectLst/>
-                <a:latin typeface="Times New Roman" panose="02020603050405020304" pitchFamily="18" charset="0"/>
-                <a:cs typeface="Times New Roman" panose="02020603050405020304" pitchFamily="18" charset="0"/>
-              </a:rPr>
-              <a:t>Piaci adatok: </a:t>
-            </a:r>
-            <a:r>
-              <a:rPr lang="hu-HU" b="0" i="0" dirty="0" err="1">
-                <a:solidFill>
-                  <a:schemeClr val="bg1"/>
-                </a:solidFill>
-                <a:effectLst/>
-                <a:latin typeface="Times New Roman" panose="02020603050405020304" pitchFamily="18" charset="0"/>
-                <a:cs typeface="Times New Roman" panose="02020603050405020304" pitchFamily="18" charset="0"/>
-              </a:rPr>
-              <a:t>Assets</a:t>
-            </a:r>
-            <a:r>
-              <a:rPr lang="hu-HU" b="0" i="0" dirty="0">
-                <a:solidFill>
-                  <a:schemeClr val="bg1"/>
-                </a:solidFill>
-                <a:effectLst/>
-                <a:latin typeface="Times New Roman" panose="02020603050405020304" pitchFamily="18" charset="0"/>
-                <a:cs typeface="Times New Roman" panose="02020603050405020304" pitchFamily="18" charset="0"/>
-              </a:rPr>
-              <a:t> (részvények), PriceData (történeti árak). </a:t>
-            </a:r>
-          </a:p>
-          <a:p>
-            <a:pPr algn="l"/>
-            <a:r>
-              <a:rPr lang="hu-HU" b="0" i="0" dirty="0">
-                <a:solidFill>
-                  <a:schemeClr val="bg1"/>
-                </a:solidFill>
-                <a:effectLst/>
-                <a:latin typeface="Times New Roman" panose="02020603050405020304" pitchFamily="18" charset="0"/>
-                <a:cs typeface="Times New Roman" panose="02020603050405020304" pitchFamily="18" charset="0"/>
-              </a:rPr>
-              <a:t>Tranzakciók: </a:t>
-            </a:r>
-            <a:r>
-              <a:rPr lang="hu-HU" b="0" i="0" dirty="0" err="1">
-                <a:solidFill>
-                  <a:schemeClr val="bg1"/>
-                </a:solidFill>
-                <a:effectLst/>
-                <a:latin typeface="Times New Roman" panose="02020603050405020304" pitchFamily="18" charset="0"/>
-                <a:cs typeface="Times New Roman" panose="02020603050405020304" pitchFamily="18" charset="0"/>
-              </a:rPr>
-              <a:t>Positions</a:t>
-            </a:r>
-            <a:r>
-              <a:rPr lang="hu-HU" b="0" i="0" dirty="0">
-                <a:solidFill>
-                  <a:schemeClr val="bg1"/>
-                </a:solidFill>
-                <a:effectLst/>
-                <a:latin typeface="Times New Roman" panose="02020603050405020304" pitchFamily="18" charset="0"/>
-                <a:cs typeface="Times New Roman" panose="02020603050405020304" pitchFamily="18" charset="0"/>
-              </a:rPr>
-              <a:t> (nyitott/zárt pozíciók), </a:t>
-            </a:r>
-            <a:r>
-              <a:rPr lang="hu-HU" b="0" i="0" dirty="0" err="1">
-                <a:solidFill>
-                  <a:schemeClr val="bg1"/>
-                </a:solidFill>
-                <a:effectLst/>
-                <a:latin typeface="Times New Roman" panose="02020603050405020304" pitchFamily="18" charset="0"/>
-                <a:cs typeface="Times New Roman" panose="02020603050405020304" pitchFamily="18" charset="0"/>
-              </a:rPr>
-              <a:t>TransactionsLog</a:t>
-            </a:r>
-            <a:r>
-              <a:rPr lang="hu-HU" b="0" i="0" dirty="0">
-                <a:solidFill>
-                  <a:schemeClr val="bg1"/>
-                </a:solidFill>
-                <a:effectLst/>
-                <a:latin typeface="Times New Roman" panose="02020603050405020304" pitchFamily="18" charset="0"/>
-                <a:cs typeface="Times New Roman" panose="02020603050405020304" pitchFamily="18" charset="0"/>
-              </a:rPr>
-              <a:t>. </a:t>
-            </a:r>
-          </a:p>
-          <a:p>
-            <a:pPr algn="l"/>
-            <a:r>
-              <a:rPr lang="hu-HU" b="0" i="0" dirty="0">
-                <a:solidFill>
-                  <a:schemeClr val="bg1"/>
-                </a:solidFill>
-                <a:effectLst/>
-                <a:latin typeface="Times New Roman" panose="02020603050405020304" pitchFamily="18" charset="0"/>
-                <a:cs typeface="Times New Roman" panose="02020603050405020304" pitchFamily="18" charset="0"/>
-              </a:rPr>
-              <a:t>Normalizált adatbázis</a:t>
-            </a:r>
-          </a:p>
-          <a:p>
-            <a:pPr marL="0" indent="0">
-              <a:buNone/>
-            </a:pPr>
-            <a:endParaRPr lang="hu-HU" dirty="0"/>
-          </a:p>
-        </p:txBody>
-      </p:sp>
-      <p:pic>
-        <p:nvPicPr>
-          <p:cNvPr id="4" name="Kép 3">
-            <a:extLst>
-              <a:ext uri="{FF2B5EF4-FFF2-40B4-BE49-F238E27FC236}">
-                <a16:creationId xmlns:a16="http://schemas.microsoft.com/office/drawing/2014/main" id="{9878BF87-6953-4138-B50E-541A798B6B0A}"/>
-              </a:ext>
-            </a:extLst>
-          </p:cNvPr>
-          <p:cNvPicPr>
-            <a:picLocks noChangeAspect="1"/>
-          </p:cNvPicPr>
-          <p:nvPr/>
-        </p:nvPicPr>
-        <p:blipFill>
-          <a:blip r:embed="rId4">
-            <a:extLst>
-              <a:ext uri="{28A0092B-C50C-407E-A947-70E740481C1C}">
-                <a14:useLocalDpi xmlns:a14="http://schemas.microsoft.com/office/drawing/2010/main" val="0"/>
-              </a:ext>
-            </a:extLst>
-          </a:blip>
-          <a:stretch>
-            <a:fillRect/>
-          </a:stretch>
-        </p:blipFill>
-        <p:spPr>
-          <a:xfrm>
-            <a:off x="0" y="5812553"/>
-            <a:ext cx="1045447" cy="1045447"/>
-          </a:xfrm>
-          <a:prstGeom prst="rect">
-            <a:avLst/>
-          </a:prstGeom>
-        </p:spPr>
-      </p:pic>
-    </p:spTree>
-    <p:extLst>
-      <p:ext uri="{BB962C8B-B14F-4D97-AF65-F5344CB8AC3E}">
-        <p14:creationId xmlns:p14="http://schemas.microsoft.com/office/powerpoint/2010/main" val="1724216664"/>
-      </p:ext>
-    </p:extLst>
-  </p:cSld>
-  <p:clrMapOvr>
-    <a:masterClrMapping/>
-  </p:clrMapOvr>
-  <mc:AlternateContent xmlns:mc="http://schemas.openxmlformats.org/markup-compatibility/2006">
-    <mc:Choice xmlns:p14="http://schemas.microsoft.com/office/powerpoint/2010/main" Requires="p14">
-      <p:transition spd="med" p14:dur="700">
-        <p:fade/>
-      </p:transition>
-    </mc:Choice>
-    <mc:Fallback>
-      <p:transition spd="med">
-        <p:fade/>
-      </p:transition>
-    </mc:Fallback>
-  </mc:AlternateContent>
-  <p:timing>
-    <p:tnLst>
-      <p:par>
-        <p:cTn id="1" dur="indefinite" restart="never" nodeType="tmRoot">
-          <p:childTnLst>
-            <p:seq concurrent="1" nextAc="seek">
-              <p:cTn id="2" dur="indefinite" nodeType="mainSeq">
-                <p:childTnLst>
-                  <p:par>
-                    <p:cTn id="3" fill="hold">
-                      <p:stCondLst>
-                        <p:cond delay="indefinite"/>
-                      </p:stCondLst>
-                      <p:childTnLst>
-                        <p:par>
-                          <p:cTn id="4" fill="hold">
-                            <p:stCondLst>
-                              <p:cond delay="0"/>
-                            </p:stCondLst>
-                            <p:childTnLst>
-                              <p:par>
-                                <p:cTn id="5" presetID="10" presetClass="entr" presetSubtype="0" fill="hold" grpId="0" nodeType="clickEffect">
-                                  <p:stCondLst>
-                                    <p:cond delay="0"/>
-                                  </p:stCondLst>
-                                  <p:childTnLst>
-                                    <p:set>
-                                      <p:cBhvr>
-                                        <p:cTn id="6" dur="1" fill="hold">
-                                          <p:stCondLst>
-                                            <p:cond delay="0"/>
-                                          </p:stCondLst>
-                                        </p:cTn>
-                                        <p:tgtEl>
-                                          <p:spTgt spid="2"/>
-                                        </p:tgtEl>
-                                        <p:attrNameLst>
-                                          <p:attrName>style.visibility</p:attrName>
-                                        </p:attrNameLst>
-                                      </p:cBhvr>
-                                      <p:to>
-                                        <p:strVal val="visible"/>
-                                      </p:to>
-                                    </p:set>
-                                    <p:animEffect transition="in" filter="fade">
-                                      <p:cBhvr>
-                                        <p:cTn id="7" dur="500"/>
-                                        <p:tgtEl>
-                                          <p:spTgt spid="2"/>
-                                        </p:tgtEl>
-                                      </p:cBhvr>
-                                    </p:animEffect>
-                                  </p:childTnLst>
-                                </p:cTn>
-                              </p:par>
-                            </p:childTnLst>
-                          </p:cTn>
-                        </p:par>
-                      </p:childTnLst>
-                    </p:cTn>
-                  </p:par>
-                  <p:par>
-                    <p:cTn id="8" fill="hold">
-                      <p:stCondLst>
-                        <p:cond delay="indefinite"/>
-                      </p:stCondLst>
-                      <p:childTnLst>
-                        <p:par>
-                          <p:cTn id="9" fill="hold">
-                            <p:stCondLst>
-                              <p:cond delay="0"/>
-                            </p:stCondLst>
-                            <p:childTnLst>
-                              <p:par>
-                                <p:cTn id="10" presetID="10" presetClass="entr" presetSubtype="0" fill="hold" nodeType="clickEffect">
-                                  <p:stCondLst>
-                                    <p:cond delay="0"/>
-                                  </p:stCondLst>
-                                  <p:childTnLst>
-                                    <p:set>
-                                      <p:cBhvr>
-                                        <p:cTn id="11" dur="1" fill="hold">
-                                          <p:stCondLst>
-                                            <p:cond delay="0"/>
-                                          </p:stCondLst>
-                                        </p:cTn>
-                                        <p:tgtEl>
-                                          <p:spTgt spid="3">
-                                            <p:txEl>
-                                              <p:pRg st="0" end="0"/>
-                                            </p:txEl>
-                                          </p:spTgt>
-                                        </p:tgtEl>
-                                        <p:attrNameLst>
-                                          <p:attrName>style.visibility</p:attrName>
-                                        </p:attrNameLst>
-                                      </p:cBhvr>
-                                      <p:to>
-                                        <p:strVal val="visible"/>
-                                      </p:to>
-                                    </p:set>
-                                    <p:animEffect transition="in" filter="fade">
-                                      <p:cBhvr>
-                                        <p:cTn id="12" dur="500"/>
-                                        <p:tgtEl>
-                                          <p:spTgt spid="3">
-                                            <p:txEl>
-                                              <p:pRg st="0" end="0"/>
-                                            </p:txEl>
-                                          </p:spTgt>
-                                        </p:tgtEl>
-                                      </p:cBhvr>
-                                    </p:animEffect>
-                                  </p:childTnLst>
-                                </p:cTn>
-                              </p:par>
-                              <p:par>
-                                <p:cTn id="13" presetID="10" presetClass="entr" presetSubtype="0" fill="hold" nodeType="withEffect">
-                                  <p:stCondLst>
-                                    <p:cond delay="0"/>
-                                  </p:stCondLst>
-                                  <p:childTnLst>
-                                    <p:set>
-                                      <p:cBhvr>
-                                        <p:cTn id="14" dur="1" fill="hold">
-                                          <p:stCondLst>
-                                            <p:cond delay="0"/>
-                                          </p:stCondLst>
-                                        </p:cTn>
-                                        <p:tgtEl>
-                                          <p:spTgt spid="3">
-                                            <p:txEl>
-                                              <p:pRg st="1" end="1"/>
-                                            </p:txEl>
-                                          </p:spTgt>
-                                        </p:tgtEl>
-                                        <p:attrNameLst>
-                                          <p:attrName>style.visibility</p:attrName>
-                                        </p:attrNameLst>
-                                      </p:cBhvr>
-                                      <p:to>
-                                        <p:strVal val="visible"/>
-                                      </p:to>
-                                    </p:set>
-                                    <p:animEffect transition="in" filter="fade">
-                                      <p:cBhvr>
-                                        <p:cTn id="15" dur="500"/>
-                                        <p:tgtEl>
-                                          <p:spTgt spid="3">
-                                            <p:txEl>
-                                              <p:pRg st="1" end="1"/>
-                                            </p:txEl>
-                                          </p:spTgt>
-                                        </p:tgtEl>
-                                      </p:cBhvr>
-                                    </p:animEffect>
-                                  </p:childTnLst>
-                                </p:cTn>
-                              </p:par>
-                              <p:par>
-                                <p:cTn id="16" presetID="10" presetClass="entr" presetSubtype="0" fill="hold" nodeType="withEffect">
-                                  <p:stCondLst>
-                                    <p:cond delay="0"/>
-                                  </p:stCondLst>
-                                  <p:childTnLst>
-                                    <p:set>
-                                      <p:cBhvr>
-                                        <p:cTn id="17" dur="1" fill="hold">
-                                          <p:stCondLst>
-                                            <p:cond delay="0"/>
-                                          </p:stCondLst>
-                                        </p:cTn>
-                                        <p:tgtEl>
-                                          <p:spTgt spid="3">
-                                            <p:txEl>
-                                              <p:pRg st="2" end="2"/>
-                                            </p:txEl>
-                                          </p:spTgt>
-                                        </p:tgtEl>
-                                        <p:attrNameLst>
-                                          <p:attrName>style.visibility</p:attrName>
-                                        </p:attrNameLst>
-                                      </p:cBhvr>
-                                      <p:to>
-                                        <p:strVal val="visible"/>
-                                      </p:to>
-                                    </p:set>
-                                    <p:animEffect transition="in" filter="fade">
-                                      <p:cBhvr>
-                                        <p:cTn id="18" dur="500"/>
-                                        <p:tgtEl>
-                                          <p:spTgt spid="3">
-                                            <p:txEl>
-                                              <p:pRg st="2" end="2"/>
-                                            </p:txEl>
-                                          </p:spTgt>
-                                        </p:tgtEl>
-                                      </p:cBhvr>
-                                    </p:animEffect>
-                                  </p:childTnLst>
-                                </p:cTn>
-                              </p:par>
-                              <p:par>
-                                <p:cTn id="19" presetID="10" presetClass="entr" presetSubtype="0" fill="hold" nodeType="withEffect">
-                                  <p:stCondLst>
-                                    <p:cond delay="0"/>
-                                  </p:stCondLst>
-                                  <p:childTnLst>
-                                    <p:set>
-                                      <p:cBhvr>
-                                        <p:cTn id="20" dur="1" fill="hold">
-                                          <p:stCondLst>
-                                            <p:cond delay="0"/>
-                                          </p:stCondLst>
-                                        </p:cTn>
-                                        <p:tgtEl>
-                                          <p:spTgt spid="3">
-                                            <p:txEl>
-                                              <p:pRg st="3" end="3"/>
-                                            </p:txEl>
-                                          </p:spTgt>
-                                        </p:tgtEl>
-                                        <p:attrNameLst>
-                                          <p:attrName>style.visibility</p:attrName>
-                                        </p:attrNameLst>
-                                      </p:cBhvr>
-                                      <p:to>
-                                        <p:strVal val="visible"/>
-                                      </p:to>
-                                    </p:set>
-                                    <p:animEffect transition="in" filter="fade">
-                                      <p:cBhvr>
-                                        <p:cTn id="21" dur="500"/>
-                                        <p:tgtEl>
-                                          <p:spTgt spid="3">
-                                            <p:txEl>
-                                              <p:pRg st="3" end="3"/>
-                                            </p:txEl>
-                                          </p:spTgt>
-                                        </p:tgtEl>
-                                      </p:cBhvr>
-                                    </p:animEffect>
-                                  </p:childTnLst>
-                                </p:cTn>
-                              </p:par>
-                            </p:childTnLst>
-                          </p:cTn>
-                        </p:par>
-                      </p:childTnLst>
-                    </p:cTn>
-                  </p:par>
-                </p:childTnLst>
-              </p:cTn>
-              <p:prevCondLst>
-                <p:cond evt="onPrev" delay="0">
-                  <p:tgtEl>
-                    <p:sldTgt/>
-                  </p:tgtEl>
-                </p:cond>
-              </p:prevCondLst>
-              <p:nextCondLst>
-                <p:cond evt="onNext" delay="0">
-                  <p:tgtEl>
-                    <p:sldTgt/>
-                  </p:tgtEl>
-                </p:cond>
-              </p:nextCondLst>
-            </p:seq>
-          </p:childTnLst>
-        </p:cTn>
-      </p:par>
-    </p:tnLst>
-    <p:bldLst>
-      <p:bldP spid="2" grpId="0"/>
-    </p:bldLst>
-  </p:timing>
-</p:sld>
-</file>
-
-<file path=ppt/slides/slide7.xml><?xml version="1.0" encoding="utf-8"?>
-<p:sld xmlns:a="http://schemas.openxmlformats.org/drawingml/2006/main" xmlns:r="http://schemas.openxmlformats.org/officeDocument/2006/relationships" xmlns:p="http://schemas.openxmlformats.org/presentationml/2006/main">
-  <p:cSld>
-    <p:spTree>
-      <p:nvGrpSpPr>
-        <p:cNvPr id="1" name=""/>
-        <p:cNvGrpSpPr/>
-        <p:nvPr/>
-      </p:nvGrpSpPr>
-      <p:grpSpPr>
-        <a:xfrm>
-          <a:off x="0" y="0"/>
-          <a:ext cx="0" cy="0"/>
-          <a:chOff x="0" y="0"/>
-          <a:chExt cx="0" cy="0"/>
-        </a:xfrm>
-      </p:grpSpPr>
-      <p:pic>
-        <p:nvPicPr>
           <p:cNvPr id="10" name="Kép 9">
             <a:extLst>
               <a:ext uri="{FF2B5EF4-FFF2-40B4-BE49-F238E27FC236}">
@@ -11559,13 +10796,13 @@
   <p:clrMapOvr>
     <a:masterClrMapping/>
   </p:clrMapOvr>
-  <mc:AlternateContent xmlns:mc="http://schemas.openxmlformats.org/markup-compatibility/2006">
-    <mc:Choice xmlns:p14="http://schemas.microsoft.com/office/powerpoint/2010/main" Requires="p14">
+  <mc:AlternateContent xmlns:mc="http://schemas.openxmlformats.org/markup-compatibility/2006" xmlns:p14="http://schemas.microsoft.com/office/powerpoint/2010/main">
+    <mc:Choice Requires="p14">
       <p:transition spd="med" p14:dur="700">
         <p:fade/>
       </p:transition>
     </mc:Choice>
-    <mc:Fallback>
+    <mc:Fallback xmlns="">
       <p:transition spd="med">
         <p:fade/>
       </p:transition>
@@ -11893,7 +11130,7 @@
 </p:sld>
 </file>
 
-<file path=ppt/slides/slide8.xml><?xml version="1.0" encoding="utf-8"?>
+<file path=ppt/slides/slide7.xml><?xml version="1.0" encoding="utf-8"?>
 <p:sld xmlns:a="http://schemas.openxmlformats.org/drawingml/2006/main" xmlns:r="http://schemas.openxmlformats.org/officeDocument/2006/relationships" xmlns:p="http://schemas.openxmlformats.org/presentationml/2006/main">
   <p:cSld>
     <p:spTree>
@@ -12221,13 +11458,13 @@
   <p:clrMapOvr>
     <a:masterClrMapping/>
   </p:clrMapOvr>
-  <mc:AlternateContent xmlns:mc="http://schemas.openxmlformats.org/markup-compatibility/2006">
-    <mc:Choice xmlns:p14="http://schemas.microsoft.com/office/powerpoint/2010/main" Requires="p14">
+  <mc:AlternateContent xmlns:mc="http://schemas.openxmlformats.org/markup-compatibility/2006" xmlns:p14="http://schemas.microsoft.com/office/powerpoint/2010/main">
+    <mc:Choice Requires="p14">
       <p:transition spd="med" p14:dur="700">
         <p:fade/>
       </p:transition>
     </mc:Choice>
-    <mc:Fallback>
+    <mc:Fallback xmlns="">
       <p:transition spd="med">
         <p:fade/>
       </p:transition>
@@ -12574,7 +11811,7 @@
 </p:sld>
 </file>
 
-<file path=ppt/slides/slide9.xml><?xml version="1.0" encoding="utf-8"?>
+<file path=ppt/slides/slide8.xml><?xml version="1.0" encoding="utf-8"?>
 <p:sld xmlns:a="http://schemas.openxmlformats.org/drawingml/2006/main" xmlns:r="http://schemas.openxmlformats.org/officeDocument/2006/relationships" xmlns:p="http://schemas.openxmlformats.org/presentationml/2006/main">
   <p:cSld>
     <p:spTree>
@@ -12773,13 +12010,13 @@
   <p:clrMapOvr>
     <a:masterClrMapping/>
   </p:clrMapOvr>
-  <mc:AlternateContent xmlns:mc="http://schemas.openxmlformats.org/markup-compatibility/2006">
-    <mc:Choice xmlns:p14="http://schemas.microsoft.com/office/powerpoint/2010/main" Requires="p14">
+  <mc:AlternateContent xmlns:mc="http://schemas.openxmlformats.org/markup-compatibility/2006" xmlns:p14="http://schemas.microsoft.com/office/powerpoint/2010/main">
+    <mc:Choice Requires="p14">
       <p:transition spd="med" p14:dur="700">
         <p:fade/>
       </p:transition>
     </mc:Choice>
-    <mc:Fallback>
+    <mc:Fallback xmlns="">
       <p:transition spd="med">
         <p:fade/>
       </p:transition>
@@ -12973,6 +12210,723 @@
     </p:tnLst>
     <p:bldLst>
       <p:bldP spid="4" grpId="0"/>
+    </p:bldLst>
+  </p:timing>
+</p:sld>
+</file>
+
+<file path=ppt/slides/slide9.xml><?xml version="1.0" encoding="utf-8"?>
+<p:sld xmlns:a="http://schemas.openxmlformats.org/drawingml/2006/main" xmlns:r="http://schemas.openxmlformats.org/officeDocument/2006/relationships" xmlns:p="http://schemas.openxmlformats.org/presentationml/2006/main">
+  <p:cSld>
+    <p:spTree>
+      <p:nvGrpSpPr>
+        <p:cNvPr id="1" name=""/>
+        <p:cNvGrpSpPr/>
+        <p:nvPr/>
+      </p:nvGrpSpPr>
+      <p:grpSpPr>
+        <a:xfrm>
+          <a:off x="0" y="0"/>
+          <a:ext cx="0" cy="0"/>
+          <a:chOff x="0" y="0"/>
+          <a:chExt cx="0" cy="0"/>
+        </a:xfrm>
+      </p:grpSpPr>
+      <p:pic>
+        <p:nvPicPr>
+          <p:cNvPr id="5" name="Kép 4">
+            <a:extLst>
+              <a:ext uri="{FF2B5EF4-FFF2-40B4-BE49-F238E27FC236}">
+                <a16:creationId xmlns:a16="http://schemas.microsoft.com/office/drawing/2014/main" id="{CEFF17C2-5026-403D-A101-6AC9B36B708D}"/>
+              </a:ext>
+            </a:extLst>
+          </p:cNvPr>
+          <p:cNvPicPr>
+            <a:picLocks noChangeAspect="1"/>
+          </p:cNvPicPr>
+          <p:nvPr/>
+        </p:nvPicPr>
+        <p:blipFill>
+          <a:blip r:embed="rId3">
+            <a:extLst>
+              <a:ext uri="{28A0092B-C50C-407E-A947-70E740481C1C}">
+                <a14:useLocalDpi xmlns:a14="http://schemas.microsoft.com/office/drawing/2010/main" val="0"/>
+              </a:ext>
+            </a:extLst>
+          </a:blip>
+          <a:stretch>
+            <a:fillRect/>
+          </a:stretch>
+        </p:blipFill>
+        <p:spPr>
+          <a:xfrm>
+            <a:off x="0" y="-6376"/>
+            <a:ext cx="12192000" cy="6864376"/>
+          </a:xfrm>
+          <a:prstGeom prst="rect">
+            <a:avLst/>
+          </a:prstGeom>
+        </p:spPr>
+      </p:pic>
+      <p:sp>
+        <p:nvSpPr>
+          <p:cNvPr id="2" name="Cím 1">
+            <a:extLst>
+              <a:ext uri="{FF2B5EF4-FFF2-40B4-BE49-F238E27FC236}">
+                <a16:creationId xmlns:a16="http://schemas.microsoft.com/office/drawing/2014/main" id="{66C7BBF2-3BAE-4485-A30E-E3D573859C88}"/>
+              </a:ext>
+            </a:extLst>
+          </p:cNvPr>
+          <p:cNvSpPr>
+            <a:spLocks noGrp="1"/>
+          </p:cNvSpPr>
+          <p:nvPr>
+            <p:ph type="title"/>
+          </p:nvPr>
+        </p:nvSpPr>
+        <p:spPr/>
+        <p:txBody>
+          <a:bodyPr/>
+          <a:lstStyle/>
+          <a:p>
+            <a:r>
+              <a:rPr lang="hu-HU" dirty="0">
+                <a:solidFill>
+                  <a:schemeClr val="bg1"/>
+                </a:solidFill>
+                <a:latin typeface="Times New Roman" panose="02020603050405020304" pitchFamily="18" charset="0"/>
+                <a:cs typeface="Times New Roman" panose="02020603050405020304" pitchFamily="18" charset="0"/>
+              </a:rPr>
+              <a:t>Backend-Tesztelés</a:t>
+            </a:r>
+          </a:p>
+        </p:txBody>
+      </p:sp>
+      <p:sp>
+        <p:nvSpPr>
+          <p:cNvPr id="3" name="Tartalom helye 2">
+            <a:extLst>
+              <a:ext uri="{FF2B5EF4-FFF2-40B4-BE49-F238E27FC236}">
+                <a16:creationId xmlns:a16="http://schemas.microsoft.com/office/drawing/2014/main" id="{37E8E98B-FF77-45AF-B726-8E6D315B4593}"/>
+              </a:ext>
+            </a:extLst>
+          </p:cNvPr>
+          <p:cNvSpPr>
+            <a:spLocks noGrp="1"/>
+          </p:cNvSpPr>
+          <p:nvPr>
+            <p:ph idx="1"/>
+          </p:nvPr>
+        </p:nvSpPr>
+        <p:spPr/>
+        <p:txBody>
+          <a:bodyPr/>
+          <a:lstStyle/>
+          <a:p>
+            <a:r>
+              <a:rPr lang="hu-HU" dirty="0">
+                <a:solidFill>
+                  <a:schemeClr val="bg1"/>
+                </a:solidFill>
+                <a:latin typeface="Times New Roman" panose="02020603050405020304" pitchFamily="18" charset="0"/>
+                <a:cs typeface="Times New Roman" panose="02020603050405020304" pitchFamily="18" charset="0"/>
+              </a:rPr>
+              <a:t>Automatizált API tesztek futtatása (</a:t>
+            </a:r>
+            <a:r>
+              <a:rPr lang="hu-HU" dirty="0" err="1">
+                <a:solidFill>
+                  <a:schemeClr val="bg1"/>
+                </a:solidFill>
+                <a:latin typeface="Times New Roman" panose="02020603050405020304" pitchFamily="18" charset="0"/>
+                <a:cs typeface="Times New Roman" panose="02020603050405020304" pitchFamily="18" charset="0"/>
+              </a:rPr>
+              <a:t>Laravel</a:t>
+            </a:r>
+            <a:r>
+              <a:rPr lang="hu-HU" dirty="0">
+                <a:solidFill>
+                  <a:schemeClr val="bg1"/>
+                </a:solidFill>
+                <a:latin typeface="Times New Roman" panose="02020603050405020304" pitchFamily="18" charset="0"/>
+                <a:cs typeface="Times New Roman" panose="02020603050405020304" pitchFamily="18" charset="0"/>
+              </a:rPr>
+              <a:t> </a:t>
+            </a:r>
+            <a:r>
+              <a:rPr lang="hu-HU" dirty="0" err="1">
+                <a:solidFill>
+                  <a:schemeClr val="bg1"/>
+                </a:solidFill>
+                <a:latin typeface="Times New Roman" panose="02020603050405020304" pitchFamily="18" charset="0"/>
+                <a:cs typeface="Times New Roman" panose="02020603050405020304" pitchFamily="18" charset="0"/>
+              </a:rPr>
+              <a:t>Artisan</a:t>
+            </a:r>
+            <a:r>
+              <a:rPr lang="hu-HU" dirty="0">
+                <a:solidFill>
+                  <a:schemeClr val="bg1"/>
+                </a:solidFill>
+                <a:latin typeface="Times New Roman" panose="02020603050405020304" pitchFamily="18" charset="0"/>
+                <a:cs typeface="Times New Roman" panose="02020603050405020304" pitchFamily="18" charset="0"/>
+              </a:rPr>
+              <a:t>)</a:t>
+            </a:r>
+          </a:p>
+          <a:p>
+            <a:r>
+              <a:rPr lang="hu-HU" dirty="0">
+                <a:solidFill>
+                  <a:schemeClr val="bg1"/>
+                </a:solidFill>
+                <a:latin typeface="Times New Roman" panose="02020603050405020304" pitchFamily="18" charset="0"/>
+                <a:cs typeface="Times New Roman" panose="02020603050405020304" pitchFamily="18" charset="0"/>
+              </a:rPr>
+              <a:t>Minden </a:t>
+            </a:r>
+            <a:r>
+              <a:rPr lang="hu-HU" dirty="0" err="1">
+                <a:solidFill>
+                  <a:schemeClr val="bg1"/>
+                </a:solidFill>
+                <a:latin typeface="Times New Roman" panose="02020603050405020304" pitchFamily="18" charset="0"/>
+                <a:cs typeface="Times New Roman" panose="02020603050405020304" pitchFamily="18" charset="0"/>
+              </a:rPr>
+              <a:t>endpoint</a:t>
+            </a:r>
+            <a:r>
+              <a:rPr lang="hu-HU" dirty="0">
+                <a:solidFill>
+                  <a:schemeClr val="bg1"/>
+                </a:solidFill>
+                <a:latin typeface="Times New Roman" panose="02020603050405020304" pitchFamily="18" charset="0"/>
+                <a:cs typeface="Times New Roman" panose="02020603050405020304" pitchFamily="18" charset="0"/>
+              </a:rPr>
+              <a:t> külön </a:t>
+            </a:r>
+            <a:r>
+              <a:rPr lang="hu-HU" dirty="0" err="1">
+                <a:solidFill>
+                  <a:schemeClr val="bg1"/>
+                </a:solidFill>
+                <a:latin typeface="Times New Roman" panose="02020603050405020304" pitchFamily="18" charset="0"/>
+                <a:cs typeface="Times New Roman" panose="02020603050405020304" pitchFamily="18" charset="0"/>
+              </a:rPr>
+              <a:t>validálva</a:t>
+            </a:r>
+            <a:endParaRPr lang="hu-HU" dirty="0">
+              <a:solidFill>
+                <a:schemeClr val="bg1"/>
+              </a:solidFill>
+              <a:latin typeface="Times New Roman" panose="02020603050405020304" pitchFamily="18" charset="0"/>
+              <a:cs typeface="Times New Roman" panose="02020603050405020304" pitchFamily="18" charset="0"/>
+            </a:endParaRPr>
+          </a:p>
+          <a:p>
+            <a:r>
+              <a:rPr lang="hu-HU" dirty="0">
+                <a:solidFill>
+                  <a:schemeClr val="bg1"/>
+                </a:solidFill>
+                <a:latin typeface="Times New Roman" panose="02020603050405020304" pitchFamily="18" charset="0"/>
+                <a:cs typeface="Times New Roman" panose="02020603050405020304" pitchFamily="18" charset="0"/>
+              </a:rPr>
+              <a:t>Hibakezelés és </a:t>
+            </a:r>
+            <a:r>
+              <a:rPr lang="hu-HU" dirty="0" err="1">
+                <a:solidFill>
+                  <a:schemeClr val="bg1"/>
+                </a:solidFill>
+                <a:latin typeface="Times New Roman" panose="02020603050405020304" pitchFamily="18" charset="0"/>
+                <a:cs typeface="Times New Roman" panose="02020603050405020304" pitchFamily="18" charset="0"/>
+              </a:rPr>
+              <a:t>rate</a:t>
+            </a:r>
+            <a:r>
+              <a:rPr lang="hu-HU" dirty="0">
+                <a:solidFill>
+                  <a:schemeClr val="bg1"/>
+                </a:solidFill>
+                <a:latin typeface="Times New Roman" panose="02020603050405020304" pitchFamily="18" charset="0"/>
+                <a:cs typeface="Times New Roman" panose="02020603050405020304" pitchFamily="18" charset="0"/>
+              </a:rPr>
+              <a:t> limit is tesztelve</a:t>
+            </a:r>
+          </a:p>
+          <a:p>
+            <a:r>
+              <a:rPr lang="hu-HU" dirty="0">
+                <a:solidFill>
+                  <a:schemeClr val="bg1"/>
+                </a:solidFill>
+                <a:latin typeface="Times New Roman" panose="02020603050405020304" pitchFamily="18" charset="0"/>
+                <a:cs typeface="Times New Roman" panose="02020603050405020304" pitchFamily="18" charset="0"/>
+              </a:rPr>
+              <a:t>25 teszt, 129 ellenőrzés → minden sikeres</a:t>
+            </a:r>
+          </a:p>
+          <a:p>
+            <a:r>
+              <a:rPr lang="hu-HU" dirty="0">
+                <a:solidFill>
+                  <a:schemeClr val="bg1"/>
+                </a:solidFill>
+                <a:latin typeface="Times New Roman" panose="02020603050405020304" pitchFamily="18" charset="0"/>
+                <a:cs typeface="Times New Roman" panose="02020603050405020304" pitchFamily="18" charset="0"/>
+              </a:rPr>
+              <a:t>Gyors visszajelzés fejlesztés közben</a:t>
+            </a:r>
+          </a:p>
+        </p:txBody>
+      </p:sp>
+      <p:pic>
+        <p:nvPicPr>
+          <p:cNvPr id="4" name="Kép 3">
+            <a:extLst>
+              <a:ext uri="{FF2B5EF4-FFF2-40B4-BE49-F238E27FC236}">
+                <a16:creationId xmlns:a16="http://schemas.microsoft.com/office/drawing/2014/main" id="{58A924F7-ECFE-48E4-8CF6-A10FD1DD425C}"/>
+              </a:ext>
+            </a:extLst>
+          </p:cNvPr>
+          <p:cNvPicPr>
+            <a:picLocks noChangeAspect="1"/>
+          </p:cNvPicPr>
+          <p:nvPr/>
+        </p:nvPicPr>
+        <p:blipFill>
+          <a:blip r:embed="rId4">
+            <a:extLst>
+              <a:ext uri="{28A0092B-C50C-407E-A947-70E740481C1C}">
+                <a14:useLocalDpi xmlns:a14="http://schemas.microsoft.com/office/drawing/2010/main" val="0"/>
+              </a:ext>
+            </a:extLst>
+          </a:blip>
+          <a:stretch>
+            <a:fillRect/>
+          </a:stretch>
+        </p:blipFill>
+        <p:spPr>
+          <a:xfrm>
+            <a:off x="0" y="5812553"/>
+            <a:ext cx="1045447" cy="1045447"/>
+          </a:xfrm>
+          <a:prstGeom prst="rect">
+            <a:avLst/>
+          </a:prstGeom>
+        </p:spPr>
+      </p:pic>
+      <p:pic>
+        <p:nvPicPr>
+          <p:cNvPr id="10" name="Kép 9">
+            <a:extLst>
+              <a:ext uri="{FF2B5EF4-FFF2-40B4-BE49-F238E27FC236}">
+                <a16:creationId xmlns:a16="http://schemas.microsoft.com/office/drawing/2014/main" id="{DE7ED009-EA02-43F7-968A-5BA416DD895D}"/>
+              </a:ext>
+            </a:extLst>
+          </p:cNvPr>
+          <p:cNvPicPr>
+            <a:picLocks noChangeAspect="1"/>
+          </p:cNvPicPr>
+          <p:nvPr/>
+        </p:nvPicPr>
+        <p:blipFill>
+          <a:blip r:embed="rId5">
+            <a:extLst>
+              <a:ext uri="{28A0092B-C50C-407E-A947-70E740481C1C}">
+                <a14:useLocalDpi xmlns:a14="http://schemas.microsoft.com/office/drawing/2010/main" val="0"/>
+              </a:ext>
+            </a:extLst>
+          </a:blip>
+          <a:stretch>
+            <a:fillRect/>
+          </a:stretch>
+        </p:blipFill>
+        <p:spPr>
+          <a:xfrm>
+            <a:off x="7942728" y="3528933"/>
+            <a:ext cx="3711389" cy="2806343"/>
+          </a:xfrm>
+          <a:prstGeom prst="rect">
+            <a:avLst/>
+          </a:prstGeom>
+        </p:spPr>
+      </p:pic>
+    </p:spTree>
+    <p:extLst>
+      <p:ext uri="{BB962C8B-B14F-4D97-AF65-F5344CB8AC3E}">
+        <p14:creationId xmlns:p14="http://schemas.microsoft.com/office/powerpoint/2010/main" val="1588990733"/>
+      </p:ext>
+    </p:extLst>
+  </p:cSld>
+  <p:clrMapOvr>
+    <a:masterClrMapping/>
+  </p:clrMapOvr>
+  <mc:AlternateContent xmlns:mc="http://schemas.openxmlformats.org/markup-compatibility/2006" xmlns:p14="http://schemas.microsoft.com/office/powerpoint/2010/main">
+    <mc:Choice Requires="p14">
+      <p:transition spd="med" p14:dur="700">
+        <p:fade/>
+      </p:transition>
+    </mc:Choice>
+    <mc:Fallback xmlns="">
+      <p:transition spd="med">
+        <p:fade/>
+      </p:transition>
+    </mc:Fallback>
+  </mc:AlternateContent>
+  <p:timing>
+    <p:tnLst>
+      <p:par>
+        <p:cTn id="1" dur="indefinite" restart="never" nodeType="tmRoot">
+          <p:childTnLst>
+            <p:seq concurrent="1" nextAc="seek">
+              <p:cTn id="2" dur="indefinite" nodeType="mainSeq">
+                <p:childTnLst>
+                  <p:par>
+                    <p:cTn id="3" fill="hold">
+                      <p:stCondLst>
+                        <p:cond delay="indefinite"/>
+                      </p:stCondLst>
+                      <p:childTnLst>
+                        <p:par>
+                          <p:cTn id="4" fill="hold">
+                            <p:stCondLst>
+                              <p:cond delay="0"/>
+                            </p:stCondLst>
+                            <p:childTnLst>
+                              <p:par>
+                                <p:cTn id="5" presetID="10" presetClass="entr" presetSubtype="0" fill="hold" grpId="0" nodeType="clickEffect">
+                                  <p:stCondLst>
+                                    <p:cond delay="0"/>
+                                  </p:stCondLst>
+                                  <p:childTnLst>
+                                    <p:set>
+                                      <p:cBhvr>
+                                        <p:cTn id="6" dur="1" fill="hold">
+                                          <p:stCondLst>
+                                            <p:cond delay="0"/>
+                                          </p:stCondLst>
+                                        </p:cTn>
+                                        <p:tgtEl>
+                                          <p:spTgt spid="2"/>
+                                        </p:tgtEl>
+                                        <p:attrNameLst>
+                                          <p:attrName>style.visibility</p:attrName>
+                                        </p:attrNameLst>
+                                      </p:cBhvr>
+                                      <p:to>
+                                        <p:strVal val="visible"/>
+                                      </p:to>
+                                    </p:set>
+                                    <p:animEffect transition="in" filter="fade">
+                                      <p:cBhvr>
+                                        <p:cTn id="7" dur="500"/>
+                                        <p:tgtEl>
+                                          <p:spTgt spid="2"/>
+                                        </p:tgtEl>
+                                      </p:cBhvr>
+                                    </p:animEffect>
+                                  </p:childTnLst>
+                                </p:cTn>
+                              </p:par>
+                            </p:childTnLst>
+                          </p:cTn>
+                        </p:par>
+                      </p:childTnLst>
+                    </p:cTn>
+                  </p:par>
+                  <p:par>
+                    <p:cTn id="8" fill="hold">
+                      <p:stCondLst>
+                        <p:cond delay="indefinite"/>
+                      </p:stCondLst>
+                      <p:childTnLst>
+                        <p:par>
+                          <p:cTn id="9" fill="hold">
+                            <p:stCondLst>
+                              <p:cond delay="0"/>
+                            </p:stCondLst>
+                            <p:childTnLst>
+                              <p:par>
+                                <p:cTn id="10" presetID="10" presetClass="entr" presetSubtype="0" fill="hold" nodeType="clickEffect">
+                                  <p:stCondLst>
+                                    <p:cond delay="0"/>
+                                  </p:stCondLst>
+                                  <p:childTnLst>
+                                    <p:set>
+                                      <p:cBhvr>
+                                        <p:cTn id="11" dur="1" fill="hold">
+                                          <p:stCondLst>
+                                            <p:cond delay="0"/>
+                                          </p:stCondLst>
+                                        </p:cTn>
+                                        <p:tgtEl>
+                                          <p:spTgt spid="3">
+                                            <p:txEl>
+                                              <p:pRg st="0" end="0"/>
+                                            </p:txEl>
+                                          </p:spTgt>
+                                        </p:tgtEl>
+                                        <p:attrNameLst>
+                                          <p:attrName>style.visibility</p:attrName>
+                                        </p:attrNameLst>
+                                      </p:cBhvr>
+                                      <p:to>
+                                        <p:strVal val="visible"/>
+                                      </p:to>
+                                    </p:set>
+                                    <p:animEffect transition="in" filter="fade">
+                                      <p:cBhvr>
+                                        <p:cTn id="12" dur="500"/>
+                                        <p:tgtEl>
+                                          <p:spTgt spid="3">
+                                            <p:txEl>
+                                              <p:pRg st="0" end="0"/>
+                                            </p:txEl>
+                                          </p:spTgt>
+                                        </p:tgtEl>
+                                      </p:cBhvr>
+                                    </p:animEffect>
+                                  </p:childTnLst>
+                                </p:cTn>
+                              </p:par>
+                              <p:par>
+                                <p:cTn id="13" presetID="10" presetClass="entr" presetSubtype="0" fill="hold" nodeType="withEffect">
+                                  <p:stCondLst>
+                                    <p:cond delay="0"/>
+                                  </p:stCondLst>
+                                  <p:childTnLst>
+                                    <p:set>
+                                      <p:cBhvr>
+                                        <p:cTn id="14" dur="1" fill="hold">
+                                          <p:stCondLst>
+                                            <p:cond delay="0"/>
+                                          </p:stCondLst>
+                                        </p:cTn>
+                                        <p:tgtEl>
+                                          <p:spTgt spid="3">
+                                            <p:txEl>
+                                              <p:pRg st="1" end="1"/>
+                                            </p:txEl>
+                                          </p:spTgt>
+                                        </p:tgtEl>
+                                        <p:attrNameLst>
+                                          <p:attrName>style.visibility</p:attrName>
+                                        </p:attrNameLst>
+                                      </p:cBhvr>
+                                      <p:to>
+                                        <p:strVal val="visible"/>
+                                      </p:to>
+                                    </p:set>
+                                    <p:animEffect transition="in" filter="fade">
+                                      <p:cBhvr>
+                                        <p:cTn id="15" dur="500"/>
+                                        <p:tgtEl>
+                                          <p:spTgt spid="3">
+                                            <p:txEl>
+                                              <p:pRg st="1" end="1"/>
+                                            </p:txEl>
+                                          </p:spTgt>
+                                        </p:tgtEl>
+                                      </p:cBhvr>
+                                    </p:animEffect>
+                                  </p:childTnLst>
+                                </p:cTn>
+                              </p:par>
+                              <p:par>
+                                <p:cTn id="16" presetID="10" presetClass="entr" presetSubtype="0" fill="hold" nodeType="withEffect">
+                                  <p:stCondLst>
+                                    <p:cond delay="0"/>
+                                  </p:stCondLst>
+                                  <p:childTnLst>
+                                    <p:set>
+                                      <p:cBhvr>
+                                        <p:cTn id="17" dur="1" fill="hold">
+                                          <p:stCondLst>
+                                            <p:cond delay="0"/>
+                                          </p:stCondLst>
+                                        </p:cTn>
+                                        <p:tgtEl>
+                                          <p:spTgt spid="3">
+                                            <p:txEl>
+                                              <p:pRg st="2" end="2"/>
+                                            </p:txEl>
+                                          </p:spTgt>
+                                        </p:tgtEl>
+                                        <p:attrNameLst>
+                                          <p:attrName>style.visibility</p:attrName>
+                                        </p:attrNameLst>
+                                      </p:cBhvr>
+                                      <p:to>
+                                        <p:strVal val="visible"/>
+                                      </p:to>
+                                    </p:set>
+                                    <p:animEffect transition="in" filter="fade">
+                                      <p:cBhvr>
+                                        <p:cTn id="18" dur="500"/>
+                                        <p:tgtEl>
+                                          <p:spTgt spid="3">
+                                            <p:txEl>
+                                              <p:pRg st="2" end="2"/>
+                                            </p:txEl>
+                                          </p:spTgt>
+                                        </p:tgtEl>
+                                      </p:cBhvr>
+                                    </p:animEffect>
+                                  </p:childTnLst>
+                                </p:cTn>
+                              </p:par>
+                              <p:par>
+                                <p:cTn id="19" presetID="10" presetClass="entr" presetSubtype="0" fill="hold" nodeType="withEffect">
+                                  <p:stCondLst>
+                                    <p:cond delay="0"/>
+                                  </p:stCondLst>
+                                  <p:childTnLst>
+                                    <p:set>
+                                      <p:cBhvr>
+                                        <p:cTn id="20" dur="1" fill="hold">
+                                          <p:stCondLst>
+                                            <p:cond delay="0"/>
+                                          </p:stCondLst>
+                                        </p:cTn>
+                                        <p:tgtEl>
+                                          <p:spTgt spid="3">
+                                            <p:txEl>
+                                              <p:pRg st="3" end="3"/>
+                                            </p:txEl>
+                                          </p:spTgt>
+                                        </p:tgtEl>
+                                        <p:attrNameLst>
+                                          <p:attrName>style.visibility</p:attrName>
+                                        </p:attrNameLst>
+                                      </p:cBhvr>
+                                      <p:to>
+                                        <p:strVal val="visible"/>
+                                      </p:to>
+                                    </p:set>
+                                    <p:animEffect transition="in" filter="fade">
+                                      <p:cBhvr>
+                                        <p:cTn id="21" dur="500"/>
+                                        <p:tgtEl>
+                                          <p:spTgt spid="3">
+                                            <p:txEl>
+                                              <p:pRg st="3" end="3"/>
+                                            </p:txEl>
+                                          </p:spTgt>
+                                        </p:tgtEl>
+                                      </p:cBhvr>
+                                    </p:animEffect>
+                                  </p:childTnLst>
+                                </p:cTn>
+                              </p:par>
+                              <p:par>
+                                <p:cTn id="22" presetID="10" presetClass="entr" presetSubtype="0" fill="hold" nodeType="withEffect">
+                                  <p:stCondLst>
+                                    <p:cond delay="0"/>
+                                  </p:stCondLst>
+                                  <p:childTnLst>
+                                    <p:set>
+                                      <p:cBhvr>
+                                        <p:cTn id="23" dur="1" fill="hold">
+                                          <p:stCondLst>
+                                            <p:cond delay="0"/>
+                                          </p:stCondLst>
+                                        </p:cTn>
+                                        <p:tgtEl>
+                                          <p:spTgt spid="3">
+                                            <p:txEl>
+                                              <p:pRg st="4" end="4"/>
+                                            </p:txEl>
+                                          </p:spTgt>
+                                        </p:tgtEl>
+                                        <p:attrNameLst>
+                                          <p:attrName>style.visibility</p:attrName>
+                                        </p:attrNameLst>
+                                      </p:cBhvr>
+                                      <p:to>
+                                        <p:strVal val="visible"/>
+                                      </p:to>
+                                    </p:set>
+                                    <p:animEffect transition="in" filter="fade">
+                                      <p:cBhvr>
+                                        <p:cTn id="24" dur="500"/>
+                                        <p:tgtEl>
+                                          <p:spTgt spid="3">
+                                            <p:txEl>
+                                              <p:pRg st="4" end="4"/>
+                                            </p:txEl>
+                                          </p:spTgt>
+                                        </p:tgtEl>
+                                      </p:cBhvr>
+                                    </p:animEffect>
+                                  </p:childTnLst>
+                                </p:cTn>
+                              </p:par>
+                              <p:par>
+                                <p:cTn id="25" presetID="10" presetClass="entr" presetSubtype="0" fill="hold" nodeType="withEffect">
+                                  <p:stCondLst>
+                                    <p:cond delay="0"/>
+                                  </p:stCondLst>
+                                  <p:childTnLst>
+                                    <p:set>
+                                      <p:cBhvr>
+                                        <p:cTn id="26" dur="1" fill="hold">
+                                          <p:stCondLst>
+                                            <p:cond delay="0"/>
+                                          </p:stCondLst>
+                                        </p:cTn>
+                                        <p:tgtEl>
+                                          <p:spTgt spid="10"/>
+                                        </p:tgtEl>
+                                        <p:attrNameLst>
+                                          <p:attrName>style.visibility</p:attrName>
+                                        </p:attrNameLst>
+                                      </p:cBhvr>
+                                      <p:to>
+                                        <p:strVal val="visible"/>
+                                      </p:to>
+                                    </p:set>
+                                    <p:animEffect transition="in" filter="fade">
+                                      <p:cBhvr>
+                                        <p:cTn id="27" dur="500"/>
+                                        <p:tgtEl>
+                                          <p:spTgt spid="10"/>
+                                        </p:tgtEl>
+                                      </p:cBhvr>
+                                    </p:animEffect>
+                                  </p:childTnLst>
+                                </p:cTn>
+                              </p:par>
+                            </p:childTnLst>
+                          </p:cTn>
+                        </p:par>
+                      </p:childTnLst>
+                    </p:cTn>
+                  </p:par>
+                </p:childTnLst>
+              </p:cTn>
+              <p:prevCondLst>
+                <p:cond evt="onPrev" delay="0">
+                  <p:tgtEl>
+                    <p:sldTgt/>
+                  </p:tgtEl>
+                </p:cond>
+              </p:prevCondLst>
+              <p:nextCondLst>
+                <p:cond evt="onNext" delay="0">
+                  <p:tgtEl>
+                    <p:sldTgt/>
+                  </p:tgtEl>
+                </p:cond>
+              </p:nextCondLst>
+            </p:seq>
+          </p:childTnLst>
+        </p:cTn>
+      </p:par>
+    </p:tnLst>
+    <p:bldLst>
+      <p:bldP spid="2" grpId="0"/>
     </p:bldLst>
   </p:timing>
 </p:sld>

--- a/Dokumentáció/StockMaster_Prezentacio.pptx
+++ b/Dokumentáció/StockMaster_Prezentacio.pptx
@@ -9584,6 +9584,42 @@
           </a:prstGeom>
         </p:spPr>
       </p:pic>
+      <p:pic>
+        <p:nvPicPr>
+          <p:cNvPr id="7" name="Kép 6">
+            <a:extLst>
+              <a:ext uri="{FF2B5EF4-FFF2-40B4-BE49-F238E27FC236}">
+                <a16:creationId xmlns:a16="http://schemas.microsoft.com/office/drawing/2014/main" id="{B9385C36-EB73-4BA3-83F1-04A718A03DBA}"/>
+              </a:ext>
+            </a:extLst>
+          </p:cNvPr>
+          <p:cNvPicPr>
+            <a:picLocks noChangeAspect="1"/>
+          </p:cNvPicPr>
+          <p:nvPr/>
+        </p:nvPicPr>
+        <p:blipFill>
+          <a:blip r:embed="rId5">
+            <a:extLst>
+              <a:ext uri="{28A0092B-C50C-407E-A947-70E740481C1C}">
+                <a14:useLocalDpi xmlns:a14="http://schemas.microsoft.com/office/drawing/2010/main" val="0"/>
+              </a:ext>
+            </a:extLst>
+          </a:blip>
+          <a:stretch>
+            <a:fillRect/>
+          </a:stretch>
+        </p:blipFill>
+        <p:spPr>
+          <a:xfrm>
+            <a:off x="3299011" y="4001294"/>
+            <a:ext cx="5145741" cy="2308746"/>
+          </a:xfrm>
+          <a:prstGeom prst="rect">
+            <a:avLst/>
+          </a:prstGeom>
+        </p:spPr>
+      </p:pic>
     </p:spTree>
     <p:extLst>
       <p:ext uri="{BB962C8B-B14F-4D97-AF65-F5344CB8AC3E}">
@@ -9759,6 +9795,41 @@
                                               <p:pRg st="1" end="1"/>
                                             </p:txEl>
                                           </p:spTgt>
+                                        </p:tgtEl>
+                                      </p:cBhvr>
+                                    </p:animEffect>
+                                  </p:childTnLst>
+                                </p:cTn>
+                              </p:par>
+                              <p:par>
+                                <p:cTn id="16" presetID="10" presetClass="entr" presetSubtype="0" fill="hold" nodeType="withEffect">
+                                  <p:stCondLst>
+                                    <p:cond delay="0"/>
+                                  </p:stCondLst>
+                                  <p:childTnLst>
+                                    <p:set>
+                                      <p:cBhvr>
+                                        <p:cTn id="17" dur="1" fill="hold">
+                                          <p:stCondLst>
+                                            <p:cond delay="0"/>
+                                          </p:stCondLst>
+                                        </p:cTn>
+                                        <p:tgtEl>
+                                          <p:spTgt spid="7"/>
+                                        </p:tgtEl>
+                                        <p:attrNameLst>
+                                          <p:attrName>style.visibility</p:attrName>
+                                        </p:attrNameLst>
+                                      </p:cBhvr>
+                                      <p:to>
+                                        <p:strVal val="visible"/>
+                                      </p:to>
+                                    </p:set>
+                                    <p:animEffect transition="in" filter="fade">
+                                      <p:cBhvr>
+                                        <p:cTn id="18" dur="500"/>
+                                        <p:tgtEl>
+                                          <p:spTgt spid="7"/>
                                         </p:tgtEl>
                                       </p:cBhvr>
                                     </p:animEffect>
